--- a/Презентация к защите.pptx
+++ b/Презентация к защите.pptx
@@ -137,7 +137,7 @@
           <p:cNvPr id="2" name="Заголовок 1">
             <a:extLst>
               <a:ext uri="{FF2B5EF4-FFF2-40B4-BE49-F238E27FC236}">
-                <a16:creationId xmlns:a16="http://schemas.microsoft.com/office/drawing/2014/main" id="{83BE7325-DDAB-DE65-874B-03EF5DC46C4F}"/>
+                <a16:creationId xmlns:a16="http://schemas.microsoft.com/office/drawing/2014/main" id="{EE94B20A-B01F-21FA-E836-7D6BB49EA453}"/>
               </a:ext>
             </a:extLst>
           </p:cNvPr>
@@ -174,7 +174,7 @@
           <p:cNvPr id="3" name="Подзаголовок 2">
             <a:extLst>
               <a:ext uri="{FF2B5EF4-FFF2-40B4-BE49-F238E27FC236}">
-                <a16:creationId xmlns:a16="http://schemas.microsoft.com/office/drawing/2014/main" id="{8147867F-3AA7-1589-26C4-246B79F72A07}"/>
+                <a16:creationId xmlns:a16="http://schemas.microsoft.com/office/drawing/2014/main" id="{4578432F-DB23-4B23-719D-54E46714234E}"/>
               </a:ext>
             </a:extLst>
           </p:cNvPr>
@@ -244,7 +244,7 @@
           <p:cNvPr id="4" name="Дата 3">
             <a:extLst>
               <a:ext uri="{FF2B5EF4-FFF2-40B4-BE49-F238E27FC236}">
-                <a16:creationId xmlns:a16="http://schemas.microsoft.com/office/drawing/2014/main" id="{701ECDA0-09C1-C317-89CB-081EA3E8EC0A}"/>
+                <a16:creationId xmlns:a16="http://schemas.microsoft.com/office/drawing/2014/main" id="{947C741E-FEDF-EBD2-854F-FCE642255DB5}"/>
               </a:ext>
             </a:extLst>
           </p:cNvPr>
@@ -260,9 +260,9 @@
           <a:bodyPr/>
           <a:lstStyle/>
           <a:p>
-            <a:fld id="{44447AD5-A860-4F74-86B1-0034733D12B0}" type="datetimeFigureOut">
+            <a:fld id="{FECAD547-0098-4F95-A3E6-B35FDCDAFEB6}" type="datetimeFigureOut">
               <a:rPr lang="ru-RU" smtClean="0"/>
-              <a:t>21.10.2026</a:t>
+              <a:t>22.10.2026</a:t>
             </a:fld>
             <a:endParaRPr lang="ru-RU"/>
           </a:p>
@@ -273,7 +273,7 @@
           <p:cNvPr id="5" name="Нижний колонтитул 4">
             <a:extLst>
               <a:ext uri="{FF2B5EF4-FFF2-40B4-BE49-F238E27FC236}">
-                <a16:creationId xmlns:a16="http://schemas.microsoft.com/office/drawing/2014/main" id="{C60B8203-7EFE-8215-5141-12B284AC9AB9}"/>
+                <a16:creationId xmlns:a16="http://schemas.microsoft.com/office/drawing/2014/main" id="{AF337277-ED54-A559-296C-2FFA8A5AF8A5}"/>
               </a:ext>
             </a:extLst>
           </p:cNvPr>
@@ -298,7 +298,7 @@
           <p:cNvPr id="6" name="Номер слайда 5">
             <a:extLst>
               <a:ext uri="{FF2B5EF4-FFF2-40B4-BE49-F238E27FC236}">
-                <a16:creationId xmlns:a16="http://schemas.microsoft.com/office/drawing/2014/main" id="{A557A8E2-E821-B079-EDD6-3BBBD6189BD0}"/>
+                <a16:creationId xmlns:a16="http://schemas.microsoft.com/office/drawing/2014/main" id="{FFA792D4-1D6E-BD80-D41E-CE700217E6DE}"/>
               </a:ext>
             </a:extLst>
           </p:cNvPr>
@@ -314,7 +314,7 @@
           <a:bodyPr/>
           <a:lstStyle/>
           <a:p>
-            <a:fld id="{D99F9743-DED8-4E9C-BD89-EA992B299253}" type="slidenum">
+            <a:fld id="{14248956-2374-48B4-B20B-A1021DAEFE0D}" type="slidenum">
               <a:rPr lang="ru-RU" smtClean="0"/>
               <a:t>‹#›</a:t>
             </a:fld>
@@ -325,7 +325,7 @@
     </p:spTree>
     <p:extLst>
       <p:ext uri="{BB962C8B-B14F-4D97-AF65-F5344CB8AC3E}">
-        <p14:creationId xmlns:p14="http://schemas.microsoft.com/office/powerpoint/2010/main" val="3565682924"/>
+        <p14:creationId xmlns:p14="http://schemas.microsoft.com/office/powerpoint/2010/main" val="1701829731"/>
       </p:ext>
     </p:extLst>
   </p:cSld>
@@ -357,7 +357,7 @@
           <p:cNvPr id="2" name="Заголовок 1">
             <a:extLst>
               <a:ext uri="{FF2B5EF4-FFF2-40B4-BE49-F238E27FC236}">
-                <a16:creationId xmlns:a16="http://schemas.microsoft.com/office/drawing/2014/main" id="{DB800919-BEDF-80C1-ABBD-49049895A560}"/>
+                <a16:creationId xmlns:a16="http://schemas.microsoft.com/office/drawing/2014/main" id="{2EE9AF7F-CDE3-E01A-70F3-33BAD59B0F9C}"/>
               </a:ext>
             </a:extLst>
           </p:cNvPr>
@@ -385,7 +385,7 @@
           <p:cNvPr id="3" name="Вертикальный текст 2">
             <a:extLst>
               <a:ext uri="{FF2B5EF4-FFF2-40B4-BE49-F238E27FC236}">
-                <a16:creationId xmlns:a16="http://schemas.microsoft.com/office/drawing/2014/main" id="{800219FD-FEF2-C24F-0D25-4A7A0519C91C}"/>
+                <a16:creationId xmlns:a16="http://schemas.microsoft.com/office/drawing/2014/main" id="{D7EA22BC-7755-9735-3C1C-1847B3A8C3E6}"/>
               </a:ext>
             </a:extLst>
           </p:cNvPr>
@@ -442,7 +442,7 @@
           <p:cNvPr id="4" name="Дата 3">
             <a:extLst>
               <a:ext uri="{FF2B5EF4-FFF2-40B4-BE49-F238E27FC236}">
-                <a16:creationId xmlns:a16="http://schemas.microsoft.com/office/drawing/2014/main" id="{14D6CA79-6D3A-1FE2-30A0-EEC3236C1E0D}"/>
+                <a16:creationId xmlns:a16="http://schemas.microsoft.com/office/drawing/2014/main" id="{EB03F557-D6B8-B4CA-D5B3-A40779BFAE91}"/>
               </a:ext>
             </a:extLst>
           </p:cNvPr>
@@ -458,9 +458,9 @@
           <a:bodyPr/>
           <a:lstStyle/>
           <a:p>
-            <a:fld id="{44447AD5-A860-4F74-86B1-0034733D12B0}" type="datetimeFigureOut">
+            <a:fld id="{FECAD547-0098-4F95-A3E6-B35FDCDAFEB6}" type="datetimeFigureOut">
               <a:rPr lang="ru-RU" smtClean="0"/>
-              <a:t>21.10.2026</a:t>
+              <a:t>22.10.2026</a:t>
             </a:fld>
             <a:endParaRPr lang="ru-RU"/>
           </a:p>
@@ -471,7 +471,7 @@
           <p:cNvPr id="5" name="Нижний колонтитул 4">
             <a:extLst>
               <a:ext uri="{FF2B5EF4-FFF2-40B4-BE49-F238E27FC236}">
-                <a16:creationId xmlns:a16="http://schemas.microsoft.com/office/drawing/2014/main" id="{AD8D9B5D-3577-C09D-C606-C4EEEE446877}"/>
+                <a16:creationId xmlns:a16="http://schemas.microsoft.com/office/drawing/2014/main" id="{5F1D34D3-F6F8-A691-4E6C-62519F96B251}"/>
               </a:ext>
             </a:extLst>
           </p:cNvPr>
@@ -496,7 +496,7 @@
           <p:cNvPr id="6" name="Номер слайда 5">
             <a:extLst>
               <a:ext uri="{FF2B5EF4-FFF2-40B4-BE49-F238E27FC236}">
-                <a16:creationId xmlns:a16="http://schemas.microsoft.com/office/drawing/2014/main" id="{70E230C2-A15D-AAD6-1C2D-39E12F013282}"/>
+                <a16:creationId xmlns:a16="http://schemas.microsoft.com/office/drawing/2014/main" id="{240DE742-0379-3B64-0771-C8D4F32EB16E}"/>
               </a:ext>
             </a:extLst>
           </p:cNvPr>
@@ -512,7 +512,7 @@
           <a:bodyPr/>
           <a:lstStyle/>
           <a:p>
-            <a:fld id="{D99F9743-DED8-4E9C-BD89-EA992B299253}" type="slidenum">
+            <a:fld id="{14248956-2374-48B4-B20B-A1021DAEFE0D}" type="slidenum">
               <a:rPr lang="ru-RU" smtClean="0"/>
               <a:t>‹#›</a:t>
             </a:fld>
@@ -523,7 +523,7 @@
     </p:spTree>
     <p:extLst>
       <p:ext uri="{BB962C8B-B14F-4D97-AF65-F5344CB8AC3E}">
-        <p14:creationId xmlns:p14="http://schemas.microsoft.com/office/powerpoint/2010/main" val="501709549"/>
+        <p14:creationId xmlns:p14="http://schemas.microsoft.com/office/powerpoint/2010/main" val="1908382336"/>
       </p:ext>
     </p:extLst>
   </p:cSld>
@@ -555,7 +555,7 @@
           <p:cNvPr id="2" name="Вертикальный заголовок 1">
             <a:extLst>
               <a:ext uri="{FF2B5EF4-FFF2-40B4-BE49-F238E27FC236}">
-                <a16:creationId xmlns:a16="http://schemas.microsoft.com/office/drawing/2014/main" id="{5A477D64-7C5F-C557-DB67-932354D34264}"/>
+                <a16:creationId xmlns:a16="http://schemas.microsoft.com/office/drawing/2014/main" id="{570455D2-9415-313D-B5A1-729324D5CDC0}"/>
               </a:ext>
             </a:extLst>
           </p:cNvPr>
@@ -588,7 +588,7 @@
           <p:cNvPr id="3" name="Вертикальный текст 2">
             <a:extLst>
               <a:ext uri="{FF2B5EF4-FFF2-40B4-BE49-F238E27FC236}">
-                <a16:creationId xmlns:a16="http://schemas.microsoft.com/office/drawing/2014/main" id="{69D9405D-00E7-195C-6B2A-9C16B93624AD}"/>
+                <a16:creationId xmlns:a16="http://schemas.microsoft.com/office/drawing/2014/main" id="{A60FB949-6E09-56BD-86B9-21A39907DB02}"/>
               </a:ext>
             </a:extLst>
           </p:cNvPr>
@@ -650,7 +650,7 @@
           <p:cNvPr id="4" name="Дата 3">
             <a:extLst>
               <a:ext uri="{FF2B5EF4-FFF2-40B4-BE49-F238E27FC236}">
-                <a16:creationId xmlns:a16="http://schemas.microsoft.com/office/drawing/2014/main" id="{74CCD867-E66C-8A06-BB9A-5A0EB04586E6}"/>
+                <a16:creationId xmlns:a16="http://schemas.microsoft.com/office/drawing/2014/main" id="{3D34B6E7-54AD-2DBA-E641-F6EE7A7285C0}"/>
               </a:ext>
             </a:extLst>
           </p:cNvPr>
@@ -666,9 +666,9 @@
           <a:bodyPr/>
           <a:lstStyle/>
           <a:p>
-            <a:fld id="{44447AD5-A860-4F74-86B1-0034733D12B0}" type="datetimeFigureOut">
+            <a:fld id="{FECAD547-0098-4F95-A3E6-B35FDCDAFEB6}" type="datetimeFigureOut">
               <a:rPr lang="ru-RU" smtClean="0"/>
-              <a:t>21.10.2026</a:t>
+              <a:t>22.10.2026</a:t>
             </a:fld>
             <a:endParaRPr lang="ru-RU"/>
           </a:p>
@@ -679,7 +679,7 @@
           <p:cNvPr id="5" name="Нижний колонтитул 4">
             <a:extLst>
               <a:ext uri="{FF2B5EF4-FFF2-40B4-BE49-F238E27FC236}">
-                <a16:creationId xmlns:a16="http://schemas.microsoft.com/office/drawing/2014/main" id="{C0032D20-E4A5-0C3C-B1BA-345B5B219E8A}"/>
+                <a16:creationId xmlns:a16="http://schemas.microsoft.com/office/drawing/2014/main" id="{3D5E8A28-3292-AA4A-A9FF-FD41BB7FD919}"/>
               </a:ext>
             </a:extLst>
           </p:cNvPr>
@@ -704,7 +704,7 @@
           <p:cNvPr id="6" name="Номер слайда 5">
             <a:extLst>
               <a:ext uri="{FF2B5EF4-FFF2-40B4-BE49-F238E27FC236}">
-                <a16:creationId xmlns:a16="http://schemas.microsoft.com/office/drawing/2014/main" id="{F0D54CD9-9C20-E737-AA83-0C1E9912F3E8}"/>
+                <a16:creationId xmlns:a16="http://schemas.microsoft.com/office/drawing/2014/main" id="{BBB35B90-9B41-D63E-4361-A2141E343F50}"/>
               </a:ext>
             </a:extLst>
           </p:cNvPr>
@@ -720,7 +720,7 @@
           <a:bodyPr/>
           <a:lstStyle/>
           <a:p>
-            <a:fld id="{D99F9743-DED8-4E9C-BD89-EA992B299253}" type="slidenum">
+            <a:fld id="{14248956-2374-48B4-B20B-A1021DAEFE0D}" type="slidenum">
               <a:rPr lang="ru-RU" smtClean="0"/>
               <a:t>‹#›</a:t>
             </a:fld>
@@ -731,7 +731,7 @@
     </p:spTree>
     <p:extLst>
       <p:ext uri="{BB962C8B-B14F-4D97-AF65-F5344CB8AC3E}">
-        <p14:creationId xmlns:p14="http://schemas.microsoft.com/office/powerpoint/2010/main" val="543163219"/>
+        <p14:creationId xmlns:p14="http://schemas.microsoft.com/office/powerpoint/2010/main" val="1147969438"/>
       </p:ext>
     </p:extLst>
   </p:cSld>
@@ -763,7 +763,7 @@
           <p:cNvPr id="2" name="Заголовок 1">
             <a:extLst>
               <a:ext uri="{FF2B5EF4-FFF2-40B4-BE49-F238E27FC236}">
-                <a16:creationId xmlns:a16="http://schemas.microsoft.com/office/drawing/2014/main" id="{A6F3B003-38AB-616E-C820-F363AA65A7BB}"/>
+                <a16:creationId xmlns:a16="http://schemas.microsoft.com/office/drawing/2014/main" id="{262D4BFD-C2DC-275B-4294-D81A3522467D}"/>
               </a:ext>
             </a:extLst>
           </p:cNvPr>
@@ -791,7 +791,7 @@
           <p:cNvPr id="3" name="Объект 2">
             <a:extLst>
               <a:ext uri="{FF2B5EF4-FFF2-40B4-BE49-F238E27FC236}">
-                <a16:creationId xmlns:a16="http://schemas.microsoft.com/office/drawing/2014/main" id="{94771D02-9A8F-44F5-F514-2294B4AB114D}"/>
+                <a16:creationId xmlns:a16="http://schemas.microsoft.com/office/drawing/2014/main" id="{E8D04246-4F6C-0F05-221A-567A323BF6F5}"/>
               </a:ext>
             </a:extLst>
           </p:cNvPr>
@@ -848,7 +848,7 @@
           <p:cNvPr id="4" name="Дата 3">
             <a:extLst>
               <a:ext uri="{FF2B5EF4-FFF2-40B4-BE49-F238E27FC236}">
-                <a16:creationId xmlns:a16="http://schemas.microsoft.com/office/drawing/2014/main" id="{0E5EB716-DA22-AC92-EAB2-CC29FF5605C1}"/>
+                <a16:creationId xmlns:a16="http://schemas.microsoft.com/office/drawing/2014/main" id="{84065619-40D9-3706-DC43-82098FAACAC0}"/>
               </a:ext>
             </a:extLst>
           </p:cNvPr>
@@ -864,9 +864,9 @@
           <a:bodyPr/>
           <a:lstStyle/>
           <a:p>
-            <a:fld id="{44447AD5-A860-4F74-86B1-0034733D12B0}" type="datetimeFigureOut">
+            <a:fld id="{FECAD547-0098-4F95-A3E6-B35FDCDAFEB6}" type="datetimeFigureOut">
               <a:rPr lang="ru-RU" smtClean="0"/>
-              <a:t>21.10.2026</a:t>
+              <a:t>22.10.2026</a:t>
             </a:fld>
             <a:endParaRPr lang="ru-RU"/>
           </a:p>
@@ -877,7 +877,7 @@
           <p:cNvPr id="5" name="Нижний колонтитул 4">
             <a:extLst>
               <a:ext uri="{FF2B5EF4-FFF2-40B4-BE49-F238E27FC236}">
-                <a16:creationId xmlns:a16="http://schemas.microsoft.com/office/drawing/2014/main" id="{58BEA53A-90AE-828C-2816-D5CE504600FF}"/>
+                <a16:creationId xmlns:a16="http://schemas.microsoft.com/office/drawing/2014/main" id="{40A27328-30F0-89AB-53A7-06676921D588}"/>
               </a:ext>
             </a:extLst>
           </p:cNvPr>
@@ -902,7 +902,7 @@
           <p:cNvPr id="6" name="Номер слайда 5">
             <a:extLst>
               <a:ext uri="{FF2B5EF4-FFF2-40B4-BE49-F238E27FC236}">
-                <a16:creationId xmlns:a16="http://schemas.microsoft.com/office/drawing/2014/main" id="{471D400F-1E5E-CABA-093C-0A60030875B4}"/>
+                <a16:creationId xmlns:a16="http://schemas.microsoft.com/office/drawing/2014/main" id="{2A50D9C9-3F7A-13A3-940D-2F36A68CB925}"/>
               </a:ext>
             </a:extLst>
           </p:cNvPr>
@@ -918,7 +918,7 @@
           <a:bodyPr/>
           <a:lstStyle/>
           <a:p>
-            <a:fld id="{D99F9743-DED8-4E9C-BD89-EA992B299253}" type="slidenum">
+            <a:fld id="{14248956-2374-48B4-B20B-A1021DAEFE0D}" type="slidenum">
               <a:rPr lang="ru-RU" smtClean="0"/>
               <a:t>‹#›</a:t>
             </a:fld>
@@ -929,7 +929,7 @@
     </p:spTree>
     <p:extLst>
       <p:ext uri="{BB962C8B-B14F-4D97-AF65-F5344CB8AC3E}">
-        <p14:creationId xmlns:p14="http://schemas.microsoft.com/office/powerpoint/2010/main" val="3583893704"/>
+        <p14:creationId xmlns:p14="http://schemas.microsoft.com/office/powerpoint/2010/main" val="2086041580"/>
       </p:ext>
     </p:extLst>
   </p:cSld>
@@ -961,7 +961,7 @@
           <p:cNvPr id="2" name="Заголовок 1">
             <a:extLst>
               <a:ext uri="{FF2B5EF4-FFF2-40B4-BE49-F238E27FC236}">
-                <a16:creationId xmlns:a16="http://schemas.microsoft.com/office/drawing/2014/main" id="{432AAE64-2264-0F5D-6EA9-F36EE75B2932}"/>
+                <a16:creationId xmlns:a16="http://schemas.microsoft.com/office/drawing/2014/main" id="{83EDF6B5-24D2-76A1-854B-C309BF0A2361}"/>
               </a:ext>
             </a:extLst>
           </p:cNvPr>
@@ -998,7 +998,7 @@
           <p:cNvPr id="3" name="Текст 2">
             <a:extLst>
               <a:ext uri="{FF2B5EF4-FFF2-40B4-BE49-F238E27FC236}">
-                <a16:creationId xmlns:a16="http://schemas.microsoft.com/office/drawing/2014/main" id="{9B8EEE28-936F-B786-0B92-F723AE3BCA1E}"/>
+                <a16:creationId xmlns:a16="http://schemas.microsoft.com/office/drawing/2014/main" id="{42FFB05D-6BBB-0B1D-51A9-8E74225A0CA1}"/>
               </a:ext>
             </a:extLst>
           </p:cNvPr>
@@ -1123,7 +1123,7 @@
           <p:cNvPr id="4" name="Дата 3">
             <a:extLst>
               <a:ext uri="{FF2B5EF4-FFF2-40B4-BE49-F238E27FC236}">
-                <a16:creationId xmlns:a16="http://schemas.microsoft.com/office/drawing/2014/main" id="{B649DAAA-A33F-B997-AAA0-47FC9F25B7D2}"/>
+                <a16:creationId xmlns:a16="http://schemas.microsoft.com/office/drawing/2014/main" id="{E37F1CF9-2F23-C988-9E9C-32B39923D99A}"/>
               </a:ext>
             </a:extLst>
           </p:cNvPr>
@@ -1139,9 +1139,9 @@
           <a:bodyPr/>
           <a:lstStyle/>
           <a:p>
-            <a:fld id="{44447AD5-A860-4F74-86B1-0034733D12B0}" type="datetimeFigureOut">
+            <a:fld id="{FECAD547-0098-4F95-A3E6-B35FDCDAFEB6}" type="datetimeFigureOut">
               <a:rPr lang="ru-RU" smtClean="0"/>
-              <a:t>21.10.2026</a:t>
+              <a:t>22.10.2026</a:t>
             </a:fld>
             <a:endParaRPr lang="ru-RU"/>
           </a:p>
@@ -1152,7 +1152,7 @@
           <p:cNvPr id="5" name="Нижний колонтитул 4">
             <a:extLst>
               <a:ext uri="{FF2B5EF4-FFF2-40B4-BE49-F238E27FC236}">
-                <a16:creationId xmlns:a16="http://schemas.microsoft.com/office/drawing/2014/main" id="{E41408AC-C8FC-3670-8DF7-0E0F6F2A722B}"/>
+                <a16:creationId xmlns:a16="http://schemas.microsoft.com/office/drawing/2014/main" id="{C2AFEEAF-BF07-E308-7B51-B21074B3E8A4}"/>
               </a:ext>
             </a:extLst>
           </p:cNvPr>
@@ -1177,7 +1177,7 @@
           <p:cNvPr id="6" name="Номер слайда 5">
             <a:extLst>
               <a:ext uri="{FF2B5EF4-FFF2-40B4-BE49-F238E27FC236}">
-                <a16:creationId xmlns:a16="http://schemas.microsoft.com/office/drawing/2014/main" id="{DB580292-2524-299E-917A-4FF3CDED4857}"/>
+                <a16:creationId xmlns:a16="http://schemas.microsoft.com/office/drawing/2014/main" id="{C8B75AD9-7F0E-5AAF-5C27-3FBB83B01005}"/>
               </a:ext>
             </a:extLst>
           </p:cNvPr>
@@ -1193,7 +1193,7 @@
           <a:bodyPr/>
           <a:lstStyle/>
           <a:p>
-            <a:fld id="{D99F9743-DED8-4E9C-BD89-EA992B299253}" type="slidenum">
+            <a:fld id="{14248956-2374-48B4-B20B-A1021DAEFE0D}" type="slidenum">
               <a:rPr lang="ru-RU" smtClean="0"/>
               <a:t>‹#›</a:t>
             </a:fld>
@@ -1204,7 +1204,7 @@
     </p:spTree>
     <p:extLst>
       <p:ext uri="{BB962C8B-B14F-4D97-AF65-F5344CB8AC3E}">
-        <p14:creationId xmlns:p14="http://schemas.microsoft.com/office/powerpoint/2010/main" val="1813767910"/>
+        <p14:creationId xmlns:p14="http://schemas.microsoft.com/office/powerpoint/2010/main" val="2481901385"/>
       </p:ext>
     </p:extLst>
   </p:cSld>
@@ -1236,7 +1236,7 @@
           <p:cNvPr id="2" name="Заголовок 1">
             <a:extLst>
               <a:ext uri="{FF2B5EF4-FFF2-40B4-BE49-F238E27FC236}">
-                <a16:creationId xmlns:a16="http://schemas.microsoft.com/office/drawing/2014/main" id="{694CF0A3-035A-0F2F-8D4A-3548247A3A21}"/>
+                <a16:creationId xmlns:a16="http://schemas.microsoft.com/office/drawing/2014/main" id="{85DE49E3-1C07-198B-A641-AB00A609285E}"/>
               </a:ext>
             </a:extLst>
           </p:cNvPr>
@@ -1264,7 +1264,7 @@
           <p:cNvPr id="3" name="Объект 2">
             <a:extLst>
               <a:ext uri="{FF2B5EF4-FFF2-40B4-BE49-F238E27FC236}">
-                <a16:creationId xmlns:a16="http://schemas.microsoft.com/office/drawing/2014/main" id="{FF7EA41E-1E7F-C0C3-9626-1F0188605BFA}"/>
+                <a16:creationId xmlns:a16="http://schemas.microsoft.com/office/drawing/2014/main" id="{7B8A60D2-5845-27EC-2188-58703EE0D058}"/>
               </a:ext>
             </a:extLst>
           </p:cNvPr>
@@ -1326,7 +1326,7 @@
           <p:cNvPr id="4" name="Объект 3">
             <a:extLst>
               <a:ext uri="{FF2B5EF4-FFF2-40B4-BE49-F238E27FC236}">
-                <a16:creationId xmlns:a16="http://schemas.microsoft.com/office/drawing/2014/main" id="{3350FA24-2401-95E9-C225-F7104507CEDD}"/>
+                <a16:creationId xmlns:a16="http://schemas.microsoft.com/office/drawing/2014/main" id="{0DC8DFD1-056A-F35B-1223-EBECFCADCEA9}"/>
               </a:ext>
             </a:extLst>
           </p:cNvPr>
@@ -1388,7 +1388,7 @@
           <p:cNvPr id="5" name="Дата 4">
             <a:extLst>
               <a:ext uri="{FF2B5EF4-FFF2-40B4-BE49-F238E27FC236}">
-                <a16:creationId xmlns:a16="http://schemas.microsoft.com/office/drawing/2014/main" id="{091B50D3-E316-CB2F-128F-14E54911CBDB}"/>
+                <a16:creationId xmlns:a16="http://schemas.microsoft.com/office/drawing/2014/main" id="{D4CA2D5A-4CDB-435D-B9A0-AB913AE15FCD}"/>
               </a:ext>
             </a:extLst>
           </p:cNvPr>
@@ -1404,9 +1404,9 @@
           <a:bodyPr/>
           <a:lstStyle/>
           <a:p>
-            <a:fld id="{44447AD5-A860-4F74-86B1-0034733D12B0}" type="datetimeFigureOut">
+            <a:fld id="{FECAD547-0098-4F95-A3E6-B35FDCDAFEB6}" type="datetimeFigureOut">
               <a:rPr lang="ru-RU" smtClean="0"/>
-              <a:t>21.10.2026</a:t>
+              <a:t>22.10.2026</a:t>
             </a:fld>
             <a:endParaRPr lang="ru-RU"/>
           </a:p>
@@ -1417,7 +1417,7 @@
           <p:cNvPr id="6" name="Нижний колонтитул 5">
             <a:extLst>
               <a:ext uri="{FF2B5EF4-FFF2-40B4-BE49-F238E27FC236}">
-                <a16:creationId xmlns:a16="http://schemas.microsoft.com/office/drawing/2014/main" id="{89B9D1A6-28B0-EE14-5730-FF1494C25F4C}"/>
+                <a16:creationId xmlns:a16="http://schemas.microsoft.com/office/drawing/2014/main" id="{5BCC97E0-023C-86E8-8D0E-ED20AD7B5142}"/>
               </a:ext>
             </a:extLst>
           </p:cNvPr>
@@ -1442,7 +1442,7 @@
           <p:cNvPr id="7" name="Номер слайда 6">
             <a:extLst>
               <a:ext uri="{FF2B5EF4-FFF2-40B4-BE49-F238E27FC236}">
-                <a16:creationId xmlns:a16="http://schemas.microsoft.com/office/drawing/2014/main" id="{E82BDE28-6DB7-1B04-AD0E-29FB0C302F3A}"/>
+                <a16:creationId xmlns:a16="http://schemas.microsoft.com/office/drawing/2014/main" id="{640C13D7-5D83-2213-C4B0-6EF9EED9D8F0}"/>
               </a:ext>
             </a:extLst>
           </p:cNvPr>
@@ -1458,7 +1458,7 @@
           <a:bodyPr/>
           <a:lstStyle/>
           <a:p>
-            <a:fld id="{D99F9743-DED8-4E9C-BD89-EA992B299253}" type="slidenum">
+            <a:fld id="{14248956-2374-48B4-B20B-A1021DAEFE0D}" type="slidenum">
               <a:rPr lang="ru-RU" smtClean="0"/>
               <a:t>‹#›</a:t>
             </a:fld>
@@ -1469,7 +1469,7 @@
     </p:spTree>
     <p:extLst>
       <p:ext uri="{BB962C8B-B14F-4D97-AF65-F5344CB8AC3E}">
-        <p14:creationId xmlns:p14="http://schemas.microsoft.com/office/powerpoint/2010/main" val="4137191455"/>
+        <p14:creationId xmlns:p14="http://schemas.microsoft.com/office/powerpoint/2010/main" val="3651029011"/>
       </p:ext>
     </p:extLst>
   </p:cSld>
@@ -1501,7 +1501,7 @@
           <p:cNvPr id="2" name="Заголовок 1">
             <a:extLst>
               <a:ext uri="{FF2B5EF4-FFF2-40B4-BE49-F238E27FC236}">
-                <a16:creationId xmlns:a16="http://schemas.microsoft.com/office/drawing/2014/main" id="{87B60EBB-EBC7-0D0B-98FA-A50881360EB7}"/>
+                <a16:creationId xmlns:a16="http://schemas.microsoft.com/office/drawing/2014/main" id="{B904B867-A03B-5101-7638-442572CF50E6}"/>
               </a:ext>
             </a:extLst>
           </p:cNvPr>
@@ -1534,7 +1534,7 @@
           <p:cNvPr id="3" name="Текст 2">
             <a:extLst>
               <a:ext uri="{FF2B5EF4-FFF2-40B4-BE49-F238E27FC236}">
-                <a16:creationId xmlns:a16="http://schemas.microsoft.com/office/drawing/2014/main" id="{9050CE4E-E80C-71E4-E18F-FE1DDD4E6813}"/>
+                <a16:creationId xmlns:a16="http://schemas.microsoft.com/office/drawing/2014/main" id="{B079F521-870D-3A3C-3AD7-A2A082970893}"/>
               </a:ext>
             </a:extLst>
           </p:cNvPr>
@@ -1605,7 +1605,7 @@
           <p:cNvPr id="4" name="Объект 3">
             <a:extLst>
               <a:ext uri="{FF2B5EF4-FFF2-40B4-BE49-F238E27FC236}">
-                <a16:creationId xmlns:a16="http://schemas.microsoft.com/office/drawing/2014/main" id="{80989572-F283-EAA2-C5E9-DC23AAF84D2A}"/>
+                <a16:creationId xmlns:a16="http://schemas.microsoft.com/office/drawing/2014/main" id="{7A4884EF-C7D6-EF74-E88F-4FCD81E20115}"/>
               </a:ext>
             </a:extLst>
           </p:cNvPr>
@@ -1667,7 +1667,7 @@
           <p:cNvPr id="5" name="Текст 4">
             <a:extLst>
               <a:ext uri="{FF2B5EF4-FFF2-40B4-BE49-F238E27FC236}">
-                <a16:creationId xmlns:a16="http://schemas.microsoft.com/office/drawing/2014/main" id="{A8EE7B4B-EDAB-BD04-B5B0-E294629F279A}"/>
+                <a16:creationId xmlns:a16="http://schemas.microsoft.com/office/drawing/2014/main" id="{7E7B92C6-F640-34F3-F32E-89AF6A4DC827}"/>
               </a:ext>
             </a:extLst>
           </p:cNvPr>
@@ -1738,7 +1738,7 @@
           <p:cNvPr id="6" name="Объект 5">
             <a:extLst>
               <a:ext uri="{FF2B5EF4-FFF2-40B4-BE49-F238E27FC236}">
-                <a16:creationId xmlns:a16="http://schemas.microsoft.com/office/drawing/2014/main" id="{4C97E1A5-5414-8A66-FE02-12339B1B744C}"/>
+                <a16:creationId xmlns:a16="http://schemas.microsoft.com/office/drawing/2014/main" id="{E9C10694-0DC2-78C8-5036-832921F0D9E3}"/>
               </a:ext>
             </a:extLst>
           </p:cNvPr>
@@ -1800,7 +1800,7 @@
           <p:cNvPr id="7" name="Дата 6">
             <a:extLst>
               <a:ext uri="{FF2B5EF4-FFF2-40B4-BE49-F238E27FC236}">
-                <a16:creationId xmlns:a16="http://schemas.microsoft.com/office/drawing/2014/main" id="{F2985F4B-6FFE-CC1B-8541-0A26F85A5765}"/>
+                <a16:creationId xmlns:a16="http://schemas.microsoft.com/office/drawing/2014/main" id="{7D494726-431A-700A-A9BE-B1A6DDF85628}"/>
               </a:ext>
             </a:extLst>
           </p:cNvPr>
@@ -1816,9 +1816,9 @@
           <a:bodyPr/>
           <a:lstStyle/>
           <a:p>
-            <a:fld id="{44447AD5-A860-4F74-86B1-0034733D12B0}" type="datetimeFigureOut">
+            <a:fld id="{FECAD547-0098-4F95-A3E6-B35FDCDAFEB6}" type="datetimeFigureOut">
               <a:rPr lang="ru-RU" smtClean="0"/>
-              <a:t>21.10.2026</a:t>
+              <a:t>22.10.2026</a:t>
             </a:fld>
             <a:endParaRPr lang="ru-RU"/>
           </a:p>
@@ -1829,7 +1829,7 @@
           <p:cNvPr id="8" name="Нижний колонтитул 7">
             <a:extLst>
               <a:ext uri="{FF2B5EF4-FFF2-40B4-BE49-F238E27FC236}">
-                <a16:creationId xmlns:a16="http://schemas.microsoft.com/office/drawing/2014/main" id="{5F36477C-910E-1D9A-440E-05D93536D36F}"/>
+                <a16:creationId xmlns:a16="http://schemas.microsoft.com/office/drawing/2014/main" id="{D266C023-72A8-15D0-792D-7119458DEBB0}"/>
               </a:ext>
             </a:extLst>
           </p:cNvPr>
@@ -1854,7 +1854,7 @@
           <p:cNvPr id="9" name="Номер слайда 8">
             <a:extLst>
               <a:ext uri="{FF2B5EF4-FFF2-40B4-BE49-F238E27FC236}">
-                <a16:creationId xmlns:a16="http://schemas.microsoft.com/office/drawing/2014/main" id="{4328669F-AF11-088B-D1A9-F3AD66BAD2C0}"/>
+                <a16:creationId xmlns:a16="http://schemas.microsoft.com/office/drawing/2014/main" id="{69700F1C-5A3E-C93F-51B6-676A2F13AA35}"/>
               </a:ext>
             </a:extLst>
           </p:cNvPr>
@@ -1870,7 +1870,7 @@
           <a:bodyPr/>
           <a:lstStyle/>
           <a:p>
-            <a:fld id="{D99F9743-DED8-4E9C-BD89-EA992B299253}" type="slidenum">
+            <a:fld id="{14248956-2374-48B4-B20B-A1021DAEFE0D}" type="slidenum">
               <a:rPr lang="ru-RU" smtClean="0"/>
               <a:t>‹#›</a:t>
             </a:fld>
@@ -1881,7 +1881,7 @@
     </p:spTree>
     <p:extLst>
       <p:ext uri="{BB962C8B-B14F-4D97-AF65-F5344CB8AC3E}">
-        <p14:creationId xmlns:p14="http://schemas.microsoft.com/office/powerpoint/2010/main" val="1618633908"/>
+        <p14:creationId xmlns:p14="http://schemas.microsoft.com/office/powerpoint/2010/main" val="1594870660"/>
       </p:ext>
     </p:extLst>
   </p:cSld>
@@ -1913,7 +1913,7 @@
           <p:cNvPr id="2" name="Заголовок 1">
             <a:extLst>
               <a:ext uri="{FF2B5EF4-FFF2-40B4-BE49-F238E27FC236}">
-                <a16:creationId xmlns:a16="http://schemas.microsoft.com/office/drawing/2014/main" id="{AA17C945-920D-813A-8135-3139D62214C5}"/>
+                <a16:creationId xmlns:a16="http://schemas.microsoft.com/office/drawing/2014/main" id="{63283DB1-7DB4-7F33-CDD7-9CEED3292B42}"/>
               </a:ext>
             </a:extLst>
           </p:cNvPr>
@@ -1941,7 +1941,7 @@
           <p:cNvPr id="3" name="Дата 2">
             <a:extLst>
               <a:ext uri="{FF2B5EF4-FFF2-40B4-BE49-F238E27FC236}">
-                <a16:creationId xmlns:a16="http://schemas.microsoft.com/office/drawing/2014/main" id="{0D4FF71F-9A2A-98B1-89CE-64875BF8750F}"/>
+                <a16:creationId xmlns:a16="http://schemas.microsoft.com/office/drawing/2014/main" id="{80FC06F1-4C81-93D3-24B6-B6391D0E0005}"/>
               </a:ext>
             </a:extLst>
           </p:cNvPr>
@@ -1957,9 +1957,9 @@
           <a:bodyPr/>
           <a:lstStyle/>
           <a:p>
-            <a:fld id="{44447AD5-A860-4F74-86B1-0034733D12B0}" type="datetimeFigureOut">
+            <a:fld id="{FECAD547-0098-4F95-A3E6-B35FDCDAFEB6}" type="datetimeFigureOut">
               <a:rPr lang="ru-RU" smtClean="0"/>
-              <a:t>21.10.2026</a:t>
+              <a:t>22.10.2026</a:t>
             </a:fld>
             <a:endParaRPr lang="ru-RU"/>
           </a:p>
@@ -1970,7 +1970,7 @@
           <p:cNvPr id="4" name="Нижний колонтитул 3">
             <a:extLst>
               <a:ext uri="{FF2B5EF4-FFF2-40B4-BE49-F238E27FC236}">
-                <a16:creationId xmlns:a16="http://schemas.microsoft.com/office/drawing/2014/main" id="{BDFCCB03-9850-901A-AB15-73EC217A7C57}"/>
+                <a16:creationId xmlns:a16="http://schemas.microsoft.com/office/drawing/2014/main" id="{A30F401A-A942-2FAD-6DEF-2AE49CAC5980}"/>
               </a:ext>
             </a:extLst>
           </p:cNvPr>
@@ -1995,7 +1995,7 @@
           <p:cNvPr id="5" name="Номер слайда 4">
             <a:extLst>
               <a:ext uri="{FF2B5EF4-FFF2-40B4-BE49-F238E27FC236}">
-                <a16:creationId xmlns:a16="http://schemas.microsoft.com/office/drawing/2014/main" id="{931AC97D-FAD1-611D-7D9E-F35E002C54BB}"/>
+                <a16:creationId xmlns:a16="http://schemas.microsoft.com/office/drawing/2014/main" id="{4DC91934-5B27-BEAA-64F9-C18DC95331F5}"/>
               </a:ext>
             </a:extLst>
           </p:cNvPr>
@@ -2011,7 +2011,7 @@
           <a:bodyPr/>
           <a:lstStyle/>
           <a:p>
-            <a:fld id="{D99F9743-DED8-4E9C-BD89-EA992B299253}" type="slidenum">
+            <a:fld id="{14248956-2374-48B4-B20B-A1021DAEFE0D}" type="slidenum">
               <a:rPr lang="ru-RU" smtClean="0"/>
               <a:t>‹#›</a:t>
             </a:fld>
@@ -2022,7 +2022,7 @@
     </p:spTree>
     <p:extLst>
       <p:ext uri="{BB962C8B-B14F-4D97-AF65-F5344CB8AC3E}">
-        <p14:creationId xmlns:p14="http://schemas.microsoft.com/office/powerpoint/2010/main" val="528829987"/>
+        <p14:creationId xmlns:p14="http://schemas.microsoft.com/office/powerpoint/2010/main" val="4078596708"/>
       </p:ext>
     </p:extLst>
   </p:cSld>
@@ -2054,7 +2054,7 @@
           <p:cNvPr id="2" name="Дата 1">
             <a:extLst>
               <a:ext uri="{FF2B5EF4-FFF2-40B4-BE49-F238E27FC236}">
-                <a16:creationId xmlns:a16="http://schemas.microsoft.com/office/drawing/2014/main" id="{0D36D7B2-63B0-6E3B-49DD-A3D78850E45F}"/>
+                <a16:creationId xmlns:a16="http://schemas.microsoft.com/office/drawing/2014/main" id="{8BF4F305-DF00-9237-67B5-749A0CEB2ECF}"/>
               </a:ext>
             </a:extLst>
           </p:cNvPr>
@@ -2070,9 +2070,9 @@
           <a:bodyPr/>
           <a:lstStyle/>
           <a:p>
-            <a:fld id="{44447AD5-A860-4F74-86B1-0034733D12B0}" type="datetimeFigureOut">
+            <a:fld id="{FECAD547-0098-4F95-A3E6-B35FDCDAFEB6}" type="datetimeFigureOut">
               <a:rPr lang="ru-RU" smtClean="0"/>
-              <a:t>21.10.2026</a:t>
+              <a:t>22.10.2026</a:t>
             </a:fld>
             <a:endParaRPr lang="ru-RU"/>
           </a:p>
@@ -2083,7 +2083,7 @@
           <p:cNvPr id="3" name="Нижний колонтитул 2">
             <a:extLst>
               <a:ext uri="{FF2B5EF4-FFF2-40B4-BE49-F238E27FC236}">
-                <a16:creationId xmlns:a16="http://schemas.microsoft.com/office/drawing/2014/main" id="{ACE10BBD-FFE7-3614-E133-C5261CBE6B9A}"/>
+                <a16:creationId xmlns:a16="http://schemas.microsoft.com/office/drawing/2014/main" id="{EABC8274-FF22-F942-6F1F-B77240049EC3}"/>
               </a:ext>
             </a:extLst>
           </p:cNvPr>
@@ -2108,7 +2108,7 @@
           <p:cNvPr id="4" name="Номер слайда 3">
             <a:extLst>
               <a:ext uri="{FF2B5EF4-FFF2-40B4-BE49-F238E27FC236}">
-                <a16:creationId xmlns:a16="http://schemas.microsoft.com/office/drawing/2014/main" id="{74F81673-5ABC-2321-FC57-73EABB79EC39}"/>
+                <a16:creationId xmlns:a16="http://schemas.microsoft.com/office/drawing/2014/main" id="{BD8D32A2-D60B-F554-9D6E-CF146796151C}"/>
               </a:ext>
             </a:extLst>
           </p:cNvPr>
@@ -2124,7 +2124,7 @@
           <a:bodyPr/>
           <a:lstStyle/>
           <a:p>
-            <a:fld id="{D99F9743-DED8-4E9C-BD89-EA992B299253}" type="slidenum">
+            <a:fld id="{14248956-2374-48B4-B20B-A1021DAEFE0D}" type="slidenum">
               <a:rPr lang="ru-RU" smtClean="0"/>
               <a:t>‹#›</a:t>
             </a:fld>
@@ -2135,7 +2135,7 @@
     </p:spTree>
     <p:extLst>
       <p:ext uri="{BB962C8B-B14F-4D97-AF65-F5344CB8AC3E}">
-        <p14:creationId xmlns:p14="http://schemas.microsoft.com/office/powerpoint/2010/main" val="3458436300"/>
+        <p14:creationId xmlns:p14="http://schemas.microsoft.com/office/powerpoint/2010/main" val="395164118"/>
       </p:ext>
     </p:extLst>
   </p:cSld>
@@ -2167,7 +2167,7 @@
           <p:cNvPr id="2" name="Заголовок 1">
             <a:extLst>
               <a:ext uri="{FF2B5EF4-FFF2-40B4-BE49-F238E27FC236}">
-                <a16:creationId xmlns:a16="http://schemas.microsoft.com/office/drawing/2014/main" id="{9513B0BF-A7FC-A544-74B7-E9648E58CBCB}"/>
+                <a16:creationId xmlns:a16="http://schemas.microsoft.com/office/drawing/2014/main" id="{060A5FD7-4A18-508A-FFF9-6ABB891E66E0}"/>
               </a:ext>
             </a:extLst>
           </p:cNvPr>
@@ -2204,7 +2204,7 @@
           <p:cNvPr id="3" name="Объект 2">
             <a:extLst>
               <a:ext uri="{FF2B5EF4-FFF2-40B4-BE49-F238E27FC236}">
-                <a16:creationId xmlns:a16="http://schemas.microsoft.com/office/drawing/2014/main" id="{11FCABD1-745F-FBF1-AFD1-685BE03FF9BA}"/>
+                <a16:creationId xmlns:a16="http://schemas.microsoft.com/office/drawing/2014/main" id="{1DC83CE2-1B0B-8E84-8F96-B1D94D62D486}"/>
               </a:ext>
             </a:extLst>
           </p:cNvPr>
@@ -2294,7 +2294,7 @@
           <p:cNvPr id="4" name="Текст 3">
             <a:extLst>
               <a:ext uri="{FF2B5EF4-FFF2-40B4-BE49-F238E27FC236}">
-                <a16:creationId xmlns:a16="http://schemas.microsoft.com/office/drawing/2014/main" id="{6DFB6E9E-589B-6746-BD55-21782DD24FAE}"/>
+                <a16:creationId xmlns:a16="http://schemas.microsoft.com/office/drawing/2014/main" id="{9D492F47-04AC-287A-E2BE-6968902D1C3E}"/>
               </a:ext>
             </a:extLst>
           </p:cNvPr>
@@ -2365,7 +2365,7 @@
           <p:cNvPr id="5" name="Дата 4">
             <a:extLst>
               <a:ext uri="{FF2B5EF4-FFF2-40B4-BE49-F238E27FC236}">
-                <a16:creationId xmlns:a16="http://schemas.microsoft.com/office/drawing/2014/main" id="{377664C4-103C-3691-98C8-2C6CADCD1E1A}"/>
+                <a16:creationId xmlns:a16="http://schemas.microsoft.com/office/drawing/2014/main" id="{EE20D621-7CB6-70D8-8BB0-20A169C8E4E3}"/>
               </a:ext>
             </a:extLst>
           </p:cNvPr>
@@ -2381,9 +2381,9 @@
           <a:bodyPr/>
           <a:lstStyle/>
           <a:p>
-            <a:fld id="{44447AD5-A860-4F74-86B1-0034733D12B0}" type="datetimeFigureOut">
+            <a:fld id="{FECAD547-0098-4F95-A3E6-B35FDCDAFEB6}" type="datetimeFigureOut">
               <a:rPr lang="ru-RU" smtClean="0"/>
-              <a:t>21.10.2026</a:t>
+              <a:t>22.10.2026</a:t>
             </a:fld>
             <a:endParaRPr lang="ru-RU"/>
           </a:p>
@@ -2394,7 +2394,7 @@
           <p:cNvPr id="6" name="Нижний колонтитул 5">
             <a:extLst>
               <a:ext uri="{FF2B5EF4-FFF2-40B4-BE49-F238E27FC236}">
-                <a16:creationId xmlns:a16="http://schemas.microsoft.com/office/drawing/2014/main" id="{C3109FB1-12DE-BD7E-E382-17C4654BEC10}"/>
+                <a16:creationId xmlns:a16="http://schemas.microsoft.com/office/drawing/2014/main" id="{E46CAA40-3AF4-539C-1896-B514540EC26F}"/>
               </a:ext>
             </a:extLst>
           </p:cNvPr>
@@ -2419,7 +2419,7 @@
           <p:cNvPr id="7" name="Номер слайда 6">
             <a:extLst>
               <a:ext uri="{FF2B5EF4-FFF2-40B4-BE49-F238E27FC236}">
-                <a16:creationId xmlns:a16="http://schemas.microsoft.com/office/drawing/2014/main" id="{32239CA3-159B-9E36-B5D1-071E81155321}"/>
+                <a16:creationId xmlns:a16="http://schemas.microsoft.com/office/drawing/2014/main" id="{76572272-55E7-DBE8-1501-9210A55F25A8}"/>
               </a:ext>
             </a:extLst>
           </p:cNvPr>
@@ -2435,7 +2435,7 @@
           <a:bodyPr/>
           <a:lstStyle/>
           <a:p>
-            <a:fld id="{D99F9743-DED8-4E9C-BD89-EA992B299253}" type="slidenum">
+            <a:fld id="{14248956-2374-48B4-B20B-A1021DAEFE0D}" type="slidenum">
               <a:rPr lang="ru-RU" smtClean="0"/>
               <a:t>‹#›</a:t>
             </a:fld>
@@ -2446,7 +2446,7 @@
     </p:spTree>
     <p:extLst>
       <p:ext uri="{BB962C8B-B14F-4D97-AF65-F5344CB8AC3E}">
-        <p14:creationId xmlns:p14="http://schemas.microsoft.com/office/powerpoint/2010/main" val="1763266337"/>
+        <p14:creationId xmlns:p14="http://schemas.microsoft.com/office/powerpoint/2010/main" val="1860773389"/>
       </p:ext>
     </p:extLst>
   </p:cSld>
@@ -2478,7 +2478,7 @@
           <p:cNvPr id="2" name="Заголовок 1">
             <a:extLst>
               <a:ext uri="{FF2B5EF4-FFF2-40B4-BE49-F238E27FC236}">
-                <a16:creationId xmlns:a16="http://schemas.microsoft.com/office/drawing/2014/main" id="{15B783A7-E1EF-D25A-F748-4A2DF166A002}"/>
+                <a16:creationId xmlns:a16="http://schemas.microsoft.com/office/drawing/2014/main" id="{A6C708DA-3DCE-0BAA-4ECD-89C680ABD730}"/>
               </a:ext>
             </a:extLst>
           </p:cNvPr>
@@ -2515,7 +2515,7 @@
           <p:cNvPr id="3" name="Рисунок 2">
             <a:extLst>
               <a:ext uri="{FF2B5EF4-FFF2-40B4-BE49-F238E27FC236}">
-                <a16:creationId xmlns:a16="http://schemas.microsoft.com/office/drawing/2014/main" id="{0B75E683-3761-6D1D-0727-EC3D1E512B03}"/>
+                <a16:creationId xmlns:a16="http://schemas.microsoft.com/office/drawing/2014/main" id="{42938E84-07FA-3750-EA71-F6FC74E4BA95}"/>
               </a:ext>
             </a:extLst>
           </p:cNvPr>
@@ -2582,7 +2582,7 @@
           <p:cNvPr id="4" name="Текст 3">
             <a:extLst>
               <a:ext uri="{FF2B5EF4-FFF2-40B4-BE49-F238E27FC236}">
-                <a16:creationId xmlns:a16="http://schemas.microsoft.com/office/drawing/2014/main" id="{3D7A4650-A5BA-C70E-02E6-1040318FC025}"/>
+                <a16:creationId xmlns:a16="http://schemas.microsoft.com/office/drawing/2014/main" id="{C2ADF9FA-B65B-85C6-6AB5-8DFD3700DB30}"/>
               </a:ext>
             </a:extLst>
           </p:cNvPr>
@@ -2653,7 +2653,7 @@
           <p:cNvPr id="5" name="Дата 4">
             <a:extLst>
               <a:ext uri="{FF2B5EF4-FFF2-40B4-BE49-F238E27FC236}">
-                <a16:creationId xmlns:a16="http://schemas.microsoft.com/office/drawing/2014/main" id="{3634C4A0-264A-6ADB-CB0B-86079E9ECCFE}"/>
+                <a16:creationId xmlns:a16="http://schemas.microsoft.com/office/drawing/2014/main" id="{22FA9EFC-EC0B-6302-F593-209B23751E5E}"/>
               </a:ext>
             </a:extLst>
           </p:cNvPr>
@@ -2669,9 +2669,9 @@
           <a:bodyPr/>
           <a:lstStyle/>
           <a:p>
-            <a:fld id="{44447AD5-A860-4F74-86B1-0034733D12B0}" type="datetimeFigureOut">
+            <a:fld id="{FECAD547-0098-4F95-A3E6-B35FDCDAFEB6}" type="datetimeFigureOut">
               <a:rPr lang="ru-RU" smtClean="0"/>
-              <a:t>21.10.2026</a:t>
+              <a:t>22.10.2026</a:t>
             </a:fld>
             <a:endParaRPr lang="ru-RU"/>
           </a:p>
@@ -2682,7 +2682,7 @@
           <p:cNvPr id="6" name="Нижний колонтитул 5">
             <a:extLst>
               <a:ext uri="{FF2B5EF4-FFF2-40B4-BE49-F238E27FC236}">
-                <a16:creationId xmlns:a16="http://schemas.microsoft.com/office/drawing/2014/main" id="{50AF0235-26BF-52FC-C5D0-9653D09823AC}"/>
+                <a16:creationId xmlns:a16="http://schemas.microsoft.com/office/drawing/2014/main" id="{5029CF42-5A97-CAC6-6580-7CE6E784362D}"/>
               </a:ext>
             </a:extLst>
           </p:cNvPr>
@@ -2707,7 +2707,7 @@
           <p:cNvPr id="7" name="Номер слайда 6">
             <a:extLst>
               <a:ext uri="{FF2B5EF4-FFF2-40B4-BE49-F238E27FC236}">
-                <a16:creationId xmlns:a16="http://schemas.microsoft.com/office/drawing/2014/main" id="{829166BC-0A4A-F0EC-F5E3-B3002D4139AC}"/>
+                <a16:creationId xmlns:a16="http://schemas.microsoft.com/office/drawing/2014/main" id="{1117878A-FCDA-B547-2897-0C175066CF9D}"/>
               </a:ext>
             </a:extLst>
           </p:cNvPr>
@@ -2723,7 +2723,7 @@
           <a:bodyPr/>
           <a:lstStyle/>
           <a:p>
-            <a:fld id="{D99F9743-DED8-4E9C-BD89-EA992B299253}" type="slidenum">
+            <a:fld id="{14248956-2374-48B4-B20B-A1021DAEFE0D}" type="slidenum">
               <a:rPr lang="ru-RU" smtClean="0"/>
               <a:t>‹#›</a:t>
             </a:fld>
@@ -2734,7 +2734,7 @@
     </p:spTree>
     <p:extLst>
       <p:ext uri="{BB962C8B-B14F-4D97-AF65-F5344CB8AC3E}">
-        <p14:creationId xmlns:p14="http://schemas.microsoft.com/office/powerpoint/2010/main" val="1600449889"/>
+        <p14:creationId xmlns:p14="http://schemas.microsoft.com/office/powerpoint/2010/main" val="242300011"/>
       </p:ext>
     </p:extLst>
   </p:cSld>
@@ -2771,7 +2771,7 @@
           <p:cNvPr id="2" name="Заголовок 1">
             <a:extLst>
               <a:ext uri="{FF2B5EF4-FFF2-40B4-BE49-F238E27FC236}">
-                <a16:creationId xmlns:a16="http://schemas.microsoft.com/office/drawing/2014/main" id="{DC8AD4CD-731D-CBB1-E9C2-F59C87734604}"/>
+                <a16:creationId xmlns:a16="http://schemas.microsoft.com/office/drawing/2014/main" id="{72F54835-A4C5-B2CA-EC34-F7FF1DC53C34}"/>
               </a:ext>
             </a:extLst>
           </p:cNvPr>
@@ -2809,7 +2809,7 @@
           <p:cNvPr id="3" name="Текст 2">
             <a:extLst>
               <a:ext uri="{FF2B5EF4-FFF2-40B4-BE49-F238E27FC236}">
-                <a16:creationId xmlns:a16="http://schemas.microsoft.com/office/drawing/2014/main" id="{632B7CE7-9EBF-5396-B9AA-DA2BF9506897}"/>
+                <a16:creationId xmlns:a16="http://schemas.microsoft.com/office/drawing/2014/main" id="{B834371C-9D98-8075-0551-B425FA73387D}"/>
               </a:ext>
             </a:extLst>
           </p:cNvPr>
@@ -2876,7 +2876,7 @@
           <p:cNvPr id="4" name="Дата 3">
             <a:extLst>
               <a:ext uri="{FF2B5EF4-FFF2-40B4-BE49-F238E27FC236}">
-                <a16:creationId xmlns:a16="http://schemas.microsoft.com/office/drawing/2014/main" id="{5A03B0F9-F340-5E36-3F35-E0FDDA51980D}"/>
+                <a16:creationId xmlns:a16="http://schemas.microsoft.com/office/drawing/2014/main" id="{77CB833D-E313-2110-A3CB-01BF873F6F01}"/>
               </a:ext>
             </a:extLst>
           </p:cNvPr>
@@ -2910,9 +2910,9 @@
             </a:lvl1pPr>
           </a:lstStyle>
           <a:p>
-            <a:fld id="{44447AD5-A860-4F74-86B1-0034733D12B0}" type="datetimeFigureOut">
+            <a:fld id="{FECAD547-0098-4F95-A3E6-B35FDCDAFEB6}" type="datetimeFigureOut">
               <a:rPr lang="ru-RU" smtClean="0"/>
-              <a:t>21.10.2026</a:t>
+              <a:t>22.10.2026</a:t>
             </a:fld>
             <a:endParaRPr lang="ru-RU"/>
           </a:p>
@@ -2923,7 +2923,7 @@
           <p:cNvPr id="5" name="Нижний колонтитул 4">
             <a:extLst>
               <a:ext uri="{FF2B5EF4-FFF2-40B4-BE49-F238E27FC236}">
-                <a16:creationId xmlns:a16="http://schemas.microsoft.com/office/drawing/2014/main" id="{E526F631-F5AE-B6E7-EEE8-3D26D48004CB}"/>
+                <a16:creationId xmlns:a16="http://schemas.microsoft.com/office/drawing/2014/main" id="{AD0A2E83-E5AF-0EB3-958F-5FFD5BF9BE8C}"/>
               </a:ext>
             </a:extLst>
           </p:cNvPr>
@@ -2966,7 +2966,7 @@
           <p:cNvPr id="6" name="Номер слайда 5">
             <a:extLst>
               <a:ext uri="{FF2B5EF4-FFF2-40B4-BE49-F238E27FC236}">
-                <a16:creationId xmlns:a16="http://schemas.microsoft.com/office/drawing/2014/main" id="{CE98507B-0F96-CC7B-82C7-9947F9C9363E}"/>
+                <a16:creationId xmlns:a16="http://schemas.microsoft.com/office/drawing/2014/main" id="{7B53B29B-37EC-7ADE-1BB2-BB9B889DD812}"/>
               </a:ext>
             </a:extLst>
           </p:cNvPr>
@@ -3000,7 +3000,7 @@
             </a:lvl1pPr>
           </a:lstStyle>
           <a:p>
-            <a:fld id="{D99F9743-DED8-4E9C-BD89-EA992B299253}" type="slidenum">
+            <a:fld id="{14248956-2374-48B4-B20B-A1021DAEFE0D}" type="slidenum">
               <a:rPr lang="ru-RU" smtClean="0"/>
               <a:t>‹#›</a:t>
             </a:fld>
@@ -3011,7 +3011,7 @@
     </p:spTree>
     <p:extLst>
       <p:ext uri="{BB962C8B-B14F-4D97-AF65-F5344CB8AC3E}">
-        <p14:creationId xmlns:p14="http://schemas.microsoft.com/office/powerpoint/2010/main" val="4225137624"/>
+        <p14:creationId xmlns:p14="http://schemas.microsoft.com/office/powerpoint/2010/main" val="1120260318"/>
       </p:ext>
     </p:extLst>
   </p:cSld>
@@ -3334,7 +3334,7 @@
           <p:cNvPr id="2" name="Прямоугольник 1">
             <a:extLst>
               <a:ext uri="{FF2B5EF4-FFF2-40B4-BE49-F238E27FC236}">
-                <a16:creationId xmlns:a16="http://schemas.microsoft.com/office/drawing/2014/main" id="{EDC73865-515B-15F7-63B2-10458427DF64}"/>
+                <a16:creationId xmlns:a16="http://schemas.microsoft.com/office/drawing/2014/main" id="{7F5BEB85-AEC1-366B-069D-096A8E4CB906}"/>
               </a:ext>
             </a:extLst>
           </p:cNvPr>
@@ -3402,7 +3402,7 @@
           <p:cNvPr id="3" name="Прямоугольник 2">
             <a:extLst>
               <a:ext uri="{FF2B5EF4-FFF2-40B4-BE49-F238E27FC236}">
-                <a16:creationId xmlns:a16="http://schemas.microsoft.com/office/drawing/2014/main" id="{795C27E7-CD7F-4CC9-852A-A7A0D114A471}"/>
+                <a16:creationId xmlns:a16="http://schemas.microsoft.com/office/drawing/2014/main" id="{849DC070-7F2B-6FB8-2265-4E6098203005}"/>
               </a:ext>
             </a:extLst>
           </p:cNvPr>
@@ -3470,7 +3470,7 @@
           <p:cNvPr id="4" name="Прямоугольник 3">
             <a:extLst>
               <a:ext uri="{FF2B5EF4-FFF2-40B4-BE49-F238E27FC236}">
-                <a16:creationId xmlns:a16="http://schemas.microsoft.com/office/drawing/2014/main" id="{DECE2BB2-5953-72D0-FAE9-DA94999E760E}"/>
+                <a16:creationId xmlns:a16="http://schemas.microsoft.com/office/drawing/2014/main" id="{14065CA6-1321-A3EE-FC52-9D057D8DB114}"/>
               </a:ext>
             </a:extLst>
           </p:cNvPr>
@@ -3538,7 +3538,7 @@
           <p:cNvPr id="5" name="TextBox 4">
             <a:extLst>
               <a:ext uri="{FF2B5EF4-FFF2-40B4-BE49-F238E27FC236}">
-                <a16:creationId xmlns:a16="http://schemas.microsoft.com/office/drawing/2014/main" id="{6EBD3D4E-7D4F-3DB6-428D-057627FCB9D4}"/>
+                <a16:creationId xmlns:a16="http://schemas.microsoft.com/office/drawing/2014/main" id="{A0360FAD-3AB8-7959-7BD2-3E952459A4FB}"/>
               </a:ext>
             </a:extLst>
           </p:cNvPr>
@@ -3578,7 +3578,7 @@
           <p:cNvPr id="6" name="TextBox 5">
             <a:extLst>
               <a:ext uri="{FF2B5EF4-FFF2-40B4-BE49-F238E27FC236}">
-                <a16:creationId xmlns:a16="http://schemas.microsoft.com/office/drawing/2014/main" id="{A2CF301B-5E4A-D2C3-6B4A-5E89C8321FD9}"/>
+                <a16:creationId xmlns:a16="http://schemas.microsoft.com/office/drawing/2014/main" id="{787B28FB-A636-26C4-A550-F5D65D83164E}"/>
               </a:ext>
             </a:extLst>
           </p:cNvPr>
@@ -3618,7 +3618,7 @@
           <p:cNvPr id="7" name="TextBox 6">
             <a:extLst>
               <a:ext uri="{FF2B5EF4-FFF2-40B4-BE49-F238E27FC236}">
-                <a16:creationId xmlns:a16="http://schemas.microsoft.com/office/drawing/2014/main" id="{AB2E4724-D950-BFE8-BFBB-0B1F9DBC4825}"/>
+                <a16:creationId xmlns:a16="http://schemas.microsoft.com/office/drawing/2014/main" id="{7A54CAED-A2E1-F185-B36D-660F55DA12F3}"/>
               </a:ext>
             </a:extLst>
           </p:cNvPr>
@@ -3658,7 +3658,7 @@
           <p:cNvPr id="8" name="TextBox 7">
             <a:extLst>
               <a:ext uri="{FF2B5EF4-FFF2-40B4-BE49-F238E27FC236}">
-                <a16:creationId xmlns:a16="http://schemas.microsoft.com/office/drawing/2014/main" id="{53E9F525-5F5B-5313-6BB6-229243849DE5}"/>
+                <a16:creationId xmlns:a16="http://schemas.microsoft.com/office/drawing/2014/main" id="{78545C19-D375-A779-3D27-D40842666C78}"/>
               </a:ext>
             </a:extLst>
           </p:cNvPr>
@@ -3698,7 +3698,7 @@
           <p:cNvPr id="9" name="TextBox 8">
             <a:extLst>
               <a:ext uri="{FF2B5EF4-FFF2-40B4-BE49-F238E27FC236}">
-                <a16:creationId xmlns:a16="http://schemas.microsoft.com/office/drawing/2014/main" id="{A38D095D-E794-2911-CF25-758967BCDF73}"/>
+                <a16:creationId xmlns:a16="http://schemas.microsoft.com/office/drawing/2014/main" id="{E1073DBC-E3D7-FA20-9F45-E9B5F7DD85BE}"/>
               </a:ext>
             </a:extLst>
           </p:cNvPr>
@@ -3738,7 +3738,7 @@
           <p:cNvPr id="10" name="TextBox 9">
             <a:extLst>
               <a:ext uri="{FF2B5EF4-FFF2-40B4-BE49-F238E27FC236}">
-                <a16:creationId xmlns:a16="http://schemas.microsoft.com/office/drawing/2014/main" id="{7505444F-4E5A-A8F1-F3FB-8A1E55EAA587}"/>
+                <a16:creationId xmlns:a16="http://schemas.microsoft.com/office/drawing/2014/main" id="{9B3A0312-075F-CE99-7A61-AC789AD8F0DA}"/>
               </a:ext>
             </a:extLst>
           </p:cNvPr>
@@ -3778,7 +3778,7 @@
           <p:cNvPr id="11" name="Прямоугольник 10">
             <a:extLst>
               <a:ext uri="{FF2B5EF4-FFF2-40B4-BE49-F238E27FC236}">
-                <a16:creationId xmlns:a16="http://schemas.microsoft.com/office/drawing/2014/main" id="{339CF863-1029-D93A-AAE2-C58AA46FBC7C}"/>
+                <a16:creationId xmlns:a16="http://schemas.microsoft.com/office/drawing/2014/main" id="{511F0877-5EDE-830B-415B-6AF88F80C526}"/>
               </a:ext>
             </a:extLst>
           </p:cNvPr>
@@ -3846,7 +3846,7 @@
           <p:cNvPr id="12" name="TextBox 11">
             <a:extLst>
               <a:ext uri="{FF2B5EF4-FFF2-40B4-BE49-F238E27FC236}">
-                <a16:creationId xmlns:a16="http://schemas.microsoft.com/office/drawing/2014/main" id="{D0A82BD7-16DD-1AC6-3B1F-033FD8CB6B56}"/>
+                <a16:creationId xmlns:a16="http://schemas.microsoft.com/office/drawing/2014/main" id="{E8112DA3-CB48-3690-106B-ADEEAEDF290C}"/>
               </a:ext>
             </a:extLst>
           </p:cNvPr>
@@ -3886,7 +3886,7 @@
           <p:cNvPr id="13" name="TextBox 12">
             <a:extLst>
               <a:ext uri="{FF2B5EF4-FFF2-40B4-BE49-F238E27FC236}">
-                <a16:creationId xmlns:a16="http://schemas.microsoft.com/office/drawing/2014/main" id="{6186943B-6A56-B27F-0A3B-F541DC06AC14}"/>
+                <a16:creationId xmlns:a16="http://schemas.microsoft.com/office/drawing/2014/main" id="{06DDB76F-9CBB-5FD1-15D5-039AEB4C4C60}"/>
               </a:ext>
             </a:extLst>
           </p:cNvPr>
@@ -3926,7 +3926,7 @@
           <p:cNvPr id="14" name="TextBox 13">
             <a:extLst>
               <a:ext uri="{FF2B5EF4-FFF2-40B4-BE49-F238E27FC236}">
-                <a16:creationId xmlns:a16="http://schemas.microsoft.com/office/drawing/2014/main" id="{3ED005CF-A89C-C514-1448-1832EC1B7613}"/>
+                <a16:creationId xmlns:a16="http://schemas.microsoft.com/office/drawing/2014/main" id="{196EA565-F5D7-C706-5CDA-51DA29F481D5}"/>
               </a:ext>
             </a:extLst>
           </p:cNvPr>
@@ -3966,7 +3966,7 @@
           <p:cNvPr id="15" name="TextBox 14">
             <a:extLst>
               <a:ext uri="{FF2B5EF4-FFF2-40B4-BE49-F238E27FC236}">
-                <a16:creationId xmlns:a16="http://schemas.microsoft.com/office/drawing/2014/main" id="{9E9F1D55-245A-294E-4D15-6A4C640F20D3}"/>
+                <a16:creationId xmlns:a16="http://schemas.microsoft.com/office/drawing/2014/main" id="{89ABBC0A-3D7E-1ACB-79C2-E73A8B6DD67D}"/>
               </a:ext>
             </a:extLst>
           </p:cNvPr>
@@ -4006,7 +4006,7 @@
           <p:cNvPr id="16" name="TextBox 15">
             <a:extLst>
               <a:ext uri="{FF2B5EF4-FFF2-40B4-BE49-F238E27FC236}">
-                <a16:creationId xmlns:a16="http://schemas.microsoft.com/office/drawing/2014/main" id="{F2ECDC36-11B3-EB45-6B99-1869676A3140}"/>
+                <a16:creationId xmlns:a16="http://schemas.microsoft.com/office/drawing/2014/main" id="{117B9B7C-0685-9702-062D-BDB1C8B17AEA}"/>
               </a:ext>
             </a:extLst>
           </p:cNvPr>
@@ -4044,7 +4044,7 @@
     </p:spTree>
     <p:extLst>
       <p:ext uri="{BB962C8B-B14F-4D97-AF65-F5344CB8AC3E}">
-        <p14:creationId xmlns:p14="http://schemas.microsoft.com/office/powerpoint/2010/main" val="863728401"/>
+        <p14:creationId xmlns:p14="http://schemas.microsoft.com/office/powerpoint/2010/main" val="447090555"/>
       </p:ext>
     </p:extLst>
   </p:cSld>
@@ -4076,7 +4076,7 @@
           <p:cNvPr id="2" name="Прямоугольник 1">
             <a:extLst>
               <a:ext uri="{FF2B5EF4-FFF2-40B4-BE49-F238E27FC236}">
-                <a16:creationId xmlns:a16="http://schemas.microsoft.com/office/drawing/2014/main" id="{FE995751-E0C8-2B08-11C9-AA5E26966C53}"/>
+                <a16:creationId xmlns:a16="http://schemas.microsoft.com/office/drawing/2014/main" id="{6A84E295-B90C-2758-3AA4-6487A9FA5881}"/>
               </a:ext>
             </a:extLst>
           </p:cNvPr>
@@ -4144,7 +4144,7 @@
           <p:cNvPr id="3" name="Прямоугольник 2">
             <a:extLst>
               <a:ext uri="{FF2B5EF4-FFF2-40B4-BE49-F238E27FC236}">
-                <a16:creationId xmlns:a16="http://schemas.microsoft.com/office/drawing/2014/main" id="{F193CCEC-E598-48DC-0448-72B7D887AF78}"/>
+                <a16:creationId xmlns:a16="http://schemas.microsoft.com/office/drawing/2014/main" id="{499E128A-399D-F99D-3657-F47AF6B408DA}"/>
               </a:ext>
             </a:extLst>
           </p:cNvPr>
@@ -4212,7 +4212,7 @@
           <p:cNvPr id="4" name="TextBox 3">
             <a:extLst>
               <a:ext uri="{FF2B5EF4-FFF2-40B4-BE49-F238E27FC236}">
-                <a16:creationId xmlns:a16="http://schemas.microsoft.com/office/drawing/2014/main" id="{922C78ED-4148-124D-1826-F0288AE1C036}"/>
+                <a16:creationId xmlns:a16="http://schemas.microsoft.com/office/drawing/2014/main" id="{AF331EC8-EF84-D107-6047-822799D39D01}"/>
               </a:ext>
             </a:extLst>
           </p:cNvPr>
@@ -4252,7 +4252,7 @@
           <p:cNvPr id="5" name="TextBox 4">
             <a:extLst>
               <a:ext uri="{FF2B5EF4-FFF2-40B4-BE49-F238E27FC236}">
-                <a16:creationId xmlns:a16="http://schemas.microsoft.com/office/drawing/2014/main" id="{04CB5A10-5D53-43A7-7127-F2DB34F38A9F}"/>
+                <a16:creationId xmlns:a16="http://schemas.microsoft.com/office/drawing/2014/main" id="{974CFA31-C249-75EC-B9AB-4EE762D104F9}"/>
               </a:ext>
             </a:extLst>
           </p:cNvPr>
@@ -4293,7 +4293,7 @@
           <p:cNvPr id="6" name="Прямоугольник 5">
             <a:extLst>
               <a:ext uri="{FF2B5EF4-FFF2-40B4-BE49-F238E27FC236}">
-                <a16:creationId xmlns:a16="http://schemas.microsoft.com/office/drawing/2014/main" id="{A414FCCA-5ABD-E207-720D-7136CB384C65}"/>
+                <a16:creationId xmlns:a16="http://schemas.microsoft.com/office/drawing/2014/main" id="{C4FA9851-6B26-9335-1BDC-D034E3DF52F4}"/>
               </a:ext>
             </a:extLst>
           </p:cNvPr>
@@ -4361,7 +4361,7 @@
           <p:cNvPr id="7" name="Прямоугольник 6">
             <a:extLst>
               <a:ext uri="{FF2B5EF4-FFF2-40B4-BE49-F238E27FC236}">
-                <a16:creationId xmlns:a16="http://schemas.microsoft.com/office/drawing/2014/main" id="{417E6E92-1E74-2B42-41DC-B54AE4F26FB1}"/>
+                <a16:creationId xmlns:a16="http://schemas.microsoft.com/office/drawing/2014/main" id="{A7709913-6AAF-705F-EA3E-439507B8F3CE}"/>
               </a:ext>
             </a:extLst>
           </p:cNvPr>
@@ -4429,7 +4429,7 @@
           <p:cNvPr id="8" name="TextBox 7">
             <a:extLst>
               <a:ext uri="{FF2B5EF4-FFF2-40B4-BE49-F238E27FC236}">
-                <a16:creationId xmlns:a16="http://schemas.microsoft.com/office/drawing/2014/main" id="{F583C0B5-147A-8BDF-7CF6-44022A5B5ED8}"/>
+                <a16:creationId xmlns:a16="http://schemas.microsoft.com/office/drawing/2014/main" id="{405C7733-A35B-ED21-0699-68A5BCDB4B3E}"/>
               </a:ext>
             </a:extLst>
           </p:cNvPr>
@@ -4469,7 +4469,7 @@
           <p:cNvPr id="9" name="TextBox 8">
             <a:extLst>
               <a:ext uri="{FF2B5EF4-FFF2-40B4-BE49-F238E27FC236}">
-                <a16:creationId xmlns:a16="http://schemas.microsoft.com/office/drawing/2014/main" id="{32B6389F-11DE-F123-D39F-C1C0108B11C6}"/>
+                <a16:creationId xmlns:a16="http://schemas.microsoft.com/office/drawing/2014/main" id="{29F806FA-C107-AE53-38E3-2FC3F3A74165}"/>
               </a:ext>
             </a:extLst>
           </p:cNvPr>
@@ -4588,7 +4588,7 @@
     </p:spTree>
     <p:extLst>
       <p:ext uri="{BB962C8B-B14F-4D97-AF65-F5344CB8AC3E}">
-        <p14:creationId xmlns:p14="http://schemas.microsoft.com/office/powerpoint/2010/main" val="3639393118"/>
+        <p14:creationId xmlns:p14="http://schemas.microsoft.com/office/powerpoint/2010/main" val="684583390"/>
       </p:ext>
     </p:extLst>
   </p:cSld>
@@ -4620,7 +4620,7 @@
           <p:cNvPr id="2" name="Прямоугольник 1">
             <a:extLst>
               <a:ext uri="{FF2B5EF4-FFF2-40B4-BE49-F238E27FC236}">
-                <a16:creationId xmlns:a16="http://schemas.microsoft.com/office/drawing/2014/main" id="{93C72855-308E-D06D-4424-3966ECFF9CA1}"/>
+                <a16:creationId xmlns:a16="http://schemas.microsoft.com/office/drawing/2014/main" id="{E2DBD48E-8F87-DAE1-9C03-1665401EBBAD}"/>
               </a:ext>
             </a:extLst>
           </p:cNvPr>
@@ -4688,7 +4688,7 @@
           <p:cNvPr id="3" name="Прямоугольник 2">
             <a:extLst>
               <a:ext uri="{FF2B5EF4-FFF2-40B4-BE49-F238E27FC236}">
-                <a16:creationId xmlns:a16="http://schemas.microsoft.com/office/drawing/2014/main" id="{6C8A891F-6734-EE68-D8B4-C6AC04D63B14}"/>
+                <a16:creationId xmlns:a16="http://schemas.microsoft.com/office/drawing/2014/main" id="{9DA11DE9-3B17-A053-7AA7-1BAC1F8212EF}"/>
               </a:ext>
             </a:extLst>
           </p:cNvPr>
@@ -4756,7 +4756,7 @@
           <p:cNvPr id="4" name="TextBox 3">
             <a:extLst>
               <a:ext uri="{FF2B5EF4-FFF2-40B4-BE49-F238E27FC236}">
-                <a16:creationId xmlns:a16="http://schemas.microsoft.com/office/drawing/2014/main" id="{E64BC5E3-F0A2-BAC7-B1B8-2B9EA93AFA99}"/>
+                <a16:creationId xmlns:a16="http://schemas.microsoft.com/office/drawing/2014/main" id="{8B1E7C10-0D44-8C77-B8CE-D67B4DE85144}"/>
               </a:ext>
             </a:extLst>
           </p:cNvPr>
@@ -4796,7 +4796,7 @@
           <p:cNvPr id="5" name="TextBox 4">
             <a:extLst>
               <a:ext uri="{FF2B5EF4-FFF2-40B4-BE49-F238E27FC236}">
-                <a16:creationId xmlns:a16="http://schemas.microsoft.com/office/drawing/2014/main" id="{BBB309E3-7E63-7C86-D138-40ED5937367A}"/>
+                <a16:creationId xmlns:a16="http://schemas.microsoft.com/office/drawing/2014/main" id="{08C50EAB-2443-451F-187A-33BE4194E931}"/>
               </a:ext>
             </a:extLst>
           </p:cNvPr>
@@ -4837,7 +4837,7 @@
           <p:cNvPr id="6" name="Прямоугольник 5">
             <a:extLst>
               <a:ext uri="{FF2B5EF4-FFF2-40B4-BE49-F238E27FC236}">
-                <a16:creationId xmlns:a16="http://schemas.microsoft.com/office/drawing/2014/main" id="{4B009015-3481-72B7-C009-B95BD308F102}"/>
+                <a16:creationId xmlns:a16="http://schemas.microsoft.com/office/drawing/2014/main" id="{57977D09-AC97-EFB9-7EA2-7238283DFAD8}"/>
               </a:ext>
             </a:extLst>
           </p:cNvPr>
@@ -4905,7 +4905,7 @@
           <p:cNvPr id="7" name="TextBox 6">
             <a:extLst>
               <a:ext uri="{FF2B5EF4-FFF2-40B4-BE49-F238E27FC236}">
-                <a16:creationId xmlns:a16="http://schemas.microsoft.com/office/drawing/2014/main" id="{1BF1299B-192B-A78F-6AD6-16A70A6FD712}"/>
+                <a16:creationId xmlns:a16="http://schemas.microsoft.com/office/drawing/2014/main" id="{6802688B-87C3-238C-1C91-C59D23896CA6}"/>
               </a:ext>
             </a:extLst>
           </p:cNvPr>
@@ -4978,7 +4978,7 @@
           <p:cNvPr id="8" name="TextBox 7">
             <a:extLst>
               <a:ext uri="{FF2B5EF4-FFF2-40B4-BE49-F238E27FC236}">
-                <a16:creationId xmlns:a16="http://schemas.microsoft.com/office/drawing/2014/main" id="{774E1538-DD77-A6C7-B665-EA7E5EE59F2B}"/>
+                <a16:creationId xmlns:a16="http://schemas.microsoft.com/office/drawing/2014/main" id="{9C6256E4-44A6-FE50-C67B-107688A398C6}"/>
               </a:ext>
             </a:extLst>
           </p:cNvPr>
@@ -5049,7 +5049,7 @@
     </p:spTree>
     <p:extLst>
       <p:ext uri="{BB962C8B-B14F-4D97-AF65-F5344CB8AC3E}">
-        <p14:creationId xmlns:p14="http://schemas.microsoft.com/office/powerpoint/2010/main" val="100610520"/>
+        <p14:creationId xmlns:p14="http://schemas.microsoft.com/office/powerpoint/2010/main" val="4170689663"/>
       </p:ext>
     </p:extLst>
   </p:cSld>
@@ -5081,7 +5081,7 @@
           <p:cNvPr id="2" name="Прямоугольник 1">
             <a:extLst>
               <a:ext uri="{FF2B5EF4-FFF2-40B4-BE49-F238E27FC236}">
-                <a16:creationId xmlns:a16="http://schemas.microsoft.com/office/drawing/2014/main" id="{0753138C-698E-9BFF-96E4-7980AFCE3DCE}"/>
+                <a16:creationId xmlns:a16="http://schemas.microsoft.com/office/drawing/2014/main" id="{7D89CA07-C99A-982F-24ED-C22A7AD00AB4}"/>
               </a:ext>
             </a:extLst>
           </p:cNvPr>
@@ -5149,7 +5149,7 @@
           <p:cNvPr id="3" name="Прямоугольник 2">
             <a:extLst>
               <a:ext uri="{FF2B5EF4-FFF2-40B4-BE49-F238E27FC236}">
-                <a16:creationId xmlns:a16="http://schemas.microsoft.com/office/drawing/2014/main" id="{89C49059-D909-D7A2-60F6-3C354F1EACD2}"/>
+                <a16:creationId xmlns:a16="http://schemas.microsoft.com/office/drawing/2014/main" id="{371A4BBA-4248-0CBE-C6F4-13C58093E3B5}"/>
               </a:ext>
             </a:extLst>
           </p:cNvPr>
@@ -5217,7 +5217,7 @@
           <p:cNvPr id="4" name="TextBox 3">
             <a:extLst>
               <a:ext uri="{FF2B5EF4-FFF2-40B4-BE49-F238E27FC236}">
-                <a16:creationId xmlns:a16="http://schemas.microsoft.com/office/drawing/2014/main" id="{4E0D6651-8826-1F6F-0563-728906236CF1}"/>
+                <a16:creationId xmlns:a16="http://schemas.microsoft.com/office/drawing/2014/main" id="{2110E07B-B826-F0AF-88A5-F6C5B99CAA66}"/>
               </a:ext>
             </a:extLst>
           </p:cNvPr>
@@ -5257,7 +5257,7 @@
           <p:cNvPr id="5" name="TextBox 4">
             <a:extLst>
               <a:ext uri="{FF2B5EF4-FFF2-40B4-BE49-F238E27FC236}">
-                <a16:creationId xmlns:a16="http://schemas.microsoft.com/office/drawing/2014/main" id="{64BA278C-2263-CA39-2975-EA0809274A72}"/>
+                <a16:creationId xmlns:a16="http://schemas.microsoft.com/office/drawing/2014/main" id="{C3D15CAC-20D6-CF0F-6C03-4843055A840F}"/>
               </a:ext>
             </a:extLst>
           </p:cNvPr>
@@ -5298,7 +5298,7 @@
           <p:cNvPr id="6" name="Прямоугольник 5">
             <a:extLst>
               <a:ext uri="{FF2B5EF4-FFF2-40B4-BE49-F238E27FC236}">
-                <a16:creationId xmlns:a16="http://schemas.microsoft.com/office/drawing/2014/main" id="{B3942CF7-38AF-8D48-9B1C-DE497ED64E8B}"/>
+                <a16:creationId xmlns:a16="http://schemas.microsoft.com/office/drawing/2014/main" id="{EFB395B3-92CE-814B-6EFE-FE3CEFF8866B}"/>
               </a:ext>
             </a:extLst>
           </p:cNvPr>
@@ -5366,7 +5366,7 @@
           <p:cNvPr id="7" name="Прямоугольник 6">
             <a:extLst>
               <a:ext uri="{FF2B5EF4-FFF2-40B4-BE49-F238E27FC236}">
-                <a16:creationId xmlns:a16="http://schemas.microsoft.com/office/drawing/2014/main" id="{0FE4EE15-8005-A7ED-7F6F-D6E74134F8B7}"/>
+                <a16:creationId xmlns:a16="http://schemas.microsoft.com/office/drawing/2014/main" id="{E60CD6E7-25F2-B40D-796B-727226119D26}"/>
               </a:ext>
             </a:extLst>
           </p:cNvPr>
@@ -5434,7 +5434,7 @@
           <p:cNvPr id="9" name="Рисунок 8">
             <a:extLst>
               <a:ext uri="{FF2B5EF4-FFF2-40B4-BE49-F238E27FC236}">
-                <a16:creationId xmlns:a16="http://schemas.microsoft.com/office/drawing/2014/main" id="{878AABEC-BDDB-C8CF-A70B-6285362A785B}"/>
+                <a16:creationId xmlns:a16="http://schemas.microsoft.com/office/drawing/2014/main" id="{451EA827-46CA-C19F-C8EA-6E56983316D0}"/>
               </a:ext>
             </a:extLst>
           </p:cNvPr>
@@ -5470,7 +5470,7 @@
           <p:cNvPr id="10" name="TextBox 9">
             <a:extLst>
               <a:ext uri="{FF2B5EF4-FFF2-40B4-BE49-F238E27FC236}">
-                <a16:creationId xmlns:a16="http://schemas.microsoft.com/office/drawing/2014/main" id="{79C65D1E-D52F-EE34-B884-33BDEA9017E4}"/>
+                <a16:creationId xmlns:a16="http://schemas.microsoft.com/office/drawing/2014/main" id="{2042B211-622A-BE1A-184B-5A9F459E0BF9}"/>
               </a:ext>
             </a:extLst>
           </p:cNvPr>
@@ -5516,7 +5516,7 @@
           <p:cNvPr id="11" name="TextBox 10">
             <a:extLst>
               <a:ext uri="{FF2B5EF4-FFF2-40B4-BE49-F238E27FC236}">
-                <a16:creationId xmlns:a16="http://schemas.microsoft.com/office/drawing/2014/main" id="{C27BC766-877C-18D8-2CB7-030021396EF2}"/>
+                <a16:creationId xmlns:a16="http://schemas.microsoft.com/office/drawing/2014/main" id="{2E185420-278B-DAD1-D565-C90055ABF66F}"/>
               </a:ext>
             </a:extLst>
           </p:cNvPr>
@@ -5556,7 +5556,7 @@
           <p:cNvPr id="12" name="Прямоугольник 11">
             <a:extLst>
               <a:ext uri="{FF2B5EF4-FFF2-40B4-BE49-F238E27FC236}">
-                <a16:creationId xmlns:a16="http://schemas.microsoft.com/office/drawing/2014/main" id="{BDF55F21-87E9-2A20-D355-9FC68C656ED4}"/>
+                <a16:creationId xmlns:a16="http://schemas.microsoft.com/office/drawing/2014/main" id="{565654F6-098D-AEDE-E7BE-6458D5BE9540}"/>
               </a:ext>
             </a:extLst>
           </p:cNvPr>
@@ -5624,7 +5624,7 @@
           <p:cNvPr id="14" name="Рисунок 13">
             <a:extLst>
               <a:ext uri="{FF2B5EF4-FFF2-40B4-BE49-F238E27FC236}">
-                <a16:creationId xmlns:a16="http://schemas.microsoft.com/office/drawing/2014/main" id="{B96F7755-16A8-7257-F748-650C157A4022}"/>
+                <a16:creationId xmlns:a16="http://schemas.microsoft.com/office/drawing/2014/main" id="{B75AE2C5-2A04-77EA-FCFF-25BA1AFBFB29}"/>
               </a:ext>
             </a:extLst>
           </p:cNvPr>
@@ -5660,7 +5660,7 @@
           <p:cNvPr id="15" name="TextBox 14">
             <a:extLst>
               <a:ext uri="{FF2B5EF4-FFF2-40B4-BE49-F238E27FC236}">
-                <a16:creationId xmlns:a16="http://schemas.microsoft.com/office/drawing/2014/main" id="{03F29623-6D66-B084-1A8B-06841BF6DA7E}"/>
+                <a16:creationId xmlns:a16="http://schemas.microsoft.com/office/drawing/2014/main" id="{8956D0FA-62A9-1393-7E4B-18B6B7FB315F}"/>
               </a:ext>
             </a:extLst>
           </p:cNvPr>
@@ -5706,7 +5706,7 @@
           <p:cNvPr id="16" name="TextBox 15">
             <a:extLst>
               <a:ext uri="{FF2B5EF4-FFF2-40B4-BE49-F238E27FC236}">
-                <a16:creationId xmlns:a16="http://schemas.microsoft.com/office/drawing/2014/main" id="{16D616B4-D562-04C7-7812-D8B395E0263A}"/>
+                <a16:creationId xmlns:a16="http://schemas.microsoft.com/office/drawing/2014/main" id="{EE00D510-CC7E-6DB9-734E-57764A55C81B}"/>
               </a:ext>
             </a:extLst>
           </p:cNvPr>
@@ -5746,7 +5746,7 @@
           <p:cNvPr id="17" name="Прямоугольник 16">
             <a:extLst>
               <a:ext uri="{FF2B5EF4-FFF2-40B4-BE49-F238E27FC236}">
-                <a16:creationId xmlns:a16="http://schemas.microsoft.com/office/drawing/2014/main" id="{367B6A2D-4E6C-6DB6-E741-7D69BC0820D8}"/>
+                <a16:creationId xmlns:a16="http://schemas.microsoft.com/office/drawing/2014/main" id="{BA2309D4-299C-86F1-B35F-0BAA4B67536E}"/>
               </a:ext>
             </a:extLst>
           </p:cNvPr>
@@ -5814,7 +5814,7 @@
           <p:cNvPr id="19" name="Рисунок 18">
             <a:extLst>
               <a:ext uri="{FF2B5EF4-FFF2-40B4-BE49-F238E27FC236}">
-                <a16:creationId xmlns:a16="http://schemas.microsoft.com/office/drawing/2014/main" id="{132708FA-7870-707A-2C3A-976616198C2E}"/>
+                <a16:creationId xmlns:a16="http://schemas.microsoft.com/office/drawing/2014/main" id="{EE6AEE6B-2B76-6935-5EFB-1FDE267CA5A5}"/>
               </a:ext>
             </a:extLst>
           </p:cNvPr>
@@ -5850,7 +5850,7 @@
           <p:cNvPr id="20" name="TextBox 19">
             <a:extLst>
               <a:ext uri="{FF2B5EF4-FFF2-40B4-BE49-F238E27FC236}">
-                <a16:creationId xmlns:a16="http://schemas.microsoft.com/office/drawing/2014/main" id="{51C17223-5F60-4AB8-37A2-290267141E66}"/>
+                <a16:creationId xmlns:a16="http://schemas.microsoft.com/office/drawing/2014/main" id="{8B9C8511-C681-BD13-F13F-BD5417B4A44F}"/>
               </a:ext>
             </a:extLst>
           </p:cNvPr>
@@ -5896,7 +5896,7 @@
           <p:cNvPr id="21" name="TextBox 20">
             <a:extLst>
               <a:ext uri="{FF2B5EF4-FFF2-40B4-BE49-F238E27FC236}">
-                <a16:creationId xmlns:a16="http://schemas.microsoft.com/office/drawing/2014/main" id="{8BADAC95-9B50-DCAF-A06E-C8597B31B941}"/>
+                <a16:creationId xmlns:a16="http://schemas.microsoft.com/office/drawing/2014/main" id="{818D66F2-7649-E214-8E42-80EBB4427E83}"/>
               </a:ext>
             </a:extLst>
           </p:cNvPr>
@@ -5936,7 +5936,7 @@
           <p:cNvPr id="22" name="Прямоугольник 21">
             <a:extLst>
               <a:ext uri="{FF2B5EF4-FFF2-40B4-BE49-F238E27FC236}">
-                <a16:creationId xmlns:a16="http://schemas.microsoft.com/office/drawing/2014/main" id="{2B623851-DE49-D702-408E-1612DA3E5D08}"/>
+                <a16:creationId xmlns:a16="http://schemas.microsoft.com/office/drawing/2014/main" id="{A09500E5-3625-14E4-54C9-B3384FDE0437}"/>
               </a:ext>
             </a:extLst>
           </p:cNvPr>
@@ -6004,7 +6004,7 @@
           <p:cNvPr id="24" name="Рисунок 23">
             <a:extLst>
               <a:ext uri="{FF2B5EF4-FFF2-40B4-BE49-F238E27FC236}">
-                <a16:creationId xmlns:a16="http://schemas.microsoft.com/office/drawing/2014/main" id="{F8B76B9C-66C6-4DBF-AF44-95130DF57225}"/>
+                <a16:creationId xmlns:a16="http://schemas.microsoft.com/office/drawing/2014/main" id="{70F4EE56-F556-01B3-A2FC-3A18E00B17B4}"/>
               </a:ext>
             </a:extLst>
           </p:cNvPr>
@@ -6040,7 +6040,7 @@
           <p:cNvPr id="25" name="TextBox 24">
             <a:extLst>
               <a:ext uri="{FF2B5EF4-FFF2-40B4-BE49-F238E27FC236}">
-                <a16:creationId xmlns:a16="http://schemas.microsoft.com/office/drawing/2014/main" id="{900C2E7F-9AF7-92EB-7671-EEA2AEB86A5B}"/>
+                <a16:creationId xmlns:a16="http://schemas.microsoft.com/office/drawing/2014/main" id="{5E249E43-6F0F-BBEE-3305-FC2A76C6B4DF}"/>
               </a:ext>
             </a:extLst>
           </p:cNvPr>
@@ -6089,7 +6089,7 @@
           <p:cNvPr id="26" name="TextBox 25">
             <a:extLst>
               <a:ext uri="{FF2B5EF4-FFF2-40B4-BE49-F238E27FC236}">
-                <a16:creationId xmlns:a16="http://schemas.microsoft.com/office/drawing/2014/main" id="{185A0B60-BC31-FA69-E649-89F8B8B2CC05}"/>
+                <a16:creationId xmlns:a16="http://schemas.microsoft.com/office/drawing/2014/main" id="{9A5F0215-9DD3-4622-F4F4-8CF208D1A000}"/>
               </a:ext>
             </a:extLst>
           </p:cNvPr>
@@ -6129,7 +6129,7 @@
           <p:cNvPr id="27" name="TextBox 26">
             <a:extLst>
               <a:ext uri="{FF2B5EF4-FFF2-40B4-BE49-F238E27FC236}">
-                <a16:creationId xmlns:a16="http://schemas.microsoft.com/office/drawing/2014/main" id="{1E86A962-5F8B-46DD-129C-91CE6BDACE22}"/>
+                <a16:creationId xmlns:a16="http://schemas.microsoft.com/office/drawing/2014/main" id="{201FC0D9-B946-1C0A-20DD-9E9D68763EA3}"/>
               </a:ext>
             </a:extLst>
           </p:cNvPr>
@@ -6167,7 +6167,7 @@
     </p:spTree>
     <p:extLst>
       <p:ext uri="{BB962C8B-B14F-4D97-AF65-F5344CB8AC3E}">
-        <p14:creationId xmlns:p14="http://schemas.microsoft.com/office/powerpoint/2010/main" val="1187088944"/>
+        <p14:creationId xmlns:p14="http://schemas.microsoft.com/office/powerpoint/2010/main" val="1370688197"/>
       </p:ext>
     </p:extLst>
   </p:cSld>
@@ -6199,7 +6199,7 @@
           <p:cNvPr id="2" name="Прямоугольник 1">
             <a:extLst>
               <a:ext uri="{FF2B5EF4-FFF2-40B4-BE49-F238E27FC236}">
-                <a16:creationId xmlns:a16="http://schemas.microsoft.com/office/drawing/2014/main" id="{37D31D25-5C6B-C055-9151-C4DD20D8C195}"/>
+                <a16:creationId xmlns:a16="http://schemas.microsoft.com/office/drawing/2014/main" id="{F36F3507-77F6-6BB4-4D78-B341E54CC4CE}"/>
               </a:ext>
             </a:extLst>
           </p:cNvPr>
@@ -6267,7 +6267,7 @@
           <p:cNvPr id="3" name="Прямоугольник 2">
             <a:extLst>
               <a:ext uri="{FF2B5EF4-FFF2-40B4-BE49-F238E27FC236}">
-                <a16:creationId xmlns:a16="http://schemas.microsoft.com/office/drawing/2014/main" id="{1916D216-D78A-B526-90EB-3A7B1D0894B6}"/>
+                <a16:creationId xmlns:a16="http://schemas.microsoft.com/office/drawing/2014/main" id="{A72C0A50-6A65-2B16-5B85-5C08602B4833}"/>
               </a:ext>
             </a:extLst>
           </p:cNvPr>
@@ -6335,7 +6335,7 @@
           <p:cNvPr id="4" name="TextBox 3">
             <a:extLst>
               <a:ext uri="{FF2B5EF4-FFF2-40B4-BE49-F238E27FC236}">
-                <a16:creationId xmlns:a16="http://schemas.microsoft.com/office/drawing/2014/main" id="{2522945F-CF6D-31AB-0174-EF1200F62905}"/>
+                <a16:creationId xmlns:a16="http://schemas.microsoft.com/office/drawing/2014/main" id="{8C774E66-9F1E-4550-0CBB-D192F0493AD9}"/>
               </a:ext>
             </a:extLst>
           </p:cNvPr>
@@ -6375,7 +6375,7 @@
           <p:cNvPr id="5" name="TextBox 4">
             <a:extLst>
               <a:ext uri="{FF2B5EF4-FFF2-40B4-BE49-F238E27FC236}">
-                <a16:creationId xmlns:a16="http://schemas.microsoft.com/office/drawing/2014/main" id="{4BA56B81-5F57-C1A3-E116-FEC00044B112}"/>
+                <a16:creationId xmlns:a16="http://schemas.microsoft.com/office/drawing/2014/main" id="{15CCC135-0A46-68D5-5DB4-A997E321D843}"/>
               </a:ext>
             </a:extLst>
           </p:cNvPr>
@@ -6416,7 +6416,7 @@
           <p:cNvPr id="6" name="Прямоугольник 5">
             <a:extLst>
               <a:ext uri="{FF2B5EF4-FFF2-40B4-BE49-F238E27FC236}">
-                <a16:creationId xmlns:a16="http://schemas.microsoft.com/office/drawing/2014/main" id="{D81B62E3-F090-2355-65A4-13C697582E7A}"/>
+                <a16:creationId xmlns:a16="http://schemas.microsoft.com/office/drawing/2014/main" id="{1DEF9699-DBEA-A8F9-42EE-B3A436A42460}"/>
               </a:ext>
             </a:extLst>
           </p:cNvPr>
@@ -6484,7 +6484,7 @@
           <p:cNvPr id="8" name="Рисунок 7">
             <a:extLst>
               <a:ext uri="{FF2B5EF4-FFF2-40B4-BE49-F238E27FC236}">
-                <a16:creationId xmlns:a16="http://schemas.microsoft.com/office/drawing/2014/main" id="{0D0FB8F3-A7FD-2685-3613-B3E81EA5FAB8}"/>
+                <a16:creationId xmlns:a16="http://schemas.microsoft.com/office/drawing/2014/main" id="{27AE21FE-8002-5DAB-7CF4-E22257D6FEE5}"/>
               </a:ext>
             </a:extLst>
           </p:cNvPr>
@@ -6520,7 +6520,7 @@
           <p:cNvPr id="9" name="TextBox 8">
             <a:extLst>
               <a:ext uri="{FF2B5EF4-FFF2-40B4-BE49-F238E27FC236}">
-                <a16:creationId xmlns:a16="http://schemas.microsoft.com/office/drawing/2014/main" id="{07C1047E-F1E1-A6DF-EE79-E7FE892F3310}"/>
+                <a16:creationId xmlns:a16="http://schemas.microsoft.com/office/drawing/2014/main" id="{FB4E074C-819E-BD84-38B2-2138A28C09E1}"/>
               </a:ext>
             </a:extLst>
           </p:cNvPr>
@@ -6639,7 +6639,7 @@
     </p:spTree>
     <p:extLst>
       <p:ext uri="{BB962C8B-B14F-4D97-AF65-F5344CB8AC3E}">
-        <p14:creationId xmlns:p14="http://schemas.microsoft.com/office/powerpoint/2010/main" val="1659144880"/>
+        <p14:creationId xmlns:p14="http://schemas.microsoft.com/office/powerpoint/2010/main" val="4178676166"/>
       </p:ext>
     </p:extLst>
   </p:cSld>
@@ -6671,7 +6671,7 @@
           <p:cNvPr id="2" name="Прямоугольник 1">
             <a:extLst>
               <a:ext uri="{FF2B5EF4-FFF2-40B4-BE49-F238E27FC236}">
-                <a16:creationId xmlns:a16="http://schemas.microsoft.com/office/drawing/2014/main" id="{2F101817-44C6-27C5-347F-A5834E5E07F2}"/>
+                <a16:creationId xmlns:a16="http://schemas.microsoft.com/office/drawing/2014/main" id="{5A0A09D0-7DD7-C930-6026-16C4E1A845EA}"/>
               </a:ext>
             </a:extLst>
           </p:cNvPr>
@@ -6739,7 +6739,7 @@
           <p:cNvPr id="3" name="Прямоугольник 2">
             <a:extLst>
               <a:ext uri="{FF2B5EF4-FFF2-40B4-BE49-F238E27FC236}">
-                <a16:creationId xmlns:a16="http://schemas.microsoft.com/office/drawing/2014/main" id="{562C7E9A-2B26-FCA9-90E3-1644247A20E8}"/>
+                <a16:creationId xmlns:a16="http://schemas.microsoft.com/office/drawing/2014/main" id="{378F1F24-7D81-29E8-D6E7-5B8EFD16FA12}"/>
               </a:ext>
             </a:extLst>
           </p:cNvPr>
@@ -6807,7 +6807,7 @@
           <p:cNvPr id="4" name="TextBox 3">
             <a:extLst>
               <a:ext uri="{FF2B5EF4-FFF2-40B4-BE49-F238E27FC236}">
-                <a16:creationId xmlns:a16="http://schemas.microsoft.com/office/drawing/2014/main" id="{E809EBCF-D491-2346-45B7-0505AA3A2A9E}"/>
+                <a16:creationId xmlns:a16="http://schemas.microsoft.com/office/drawing/2014/main" id="{31BB247C-4DB9-B26B-E398-F671345B6ACB}"/>
               </a:ext>
             </a:extLst>
           </p:cNvPr>
@@ -6847,7 +6847,7 @@
           <p:cNvPr id="5" name="TextBox 4">
             <a:extLst>
               <a:ext uri="{FF2B5EF4-FFF2-40B4-BE49-F238E27FC236}">
-                <a16:creationId xmlns:a16="http://schemas.microsoft.com/office/drawing/2014/main" id="{5371A475-52F3-7938-D909-836BD1C59165}"/>
+                <a16:creationId xmlns:a16="http://schemas.microsoft.com/office/drawing/2014/main" id="{5164F03F-7EE9-F6FC-2225-F50EFE0E4FFB}"/>
               </a:ext>
             </a:extLst>
           </p:cNvPr>
@@ -6888,7 +6888,7 @@
           <p:cNvPr id="6" name="Прямоугольник 5">
             <a:extLst>
               <a:ext uri="{FF2B5EF4-FFF2-40B4-BE49-F238E27FC236}">
-                <a16:creationId xmlns:a16="http://schemas.microsoft.com/office/drawing/2014/main" id="{981AB3C2-8B88-064C-5B28-9EBEAFE2B8B1}"/>
+                <a16:creationId xmlns:a16="http://schemas.microsoft.com/office/drawing/2014/main" id="{9E0CEA50-CCB1-E4D6-0204-1EC348BC9CB8}"/>
               </a:ext>
             </a:extLst>
           </p:cNvPr>
@@ -6956,7 +6956,7 @@
           <p:cNvPr id="7" name="Таблица 6">
             <a:extLst>
               <a:ext uri="{FF2B5EF4-FFF2-40B4-BE49-F238E27FC236}">
-                <a16:creationId xmlns:a16="http://schemas.microsoft.com/office/drawing/2014/main" id="{67749A7B-6EF5-C7BE-53E9-6A71585B6348}"/>
+                <a16:creationId xmlns:a16="http://schemas.microsoft.com/office/drawing/2014/main" id="{111921A2-27CA-7244-35FF-80CE08852346}"/>
               </a:ext>
             </a:extLst>
           </p:cNvPr>
@@ -6966,7 +6966,7 @@
           <p:nvPr>
             <p:extLst>
               <p:ext uri="{D42A27DB-BD31-4B8C-83A1-F6EECF244321}">
-                <p14:modId xmlns:p14="http://schemas.microsoft.com/office/powerpoint/2010/main" val="1917887351"/>
+                <p14:modId xmlns:p14="http://schemas.microsoft.com/office/powerpoint/2010/main" val="928112676"/>
               </p:ext>
             </p:extLst>
           </p:nvPr>
@@ -6985,21 +6985,21 @@
                 <a:gridCol w="2413000">
                   <a:extLst>
                     <a:ext uri="{9D8B030D-6E8A-4147-A177-3AD203B41FA5}">
-                      <a16:colId xmlns:a16="http://schemas.microsoft.com/office/drawing/2014/main" val="1323644642"/>
+                      <a16:colId xmlns:a16="http://schemas.microsoft.com/office/drawing/2014/main" val="2886896077"/>
                     </a:ext>
                   </a:extLst>
                 </a:gridCol>
                 <a:gridCol w="5969000">
                   <a:extLst>
                     <a:ext uri="{9D8B030D-6E8A-4147-A177-3AD203B41FA5}">
-                      <a16:colId xmlns:a16="http://schemas.microsoft.com/office/drawing/2014/main" val="1320674707"/>
+                      <a16:colId xmlns:a16="http://schemas.microsoft.com/office/drawing/2014/main" val="1090525714"/>
                     </a:ext>
                   </a:extLst>
                 </a:gridCol>
                 <a:gridCol w="2692400">
                   <a:extLst>
                     <a:ext uri="{9D8B030D-6E8A-4147-A177-3AD203B41FA5}">
-                      <a16:colId xmlns:a16="http://schemas.microsoft.com/office/drawing/2014/main" val="467198074"/>
+                      <a16:colId xmlns:a16="http://schemas.microsoft.com/office/drawing/2014/main" val="4237194425"/>
                     </a:ext>
                   </a:extLst>
                 </a:gridCol>
@@ -7073,7 +7073,7 @@
                 </a:tc>
                 <a:extLst>
                   <a:ext uri="{0D108BD9-81ED-4DB2-BD59-A6C34878D82A}">
-                    <a16:rowId xmlns:a16="http://schemas.microsoft.com/office/drawing/2014/main" val="132676859"/>
+                    <a16:rowId xmlns:a16="http://schemas.microsoft.com/office/drawing/2014/main" val="1198988284"/>
                   </a:ext>
                 </a:extLst>
               </a:tr>
@@ -7146,7 +7146,7 @@
                 </a:tc>
                 <a:extLst>
                   <a:ext uri="{0D108BD9-81ED-4DB2-BD59-A6C34878D82A}">
-                    <a16:rowId xmlns:a16="http://schemas.microsoft.com/office/drawing/2014/main" val="3617640360"/>
+                    <a16:rowId xmlns:a16="http://schemas.microsoft.com/office/drawing/2014/main" val="1271698673"/>
                   </a:ext>
                 </a:extLst>
               </a:tr>
@@ -7219,7 +7219,7 @@
                 </a:tc>
                 <a:extLst>
                   <a:ext uri="{0D108BD9-81ED-4DB2-BD59-A6C34878D82A}">
-                    <a16:rowId xmlns:a16="http://schemas.microsoft.com/office/drawing/2014/main" val="1365727369"/>
+                    <a16:rowId xmlns:a16="http://schemas.microsoft.com/office/drawing/2014/main" val="3322552516"/>
                   </a:ext>
                 </a:extLst>
               </a:tr>
@@ -7292,7 +7292,7 @@
                 </a:tc>
                 <a:extLst>
                   <a:ext uri="{0D108BD9-81ED-4DB2-BD59-A6C34878D82A}">
-                    <a16:rowId xmlns:a16="http://schemas.microsoft.com/office/drawing/2014/main" val="2597194343"/>
+                    <a16:rowId xmlns:a16="http://schemas.microsoft.com/office/drawing/2014/main" val="2788340979"/>
                   </a:ext>
                 </a:extLst>
               </a:tr>
@@ -7305,7 +7305,7 @@
           <p:cNvPr id="8" name="TextBox 7">
             <a:extLst>
               <a:ext uri="{FF2B5EF4-FFF2-40B4-BE49-F238E27FC236}">
-                <a16:creationId xmlns:a16="http://schemas.microsoft.com/office/drawing/2014/main" id="{CDE860AB-7232-0EBB-0B9F-02654D9952B5}"/>
+                <a16:creationId xmlns:a16="http://schemas.microsoft.com/office/drawing/2014/main" id="{46FFABBC-FD9C-31C7-7B30-5AE68C428F8F}"/>
               </a:ext>
             </a:extLst>
           </p:cNvPr>
@@ -7343,7 +7343,7 @@
     </p:spTree>
     <p:extLst>
       <p:ext uri="{BB962C8B-B14F-4D97-AF65-F5344CB8AC3E}">
-        <p14:creationId xmlns:p14="http://schemas.microsoft.com/office/powerpoint/2010/main" val="838911884"/>
+        <p14:creationId xmlns:p14="http://schemas.microsoft.com/office/powerpoint/2010/main" val="3085278276"/>
       </p:ext>
     </p:extLst>
   </p:cSld>
@@ -7375,7 +7375,7 @@
           <p:cNvPr id="2" name="Прямоугольник 1">
             <a:extLst>
               <a:ext uri="{FF2B5EF4-FFF2-40B4-BE49-F238E27FC236}">
-                <a16:creationId xmlns:a16="http://schemas.microsoft.com/office/drawing/2014/main" id="{ADC9E1D5-93FA-DDDE-AFD2-E7329CE8B8F7}"/>
+                <a16:creationId xmlns:a16="http://schemas.microsoft.com/office/drawing/2014/main" id="{13E7BF4A-A64A-C762-7F60-C45903C9D3B0}"/>
               </a:ext>
             </a:extLst>
           </p:cNvPr>
@@ -7443,7 +7443,7 @@
           <p:cNvPr id="3" name="Прямоугольник 2">
             <a:extLst>
               <a:ext uri="{FF2B5EF4-FFF2-40B4-BE49-F238E27FC236}">
-                <a16:creationId xmlns:a16="http://schemas.microsoft.com/office/drawing/2014/main" id="{016D51FE-EBEC-E10C-0AD5-35363A3D9107}"/>
+                <a16:creationId xmlns:a16="http://schemas.microsoft.com/office/drawing/2014/main" id="{EE9E813F-89AF-E823-49EA-1BFE4A95FE7C}"/>
               </a:ext>
             </a:extLst>
           </p:cNvPr>
@@ -7511,7 +7511,7 @@
           <p:cNvPr id="4" name="TextBox 3">
             <a:extLst>
               <a:ext uri="{FF2B5EF4-FFF2-40B4-BE49-F238E27FC236}">
-                <a16:creationId xmlns:a16="http://schemas.microsoft.com/office/drawing/2014/main" id="{0B33F817-570F-275A-8A18-D6A386DBFD80}"/>
+                <a16:creationId xmlns:a16="http://schemas.microsoft.com/office/drawing/2014/main" id="{97556D7E-E34A-35BD-6EDC-23D1471E7B51}"/>
               </a:ext>
             </a:extLst>
           </p:cNvPr>
@@ -7551,7 +7551,7 @@
           <p:cNvPr id="5" name="TextBox 4">
             <a:extLst>
               <a:ext uri="{FF2B5EF4-FFF2-40B4-BE49-F238E27FC236}">
-                <a16:creationId xmlns:a16="http://schemas.microsoft.com/office/drawing/2014/main" id="{481FC03C-C69A-D11E-FA91-7BDA628D34AB}"/>
+                <a16:creationId xmlns:a16="http://schemas.microsoft.com/office/drawing/2014/main" id="{B861FAA2-CBFE-BD14-A703-850ADF859146}"/>
               </a:ext>
             </a:extLst>
           </p:cNvPr>
@@ -7592,7 +7592,7 @@
           <p:cNvPr id="6" name="Прямоугольник 5">
             <a:extLst>
               <a:ext uri="{FF2B5EF4-FFF2-40B4-BE49-F238E27FC236}">
-                <a16:creationId xmlns:a16="http://schemas.microsoft.com/office/drawing/2014/main" id="{5329FDC0-1EBC-BE14-28BE-646E3A1086B2}"/>
+                <a16:creationId xmlns:a16="http://schemas.microsoft.com/office/drawing/2014/main" id="{276C1427-D4FA-EBA6-D372-D5B536BE52C6}"/>
               </a:ext>
             </a:extLst>
           </p:cNvPr>
@@ -7660,7 +7660,7 @@
           <p:cNvPr id="7" name="Прямоугольник 6">
             <a:extLst>
               <a:ext uri="{FF2B5EF4-FFF2-40B4-BE49-F238E27FC236}">
-                <a16:creationId xmlns:a16="http://schemas.microsoft.com/office/drawing/2014/main" id="{D006D3FB-9FE2-6077-84FD-D92A70DC9D5C}"/>
+                <a16:creationId xmlns:a16="http://schemas.microsoft.com/office/drawing/2014/main" id="{6DBCF616-B0ED-BF56-E00C-80E31C222653}"/>
               </a:ext>
             </a:extLst>
           </p:cNvPr>
@@ -7728,7 +7728,7 @@
           <p:cNvPr id="8" name="Прямоугольник 7">
             <a:extLst>
               <a:ext uri="{FF2B5EF4-FFF2-40B4-BE49-F238E27FC236}">
-                <a16:creationId xmlns:a16="http://schemas.microsoft.com/office/drawing/2014/main" id="{5483E6A9-54E7-077D-4B39-249FB292601E}"/>
+                <a16:creationId xmlns:a16="http://schemas.microsoft.com/office/drawing/2014/main" id="{7859A928-79E2-CEDA-050C-309F16AB6501}"/>
               </a:ext>
             </a:extLst>
           </p:cNvPr>
@@ -7796,7 +7796,7 @@
           <p:cNvPr id="9" name="TextBox 8">
             <a:extLst>
               <a:ext uri="{FF2B5EF4-FFF2-40B4-BE49-F238E27FC236}">
-                <a16:creationId xmlns:a16="http://schemas.microsoft.com/office/drawing/2014/main" id="{B7A4A93B-5D5A-2630-2793-FE98EAA80D57}"/>
+                <a16:creationId xmlns:a16="http://schemas.microsoft.com/office/drawing/2014/main" id="{C3854BE8-F53F-EC48-3427-8C92CD34EE6B}"/>
               </a:ext>
             </a:extLst>
           </p:cNvPr>
@@ -7842,7 +7842,7 @@
           <p:cNvPr id="10" name="TextBox 9">
             <a:extLst>
               <a:ext uri="{FF2B5EF4-FFF2-40B4-BE49-F238E27FC236}">
-                <a16:creationId xmlns:a16="http://schemas.microsoft.com/office/drawing/2014/main" id="{DF8FEE0C-81B9-6030-1D06-D55A7A1AFB29}"/>
+                <a16:creationId xmlns:a16="http://schemas.microsoft.com/office/drawing/2014/main" id="{B3A3A77A-CA7D-1A49-72BF-87CF3D9291A1}"/>
               </a:ext>
             </a:extLst>
           </p:cNvPr>
@@ -7882,7 +7882,7 @@
           <p:cNvPr id="11" name="Прямоугольник 10">
             <a:extLst>
               <a:ext uri="{FF2B5EF4-FFF2-40B4-BE49-F238E27FC236}">
-                <a16:creationId xmlns:a16="http://schemas.microsoft.com/office/drawing/2014/main" id="{6EF22FC9-ECB1-7837-93E1-7F416F869FD5}"/>
+                <a16:creationId xmlns:a16="http://schemas.microsoft.com/office/drawing/2014/main" id="{4A7DFDF1-4EEC-4A56-9CCA-5007FD1BB129}"/>
               </a:ext>
             </a:extLst>
           </p:cNvPr>
@@ -7950,7 +7950,7 @@
           <p:cNvPr id="12" name="Прямоугольник 11">
             <a:extLst>
               <a:ext uri="{FF2B5EF4-FFF2-40B4-BE49-F238E27FC236}">
-                <a16:creationId xmlns:a16="http://schemas.microsoft.com/office/drawing/2014/main" id="{A44CF674-10E6-E102-7F8A-9A449FCAFC0D}"/>
+                <a16:creationId xmlns:a16="http://schemas.microsoft.com/office/drawing/2014/main" id="{F3929414-E7AC-9F72-A788-F978B4C1CA6D}"/>
               </a:ext>
             </a:extLst>
           </p:cNvPr>
@@ -8018,7 +8018,7 @@
           <p:cNvPr id="13" name="TextBox 12">
             <a:extLst>
               <a:ext uri="{FF2B5EF4-FFF2-40B4-BE49-F238E27FC236}">
-                <a16:creationId xmlns:a16="http://schemas.microsoft.com/office/drawing/2014/main" id="{E35B1F79-343A-3620-57CE-53AE99692AF0}"/>
+                <a16:creationId xmlns:a16="http://schemas.microsoft.com/office/drawing/2014/main" id="{88FF5D7B-5A28-959E-5504-48973260D89C}"/>
               </a:ext>
             </a:extLst>
           </p:cNvPr>
@@ -8064,7 +8064,7 @@
           <p:cNvPr id="14" name="TextBox 13">
             <a:extLst>
               <a:ext uri="{FF2B5EF4-FFF2-40B4-BE49-F238E27FC236}">
-                <a16:creationId xmlns:a16="http://schemas.microsoft.com/office/drawing/2014/main" id="{B2E93D89-4133-1FE0-D82C-2E6A0BDF427C}"/>
+                <a16:creationId xmlns:a16="http://schemas.microsoft.com/office/drawing/2014/main" id="{C6BE39A3-B44F-2212-7566-2FBDD25AD764}"/>
               </a:ext>
             </a:extLst>
           </p:cNvPr>
@@ -8104,7 +8104,7 @@
           <p:cNvPr id="15" name="Прямоугольник 14">
             <a:extLst>
               <a:ext uri="{FF2B5EF4-FFF2-40B4-BE49-F238E27FC236}">
-                <a16:creationId xmlns:a16="http://schemas.microsoft.com/office/drawing/2014/main" id="{A610AF79-8331-900E-3F9E-20129B050AE2}"/>
+                <a16:creationId xmlns:a16="http://schemas.microsoft.com/office/drawing/2014/main" id="{BAFC55E1-8A79-A098-7A66-E176613A55ED}"/>
               </a:ext>
             </a:extLst>
           </p:cNvPr>
@@ -8172,7 +8172,7 @@
           <p:cNvPr id="16" name="Прямоугольник 15">
             <a:extLst>
               <a:ext uri="{FF2B5EF4-FFF2-40B4-BE49-F238E27FC236}">
-                <a16:creationId xmlns:a16="http://schemas.microsoft.com/office/drawing/2014/main" id="{B10A24EB-710C-8E14-F610-58767597B57C}"/>
+                <a16:creationId xmlns:a16="http://schemas.microsoft.com/office/drawing/2014/main" id="{588C854E-6AD4-5813-267D-4AB7F4C6DDD2}"/>
               </a:ext>
             </a:extLst>
           </p:cNvPr>
@@ -8240,7 +8240,7 @@
           <p:cNvPr id="17" name="TextBox 16">
             <a:extLst>
               <a:ext uri="{FF2B5EF4-FFF2-40B4-BE49-F238E27FC236}">
-                <a16:creationId xmlns:a16="http://schemas.microsoft.com/office/drawing/2014/main" id="{74A30E87-0851-591A-52EF-0B28D0C21307}"/>
+                <a16:creationId xmlns:a16="http://schemas.microsoft.com/office/drawing/2014/main" id="{FB4767BF-9AD5-CD8F-02FA-F2774D0B8517}"/>
               </a:ext>
             </a:extLst>
           </p:cNvPr>
@@ -8286,7 +8286,7 @@
           <p:cNvPr id="18" name="TextBox 17">
             <a:extLst>
               <a:ext uri="{FF2B5EF4-FFF2-40B4-BE49-F238E27FC236}">
-                <a16:creationId xmlns:a16="http://schemas.microsoft.com/office/drawing/2014/main" id="{07C1305E-F97A-24D0-744E-D8263EAAA308}"/>
+                <a16:creationId xmlns:a16="http://schemas.microsoft.com/office/drawing/2014/main" id="{68BEFFCA-9747-B610-765B-912CB77D40CA}"/>
               </a:ext>
             </a:extLst>
           </p:cNvPr>
@@ -8326,7 +8326,7 @@
           <p:cNvPr id="19" name="Прямоугольник 18">
             <a:extLst>
               <a:ext uri="{FF2B5EF4-FFF2-40B4-BE49-F238E27FC236}">
-                <a16:creationId xmlns:a16="http://schemas.microsoft.com/office/drawing/2014/main" id="{CE8AFA7C-43FF-B350-930D-A97CC00D3E12}"/>
+                <a16:creationId xmlns:a16="http://schemas.microsoft.com/office/drawing/2014/main" id="{8FEF1AF6-C01E-C5F3-6316-AC31391EC2F5}"/>
               </a:ext>
             </a:extLst>
           </p:cNvPr>
@@ -8394,7 +8394,7 @@
           <p:cNvPr id="20" name="Прямоугольник 19">
             <a:extLst>
               <a:ext uri="{FF2B5EF4-FFF2-40B4-BE49-F238E27FC236}">
-                <a16:creationId xmlns:a16="http://schemas.microsoft.com/office/drawing/2014/main" id="{5E98C063-3CF4-EE53-7225-D5DC267C418E}"/>
+                <a16:creationId xmlns:a16="http://schemas.microsoft.com/office/drawing/2014/main" id="{D3E535C2-610B-444F-D9E5-E2723BC15E4D}"/>
               </a:ext>
             </a:extLst>
           </p:cNvPr>
@@ -8462,7 +8462,7 @@
           <p:cNvPr id="21" name="TextBox 20">
             <a:extLst>
               <a:ext uri="{FF2B5EF4-FFF2-40B4-BE49-F238E27FC236}">
-                <a16:creationId xmlns:a16="http://schemas.microsoft.com/office/drawing/2014/main" id="{FFD65B69-B40E-5534-2DAC-DD35B82A57BE}"/>
+                <a16:creationId xmlns:a16="http://schemas.microsoft.com/office/drawing/2014/main" id="{86E0F5D8-CB79-A6B1-D7EB-D05C3E2A54D0}"/>
               </a:ext>
             </a:extLst>
           </p:cNvPr>
@@ -8508,7 +8508,7 @@
           <p:cNvPr id="22" name="TextBox 21">
             <a:extLst>
               <a:ext uri="{FF2B5EF4-FFF2-40B4-BE49-F238E27FC236}">
-                <a16:creationId xmlns:a16="http://schemas.microsoft.com/office/drawing/2014/main" id="{F821F132-8EFA-2BB6-4219-612CA2ABB6FB}"/>
+                <a16:creationId xmlns:a16="http://schemas.microsoft.com/office/drawing/2014/main" id="{455DBB10-38F1-2223-BA62-575BFCE4D869}"/>
               </a:ext>
             </a:extLst>
           </p:cNvPr>
@@ -8548,7 +8548,7 @@
           <p:cNvPr id="23" name="Прямоугольник 22">
             <a:extLst>
               <a:ext uri="{FF2B5EF4-FFF2-40B4-BE49-F238E27FC236}">
-                <a16:creationId xmlns:a16="http://schemas.microsoft.com/office/drawing/2014/main" id="{3D175182-7D39-02BB-B8FC-43867E2E9C76}"/>
+                <a16:creationId xmlns:a16="http://schemas.microsoft.com/office/drawing/2014/main" id="{CD924D0F-378F-25CA-9A33-8011781E6A15}"/>
               </a:ext>
             </a:extLst>
           </p:cNvPr>
@@ -8616,7 +8616,7 @@
           <p:cNvPr id="24" name="Прямоугольник 23">
             <a:extLst>
               <a:ext uri="{FF2B5EF4-FFF2-40B4-BE49-F238E27FC236}">
-                <a16:creationId xmlns:a16="http://schemas.microsoft.com/office/drawing/2014/main" id="{345E5D4D-04D4-6877-2E34-1104278D06B5}"/>
+                <a16:creationId xmlns:a16="http://schemas.microsoft.com/office/drawing/2014/main" id="{8894C5CD-64AC-9ECF-44C5-7FE7E88A825B}"/>
               </a:ext>
             </a:extLst>
           </p:cNvPr>
@@ -8684,7 +8684,7 @@
           <p:cNvPr id="25" name="TextBox 24">
             <a:extLst>
               <a:ext uri="{FF2B5EF4-FFF2-40B4-BE49-F238E27FC236}">
-                <a16:creationId xmlns:a16="http://schemas.microsoft.com/office/drawing/2014/main" id="{1EA535A0-7E36-7637-F9EB-567251341347}"/>
+                <a16:creationId xmlns:a16="http://schemas.microsoft.com/office/drawing/2014/main" id="{D560B954-F4D7-C245-342E-4719C58D76B2}"/>
               </a:ext>
             </a:extLst>
           </p:cNvPr>
@@ -8730,7 +8730,7 @@
           <p:cNvPr id="26" name="TextBox 25">
             <a:extLst>
               <a:ext uri="{FF2B5EF4-FFF2-40B4-BE49-F238E27FC236}">
-                <a16:creationId xmlns:a16="http://schemas.microsoft.com/office/drawing/2014/main" id="{4074438F-B52D-3C8E-D005-9D7BAA391FB7}"/>
+                <a16:creationId xmlns:a16="http://schemas.microsoft.com/office/drawing/2014/main" id="{A2CA4D83-97D1-0323-E818-73EE87266BE4}"/>
               </a:ext>
             </a:extLst>
           </p:cNvPr>
@@ -8770,7 +8770,7 @@
           <p:cNvPr id="27" name="Прямоугольник 26">
             <a:extLst>
               <a:ext uri="{FF2B5EF4-FFF2-40B4-BE49-F238E27FC236}">
-                <a16:creationId xmlns:a16="http://schemas.microsoft.com/office/drawing/2014/main" id="{739B5026-9151-F04F-B922-4DDEA34FF96B}"/>
+                <a16:creationId xmlns:a16="http://schemas.microsoft.com/office/drawing/2014/main" id="{33146872-3693-0BDC-3ADE-8B8832CAEE9B}"/>
               </a:ext>
             </a:extLst>
           </p:cNvPr>
@@ -8838,7 +8838,7 @@
           <p:cNvPr id="28" name="Прямоугольник 27">
             <a:extLst>
               <a:ext uri="{FF2B5EF4-FFF2-40B4-BE49-F238E27FC236}">
-                <a16:creationId xmlns:a16="http://schemas.microsoft.com/office/drawing/2014/main" id="{688B8011-4CDC-6535-16EF-46A8ACB63508}"/>
+                <a16:creationId xmlns:a16="http://schemas.microsoft.com/office/drawing/2014/main" id="{C6B173DC-A782-056D-1477-02EC8786F7FD}"/>
               </a:ext>
             </a:extLst>
           </p:cNvPr>
@@ -8906,7 +8906,7 @@
           <p:cNvPr id="29" name="TextBox 28">
             <a:extLst>
               <a:ext uri="{FF2B5EF4-FFF2-40B4-BE49-F238E27FC236}">
-                <a16:creationId xmlns:a16="http://schemas.microsoft.com/office/drawing/2014/main" id="{3A5C29D0-A1C0-D8D1-4FF6-CD99BF287516}"/>
+                <a16:creationId xmlns:a16="http://schemas.microsoft.com/office/drawing/2014/main" id="{65638315-31B0-39D3-3DE1-5A25B2D910D0}"/>
               </a:ext>
             </a:extLst>
           </p:cNvPr>
@@ -8952,7 +8952,7 @@
           <p:cNvPr id="30" name="TextBox 29">
             <a:extLst>
               <a:ext uri="{FF2B5EF4-FFF2-40B4-BE49-F238E27FC236}">
-                <a16:creationId xmlns:a16="http://schemas.microsoft.com/office/drawing/2014/main" id="{1D2D648E-43FC-75FF-1EDF-317EB0F860E8}"/>
+                <a16:creationId xmlns:a16="http://schemas.microsoft.com/office/drawing/2014/main" id="{EA0782F3-9B21-8A83-E058-EFE3B44BBB92}"/>
               </a:ext>
             </a:extLst>
           </p:cNvPr>
@@ -8992,7 +8992,7 @@
           <p:cNvPr id="31" name="TextBox 30">
             <a:extLst>
               <a:ext uri="{FF2B5EF4-FFF2-40B4-BE49-F238E27FC236}">
-                <a16:creationId xmlns:a16="http://schemas.microsoft.com/office/drawing/2014/main" id="{63945D4C-EB3C-3692-5215-82A6AF77A67E}"/>
+                <a16:creationId xmlns:a16="http://schemas.microsoft.com/office/drawing/2014/main" id="{D4A9CF8D-0B9E-EDB7-77E8-04BE8F6A069B}"/>
               </a:ext>
             </a:extLst>
           </p:cNvPr>
@@ -9030,7 +9030,7 @@
     </p:spTree>
     <p:extLst>
       <p:ext uri="{BB962C8B-B14F-4D97-AF65-F5344CB8AC3E}">
-        <p14:creationId xmlns:p14="http://schemas.microsoft.com/office/powerpoint/2010/main" val="1375157487"/>
+        <p14:creationId xmlns:p14="http://schemas.microsoft.com/office/powerpoint/2010/main" val="4195680498"/>
       </p:ext>
     </p:extLst>
   </p:cSld>
@@ -9062,7 +9062,7 @@
           <p:cNvPr id="2" name="Прямоугольник 1">
             <a:extLst>
               <a:ext uri="{FF2B5EF4-FFF2-40B4-BE49-F238E27FC236}">
-                <a16:creationId xmlns:a16="http://schemas.microsoft.com/office/drawing/2014/main" id="{34D2BBBF-7C21-09E5-AE88-EADFC1235CCC}"/>
+                <a16:creationId xmlns:a16="http://schemas.microsoft.com/office/drawing/2014/main" id="{E444FA2B-B923-8064-1B1A-CD74608EB8E1}"/>
               </a:ext>
             </a:extLst>
           </p:cNvPr>
@@ -9130,7 +9130,7 @@
           <p:cNvPr id="3" name="Прямоугольник 2">
             <a:extLst>
               <a:ext uri="{FF2B5EF4-FFF2-40B4-BE49-F238E27FC236}">
-                <a16:creationId xmlns:a16="http://schemas.microsoft.com/office/drawing/2014/main" id="{3A3608DB-8B0C-BC99-F59C-259075484BB2}"/>
+                <a16:creationId xmlns:a16="http://schemas.microsoft.com/office/drawing/2014/main" id="{4E7A3E1F-70D5-2BD1-AB0A-6065ED2510C1}"/>
               </a:ext>
             </a:extLst>
           </p:cNvPr>
@@ -9198,7 +9198,7 @@
           <p:cNvPr id="4" name="TextBox 3">
             <a:extLst>
               <a:ext uri="{FF2B5EF4-FFF2-40B4-BE49-F238E27FC236}">
-                <a16:creationId xmlns:a16="http://schemas.microsoft.com/office/drawing/2014/main" id="{D2AECA4E-FFFB-2E4F-9F08-7E1D819BFBB0}"/>
+                <a16:creationId xmlns:a16="http://schemas.microsoft.com/office/drawing/2014/main" id="{9B81033A-1AAC-3AF7-8F6B-C4605426117E}"/>
               </a:ext>
             </a:extLst>
           </p:cNvPr>
@@ -9238,7 +9238,7 @@
           <p:cNvPr id="5" name="TextBox 4">
             <a:extLst>
               <a:ext uri="{FF2B5EF4-FFF2-40B4-BE49-F238E27FC236}">
-                <a16:creationId xmlns:a16="http://schemas.microsoft.com/office/drawing/2014/main" id="{9B96FD80-60FC-7828-7A61-4EB02ADDCCE5}"/>
+                <a16:creationId xmlns:a16="http://schemas.microsoft.com/office/drawing/2014/main" id="{CD0645F0-4469-6D16-660A-7FFDCD570996}"/>
               </a:ext>
             </a:extLst>
           </p:cNvPr>
@@ -9279,7 +9279,7 @@
           <p:cNvPr id="6" name="Прямоугольник 5">
             <a:extLst>
               <a:ext uri="{FF2B5EF4-FFF2-40B4-BE49-F238E27FC236}">
-                <a16:creationId xmlns:a16="http://schemas.microsoft.com/office/drawing/2014/main" id="{9BBFC87A-1E9E-6F7F-F691-E981DAF2B58B}"/>
+                <a16:creationId xmlns:a16="http://schemas.microsoft.com/office/drawing/2014/main" id="{DD19820A-926D-01F2-35D2-8DF9D468A4F3}"/>
               </a:ext>
             </a:extLst>
           </p:cNvPr>
@@ -9344,53 +9344,118 @@
       </p:sp>
       <p:pic>
         <p:nvPicPr>
-          <p:cNvPr id="7" name="demo-app">
-            <a:hlinkClick r:id="" action="ppaction://media"/>
-            <a:extLst>
-              <a:ext uri="{FF2B5EF4-FFF2-40B4-BE49-F238E27FC236}">
-                <a16:creationId xmlns:a16="http://schemas.microsoft.com/office/drawing/2014/main" id="{BB219300-692C-F7E6-AB90-1C96158066A0}"/>
+          <p:cNvPr id="8" name="Рисунок 7">
+            <a:extLst>
+              <a:ext uri="{FF2B5EF4-FFF2-40B4-BE49-F238E27FC236}">
+                <a16:creationId xmlns:a16="http://schemas.microsoft.com/office/drawing/2014/main" id="{F69C1A4E-6AEF-5EB2-3E48-C522DD5A76C0}"/>
               </a:ext>
             </a:extLst>
           </p:cNvPr>
           <p:cNvPicPr>
-            <a:picLocks/>
+            <a:picLocks noChangeAspect="1"/>
           </p:cNvPicPr>
-          <p:nvPr>
-            <a:videoFile r:link="rId2"/>
-            <p:extLst>
-              <p:ext uri="{DAA4B4D4-6D71-4841-9C94-3DE7FCFB9230}">
-                <p14:media xmlns:p14="http://schemas.microsoft.com/office/powerpoint/2010/main" r:embed="rId1"/>
-              </p:ext>
-            </p:extLst>
-          </p:nvPr>
+          <p:nvPr/>
         </p:nvPicPr>
         <p:blipFill>
-          <a:blip r:embed="rId4"/>
+          <a:blip r:embed="rId2">
+            <a:extLst>
+              <a:ext uri="{28A0092B-C50C-407E-A947-70E740481C1C}">
+                <a14:useLocalDpi xmlns:a14="http://schemas.microsoft.com/office/drawing/2010/main" val="0"/>
+              </a:ext>
+            </a:extLst>
+          </a:blip>
           <a:stretch>
             <a:fillRect/>
           </a:stretch>
         </p:blipFill>
         <p:spPr>
           <a:xfrm>
-            <a:off x="558800" y="1676400"/>
-            <a:ext cx="7112000" cy="4000500"/>
-          </a:xfrm>
-          <a:prstGeom prst="rect">
-            <a:avLst/>
-          </a:prstGeom>
-          <a:ln w="19050">
-            <a:solidFill>
-              <a:srgbClr val="5B4B6E"/>
-            </a:solidFill>
-          </a:ln>
+            <a:off x="558800" y="1270000"/>
+            <a:ext cx="3175000" cy="2286000"/>
+          </a:xfrm>
+          <a:prstGeom prst="rect">
+            <a:avLst/>
+          </a:prstGeom>
         </p:spPr>
       </p:pic>
-      <p:sp>
-        <p:nvSpPr>
-          <p:cNvPr id="8" name="TextBox 7">
-            <a:extLst>
-              <a:ext uri="{FF2B5EF4-FFF2-40B4-BE49-F238E27FC236}">
-                <a16:creationId xmlns:a16="http://schemas.microsoft.com/office/drawing/2014/main" id="{96E13FBD-A884-6FED-0686-C7FB68FA0558}"/>
+      <p:pic>
+        <p:nvPicPr>
+          <p:cNvPr id="10" name="Рисунок 9">
+            <a:extLst>
+              <a:ext uri="{FF2B5EF4-FFF2-40B4-BE49-F238E27FC236}">
+                <a16:creationId xmlns:a16="http://schemas.microsoft.com/office/drawing/2014/main" id="{C9B5F76C-5ACF-A6BE-CA3C-3B6EC5D7493E}"/>
+              </a:ext>
+            </a:extLst>
+          </p:cNvPr>
+          <p:cNvPicPr>
+            <a:picLocks noChangeAspect="1"/>
+          </p:cNvPicPr>
+          <p:nvPr/>
+        </p:nvPicPr>
+        <p:blipFill>
+          <a:blip r:embed="rId3">
+            <a:extLst>
+              <a:ext uri="{28A0092B-C50C-407E-A947-70E740481C1C}">
+                <a14:useLocalDpi xmlns:a14="http://schemas.microsoft.com/office/drawing/2010/main" val="0"/>
+              </a:ext>
+            </a:extLst>
+          </a:blip>
+          <a:stretch>
+            <a:fillRect/>
+          </a:stretch>
+        </p:blipFill>
+        <p:spPr>
+          <a:xfrm>
+            <a:off x="3937000" y="1270000"/>
+            <a:ext cx="3175000" cy="2286000"/>
+          </a:xfrm>
+          <a:prstGeom prst="rect">
+            <a:avLst/>
+          </a:prstGeom>
+        </p:spPr>
+      </p:pic>
+      <p:pic>
+        <p:nvPicPr>
+          <p:cNvPr id="12" name="Рисунок 11">
+            <a:extLst>
+              <a:ext uri="{FF2B5EF4-FFF2-40B4-BE49-F238E27FC236}">
+                <a16:creationId xmlns:a16="http://schemas.microsoft.com/office/drawing/2014/main" id="{6C5989A7-06D9-1F9E-6024-7CB9739DE64C}"/>
+              </a:ext>
+            </a:extLst>
+          </p:cNvPr>
+          <p:cNvPicPr>
+            <a:picLocks noChangeAspect="1"/>
+          </p:cNvPicPr>
+          <p:nvPr/>
+        </p:nvPicPr>
+        <p:blipFill>
+          <a:blip r:embed="rId4">
+            <a:extLst>
+              <a:ext uri="{28A0092B-C50C-407E-A947-70E740481C1C}">
+                <a14:useLocalDpi xmlns:a14="http://schemas.microsoft.com/office/drawing/2010/main" val="0"/>
+              </a:ext>
+            </a:extLst>
+          </a:blip>
+          <a:stretch>
+            <a:fillRect/>
+          </a:stretch>
+        </p:blipFill>
+        <p:spPr>
+          <a:xfrm>
+            <a:off x="7315200" y="1270000"/>
+            <a:ext cx="3175000" cy="2286000"/>
+          </a:xfrm>
+          <a:prstGeom prst="rect">
+            <a:avLst/>
+          </a:prstGeom>
+        </p:spPr>
+      </p:pic>
+      <p:sp>
+        <p:nvSpPr>
+          <p:cNvPr id="13" name="TextBox 12">
+            <a:extLst>
+              <a:ext uri="{FF2B5EF4-FFF2-40B4-BE49-F238E27FC236}">
+                <a16:creationId xmlns:a16="http://schemas.microsoft.com/office/drawing/2014/main" id="{DBD38C23-83AB-3B4C-1F1D-35C523D12AE1}"/>
               </a:ext>
             </a:extLst>
           </p:cNvPr>
@@ -9399,48 +9464,8 @@
         </p:nvSpPr>
         <p:spPr>
           <a:xfrm>
-            <a:off x="558800" y="5816600"/>
-            <a:ext cx="7112000" cy="369332"/>
-          </a:xfrm>
-          <a:prstGeom prst="rect">
-            <a:avLst/>
-          </a:prstGeom>
-          <a:noFill/>
-        </p:spPr>
-        <p:txBody>
-          <a:bodyPr vert="horz" wrap="square" lIns="0" tIns="0" rIns="0" bIns="0" rtlCol="0">
-            <a:noAutofit/>
-          </a:bodyPr>
-          <a:lstStyle/>
-          <a:p>
-            <a:r>
-              <a:rPr lang="ru-RU" sz="1400">
-                <a:solidFill>
-                  <a:srgbClr val="6B6472"/>
-                </a:solidFill>
-                <a:latin typeface="Times New Roman" panose="02020603050405020304" pitchFamily="18" charset="0"/>
-              </a:rPr>
-              <a:t>Демонстрация занимает около 25 секунд</a:t>
-            </a:r>
-          </a:p>
-        </p:txBody>
-      </p:sp>
-      <p:sp>
-        <p:nvSpPr>
-          <p:cNvPr id="9" name="TextBox 8">
-            <a:extLst>
-              <a:ext uri="{FF2B5EF4-FFF2-40B4-BE49-F238E27FC236}">
-                <a16:creationId xmlns:a16="http://schemas.microsoft.com/office/drawing/2014/main" id="{A5D42C6B-7ED8-3272-3F6D-3125B3603938}"/>
-              </a:ext>
-            </a:extLst>
-          </p:cNvPr>
-          <p:cNvSpPr txBox="1"/>
-          <p:nvPr/>
-        </p:nvSpPr>
-        <p:spPr>
-          <a:xfrm>
-            <a:off x="8001000" y="1727200"/>
-            <a:ext cx="3632200" cy="369332"/>
+            <a:off x="558800" y="4064000"/>
+            <a:ext cx="11074400" cy="369332"/>
           </a:xfrm>
           <a:prstGeom prst="rect">
             <a:avLst/>
@@ -9462,7 +9487,7 @@
               <a:buChar char="•"/>
             </a:pPr>
             <a:r>
-              <a:rPr lang="ru-RU" sz="1500">
+              <a:rPr lang="ru-RU" sz="1600">
                 <a:solidFill>
                   <a:srgbClr val="2B2233"/>
                 </a:solidFill>
@@ -9481,7 +9506,7 @@
               <a:buChar char="•"/>
             </a:pPr>
             <a:r>
-              <a:rPr lang="ru-RU" sz="1500">
+              <a:rPr lang="ru-RU" sz="1600">
                 <a:solidFill>
                   <a:srgbClr val="2B2233"/>
                 </a:solidFill>
@@ -9500,13 +9525,13 @@
               <a:buChar char="•"/>
             </a:pPr>
             <a:r>
-              <a:rPr lang="ru-RU" sz="1500">
+              <a:rPr lang="ru-RU" sz="1600">
                 <a:solidFill>
                   <a:srgbClr val="2B2233"/>
                 </a:solidFill>
                 <a:latin typeface="Times New Roman" panose="02020603050405020304" pitchFamily="18" charset="0"/>
               </a:rPr>
-              <a:t>Проверка работы учителем, выставление балла и комментария</a:t>
+              <a:t>Проверка работы учителем, выставление балла и комментария, формирование ведомости</a:t>
             </a:r>
           </a:p>
           <a:p>
@@ -9519,26 +9544,7 @@
               <a:buChar char="•"/>
             </a:pPr>
             <a:r>
-              <a:rPr lang="ru-RU" sz="1500">
-                <a:solidFill>
-                  <a:srgbClr val="2B2233"/>
-                </a:solidFill>
-                <a:latin typeface="Times New Roman" panose="02020603050405020304" pitchFamily="18" charset="0"/>
-              </a:rPr>
-              <a:t>Формирование ведомости успеваемости по курсу</a:t>
-            </a:r>
-          </a:p>
-          <a:p>
-            <a:pPr indent="330200">
-              <a:spcAft>
-                <a:spcPts val="1000"/>
-              </a:spcAft>
-              <a:buSzPct val="90000"/>
-              <a:buFont typeface="+mj-lt"/>
-              <a:buChar char="•"/>
-            </a:pPr>
-            <a:r>
-              <a:rPr lang="ru-RU" sz="1500">
+              <a:rPr lang="ru-RU" sz="1600">
                 <a:solidFill>
                   <a:srgbClr val="2B2233"/>
                 </a:solidFill>
@@ -9556,7 +9562,7 @@
               <a:buFont typeface="+mj-lt"/>
               <a:buChar char="•"/>
             </a:pPr>
-            <a:endParaRPr lang="ru-RU" sz="1500">
+            <a:endParaRPr lang="ru-RU" sz="1600">
               <a:solidFill>
                 <a:srgbClr val="2B2233"/>
               </a:solidFill>
@@ -9568,148 +9574,13 @@
     </p:spTree>
     <p:extLst>
       <p:ext uri="{BB962C8B-B14F-4D97-AF65-F5344CB8AC3E}">
-        <p14:creationId xmlns:p14="http://schemas.microsoft.com/office/powerpoint/2010/main" val="2275575573"/>
+        <p14:creationId xmlns:p14="http://schemas.microsoft.com/office/powerpoint/2010/main" val="4147453297"/>
       </p:ext>
     </p:extLst>
   </p:cSld>
   <p:clrMapOvr>
     <a:masterClrMapping/>
   </p:clrMapOvr>
-  <p:timing>
-    <p:tnLst>
-      <p:par>
-        <p:cTn id="1" dur="indefinite" restart="never" nodeType="tmRoot">
-          <p:childTnLst>
-            <p:seq concurrent="1" nextAc="seek">
-              <p:cTn id="2" dur="indefinite" nodeType="mainSeq">
-                <p:childTnLst>
-                  <p:par>
-                    <p:cTn id="3" fill="hold">
-                      <p:stCondLst>
-                        <p:cond delay="indefinite"/>
-                      </p:stCondLst>
-                      <p:childTnLst>
-                        <p:par>
-                          <p:cTn id="4" fill="hold">
-                            <p:stCondLst>
-                              <p:cond delay="0"/>
-                            </p:stCondLst>
-                            <p:childTnLst>
-                              <p:par>
-                                <p:cTn id="5" presetID="1" presetClass="mediacall" presetSubtype="0" fill="hold" nodeType="clickEffect">
-                                  <p:stCondLst>
-                                    <p:cond delay="0"/>
-                                  </p:stCondLst>
-                                  <p:childTnLst>
-                                    <p:cmd type="call" cmd="playFrom(0.0)">
-                                      <p:cBhvr>
-                                        <p:cTn id="6" dur="24123" fill="hold"/>
-                                        <p:tgtEl>
-                                          <p:spTgt spid="7"/>
-                                        </p:tgtEl>
-                                      </p:cBhvr>
-                                    </p:cmd>
-                                  </p:childTnLst>
-                                </p:cTn>
-                              </p:par>
-                            </p:childTnLst>
-                          </p:cTn>
-                        </p:par>
-                      </p:childTnLst>
-                    </p:cTn>
-                  </p:par>
-                </p:childTnLst>
-              </p:cTn>
-              <p:prevCondLst>
-                <p:cond evt="onPrev" delay="0">
-                  <p:tgtEl>
-                    <p:sldTgt/>
-                  </p:tgtEl>
-                </p:cond>
-              </p:prevCondLst>
-              <p:nextCondLst>
-                <p:cond evt="onNext" delay="0">
-                  <p:tgtEl>
-                    <p:sldTgt/>
-                  </p:tgtEl>
-                </p:cond>
-              </p:nextCondLst>
-            </p:seq>
-            <p:video>
-              <p:cMediaNode vol="80000" showWhenStopped="0">
-                <p:cTn id="7" fill="hold" display="0">
-                  <p:stCondLst>
-                    <p:cond delay="indefinite"/>
-                  </p:stCondLst>
-                </p:cTn>
-                <p:tgtEl>
-                  <p:spTgt spid="7"/>
-                </p:tgtEl>
-              </p:cMediaNode>
-            </p:video>
-            <p:seq concurrent="1" nextAc="seek">
-              <p:cTn id="8" restart="whenNotActive" fill="hold" evtFilter="cancelBubble" nodeType="interactiveSeq">
-                <p:stCondLst>
-                  <p:cond evt="onClick" delay="0">
-                    <p:tgtEl>
-                      <p:spTgt spid="7"/>
-                    </p:tgtEl>
-                  </p:cond>
-                </p:stCondLst>
-                <p:endSync evt="end" delay="0">
-                  <p:rtn val="all"/>
-                </p:endSync>
-                <p:childTnLst>
-                  <p:par>
-                    <p:cTn id="9" fill="hold">
-                      <p:stCondLst>
-                        <p:cond delay="0"/>
-                      </p:stCondLst>
-                      <p:childTnLst>
-                        <p:par>
-                          <p:cTn id="10" fill="hold">
-                            <p:stCondLst>
-                              <p:cond delay="0"/>
-                            </p:stCondLst>
-                            <p:childTnLst>
-                              <p:par>
-                                <p:cTn id="11" presetID="2" presetClass="mediacall" presetSubtype="0" fill="hold" nodeType="clickEffect">
-                                  <p:stCondLst>
-                                    <p:cond delay="0"/>
-                                  </p:stCondLst>
-                                  <p:childTnLst>
-                                    <p:cmd type="call" cmd="togglePause">
-                                      <p:cBhvr>
-                                        <p:cTn id="12" dur="1" fill="hold"/>
-                                        <p:tgtEl>
-                                          <p:spTgt spid="7"/>
-                                        </p:tgtEl>
-                                      </p:cBhvr>
-                                    </p:cmd>
-                                  </p:childTnLst>
-                                </p:cTn>
-                              </p:par>
-                            </p:childTnLst>
-                          </p:cTn>
-                        </p:par>
-                      </p:childTnLst>
-                    </p:cTn>
-                  </p:par>
-                </p:childTnLst>
-              </p:cTn>
-              <p:nextCondLst>
-                <p:cond evt="onClick" delay="0">
-                  <p:tgtEl>
-                    <p:spTgt spid="7"/>
-                  </p:tgtEl>
-                </p:cond>
-              </p:nextCondLst>
-            </p:seq>
-          </p:childTnLst>
-        </p:cTn>
-      </p:par>
-    </p:tnLst>
-  </p:timing>
 </p:sld>
 </file>
 
@@ -9735,7 +9606,7 @@
           <p:cNvPr id="2" name="Прямоугольник 1">
             <a:extLst>
               <a:ext uri="{FF2B5EF4-FFF2-40B4-BE49-F238E27FC236}">
-                <a16:creationId xmlns:a16="http://schemas.microsoft.com/office/drawing/2014/main" id="{70E3157C-E616-279C-6C6E-C90100D7E6C4}"/>
+                <a16:creationId xmlns:a16="http://schemas.microsoft.com/office/drawing/2014/main" id="{F6BE5FB4-E801-F8EA-2CE6-03D6E6DC1DCD}"/>
               </a:ext>
             </a:extLst>
           </p:cNvPr>
@@ -9803,7 +9674,7 @@
           <p:cNvPr id="3" name="Прямоугольник 2">
             <a:extLst>
               <a:ext uri="{FF2B5EF4-FFF2-40B4-BE49-F238E27FC236}">
-                <a16:creationId xmlns:a16="http://schemas.microsoft.com/office/drawing/2014/main" id="{5A23E356-8D12-B77C-5B44-2420EDB7516A}"/>
+                <a16:creationId xmlns:a16="http://schemas.microsoft.com/office/drawing/2014/main" id="{86122630-2942-DA12-28E7-386A8AB41FC5}"/>
               </a:ext>
             </a:extLst>
           </p:cNvPr>
@@ -9871,7 +9742,7 @@
           <p:cNvPr id="4" name="TextBox 3">
             <a:extLst>
               <a:ext uri="{FF2B5EF4-FFF2-40B4-BE49-F238E27FC236}">
-                <a16:creationId xmlns:a16="http://schemas.microsoft.com/office/drawing/2014/main" id="{6063E125-E878-DCB5-35BC-E6528E879E72}"/>
+                <a16:creationId xmlns:a16="http://schemas.microsoft.com/office/drawing/2014/main" id="{C8113A6B-8B3E-25E0-FFC3-11E68DC33053}"/>
               </a:ext>
             </a:extLst>
           </p:cNvPr>
@@ -9911,7 +9782,7 @@
           <p:cNvPr id="5" name="Прямоугольник 4">
             <a:extLst>
               <a:ext uri="{FF2B5EF4-FFF2-40B4-BE49-F238E27FC236}">
-                <a16:creationId xmlns:a16="http://schemas.microsoft.com/office/drawing/2014/main" id="{DF344452-8E85-EF86-CB81-90A8FD3B9588}"/>
+                <a16:creationId xmlns:a16="http://schemas.microsoft.com/office/drawing/2014/main" id="{6B35A9E2-DF2E-97B9-DEC4-7ABF7DB14274}"/>
               </a:ext>
             </a:extLst>
           </p:cNvPr>
@@ -9979,7 +9850,7 @@
           <p:cNvPr id="6" name="TextBox 5">
             <a:extLst>
               <a:ext uri="{FF2B5EF4-FFF2-40B4-BE49-F238E27FC236}">
-                <a16:creationId xmlns:a16="http://schemas.microsoft.com/office/drawing/2014/main" id="{1E309CC6-AD46-6A3E-2326-551A06F812CA}"/>
+                <a16:creationId xmlns:a16="http://schemas.microsoft.com/office/drawing/2014/main" id="{826E5247-6872-9B27-1158-C2C44D905039}"/>
               </a:ext>
             </a:extLst>
           </p:cNvPr>
@@ -10019,7 +9890,7 @@
           <p:cNvPr id="7" name="TextBox 6">
             <a:extLst>
               <a:ext uri="{FF2B5EF4-FFF2-40B4-BE49-F238E27FC236}">
-                <a16:creationId xmlns:a16="http://schemas.microsoft.com/office/drawing/2014/main" id="{7F8E11E5-DC70-19C8-4426-C43598264144}"/>
+                <a16:creationId xmlns:a16="http://schemas.microsoft.com/office/drawing/2014/main" id="{555D625B-9006-DF91-5ECD-1C85E933325E}"/>
               </a:ext>
             </a:extLst>
           </p:cNvPr>
@@ -10059,7 +9930,7 @@
           <p:cNvPr id="8" name="TextBox 7">
             <a:extLst>
               <a:ext uri="{FF2B5EF4-FFF2-40B4-BE49-F238E27FC236}">
-                <a16:creationId xmlns:a16="http://schemas.microsoft.com/office/drawing/2014/main" id="{D60C12A0-F4ED-49FE-95E3-22916E2B947F}"/>
+                <a16:creationId xmlns:a16="http://schemas.microsoft.com/office/drawing/2014/main" id="{CD692202-B522-978A-1C6C-8FB42EC87FB5}"/>
               </a:ext>
             </a:extLst>
           </p:cNvPr>
@@ -10099,7 +9970,7 @@
           <p:cNvPr id="9" name="TextBox 8">
             <a:extLst>
               <a:ext uri="{FF2B5EF4-FFF2-40B4-BE49-F238E27FC236}">
-                <a16:creationId xmlns:a16="http://schemas.microsoft.com/office/drawing/2014/main" id="{5EAB745E-698C-D7AB-6732-FE955EE56EB4}"/>
+                <a16:creationId xmlns:a16="http://schemas.microsoft.com/office/drawing/2014/main" id="{5C9D8D12-BE7E-9CA4-4702-DF2B8B6A7BDB}"/>
               </a:ext>
             </a:extLst>
           </p:cNvPr>
@@ -10137,7 +10008,7 @@
     </p:spTree>
     <p:extLst>
       <p:ext uri="{BB962C8B-B14F-4D97-AF65-F5344CB8AC3E}">
-        <p14:creationId xmlns:p14="http://schemas.microsoft.com/office/powerpoint/2010/main" val="4222057683"/>
+        <p14:creationId xmlns:p14="http://schemas.microsoft.com/office/powerpoint/2010/main" val="1795533461"/>
       </p:ext>
     </p:extLst>
   </p:cSld>

--- a/Презентация к защите.pptx
+++ b/Презентация к защите.pptx
@@ -137,7 +137,7 @@
           <p:cNvPr id="2" name="Заголовок 1">
             <a:extLst>
               <a:ext uri="{FF2B5EF4-FFF2-40B4-BE49-F238E27FC236}">
-                <a16:creationId xmlns:a16="http://schemas.microsoft.com/office/drawing/2014/main" id="{EE94B20A-B01F-21FA-E836-7D6BB49EA453}"/>
+                <a16:creationId xmlns:a16="http://schemas.microsoft.com/office/drawing/2014/main" id="{4B2486AD-BD7A-81DE-D8D4-D234F2A4C735}"/>
               </a:ext>
             </a:extLst>
           </p:cNvPr>
@@ -174,7 +174,7 @@
           <p:cNvPr id="3" name="Подзаголовок 2">
             <a:extLst>
               <a:ext uri="{FF2B5EF4-FFF2-40B4-BE49-F238E27FC236}">
-                <a16:creationId xmlns:a16="http://schemas.microsoft.com/office/drawing/2014/main" id="{4578432F-DB23-4B23-719D-54E46714234E}"/>
+                <a16:creationId xmlns:a16="http://schemas.microsoft.com/office/drawing/2014/main" id="{54148D8C-D25E-E387-A409-93096D513968}"/>
               </a:ext>
             </a:extLst>
           </p:cNvPr>
@@ -244,7 +244,7 @@
           <p:cNvPr id="4" name="Дата 3">
             <a:extLst>
               <a:ext uri="{FF2B5EF4-FFF2-40B4-BE49-F238E27FC236}">
-                <a16:creationId xmlns:a16="http://schemas.microsoft.com/office/drawing/2014/main" id="{947C741E-FEDF-EBD2-854F-FCE642255DB5}"/>
+                <a16:creationId xmlns:a16="http://schemas.microsoft.com/office/drawing/2014/main" id="{5809E470-1D13-61BE-4E58-BEFE8ADCCE41}"/>
               </a:ext>
             </a:extLst>
           </p:cNvPr>
@@ -260,9 +260,9 @@
           <a:bodyPr/>
           <a:lstStyle/>
           <a:p>
-            <a:fld id="{FECAD547-0098-4F95-A3E6-B35FDCDAFEB6}" type="datetimeFigureOut">
+            <a:fld id="{3DF2BDC6-13AE-4F9F-BB14-CB3866DECA51}" type="datetimeFigureOut">
               <a:rPr lang="ru-RU" smtClean="0"/>
-              <a:t>22.10.2026</a:t>
+              <a:t>27.10.2026</a:t>
             </a:fld>
             <a:endParaRPr lang="ru-RU"/>
           </a:p>
@@ -273,7 +273,7 @@
           <p:cNvPr id="5" name="Нижний колонтитул 4">
             <a:extLst>
               <a:ext uri="{FF2B5EF4-FFF2-40B4-BE49-F238E27FC236}">
-                <a16:creationId xmlns:a16="http://schemas.microsoft.com/office/drawing/2014/main" id="{AF337277-ED54-A559-296C-2FFA8A5AF8A5}"/>
+                <a16:creationId xmlns:a16="http://schemas.microsoft.com/office/drawing/2014/main" id="{707F0AD8-194E-1F03-DFE0-3C43B453E98E}"/>
               </a:ext>
             </a:extLst>
           </p:cNvPr>
@@ -298,7 +298,7 @@
           <p:cNvPr id="6" name="Номер слайда 5">
             <a:extLst>
               <a:ext uri="{FF2B5EF4-FFF2-40B4-BE49-F238E27FC236}">
-                <a16:creationId xmlns:a16="http://schemas.microsoft.com/office/drawing/2014/main" id="{FFA792D4-1D6E-BD80-D41E-CE700217E6DE}"/>
+                <a16:creationId xmlns:a16="http://schemas.microsoft.com/office/drawing/2014/main" id="{BC0DA99A-F0DB-AFEE-9A8F-3D247833932D}"/>
               </a:ext>
             </a:extLst>
           </p:cNvPr>
@@ -314,7 +314,7 @@
           <a:bodyPr/>
           <a:lstStyle/>
           <a:p>
-            <a:fld id="{14248956-2374-48B4-B20B-A1021DAEFE0D}" type="slidenum">
+            <a:fld id="{FCF6D127-6394-4B2C-B510-ECF110AB5AEF}" type="slidenum">
               <a:rPr lang="ru-RU" smtClean="0"/>
               <a:t>‹#›</a:t>
             </a:fld>
@@ -325,7 +325,7 @@
     </p:spTree>
     <p:extLst>
       <p:ext uri="{BB962C8B-B14F-4D97-AF65-F5344CB8AC3E}">
-        <p14:creationId xmlns:p14="http://schemas.microsoft.com/office/powerpoint/2010/main" val="1701829731"/>
+        <p14:creationId xmlns:p14="http://schemas.microsoft.com/office/powerpoint/2010/main" val="680250413"/>
       </p:ext>
     </p:extLst>
   </p:cSld>
@@ -357,7 +357,7 @@
           <p:cNvPr id="2" name="Заголовок 1">
             <a:extLst>
               <a:ext uri="{FF2B5EF4-FFF2-40B4-BE49-F238E27FC236}">
-                <a16:creationId xmlns:a16="http://schemas.microsoft.com/office/drawing/2014/main" id="{2EE9AF7F-CDE3-E01A-70F3-33BAD59B0F9C}"/>
+                <a16:creationId xmlns:a16="http://schemas.microsoft.com/office/drawing/2014/main" id="{D93BB83C-227C-C26F-C048-BBB20DCCC570}"/>
               </a:ext>
             </a:extLst>
           </p:cNvPr>
@@ -385,7 +385,7 @@
           <p:cNvPr id="3" name="Вертикальный текст 2">
             <a:extLst>
               <a:ext uri="{FF2B5EF4-FFF2-40B4-BE49-F238E27FC236}">
-                <a16:creationId xmlns:a16="http://schemas.microsoft.com/office/drawing/2014/main" id="{D7EA22BC-7755-9735-3C1C-1847B3A8C3E6}"/>
+                <a16:creationId xmlns:a16="http://schemas.microsoft.com/office/drawing/2014/main" id="{62473715-5FB4-914C-552B-71D036209F15}"/>
               </a:ext>
             </a:extLst>
           </p:cNvPr>
@@ -442,7 +442,7 @@
           <p:cNvPr id="4" name="Дата 3">
             <a:extLst>
               <a:ext uri="{FF2B5EF4-FFF2-40B4-BE49-F238E27FC236}">
-                <a16:creationId xmlns:a16="http://schemas.microsoft.com/office/drawing/2014/main" id="{EB03F557-D6B8-B4CA-D5B3-A40779BFAE91}"/>
+                <a16:creationId xmlns:a16="http://schemas.microsoft.com/office/drawing/2014/main" id="{781A9F3C-160A-2827-C822-2E832659E186}"/>
               </a:ext>
             </a:extLst>
           </p:cNvPr>
@@ -458,9 +458,9 @@
           <a:bodyPr/>
           <a:lstStyle/>
           <a:p>
-            <a:fld id="{FECAD547-0098-4F95-A3E6-B35FDCDAFEB6}" type="datetimeFigureOut">
+            <a:fld id="{3DF2BDC6-13AE-4F9F-BB14-CB3866DECA51}" type="datetimeFigureOut">
               <a:rPr lang="ru-RU" smtClean="0"/>
-              <a:t>22.10.2026</a:t>
+              <a:t>27.10.2026</a:t>
             </a:fld>
             <a:endParaRPr lang="ru-RU"/>
           </a:p>
@@ -471,7 +471,7 @@
           <p:cNvPr id="5" name="Нижний колонтитул 4">
             <a:extLst>
               <a:ext uri="{FF2B5EF4-FFF2-40B4-BE49-F238E27FC236}">
-                <a16:creationId xmlns:a16="http://schemas.microsoft.com/office/drawing/2014/main" id="{5F1D34D3-F6F8-A691-4E6C-62519F96B251}"/>
+                <a16:creationId xmlns:a16="http://schemas.microsoft.com/office/drawing/2014/main" id="{13ED2348-484A-8D5D-9D12-99E5754BF910}"/>
               </a:ext>
             </a:extLst>
           </p:cNvPr>
@@ -496,7 +496,7 @@
           <p:cNvPr id="6" name="Номер слайда 5">
             <a:extLst>
               <a:ext uri="{FF2B5EF4-FFF2-40B4-BE49-F238E27FC236}">
-                <a16:creationId xmlns:a16="http://schemas.microsoft.com/office/drawing/2014/main" id="{240DE742-0379-3B64-0771-C8D4F32EB16E}"/>
+                <a16:creationId xmlns:a16="http://schemas.microsoft.com/office/drawing/2014/main" id="{F23822CF-D88E-E1DE-FA3F-80AF051E9FD6}"/>
               </a:ext>
             </a:extLst>
           </p:cNvPr>
@@ -512,7 +512,7 @@
           <a:bodyPr/>
           <a:lstStyle/>
           <a:p>
-            <a:fld id="{14248956-2374-48B4-B20B-A1021DAEFE0D}" type="slidenum">
+            <a:fld id="{FCF6D127-6394-4B2C-B510-ECF110AB5AEF}" type="slidenum">
               <a:rPr lang="ru-RU" smtClean="0"/>
               <a:t>‹#›</a:t>
             </a:fld>
@@ -523,7 +523,7 @@
     </p:spTree>
     <p:extLst>
       <p:ext uri="{BB962C8B-B14F-4D97-AF65-F5344CB8AC3E}">
-        <p14:creationId xmlns:p14="http://schemas.microsoft.com/office/powerpoint/2010/main" val="1908382336"/>
+        <p14:creationId xmlns:p14="http://schemas.microsoft.com/office/powerpoint/2010/main" val="2648384730"/>
       </p:ext>
     </p:extLst>
   </p:cSld>
@@ -555,7 +555,7 @@
           <p:cNvPr id="2" name="Вертикальный заголовок 1">
             <a:extLst>
               <a:ext uri="{FF2B5EF4-FFF2-40B4-BE49-F238E27FC236}">
-                <a16:creationId xmlns:a16="http://schemas.microsoft.com/office/drawing/2014/main" id="{570455D2-9415-313D-B5A1-729324D5CDC0}"/>
+                <a16:creationId xmlns:a16="http://schemas.microsoft.com/office/drawing/2014/main" id="{E53FE689-CBD5-64FE-EA48-781018BFEDB2}"/>
               </a:ext>
             </a:extLst>
           </p:cNvPr>
@@ -588,7 +588,7 @@
           <p:cNvPr id="3" name="Вертикальный текст 2">
             <a:extLst>
               <a:ext uri="{FF2B5EF4-FFF2-40B4-BE49-F238E27FC236}">
-                <a16:creationId xmlns:a16="http://schemas.microsoft.com/office/drawing/2014/main" id="{A60FB949-6E09-56BD-86B9-21A39907DB02}"/>
+                <a16:creationId xmlns:a16="http://schemas.microsoft.com/office/drawing/2014/main" id="{BEF289FE-EDF0-045A-96C3-88425064CED8}"/>
               </a:ext>
             </a:extLst>
           </p:cNvPr>
@@ -650,7 +650,7 @@
           <p:cNvPr id="4" name="Дата 3">
             <a:extLst>
               <a:ext uri="{FF2B5EF4-FFF2-40B4-BE49-F238E27FC236}">
-                <a16:creationId xmlns:a16="http://schemas.microsoft.com/office/drawing/2014/main" id="{3D34B6E7-54AD-2DBA-E641-F6EE7A7285C0}"/>
+                <a16:creationId xmlns:a16="http://schemas.microsoft.com/office/drawing/2014/main" id="{CC5C6705-1FAD-903F-BA21-337EB63ABF8E}"/>
               </a:ext>
             </a:extLst>
           </p:cNvPr>
@@ -666,9 +666,9 @@
           <a:bodyPr/>
           <a:lstStyle/>
           <a:p>
-            <a:fld id="{FECAD547-0098-4F95-A3E6-B35FDCDAFEB6}" type="datetimeFigureOut">
+            <a:fld id="{3DF2BDC6-13AE-4F9F-BB14-CB3866DECA51}" type="datetimeFigureOut">
               <a:rPr lang="ru-RU" smtClean="0"/>
-              <a:t>22.10.2026</a:t>
+              <a:t>27.10.2026</a:t>
             </a:fld>
             <a:endParaRPr lang="ru-RU"/>
           </a:p>
@@ -679,7 +679,7 @@
           <p:cNvPr id="5" name="Нижний колонтитул 4">
             <a:extLst>
               <a:ext uri="{FF2B5EF4-FFF2-40B4-BE49-F238E27FC236}">
-                <a16:creationId xmlns:a16="http://schemas.microsoft.com/office/drawing/2014/main" id="{3D5E8A28-3292-AA4A-A9FF-FD41BB7FD919}"/>
+                <a16:creationId xmlns:a16="http://schemas.microsoft.com/office/drawing/2014/main" id="{E4F23E6F-224D-CAB0-2705-99389AD9E76A}"/>
               </a:ext>
             </a:extLst>
           </p:cNvPr>
@@ -704,7 +704,7 @@
           <p:cNvPr id="6" name="Номер слайда 5">
             <a:extLst>
               <a:ext uri="{FF2B5EF4-FFF2-40B4-BE49-F238E27FC236}">
-                <a16:creationId xmlns:a16="http://schemas.microsoft.com/office/drawing/2014/main" id="{BBB35B90-9B41-D63E-4361-A2141E343F50}"/>
+                <a16:creationId xmlns:a16="http://schemas.microsoft.com/office/drawing/2014/main" id="{8BFBD130-DB7F-DA56-F262-28805012B900}"/>
               </a:ext>
             </a:extLst>
           </p:cNvPr>
@@ -720,7 +720,7 @@
           <a:bodyPr/>
           <a:lstStyle/>
           <a:p>
-            <a:fld id="{14248956-2374-48B4-B20B-A1021DAEFE0D}" type="slidenum">
+            <a:fld id="{FCF6D127-6394-4B2C-B510-ECF110AB5AEF}" type="slidenum">
               <a:rPr lang="ru-RU" smtClean="0"/>
               <a:t>‹#›</a:t>
             </a:fld>
@@ -731,7 +731,7 @@
     </p:spTree>
     <p:extLst>
       <p:ext uri="{BB962C8B-B14F-4D97-AF65-F5344CB8AC3E}">
-        <p14:creationId xmlns:p14="http://schemas.microsoft.com/office/powerpoint/2010/main" val="1147969438"/>
+        <p14:creationId xmlns:p14="http://schemas.microsoft.com/office/powerpoint/2010/main" val="3216872016"/>
       </p:ext>
     </p:extLst>
   </p:cSld>
@@ -763,7 +763,7 @@
           <p:cNvPr id="2" name="Заголовок 1">
             <a:extLst>
               <a:ext uri="{FF2B5EF4-FFF2-40B4-BE49-F238E27FC236}">
-                <a16:creationId xmlns:a16="http://schemas.microsoft.com/office/drawing/2014/main" id="{262D4BFD-C2DC-275B-4294-D81A3522467D}"/>
+                <a16:creationId xmlns:a16="http://schemas.microsoft.com/office/drawing/2014/main" id="{9F28973C-8A0D-A2A7-36F0-7256895D6E0C}"/>
               </a:ext>
             </a:extLst>
           </p:cNvPr>
@@ -791,7 +791,7 @@
           <p:cNvPr id="3" name="Объект 2">
             <a:extLst>
               <a:ext uri="{FF2B5EF4-FFF2-40B4-BE49-F238E27FC236}">
-                <a16:creationId xmlns:a16="http://schemas.microsoft.com/office/drawing/2014/main" id="{E8D04246-4F6C-0F05-221A-567A323BF6F5}"/>
+                <a16:creationId xmlns:a16="http://schemas.microsoft.com/office/drawing/2014/main" id="{00BA6058-FC2F-1284-EEE7-0B2D62533C2A}"/>
               </a:ext>
             </a:extLst>
           </p:cNvPr>
@@ -848,7 +848,7 @@
           <p:cNvPr id="4" name="Дата 3">
             <a:extLst>
               <a:ext uri="{FF2B5EF4-FFF2-40B4-BE49-F238E27FC236}">
-                <a16:creationId xmlns:a16="http://schemas.microsoft.com/office/drawing/2014/main" id="{84065619-40D9-3706-DC43-82098FAACAC0}"/>
+                <a16:creationId xmlns:a16="http://schemas.microsoft.com/office/drawing/2014/main" id="{440CD4A6-F021-3A21-AEDB-6D6309E6279C}"/>
               </a:ext>
             </a:extLst>
           </p:cNvPr>
@@ -864,9 +864,9 @@
           <a:bodyPr/>
           <a:lstStyle/>
           <a:p>
-            <a:fld id="{FECAD547-0098-4F95-A3E6-B35FDCDAFEB6}" type="datetimeFigureOut">
+            <a:fld id="{3DF2BDC6-13AE-4F9F-BB14-CB3866DECA51}" type="datetimeFigureOut">
               <a:rPr lang="ru-RU" smtClean="0"/>
-              <a:t>22.10.2026</a:t>
+              <a:t>27.10.2026</a:t>
             </a:fld>
             <a:endParaRPr lang="ru-RU"/>
           </a:p>
@@ -877,7 +877,7 @@
           <p:cNvPr id="5" name="Нижний колонтитул 4">
             <a:extLst>
               <a:ext uri="{FF2B5EF4-FFF2-40B4-BE49-F238E27FC236}">
-                <a16:creationId xmlns:a16="http://schemas.microsoft.com/office/drawing/2014/main" id="{40A27328-30F0-89AB-53A7-06676921D588}"/>
+                <a16:creationId xmlns:a16="http://schemas.microsoft.com/office/drawing/2014/main" id="{CDDA7B97-5B68-6250-8892-1D2082CB8D12}"/>
               </a:ext>
             </a:extLst>
           </p:cNvPr>
@@ -902,7 +902,7 @@
           <p:cNvPr id="6" name="Номер слайда 5">
             <a:extLst>
               <a:ext uri="{FF2B5EF4-FFF2-40B4-BE49-F238E27FC236}">
-                <a16:creationId xmlns:a16="http://schemas.microsoft.com/office/drawing/2014/main" id="{2A50D9C9-3F7A-13A3-940D-2F36A68CB925}"/>
+                <a16:creationId xmlns:a16="http://schemas.microsoft.com/office/drawing/2014/main" id="{ACDF2965-B980-0E6C-4AD0-0A7131A4349A}"/>
               </a:ext>
             </a:extLst>
           </p:cNvPr>
@@ -918,7 +918,7 @@
           <a:bodyPr/>
           <a:lstStyle/>
           <a:p>
-            <a:fld id="{14248956-2374-48B4-B20B-A1021DAEFE0D}" type="slidenum">
+            <a:fld id="{FCF6D127-6394-4B2C-B510-ECF110AB5AEF}" type="slidenum">
               <a:rPr lang="ru-RU" smtClean="0"/>
               <a:t>‹#›</a:t>
             </a:fld>
@@ -929,7 +929,7 @@
     </p:spTree>
     <p:extLst>
       <p:ext uri="{BB962C8B-B14F-4D97-AF65-F5344CB8AC3E}">
-        <p14:creationId xmlns:p14="http://schemas.microsoft.com/office/powerpoint/2010/main" val="2086041580"/>
+        <p14:creationId xmlns:p14="http://schemas.microsoft.com/office/powerpoint/2010/main" val="3594882626"/>
       </p:ext>
     </p:extLst>
   </p:cSld>
@@ -961,7 +961,7 @@
           <p:cNvPr id="2" name="Заголовок 1">
             <a:extLst>
               <a:ext uri="{FF2B5EF4-FFF2-40B4-BE49-F238E27FC236}">
-                <a16:creationId xmlns:a16="http://schemas.microsoft.com/office/drawing/2014/main" id="{83EDF6B5-24D2-76A1-854B-C309BF0A2361}"/>
+                <a16:creationId xmlns:a16="http://schemas.microsoft.com/office/drawing/2014/main" id="{319C2D4F-C4F1-D2B8-FDA1-5872EF9C426A}"/>
               </a:ext>
             </a:extLst>
           </p:cNvPr>
@@ -998,7 +998,7 @@
           <p:cNvPr id="3" name="Текст 2">
             <a:extLst>
               <a:ext uri="{FF2B5EF4-FFF2-40B4-BE49-F238E27FC236}">
-                <a16:creationId xmlns:a16="http://schemas.microsoft.com/office/drawing/2014/main" id="{42FFB05D-6BBB-0B1D-51A9-8E74225A0CA1}"/>
+                <a16:creationId xmlns:a16="http://schemas.microsoft.com/office/drawing/2014/main" id="{B9CA634D-6EB1-1A97-60C5-AEB369DBDE19}"/>
               </a:ext>
             </a:extLst>
           </p:cNvPr>
@@ -1123,7 +1123,7 @@
           <p:cNvPr id="4" name="Дата 3">
             <a:extLst>
               <a:ext uri="{FF2B5EF4-FFF2-40B4-BE49-F238E27FC236}">
-                <a16:creationId xmlns:a16="http://schemas.microsoft.com/office/drawing/2014/main" id="{E37F1CF9-2F23-C988-9E9C-32B39923D99A}"/>
+                <a16:creationId xmlns:a16="http://schemas.microsoft.com/office/drawing/2014/main" id="{0634494E-3CF6-6596-36E7-8BA4AFEFFC9E}"/>
               </a:ext>
             </a:extLst>
           </p:cNvPr>
@@ -1139,9 +1139,9 @@
           <a:bodyPr/>
           <a:lstStyle/>
           <a:p>
-            <a:fld id="{FECAD547-0098-4F95-A3E6-B35FDCDAFEB6}" type="datetimeFigureOut">
+            <a:fld id="{3DF2BDC6-13AE-4F9F-BB14-CB3866DECA51}" type="datetimeFigureOut">
               <a:rPr lang="ru-RU" smtClean="0"/>
-              <a:t>22.10.2026</a:t>
+              <a:t>27.10.2026</a:t>
             </a:fld>
             <a:endParaRPr lang="ru-RU"/>
           </a:p>
@@ -1152,7 +1152,7 @@
           <p:cNvPr id="5" name="Нижний колонтитул 4">
             <a:extLst>
               <a:ext uri="{FF2B5EF4-FFF2-40B4-BE49-F238E27FC236}">
-                <a16:creationId xmlns:a16="http://schemas.microsoft.com/office/drawing/2014/main" id="{C2AFEEAF-BF07-E308-7B51-B21074B3E8A4}"/>
+                <a16:creationId xmlns:a16="http://schemas.microsoft.com/office/drawing/2014/main" id="{61F0B5F6-DAC0-C7DD-878E-E716CB9CC5EB}"/>
               </a:ext>
             </a:extLst>
           </p:cNvPr>
@@ -1177,7 +1177,7 @@
           <p:cNvPr id="6" name="Номер слайда 5">
             <a:extLst>
               <a:ext uri="{FF2B5EF4-FFF2-40B4-BE49-F238E27FC236}">
-                <a16:creationId xmlns:a16="http://schemas.microsoft.com/office/drawing/2014/main" id="{C8B75AD9-7F0E-5AAF-5C27-3FBB83B01005}"/>
+                <a16:creationId xmlns:a16="http://schemas.microsoft.com/office/drawing/2014/main" id="{8CA6E2DC-6CF5-3B93-B19A-495CA9463E72}"/>
               </a:ext>
             </a:extLst>
           </p:cNvPr>
@@ -1193,7 +1193,7 @@
           <a:bodyPr/>
           <a:lstStyle/>
           <a:p>
-            <a:fld id="{14248956-2374-48B4-B20B-A1021DAEFE0D}" type="slidenum">
+            <a:fld id="{FCF6D127-6394-4B2C-B510-ECF110AB5AEF}" type="slidenum">
               <a:rPr lang="ru-RU" smtClean="0"/>
               <a:t>‹#›</a:t>
             </a:fld>
@@ -1204,7 +1204,7 @@
     </p:spTree>
     <p:extLst>
       <p:ext uri="{BB962C8B-B14F-4D97-AF65-F5344CB8AC3E}">
-        <p14:creationId xmlns:p14="http://schemas.microsoft.com/office/powerpoint/2010/main" val="2481901385"/>
+        <p14:creationId xmlns:p14="http://schemas.microsoft.com/office/powerpoint/2010/main" val="3451962996"/>
       </p:ext>
     </p:extLst>
   </p:cSld>
@@ -1236,7 +1236,7 @@
           <p:cNvPr id="2" name="Заголовок 1">
             <a:extLst>
               <a:ext uri="{FF2B5EF4-FFF2-40B4-BE49-F238E27FC236}">
-                <a16:creationId xmlns:a16="http://schemas.microsoft.com/office/drawing/2014/main" id="{85DE49E3-1C07-198B-A641-AB00A609285E}"/>
+                <a16:creationId xmlns:a16="http://schemas.microsoft.com/office/drawing/2014/main" id="{A578E6AD-E412-26C5-A6C1-746883E696A4}"/>
               </a:ext>
             </a:extLst>
           </p:cNvPr>
@@ -1264,7 +1264,7 @@
           <p:cNvPr id="3" name="Объект 2">
             <a:extLst>
               <a:ext uri="{FF2B5EF4-FFF2-40B4-BE49-F238E27FC236}">
-                <a16:creationId xmlns:a16="http://schemas.microsoft.com/office/drawing/2014/main" id="{7B8A60D2-5845-27EC-2188-58703EE0D058}"/>
+                <a16:creationId xmlns:a16="http://schemas.microsoft.com/office/drawing/2014/main" id="{FD07AEC7-878B-B15D-1765-C0CE1CF33DEF}"/>
               </a:ext>
             </a:extLst>
           </p:cNvPr>
@@ -1326,7 +1326,7 @@
           <p:cNvPr id="4" name="Объект 3">
             <a:extLst>
               <a:ext uri="{FF2B5EF4-FFF2-40B4-BE49-F238E27FC236}">
-                <a16:creationId xmlns:a16="http://schemas.microsoft.com/office/drawing/2014/main" id="{0DC8DFD1-056A-F35B-1223-EBECFCADCEA9}"/>
+                <a16:creationId xmlns:a16="http://schemas.microsoft.com/office/drawing/2014/main" id="{E01CBB12-5487-9004-99BB-F76F6EAD29E5}"/>
               </a:ext>
             </a:extLst>
           </p:cNvPr>
@@ -1388,7 +1388,7 @@
           <p:cNvPr id="5" name="Дата 4">
             <a:extLst>
               <a:ext uri="{FF2B5EF4-FFF2-40B4-BE49-F238E27FC236}">
-                <a16:creationId xmlns:a16="http://schemas.microsoft.com/office/drawing/2014/main" id="{D4CA2D5A-4CDB-435D-B9A0-AB913AE15FCD}"/>
+                <a16:creationId xmlns:a16="http://schemas.microsoft.com/office/drawing/2014/main" id="{7C855087-DABF-63CE-B9E8-58E522A16452}"/>
               </a:ext>
             </a:extLst>
           </p:cNvPr>
@@ -1404,9 +1404,9 @@
           <a:bodyPr/>
           <a:lstStyle/>
           <a:p>
-            <a:fld id="{FECAD547-0098-4F95-A3E6-B35FDCDAFEB6}" type="datetimeFigureOut">
+            <a:fld id="{3DF2BDC6-13AE-4F9F-BB14-CB3866DECA51}" type="datetimeFigureOut">
               <a:rPr lang="ru-RU" smtClean="0"/>
-              <a:t>22.10.2026</a:t>
+              <a:t>27.10.2026</a:t>
             </a:fld>
             <a:endParaRPr lang="ru-RU"/>
           </a:p>
@@ -1417,7 +1417,7 @@
           <p:cNvPr id="6" name="Нижний колонтитул 5">
             <a:extLst>
               <a:ext uri="{FF2B5EF4-FFF2-40B4-BE49-F238E27FC236}">
-                <a16:creationId xmlns:a16="http://schemas.microsoft.com/office/drawing/2014/main" id="{5BCC97E0-023C-86E8-8D0E-ED20AD7B5142}"/>
+                <a16:creationId xmlns:a16="http://schemas.microsoft.com/office/drawing/2014/main" id="{46A10977-7AF3-95FC-308E-95BB9C368E2C}"/>
               </a:ext>
             </a:extLst>
           </p:cNvPr>
@@ -1442,7 +1442,7 @@
           <p:cNvPr id="7" name="Номер слайда 6">
             <a:extLst>
               <a:ext uri="{FF2B5EF4-FFF2-40B4-BE49-F238E27FC236}">
-                <a16:creationId xmlns:a16="http://schemas.microsoft.com/office/drawing/2014/main" id="{640C13D7-5D83-2213-C4B0-6EF9EED9D8F0}"/>
+                <a16:creationId xmlns:a16="http://schemas.microsoft.com/office/drawing/2014/main" id="{DD7D5D71-A3E6-B25B-EC2D-C5C9B86D7647}"/>
               </a:ext>
             </a:extLst>
           </p:cNvPr>
@@ -1458,7 +1458,7 @@
           <a:bodyPr/>
           <a:lstStyle/>
           <a:p>
-            <a:fld id="{14248956-2374-48B4-B20B-A1021DAEFE0D}" type="slidenum">
+            <a:fld id="{FCF6D127-6394-4B2C-B510-ECF110AB5AEF}" type="slidenum">
               <a:rPr lang="ru-RU" smtClean="0"/>
               <a:t>‹#›</a:t>
             </a:fld>
@@ -1469,7 +1469,7 @@
     </p:spTree>
     <p:extLst>
       <p:ext uri="{BB962C8B-B14F-4D97-AF65-F5344CB8AC3E}">
-        <p14:creationId xmlns:p14="http://schemas.microsoft.com/office/powerpoint/2010/main" val="3651029011"/>
+        <p14:creationId xmlns:p14="http://schemas.microsoft.com/office/powerpoint/2010/main" val="4198175789"/>
       </p:ext>
     </p:extLst>
   </p:cSld>
@@ -1501,7 +1501,7 @@
           <p:cNvPr id="2" name="Заголовок 1">
             <a:extLst>
               <a:ext uri="{FF2B5EF4-FFF2-40B4-BE49-F238E27FC236}">
-                <a16:creationId xmlns:a16="http://schemas.microsoft.com/office/drawing/2014/main" id="{B904B867-A03B-5101-7638-442572CF50E6}"/>
+                <a16:creationId xmlns:a16="http://schemas.microsoft.com/office/drawing/2014/main" id="{668D689C-EB18-4B76-4D1E-23EF5B181729}"/>
               </a:ext>
             </a:extLst>
           </p:cNvPr>
@@ -1534,7 +1534,7 @@
           <p:cNvPr id="3" name="Текст 2">
             <a:extLst>
               <a:ext uri="{FF2B5EF4-FFF2-40B4-BE49-F238E27FC236}">
-                <a16:creationId xmlns:a16="http://schemas.microsoft.com/office/drawing/2014/main" id="{B079F521-870D-3A3C-3AD7-A2A082970893}"/>
+                <a16:creationId xmlns:a16="http://schemas.microsoft.com/office/drawing/2014/main" id="{F713BC18-293B-6539-A98F-EEBF2C217FC9}"/>
               </a:ext>
             </a:extLst>
           </p:cNvPr>
@@ -1605,7 +1605,7 @@
           <p:cNvPr id="4" name="Объект 3">
             <a:extLst>
               <a:ext uri="{FF2B5EF4-FFF2-40B4-BE49-F238E27FC236}">
-                <a16:creationId xmlns:a16="http://schemas.microsoft.com/office/drawing/2014/main" id="{7A4884EF-C7D6-EF74-E88F-4FCD81E20115}"/>
+                <a16:creationId xmlns:a16="http://schemas.microsoft.com/office/drawing/2014/main" id="{C9559A0D-3BCF-71CF-6FDF-5F9160C0B475}"/>
               </a:ext>
             </a:extLst>
           </p:cNvPr>
@@ -1667,7 +1667,7 @@
           <p:cNvPr id="5" name="Текст 4">
             <a:extLst>
               <a:ext uri="{FF2B5EF4-FFF2-40B4-BE49-F238E27FC236}">
-                <a16:creationId xmlns:a16="http://schemas.microsoft.com/office/drawing/2014/main" id="{7E7B92C6-F640-34F3-F32E-89AF6A4DC827}"/>
+                <a16:creationId xmlns:a16="http://schemas.microsoft.com/office/drawing/2014/main" id="{C852F4B6-B4A5-AB29-6E5B-41CA123705D8}"/>
               </a:ext>
             </a:extLst>
           </p:cNvPr>
@@ -1738,7 +1738,7 @@
           <p:cNvPr id="6" name="Объект 5">
             <a:extLst>
               <a:ext uri="{FF2B5EF4-FFF2-40B4-BE49-F238E27FC236}">
-                <a16:creationId xmlns:a16="http://schemas.microsoft.com/office/drawing/2014/main" id="{E9C10694-0DC2-78C8-5036-832921F0D9E3}"/>
+                <a16:creationId xmlns:a16="http://schemas.microsoft.com/office/drawing/2014/main" id="{7D9BB645-7811-8D7B-50C8-03E420AD9AED}"/>
               </a:ext>
             </a:extLst>
           </p:cNvPr>
@@ -1800,7 +1800,7 @@
           <p:cNvPr id="7" name="Дата 6">
             <a:extLst>
               <a:ext uri="{FF2B5EF4-FFF2-40B4-BE49-F238E27FC236}">
-                <a16:creationId xmlns:a16="http://schemas.microsoft.com/office/drawing/2014/main" id="{7D494726-431A-700A-A9BE-B1A6DDF85628}"/>
+                <a16:creationId xmlns:a16="http://schemas.microsoft.com/office/drawing/2014/main" id="{FC3488BD-1FBC-DCCC-062A-39FC52200007}"/>
               </a:ext>
             </a:extLst>
           </p:cNvPr>
@@ -1816,9 +1816,9 @@
           <a:bodyPr/>
           <a:lstStyle/>
           <a:p>
-            <a:fld id="{FECAD547-0098-4F95-A3E6-B35FDCDAFEB6}" type="datetimeFigureOut">
+            <a:fld id="{3DF2BDC6-13AE-4F9F-BB14-CB3866DECA51}" type="datetimeFigureOut">
               <a:rPr lang="ru-RU" smtClean="0"/>
-              <a:t>22.10.2026</a:t>
+              <a:t>27.10.2026</a:t>
             </a:fld>
             <a:endParaRPr lang="ru-RU"/>
           </a:p>
@@ -1829,7 +1829,7 @@
           <p:cNvPr id="8" name="Нижний колонтитул 7">
             <a:extLst>
               <a:ext uri="{FF2B5EF4-FFF2-40B4-BE49-F238E27FC236}">
-                <a16:creationId xmlns:a16="http://schemas.microsoft.com/office/drawing/2014/main" id="{D266C023-72A8-15D0-792D-7119458DEBB0}"/>
+                <a16:creationId xmlns:a16="http://schemas.microsoft.com/office/drawing/2014/main" id="{EF9A8C92-37AB-2D10-7647-55715084C5AF}"/>
               </a:ext>
             </a:extLst>
           </p:cNvPr>
@@ -1854,7 +1854,7 @@
           <p:cNvPr id="9" name="Номер слайда 8">
             <a:extLst>
               <a:ext uri="{FF2B5EF4-FFF2-40B4-BE49-F238E27FC236}">
-                <a16:creationId xmlns:a16="http://schemas.microsoft.com/office/drawing/2014/main" id="{69700F1C-5A3E-C93F-51B6-676A2F13AA35}"/>
+                <a16:creationId xmlns:a16="http://schemas.microsoft.com/office/drawing/2014/main" id="{F1054A5E-8657-93A0-0E1D-1D2B5D058D70}"/>
               </a:ext>
             </a:extLst>
           </p:cNvPr>
@@ -1870,7 +1870,7 @@
           <a:bodyPr/>
           <a:lstStyle/>
           <a:p>
-            <a:fld id="{14248956-2374-48B4-B20B-A1021DAEFE0D}" type="slidenum">
+            <a:fld id="{FCF6D127-6394-4B2C-B510-ECF110AB5AEF}" type="slidenum">
               <a:rPr lang="ru-RU" smtClean="0"/>
               <a:t>‹#›</a:t>
             </a:fld>
@@ -1881,7 +1881,7 @@
     </p:spTree>
     <p:extLst>
       <p:ext uri="{BB962C8B-B14F-4D97-AF65-F5344CB8AC3E}">
-        <p14:creationId xmlns:p14="http://schemas.microsoft.com/office/powerpoint/2010/main" val="1594870660"/>
+        <p14:creationId xmlns:p14="http://schemas.microsoft.com/office/powerpoint/2010/main" val="1354254396"/>
       </p:ext>
     </p:extLst>
   </p:cSld>
@@ -1913,7 +1913,7 @@
           <p:cNvPr id="2" name="Заголовок 1">
             <a:extLst>
               <a:ext uri="{FF2B5EF4-FFF2-40B4-BE49-F238E27FC236}">
-                <a16:creationId xmlns:a16="http://schemas.microsoft.com/office/drawing/2014/main" id="{63283DB1-7DB4-7F33-CDD7-9CEED3292B42}"/>
+                <a16:creationId xmlns:a16="http://schemas.microsoft.com/office/drawing/2014/main" id="{3B6D9CD0-8678-2989-FA95-F0B1388F3F6E}"/>
               </a:ext>
             </a:extLst>
           </p:cNvPr>
@@ -1941,7 +1941,7 @@
           <p:cNvPr id="3" name="Дата 2">
             <a:extLst>
               <a:ext uri="{FF2B5EF4-FFF2-40B4-BE49-F238E27FC236}">
-                <a16:creationId xmlns:a16="http://schemas.microsoft.com/office/drawing/2014/main" id="{80FC06F1-4C81-93D3-24B6-B6391D0E0005}"/>
+                <a16:creationId xmlns:a16="http://schemas.microsoft.com/office/drawing/2014/main" id="{0C5B63D2-BF5D-6F4A-4F5F-342336D5ECFF}"/>
               </a:ext>
             </a:extLst>
           </p:cNvPr>
@@ -1957,9 +1957,9 @@
           <a:bodyPr/>
           <a:lstStyle/>
           <a:p>
-            <a:fld id="{FECAD547-0098-4F95-A3E6-B35FDCDAFEB6}" type="datetimeFigureOut">
+            <a:fld id="{3DF2BDC6-13AE-4F9F-BB14-CB3866DECA51}" type="datetimeFigureOut">
               <a:rPr lang="ru-RU" smtClean="0"/>
-              <a:t>22.10.2026</a:t>
+              <a:t>27.10.2026</a:t>
             </a:fld>
             <a:endParaRPr lang="ru-RU"/>
           </a:p>
@@ -1970,7 +1970,7 @@
           <p:cNvPr id="4" name="Нижний колонтитул 3">
             <a:extLst>
               <a:ext uri="{FF2B5EF4-FFF2-40B4-BE49-F238E27FC236}">
-                <a16:creationId xmlns:a16="http://schemas.microsoft.com/office/drawing/2014/main" id="{A30F401A-A942-2FAD-6DEF-2AE49CAC5980}"/>
+                <a16:creationId xmlns:a16="http://schemas.microsoft.com/office/drawing/2014/main" id="{7FEBA439-378A-1D76-914B-DF4AE6C78831}"/>
               </a:ext>
             </a:extLst>
           </p:cNvPr>
@@ -1995,7 +1995,7 @@
           <p:cNvPr id="5" name="Номер слайда 4">
             <a:extLst>
               <a:ext uri="{FF2B5EF4-FFF2-40B4-BE49-F238E27FC236}">
-                <a16:creationId xmlns:a16="http://schemas.microsoft.com/office/drawing/2014/main" id="{4DC91934-5B27-BEAA-64F9-C18DC95331F5}"/>
+                <a16:creationId xmlns:a16="http://schemas.microsoft.com/office/drawing/2014/main" id="{486ED757-2271-D5BB-BD94-F128B19BD68C}"/>
               </a:ext>
             </a:extLst>
           </p:cNvPr>
@@ -2011,7 +2011,7 @@
           <a:bodyPr/>
           <a:lstStyle/>
           <a:p>
-            <a:fld id="{14248956-2374-48B4-B20B-A1021DAEFE0D}" type="slidenum">
+            <a:fld id="{FCF6D127-6394-4B2C-B510-ECF110AB5AEF}" type="slidenum">
               <a:rPr lang="ru-RU" smtClean="0"/>
               <a:t>‹#›</a:t>
             </a:fld>
@@ -2022,7 +2022,7 @@
     </p:spTree>
     <p:extLst>
       <p:ext uri="{BB962C8B-B14F-4D97-AF65-F5344CB8AC3E}">
-        <p14:creationId xmlns:p14="http://schemas.microsoft.com/office/powerpoint/2010/main" val="4078596708"/>
+        <p14:creationId xmlns:p14="http://schemas.microsoft.com/office/powerpoint/2010/main" val="3719200833"/>
       </p:ext>
     </p:extLst>
   </p:cSld>
@@ -2054,7 +2054,7 @@
           <p:cNvPr id="2" name="Дата 1">
             <a:extLst>
               <a:ext uri="{FF2B5EF4-FFF2-40B4-BE49-F238E27FC236}">
-                <a16:creationId xmlns:a16="http://schemas.microsoft.com/office/drawing/2014/main" id="{8BF4F305-DF00-9237-67B5-749A0CEB2ECF}"/>
+                <a16:creationId xmlns:a16="http://schemas.microsoft.com/office/drawing/2014/main" id="{96EA8C4E-DDF2-B24D-158D-BC063C8F30A1}"/>
               </a:ext>
             </a:extLst>
           </p:cNvPr>
@@ -2070,9 +2070,9 @@
           <a:bodyPr/>
           <a:lstStyle/>
           <a:p>
-            <a:fld id="{FECAD547-0098-4F95-A3E6-B35FDCDAFEB6}" type="datetimeFigureOut">
+            <a:fld id="{3DF2BDC6-13AE-4F9F-BB14-CB3866DECA51}" type="datetimeFigureOut">
               <a:rPr lang="ru-RU" smtClean="0"/>
-              <a:t>22.10.2026</a:t>
+              <a:t>27.10.2026</a:t>
             </a:fld>
             <a:endParaRPr lang="ru-RU"/>
           </a:p>
@@ -2083,7 +2083,7 @@
           <p:cNvPr id="3" name="Нижний колонтитул 2">
             <a:extLst>
               <a:ext uri="{FF2B5EF4-FFF2-40B4-BE49-F238E27FC236}">
-                <a16:creationId xmlns:a16="http://schemas.microsoft.com/office/drawing/2014/main" id="{EABC8274-FF22-F942-6F1F-B77240049EC3}"/>
+                <a16:creationId xmlns:a16="http://schemas.microsoft.com/office/drawing/2014/main" id="{B4636FB5-C0B9-D72E-28A9-7FABBD857640}"/>
               </a:ext>
             </a:extLst>
           </p:cNvPr>
@@ -2108,7 +2108,7 @@
           <p:cNvPr id="4" name="Номер слайда 3">
             <a:extLst>
               <a:ext uri="{FF2B5EF4-FFF2-40B4-BE49-F238E27FC236}">
-                <a16:creationId xmlns:a16="http://schemas.microsoft.com/office/drawing/2014/main" id="{BD8D32A2-D60B-F554-9D6E-CF146796151C}"/>
+                <a16:creationId xmlns:a16="http://schemas.microsoft.com/office/drawing/2014/main" id="{20B4C4D4-51D0-7839-5777-BB8FF2675C0B}"/>
               </a:ext>
             </a:extLst>
           </p:cNvPr>
@@ -2124,7 +2124,7 @@
           <a:bodyPr/>
           <a:lstStyle/>
           <a:p>
-            <a:fld id="{14248956-2374-48B4-B20B-A1021DAEFE0D}" type="slidenum">
+            <a:fld id="{FCF6D127-6394-4B2C-B510-ECF110AB5AEF}" type="slidenum">
               <a:rPr lang="ru-RU" smtClean="0"/>
               <a:t>‹#›</a:t>
             </a:fld>
@@ -2135,7 +2135,7 @@
     </p:spTree>
     <p:extLst>
       <p:ext uri="{BB962C8B-B14F-4D97-AF65-F5344CB8AC3E}">
-        <p14:creationId xmlns:p14="http://schemas.microsoft.com/office/powerpoint/2010/main" val="395164118"/>
+        <p14:creationId xmlns:p14="http://schemas.microsoft.com/office/powerpoint/2010/main" val="530700103"/>
       </p:ext>
     </p:extLst>
   </p:cSld>
@@ -2167,7 +2167,7 @@
           <p:cNvPr id="2" name="Заголовок 1">
             <a:extLst>
               <a:ext uri="{FF2B5EF4-FFF2-40B4-BE49-F238E27FC236}">
-                <a16:creationId xmlns:a16="http://schemas.microsoft.com/office/drawing/2014/main" id="{060A5FD7-4A18-508A-FFF9-6ABB891E66E0}"/>
+                <a16:creationId xmlns:a16="http://schemas.microsoft.com/office/drawing/2014/main" id="{3EE39AD0-24BE-74E6-4190-1D0E4D17488F}"/>
               </a:ext>
             </a:extLst>
           </p:cNvPr>
@@ -2204,7 +2204,7 @@
           <p:cNvPr id="3" name="Объект 2">
             <a:extLst>
               <a:ext uri="{FF2B5EF4-FFF2-40B4-BE49-F238E27FC236}">
-                <a16:creationId xmlns:a16="http://schemas.microsoft.com/office/drawing/2014/main" id="{1DC83CE2-1B0B-8E84-8F96-B1D94D62D486}"/>
+                <a16:creationId xmlns:a16="http://schemas.microsoft.com/office/drawing/2014/main" id="{CE90249D-267F-8D8D-0E5A-06E80FE7110E}"/>
               </a:ext>
             </a:extLst>
           </p:cNvPr>
@@ -2294,7 +2294,7 @@
           <p:cNvPr id="4" name="Текст 3">
             <a:extLst>
               <a:ext uri="{FF2B5EF4-FFF2-40B4-BE49-F238E27FC236}">
-                <a16:creationId xmlns:a16="http://schemas.microsoft.com/office/drawing/2014/main" id="{9D492F47-04AC-287A-E2BE-6968902D1C3E}"/>
+                <a16:creationId xmlns:a16="http://schemas.microsoft.com/office/drawing/2014/main" id="{B22FC1F9-A1A0-4602-F41B-27471540E590}"/>
               </a:ext>
             </a:extLst>
           </p:cNvPr>
@@ -2365,7 +2365,7 @@
           <p:cNvPr id="5" name="Дата 4">
             <a:extLst>
               <a:ext uri="{FF2B5EF4-FFF2-40B4-BE49-F238E27FC236}">
-                <a16:creationId xmlns:a16="http://schemas.microsoft.com/office/drawing/2014/main" id="{EE20D621-7CB6-70D8-8BB0-20A169C8E4E3}"/>
+                <a16:creationId xmlns:a16="http://schemas.microsoft.com/office/drawing/2014/main" id="{B6042393-D47A-E057-93CE-F02A874AA9AE}"/>
               </a:ext>
             </a:extLst>
           </p:cNvPr>
@@ -2381,9 +2381,9 @@
           <a:bodyPr/>
           <a:lstStyle/>
           <a:p>
-            <a:fld id="{FECAD547-0098-4F95-A3E6-B35FDCDAFEB6}" type="datetimeFigureOut">
+            <a:fld id="{3DF2BDC6-13AE-4F9F-BB14-CB3866DECA51}" type="datetimeFigureOut">
               <a:rPr lang="ru-RU" smtClean="0"/>
-              <a:t>22.10.2026</a:t>
+              <a:t>27.10.2026</a:t>
             </a:fld>
             <a:endParaRPr lang="ru-RU"/>
           </a:p>
@@ -2394,7 +2394,7 @@
           <p:cNvPr id="6" name="Нижний колонтитул 5">
             <a:extLst>
               <a:ext uri="{FF2B5EF4-FFF2-40B4-BE49-F238E27FC236}">
-                <a16:creationId xmlns:a16="http://schemas.microsoft.com/office/drawing/2014/main" id="{E46CAA40-3AF4-539C-1896-B514540EC26F}"/>
+                <a16:creationId xmlns:a16="http://schemas.microsoft.com/office/drawing/2014/main" id="{7E26EF60-6E62-4477-D6FC-6C24EC134D17}"/>
               </a:ext>
             </a:extLst>
           </p:cNvPr>
@@ -2419,7 +2419,7 @@
           <p:cNvPr id="7" name="Номер слайда 6">
             <a:extLst>
               <a:ext uri="{FF2B5EF4-FFF2-40B4-BE49-F238E27FC236}">
-                <a16:creationId xmlns:a16="http://schemas.microsoft.com/office/drawing/2014/main" id="{76572272-55E7-DBE8-1501-9210A55F25A8}"/>
+                <a16:creationId xmlns:a16="http://schemas.microsoft.com/office/drawing/2014/main" id="{BAD09FC2-9C82-00EB-7470-E4C3373FD871}"/>
               </a:ext>
             </a:extLst>
           </p:cNvPr>
@@ -2435,7 +2435,7 @@
           <a:bodyPr/>
           <a:lstStyle/>
           <a:p>
-            <a:fld id="{14248956-2374-48B4-B20B-A1021DAEFE0D}" type="slidenum">
+            <a:fld id="{FCF6D127-6394-4B2C-B510-ECF110AB5AEF}" type="slidenum">
               <a:rPr lang="ru-RU" smtClean="0"/>
               <a:t>‹#›</a:t>
             </a:fld>
@@ -2446,7 +2446,7 @@
     </p:spTree>
     <p:extLst>
       <p:ext uri="{BB962C8B-B14F-4D97-AF65-F5344CB8AC3E}">
-        <p14:creationId xmlns:p14="http://schemas.microsoft.com/office/powerpoint/2010/main" val="1860773389"/>
+        <p14:creationId xmlns:p14="http://schemas.microsoft.com/office/powerpoint/2010/main" val="928131064"/>
       </p:ext>
     </p:extLst>
   </p:cSld>
@@ -2478,7 +2478,7 @@
           <p:cNvPr id="2" name="Заголовок 1">
             <a:extLst>
               <a:ext uri="{FF2B5EF4-FFF2-40B4-BE49-F238E27FC236}">
-                <a16:creationId xmlns:a16="http://schemas.microsoft.com/office/drawing/2014/main" id="{A6C708DA-3DCE-0BAA-4ECD-89C680ABD730}"/>
+                <a16:creationId xmlns:a16="http://schemas.microsoft.com/office/drawing/2014/main" id="{31CE6758-7EC0-19B7-43C8-0F3F3F73FC26}"/>
               </a:ext>
             </a:extLst>
           </p:cNvPr>
@@ -2515,7 +2515,7 @@
           <p:cNvPr id="3" name="Рисунок 2">
             <a:extLst>
               <a:ext uri="{FF2B5EF4-FFF2-40B4-BE49-F238E27FC236}">
-                <a16:creationId xmlns:a16="http://schemas.microsoft.com/office/drawing/2014/main" id="{42938E84-07FA-3750-EA71-F6FC74E4BA95}"/>
+                <a16:creationId xmlns:a16="http://schemas.microsoft.com/office/drawing/2014/main" id="{560EAEE4-1FD5-7749-B5EE-82A7C2C6EEE0}"/>
               </a:ext>
             </a:extLst>
           </p:cNvPr>
@@ -2582,7 +2582,7 @@
           <p:cNvPr id="4" name="Текст 3">
             <a:extLst>
               <a:ext uri="{FF2B5EF4-FFF2-40B4-BE49-F238E27FC236}">
-                <a16:creationId xmlns:a16="http://schemas.microsoft.com/office/drawing/2014/main" id="{C2ADF9FA-B65B-85C6-6AB5-8DFD3700DB30}"/>
+                <a16:creationId xmlns:a16="http://schemas.microsoft.com/office/drawing/2014/main" id="{A38A968E-296E-9A37-0EA7-B317F30C20C1}"/>
               </a:ext>
             </a:extLst>
           </p:cNvPr>
@@ -2653,7 +2653,7 @@
           <p:cNvPr id="5" name="Дата 4">
             <a:extLst>
               <a:ext uri="{FF2B5EF4-FFF2-40B4-BE49-F238E27FC236}">
-                <a16:creationId xmlns:a16="http://schemas.microsoft.com/office/drawing/2014/main" id="{22FA9EFC-EC0B-6302-F593-209B23751E5E}"/>
+                <a16:creationId xmlns:a16="http://schemas.microsoft.com/office/drawing/2014/main" id="{AAC55960-7C73-3E74-DD3C-B420DE2100FA}"/>
               </a:ext>
             </a:extLst>
           </p:cNvPr>
@@ -2669,9 +2669,9 @@
           <a:bodyPr/>
           <a:lstStyle/>
           <a:p>
-            <a:fld id="{FECAD547-0098-4F95-A3E6-B35FDCDAFEB6}" type="datetimeFigureOut">
+            <a:fld id="{3DF2BDC6-13AE-4F9F-BB14-CB3866DECA51}" type="datetimeFigureOut">
               <a:rPr lang="ru-RU" smtClean="0"/>
-              <a:t>22.10.2026</a:t>
+              <a:t>27.10.2026</a:t>
             </a:fld>
             <a:endParaRPr lang="ru-RU"/>
           </a:p>
@@ -2682,7 +2682,7 @@
           <p:cNvPr id="6" name="Нижний колонтитул 5">
             <a:extLst>
               <a:ext uri="{FF2B5EF4-FFF2-40B4-BE49-F238E27FC236}">
-                <a16:creationId xmlns:a16="http://schemas.microsoft.com/office/drawing/2014/main" id="{5029CF42-5A97-CAC6-6580-7CE6E784362D}"/>
+                <a16:creationId xmlns:a16="http://schemas.microsoft.com/office/drawing/2014/main" id="{9B2CD1E4-C2C0-3542-2401-ACA11B60F594}"/>
               </a:ext>
             </a:extLst>
           </p:cNvPr>
@@ -2707,7 +2707,7 @@
           <p:cNvPr id="7" name="Номер слайда 6">
             <a:extLst>
               <a:ext uri="{FF2B5EF4-FFF2-40B4-BE49-F238E27FC236}">
-                <a16:creationId xmlns:a16="http://schemas.microsoft.com/office/drawing/2014/main" id="{1117878A-FCDA-B547-2897-0C175066CF9D}"/>
+                <a16:creationId xmlns:a16="http://schemas.microsoft.com/office/drawing/2014/main" id="{435C4B94-E591-12F4-4F32-F1E2F7706187}"/>
               </a:ext>
             </a:extLst>
           </p:cNvPr>
@@ -2723,7 +2723,7 @@
           <a:bodyPr/>
           <a:lstStyle/>
           <a:p>
-            <a:fld id="{14248956-2374-48B4-B20B-A1021DAEFE0D}" type="slidenum">
+            <a:fld id="{FCF6D127-6394-4B2C-B510-ECF110AB5AEF}" type="slidenum">
               <a:rPr lang="ru-RU" smtClean="0"/>
               <a:t>‹#›</a:t>
             </a:fld>
@@ -2734,7 +2734,7 @@
     </p:spTree>
     <p:extLst>
       <p:ext uri="{BB962C8B-B14F-4D97-AF65-F5344CB8AC3E}">
-        <p14:creationId xmlns:p14="http://schemas.microsoft.com/office/powerpoint/2010/main" val="242300011"/>
+        <p14:creationId xmlns:p14="http://schemas.microsoft.com/office/powerpoint/2010/main" val="64547096"/>
       </p:ext>
     </p:extLst>
   </p:cSld>
@@ -2771,7 +2771,7 @@
           <p:cNvPr id="2" name="Заголовок 1">
             <a:extLst>
               <a:ext uri="{FF2B5EF4-FFF2-40B4-BE49-F238E27FC236}">
-                <a16:creationId xmlns:a16="http://schemas.microsoft.com/office/drawing/2014/main" id="{72F54835-A4C5-B2CA-EC34-F7FF1DC53C34}"/>
+                <a16:creationId xmlns:a16="http://schemas.microsoft.com/office/drawing/2014/main" id="{70EBF098-2B94-3322-510D-C7EC08F2A50B}"/>
               </a:ext>
             </a:extLst>
           </p:cNvPr>
@@ -2809,7 +2809,7 @@
           <p:cNvPr id="3" name="Текст 2">
             <a:extLst>
               <a:ext uri="{FF2B5EF4-FFF2-40B4-BE49-F238E27FC236}">
-                <a16:creationId xmlns:a16="http://schemas.microsoft.com/office/drawing/2014/main" id="{B834371C-9D98-8075-0551-B425FA73387D}"/>
+                <a16:creationId xmlns:a16="http://schemas.microsoft.com/office/drawing/2014/main" id="{D60856BA-2A45-34F5-A539-53388575A519}"/>
               </a:ext>
             </a:extLst>
           </p:cNvPr>
@@ -2876,7 +2876,7 @@
           <p:cNvPr id="4" name="Дата 3">
             <a:extLst>
               <a:ext uri="{FF2B5EF4-FFF2-40B4-BE49-F238E27FC236}">
-                <a16:creationId xmlns:a16="http://schemas.microsoft.com/office/drawing/2014/main" id="{77CB833D-E313-2110-A3CB-01BF873F6F01}"/>
+                <a16:creationId xmlns:a16="http://schemas.microsoft.com/office/drawing/2014/main" id="{FB314249-73DD-B860-09FB-25E2C4C7E9A9}"/>
               </a:ext>
             </a:extLst>
           </p:cNvPr>
@@ -2910,9 +2910,9 @@
             </a:lvl1pPr>
           </a:lstStyle>
           <a:p>
-            <a:fld id="{FECAD547-0098-4F95-A3E6-B35FDCDAFEB6}" type="datetimeFigureOut">
+            <a:fld id="{3DF2BDC6-13AE-4F9F-BB14-CB3866DECA51}" type="datetimeFigureOut">
               <a:rPr lang="ru-RU" smtClean="0"/>
-              <a:t>22.10.2026</a:t>
+              <a:t>27.10.2026</a:t>
             </a:fld>
             <a:endParaRPr lang="ru-RU"/>
           </a:p>
@@ -2923,7 +2923,7 @@
           <p:cNvPr id="5" name="Нижний колонтитул 4">
             <a:extLst>
               <a:ext uri="{FF2B5EF4-FFF2-40B4-BE49-F238E27FC236}">
-                <a16:creationId xmlns:a16="http://schemas.microsoft.com/office/drawing/2014/main" id="{AD0A2E83-E5AF-0EB3-958F-5FFD5BF9BE8C}"/>
+                <a16:creationId xmlns:a16="http://schemas.microsoft.com/office/drawing/2014/main" id="{4BA904C8-A1BD-3FF0-D0B1-18773A2F0CA5}"/>
               </a:ext>
             </a:extLst>
           </p:cNvPr>
@@ -2966,7 +2966,7 @@
           <p:cNvPr id="6" name="Номер слайда 5">
             <a:extLst>
               <a:ext uri="{FF2B5EF4-FFF2-40B4-BE49-F238E27FC236}">
-                <a16:creationId xmlns:a16="http://schemas.microsoft.com/office/drawing/2014/main" id="{7B53B29B-37EC-7ADE-1BB2-BB9B889DD812}"/>
+                <a16:creationId xmlns:a16="http://schemas.microsoft.com/office/drawing/2014/main" id="{A940489C-5066-88FF-A2F5-F36C6F55C838}"/>
               </a:ext>
             </a:extLst>
           </p:cNvPr>
@@ -3000,7 +3000,7 @@
             </a:lvl1pPr>
           </a:lstStyle>
           <a:p>
-            <a:fld id="{14248956-2374-48B4-B20B-A1021DAEFE0D}" type="slidenum">
+            <a:fld id="{FCF6D127-6394-4B2C-B510-ECF110AB5AEF}" type="slidenum">
               <a:rPr lang="ru-RU" smtClean="0"/>
               <a:t>‹#›</a:t>
             </a:fld>
@@ -3011,7 +3011,7 @@
     </p:spTree>
     <p:extLst>
       <p:ext uri="{BB962C8B-B14F-4D97-AF65-F5344CB8AC3E}">
-        <p14:creationId xmlns:p14="http://schemas.microsoft.com/office/powerpoint/2010/main" val="1120260318"/>
+        <p14:creationId xmlns:p14="http://schemas.microsoft.com/office/powerpoint/2010/main" val="2871270603"/>
       </p:ext>
     </p:extLst>
   </p:cSld>
@@ -3334,7 +3334,7 @@
           <p:cNvPr id="2" name="Прямоугольник 1">
             <a:extLst>
               <a:ext uri="{FF2B5EF4-FFF2-40B4-BE49-F238E27FC236}">
-                <a16:creationId xmlns:a16="http://schemas.microsoft.com/office/drawing/2014/main" id="{7F5BEB85-AEC1-366B-069D-096A8E4CB906}"/>
+                <a16:creationId xmlns:a16="http://schemas.microsoft.com/office/drawing/2014/main" id="{16014B8F-4FBC-5365-53E4-D78C2DA436F2}"/>
               </a:ext>
             </a:extLst>
           </p:cNvPr>
@@ -3402,7 +3402,7 @@
           <p:cNvPr id="3" name="Прямоугольник 2">
             <a:extLst>
               <a:ext uri="{FF2B5EF4-FFF2-40B4-BE49-F238E27FC236}">
-                <a16:creationId xmlns:a16="http://schemas.microsoft.com/office/drawing/2014/main" id="{849DC070-7F2B-6FB8-2265-4E6098203005}"/>
+                <a16:creationId xmlns:a16="http://schemas.microsoft.com/office/drawing/2014/main" id="{08716D4D-89CF-B428-9ABA-4F3485A6772F}"/>
               </a:ext>
             </a:extLst>
           </p:cNvPr>
@@ -3470,7 +3470,7 @@
           <p:cNvPr id="4" name="Прямоугольник 3">
             <a:extLst>
               <a:ext uri="{FF2B5EF4-FFF2-40B4-BE49-F238E27FC236}">
-                <a16:creationId xmlns:a16="http://schemas.microsoft.com/office/drawing/2014/main" id="{14065CA6-1321-A3EE-FC52-9D057D8DB114}"/>
+                <a16:creationId xmlns:a16="http://schemas.microsoft.com/office/drawing/2014/main" id="{1739ECE5-9BF9-F302-1A04-A437608C13A1}"/>
               </a:ext>
             </a:extLst>
           </p:cNvPr>
@@ -3538,7 +3538,7 @@
           <p:cNvPr id="5" name="TextBox 4">
             <a:extLst>
               <a:ext uri="{FF2B5EF4-FFF2-40B4-BE49-F238E27FC236}">
-                <a16:creationId xmlns:a16="http://schemas.microsoft.com/office/drawing/2014/main" id="{A0360FAD-3AB8-7959-7BD2-3E952459A4FB}"/>
+                <a16:creationId xmlns:a16="http://schemas.microsoft.com/office/drawing/2014/main" id="{9E00EB00-CDF0-F694-CB2A-A0016D254096}"/>
               </a:ext>
             </a:extLst>
           </p:cNvPr>
@@ -3578,7 +3578,7 @@
           <p:cNvPr id="6" name="TextBox 5">
             <a:extLst>
               <a:ext uri="{FF2B5EF4-FFF2-40B4-BE49-F238E27FC236}">
-                <a16:creationId xmlns:a16="http://schemas.microsoft.com/office/drawing/2014/main" id="{787B28FB-A636-26C4-A550-F5D65D83164E}"/>
+                <a16:creationId xmlns:a16="http://schemas.microsoft.com/office/drawing/2014/main" id="{FA1B1DCB-B22B-F343-F499-A2F95F4239FE}"/>
               </a:ext>
             </a:extLst>
           </p:cNvPr>
@@ -3618,7 +3618,7 @@
           <p:cNvPr id="7" name="TextBox 6">
             <a:extLst>
               <a:ext uri="{FF2B5EF4-FFF2-40B4-BE49-F238E27FC236}">
-                <a16:creationId xmlns:a16="http://schemas.microsoft.com/office/drawing/2014/main" id="{7A54CAED-A2E1-F185-B36D-660F55DA12F3}"/>
+                <a16:creationId xmlns:a16="http://schemas.microsoft.com/office/drawing/2014/main" id="{58777F95-CFF3-7152-3547-405E255BB3D1}"/>
               </a:ext>
             </a:extLst>
           </p:cNvPr>
@@ -3658,7 +3658,7 @@
           <p:cNvPr id="8" name="TextBox 7">
             <a:extLst>
               <a:ext uri="{FF2B5EF4-FFF2-40B4-BE49-F238E27FC236}">
-                <a16:creationId xmlns:a16="http://schemas.microsoft.com/office/drawing/2014/main" id="{78545C19-D375-A779-3D27-D40842666C78}"/>
+                <a16:creationId xmlns:a16="http://schemas.microsoft.com/office/drawing/2014/main" id="{80BB1C40-159B-E820-8C35-2454F28E6804}"/>
               </a:ext>
             </a:extLst>
           </p:cNvPr>
@@ -3698,7 +3698,7 @@
           <p:cNvPr id="9" name="TextBox 8">
             <a:extLst>
               <a:ext uri="{FF2B5EF4-FFF2-40B4-BE49-F238E27FC236}">
-                <a16:creationId xmlns:a16="http://schemas.microsoft.com/office/drawing/2014/main" id="{E1073DBC-E3D7-FA20-9F45-E9B5F7DD85BE}"/>
+                <a16:creationId xmlns:a16="http://schemas.microsoft.com/office/drawing/2014/main" id="{3972ACA1-CEE5-085C-2D56-679A1B359204}"/>
               </a:ext>
             </a:extLst>
           </p:cNvPr>
@@ -3738,7 +3738,7 @@
           <p:cNvPr id="10" name="TextBox 9">
             <a:extLst>
               <a:ext uri="{FF2B5EF4-FFF2-40B4-BE49-F238E27FC236}">
-                <a16:creationId xmlns:a16="http://schemas.microsoft.com/office/drawing/2014/main" id="{9B3A0312-075F-CE99-7A61-AC789AD8F0DA}"/>
+                <a16:creationId xmlns:a16="http://schemas.microsoft.com/office/drawing/2014/main" id="{6C5F3304-CA40-AB18-80A7-72C8517FC654}"/>
               </a:ext>
             </a:extLst>
           </p:cNvPr>
@@ -3778,7 +3778,7 @@
           <p:cNvPr id="11" name="Прямоугольник 10">
             <a:extLst>
               <a:ext uri="{FF2B5EF4-FFF2-40B4-BE49-F238E27FC236}">
-                <a16:creationId xmlns:a16="http://schemas.microsoft.com/office/drawing/2014/main" id="{511F0877-5EDE-830B-415B-6AF88F80C526}"/>
+                <a16:creationId xmlns:a16="http://schemas.microsoft.com/office/drawing/2014/main" id="{D79496E9-3AD1-2F19-73B0-B583680316DF}"/>
               </a:ext>
             </a:extLst>
           </p:cNvPr>
@@ -3846,7 +3846,7 @@
           <p:cNvPr id="12" name="TextBox 11">
             <a:extLst>
               <a:ext uri="{FF2B5EF4-FFF2-40B4-BE49-F238E27FC236}">
-                <a16:creationId xmlns:a16="http://schemas.microsoft.com/office/drawing/2014/main" id="{E8112DA3-CB48-3690-106B-ADEEAEDF290C}"/>
+                <a16:creationId xmlns:a16="http://schemas.microsoft.com/office/drawing/2014/main" id="{207AACF1-3A8C-CA64-49D8-43333A7CA66B}"/>
               </a:ext>
             </a:extLst>
           </p:cNvPr>
@@ -3886,7 +3886,7 @@
           <p:cNvPr id="13" name="TextBox 12">
             <a:extLst>
               <a:ext uri="{FF2B5EF4-FFF2-40B4-BE49-F238E27FC236}">
-                <a16:creationId xmlns:a16="http://schemas.microsoft.com/office/drawing/2014/main" id="{06DDB76F-9CBB-5FD1-15D5-039AEB4C4C60}"/>
+                <a16:creationId xmlns:a16="http://schemas.microsoft.com/office/drawing/2014/main" id="{D4A9F410-23FE-C4A9-3EFE-41B8822E95BB}"/>
               </a:ext>
             </a:extLst>
           </p:cNvPr>
@@ -3926,7 +3926,7 @@
           <p:cNvPr id="14" name="TextBox 13">
             <a:extLst>
               <a:ext uri="{FF2B5EF4-FFF2-40B4-BE49-F238E27FC236}">
-                <a16:creationId xmlns:a16="http://schemas.microsoft.com/office/drawing/2014/main" id="{196EA565-F5D7-C706-5CDA-51DA29F481D5}"/>
+                <a16:creationId xmlns:a16="http://schemas.microsoft.com/office/drawing/2014/main" id="{03DE27EA-5918-6E3C-AECE-AB11E5846DD5}"/>
               </a:ext>
             </a:extLst>
           </p:cNvPr>
@@ -3966,7 +3966,7 @@
           <p:cNvPr id="15" name="TextBox 14">
             <a:extLst>
               <a:ext uri="{FF2B5EF4-FFF2-40B4-BE49-F238E27FC236}">
-                <a16:creationId xmlns:a16="http://schemas.microsoft.com/office/drawing/2014/main" id="{89ABBC0A-3D7E-1ACB-79C2-E73A8B6DD67D}"/>
+                <a16:creationId xmlns:a16="http://schemas.microsoft.com/office/drawing/2014/main" id="{022C8824-95A1-14DF-1C96-A7FF7706AE1E}"/>
               </a:ext>
             </a:extLst>
           </p:cNvPr>
@@ -4006,7 +4006,7 @@
           <p:cNvPr id="16" name="TextBox 15">
             <a:extLst>
               <a:ext uri="{FF2B5EF4-FFF2-40B4-BE49-F238E27FC236}">
-                <a16:creationId xmlns:a16="http://schemas.microsoft.com/office/drawing/2014/main" id="{117B9B7C-0685-9702-062D-BDB1C8B17AEA}"/>
+                <a16:creationId xmlns:a16="http://schemas.microsoft.com/office/drawing/2014/main" id="{1A8F7BF4-8846-01B2-C272-DD2F659C64A5}"/>
               </a:ext>
             </a:extLst>
           </p:cNvPr>
@@ -4044,7 +4044,7 @@
     </p:spTree>
     <p:extLst>
       <p:ext uri="{BB962C8B-B14F-4D97-AF65-F5344CB8AC3E}">
-        <p14:creationId xmlns:p14="http://schemas.microsoft.com/office/powerpoint/2010/main" val="447090555"/>
+        <p14:creationId xmlns:p14="http://schemas.microsoft.com/office/powerpoint/2010/main" val="381591009"/>
       </p:ext>
     </p:extLst>
   </p:cSld>
@@ -4076,7 +4076,7 @@
           <p:cNvPr id="2" name="Прямоугольник 1">
             <a:extLst>
               <a:ext uri="{FF2B5EF4-FFF2-40B4-BE49-F238E27FC236}">
-                <a16:creationId xmlns:a16="http://schemas.microsoft.com/office/drawing/2014/main" id="{6A84E295-B90C-2758-3AA4-6487A9FA5881}"/>
+                <a16:creationId xmlns:a16="http://schemas.microsoft.com/office/drawing/2014/main" id="{3481F0FF-2BEC-533A-EC84-3B7A4AACA9F8}"/>
               </a:ext>
             </a:extLst>
           </p:cNvPr>
@@ -4144,7 +4144,7 @@
           <p:cNvPr id="3" name="Прямоугольник 2">
             <a:extLst>
               <a:ext uri="{FF2B5EF4-FFF2-40B4-BE49-F238E27FC236}">
-                <a16:creationId xmlns:a16="http://schemas.microsoft.com/office/drawing/2014/main" id="{499E128A-399D-F99D-3657-F47AF6B408DA}"/>
+                <a16:creationId xmlns:a16="http://schemas.microsoft.com/office/drawing/2014/main" id="{1ACC31D2-AC1B-FC3D-356D-50528D20D245}"/>
               </a:ext>
             </a:extLst>
           </p:cNvPr>
@@ -4212,7 +4212,7 @@
           <p:cNvPr id="4" name="TextBox 3">
             <a:extLst>
               <a:ext uri="{FF2B5EF4-FFF2-40B4-BE49-F238E27FC236}">
-                <a16:creationId xmlns:a16="http://schemas.microsoft.com/office/drawing/2014/main" id="{AF331EC8-EF84-D107-6047-822799D39D01}"/>
+                <a16:creationId xmlns:a16="http://schemas.microsoft.com/office/drawing/2014/main" id="{B1D41CB3-43D0-09A7-F40E-FF2F35039864}"/>
               </a:ext>
             </a:extLst>
           </p:cNvPr>
@@ -4252,7 +4252,7 @@
           <p:cNvPr id="5" name="TextBox 4">
             <a:extLst>
               <a:ext uri="{FF2B5EF4-FFF2-40B4-BE49-F238E27FC236}">
-                <a16:creationId xmlns:a16="http://schemas.microsoft.com/office/drawing/2014/main" id="{974CFA31-C249-75EC-B9AB-4EE762D104F9}"/>
+                <a16:creationId xmlns:a16="http://schemas.microsoft.com/office/drawing/2014/main" id="{0BA5A3C2-52B4-D7A2-A860-3485AEEFF9D5}"/>
               </a:ext>
             </a:extLst>
           </p:cNvPr>
@@ -4293,7 +4293,7 @@
           <p:cNvPr id="6" name="Прямоугольник 5">
             <a:extLst>
               <a:ext uri="{FF2B5EF4-FFF2-40B4-BE49-F238E27FC236}">
-                <a16:creationId xmlns:a16="http://schemas.microsoft.com/office/drawing/2014/main" id="{C4FA9851-6B26-9335-1BDC-D034E3DF52F4}"/>
+                <a16:creationId xmlns:a16="http://schemas.microsoft.com/office/drawing/2014/main" id="{F60A285E-40B5-6FB3-9002-54D2656C12D8}"/>
               </a:ext>
             </a:extLst>
           </p:cNvPr>
@@ -4361,7 +4361,7 @@
           <p:cNvPr id="7" name="Прямоугольник 6">
             <a:extLst>
               <a:ext uri="{FF2B5EF4-FFF2-40B4-BE49-F238E27FC236}">
-                <a16:creationId xmlns:a16="http://schemas.microsoft.com/office/drawing/2014/main" id="{A7709913-6AAF-705F-EA3E-439507B8F3CE}"/>
+                <a16:creationId xmlns:a16="http://schemas.microsoft.com/office/drawing/2014/main" id="{A2B01AB7-A1BA-6D20-CAAD-52BD1B910246}"/>
               </a:ext>
             </a:extLst>
           </p:cNvPr>
@@ -4429,7 +4429,7 @@
           <p:cNvPr id="8" name="TextBox 7">
             <a:extLst>
               <a:ext uri="{FF2B5EF4-FFF2-40B4-BE49-F238E27FC236}">
-                <a16:creationId xmlns:a16="http://schemas.microsoft.com/office/drawing/2014/main" id="{405C7733-A35B-ED21-0699-68A5BCDB4B3E}"/>
+                <a16:creationId xmlns:a16="http://schemas.microsoft.com/office/drawing/2014/main" id="{50873488-7237-1D30-33C1-377072C25C22}"/>
               </a:ext>
             </a:extLst>
           </p:cNvPr>
@@ -4469,7 +4469,7 @@
           <p:cNvPr id="9" name="TextBox 8">
             <a:extLst>
               <a:ext uri="{FF2B5EF4-FFF2-40B4-BE49-F238E27FC236}">
-                <a16:creationId xmlns:a16="http://schemas.microsoft.com/office/drawing/2014/main" id="{29F806FA-C107-AE53-38E3-2FC3F3A74165}"/>
+                <a16:creationId xmlns:a16="http://schemas.microsoft.com/office/drawing/2014/main" id="{A2E05881-AE48-3153-941B-4383AA750550}"/>
               </a:ext>
             </a:extLst>
           </p:cNvPr>
@@ -4588,7 +4588,7 @@
     </p:spTree>
     <p:extLst>
       <p:ext uri="{BB962C8B-B14F-4D97-AF65-F5344CB8AC3E}">
-        <p14:creationId xmlns:p14="http://schemas.microsoft.com/office/powerpoint/2010/main" val="684583390"/>
+        <p14:creationId xmlns:p14="http://schemas.microsoft.com/office/powerpoint/2010/main" val="3687563798"/>
       </p:ext>
     </p:extLst>
   </p:cSld>
@@ -4620,7 +4620,7 @@
           <p:cNvPr id="2" name="Прямоугольник 1">
             <a:extLst>
               <a:ext uri="{FF2B5EF4-FFF2-40B4-BE49-F238E27FC236}">
-                <a16:creationId xmlns:a16="http://schemas.microsoft.com/office/drawing/2014/main" id="{E2DBD48E-8F87-DAE1-9C03-1665401EBBAD}"/>
+                <a16:creationId xmlns:a16="http://schemas.microsoft.com/office/drawing/2014/main" id="{C31D31A3-7CA9-586D-29AC-5B7A182FE2A7}"/>
               </a:ext>
             </a:extLst>
           </p:cNvPr>
@@ -4688,7 +4688,7 @@
           <p:cNvPr id="3" name="Прямоугольник 2">
             <a:extLst>
               <a:ext uri="{FF2B5EF4-FFF2-40B4-BE49-F238E27FC236}">
-                <a16:creationId xmlns:a16="http://schemas.microsoft.com/office/drawing/2014/main" id="{9DA11DE9-3B17-A053-7AA7-1BAC1F8212EF}"/>
+                <a16:creationId xmlns:a16="http://schemas.microsoft.com/office/drawing/2014/main" id="{5E772B6C-98BC-92DF-0A65-01A999EF4FAA}"/>
               </a:ext>
             </a:extLst>
           </p:cNvPr>
@@ -4756,7 +4756,7 @@
           <p:cNvPr id="4" name="TextBox 3">
             <a:extLst>
               <a:ext uri="{FF2B5EF4-FFF2-40B4-BE49-F238E27FC236}">
-                <a16:creationId xmlns:a16="http://schemas.microsoft.com/office/drawing/2014/main" id="{8B1E7C10-0D44-8C77-B8CE-D67B4DE85144}"/>
+                <a16:creationId xmlns:a16="http://schemas.microsoft.com/office/drawing/2014/main" id="{605F279A-7F8B-9A89-BAC7-C4812C46D650}"/>
               </a:ext>
             </a:extLst>
           </p:cNvPr>
@@ -4796,7 +4796,7 @@
           <p:cNvPr id="5" name="TextBox 4">
             <a:extLst>
               <a:ext uri="{FF2B5EF4-FFF2-40B4-BE49-F238E27FC236}">
-                <a16:creationId xmlns:a16="http://schemas.microsoft.com/office/drawing/2014/main" id="{08C50EAB-2443-451F-187A-33BE4194E931}"/>
+                <a16:creationId xmlns:a16="http://schemas.microsoft.com/office/drawing/2014/main" id="{CA650F2A-041E-BCCC-1CF0-EF1653810741}"/>
               </a:ext>
             </a:extLst>
           </p:cNvPr>
@@ -4837,7 +4837,7 @@
           <p:cNvPr id="6" name="Прямоугольник 5">
             <a:extLst>
               <a:ext uri="{FF2B5EF4-FFF2-40B4-BE49-F238E27FC236}">
-                <a16:creationId xmlns:a16="http://schemas.microsoft.com/office/drawing/2014/main" id="{57977D09-AC97-EFB9-7EA2-7238283DFAD8}"/>
+                <a16:creationId xmlns:a16="http://schemas.microsoft.com/office/drawing/2014/main" id="{5C7425B8-AB89-DA0A-A65B-2282D4E7CF10}"/>
               </a:ext>
             </a:extLst>
           </p:cNvPr>
@@ -4905,7 +4905,7 @@
           <p:cNvPr id="7" name="TextBox 6">
             <a:extLst>
               <a:ext uri="{FF2B5EF4-FFF2-40B4-BE49-F238E27FC236}">
-                <a16:creationId xmlns:a16="http://schemas.microsoft.com/office/drawing/2014/main" id="{6802688B-87C3-238C-1C91-C59D23896CA6}"/>
+                <a16:creationId xmlns:a16="http://schemas.microsoft.com/office/drawing/2014/main" id="{A37631B7-7B1C-6650-6170-E59325444831}"/>
               </a:ext>
             </a:extLst>
           </p:cNvPr>
@@ -4978,7 +4978,7 @@
           <p:cNvPr id="8" name="TextBox 7">
             <a:extLst>
               <a:ext uri="{FF2B5EF4-FFF2-40B4-BE49-F238E27FC236}">
-                <a16:creationId xmlns:a16="http://schemas.microsoft.com/office/drawing/2014/main" id="{9C6256E4-44A6-FE50-C67B-107688A398C6}"/>
+                <a16:creationId xmlns:a16="http://schemas.microsoft.com/office/drawing/2014/main" id="{960E7805-8753-544A-C1F6-FB4E1F77641F}"/>
               </a:ext>
             </a:extLst>
           </p:cNvPr>
@@ -5049,7 +5049,7 @@
     </p:spTree>
     <p:extLst>
       <p:ext uri="{BB962C8B-B14F-4D97-AF65-F5344CB8AC3E}">
-        <p14:creationId xmlns:p14="http://schemas.microsoft.com/office/powerpoint/2010/main" val="4170689663"/>
+        <p14:creationId xmlns:p14="http://schemas.microsoft.com/office/powerpoint/2010/main" val="1384912300"/>
       </p:ext>
     </p:extLst>
   </p:cSld>
@@ -5081,7 +5081,7 @@
           <p:cNvPr id="2" name="Прямоугольник 1">
             <a:extLst>
               <a:ext uri="{FF2B5EF4-FFF2-40B4-BE49-F238E27FC236}">
-                <a16:creationId xmlns:a16="http://schemas.microsoft.com/office/drawing/2014/main" id="{7D89CA07-C99A-982F-24ED-C22A7AD00AB4}"/>
+                <a16:creationId xmlns:a16="http://schemas.microsoft.com/office/drawing/2014/main" id="{B1A8C184-DD6F-22E6-38D9-DE5471BC833D}"/>
               </a:ext>
             </a:extLst>
           </p:cNvPr>
@@ -5149,7 +5149,7 @@
           <p:cNvPr id="3" name="Прямоугольник 2">
             <a:extLst>
               <a:ext uri="{FF2B5EF4-FFF2-40B4-BE49-F238E27FC236}">
-                <a16:creationId xmlns:a16="http://schemas.microsoft.com/office/drawing/2014/main" id="{371A4BBA-4248-0CBE-C6F4-13C58093E3B5}"/>
+                <a16:creationId xmlns:a16="http://schemas.microsoft.com/office/drawing/2014/main" id="{5AD96970-1116-3B18-6455-C473F8A6C294}"/>
               </a:ext>
             </a:extLst>
           </p:cNvPr>
@@ -5217,7 +5217,7 @@
           <p:cNvPr id="4" name="TextBox 3">
             <a:extLst>
               <a:ext uri="{FF2B5EF4-FFF2-40B4-BE49-F238E27FC236}">
-                <a16:creationId xmlns:a16="http://schemas.microsoft.com/office/drawing/2014/main" id="{2110E07B-B826-F0AF-88A5-F6C5B99CAA66}"/>
+                <a16:creationId xmlns:a16="http://schemas.microsoft.com/office/drawing/2014/main" id="{A79B4F06-D787-957A-BBFC-9B4695254512}"/>
               </a:ext>
             </a:extLst>
           </p:cNvPr>
@@ -5257,7 +5257,7 @@
           <p:cNvPr id="5" name="TextBox 4">
             <a:extLst>
               <a:ext uri="{FF2B5EF4-FFF2-40B4-BE49-F238E27FC236}">
-                <a16:creationId xmlns:a16="http://schemas.microsoft.com/office/drawing/2014/main" id="{C3D15CAC-20D6-CF0F-6C03-4843055A840F}"/>
+                <a16:creationId xmlns:a16="http://schemas.microsoft.com/office/drawing/2014/main" id="{71114DE8-6824-F55D-C270-070E8FFAAB66}"/>
               </a:ext>
             </a:extLst>
           </p:cNvPr>
@@ -5298,7 +5298,7 @@
           <p:cNvPr id="6" name="Прямоугольник 5">
             <a:extLst>
               <a:ext uri="{FF2B5EF4-FFF2-40B4-BE49-F238E27FC236}">
-                <a16:creationId xmlns:a16="http://schemas.microsoft.com/office/drawing/2014/main" id="{EFB395B3-92CE-814B-6EFE-FE3CEFF8866B}"/>
+                <a16:creationId xmlns:a16="http://schemas.microsoft.com/office/drawing/2014/main" id="{71ECB7F0-9905-E719-B758-074FDE817AB5}"/>
               </a:ext>
             </a:extLst>
           </p:cNvPr>
@@ -5366,7 +5366,7 @@
           <p:cNvPr id="7" name="Прямоугольник 6">
             <a:extLst>
               <a:ext uri="{FF2B5EF4-FFF2-40B4-BE49-F238E27FC236}">
-                <a16:creationId xmlns:a16="http://schemas.microsoft.com/office/drawing/2014/main" id="{E60CD6E7-25F2-B40D-796B-727226119D26}"/>
+                <a16:creationId xmlns:a16="http://schemas.microsoft.com/office/drawing/2014/main" id="{C63A9614-D5E6-3F76-BFC0-C4398E3E8B52}"/>
               </a:ext>
             </a:extLst>
           </p:cNvPr>
@@ -5434,7 +5434,7 @@
           <p:cNvPr id="9" name="Рисунок 8">
             <a:extLst>
               <a:ext uri="{FF2B5EF4-FFF2-40B4-BE49-F238E27FC236}">
-                <a16:creationId xmlns:a16="http://schemas.microsoft.com/office/drawing/2014/main" id="{451EA827-46CA-C19F-C8EA-6E56983316D0}"/>
+                <a16:creationId xmlns:a16="http://schemas.microsoft.com/office/drawing/2014/main" id="{5760C59E-714B-6ECE-A894-CEB62BA79870}"/>
               </a:ext>
             </a:extLst>
           </p:cNvPr>
@@ -5470,7 +5470,7 @@
           <p:cNvPr id="10" name="TextBox 9">
             <a:extLst>
               <a:ext uri="{FF2B5EF4-FFF2-40B4-BE49-F238E27FC236}">
-                <a16:creationId xmlns:a16="http://schemas.microsoft.com/office/drawing/2014/main" id="{2042B211-622A-BE1A-184B-5A9F459E0BF9}"/>
+                <a16:creationId xmlns:a16="http://schemas.microsoft.com/office/drawing/2014/main" id="{FBC150D3-41CA-0748-FA65-51589BEC785E}"/>
               </a:ext>
             </a:extLst>
           </p:cNvPr>
@@ -5516,7 +5516,7 @@
           <p:cNvPr id="11" name="TextBox 10">
             <a:extLst>
               <a:ext uri="{FF2B5EF4-FFF2-40B4-BE49-F238E27FC236}">
-                <a16:creationId xmlns:a16="http://schemas.microsoft.com/office/drawing/2014/main" id="{2E185420-278B-DAD1-D565-C90055ABF66F}"/>
+                <a16:creationId xmlns:a16="http://schemas.microsoft.com/office/drawing/2014/main" id="{2B42C477-4D0B-5EA0-BAD4-42C26720C00F}"/>
               </a:ext>
             </a:extLst>
           </p:cNvPr>
@@ -5556,7 +5556,7 @@
           <p:cNvPr id="12" name="Прямоугольник 11">
             <a:extLst>
               <a:ext uri="{FF2B5EF4-FFF2-40B4-BE49-F238E27FC236}">
-                <a16:creationId xmlns:a16="http://schemas.microsoft.com/office/drawing/2014/main" id="{565654F6-098D-AEDE-E7BE-6458D5BE9540}"/>
+                <a16:creationId xmlns:a16="http://schemas.microsoft.com/office/drawing/2014/main" id="{F21BB3E0-66F7-9697-659F-89F1FB7B67B4}"/>
               </a:ext>
             </a:extLst>
           </p:cNvPr>
@@ -5624,7 +5624,7 @@
           <p:cNvPr id="14" name="Рисунок 13">
             <a:extLst>
               <a:ext uri="{FF2B5EF4-FFF2-40B4-BE49-F238E27FC236}">
-                <a16:creationId xmlns:a16="http://schemas.microsoft.com/office/drawing/2014/main" id="{B75AE2C5-2A04-77EA-FCFF-25BA1AFBFB29}"/>
+                <a16:creationId xmlns:a16="http://schemas.microsoft.com/office/drawing/2014/main" id="{4089D3C1-5E13-1B5E-2E51-97C2B3367917}"/>
               </a:ext>
             </a:extLst>
           </p:cNvPr>
@@ -5660,7 +5660,7 @@
           <p:cNvPr id="15" name="TextBox 14">
             <a:extLst>
               <a:ext uri="{FF2B5EF4-FFF2-40B4-BE49-F238E27FC236}">
-                <a16:creationId xmlns:a16="http://schemas.microsoft.com/office/drawing/2014/main" id="{8956D0FA-62A9-1393-7E4B-18B6B7FB315F}"/>
+                <a16:creationId xmlns:a16="http://schemas.microsoft.com/office/drawing/2014/main" id="{85EA3057-645C-DFE8-33C0-88DB5DD43B7A}"/>
               </a:ext>
             </a:extLst>
           </p:cNvPr>
@@ -5706,7 +5706,7 @@
           <p:cNvPr id="16" name="TextBox 15">
             <a:extLst>
               <a:ext uri="{FF2B5EF4-FFF2-40B4-BE49-F238E27FC236}">
-                <a16:creationId xmlns:a16="http://schemas.microsoft.com/office/drawing/2014/main" id="{EE00D510-CC7E-6DB9-734E-57764A55C81B}"/>
+                <a16:creationId xmlns:a16="http://schemas.microsoft.com/office/drawing/2014/main" id="{E20364DE-0030-626B-AC6D-65A6A6BB8340}"/>
               </a:ext>
             </a:extLst>
           </p:cNvPr>
@@ -5746,7 +5746,7 @@
           <p:cNvPr id="17" name="Прямоугольник 16">
             <a:extLst>
               <a:ext uri="{FF2B5EF4-FFF2-40B4-BE49-F238E27FC236}">
-                <a16:creationId xmlns:a16="http://schemas.microsoft.com/office/drawing/2014/main" id="{BA2309D4-299C-86F1-B35F-0BAA4B67536E}"/>
+                <a16:creationId xmlns:a16="http://schemas.microsoft.com/office/drawing/2014/main" id="{FC5CEA66-A611-9843-85F8-E2BD0B751289}"/>
               </a:ext>
             </a:extLst>
           </p:cNvPr>
@@ -5814,7 +5814,7 @@
           <p:cNvPr id="19" name="Рисунок 18">
             <a:extLst>
               <a:ext uri="{FF2B5EF4-FFF2-40B4-BE49-F238E27FC236}">
-                <a16:creationId xmlns:a16="http://schemas.microsoft.com/office/drawing/2014/main" id="{EE6AEE6B-2B76-6935-5EFB-1FDE267CA5A5}"/>
+                <a16:creationId xmlns:a16="http://schemas.microsoft.com/office/drawing/2014/main" id="{29A78B51-8D79-3243-29F7-3E97417BD369}"/>
               </a:ext>
             </a:extLst>
           </p:cNvPr>
@@ -5850,7 +5850,7 @@
           <p:cNvPr id="20" name="TextBox 19">
             <a:extLst>
               <a:ext uri="{FF2B5EF4-FFF2-40B4-BE49-F238E27FC236}">
-                <a16:creationId xmlns:a16="http://schemas.microsoft.com/office/drawing/2014/main" id="{8B9C8511-C681-BD13-F13F-BD5417B4A44F}"/>
+                <a16:creationId xmlns:a16="http://schemas.microsoft.com/office/drawing/2014/main" id="{2F3D1CE2-A030-4968-8F99-78E8447C12E6}"/>
               </a:ext>
             </a:extLst>
           </p:cNvPr>
@@ -5896,7 +5896,7 @@
           <p:cNvPr id="21" name="TextBox 20">
             <a:extLst>
               <a:ext uri="{FF2B5EF4-FFF2-40B4-BE49-F238E27FC236}">
-                <a16:creationId xmlns:a16="http://schemas.microsoft.com/office/drawing/2014/main" id="{818D66F2-7649-E214-8E42-80EBB4427E83}"/>
+                <a16:creationId xmlns:a16="http://schemas.microsoft.com/office/drawing/2014/main" id="{B41D3C66-405B-812E-6978-58A1F89AD39B}"/>
               </a:ext>
             </a:extLst>
           </p:cNvPr>
@@ -5936,7 +5936,7 @@
           <p:cNvPr id="22" name="Прямоугольник 21">
             <a:extLst>
               <a:ext uri="{FF2B5EF4-FFF2-40B4-BE49-F238E27FC236}">
-                <a16:creationId xmlns:a16="http://schemas.microsoft.com/office/drawing/2014/main" id="{A09500E5-3625-14E4-54C9-B3384FDE0437}"/>
+                <a16:creationId xmlns:a16="http://schemas.microsoft.com/office/drawing/2014/main" id="{4829F9D1-285F-CD8F-7993-037A294AA5F2}"/>
               </a:ext>
             </a:extLst>
           </p:cNvPr>
@@ -6004,7 +6004,7 @@
           <p:cNvPr id="24" name="Рисунок 23">
             <a:extLst>
               <a:ext uri="{FF2B5EF4-FFF2-40B4-BE49-F238E27FC236}">
-                <a16:creationId xmlns:a16="http://schemas.microsoft.com/office/drawing/2014/main" id="{70F4EE56-F556-01B3-A2FC-3A18E00B17B4}"/>
+                <a16:creationId xmlns:a16="http://schemas.microsoft.com/office/drawing/2014/main" id="{785364BA-444F-467E-2322-CBCF41B41CFB}"/>
               </a:ext>
             </a:extLst>
           </p:cNvPr>
@@ -6040,7 +6040,7 @@
           <p:cNvPr id="25" name="TextBox 24">
             <a:extLst>
               <a:ext uri="{FF2B5EF4-FFF2-40B4-BE49-F238E27FC236}">
-                <a16:creationId xmlns:a16="http://schemas.microsoft.com/office/drawing/2014/main" id="{5E249E43-6F0F-BBEE-3305-FC2A76C6B4DF}"/>
+                <a16:creationId xmlns:a16="http://schemas.microsoft.com/office/drawing/2014/main" id="{69881A69-37F8-19B3-5352-610ECA4220ED}"/>
               </a:ext>
             </a:extLst>
           </p:cNvPr>
@@ -6089,7 +6089,7 @@
           <p:cNvPr id="26" name="TextBox 25">
             <a:extLst>
               <a:ext uri="{FF2B5EF4-FFF2-40B4-BE49-F238E27FC236}">
-                <a16:creationId xmlns:a16="http://schemas.microsoft.com/office/drawing/2014/main" id="{9A5F0215-9DD3-4622-F4F4-8CF208D1A000}"/>
+                <a16:creationId xmlns:a16="http://schemas.microsoft.com/office/drawing/2014/main" id="{5E82822C-6CFE-1547-D084-B74687EB541C}"/>
               </a:ext>
             </a:extLst>
           </p:cNvPr>
@@ -6129,7 +6129,7 @@
           <p:cNvPr id="27" name="TextBox 26">
             <a:extLst>
               <a:ext uri="{FF2B5EF4-FFF2-40B4-BE49-F238E27FC236}">
-                <a16:creationId xmlns:a16="http://schemas.microsoft.com/office/drawing/2014/main" id="{201FC0D9-B946-1C0A-20DD-9E9D68763EA3}"/>
+                <a16:creationId xmlns:a16="http://schemas.microsoft.com/office/drawing/2014/main" id="{83697D2B-1DA4-FF74-0D75-031BA1E5CE68}"/>
               </a:ext>
             </a:extLst>
           </p:cNvPr>
@@ -6167,7 +6167,7 @@
     </p:spTree>
     <p:extLst>
       <p:ext uri="{BB962C8B-B14F-4D97-AF65-F5344CB8AC3E}">
-        <p14:creationId xmlns:p14="http://schemas.microsoft.com/office/powerpoint/2010/main" val="1370688197"/>
+        <p14:creationId xmlns:p14="http://schemas.microsoft.com/office/powerpoint/2010/main" val="4114094706"/>
       </p:ext>
     </p:extLst>
   </p:cSld>
@@ -6199,7 +6199,7 @@
           <p:cNvPr id="2" name="Прямоугольник 1">
             <a:extLst>
               <a:ext uri="{FF2B5EF4-FFF2-40B4-BE49-F238E27FC236}">
-                <a16:creationId xmlns:a16="http://schemas.microsoft.com/office/drawing/2014/main" id="{F36F3507-77F6-6BB4-4D78-B341E54CC4CE}"/>
+                <a16:creationId xmlns:a16="http://schemas.microsoft.com/office/drawing/2014/main" id="{DD34D75A-63B9-3874-5BB0-F53676D6209D}"/>
               </a:ext>
             </a:extLst>
           </p:cNvPr>
@@ -6267,7 +6267,7 @@
           <p:cNvPr id="3" name="Прямоугольник 2">
             <a:extLst>
               <a:ext uri="{FF2B5EF4-FFF2-40B4-BE49-F238E27FC236}">
-                <a16:creationId xmlns:a16="http://schemas.microsoft.com/office/drawing/2014/main" id="{A72C0A50-6A65-2B16-5B85-5C08602B4833}"/>
+                <a16:creationId xmlns:a16="http://schemas.microsoft.com/office/drawing/2014/main" id="{936A1719-318E-4ED9-6E3D-A0341C39DE66}"/>
               </a:ext>
             </a:extLst>
           </p:cNvPr>
@@ -6335,7 +6335,7 @@
           <p:cNvPr id="4" name="TextBox 3">
             <a:extLst>
               <a:ext uri="{FF2B5EF4-FFF2-40B4-BE49-F238E27FC236}">
-                <a16:creationId xmlns:a16="http://schemas.microsoft.com/office/drawing/2014/main" id="{8C774E66-9F1E-4550-0CBB-D192F0493AD9}"/>
+                <a16:creationId xmlns:a16="http://schemas.microsoft.com/office/drawing/2014/main" id="{604C689D-3409-B104-A5B1-79C48866F470}"/>
               </a:ext>
             </a:extLst>
           </p:cNvPr>
@@ -6375,7 +6375,7 @@
           <p:cNvPr id="5" name="TextBox 4">
             <a:extLst>
               <a:ext uri="{FF2B5EF4-FFF2-40B4-BE49-F238E27FC236}">
-                <a16:creationId xmlns:a16="http://schemas.microsoft.com/office/drawing/2014/main" id="{15CCC135-0A46-68D5-5DB4-A997E321D843}"/>
+                <a16:creationId xmlns:a16="http://schemas.microsoft.com/office/drawing/2014/main" id="{5630FD79-0001-8558-DDBF-943CC18BA755}"/>
               </a:ext>
             </a:extLst>
           </p:cNvPr>
@@ -6416,7 +6416,7 @@
           <p:cNvPr id="6" name="Прямоугольник 5">
             <a:extLst>
               <a:ext uri="{FF2B5EF4-FFF2-40B4-BE49-F238E27FC236}">
-                <a16:creationId xmlns:a16="http://schemas.microsoft.com/office/drawing/2014/main" id="{1DEF9699-DBEA-A8F9-42EE-B3A436A42460}"/>
+                <a16:creationId xmlns:a16="http://schemas.microsoft.com/office/drawing/2014/main" id="{0661FD05-1403-0852-7343-FAF98F52C842}"/>
               </a:ext>
             </a:extLst>
           </p:cNvPr>
@@ -6484,7 +6484,7 @@
           <p:cNvPr id="8" name="Рисунок 7">
             <a:extLst>
               <a:ext uri="{FF2B5EF4-FFF2-40B4-BE49-F238E27FC236}">
-                <a16:creationId xmlns:a16="http://schemas.microsoft.com/office/drawing/2014/main" id="{27AE21FE-8002-5DAB-7CF4-E22257D6FEE5}"/>
+                <a16:creationId xmlns:a16="http://schemas.microsoft.com/office/drawing/2014/main" id="{EDE87226-3D1E-5215-570D-72C497F8CBA1}"/>
               </a:ext>
             </a:extLst>
           </p:cNvPr>
@@ -6507,8 +6507,8 @@
         </p:blipFill>
         <p:spPr>
           <a:xfrm>
-            <a:off x="558800" y="1219200"/>
-            <a:ext cx="7795260" cy="5029200"/>
+            <a:off x="558800" y="1168400"/>
+            <a:ext cx="7467600" cy="5457629"/>
           </a:xfrm>
           <a:prstGeom prst="rect">
             <a:avLst/>
@@ -6520,7 +6520,7 @@
           <p:cNvPr id="9" name="TextBox 8">
             <a:extLst>
               <a:ext uri="{FF2B5EF4-FFF2-40B4-BE49-F238E27FC236}">
-                <a16:creationId xmlns:a16="http://schemas.microsoft.com/office/drawing/2014/main" id="{FB4E074C-819E-BD84-38B2-2138A28C09E1}"/>
+                <a16:creationId xmlns:a16="http://schemas.microsoft.com/office/drawing/2014/main" id="{593F09DB-993D-C441-41CD-90DD92A16B6D}"/>
               </a:ext>
             </a:extLst>
           </p:cNvPr>
@@ -6639,7 +6639,7 @@
     </p:spTree>
     <p:extLst>
       <p:ext uri="{BB962C8B-B14F-4D97-AF65-F5344CB8AC3E}">
-        <p14:creationId xmlns:p14="http://schemas.microsoft.com/office/powerpoint/2010/main" val="4178676166"/>
+        <p14:creationId xmlns:p14="http://schemas.microsoft.com/office/powerpoint/2010/main" val="1032310480"/>
       </p:ext>
     </p:extLst>
   </p:cSld>
@@ -6671,7 +6671,7 @@
           <p:cNvPr id="2" name="Прямоугольник 1">
             <a:extLst>
               <a:ext uri="{FF2B5EF4-FFF2-40B4-BE49-F238E27FC236}">
-                <a16:creationId xmlns:a16="http://schemas.microsoft.com/office/drawing/2014/main" id="{5A0A09D0-7DD7-C930-6026-16C4E1A845EA}"/>
+                <a16:creationId xmlns:a16="http://schemas.microsoft.com/office/drawing/2014/main" id="{603DAB82-2E62-6CF8-433F-9ED7A14E9CDB}"/>
               </a:ext>
             </a:extLst>
           </p:cNvPr>
@@ -6739,7 +6739,7 @@
           <p:cNvPr id="3" name="Прямоугольник 2">
             <a:extLst>
               <a:ext uri="{FF2B5EF4-FFF2-40B4-BE49-F238E27FC236}">
-                <a16:creationId xmlns:a16="http://schemas.microsoft.com/office/drawing/2014/main" id="{378F1F24-7D81-29E8-D6E7-5B8EFD16FA12}"/>
+                <a16:creationId xmlns:a16="http://schemas.microsoft.com/office/drawing/2014/main" id="{C33DC4C9-5194-A569-0AAC-D977BEC709FB}"/>
               </a:ext>
             </a:extLst>
           </p:cNvPr>
@@ -6807,7 +6807,7 @@
           <p:cNvPr id="4" name="TextBox 3">
             <a:extLst>
               <a:ext uri="{FF2B5EF4-FFF2-40B4-BE49-F238E27FC236}">
-                <a16:creationId xmlns:a16="http://schemas.microsoft.com/office/drawing/2014/main" id="{31BB247C-4DB9-B26B-E398-F671345B6ACB}"/>
+                <a16:creationId xmlns:a16="http://schemas.microsoft.com/office/drawing/2014/main" id="{4A769DA6-BDF9-DFC0-2D2C-082F51AB49D6}"/>
               </a:ext>
             </a:extLst>
           </p:cNvPr>
@@ -6847,7 +6847,7 @@
           <p:cNvPr id="5" name="TextBox 4">
             <a:extLst>
               <a:ext uri="{FF2B5EF4-FFF2-40B4-BE49-F238E27FC236}">
-                <a16:creationId xmlns:a16="http://schemas.microsoft.com/office/drawing/2014/main" id="{5164F03F-7EE9-F6FC-2225-F50EFE0E4FFB}"/>
+                <a16:creationId xmlns:a16="http://schemas.microsoft.com/office/drawing/2014/main" id="{ACC38438-D600-1B57-1740-3596565E0AA7}"/>
               </a:ext>
             </a:extLst>
           </p:cNvPr>
@@ -6888,7 +6888,7 @@
           <p:cNvPr id="6" name="Прямоугольник 5">
             <a:extLst>
               <a:ext uri="{FF2B5EF4-FFF2-40B4-BE49-F238E27FC236}">
-                <a16:creationId xmlns:a16="http://schemas.microsoft.com/office/drawing/2014/main" id="{9E0CEA50-CCB1-E4D6-0204-1EC348BC9CB8}"/>
+                <a16:creationId xmlns:a16="http://schemas.microsoft.com/office/drawing/2014/main" id="{6C7DCC59-30B5-A905-B9BB-658FC01060BA}"/>
               </a:ext>
             </a:extLst>
           </p:cNvPr>
@@ -6956,7 +6956,7 @@
           <p:cNvPr id="7" name="Таблица 6">
             <a:extLst>
               <a:ext uri="{FF2B5EF4-FFF2-40B4-BE49-F238E27FC236}">
-                <a16:creationId xmlns:a16="http://schemas.microsoft.com/office/drawing/2014/main" id="{111921A2-27CA-7244-35FF-80CE08852346}"/>
+                <a16:creationId xmlns:a16="http://schemas.microsoft.com/office/drawing/2014/main" id="{0E12597E-6B4D-283D-4F54-4C4C4C04C520}"/>
               </a:ext>
             </a:extLst>
           </p:cNvPr>
@@ -6966,7 +6966,7 @@
           <p:nvPr>
             <p:extLst>
               <p:ext uri="{D42A27DB-BD31-4B8C-83A1-F6EECF244321}">
-                <p14:modId xmlns:p14="http://schemas.microsoft.com/office/powerpoint/2010/main" val="928112676"/>
+                <p14:modId xmlns:p14="http://schemas.microsoft.com/office/powerpoint/2010/main" val="2886552294"/>
               </p:ext>
             </p:extLst>
           </p:nvPr>
@@ -6985,21 +6985,21 @@
                 <a:gridCol w="2413000">
                   <a:extLst>
                     <a:ext uri="{9D8B030D-6E8A-4147-A177-3AD203B41FA5}">
-                      <a16:colId xmlns:a16="http://schemas.microsoft.com/office/drawing/2014/main" val="2886896077"/>
+                      <a16:colId xmlns:a16="http://schemas.microsoft.com/office/drawing/2014/main" val="3892622694"/>
                     </a:ext>
                   </a:extLst>
                 </a:gridCol>
                 <a:gridCol w="5969000">
                   <a:extLst>
                     <a:ext uri="{9D8B030D-6E8A-4147-A177-3AD203B41FA5}">
-                      <a16:colId xmlns:a16="http://schemas.microsoft.com/office/drawing/2014/main" val="1090525714"/>
+                      <a16:colId xmlns:a16="http://schemas.microsoft.com/office/drawing/2014/main" val="3483785350"/>
                     </a:ext>
                   </a:extLst>
                 </a:gridCol>
                 <a:gridCol w="2692400">
                   <a:extLst>
                     <a:ext uri="{9D8B030D-6E8A-4147-A177-3AD203B41FA5}">
-                      <a16:colId xmlns:a16="http://schemas.microsoft.com/office/drawing/2014/main" val="4237194425"/>
+                      <a16:colId xmlns:a16="http://schemas.microsoft.com/office/drawing/2014/main" val="3708601921"/>
                     </a:ext>
                   </a:extLst>
                 </a:gridCol>
@@ -7073,7 +7073,7 @@
                 </a:tc>
                 <a:extLst>
                   <a:ext uri="{0D108BD9-81ED-4DB2-BD59-A6C34878D82A}">
-                    <a16:rowId xmlns:a16="http://schemas.microsoft.com/office/drawing/2014/main" val="1198988284"/>
+                    <a16:rowId xmlns:a16="http://schemas.microsoft.com/office/drawing/2014/main" val="479459469"/>
                   </a:ext>
                 </a:extLst>
               </a:tr>
@@ -7146,7 +7146,7 @@
                 </a:tc>
                 <a:extLst>
                   <a:ext uri="{0D108BD9-81ED-4DB2-BD59-A6C34878D82A}">
-                    <a16:rowId xmlns:a16="http://schemas.microsoft.com/office/drawing/2014/main" val="1271698673"/>
+                    <a16:rowId xmlns:a16="http://schemas.microsoft.com/office/drawing/2014/main" val="4015584526"/>
                   </a:ext>
                 </a:extLst>
               </a:tr>
@@ -7219,7 +7219,7 @@
                 </a:tc>
                 <a:extLst>
                   <a:ext uri="{0D108BD9-81ED-4DB2-BD59-A6C34878D82A}">
-                    <a16:rowId xmlns:a16="http://schemas.microsoft.com/office/drawing/2014/main" val="3322552516"/>
+                    <a16:rowId xmlns:a16="http://schemas.microsoft.com/office/drawing/2014/main" val="2943345415"/>
                   </a:ext>
                 </a:extLst>
               </a:tr>
@@ -7292,7 +7292,7 @@
                 </a:tc>
                 <a:extLst>
                   <a:ext uri="{0D108BD9-81ED-4DB2-BD59-A6C34878D82A}">
-                    <a16:rowId xmlns:a16="http://schemas.microsoft.com/office/drawing/2014/main" val="2788340979"/>
+                    <a16:rowId xmlns:a16="http://schemas.microsoft.com/office/drawing/2014/main" val="675788661"/>
                   </a:ext>
                 </a:extLst>
               </a:tr>
@@ -7305,7 +7305,7 @@
           <p:cNvPr id="8" name="TextBox 7">
             <a:extLst>
               <a:ext uri="{FF2B5EF4-FFF2-40B4-BE49-F238E27FC236}">
-                <a16:creationId xmlns:a16="http://schemas.microsoft.com/office/drawing/2014/main" id="{46FFABBC-FD9C-31C7-7B30-5AE68C428F8F}"/>
+                <a16:creationId xmlns:a16="http://schemas.microsoft.com/office/drawing/2014/main" id="{959F291F-2547-A1D6-B9CC-5F0119C9BF72}"/>
               </a:ext>
             </a:extLst>
           </p:cNvPr>
@@ -7343,7 +7343,7 @@
     </p:spTree>
     <p:extLst>
       <p:ext uri="{BB962C8B-B14F-4D97-AF65-F5344CB8AC3E}">
-        <p14:creationId xmlns:p14="http://schemas.microsoft.com/office/powerpoint/2010/main" val="3085278276"/>
+        <p14:creationId xmlns:p14="http://schemas.microsoft.com/office/powerpoint/2010/main" val="4286820359"/>
       </p:ext>
     </p:extLst>
   </p:cSld>
@@ -7375,7 +7375,7 @@
           <p:cNvPr id="2" name="Прямоугольник 1">
             <a:extLst>
               <a:ext uri="{FF2B5EF4-FFF2-40B4-BE49-F238E27FC236}">
-                <a16:creationId xmlns:a16="http://schemas.microsoft.com/office/drawing/2014/main" id="{13E7BF4A-A64A-C762-7F60-C45903C9D3B0}"/>
+                <a16:creationId xmlns:a16="http://schemas.microsoft.com/office/drawing/2014/main" id="{4EB14088-F80C-1339-AACE-E6DF503C60DE}"/>
               </a:ext>
             </a:extLst>
           </p:cNvPr>
@@ -7443,7 +7443,7 @@
           <p:cNvPr id="3" name="Прямоугольник 2">
             <a:extLst>
               <a:ext uri="{FF2B5EF4-FFF2-40B4-BE49-F238E27FC236}">
-                <a16:creationId xmlns:a16="http://schemas.microsoft.com/office/drawing/2014/main" id="{EE9E813F-89AF-E823-49EA-1BFE4A95FE7C}"/>
+                <a16:creationId xmlns:a16="http://schemas.microsoft.com/office/drawing/2014/main" id="{2ABF7CD1-BD89-1E84-2DEC-D38822BE10BC}"/>
               </a:ext>
             </a:extLst>
           </p:cNvPr>
@@ -7511,7 +7511,7 @@
           <p:cNvPr id="4" name="TextBox 3">
             <a:extLst>
               <a:ext uri="{FF2B5EF4-FFF2-40B4-BE49-F238E27FC236}">
-                <a16:creationId xmlns:a16="http://schemas.microsoft.com/office/drawing/2014/main" id="{97556D7E-E34A-35BD-6EDC-23D1471E7B51}"/>
+                <a16:creationId xmlns:a16="http://schemas.microsoft.com/office/drawing/2014/main" id="{33AA2F99-B76F-128F-3B67-66E4C8296473}"/>
               </a:ext>
             </a:extLst>
           </p:cNvPr>
@@ -7551,7 +7551,7 @@
           <p:cNvPr id="5" name="TextBox 4">
             <a:extLst>
               <a:ext uri="{FF2B5EF4-FFF2-40B4-BE49-F238E27FC236}">
-                <a16:creationId xmlns:a16="http://schemas.microsoft.com/office/drawing/2014/main" id="{B861FAA2-CBFE-BD14-A703-850ADF859146}"/>
+                <a16:creationId xmlns:a16="http://schemas.microsoft.com/office/drawing/2014/main" id="{C97A5704-3FA6-D698-BA6D-5526DE85CC42}"/>
               </a:ext>
             </a:extLst>
           </p:cNvPr>
@@ -7592,7 +7592,7 @@
           <p:cNvPr id="6" name="Прямоугольник 5">
             <a:extLst>
               <a:ext uri="{FF2B5EF4-FFF2-40B4-BE49-F238E27FC236}">
-                <a16:creationId xmlns:a16="http://schemas.microsoft.com/office/drawing/2014/main" id="{276C1427-D4FA-EBA6-D372-D5B536BE52C6}"/>
+                <a16:creationId xmlns:a16="http://schemas.microsoft.com/office/drawing/2014/main" id="{AA1602F4-D7C3-1BA3-4E56-88DD29296DA5}"/>
               </a:ext>
             </a:extLst>
           </p:cNvPr>
@@ -7660,7 +7660,7 @@
           <p:cNvPr id="7" name="Прямоугольник 6">
             <a:extLst>
               <a:ext uri="{FF2B5EF4-FFF2-40B4-BE49-F238E27FC236}">
-                <a16:creationId xmlns:a16="http://schemas.microsoft.com/office/drawing/2014/main" id="{6DBCF616-B0ED-BF56-E00C-80E31C222653}"/>
+                <a16:creationId xmlns:a16="http://schemas.microsoft.com/office/drawing/2014/main" id="{9CDAF81F-1B0A-727C-A187-CD74D8CD9620}"/>
               </a:ext>
             </a:extLst>
           </p:cNvPr>
@@ -7728,7 +7728,7 @@
           <p:cNvPr id="8" name="Прямоугольник 7">
             <a:extLst>
               <a:ext uri="{FF2B5EF4-FFF2-40B4-BE49-F238E27FC236}">
-                <a16:creationId xmlns:a16="http://schemas.microsoft.com/office/drawing/2014/main" id="{7859A928-79E2-CEDA-050C-309F16AB6501}"/>
+                <a16:creationId xmlns:a16="http://schemas.microsoft.com/office/drawing/2014/main" id="{3933A7DE-F647-0D57-56F8-862C12590C80}"/>
               </a:ext>
             </a:extLst>
           </p:cNvPr>
@@ -7796,7 +7796,7 @@
           <p:cNvPr id="9" name="TextBox 8">
             <a:extLst>
               <a:ext uri="{FF2B5EF4-FFF2-40B4-BE49-F238E27FC236}">
-                <a16:creationId xmlns:a16="http://schemas.microsoft.com/office/drawing/2014/main" id="{C3854BE8-F53F-EC48-3427-8C92CD34EE6B}"/>
+                <a16:creationId xmlns:a16="http://schemas.microsoft.com/office/drawing/2014/main" id="{3B422EF2-11D2-C2ED-42D3-63D102471A1B}"/>
               </a:ext>
             </a:extLst>
           </p:cNvPr>
@@ -7842,7 +7842,7 @@
           <p:cNvPr id="10" name="TextBox 9">
             <a:extLst>
               <a:ext uri="{FF2B5EF4-FFF2-40B4-BE49-F238E27FC236}">
-                <a16:creationId xmlns:a16="http://schemas.microsoft.com/office/drawing/2014/main" id="{B3A3A77A-CA7D-1A49-72BF-87CF3D9291A1}"/>
+                <a16:creationId xmlns:a16="http://schemas.microsoft.com/office/drawing/2014/main" id="{15D89F36-7FB1-33A5-5AA6-0E667C04BF2E}"/>
               </a:ext>
             </a:extLst>
           </p:cNvPr>
@@ -7882,7 +7882,7 @@
           <p:cNvPr id="11" name="Прямоугольник 10">
             <a:extLst>
               <a:ext uri="{FF2B5EF4-FFF2-40B4-BE49-F238E27FC236}">
-                <a16:creationId xmlns:a16="http://schemas.microsoft.com/office/drawing/2014/main" id="{4A7DFDF1-4EEC-4A56-9CCA-5007FD1BB129}"/>
+                <a16:creationId xmlns:a16="http://schemas.microsoft.com/office/drawing/2014/main" id="{C0BD2147-38B1-A19C-3EF9-00F8A3074E32}"/>
               </a:ext>
             </a:extLst>
           </p:cNvPr>
@@ -7950,7 +7950,7 @@
           <p:cNvPr id="12" name="Прямоугольник 11">
             <a:extLst>
               <a:ext uri="{FF2B5EF4-FFF2-40B4-BE49-F238E27FC236}">
-                <a16:creationId xmlns:a16="http://schemas.microsoft.com/office/drawing/2014/main" id="{F3929414-E7AC-9F72-A788-F978B4C1CA6D}"/>
+                <a16:creationId xmlns:a16="http://schemas.microsoft.com/office/drawing/2014/main" id="{22A4E6FC-4A2B-CCED-D18C-357D53D8B4EB}"/>
               </a:ext>
             </a:extLst>
           </p:cNvPr>
@@ -8018,7 +8018,7 @@
           <p:cNvPr id="13" name="TextBox 12">
             <a:extLst>
               <a:ext uri="{FF2B5EF4-FFF2-40B4-BE49-F238E27FC236}">
-                <a16:creationId xmlns:a16="http://schemas.microsoft.com/office/drawing/2014/main" id="{88FF5D7B-5A28-959E-5504-48973260D89C}"/>
+                <a16:creationId xmlns:a16="http://schemas.microsoft.com/office/drawing/2014/main" id="{30E448DE-EB83-4D6B-F3CE-25B9E78369B0}"/>
               </a:ext>
             </a:extLst>
           </p:cNvPr>
@@ -8064,7 +8064,7 @@
           <p:cNvPr id="14" name="TextBox 13">
             <a:extLst>
               <a:ext uri="{FF2B5EF4-FFF2-40B4-BE49-F238E27FC236}">
-                <a16:creationId xmlns:a16="http://schemas.microsoft.com/office/drawing/2014/main" id="{C6BE39A3-B44F-2212-7566-2FBDD25AD764}"/>
+                <a16:creationId xmlns:a16="http://schemas.microsoft.com/office/drawing/2014/main" id="{12F2E7C6-5C9A-3103-6010-E4C9FC1A33C6}"/>
               </a:ext>
             </a:extLst>
           </p:cNvPr>
@@ -8104,7 +8104,7 @@
           <p:cNvPr id="15" name="Прямоугольник 14">
             <a:extLst>
               <a:ext uri="{FF2B5EF4-FFF2-40B4-BE49-F238E27FC236}">
-                <a16:creationId xmlns:a16="http://schemas.microsoft.com/office/drawing/2014/main" id="{BAFC55E1-8A79-A098-7A66-E176613A55ED}"/>
+                <a16:creationId xmlns:a16="http://schemas.microsoft.com/office/drawing/2014/main" id="{30CCEE65-F341-0343-1E38-6D2D18947249}"/>
               </a:ext>
             </a:extLst>
           </p:cNvPr>
@@ -8172,7 +8172,7 @@
           <p:cNvPr id="16" name="Прямоугольник 15">
             <a:extLst>
               <a:ext uri="{FF2B5EF4-FFF2-40B4-BE49-F238E27FC236}">
-                <a16:creationId xmlns:a16="http://schemas.microsoft.com/office/drawing/2014/main" id="{588C854E-6AD4-5813-267D-4AB7F4C6DDD2}"/>
+                <a16:creationId xmlns:a16="http://schemas.microsoft.com/office/drawing/2014/main" id="{50C8CDA4-4D1A-2354-BAE3-99479F4BA77D}"/>
               </a:ext>
             </a:extLst>
           </p:cNvPr>
@@ -8240,7 +8240,7 @@
           <p:cNvPr id="17" name="TextBox 16">
             <a:extLst>
               <a:ext uri="{FF2B5EF4-FFF2-40B4-BE49-F238E27FC236}">
-                <a16:creationId xmlns:a16="http://schemas.microsoft.com/office/drawing/2014/main" id="{FB4767BF-9AD5-CD8F-02FA-F2774D0B8517}"/>
+                <a16:creationId xmlns:a16="http://schemas.microsoft.com/office/drawing/2014/main" id="{4599B9D5-9354-5920-A78B-E3623ADC8F07}"/>
               </a:ext>
             </a:extLst>
           </p:cNvPr>
@@ -8286,7 +8286,7 @@
           <p:cNvPr id="18" name="TextBox 17">
             <a:extLst>
               <a:ext uri="{FF2B5EF4-FFF2-40B4-BE49-F238E27FC236}">
-                <a16:creationId xmlns:a16="http://schemas.microsoft.com/office/drawing/2014/main" id="{68BEFFCA-9747-B610-765B-912CB77D40CA}"/>
+                <a16:creationId xmlns:a16="http://schemas.microsoft.com/office/drawing/2014/main" id="{46273E46-7640-F4BD-7182-877CB36F43C9}"/>
               </a:ext>
             </a:extLst>
           </p:cNvPr>
@@ -8326,7 +8326,7 @@
           <p:cNvPr id="19" name="Прямоугольник 18">
             <a:extLst>
               <a:ext uri="{FF2B5EF4-FFF2-40B4-BE49-F238E27FC236}">
-                <a16:creationId xmlns:a16="http://schemas.microsoft.com/office/drawing/2014/main" id="{8FEF1AF6-C01E-C5F3-6316-AC31391EC2F5}"/>
+                <a16:creationId xmlns:a16="http://schemas.microsoft.com/office/drawing/2014/main" id="{06091DEA-22AF-2CE8-996C-FC53E669F0CA}"/>
               </a:ext>
             </a:extLst>
           </p:cNvPr>
@@ -8394,7 +8394,7 @@
           <p:cNvPr id="20" name="Прямоугольник 19">
             <a:extLst>
               <a:ext uri="{FF2B5EF4-FFF2-40B4-BE49-F238E27FC236}">
-                <a16:creationId xmlns:a16="http://schemas.microsoft.com/office/drawing/2014/main" id="{D3E535C2-610B-444F-D9E5-E2723BC15E4D}"/>
+                <a16:creationId xmlns:a16="http://schemas.microsoft.com/office/drawing/2014/main" id="{2E3B34AF-5619-31B1-2686-099D93007A55}"/>
               </a:ext>
             </a:extLst>
           </p:cNvPr>
@@ -8462,7 +8462,7 @@
           <p:cNvPr id="21" name="TextBox 20">
             <a:extLst>
               <a:ext uri="{FF2B5EF4-FFF2-40B4-BE49-F238E27FC236}">
-                <a16:creationId xmlns:a16="http://schemas.microsoft.com/office/drawing/2014/main" id="{86E0F5D8-CB79-A6B1-D7EB-D05C3E2A54D0}"/>
+                <a16:creationId xmlns:a16="http://schemas.microsoft.com/office/drawing/2014/main" id="{D6817CBC-2EE2-7B22-6AC6-97A148D87CE8}"/>
               </a:ext>
             </a:extLst>
           </p:cNvPr>
@@ -8508,7 +8508,7 @@
           <p:cNvPr id="22" name="TextBox 21">
             <a:extLst>
               <a:ext uri="{FF2B5EF4-FFF2-40B4-BE49-F238E27FC236}">
-                <a16:creationId xmlns:a16="http://schemas.microsoft.com/office/drawing/2014/main" id="{455DBB10-38F1-2223-BA62-575BFCE4D869}"/>
+                <a16:creationId xmlns:a16="http://schemas.microsoft.com/office/drawing/2014/main" id="{97C333A5-9278-43BF-414E-B2F61B25F833}"/>
               </a:ext>
             </a:extLst>
           </p:cNvPr>
@@ -8548,7 +8548,7 @@
           <p:cNvPr id="23" name="Прямоугольник 22">
             <a:extLst>
               <a:ext uri="{FF2B5EF4-FFF2-40B4-BE49-F238E27FC236}">
-                <a16:creationId xmlns:a16="http://schemas.microsoft.com/office/drawing/2014/main" id="{CD924D0F-378F-25CA-9A33-8011781E6A15}"/>
+                <a16:creationId xmlns:a16="http://schemas.microsoft.com/office/drawing/2014/main" id="{F136FB5C-B4D6-D58D-C99D-44BC23E1CF53}"/>
               </a:ext>
             </a:extLst>
           </p:cNvPr>
@@ -8616,7 +8616,7 @@
           <p:cNvPr id="24" name="Прямоугольник 23">
             <a:extLst>
               <a:ext uri="{FF2B5EF4-FFF2-40B4-BE49-F238E27FC236}">
-                <a16:creationId xmlns:a16="http://schemas.microsoft.com/office/drawing/2014/main" id="{8894C5CD-64AC-9ECF-44C5-7FE7E88A825B}"/>
+                <a16:creationId xmlns:a16="http://schemas.microsoft.com/office/drawing/2014/main" id="{9179FE5F-76DB-3402-9777-9B5EFEB4664B}"/>
               </a:ext>
             </a:extLst>
           </p:cNvPr>
@@ -8684,7 +8684,7 @@
           <p:cNvPr id="25" name="TextBox 24">
             <a:extLst>
               <a:ext uri="{FF2B5EF4-FFF2-40B4-BE49-F238E27FC236}">
-                <a16:creationId xmlns:a16="http://schemas.microsoft.com/office/drawing/2014/main" id="{D560B954-F4D7-C245-342E-4719C58D76B2}"/>
+                <a16:creationId xmlns:a16="http://schemas.microsoft.com/office/drawing/2014/main" id="{C6E2DF7C-2533-60D5-E4CE-ACBB13A87C23}"/>
               </a:ext>
             </a:extLst>
           </p:cNvPr>
@@ -8730,7 +8730,7 @@
           <p:cNvPr id="26" name="TextBox 25">
             <a:extLst>
               <a:ext uri="{FF2B5EF4-FFF2-40B4-BE49-F238E27FC236}">
-                <a16:creationId xmlns:a16="http://schemas.microsoft.com/office/drawing/2014/main" id="{A2CA4D83-97D1-0323-E818-73EE87266BE4}"/>
+                <a16:creationId xmlns:a16="http://schemas.microsoft.com/office/drawing/2014/main" id="{976C0D38-DBA9-DD04-3CE2-9B427339F749}"/>
               </a:ext>
             </a:extLst>
           </p:cNvPr>
@@ -8770,7 +8770,7 @@
           <p:cNvPr id="27" name="Прямоугольник 26">
             <a:extLst>
               <a:ext uri="{FF2B5EF4-FFF2-40B4-BE49-F238E27FC236}">
-                <a16:creationId xmlns:a16="http://schemas.microsoft.com/office/drawing/2014/main" id="{33146872-3693-0BDC-3ADE-8B8832CAEE9B}"/>
+                <a16:creationId xmlns:a16="http://schemas.microsoft.com/office/drawing/2014/main" id="{6F23FB98-86B0-51F6-D9EA-CBFD22E81A67}"/>
               </a:ext>
             </a:extLst>
           </p:cNvPr>
@@ -8838,7 +8838,7 @@
           <p:cNvPr id="28" name="Прямоугольник 27">
             <a:extLst>
               <a:ext uri="{FF2B5EF4-FFF2-40B4-BE49-F238E27FC236}">
-                <a16:creationId xmlns:a16="http://schemas.microsoft.com/office/drawing/2014/main" id="{C6B173DC-A782-056D-1477-02EC8786F7FD}"/>
+                <a16:creationId xmlns:a16="http://schemas.microsoft.com/office/drawing/2014/main" id="{462AB3BF-19CF-DE17-C3E9-B0C09D3FBB22}"/>
               </a:ext>
             </a:extLst>
           </p:cNvPr>
@@ -8906,7 +8906,7 @@
           <p:cNvPr id="29" name="TextBox 28">
             <a:extLst>
               <a:ext uri="{FF2B5EF4-FFF2-40B4-BE49-F238E27FC236}">
-                <a16:creationId xmlns:a16="http://schemas.microsoft.com/office/drawing/2014/main" id="{65638315-31B0-39D3-3DE1-5A25B2D910D0}"/>
+                <a16:creationId xmlns:a16="http://schemas.microsoft.com/office/drawing/2014/main" id="{DE685AB7-FA25-C1DC-B915-782F9FA717BB}"/>
               </a:ext>
             </a:extLst>
           </p:cNvPr>
@@ -8952,7 +8952,7 @@
           <p:cNvPr id="30" name="TextBox 29">
             <a:extLst>
               <a:ext uri="{FF2B5EF4-FFF2-40B4-BE49-F238E27FC236}">
-                <a16:creationId xmlns:a16="http://schemas.microsoft.com/office/drawing/2014/main" id="{EA0782F3-9B21-8A83-E058-EFE3B44BBB92}"/>
+                <a16:creationId xmlns:a16="http://schemas.microsoft.com/office/drawing/2014/main" id="{254E0CB8-C6E6-AC37-5DD6-93C255AC068C}"/>
               </a:ext>
             </a:extLst>
           </p:cNvPr>
@@ -8992,7 +8992,7 @@
           <p:cNvPr id="31" name="TextBox 30">
             <a:extLst>
               <a:ext uri="{FF2B5EF4-FFF2-40B4-BE49-F238E27FC236}">
-                <a16:creationId xmlns:a16="http://schemas.microsoft.com/office/drawing/2014/main" id="{D4A9CF8D-0B9E-EDB7-77E8-04BE8F6A069B}"/>
+                <a16:creationId xmlns:a16="http://schemas.microsoft.com/office/drawing/2014/main" id="{E46785B5-1DD2-6AD2-ECC7-84471B4BA5EE}"/>
               </a:ext>
             </a:extLst>
           </p:cNvPr>
@@ -9030,7 +9030,7 @@
     </p:spTree>
     <p:extLst>
       <p:ext uri="{BB962C8B-B14F-4D97-AF65-F5344CB8AC3E}">
-        <p14:creationId xmlns:p14="http://schemas.microsoft.com/office/powerpoint/2010/main" val="4195680498"/>
+        <p14:creationId xmlns:p14="http://schemas.microsoft.com/office/powerpoint/2010/main" val="2812003311"/>
       </p:ext>
     </p:extLst>
   </p:cSld>
@@ -9062,7 +9062,7 @@
           <p:cNvPr id="2" name="Прямоугольник 1">
             <a:extLst>
               <a:ext uri="{FF2B5EF4-FFF2-40B4-BE49-F238E27FC236}">
-                <a16:creationId xmlns:a16="http://schemas.microsoft.com/office/drawing/2014/main" id="{E444FA2B-B923-8064-1B1A-CD74608EB8E1}"/>
+                <a16:creationId xmlns:a16="http://schemas.microsoft.com/office/drawing/2014/main" id="{9EDA7084-ECED-EC2A-120A-2F15C5DD3034}"/>
               </a:ext>
             </a:extLst>
           </p:cNvPr>
@@ -9130,7 +9130,7 @@
           <p:cNvPr id="3" name="Прямоугольник 2">
             <a:extLst>
               <a:ext uri="{FF2B5EF4-FFF2-40B4-BE49-F238E27FC236}">
-                <a16:creationId xmlns:a16="http://schemas.microsoft.com/office/drawing/2014/main" id="{4E7A3E1F-70D5-2BD1-AB0A-6065ED2510C1}"/>
+                <a16:creationId xmlns:a16="http://schemas.microsoft.com/office/drawing/2014/main" id="{A69D049A-2107-D007-708C-F723E50FC712}"/>
               </a:ext>
             </a:extLst>
           </p:cNvPr>
@@ -9198,7 +9198,7 @@
           <p:cNvPr id="4" name="TextBox 3">
             <a:extLst>
               <a:ext uri="{FF2B5EF4-FFF2-40B4-BE49-F238E27FC236}">
-                <a16:creationId xmlns:a16="http://schemas.microsoft.com/office/drawing/2014/main" id="{9B81033A-1AAC-3AF7-8F6B-C4605426117E}"/>
+                <a16:creationId xmlns:a16="http://schemas.microsoft.com/office/drawing/2014/main" id="{44351F1A-3026-3AC5-00E2-9CF251B8CE6B}"/>
               </a:ext>
             </a:extLst>
           </p:cNvPr>
@@ -9238,7 +9238,7 @@
           <p:cNvPr id="5" name="TextBox 4">
             <a:extLst>
               <a:ext uri="{FF2B5EF4-FFF2-40B4-BE49-F238E27FC236}">
-                <a16:creationId xmlns:a16="http://schemas.microsoft.com/office/drawing/2014/main" id="{CD0645F0-4469-6D16-660A-7FFDCD570996}"/>
+                <a16:creationId xmlns:a16="http://schemas.microsoft.com/office/drawing/2014/main" id="{0DA97331-38F4-778A-F4AE-4FA2141A321D}"/>
               </a:ext>
             </a:extLst>
           </p:cNvPr>
@@ -9279,7 +9279,7 @@
           <p:cNvPr id="6" name="Прямоугольник 5">
             <a:extLst>
               <a:ext uri="{FF2B5EF4-FFF2-40B4-BE49-F238E27FC236}">
-                <a16:creationId xmlns:a16="http://schemas.microsoft.com/office/drawing/2014/main" id="{DD19820A-926D-01F2-35D2-8DF9D468A4F3}"/>
+                <a16:creationId xmlns:a16="http://schemas.microsoft.com/office/drawing/2014/main" id="{8840AD22-F6D5-732C-07E4-09D74245F563}"/>
               </a:ext>
             </a:extLst>
           </p:cNvPr>
@@ -9347,7 +9347,7 @@
           <p:cNvPr id="8" name="Рисунок 7">
             <a:extLst>
               <a:ext uri="{FF2B5EF4-FFF2-40B4-BE49-F238E27FC236}">
-                <a16:creationId xmlns:a16="http://schemas.microsoft.com/office/drawing/2014/main" id="{F69C1A4E-6AEF-5EB2-3E48-C522DD5A76C0}"/>
+                <a16:creationId xmlns:a16="http://schemas.microsoft.com/office/drawing/2014/main" id="{BAFBC954-7BF9-6030-0FC3-10584E7D7968}"/>
               </a:ext>
             </a:extLst>
           </p:cNvPr>
@@ -9383,7 +9383,7 @@
           <p:cNvPr id="10" name="Рисунок 9">
             <a:extLst>
               <a:ext uri="{FF2B5EF4-FFF2-40B4-BE49-F238E27FC236}">
-                <a16:creationId xmlns:a16="http://schemas.microsoft.com/office/drawing/2014/main" id="{C9B5F76C-5ACF-A6BE-CA3C-3B6EC5D7493E}"/>
+                <a16:creationId xmlns:a16="http://schemas.microsoft.com/office/drawing/2014/main" id="{BBECDA45-11DE-8F19-D7EC-F6DFD5F3E5CE}"/>
               </a:ext>
             </a:extLst>
           </p:cNvPr>
@@ -9419,7 +9419,7 @@
           <p:cNvPr id="12" name="Рисунок 11">
             <a:extLst>
               <a:ext uri="{FF2B5EF4-FFF2-40B4-BE49-F238E27FC236}">
-                <a16:creationId xmlns:a16="http://schemas.microsoft.com/office/drawing/2014/main" id="{6C5989A7-06D9-1F9E-6024-7CB9739DE64C}"/>
+                <a16:creationId xmlns:a16="http://schemas.microsoft.com/office/drawing/2014/main" id="{509B4F14-2991-B3F8-7D0B-1E19C7989AC2}"/>
               </a:ext>
             </a:extLst>
           </p:cNvPr>
@@ -9455,7 +9455,7 @@
           <p:cNvPr id="13" name="TextBox 12">
             <a:extLst>
               <a:ext uri="{FF2B5EF4-FFF2-40B4-BE49-F238E27FC236}">
-                <a16:creationId xmlns:a16="http://schemas.microsoft.com/office/drawing/2014/main" id="{DBD38C23-83AB-3B4C-1F1D-35C523D12AE1}"/>
+                <a16:creationId xmlns:a16="http://schemas.microsoft.com/office/drawing/2014/main" id="{67233F64-3314-E4D0-F21E-686F3AFF3499}"/>
               </a:ext>
             </a:extLst>
           </p:cNvPr>
@@ -9574,7 +9574,7 @@
     </p:spTree>
     <p:extLst>
       <p:ext uri="{BB962C8B-B14F-4D97-AF65-F5344CB8AC3E}">
-        <p14:creationId xmlns:p14="http://schemas.microsoft.com/office/powerpoint/2010/main" val="4147453297"/>
+        <p14:creationId xmlns:p14="http://schemas.microsoft.com/office/powerpoint/2010/main" val="1836014233"/>
       </p:ext>
     </p:extLst>
   </p:cSld>
@@ -9606,7 +9606,7 @@
           <p:cNvPr id="2" name="Прямоугольник 1">
             <a:extLst>
               <a:ext uri="{FF2B5EF4-FFF2-40B4-BE49-F238E27FC236}">
-                <a16:creationId xmlns:a16="http://schemas.microsoft.com/office/drawing/2014/main" id="{F6BE5FB4-E801-F8EA-2CE6-03D6E6DC1DCD}"/>
+                <a16:creationId xmlns:a16="http://schemas.microsoft.com/office/drawing/2014/main" id="{7CACACDF-2687-5D34-64CD-FB7F8473F2C5}"/>
               </a:ext>
             </a:extLst>
           </p:cNvPr>
@@ -9674,7 +9674,7 @@
           <p:cNvPr id="3" name="Прямоугольник 2">
             <a:extLst>
               <a:ext uri="{FF2B5EF4-FFF2-40B4-BE49-F238E27FC236}">
-                <a16:creationId xmlns:a16="http://schemas.microsoft.com/office/drawing/2014/main" id="{86122630-2942-DA12-28E7-386A8AB41FC5}"/>
+                <a16:creationId xmlns:a16="http://schemas.microsoft.com/office/drawing/2014/main" id="{E49489D0-D4F2-1CA0-0209-AB519C3E3FFB}"/>
               </a:ext>
             </a:extLst>
           </p:cNvPr>
@@ -9742,7 +9742,7 @@
           <p:cNvPr id="4" name="TextBox 3">
             <a:extLst>
               <a:ext uri="{FF2B5EF4-FFF2-40B4-BE49-F238E27FC236}">
-                <a16:creationId xmlns:a16="http://schemas.microsoft.com/office/drawing/2014/main" id="{C8113A6B-8B3E-25E0-FFC3-11E68DC33053}"/>
+                <a16:creationId xmlns:a16="http://schemas.microsoft.com/office/drawing/2014/main" id="{9C4A6E12-CACC-6E60-D8E0-751839EE81A8}"/>
               </a:ext>
             </a:extLst>
           </p:cNvPr>
@@ -9782,7 +9782,7 @@
           <p:cNvPr id="5" name="Прямоугольник 4">
             <a:extLst>
               <a:ext uri="{FF2B5EF4-FFF2-40B4-BE49-F238E27FC236}">
-                <a16:creationId xmlns:a16="http://schemas.microsoft.com/office/drawing/2014/main" id="{6B35A9E2-DF2E-97B9-DEC4-7ABF7DB14274}"/>
+                <a16:creationId xmlns:a16="http://schemas.microsoft.com/office/drawing/2014/main" id="{64D3162E-81AE-5E2A-3B1F-D729576E003D}"/>
               </a:ext>
             </a:extLst>
           </p:cNvPr>
@@ -9850,7 +9850,7 @@
           <p:cNvPr id="6" name="TextBox 5">
             <a:extLst>
               <a:ext uri="{FF2B5EF4-FFF2-40B4-BE49-F238E27FC236}">
-                <a16:creationId xmlns:a16="http://schemas.microsoft.com/office/drawing/2014/main" id="{826E5247-6872-9B27-1158-C2C44D905039}"/>
+                <a16:creationId xmlns:a16="http://schemas.microsoft.com/office/drawing/2014/main" id="{6268F73D-644F-57A7-B403-70D77DD68FDE}"/>
               </a:ext>
             </a:extLst>
           </p:cNvPr>
@@ -9890,7 +9890,7 @@
           <p:cNvPr id="7" name="TextBox 6">
             <a:extLst>
               <a:ext uri="{FF2B5EF4-FFF2-40B4-BE49-F238E27FC236}">
-                <a16:creationId xmlns:a16="http://schemas.microsoft.com/office/drawing/2014/main" id="{555D625B-9006-DF91-5ECD-1C85E933325E}"/>
+                <a16:creationId xmlns:a16="http://schemas.microsoft.com/office/drawing/2014/main" id="{6C050BB3-E64F-A41A-3278-5F65251B782B}"/>
               </a:ext>
             </a:extLst>
           </p:cNvPr>
@@ -9930,7 +9930,7 @@
           <p:cNvPr id="8" name="TextBox 7">
             <a:extLst>
               <a:ext uri="{FF2B5EF4-FFF2-40B4-BE49-F238E27FC236}">
-                <a16:creationId xmlns:a16="http://schemas.microsoft.com/office/drawing/2014/main" id="{CD692202-B522-978A-1C6C-8FB42EC87FB5}"/>
+                <a16:creationId xmlns:a16="http://schemas.microsoft.com/office/drawing/2014/main" id="{230C4E1F-2E73-26FD-AA83-E72C0AE0D3DB}"/>
               </a:ext>
             </a:extLst>
           </p:cNvPr>
@@ -9970,7 +9970,7 @@
           <p:cNvPr id="9" name="TextBox 8">
             <a:extLst>
               <a:ext uri="{FF2B5EF4-FFF2-40B4-BE49-F238E27FC236}">
-                <a16:creationId xmlns:a16="http://schemas.microsoft.com/office/drawing/2014/main" id="{5C9D8D12-BE7E-9CA4-4702-DF2B8B6A7BDB}"/>
+                <a16:creationId xmlns:a16="http://schemas.microsoft.com/office/drawing/2014/main" id="{6D23EE30-105F-C390-888C-4E61CF0B86E6}"/>
               </a:ext>
             </a:extLst>
           </p:cNvPr>
@@ -10008,7 +10008,7 @@
     </p:spTree>
     <p:extLst>
       <p:ext uri="{BB962C8B-B14F-4D97-AF65-F5344CB8AC3E}">
-        <p14:creationId xmlns:p14="http://schemas.microsoft.com/office/powerpoint/2010/main" val="1795533461"/>
+        <p14:creationId xmlns:p14="http://schemas.microsoft.com/office/powerpoint/2010/main" val="290524059"/>
       </p:ext>
     </p:extLst>
   </p:cSld>

--- a/Презентация к защите.pptx
+++ b/Презентация к защите.pptx
@@ -137,7 +137,7 @@
           <p:cNvPr id="2" name="Заголовок 1">
             <a:extLst>
               <a:ext uri="{FF2B5EF4-FFF2-40B4-BE49-F238E27FC236}">
-                <a16:creationId xmlns:a16="http://schemas.microsoft.com/office/drawing/2014/main" id="{4B2486AD-BD7A-81DE-D8D4-D234F2A4C735}"/>
+                <a16:creationId xmlns:a16="http://schemas.microsoft.com/office/drawing/2014/main" id="{5920AD67-BF38-7F47-E353-EF888F5A052C}"/>
               </a:ext>
             </a:extLst>
           </p:cNvPr>
@@ -174,7 +174,7 @@
           <p:cNvPr id="3" name="Подзаголовок 2">
             <a:extLst>
               <a:ext uri="{FF2B5EF4-FFF2-40B4-BE49-F238E27FC236}">
-                <a16:creationId xmlns:a16="http://schemas.microsoft.com/office/drawing/2014/main" id="{54148D8C-D25E-E387-A409-93096D513968}"/>
+                <a16:creationId xmlns:a16="http://schemas.microsoft.com/office/drawing/2014/main" id="{9451F0A8-B689-1307-3BE3-74C8E22BDA74}"/>
               </a:ext>
             </a:extLst>
           </p:cNvPr>
@@ -244,7 +244,7 @@
           <p:cNvPr id="4" name="Дата 3">
             <a:extLst>
               <a:ext uri="{FF2B5EF4-FFF2-40B4-BE49-F238E27FC236}">
-                <a16:creationId xmlns:a16="http://schemas.microsoft.com/office/drawing/2014/main" id="{5809E470-1D13-61BE-4E58-BEFE8ADCCE41}"/>
+                <a16:creationId xmlns:a16="http://schemas.microsoft.com/office/drawing/2014/main" id="{DC47D0E3-7952-D87B-76A4-AB6818FBD2E7}"/>
               </a:ext>
             </a:extLst>
           </p:cNvPr>
@@ -260,7 +260,7 @@
           <a:bodyPr/>
           <a:lstStyle/>
           <a:p>
-            <a:fld id="{3DF2BDC6-13AE-4F9F-BB14-CB3866DECA51}" type="datetimeFigureOut">
+            <a:fld id="{E59C474A-60D2-4158-8EE8-007BD26A9F4C}" type="datetimeFigureOut">
               <a:rPr lang="ru-RU" smtClean="0"/>
               <a:t>27.10.2026</a:t>
             </a:fld>
@@ -273,7 +273,7 @@
           <p:cNvPr id="5" name="Нижний колонтитул 4">
             <a:extLst>
               <a:ext uri="{FF2B5EF4-FFF2-40B4-BE49-F238E27FC236}">
-                <a16:creationId xmlns:a16="http://schemas.microsoft.com/office/drawing/2014/main" id="{707F0AD8-194E-1F03-DFE0-3C43B453E98E}"/>
+                <a16:creationId xmlns:a16="http://schemas.microsoft.com/office/drawing/2014/main" id="{CA8DFD42-BF88-97FD-7B1E-8F8317908C2D}"/>
               </a:ext>
             </a:extLst>
           </p:cNvPr>
@@ -298,7 +298,7 @@
           <p:cNvPr id="6" name="Номер слайда 5">
             <a:extLst>
               <a:ext uri="{FF2B5EF4-FFF2-40B4-BE49-F238E27FC236}">
-                <a16:creationId xmlns:a16="http://schemas.microsoft.com/office/drawing/2014/main" id="{BC0DA99A-F0DB-AFEE-9A8F-3D247833932D}"/>
+                <a16:creationId xmlns:a16="http://schemas.microsoft.com/office/drawing/2014/main" id="{2D669996-5B34-297E-EB2C-112316B67D4A}"/>
               </a:ext>
             </a:extLst>
           </p:cNvPr>
@@ -314,7 +314,7 @@
           <a:bodyPr/>
           <a:lstStyle/>
           <a:p>
-            <a:fld id="{FCF6D127-6394-4B2C-B510-ECF110AB5AEF}" type="slidenum">
+            <a:fld id="{C46792AE-14C6-4C82-A727-B7D982901612}" type="slidenum">
               <a:rPr lang="ru-RU" smtClean="0"/>
               <a:t>‹#›</a:t>
             </a:fld>
@@ -325,7 +325,7 @@
     </p:spTree>
     <p:extLst>
       <p:ext uri="{BB962C8B-B14F-4D97-AF65-F5344CB8AC3E}">
-        <p14:creationId xmlns:p14="http://schemas.microsoft.com/office/powerpoint/2010/main" val="680250413"/>
+        <p14:creationId xmlns:p14="http://schemas.microsoft.com/office/powerpoint/2010/main" val="970248458"/>
       </p:ext>
     </p:extLst>
   </p:cSld>
@@ -357,7 +357,7 @@
           <p:cNvPr id="2" name="Заголовок 1">
             <a:extLst>
               <a:ext uri="{FF2B5EF4-FFF2-40B4-BE49-F238E27FC236}">
-                <a16:creationId xmlns:a16="http://schemas.microsoft.com/office/drawing/2014/main" id="{D93BB83C-227C-C26F-C048-BBB20DCCC570}"/>
+                <a16:creationId xmlns:a16="http://schemas.microsoft.com/office/drawing/2014/main" id="{5F6A029E-FD69-BD9B-566E-19ED9D15B8A7}"/>
               </a:ext>
             </a:extLst>
           </p:cNvPr>
@@ -385,7 +385,7 @@
           <p:cNvPr id="3" name="Вертикальный текст 2">
             <a:extLst>
               <a:ext uri="{FF2B5EF4-FFF2-40B4-BE49-F238E27FC236}">
-                <a16:creationId xmlns:a16="http://schemas.microsoft.com/office/drawing/2014/main" id="{62473715-5FB4-914C-552B-71D036209F15}"/>
+                <a16:creationId xmlns:a16="http://schemas.microsoft.com/office/drawing/2014/main" id="{46D02DD6-707A-0017-8E27-B5B24CC5426F}"/>
               </a:ext>
             </a:extLst>
           </p:cNvPr>
@@ -442,7 +442,7 @@
           <p:cNvPr id="4" name="Дата 3">
             <a:extLst>
               <a:ext uri="{FF2B5EF4-FFF2-40B4-BE49-F238E27FC236}">
-                <a16:creationId xmlns:a16="http://schemas.microsoft.com/office/drawing/2014/main" id="{781A9F3C-160A-2827-C822-2E832659E186}"/>
+                <a16:creationId xmlns:a16="http://schemas.microsoft.com/office/drawing/2014/main" id="{71E01C95-A795-A4CD-7AB4-DBE78076A372}"/>
               </a:ext>
             </a:extLst>
           </p:cNvPr>
@@ -458,7 +458,7 @@
           <a:bodyPr/>
           <a:lstStyle/>
           <a:p>
-            <a:fld id="{3DF2BDC6-13AE-4F9F-BB14-CB3866DECA51}" type="datetimeFigureOut">
+            <a:fld id="{E59C474A-60D2-4158-8EE8-007BD26A9F4C}" type="datetimeFigureOut">
               <a:rPr lang="ru-RU" smtClean="0"/>
               <a:t>27.10.2026</a:t>
             </a:fld>
@@ -471,7 +471,7 @@
           <p:cNvPr id="5" name="Нижний колонтитул 4">
             <a:extLst>
               <a:ext uri="{FF2B5EF4-FFF2-40B4-BE49-F238E27FC236}">
-                <a16:creationId xmlns:a16="http://schemas.microsoft.com/office/drawing/2014/main" id="{13ED2348-484A-8D5D-9D12-99E5754BF910}"/>
+                <a16:creationId xmlns:a16="http://schemas.microsoft.com/office/drawing/2014/main" id="{03D5D4A6-3D1F-AD4F-B094-E029110A47DF}"/>
               </a:ext>
             </a:extLst>
           </p:cNvPr>
@@ -496,7 +496,7 @@
           <p:cNvPr id="6" name="Номер слайда 5">
             <a:extLst>
               <a:ext uri="{FF2B5EF4-FFF2-40B4-BE49-F238E27FC236}">
-                <a16:creationId xmlns:a16="http://schemas.microsoft.com/office/drawing/2014/main" id="{F23822CF-D88E-E1DE-FA3F-80AF051E9FD6}"/>
+                <a16:creationId xmlns:a16="http://schemas.microsoft.com/office/drawing/2014/main" id="{191FD719-A79E-BED4-7A6E-D37516D227AD}"/>
               </a:ext>
             </a:extLst>
           </p:cNvPr>
@@ -512,7 +512,7 @@
           <a:bodyPr/>
           <a:lstStyle/>
           <a:p>
-            <a:fld id="{FCF6D127-6394-4B2C-B510-ECF110AB5AEF}" type="slidenum">
+            <a:fld id="{C46792AE-14C6-4C82-A727-B7D982901612}" type="slidenum">
               <a:rPr lang="ru-RU" smtClean="0"/>
               <a:t>‹#›</a:t>
             </a:fld>
@@ -523,7 +523,7 @@
     </p:spTree>
     <p:extLst>
       <p:ext uri="{BB962C8B-B14F-4D97-AF65-F5344CB8AC3E}">
-        <p14:creationId xmlns:p14="http://schemas.microsoft.com/office/powerpoint/2010/main" val="2648384730"/>
+        <p14:creationId xmlns:p14="http://schemas.microsoft.com/office/powerpoint/2010/main" val="2157962458"/>
       </p:ext>
     </p:extLst>
   </p:cSld>
@@ -555,7 +555,7 @@
           <p:cNvPr id="2" name="Вертикальный заголовок 1">
             <a:extLst>
               <a:ext uri="{FF2B5EF4-FFF2-40B4-BE49-F238E27FC236}">
-                <a16:creationId xmlns:a16="http://schemas.microsoft.com/office/drawing/2014/main" id="{E53FE689-CBD5-64FE-EA48-781018BFEDB2}"/>
+                <a16:creationId xmlns:a16="http://schemas.microsoft.com/office/drawing/2014/main" id="{D082B7C4-A87B-29DA-E641-91A6D20FFFF9}"/>
               </a:ext>
             </a:extLst>
           </p:cNvPr>
@@ -588,7 +588,7 @@
           <p:cNvPr id="3" name="Вертикальный текст 2">
             <a:extLst>
               <a:ext uri="{FF2B5EF4-FFF2-40B4-BE49-F238E27FC236}">
-                <a16:creationId xmlns:a16="http://schemas.microsoft.com/office/drawing/2014/main" id="{BEF289FE-EDF0-045A-96C3-88425064CED8}"/>
+                <a16:creationId xmlns:a16="http://schemas.microsoft.com/office/drawing/2014/main" id="{E8495724-D19D-F9DE-2EB9-41B545C29576}"/>
               </a:ext>
             </a:extLst>
           </p:cNvPr>
@@ -650,7 +650,7 @@
           <p:cNvPr id="4" name="Дата 3">
             <a:extLst>
               <a:ext uri="{FF2B5EF4-FFF2-40B4-BE49-F238E27FC236}">
-                <a16:creationId xmlns:a16="http://schemas.microsoft.com/office/drawing/2014/main" id="{CC5C6705-1FAD-903F-BA21-337EB63ABF8E}"/>
+                <a16:creationId xmlns:a16="http://schemas.microsoft.com/office/drawing/2014/main" id="{6977D4DB-C158-95D1-A856-4040123550EE}"/>
               </a:ext>
             </a:extLst>
           </p:cNvPr>
@@ -666,7 +666,7 @@
           <a:bodyPr/>
           <a:lstStyle/>
           <a:p>
-            <a:fld id="{3DF2BDC6-13AE-4F9F-BB14-CB3866DECA51}" type="datetimeFigureOut">
+            <a:fld id="{E59C474A-60D2-4158-8EE8-007BD26A9F4C}" type="datetimeFigureOut">
               <a:rPr lang="ru-RU" smtClean="0"/>
               <a:t>27.10.2026</a:t>
             </a:fld>
@@ -679,7 +679,7 @@
           <p:cNvPr id="5" name="Нижний колонтитул 4">
             <a:extLst>
               <a:ext uri="{FF2B5EF4-FFF2-40B4-BE49-F238E27FC236}">
-                <a16:creationId xmlns:a16="http://schemas.microsoft.com/office/drawing/2014/main" id="{E4F23E6F-224D-CAB0-2705-99389AD9E76A}"/>
+                <a16:creationId xmlns:a16="http://schemas.microsoft.com/office/drawing/2014/main" id="{F493B322-5367-D01B-3E8C-91075D163A6D}"/>
               </a:ext>
             </a:extLst>
           </p:cNvPr>
@@ -704,7 +704,7 @@
           <p:cNvPr id="6" name="Номер слайда 5">
             <a:extLst>
               <a:ext uri="{FF2B5EF4-FFF2-40B4-BE49-F238E27FC236}">
-                <a16:creationId xmlns:a16="http://schemas.microsoft.com/office/drawing/2014/main" id="{8BFBD130-DB7F-DA56-F262-28805012B900}"/>
+                <a16:creationId xmlns:a16="http://schemas.microsoft.com/office/drawing/2014/main" id="{B994D7CC-CC39-5F5A-3B00-35BF53D8E4C0}"/>
               </a:ext>
             </a:extLst>
           </p:cNvPr>
@@ -720,7 +720,7 @@
           <a:bodyPr/>
           <a:lstStyle/>
           <a:p>
-            <a:fld id="{FCF6D127-6394-4B2C-B510-ECF110AB5AEF}" type="slidenum">
+            <a:fld id="{C46792AE-14C6-4C82-A727-B7D982901612}" type="slidenum">
               <a:rPr lang="ru-RU" smtClean="0"/>
               <a:t>‹#›</a:t>
             </a:fld>
@@ -731,7 +731,7 @@
     </p:spTree>
     <p:extLst>
       <p:ext uri="{BB962C8B-B14F-4D97-AF65-F5344CB8AC3E}">
-        <p14:creationId xmlns:p14="http://schemas.microsoft.com/office/powerpoint/2010/main" val="3216872016"/>
+        <p14:creationId xmlns:p14="http://schemas.microsoft.com/office/powerpoint/2010/main" val="2044241200"/>
       </p:ext>
     </p:extLst>
   </p:cSld>
@@ -763,7 +763,7 @@
           <p:cNvPr id="2" name="Заголовок 1">
             <a:extLst>
               <a:ext uri="{FF2B5EF4-FFF2-40B4-BE49-F238E27FC236}">
-                <a16:creationId xmlns:a16="http://schemas.microsoft.com/office/drawing/2014/main" id="{9F28973C-8A0D-A2A7-36F0-7256895D6E0C}"/>
+                <a16:creationId xmlns:a16="http://schemas.microsoft.com/office/drawing/2014/main" id="{A7425155-ED5A-299F-3EC6-F1B08068F298}"/>
               </a:ext>
             </a:extLst>
           </p:cNvPr>
@@ -791,7 +791,7 @@
           <p:cNvPr id="3" name="Объект 2">
             <a:extLst>
               <a:ext uri="{FF2B5EF4-FFF2-40B4-BE49-F238E27FC236}">
-                <a16:creationId xmlns:a16="http://schemas.microsoft.com/office/drawing/2014/main" id="{00BA6058-FC2F-1284-EEE7-0B2D62533C2A}"/>
+                <a16:creationId xmlns:a16="http://schemas.microsoft.com/office/drawing/2014/main" id="{1CE2A61C-6576-BE6B-9E4F-43714477BF54}"/>
               </a:ext>
             </a:extLst>
           </p:cNvPr>
@@ -848,7 +848,7 @@
           <p:cNvPr id="4" name="Дата 3">
             <a:extLst>
               <a:ext uri="{FF2B5EF4-FFF2-40B4-BE49-F238E27FC236}">
-                <a16:creationId xmlns:a16="http://schemas.microsoft.com/office/drawing/2014/main" id="{440CD4A6-F021-3A21-AEDB-6D6309E6279C}"/>
+                <a16:creationId xmlns:a16="http://schemas.microsoft.com/office/drawing/2014/main" id="{51F05E22-3485-53DD-DBB1-2EA0981181F0}"/>
               </a:ext>
             </a:extLst>
           </p:cNvPr>
@@ -864,7 +864,7 @@
           <a:bodyPr/>
           <a:lstStyle/>
           <a:p>
-            <a:fld id="{3DF2BDC6-13AE-4F9F-BB14-CB3866DECA51}" type="datetimeFigureOut">
+            <a:fld id="{E59C474A-60D2-4158-8EE8-007BD26A9F4C}" type="datetimeFigureOut">
               <a:rPr lang="ru-RU" smtClean="0"/>
               <a:t>27.10.2026</a:t>
             </a:fld>
@@ -877,7 +877,7 @@
           <p:cNvPr id="5" name="Нижний колонтитул 4">
             <a:extLst>
               <a:ext uri="{FF2B5EF4-FFF2-40B4-BE49-F238E27FC236}">
-                <a16:creationId xmlns:a16="http://schemas.microsoft.com/office/drawing/2014/main" id="{CDDA7B97-5B68-6250-8892-1D2082CB8D12}"/>
+                <a16:creationId xmlns:a16="http://schemas.microsoft.com/office/drawing/2014/main" id="{30CBCF79-5B9E-8F3C-DEA2-4674B6C64790}"/>
               </a:ext>
             </a:extLst>
           </p:cNvPr>
@@ -902,7 +902,7 @@
           <p:cNvPr id="6" name="Номер слайда 5">
             <a:extLst>
               <a:ext uri="{FF2B5EF4-FFF2-40B4-BE49-F238E27FC236}">
-                <a16:creationId xmlns:a16="http://schemas.microsoft.com/office/drawing/2014/main" id="{ACDF2965-B980-0E6C-4AD0-0A7131A4349A}"/>
+                <a16:creationId xmlns:a16="http://schemas.microsoft.com/office/drawing/2014/main" id="{BD4A0D85-63B3-E517-9E6B-C4201CB6ED3A}"/>
               </a:ext>
             </a:extLst>
           </p:cNvPr>
@@ -918,7 +918,7 @@
           <a:bodyPr/>
           <a:lstStyle/>
           <a:p>
-            <a:fld id="{FCF6D127-6394-4B2C-B510-ECF110AB5AEF}" type="slidenum">
+            <a:fld id="{C46792AE-14C6-4C82-A727-B7D982901612}" type="slidenum">
               <a:rPr lang="ru-RU" smtClean="0"/>
               <a:t>‹#›</a:t>
             </a:fld>
@@ -929,7 +929,7 @@
     </p:spTree>
     <p:extLst>
       <p:ext uri="{BB962C8B-B14F-4D97-AF65-F5344CB8AC3E}">
-        <p14:creationId xmlns:p14="http://schemas.microsoft.com/office/powerpoint/2010/main" val="3594882626"/>
+        <p14:creationId xmlns:p14="http://schemas.microsoft.com/office/powerpoint/2010/main" val="587245193"/>
       </p:ext>
     </p:extLst>
   </p:cSld>
@@ -961,7 +961,7 @@
           <p:cNvPr id="2" name="Заголовок 1">
             <a:extLst>
               <a:ext uri="{FF2B5EF4-FFF2-40B4-BE49-F238E27FC236}">
-                <a16:creationId xmlns:a16="http://schemas.microsoft.com/office/drawing/2014/main" id="{319C2D4F-C4F1-D2B8-FDA1-5872EF9C426A}"/>
+                <a16:creationId xmlns:a16="http://schemas.microsoft.com/office/drawing/2014/main" id="{46E88FAE-1E78-2A6A-108A-6E5E053A074E}"/>
               </a:ext>
             </a:extLst>
           </p:cNvPr>
@@ -998,7 +998,7 @@
           <p:cNvPr id="3" name="Текст 2">
             <a:extLst>
               <a:ext uri="{FF2B5EF4-FFF2-40B4-BE49-F238E27FC236}">
-                <a16:creationId xmlns:a16="http://schemas.microsoft.com/office/drawing/2014/main" id="{B9CA634D-6EB1-1A97-60C5-AEB369DBDE19}"/>
+                <a16:creationId xmlns:a16="http://schemas.microsoft.com/office/drawing/2014/main" id="{BCAF612A-46F7-0700-2F25-9647BD09111B}"/>
               </a:ext>
             </a:extLst>
           </p:cNvPr>
@@ -1123,7 +1123,7 @@
           <p:cNvPr id="4" name="Дата 3">
             <a:extLst>
               <a:ext uri="{FF2B5EF4-FFF2-40B4-BE49-F238E27FC236}">
-                <a16:creationId xmlns:a16="http://schemas.microsoft.com/office/drawing/2014/main" id="{0634494E-3CF6-6596-36E7-8BA4AFEFFC9E}"/>
+                <a16:creationId xmlns:a16="http://schemas.microsoft.com/office/drawing/2014/main" id="{F4B057A0-F9BA-4482-CA15-99820444C69D}"/>
               </a:ext>
             </a:extLst>
           </p:cNvPr>
@@ -1139,7 +1139,7 @@
           <a:bodyPr/>
           <a:lstStyle/>
           <a:p>
-            <a:fld id="{3DF2BDC6-13AE-4F9F-BB14-CB3866DECA51}" type="datetimeFigureOut">
+            <a:fld id="{E59C474A-60D2-4158-8EE8-007BD26A9F4C}" type="datetimeFigureOut">
               <a:rPr lang="ru-RU" smtClean="0"/>
               <a:t>27.10.2026</a:t>
             </a:fld>
@@ -1152,7 +1152,7 @@
           <p:cNvPr id="5" name="Нижний колонтитул 4">
             <a:extLst>
               <a:ext uri="{FF2B5EF4-FFF2-40B4-BE49-F238E27FC236}">
-                <a16:creationId xmlns:a16="http://schemas.microsoft.com/office/drawing/2014/main" id="{61F0B5F6-DAC0-C7DD-878E-E716CB9CC5EB}"/>
+                <a16:creationId xmlns:a16="http://schemas.microsoft.com/office/drawing/2014/main" id="{CBBCF0DC-0012-1E64-776C-B294A3628E2A}"/>
               </a:ext>
             </a:extLst>
           </p:cNvPr>
@@ -1177,7 +1177,7 @@
           <p:cNvPr id="6" name="Номер слайда 5">
             <a:extLst>
               <a:ext uri="{FF2B5EF4-FFF2-40B4-BE49-F238E27FC236}">
-                <a16:creationId xmlns:a16="http://schemas.microsoft.com/office/drawing/2014/main" id="{8CA6E2DC-6CF5-3B93-B19A-495CA9463E72}"/>
+                <a16:creationId xmlns:a16="http://schemas.microsoft.com/office/drawing/2014/main" id="{73287116-DDFC-136B-35DA-720A00122984}"/>
               </a:ext>
             </a:extLst>
           </p:cNvPr>
@@ -1193,7 +1193,7 @@
           <a:bodyPr/>
           <a:lstStyle/>
           <a:p>
-            <a:fld id="{FCF6D127-6394-4B2C-B510-ECF110AB5AEF}" type="slidenum">
+            <a:fld id="{C46792AE-14C6-4C82-A727-B7D982901612}" type="slidenum">
               <a:rPr lang="ru-RU" smtClean="0"/>
               <a:t>‹#›</a:t>
             </a:fld>
@@ -1204,7 +1204,7 @@
     </p:spTree>
     <p:extLst>
       <p:ext uri="{BB962C8B-B14F-4D97-AF65-F5344CB8AC3E}">
-        <p14:creationId xmlns:p14="http://schemas.microsoft.com/office/powerpoint/2010/main" val="3451962996"/>
+        <p14:creationId xmlns:p14="http://schemas.microsoft.com/office/powerpoint/2010/main" val="978591335"/>
       </p:ext>
     </p:extLst>
   </p:cSld>
@@ -1236,7 +1236,7 @@
           <p:cNvPr id="2" name="Заголовок 1">
             <a:extLst>
               <a:ext uri="{FF2B5EF4-FFF2-40B4-BE49-F238E27FC236}">
-                <a16:creationId xmlns:a16="http://schemas.microsoft.com/office/drawing/2014/main" id="{A578E6AD-E412-26C5-A6C1-746883E696A4}"/>
+                <a16:creationId xmlns:a16="http://schemas.microsoft.com/office/drawing/2014/main" id="{D84F1E65-46A0-66A6-9DAD-1D1237A82C32}"/>
               </a:ext>
             </a:extLst>
           </p:cNvPr>
@@ -1264,7 +1264,7 @@
           <p:cNvPr id="3" name="Объект 2">
             <a:extLst>
               <a:ext uri="{FF2B5EF4-FFF2-40B4-BE49-F238E27FC236}">
-                <a16:creationId xmlns:a16="http://schemas.microsoft.com/office/drawing/2014/main" id="{FD07AEC7-878B-B15D-1765-C0CE1CF33DEF}"/>
+                <a16:creationId xmlns:a16="http://schemas.microsoft.com/office/drawing/2014/main" id="{BABAD8F6-A6C9-231D-1EB6-BA728F822EEE}"/>
               </a:ext>
             </a:extLst>
           </p:cNvPr>
@@ -1326,7 +1326,7 @@
           <p:cNvPr id="4" name="Объект 3">
             <a:extLst>
               <a:ext uri="{FF2B5EF4-FFF2-40B4-BE49-F238E27FC236}">
-                <a16:creationId xmlns:a16="http://schemas.microsoft.com/office/drawing/2014/main" id="{E01CBB12-5487-9004-99BB-F76F6EAD29E5}"/>
+                <a16:creationId xmlns:a16="http://schemas.microsoft.com/office/drawing/2014/main" id="{CA609802-4DD8-5C18-B370-88055DBE33BB}"/>
               </a:ext>
             </a:extLst>
           </p:cNvPr>
@@ -1388,7 +1388,7 @@
           <p:cNvPr id="5" name="Дата 4">
             <a:extLst>
               <a:ext uri="{FF2B5EF4-FFF2-40B4-BE49-F238E27FC236}">
-                <a16:creationId xmlns:a16="http://schemas.microsoft.com/office/drawing/2014/main" id="{7C855087-DABF-63CE-B9E8-58E522A16452}"/>
+                <a16:creationId xmlns:a16="http://schemas.microsoft.com/office/drawing/2014/main" id="{E99CF898-4D3F-FDD1-095C-418024ECC2BD}"/>
               </a:ext>
             </a:extLst>
           </p:cNvPr>
@@ -1404,7 +1404,7 @@
           <a:bodyPr/>
           <a:lstStyle/>
           <a:p>
-            <a:fld id="{3DF2BDC6-13AE-4F9F-BB14-CB3866DECA51}" type="datetimeFigureOut">
+            <a:fld id="{E59C474A-60D2-4158-8EE8-007BD26A9F4C}" type="datetimeFigureOut">
               <a:rPr lang="ru-RU" smtClean="0"/>
               <a:t>27.10.2026</a:t>
             </a:fld>
@@ -1417,7 +1417,7 @@
           <p:cNvPr id="6" name="Нижний колонтитул 5">
             <a:extLst>
               <a:ext uri="{FF2B5EF4-FFF2-40B4-BE49-F238E27FC236}">
-                <a16:creationId xmlns:a16="http://schemas.microsoft.com/office/drawing/2014/main" id="{46A10977-7AF3-95FC-308E-95BB9C368E2C}"/>
+                <a16:creationId xmlns:a16="http://schemas.microsoft.com/office/drawing/2014/main" id="{B0677554-9CEC-9FF4-5199-88FCBB544FFD}"/>
               </a:ext>
             </a:extLst>
           </p:cNvPr>
@@ -1442,7 +1442,7 @@
           <p:cNvPr id="7" name="Номер слайда 6">
             <a:extLst>
               <a:ext uri="{FF2B5EF4-FFF2-40B4-BE49-F238E27FC236}">
-                <a16:creationId xmlns:a16="http://schemas.microsoft.com/office/drawing/2014/main" id="{DD7D5D71-A3E6-B25B-EC2D-C5C9B86D7647}"/>
+                <a16:creationId xmlns:a16="http://schemas.microsoft.com/office/drawing/2014/main" id="{3B5155E1-F613-8BEB-72F4-70C46BCC6EEF}"/>
               </a:ext>
             </a:extLst>
           </p:cNvPr>
@@ -1458,7 +1458,7 @@
           <a:bodyPr/>
           <a:lstStyle/>
           <a:p>
-            <a:fld id="{FCF6D127-6394-4B2C-B510-ECF110AB5AEF}" type="slidenum">
+            <a:fld id="{C46792AE-14C6-4C82-A727-B7D982901612}" type="slidenum">
               <a:rPr lang="ru-RU" smtClean="0"/>
               <a:t>‹#›</a:t>
             </a:fld>
@@ -1469,7 +1469,7 @@
     </p:spTree>
     <p:extLst>
       <p:ext uri="{BB962C8B-B14F-4D97-AF65-F5344CB8AC3E}">
-        <p14:creationId xmlns:p14="http://schemas.microsoft.com/office/powerpoint/2010/main" val="4198175789"/>
+        <p14:creationId xmlns:p14="http://schemas.microsoft.com/office/powerpoint/2010/main" val="3622133066"/>
       </p:ext>
     </p:extLst>
   </p:cSld>
@@ -1501,7 +1501,7 @@
           <p:cNvPr id="2" name="Заголовок 1">
             <a:extLst>
               <a:ext uri="{FF2B5EF4-FFF2-40B4-BE49-F238E27FC236}">
-                <a16:creationId xmlns:a16="http://schemas.microsoft.com/office/drawing/2014/main" id="{668D689C-EB18-4B76-4D1E-23EF5B181729}"/>
+                <a16:creationId xmlns:a16="http://schemas.microsoft.com/office/drawing/2014/main" id="{7118F97E-9334-6B8F-8D3C-05A6F31CEE47}"/>
               </a:ext>
             </a:extLst>
           </p:cNvPr>
@@ -1534,7 +1534,7 @@
           <p:cNvPr id="3" name="Текст 2">
             <a:extLst>
               <a:ext uri="{FF2B5EF4-FFF2-40B4-BE49-F238E27FC236}">
-                <a16:creationId xmlns:a16="http://schemas.microsoft.com/office/drawing/2014/main" id="{F713BC18-293B-6539-A98F-EEBF2C217FC9}"/>
+                <a16:creationId xmlns:a16="http://schemas.microsoft.com/office/drawing/2014/main" id="{064AC063-8F43-2062-60BC-E1944B616E94}"/>
               </a:ext>
             </a:extLst>
           </p:cNvPr>
@@ -1605,7 +1605,7 @@
           <p:cNvPr id="4" name="Объект 3">
             <a:extLst>
               <a:ext uri="{FF2B5EF4-FFF2-40B4-BE49-F238E27FC236}">
-                <a16:creationId xmlns:a16="http://schemas.microsoft.com/office/drawing/2014/main" id="{C9559A0D-3BCF-71CF-6FDF-5F9160C0B475}"/>
+                <a16:creationId xmlns:a16="http://schemas.microsoft.com/office/drawing/2014/main" id="{97FFBD50-C368-FABD-FB29-7E768C324E65}"/>
               </a:ext>
             </a:extLst>
           </p:cNvPr>
@@ -1667,7 +1667,7 @@
           <p:cNvPr id="5" name="Текст 4">
             <a:extLst>
               <a:ext uri="{FF2B5EF4-FFF2-40B4-BE49-F238E27FC236}">
-                <a16:creationId xmlns:a16="http://schemas.microsoft.com/office/drawing/2014/main" id="{C852F4B6-B4A5-AB29-6E5B-41CA123705D8}"/>
+                <a16:creationId xmlns:a16="http://schemas.microsoft.com/office/drawing/2014/main" id="{B69A39DA-2071-A8E2-2E3F-1CEAE367A990}"/>
               </a:ext>
             </a:extLst>
           </p:cNvPr>
@@ -1738,7 +1738,7 @@
           <p:cNvPr id="6" name="Объект 5">
             <a:extLst>
               <a:ext uri="{FF2B5EF4-FFF2-40B4-BE49-F238E27FC236}">
-                <a16:creationId xmlns:a16="http://schemas.microsoft.com/office/drawing/2014/main" id="{7D9BB645-7811-8D7B-50C8-03E420AD9AED}"/>
+                <a16:creationId xmlns:a16="http://schemas.microsoft.com/office/drawing/2014/main" id="{D214D82E-E928-C973-0F8B-8DE952F3E73E}"/>
               </a:ext>
             </a:extLst>
           </p:cNvPr>
@@ -1800,7 +1800,7 @@
           <p:cNvPr id="7" name="Дата 6">
             <a:extLst>
               <a:ext uri="{FF2B5EF4-FFF2-40B4-BE49-F238E27FC236}">
-                <a16:creationId xmlns:a16="http://schemas.microsoft.com/office/drawing/2014/main" id="{FC3488BD-1FBC-DCCC-062A-39FC52200007}"/>
+                <a16:creationId xmlns:a16="http://schemas.microsoft.com/office/drawing/2014/main" id="{E4495DF9-2792-3A5A-0A2C-A6499CDA3798}"/>
               </a:ext>
             </a:extLst>
           </p:cNvPr>
@@ -1816,7 +1816,7 @@
           <a:bodyPr/>
           <a:lstStyle/>
           <a:p>
-            <a:fld id="{3DF2BDC6-13AE-4F9F-BB14-CB3866DECA51}" type="datetimeFigureOut">
+            <a:fld id="{E59C474A-60D2-4158-8EE8-007BD26A9F4C}" type="datetimeFigureOut">
               <a:rPr lang="ru-RU" smtClean="0"/>
               <a:t>27.10.2026</a:t>
             </a:fld>
@@ -1829,7 +1829,7 @@
           <p:cNvPr id="8" name="Нижний колонтитул 7">
             <a:extLst>
               <a:ext uri="{FF2B5EF4-FFF2-40B4-BE49-F238E27FC236}">
-                <a16:creationId xmlns:a16="http://schemas.microsoft.com/office/drawing/2014/main" id="{EF9A8C92-37AB-2D10-7647-55715084C5AF}"/>
+                <a16:creationId xmlns:a16="http://schemas.microsoft.com/office/drawing/2014/main" id="{AAA95EB1-867F-4921-B413-DE13FCB11F15}"/>
               </a:ext>
             </a:extLst>
           </p:cNvPr>
@@ -1854,7 +1854,7 @@
           <p:cNvPr id="9" name="Номер слайда 8">
             <a:extLst>
               <a:ext uri="{FF2B5EF4-FFF2-40B4-BE49-F238E27FC236}">
-                <a16:creationId xmlns:a16="http://schemas.microsoft.com/office/drawing/2014/main" id="{F1054A5E-8657-93A0-0E1D-1D2B5D058D70}"/>
+                <a16:creationId xmlns:a16="http://schemas.microsoft.com/office/drawing/2014/main" id="{46F70288-2824-EE76-B534-879762D8B20B}"/>
               </a:ext>
             </a:extLst>
           </p:cNvPr>
@@ -1870,7 +1870,7 @@
           <a:bodyPr/>
           <a:lstStyle/>
           <a:p>
-            <a:fld id="{FCF6D127-6394-4B2C-B510-ECF110AB5AEF}" type="slidenum">
+            <a:fld id="{C46792AE-14C6-4C82-A727-B7D982901612}" type="slidenum">
               <a:rPr lang="ru-RU" smtClean="0"/>
               <a:t>‹#›</a:t>
             </a:fld>
@@ -1881,7 +1881,7 @@
     </p:spTree>
     <p:extLst>
       <p:ext uri="{BB962C8B-B14F-4D97-AF65-F5344CB8AC3E}">
-        <p14:creationId xmlns:p14="http://schemas.microsoft.com/office/powerpoint/2010/main" val="1354254396"/>
+        <p14:creationId xmlns:p14="http://schemas.microsoft.com/office/powerpoint/2010/main" val="1795647980"/>
       </p:ext>
     </p:extLst>
   </p:cSld>
@@ -1913,7 +1913,7 @@
           <p:cNvPr id="2" name="Заголовок 1">
             <a:extLst>
               <a:ext uri="{FF2B5EF4-FFF2-40B4-BE49-F238E27FC236}">
-                <a16:creationId xmlns:a16="http://schemas.microsoft.com/office/drawing/2014/main" id="{3B6D9CD0-8678-2989-FA95-F0B1388F3F6E}"/>
+                <a16:creationId xmlns:a16="http://schemas.microsoft.com/office/drawing/2014/main" id="{4173F0DC-44ED-31EE-F611-DCE1B3D49F69}"/>
               </a:ext>
             </a:extLst>
           </p:cNvPr>
@@ -1941,7 +1941,7 @@
           <p:cNvPr id="3" name="Дата 2">
             <a:extLst>
               <a:ext uri="{FF2B5EF4-FFF2-40B4-BE49-F238E27FC236}">
-                <a16:creationId xmlns:a16="http://schemas.microsoft.com/office/drawing/2014/main" id="{0C5B63D2-BF5D-6F4A-4F5F-342336D5ECFF}"/>
+                <a16:creationId xmlns:a16="http://schemas.microsoft.com/office/drawing/2014/main" id="{5AD50043-977D-688F-D84E-14D18F809F39}"/>
               </a:ext>
             </a:extLst>
           </p:cNvPr>
@@ -1957,7 +1957,7 @@
           <a:bodyPr/>
           <a:lstStyle/>
           <a:p>
-            <a:fld id="{3DF2BDC6-13AE-4F9F-BB14-CB3866DECA51}" type="datetimeFigureOut">
+            <a:fld id="{E59C474A-60D2-4158-8EE8-007BD26A9F4C}" type="datetimeFigureOut">
               <a:rPr lang="ru-RU" smtClean="0"/>
               <a:t>27.10.2026</a:t>
             </a:fld>
@@ -1970,7 +1970,7 @@
           <p:cNvPr id="4" name="Нижний колонтитул 3">
             <a:extLst>
               <a:ext uri="{FF2B5EF4-FFF2-40B4-BE49-F238E27FC236}">
-                <a16:creationId xmlns:a16="http://schemas.microsoft.com/office/drawing/2014/main" id="{7FEBA439-378A-1D76-914B-DF4AE6C78831}"/>
+                <a16:creationId xmlns:a16="http://schemas.microsoft.com/office/drawing/2014/main" id="{F60226C4-E4EA-86B9-A138-766AD8CF4BEE}"/>
               </a:ext>
             </a:extLst>
           </p:cNvPr>
@@ -1995,7 +1995,7 @@
           <p:cNvPr id="5" name="Номер слайда 4">
             <a:extLst>
               <a:ext uri="{FF2B5EF4-FFF2-40B4-BE49-F238E27FC236}">
-                <a16:creationId xmlns:a16="http://schemas.microsoft.com/office/drawing/2014/main" id="{486ED757-2271-D5BB-BD94-F128B19BD68C}"/>
+                <a16:creationId xmlns:a16="http://schemas.microsoft.com/office/drawing/2014/main" id="{DF27D979-E847-A575-537D-F76158D7EC84}"/>
               </a:ext>
             </a:extLst>
           </p:cNvPr>
@@ -2011,7 +2011,7 @@
           <a:bodyPr/>
           <a:lstStyle/>
           <a:p>
-            <a:fld id="{FCF6D127-6394-4B2C-B510-ECF110AB5AEF}" type="slidenum">
+            <a:fld id="{C46792AE-14C6-4C82-A727-B7D982901612}" type="slidenum">
               <a:rPr lang="ru-RU" smtClean="0"/>
               <a:t>‹#›</a:t>
             </a:fld>
@@ -2022,7 +2022,7 @@
     </p:spTree>
     <p:extLst>
       <p:ext uri="{BB962C8B-B14F-4D97-AF65-F5344CB8AC3E}">
-        <p14:creationId xmlns:p14="http://schemas.microsoft.com/office/powerpoint/2010/main" val="3719200833"/>
+        <p14:creationId xmlns:p14="http://schemas.microsoft.com/office/powerpoint/2010/main" val="3995217179"/>
       </p:ext>
     </p:extLst>
   </p:cSld>
@@ -2054,7 +2054,7 @@
           <p:cNvPr id="2" name="Дата 1">
             <a:extLst>
               <a:ext uri="{FF2B5EF4-FFF2-40B4-BE49-F238E27FC236}">
-                <a16:creationId xmlns:a16="http://schemas.microsoft.com/office/drawing/2014/main" id="{96EA8C4E-DDF2-B24D-158D-BC063C8F30A1}"/>
+                <a16:creationId xmlns:a16="http://schemas.microsoft.com/office/drawing/2014/main" id="{D3B66C7E-8F08-990F-D674-519FB9F7C16D}"/>
               </a:ext>
             </a:extLst>
           </p:cNvPr>
@@ -2070,7 +2070,7 @@
           <a:bodyPr/>
           <a:lstStyle/>
           <a:p>
-            <a:fld id="{3DF2BDC6-13AE-4F9F-BB14-CB3866DECA51}" type="datetimeFigureOut">
+            <a:fld id="{E59C474A-60D2-4158-8EE8-007BD26A9F4C}" type="datetimeFigureOut">
               <a:rPr lang="ru-RU" smtClean="0"/>
               <a:t>27.10.2026</a:t>
             </a:fld>
@@ -2083,7 +2083,7 @@
           <p:cNvPr id="3" name="Нижний колонтитул 2">
             <a:extLst>
               <a:ext uri="{FF2B5EF4-FFF2-40B4-BE49-F238E27FC236}">
-                <a16:creationId xmlns:a16="http://schemas.microsoft.com/office/drawing/2014/main" id="{B4636FB5-C0B9-D72E-28A9-7FABBD857640}"/>
+                <a16:creationId xmlns:a16="http://schemas.microsoft.com/office/drawing/2014/main" id="{BDD5F8A1-8DC2-1755-4D9F-EFB4204ED090}"/>
               </a:ext>
             </a:extLst>
           </p:cNvPr>
@@ -2108,7 +2108,7 @@
           <p:cNvPr id="4" name="Номер слайда 3">
             <a:extLst>
               <a:ext uri="{FF2B5EF4-FFF2-40B4-BE49-F238E27FC236}">
-                <a16:creationId xmlns:a16="http://schemas.microsoft.com/office/drawing/2014/main" id="{20B4C4D4-51D0-7839-5777-BB8FF2675C0B}"/>
+                <a16:creationId xmlns:a16="http://schemas.microsoft.com/office/drawing/2014/main" id="{48252035-CB6E-E893-CD7F-FED75BA849A2}"/>
               </a:ext>
             </a:extLst>
           </p:cNvPr>
@@ -2124,7 +2124,7 @@
           <a:bodyPr/>
           <a:lstStyle/>
           <a:p>
-            <a:fld id="{FCF6D127-6394-4B2C-B510-ECF110AB5AEF}" type="slidenum">
+            <a:fld id="{C46792AE-14C6-4C82-A727-B7D982901612}" type="slidenum">
               <a:rPr lang="ru-RU" smtClean="0"/>
               <a:t>‹#›</a:t>
             </a:fld>
@@ -2135,7 +2135,7 @@
     </p:spTree>
     <p:extLst>
       <p:ext uri="{BB962C8B-B14F-4D97-AF65-F5344CB8AC3E}">
-        <p14:creationId xmlns:p14="http://schemas.microsoft.com/office/powerpoint/2010/main" val="530700103"/>
+        <p14:creationId xmlns:p14="http://schemas.microsoft.com/office/powerpoint/2010/main" val="359910129"/>
       </p:ext>
     </p:extLst>
   </p:cSld>
@@ -2167,7 +2167,7 @@
           <p:cNvPr id="2" name="Заголовок 1">
             <a:extLst>
               <a:ext uri="{FF2B5EF4-FFF2-40B4-BE49-F238E27FC236}">
-                <a16:creationId xmlns:a16="http://schemas.microsoft.com/office/drawing/2014/main" id="{3EE39AD0-24BE-74E6-4190-1D0E4D17488F}"/>
+                <a16:creationId xmlns:a16="http://schemas.microsoft.com/office/drawing/2014/main" id="{5BD8F507-CDE9-3BD4-9FAB-B510AD926B4C}"/>
               </a:ext>
             </a:extLst>
           </p:cNvPr>
@@ -2204,7 +2204,7 @@
           <p:cNvPr id="3" name="Объект 2">
             <a:extLst>
               <a:ext uri="{FF2B5EF4-FFF2-40B4-BE49-F238E27FC236}">
-                <a16:creationId xmlns:a16="http://schemas.microsoft.com/office/drawing/2014/main" id="{CE90249D-267F-8D8D-0E5A-06E80FE7110E}"/>
+                <a16:creationId xmlns:a16="http://schemas.microsoft.com/office/drawing/2014/main" id="{3DD94F4A-438B-3A7D-467B-4C8548915FC8}"/>
               </a:ext>
             </a:extLst>
           </p:cNvPr>
@@ -2294,7 +2294,7 @@
           <p:cNvPr id="4" name="Текст 3">
             <a:extLst>
               <a:ext uri="{FF2B5EF4-FFF2-40B4-BE49-F238E27FC236}">
-                <a16:creationId xmlns:a16="http://schemas.microsoft.com/office/drawing/2014/main" id="{B22FC1F9-A1A0-4602-F41B-27471540E590}"/>
+                <a16:creationId xmlns:a16="http://schemas.microsoft.com/office/drawing/2014/main" id="{63CDD4D3-B8AF-0411-6BC4-CBE2CB5B1D0D}"/>
               </a:ext>
             </a:extLst>
           </p:cNvPr>
@@ -2365,7 +2365,7 @@
           <p:cNvPr id="5" name="Дата 4">
             <a:extLst>
               <a:ext uri="{FF2B5EF4-FFF2-40B4-BE49-F238E27FC236}">
-                <a16:creationId xmlns:a16="http://schemas.microsoft.com/office/drawing/2014/main" id="{B6042393-D47A-E057-93CE-F02A874AA9AE}"/>
+                <a16:creationId xmlns:a16="http://schemas.microsoft.com/office/drawing/2014/main" id="{823E9446-5084-F8DC-5457-0353F230C28E}"/>
               </a:ext>
             </a:extLst>
           </p:cNvPr>
@@ -2381,7 +2381,7 @@
           <a:bodyPr/>
           <a:lstStyle/>
           <a:p>
-            <a:fld id="{3DF2BDC6-13AE-4F9F-BB14-CB3866DECA51}" type="datetimeFigureOut">
+            <a:fld id="{E59C474A-60D2-4158-8EE8-007BD26A9F4C}" type="datetimeFigureOut">
               <a:rPr lang="ru-RU" smtClean="0"/>
               <a:t>27.10.2026</a:t>
             </a:fld>
@@ -2394,7 +2394,7 @@
           <p:cNvPr id="6" name="Нижний колонтитул 5">
             <a:extLst>
               <a:ext uri="{FF2B5EF4-FFF2-40B4-BE49-F238E27FC236}">
-                <a16:creationId xmlns:a16="http://schemas.microsoft.com/office/drawing/2014/main" id="{7E26EF60-6E62-4477-D6FC-6C24EC134D17}"/>
+                <a16:creationId xmlns:a16="http://schemas.microsoft.com/office/drawing/2014/main" id="{8FF0B145-BEF6-3D1B-8F7C-CDA751002CD1}"/>
               </a:ext>
             </a:extLst>
           </p:cNvPr>
@@ -2419,7 +2419,7 @@
           <p:cNvPr id="7" name="Номер слайда 6">
             <a:extLst>
               <a:ext uri="{FF2B5EF4-FFF2-40B4-BE49-F238E27FC236}">
-                <a16:creationId xmlns:a16="http://schemas.microsoft.com/office/drawing/2014/main" id="{BAD09FC2-9C82-00EB-7470-E4C3373FD871}"/>
+                <a16:creationId xmlns:a16="http://schemas.microsoft.com/office/drawing/2014/main" id="{D9758317-1353-6714-F378-A6608CE1E1B1}"/>
               </a:ext>
             </a:extLst>
           </p:cNvPr>
@@ -2435,7 +2435,7 @@
           <a:bodyPr/>
           <a:lstStyle/>
           <a:p>
-            <a:fld id="{FCF6D127-6394-4B2C-B510-ECF110AB5AEF}" type="slidenum">
+            <a:fld id="{C46792AE-14C6-4C82-A727-B7D982901612}" type="slidenum">
               <a:rPr lang="ru-RU" smtClean="0"/>
               <a:t>‹#›</a:t>
             </a:fld>
@@ -2446,7 +2446,7 @@
     </p:spTree>
     <p:extLst>
       <p:ext uri="{BB962C8B-B14F-4D97-AF65-F5344CB8AC3E}">
-        <p14:creationId xmlns:p14="http://schemas.microsoft.com/office/powerpoint/2010/main" val="928131064"/>
+        <p14:creationId xmlns:p14="http://schemas.microsoft.com/office/powerpoint/2010/main" val="937961328"/>
       </p:ext>
     </p:extLst>
   </p:cSld>
@@ -2478,7 +2478,7 @@
           <p:cNvPr id="2" name="Заголовок 1">
             <a:extLst>
               <a:ext uri="{FF2B5EF4-FFF2-40B4-BE49-F238E27FC236}">
-                <a16:creationId xmlns:a16="http://schemas.microsoft.com/office/drawing/2014/main" id="{31CE6758-7EC0-19B7-43C8-0F3F3F73FC26}"/>
+                <a16:creationId xmlns:a16="http://schemas.microsoft.com/office/drawing/2014/main" id="{F27A972A-46A6-27AF-DE4D-574BCC688EFB}"/>
               </a:ext>
             </a:extLst>
           </p:cNvPr>
@@ -2515,7 +2515,7 @@
           <p:cNvPr id="3" name="Рисунок 2">
             <a:extLst>
               <a:ext uri="{FF2B5EF4-FFF2-40B4-BE49-F238E27FC236}">
-                <a16:creationId xmlns:a16="http://schemas.microsoft.com/office/drawing/2014/main" id="{560EAEE4-1FD5-7749-B5EE-82A7C2C6EEE0}"/>
+                <a16:creationId xmlns:a16="http://schemas.microsoft.com/office/drawing/2014/main" id="{87D81D93-AC91-F199-5347-26EAD2B9F0A3}"/>
               </a:ext>
             </a:extLst>
           </p:cNvPr>
@@ -2582,7 +2582,7 @@
           <p:cNvPr id="4" name="Текст 3">
             <a:extLst>
               <a:ext uri="{FF2B5EF4-FFF2-40B4-BE49-F238E27FC236}">
-                <a16:creationId xmlns:a16="http://schemas.microsoft.com/office/drawing/2014/main" id="{A38A968E-296E-9A37-0EA7-B317F30C20C1}"/>
+                <a16:creationId xmlns:a16="http://schemas.microsoft.com/office/drawing/2014/main" id="{CAAEA9D1-7572-1FBA-17AF-CEECE8EE092E}"/>
               </a:ext>
             </a:extLst>
           </p:cNvPr>
@@ -2653,7 +2653,7 @@
           <p:cNvPr id="5" name="Дата 4">
             <a:extLst>
               <a:ext uri="{FF2B5EF4-FFF2-40B4-BE49-F238E27FC236}">
-                <a16:creationId xmlns:a16="http://schemas.microsoft.com/office/drawing/2014/main" id="{AAC55960-7C73-3E74-DD3C-B420DE2100FA}"/>
+                <a16:creationId xmlns:a16="http://schemas.microsoft.com/office/drawing/2014/main" id="{FB341240-4F85-1599-9A29-90C9DA42F838}"/>
               </a:ext>
             </a:extLst>
           </p:cNvPr>
@@ -2669,7 +2669,7 @@
           <a:bodyPr/>
           <a:lstStyle/>
           <a:p>
-            <a:fld id="{3DF2BDC6-13AE-4F9F-BB14-CB3866DECA51}" type="datetimeFigureOut">
+            <a:fld id="{E59C474A-60D2-4158-8EE8-007BD26A9F4C}" type="datetimeFigureOut">
               <a:rPr lang="ru-RU" smtClean="0"/>
               <a:t>27.10.2026</a:t>
             </a:fld>
@@ -2682,7 +2682,7 @@
           <p:cNvPr id="6" name="Нижний колонтитул 5">
             <a:extLst>
               <a:ext uri="{FF2B5EF4-FFF2-40B4-BE49-F238E27FC236}">
-                <a16:creationId xmlns:a16="http://schemas.microsoft.com/office/drawing/2014/main" id="{9B2CD1E4-C2C0-3542-2401-ACA11B60F594}"/>
+                <a16:creationId xmlns:a16="http://schemas.microsoft.com/office/drawing/2014/main" id="{B8811EA4-23A9-5CDA-5C2D-06DCB3EA0EE0}"/>
               </a:ext>
             </a:extLst>
           </p:cNvPr>
@@ -2707,7 +2707,7 @@
           <p:cNvPr id="7" name="Номер слайда 6">
             <a:extLst>
               <a:ext uri="{FF2B5EF4-FFF2-40B4-BE49-F238E27FC236}">
-                <a16:creationId xmlns:a16="http://schemas.microsoft.com/office/drawing/2014/main" id="{435C4B94-E591-12F4-4F32-F1E2F7706187}"/>
+                <a16:creationId xmlns:a16="http://schemas.microsoft.com/office/drawing/2014/main" id="{5709D90F-15FD-0D9A-62ED-25F4FDEF1541}"/>
               </a:ext>
             </a:extLst>
           </p:cNvPr>
@@ -2723,7 +2723,7 @@
           <a:bodyPr/>
           <a:lstStyle/>
           <a:p>
-            <a:fld id="{FCF6D127-6394-4B2C-B510-ECF110AB5AEF}" type="slidenum">
+            <a:fld id="{C46792AE-14C6-4C82-A727-B7D982901612}" type="slidenum">
               <a:rPr lang="ru-RU" smtClean="0"/>
               <a:t>‹#›</a:t>
             </a:fld>
@@ -2734,7 +2734,7 @@
     </p:spTree>
     <p:extLst>
       <p:ext uri="{BB962C8B-B14F-4D97-AF65-F5344CB8AC3E}">
-        <p14:creationId xmlns:p14="http://schemas.microsoft.com/office/powerpoint/2010/main" val="64547096"/>
+        <p14:creationId xmlns:p14="http://schemas.microsoft.com/office/powerpoint/2010/main" val="1363945909"/>
       </p:ext>
     </p:extLst>
   </p:cSld>
@@ -2771,7 +2771,7 @@
           <p:cNvPr id="2" name="Заголовок 1">
             <a:extLst>
               <a:ext uri="{FF2B5EF4-FFF2-40B4-BE49-F238E27FC236}">
-                <a16:creationId xmlns:a16="http://schemas.microsoft.com/office/drawing/2014/main" id="{70EBF098-2B94-3322-510D-C7EC08F2A50B}"/>
+                <a16:creationId xmlns:a16="http://schemas.microsoft.com/office/drawing/2014/main" id="{F4E296BB-370A-C98E-32F7-8FCCA0B3C419}"/>
               </a:ext>
             </a:extLst>
           </p:cNvPr>
@@ -2809,7 +2809,7 @@
           <p:cNvPr id="3" name="Текст 2">
             <a:extLst>
               <a:ext uri="{FF2B5EF4-FFF2-40B4-BE49-F238E27FC236}">
-                <a16:creationId xmlns:a16="http://schemas.microsoft.com/office/drawing/2014/main" id="{D60856BA-2A45-34F5-A539-53388575A519}"/>
+                <a16:creationId xmlns:a16="http://schemas.microsoft.com/office/drawing/2014/main" id="{8797A61E-791E-54F8-F00C-7EEF660A0C1C}"/>
               </a:ext>
             </a:extLst>
           </p:cNvPr>
@@ -2876,7 +2876,7 @@
           <p:cNvPr id="4" name="Дата 3">
             <a:extLst>
               <a:ext uri="{FF2B5EF4-FFF2-40B4-BE49-F238E27FC236}">
-                <a16:creationId xmlns:a16="http://schemas.microsoft.com/office/drawing/2014/main" id="{FB314249-73DD-B860-09FB-25E2C4C7E9A9}"/>
+                <a16:creationId xmlns:a16="http://schemas.microsoft.com/office/drawing/2014/main" id="{DA32DADB-5E15-93E7-E8D2-D9E72884CAA4}"/>
               </a:ext>
             </a:extLst>
           </p:cNvPr>
@@ -2910,7 +2910,7 @@
             </a:lvl1pPr>
           </a:lstStyle>
           <a:p>
-            <a:fld id="{3DF2BDC6-13AE-4F9F-BB14-CB3866DECA51}" type="datetimeFigureOut">
+            <a:fld id="{E59C474A-60D2-4158-8EE8-007BD26A9F4C}" type="datetimeFigureOut">
               <a:rPr lang="ru-RU" smtClean="0"/>
               <a:t>27.10.2026</a:t>
             </a:fld>
@@ -2923,7 +2923,7 @@
           <p:cNvPr id="5" name="Нижний колонтитул 4">
             <a:extLst>
               <a:ext uri="{FF2B5EF4-FFF2-40B4-BE49-F238E27FC236}">
-                <a16:creationId xmlns:a16="http://schemas.microsoft.com/office/drawing/2014/main" id="{4BA904C8-A1BD-3FF0-D0B1-18773A2F0CA5}"/>
+                <a16:creationId xmlns:a16="http://schemas.microsoft.com/office/drawing/2014/main" id="{F30131D7-EC3A-5458-77B5-E28C4507D03B}"/>
               </a:ext>
             </a:extLst>
           </p:cNvPr>
@@ -2966,7 +2966,7 @@
           <p:cNvPr id="6" name="Номер слайда 5">
             <a:extLst>
               <a:ext uri="{FF2B5EF4-FFF2-40B4-BE49-F238E27FC236}">
-                <a16:creationId xmlns:a16="http://schemas.microsoft.com/office/drawing/2014/main" id="{A940489C-5066-88FF-A2F5-F36C6F55C838}"/>
+                <a16:creationId xmlns:a16="http://schemas.microsoft.com/office/drawing/2014/main" id="{8C1C4F20-3FD5-E58E-E17F-198D1DAAD91F}"/>
               </a:ext>
             </a:extLst>
           </p:cNvPr>
@@ -3000,7 +3000,7 @@
             </a:lvl1pPr>
           </a:lstStyle>
           <a:p>
-            <a:fld id="{FCF6D127-6394-4B2C-B510-ECF110AB5AEF}" type="slidenum">
+            <a:fld id="{C46792AE-14C6-4C82-A727-B7D982901612}" type="slidenum">
               <a:rPr lang="ru-RU" smtClean="0"/>
               <a:t>‹#›</a:t>
             </a:fld>
@@ -3011,7 +3011,7 @@
     </p:spTree>
     <p:extLst>
       <p:ext uri="{BB962C8B-B14F-4D97-AF65-F5344CB8AC3E}">
-        <p14:creationId xmlns:p14="http://schemas.microsoft.com/office/powerpoint/2010/main" val="2871270603"/>
+        <p14:creationId xmlns:p14="http://schemas.microsoft.com/office/powerpoint/2010/main" val="2640059833"/>
       </p:ext>
     </p:extLst>
   </p:cSld>
@@ -3334,7 +3334,7 @@
           <p:cNvPr id="2" name="Прямоугольник 1">
             <a:extLst>
               <a:ext uri="{FF2B5EF4-FFF2-40B4-BE49-F238E27FC236}">
-                <a16:creationId xmlns:a16="http://schemas.microsoft.com/office/drawing/2014/main" id="{16014B8F-4FBC-5365-53E4-D78C2DA436F2}"/>
+                <a16:creationId xmlns:a16="http://schemas.microsoft.com/office/drawing/2014/main" id="{37B5A855-F216-443A-9D5E-8B7076DB40BC}"/>
               </a:ext>
             </a:extLst>
           </p:cNvPr>
@@ -3402,7 +3402,7 @@
           <p:cNvPr id="3" name="Прямоугольник 2">
             <a:extLst>
               <a:ext uri="{FF2B5EF4-FFF2-40B4-BE49-F238E27FC236}">
-                <a16:creationId xmlns:a16="http://schemas.microsoft.com/office/drawing/2014/main" id="{08716D4D-89CF-B428-9ABA-4F3485A6772F}"/>
+                <a16:creationId xmlns:a16="http://schemas.microsoft.com/office/drawing/2014/main" id="{A7DCCE99-FB6D-62E5-7C54-B99E47BAF8A1}"/>
               </a:ext>
             </a:extLst>
           </p:cNvPr>
@@ -3470,7 +3470,7 @@
           <p:cNvPr id="4" name="Прямоугольник 3">
             <a:extLst>
               <a:ext uri="{FF2B5EF4-FFF2-40B4-BE49-F238E27FC236}">
-                <a16:creationId xmlns:a16="http://schemas.microsoft.com/office/drawing/2014/main" id="{1739ECE5-9BF9-F302-1A04-A437608C13A1}"/>
+                <a16:creationId xmlns:a16="http://schemas.microsoft.com/office/drawing/2014/main" id="{19ADD509-D3E6-CCBC-DC09-5D95EC1A933A}"/>
               </a:ext>
             </a:extLst>
           </p:cNvPr>
@@ -3538,7 +3538,7 @@
           <p:cNvPr id="5" name="TextBox 4">
             <a:extLst>
               <a:ext uri="{FF2B5EF4-FFF2-40B4-BE49-F238E27FC236}">
-                <a16:creationId xmlns:a16="http://schemas.microsoft.com/office/drawing/2014/main" id="{9E00EB00-CDF0-F694-CB2A-A0016D254096}"/>
+                <a16:creationId xmlns:a16="http://schemas.microsoft.com/office/drawing/2014/main" id="{E6CCA060-1D98-6061-374D-652E0FF5472B}"/>
               </a:ext>
             </a:extLst>
           </p:cNvPr>
@@ -3578,7 +3578,7 @@
           <p:cNvPr id="6" name="TextBox 5">
             <a:extLst>
               <a:ext uri="{FF2B5EF4-FFF2-40B4-BE49-F238E27FC236}">
-                <a16:creationId xmlns:a16="http://schemas.microsoft.com/office/drawing/2014/main" id="{FA1B1DCB-B22B-F343-F499-A2F95F4239FE}"/>
+                <a16:creationId xmlns:a16="http://schemas.microsoft.com/office/drawing/2014/main" id="{B79BEBF2-4DF4-EACD-5A04-BB41CEBF8D2E}"/>
               </a:ext>
             </a:extLst>
           </p:cNvPr>
@@ -3618,7 +3618,7 @@
           <p:cNvPr id="7" name="TextBox 6">
             <a:extLst>
               <a:ext uri="{FF2B5EF4-FFF2-40B4-BE49-F238E27FC236}">
-                <a16:creationId xmlns:a16="http://schemas.microsoft.com/office/drawing/2014/main" id="{58777F95-CFF3-7152-3547-405E255BB3D1}"/>
+                <a16:creationId xmlns:a16="http://schemas.microsoft.com/office/drawing/2014/main" id="{8659F9C3-13FA-3DA4-1EA9-A0287F9D1049}"/>
               </a:ext>
             </a:extLst>
           </p:cNvPr>
@@ -3658,7 +3658,7 @@
           <p:cNvPr id="8" name="TextBox 7">
             <a:extLst>
               <a:ext uri="{FF2B5EF4-FFF2-40B4-BE49-F238E27FC236}">
-                <a16:creationId xmlns:a16="http://schemas.microsoft.com/office/drawing/2014/main" id="{80BB1C40-159B-E820-8C35-2454F28E6804}"/>
+                <a16:creationId xmlns:a16="http://schemas.microsoft.com/office/drawing/2014/main" id="{B07F4753-AD06-076C-44FC-A34C0A8A2EB0}"/>
               </a:ext>
             </a:extLst>
           </p:cNvPr>
@@ -3698,7 +3698,7 @@
           <p:cNvPr id="9" name="TextBox 8">
             <a:extLst>
               <a:ext uri="{FF2B5EF4-FFF2-40B4-BE49-F238E27FC236}">
-                <a16:creationId xmlns:a16="http://schemas.microsoft.com/office/drawing/2014/main" id="{3972ACA1-CEE5-085C-2D56-679A1B359204}"/>
+                <a16:creationId xmlns:a16="http://schemas.microsoft.com/office/drawing/2014/main" id="{EA611C01-25AC-8206-6763-D3673604C103}"/>
               </a:ext>
             </a:extLst>
           </p:cNvPr>
@@ -3738,7 +3738,7 @@
           <p:cNvPr id="10" name="TextBox 9">
             <a:extLst>
               <a:ext uri="{FF2B5EF4-FFF2-40B4-BE49-F238E27FC236}">
-                <a16:creationId xmlns:a16="http://schemas.microsoft.com/office/drawing/2014/main" id="{6C5F3304-CA40-AB18-80A7-72C8517FC654}"/>
+                <a16:creationId xmlns:a16="http://schemas.microsoft.com/office/drawing/2014/main" id="{5FBEA0E7-BCDA-C8BB-919F-4A85E5AA2A43}"/>
               </a:ext>
             </a:extLst>
           </p:cNvPr>
@@ -3778,7 +3778,7 @@
           <p:cNvPr id="11" name="Прямоугольник 10">
             <a:extLst>
               <a:ext uri="{FF2B5EF4-FFF2-40B4-BE49-F238E27FC236}">
-                <a16:creationId xmlns:a16="http://schemas.microsoft.com/office/drawing/2014/main" id="{D79496E9-3AD1-2F19-73B0-B583680316DF}"/>
+                <a16:creationId xmlns:a16="http://schemas.microsoft.com/office/drawing/2014/main" id="{D369984A-80F0-003F-57D1-AC635B185B89}"/>
               </a:ext>
             </a:extLst>
           </p:cNvPr>
@@ -3846,7 +3846,7 @@
           <p:cNvPr id="12" name="TextBox 11">
             <a:extLst>
               <a:ext uri="{FF2B5EF4-FFF2-40B4-BE49-F238E27FC236}">
-                <a16:creationId xmlns:a16="http://schemas.microsoft.com/office/drawing/2014/main" id="{207AACF1-3A8C-CA64-49D8-43333A7CA66B}"/>
+                <a16:creationId xmlns:a16="http://schemas.microsoft.com/office/drawing/2014/main" id="{78C0DD7D-CC61-3E7F-2D06-5372546B1B2A}"/>
               </a:ext>
             </a:extLst>
           </p:cNvPr>
@@ -3886,7 +3886,7 @@
           <p:cNvPr id="13" name="TextBox 12">
             <a:extLst>
               <a:ext uri="{FF2B5EF4-FFF2-40B4-BE49-F238E27FC236}">
-                <a16:creationId xmlns:a16="http://schemas.microsoft.com/office/drawing/2014/main" id="{D4A9F410-23FE-C4A9-3EFE-41B8822E95BB}"/>
+                <a16:creationId xmlns:a16="http://schemas.microsoft.com/office/drawing/2014/main" id="{0DAEA3C6-A6D6-6DF7-C053-81C535CFA400}"/>
               </a:ext>
             </a:extLst>
           </p:cNvPr>
@@ -3926,7 +3926,7 @@
           <p:cNvPr id="14" name="TextBox 13">
             <a:extLst>
               <a:ext uri="{FF2B5EF4-FFF2-40B4-BE49-F238E27FC236}">
-                <a16:creationId xmlns:a16="http://schemas.microsoft.com/office/drawing/2014/main" id="{03DE27EA-5918-6E3C-AECE-AB11E5846DD5}"/>
+                <a16:creationId xmlns:a16="http://schemas.microsoft.com/office/drawing/2014/main" id="{E92322D6-133E-9983-B8DC-C5E8212F7C74}"/>
               </a:ext>
             </a:extLst>
           </p:cNvPr>
@@ -3966,7 +3966,7 @@
           <p:cNvPr id="15" name="TextBox 14">
             <a:extLst>
               <a:ext uri="{FF2B5EF4-FFF2-40B4-BE49-F238E27FC236}">
-                <a16:creationId xmlns:a16="http://schemas.microsoft.com/office/drawing/2014/main" id="{022C8824-95A1-14DF-1C96-A7FF7706AE1E}"/>
+                <a16:creationId xmlns:a16="http://schemas.microsoft.com/office/drawing/2014/main" id="{A09171DC-9BBC-FDE3-A864-1BB05BECBDE2}"/>
               </a:ext>
             </a:extLst>
           </p:cNvPr>
@@ -4006,7 +4006,7 @@
           <p:cNvPr id="16" name="TextBox 15">
             <a:extLst>
               <a:ext uri="{FF2B5EF4-FFF2-40B4-BE49-F238E27FC236}">
-                <a16:creationId xmlns:a16="http://schemas.microsoft.com/office/drawing/2014/main" id="{1A8F7BF4-8846-01B2-C272-DD2F659C64A5}"/>
+                <a16:creationId xmlns:a16="http://schemas.microsoft.com/office/drawing/2014/main" id="{9A63BE28-6698-ED7E-EA6C-7FE608F6A9C4}"/>
               </a:ext>
             </a:extLst>
           </p:cNvPr>
@@ -4044,7 +4044,7 @@
     </p:spTree>
     <p:extLst>
       <p:ext uri="{BB962C8B-B14F-4D97-AF65-F5344CB8AC3E}">
-        <p14:creationId xmlns:p14="http://schemas.microsoft.com/office/powerpoint/2010/main" val="381591009"/>
+        <p14:creationId xmlns:p14="http://schemas.microsoft.com/office/powerpoint/2010/main" val="2345009303"/>
       </p:ext>
     </p:extLst>
   </p:cSld>
@@ -4076,7 +4076,7 @@
           <p:cNvPr id="2" name="Прямоугольник 1">
             <a:extLst>
               <a:ext uri="{FF2B5EF4-FFF2-40B4-BE49-F238E27FC236}">
-                <a16:creationId xmlns:a16="http://schemas.microsoft.com/office/drawing/2014/main" id="{3481F0FF-2BEC-533A-EC84-3B7A4AACA9F8}"/>
+                <a16:creationId xmlns:a16="http://schemas.microsoft.com/office/drawing/2014/main" id="{9025D756-D09E-FDE4-3394-998240461C00}"/>
               </a:ext>
             </a:extLst>
           </p:cNvPr>
@@ -4144,7 +4144,7 @@
           <p:cNvPr id="3" name="Прямоугольник 2">
             <a:extLst>
               <a:ext uri="{FF2B5EF4-FFF2-40B4-BE49-F238E27FC236}">
-                <a16:creationId xmlns:a16="http://schemas.microsoft.com/office/drawing/2014/main" id="{1ACC31D2-AC1B-FC3D-356D-50528D20D245}"/>
+                <a16:creationId xmlns:a16="http://schemas.microsoft.com/office/drawing/2014/main" id="{47DBAFDF-499D-69EA-58F7-BBA9CEA3AF1C}"/>
               </a:ext>
             </a:extLst>
           </p:cNvPr>
@@ -4212,7 +4212,7 @@
           <p:cNvPr id="4" name="TextBox 3">
             <a:extLst>
               <a:ext uri="{FF2B5EF4-FFF2-40B4-BE49-F238E27FC236}">
-                <a16:creationId xmlns:a16="http://schemas.microsoft.com/office/drawing/2014/main" id="{B1D41CB3-43D0-09A7-F40E-FF2F35039864}"/>
+                <a16:creationId xmlns:a16="http://schemas.microsoft.com/office/drawing/2014/main" id="{639EACCE-9D02-D4AE-AB32-12BB1B93237C}"/>
               </a:ext>
             </a:extLst>
           </p:cNvPr>
@@ -4242,7 +4242,7 @@
                 </a:solidFill>
                 <a:latin typeface="Times New Roman" panose="02020603050405020304" pitchFamily="18" charset="0"/>
               </a:rPr>
-              <a:t>Цель дипломного проекта</a:t>
+              <a:t>Цель проектной работы</a:t>
             </a:r>
           </a:p>
         </p:txBody>
@@ -4252,7 +4252,7 @@
           <p:cNvPr id="5" name="TextBox 4">
             <a:extLst>
               <a:ext uri="{FF2B5EF4-FFF2-40B4-BE49-F238E27FC236}">
-                <a16:creationId xmlns:a16="http://schemas.microsoft.com/office/drawing/2014/main" id="{0BA5A3C2-52B4-D7A2-A860-3485AEEFF9D5}"/>
+                <a16:creationId xmlns:a16="http://schemas.microsoft.com/office/drawing/2014/main" id="{7351FF4C-4982-57C1-3611-BCDD7CB6BBD3}"/>
               </a:ext>
             </a:extLst>
           </p:cNvPr>
@@ -4293,7 +4293,7 @@
           <p:cNvPr id="6" name="Прямоугольник 5">
             <a:extLst>
               <a:ext uri="{FF2B5EF4-FFF2-40B4-BE49-F238E27FC236}">
-                <a16:creationId xmlns:a16="http://schemas.microsoft.com/office/drawing/2014/main" id="{F60A285E-40B5-6FB3-9002-54D2656C12D8}"/>
+                <a16:creationId xmlns:a16="http://schemas.microsoft.com/office/drawing/2014/main" id="{03935DDC-A328-AE3B-11B1-7BC8C0A420B3}"/>
               </a:ext>
             </a:extLst>
           </p:cNvPr>
@@ -4361,7 +4361,7 @@
           <p:cNvPr id="7" name="Прямоугольник 6">
             <a:extLst>
               <a:ext uri="{FF2B5EF4-FFF2-40B4-BE49-F238E27FC236}">
-                <a16:creationId xmlns:a16="http://schemas.microsoft.com/office/drawing/2014/main" id="{A2B01AB7-A1BA-6D20-CAAD-52BD1B910246}"/>
+                <a16:creationId xmlns:a16="http://schemas.microsoft.com/office/drawing/2014/main" id="{7662249E-9EE4-B4DA-C8C3-E8BE86D5FB5D}"/>
               </a:ext>
             </a:extLst>
           </p:cNvPr>
@@ -4429,7 +4429,7 @@
           <p:cNvPr id="8" name="TextBox 7">
             <a:extLst>
               <a:ext uri="{FF2B5EF4-FFF2-40B4-BE49-F238E27FC236}">
-                <a16:creationId xmlns:a16="http://schemas.microsoft.com/office/drawing/2014/main" id="{50873488-7237-1D30-33C1-377072C25C22}"/>
+                <a16:creationId xmlns:a16="http://schemas.microsoft.com/office/drawing/2014/main" id="{0433CC08-8BB6-4B1E-1B1F-C6D643C33DA6}"/>
               </a:ext>
             </a:extLst>
           </p:cNvPr>
@@ -4469,7 +4469,7 @@
           <p:cNvPr id="9" name="TextBox 8">
             <a:extLst>
               <a:ext uri="{FF2B5EF4-FFF2-40B4-BE49-F238E27FC236}">
-                <a16:creationId xmlns:a16="http://schemas.microsoft.com/office/drawing/2014/main" id="{A2E05881-AE48-3153-941B-4383AA750550}"/>
+                <a16:creationId xmlns:a16="http://schemas.microsoft.com/office/drawing/2014/main" id="{1556904F-0D4A-91C4-7E27-D828E4094619}"/>
               </a:ext>
             </a:extLst>
           </p:cNvPr>
@@ -4588,7 +4588,7 @@
     </p:spTree>
     <p:extLst>
       <p:ext uri="{BB962C8B-B14F-4D97-AF65-F5344CB8AC3E}">
-        <p14:creationId xmlns:p14="http://schemas.microsoft.com/office/powerpoint/2010/main" val="3687563798"/>
+        <p14:creationId xmlns:p14="http://schemas.microsoft.com/office/powerpoint/2010/main" val="2926344490"/>
       </p:ext>
     </p:extLst>
   </p:cSld>
@@ -4620,7 +4620,7 @@
           <p:cNvPr id="2" name="Прямоугольник 1">
             <a:extLst>
               <a:ext uri="{FF2B5EF4-FFF2-40B4-BE49-F238E27FC236}">
-                <a16:creationId xmlns:a16="http://schemas.microsoft.com/office/drawing/2014/main" id="{C31D31A3-7CA9-586D-29AC-5B7A182FE2A7}"/>
+                <a16:creationId xmlns:a16="http://schemas.microsoft.com/office/drawing/2014/main" id="{DEFACFBE-7820-E91F-89F7-79F60191A5D1}"/>
               </a:ext>
             </a:extLst>
           </p:cNvPr>
@@ -4688,7 +4688,7 @@
           <p:cNvPr id="3" name="Прямоугольник 2">
             <a:extLst>
               <a:ext uri="{FF2B5EF4-FFF2-40B4-BE49-F238E27FC236}">
-                <a16:creationId xmlns:a16="http://schemas.microsoft.com/office/drawing/2014/main" id="{5E772B6C-98BC-92DF-0A65-01A999EF4FAA}"/>
+                <a16:creationId xmlns:a16="http://schemas.microsoft.com/office/drawing/2014/main" id="{D352A56C-1682-811C-448E-986406ADF70D}"/>
               </a:ext>
             </a:extLst>
           </p:cNvPr>
@@ -4756,7 +4756,7 @@
           <p:cNvPr id="4" name="TextBox 3">
             <a:extLst>
               <a:ext uri="{FF2B5EF4-FFF2-40B4-BE49-F238E27FC236}">
-                <a16:creationId xmlns:a16="http://schemas.microsoft.com/office/drawing/2014/main" id="{605F279A-7F8B-9A89-BAC7-C4812C46D650}"/>
+                <a16:creationId xmlns:a16="http://schemas.microsoft.com/office/drawing/2014/main" id="{4C776B28-89E0-20D4-DBC7-2F3EF27C89B5}"/>
               </a:ext>
             </a:extLst>
           </p:cNvPr>
@@ -4786,7 +4786,7 @@
                 </a:solidFill>
                 <a:latin typeface="Times New Roman" panose="02020603050405020304" pitchFamily="18" charset="0"/>
               </a:rPr>
-              <a:t>Задачи дипломного проекта</a:t>
+              <a:t>Задачи проектной работы</a:t>
             </a:r>
           </a:p>
         </p:txBody>
@@ -4796,7 +4796,7 @@
           <p:cNvPr id="5" name="TextBox 4">
             <a:extLst>
               <a:ext uri="{FF2B5EF4-FFF2-40B4-BE49-F238E27FC236}">
-                <a16:creationId xmlns:a16="http://schemas.microsoft.com/office/drawing/2014/main" id="{CA650F2A-041E-BCCC-1CF0-EF1653810741}"/>
+                <a16:creationId xmlns:a16="http://schemas.microsoft.com/office/drawing/2014/main" id="{5E8D4338-1306-75A3-3909-624BAE840156}"/>
               </a:ext>
             </a:extLst>
           </p:cNvPr>
@@ -4837,7 +4837,7 @@
           <p:cNvPr id="6" name="Прямоугольник 5">
             <a:extLst>
               <a:ext uri="{FF2B5EF4-FFF2-40B4-BE49-F238E27FC236}">
-                <a16:creationId xmlns:a16="http://schemas.microsoft.com/office/drawing/2014/main" id="{5C7425B8-AB89-DA0A-A65B-2282D4E7CF10}"/>
+                <a16:creationId xmlns:a16="http://schemas.microsoft.com/office/drawing/2014/main" id="{B9E373EB-F229-B662-C1F4-E0595FD43DD7}"/>
               </a:ext>
             </a:extLst>
           </p:cNvPr>
@@ -4905,7 +4905,7 @@
           <p:cNvPr id="7" name="TextBox 6">
             <a:extLst>
               <a:ext uri="{FF2B5EF4-FFF2-40B4-BE49-F238E27FC236}">
-                <a16:creationId xmlns:a16="http://schemas.microsoft.com/office/drawing/2014/main" id="{A37631B7-7B1C-6650-6170-E59325444831}"/>
+                <a16:creationId xmlns:a16="http://schemas.microsoft.com/office/drawing/2014/main" id="{949FC3F9-BE2D-7B49-24D2-7B91A8D659D5}"/>
               </a:ext>
             </a:extLst>
           </p:cNvPr>
@@ -4978,7 +4978,7 @@
           <p:cNvPr id="8" name="TextBox 7">
             <a:extLst>
               <a:ext uri="{FF2B5EF4-FFF2-40B4-BE49-F238E27FC236}">
-                <a16:creationId xmlns:a16="http://schemas.microsoft.com/office/drawing/2014/main" id="{960E7805-8753-544A-C1F6-FB4E1F77641F}"/>
+                <a16:creationId xmlns:a16="http://schemas.microsoft.com/office/drawing/2014/main" id="{3ECCA247-1C08-B566-FBEB-69FEC2002EDA}"/>
               </a:ext>
             </a:extLst>
           </p:cNvPr>
@@ -5049,7 +5049,7 @@
     </p:spTree>
     <p:extLst>
       <p:ext uri="{BB962C8B-B14F-4D97-AF65-F5344CB8AC3E}">
-        <p14:creationId xmlns:p14="http://schemas.microsoft.com/office/powerpoint/2010/main" val="1384912300"/>
+        <p14:creationId xmlns:p14="http://schemas.microsoft.com/office/powerpoint/2010/main" val="1010041892"/>
       </p:ext>
     </p:extLst>
   </p:cSld>
@@ -5081,7 +5081,7 @@
           <p:cNvPr id="2" name="Прямоугольник 1">
             <a:extLst>
               <a:ext uri="{FF2B5EF4-FFF2-40B4-BE49-F238E27FC236}">
-                <a16:creationId xmlns:a16="http://schemas.microsoft.com/office/drawing/2014/main" id="{B1A8C184-DD6F-22E6-38D9-DE5471BC833D}"/>
+                <a16:creationId xmlns:a16="http://schemas.microsoft.com/office/drawing/2014/main" id="{CFF3ACC9-D5BE-3B76-F8D8-74FFE58179E6}"/>
               </a:ext>
             </a:extLst>
           </p:cNvPr>
@@ -5149,7 +5149,7 @@
           <p:cNvPr id="3" name="Прямоугольник 2">
             <a:extLst>
               <a:ext uri="{FF2B5EF4-FFF2-40B4-BE49-F238E27FC236}">
-                <a16:creationId xmlns:a16="http://schemas.microsoft.com/office/drawing/2014/main" id="{5AD96970-1116-3B18-6455-C473F8A6C294}"/>
+                <a16:creationId xmlns:a16="http://schemas.microsoft.com/office/drawing/2014/main" id="{762A1876-D1CF-C150-3160-E16682096343}"/>
               </a:ext>
             </a:extLst>
           </p:cNvPr>
@@ -5217,7 +5217,7 @@
           <p:cNvPr id="4" name="TextBox 3">
             <a:extLst>
               <a:ext uri="{FF2B5EF4-FFF2-40B4-BE49-F238E27FC236}">
-                <a16:creationId xmlns:a16="http://schemas.microsoft.com/office/drawing/2014/main" id="{A79B4F06-D787-957A-BBFC-9B4695254512}"/>
+                <a16:creationId xmlns:a16="http://schemas.microsoft.com/office/drawing/2014/main" id="{8C610407-CE7A-974A-9CD8-126D33620435}"/>
               </a:ext>
             </a:extLst>
           </p:cNvPr>
@@ -5257,7 +5257,7 @@
           <p:cNvPr id="5" name="TextBox 4">
             <a:extLst>
               <a:ext uri="{FF2B5EF4-FFF2-40B4-BE49-F238E27FC236}">
-                <a16:creationId xmlns:a16="http://schemas.microsoft.com/office/drawing/2014/main" id="{71114DE8-6824-F55D-C270-070E8FFAAB66}"/>
+                <a16:creationId xmlns:a16="http://schemas.microsoft.com/office/drawing/2014/main" id="{7433EB3F-9BBE-5158-675E-A9D4BB163BA8}"/>
               </a:ext>
             </a:extLst>
           </p:cNvPr>
@@ -5298,7 +5298,7 @@
           <p:cNvPr id="6" name="Прямоугольник 5">
             <a:extLst>
               <a:ext uri="{FF2B5EF4-FFF2-40B4-BE49-F238E27FC236}">
-                <a16:creationId xmlns:a16="http://schemas.microsoft.com/office/drawing/2014/main" id="{71ECB7F0-9905-E719-B758-074FDE817AB5}"/>
+                <a16:creationId xmlns:a16="http://schemas.microsoft.com/office/drawing/2014/main" id="{16410237-D517-E22D-ECF2-2B112F1AD632}"/>
               </a:ext>
             </a:extLst>
           </p:cNvPr>
@@ -5366,7 +5366,7 @@
           <p:cNvPr id="7" name="Прямоугольник 6">
             <a:extLst>
               <a:ext uri="{FF2B5EF4-FFF2-40B4-BE49-F238E27FC236}">
-                <a16:creationId xmlns:a16="http://schemas.microsoft.com/office/drawing/2014/main" id="{C63A9614-D5E6-3F76-BFC0-C4398E3E8B52}"/>
+                <a16:creationId xmlns:a16="http://schemas.microsoft.com/office/drawing/2014/main" id="{9B42AB8C-036F-9F69-7693-C1963347886C}"/>
               </a:ext>
             </a:extLst>
           </p:cNvPr>
@@ -5434,7 +5434,7 @@
           <p:cNvPr id="9" name="Рисунок 8">
             <a:extLst>
               <a:ext uri="{FF2B5EF4-FFF2-40B4-BE49-F238E27FC236}">
-                <a16:creationId xmlns:a16="http://schemas.microsoft.com/office/drawing/2014/main" id="{5760C59E-714B-6ECE-A894-CEB62BA79870}"/>
+                <a16:creationId xmlns:a16="http://schemas.microsoft.com/office/drawing/2014/main" id="{D03083C5-29F3-2AB3-F463-463F4309A729}"/>
               </a:ext>
             </a:extLst>
           </p:cNvPr>
@@ -5470,7 +5470,7 @@
           <p:cNvPr id="10" name="TextBox 9">
             <a:extLst>
               <a:ext uri="{FF2B5EF4-FFF2-40B4-BE49-F238E27FC236}">
-                <a16:creationId xmlns:a16="http://schemas.microsoft.com/office/drawing/2014/main" id="{FBC150D3-41CA-0748-FA65-51589BEC785E}"/>
+                <a16:creationId xmlns:a16="http://schemas.microsoft.com/office/drawing/2014/main" id="{A7FC697D-085E-C113-385C-47147AF4E46A}"/>
               </a:ext>
             </a:extLst>
           </p:cNvPr>
@@ -5516,7 +5516,7 @@
           <p:cNvPr id="11" name="TextBox 10">
             <a:extLst>
               <a:ext uri="{FF2B5EF4-FFF2-40B4-BE49-F238E27FC236}">
-                <a16:creationId xmlns:a16="http://schemas.microsoft.com/office/drawing/2014/main" id="{2B42C477-4D0B-5EA0-BAD4-42C26720C00F}"/>
+                <a16:creationId xmlns:a16="http://schemas.microsoft.com/office/drawing/2014/main" id="{210BBF54-FED8-E255-E0DB-B7CEFE4D2927}"/>
               </a:ext>
             </a:extLst>
           </p:cNvPr>
@@ -5556,7 +5556,7 @@
           <p:cNvPr id="12" name="Прямоугольник 11">
             <a:extLst>
               <a:ext uri="{FF2B5EF4-FFF2-40B4-BE49-F238E27FC236}">
-                <a16:creationId xmlns:a16="http://schemas.microsoft.com/office/drawing/2014/main" id="{F21BB3E0-66F7-9697-659F-89F1FB7B67B4}"/>
+                <a16:creationId xmlns:a16="http://schemas.microsoft.com/office/drawing/2014/main" id="{6060DB9F-28E3-370A-0CD4-E6462C117B29}"/>
               </a:ext>
             </a:extLst>
           </p:cNvPr>
@@ -5624,7 +5624,7 @@
           <p:cNvPr id="14" name="Рисунок 13">
             <a:extLst>
               <a:ext uri="{FF2B5EF4-FFF2-40B4-BE49-F238E27FC236}">
-                <a16:creationId xmlns:a16="http://schemas.microsoft.com/office/drawing/2014/main" id="{4089D3C1-5E13-1B5E-2E51-97C2B3367917}"/>
+                <a16:creationId xmlns:a16="http://schemas.microsoft.com/office/drawing/2014/main" id="{C74A58D2-BCB6-A751-E3F2-9A2AAF087818}"/>
               </a:ext>
             </a:extLst>
           </p:cNvPr>
@@ -5660,7 +5660,7 @@
           <p:cNvPr id="15" name="TextBox 14">
             <a:extLst>
               <a:ext uri="{FF2B5EF4-FFF2-40B4-BE49-F238E27FC236}">
-                <a16:creationId xmlns:a16="http://schemas.microsoft.com/office/drawing/2014/main" id="{85EA3057-645C-DFE8-33C0-88DB5DD43B7A}"/>
+                <a16:creationId xmlns:a16="http://schemas.microsoft.com/office/drawing/2014/main" id="{2D0B04A6-463B-9594-8335-1265CA6BC5CB}"/>
               </a:ext>
             </a:extLst>
           </p:cNvPr>
@@ -5706,7 +5706,7 @@
           <p:cNvPr id="16" name="TextBox 15">
             <a:extLst>
               <a:ext uri="{FF2B5EF4-FFF2-40B4-BE49-F238E27FC236}">
-                <a16:creationId xmlns:a16="http://schemas.microsoft.com/office/drawing/2014/main" id="{E20364DE-0030-626B-AC6D-65A6A6BB8340}"/>
+                <a16:creationId xmlns:a16="http://schemas.microsoft.com/office/drawing/2014/main" id="{C2D2A94D-CF3A-3FC6-96D9-D847F5E598C7}"/>
               </a:ext>
             </a:extLst>
           </p:cNvPr>
@@ -5746,7 +5746,7 @@
           <p:cNvPr id="17" name="Прямоугольник 16">
             <a:extLst>
               <a:ext uri="{FF2B5EF4-FFF2-40B4-BE49-F238E27FC236}">
-                <a16:creationId xmlns:a16="http://schemas.microsoft.com/office/drawing/2014/main" id="{FC5CEA66-A611-9843-85F8-E2BD0B751289}"/>
+                <a16:creationId xmlns:a16="http://schemas.microsoft.com/office/drawing/2014/main" id="{0FE6976D-935B-FC60-04C9-3ADBA139DB3A}"/>
               </a:ext>
             </a:extLst>
           </p:cNvPr>
@@ -5814,7 +5814,7 @@
           <p:cNvPr id="19" name="Рисунок 18">
             <a:extLst>
               <a:ext uri="{FF2B5EF4-FFF2-40B4-BE49-F238E27FC236}">
-                <a16:creationId xmlns:a16="http://schemas.microsoft.com/office/drawing/2014/main" id="{29A78B51-8D79-3243-29F7-3E97417BD369}"/>
+                <a16:creationId xmlns:a16="http://schemas.microsoft.com/office/drawing/2014/main" id="{7669A38B-8DD2-2FFE-7D08-F6646F99E614}"/>
               </a:ext>
             </a:extLst>
           </p:cNvPr>
@@ -5850,7 +5850,7 @@
           <p:cNvPr id="20" name="TextBox 19">
             <a:extLst>
               <a:ext uri="{FF2B5EF4-FFF2-40B4-BE49-F238E27FC236}">
-                <a16:creationId xmlns:a16="http://schemas.microsoft.com/office/drawing/2014/main" id="{2F3D1CE2-A030-4968-8F99-78E8447C12E6}"/>
+                <a16:creationId xmlns:a16="http://schemas.microsoft.com/office/drawing/2014/main" id="{2A01EC5C-9C92-3F5D-948C-049B1C63F6C4}"/>
               </a:ext>
             </a:extLst>
           </p:cNvPr>
@@ -5896,7 +5896,7 @@
           <p:cNvPr id="21" name="TextBox 20">
             <a:extLst>
               <a:ext uri="{FF2B5EF4-FFF2-40B4-BE49-F238E27FC236}">
-                <a16:creationId xmlns:a16="http://schemas.microsoft.com/office/drawing/2014/main" id="{B41D3C66-405B-812E-6978-58A1F89AD39B}"/>
+                <a16:creationId xmlns:a16="http://schemas.microsoft.com/office/drawing/2014/main" id="{FFF3CE37-F8E4-44DD-4618-D4FAFD82A489}"/>
               </a:ext>
             </a:extLst>
           </p:cNvPr>
@@ -5936,7 +5936,7 @@
           <p:cNvPr id="22" name="Прямоугольник 21">
             <a:extLst>
               <a:ext uri="{FF2B5EF4-FFF2-40B4-BE49-F238E27FC236}">
-                <a16:creationId xmlns:a16="http://schemas.microsoft.com/office/drawing/2014/main" id="{4829F9D1-285F-CD8F-7993-037A294AA5F2}"/>
+                <a16:creationId xmlns:a16="http://schemas.microsoft.com/office/drawing/2014/main" id="{AA15922F-C407-7B00-83E5-E6C6BD200899}"/>
               </a:ext>
             </a:extLst>
           </p:cNvPr>
@@ -6004,7 +6004,7 @@
           <p:cNvPr id="24" name="Рисунок 23">
             <a:extLst>
               <a:ext uri="{FF2B5EF4-FFF2-40B4-BE49-F238E27FC236}">
-                <a16:creationId xmlns:a16="http://schemas.microsoft.com/office/drawing/2014/main" id="{785364BA-444F-467E-2322-CBCF41B41CFB}"/>
+                <a16:creationId xmlns:a16="http://schemas.microsoft.com/office/drawing/2014/main" id="{7DD167BC-759F-7D30-8564-2FC235CF0364}"/>
               </a:ext>
             </a:extLst>
           </p:cNvPr>
@@ -6040,7 +6040,7 @@
           <p:cNvPr id="25" name="TextBox 24">
             <a:extLst>
               <a:ext uri="{FF2B5EF4-FFF2-40B4-BE49-F238E27FC236}">
-                <a16:creationId xmlns:a16="http://schemas.microsoft.com/office/drawing/2014/main" id="{69881A69-37F8-19B3-5352-610ECA4220ED}"/>
+                <a16:creationId xmlns:a16="http://schemas.microsoft.com/office/drawing/2014/main" id="{179CC744-6FBD-B8B9-9183-A254B0B5F55C}"/>
               </a:ext>
             </a:extLst>
           </p:cNvPr>
@@ -6089,7 +6089,7 @@
           <p:cNvPr id="26" name="TextBox 25">
             <a:extLst>
               <a:ext uri="{FF2B5EF4-FFF2-40B4-BE49-F238E27FC236}">
-                <a16:creationId xmlns:a16="http://schemas.microsoft.com/office/drawing/2014/main" id="{5E82822C-6CFE-1547-D084-B74687EB541C}"/>
+                <a16:creationId xmlns:a16="http://schemas.microsoft.com/office/drawing/2014/main" id="{0C331249-9AD3-E8F1-19DE-378B995FDEE5}"/>
               </a:ext>
             </a:extLst>
           </p:cNvPr>
@@ -6129,7 +6129,7 @@
           <p:cNvPr id="27" name="TextBox 26">
             <a:extLst>
               <a:ext uri="{FF2B5EF4-FFF2-40B4-BE49-F238E27FC236}">
-                <a16:creationId xmlns:a16="http://schemas.microsoft.com/office/drawing/2014/main" id="{83697D2B-1DA4-FF74-0D75-031BA1E5CE68}"/>
+                <a16:creationId xmlns:a16="http://schemas.microsoft.com/office/drawing/2014/main" id="{26F01BD3-7D73-436F-9B01-620D2C92D5D1}"/>
               </a:ext>
             </a:extLst>
           </p:cNvPr>
@@ -6167,7 +6167,7 @@
     </p:spTree>
     <p:extLst>
       <p:ext uri="{BB962C8B-B14F-4D97-AF65-F5344CB8AC3E}">
-        <p14:creationId xmlns:p14="http://schemas.microsoft.com/office/powerpoint/2010/main" val="4114094706"/>
+        <p14:creationId xmlns:p14="http://schemas.microsoft.com/office/powerpoint/2010/main" val="4164350414"/>
       </p:ext>
     </p:extLst>
   </p:cSld>
@@ -6199,7 +6199,7 @@
           <p:cNvPr id="2" name="Прямоугольник 1">
             <a:extLst>
               <a:ext uri="{FF2B5EF4-FFF2-40B4-BE49-F238E27FC236}">
-                <a16:creationId xmlns:a16="http://schemas.microsoft.com/office/drawing/2014/main" id="{DD34D75A-63B9-3874-5BB0-F53676D6209D}"/>
+                <a16:creationId xmlns:a16="http://schemas.microsoft.com/office/drawing/2014/main" id="{7EC8E9E9-A870-59C9-9455-8B3513A327B5}"/>
               </a:ext>
             </a:extLst>
           </p:cNvPr>
@@ -6267,7 +6267,7 @@
           <p:cNvPr id="3" name="Прямоугольник 2">
             <a:extLst>
               <a:ext uri="{FF2B5EF4-FFF2-40B4-BE49-F238E27FC236}">
-                <a16:creationId xmlns:a16="http://schemas.microsoft.com/office/drawing/2014/main" id="{936A1719-318E-4ED9-6E3D-A0341C39DE66}"/>
+                <a16:creationId xmlns:a16="http://schemas.microsoft.com/office/drawing/2014/main" id="{17FD1556-506F-1DE1-0702-7F19BB049934}"/>
               </a:ext>
             </a:extLst>
           </p:cNvPr>
@@ -6335,7 +6335,7 @@
           <p:cNvPr id="4" name="TextBox 3">
             <a:extLst>
               <a:ext uri="{FF2B5EF4-FFF2-40B4-BE49-F238E27FC236}">
-                <a16:creationId xmlns:a16="http://schemas.microsoft.com/office/drawing/2014/main" id="{604C689D-3409-B104-A5B1-79C48866F470}"/>
+                <a16:creationId xmlns:a16="http://schemas.microsoft.com/office/drawing/2014/main" id="{71AD4FB6-1043-BC28-F66E-AFB08CAE868B}"/>
               </a:ext>
             </a:extLst>
           </p:cNvPr>
@@ -6375,7 +6375,7 @@
           <p:cNvPr id="5" name="TextBox 4">
             <a:extLst>
               <a:ext uri="{FF2B5EF4-FFF2-40B4-BE49-F238E27FC236}">
-                <a16:creationId xmlns:a16="http://schemas.microsoft.com/office/drawing/2014/main" id="{5630FD79-0001-8558-DDBF-943CC18BA755}"/>
+                <a16:creationId xmlns:a16="http://schemas.microsoft.com/office/drawing/2014/main" id="{3D5E54C6-6194-9279-5F67-2199DBD268E2}"/>
               </a:ext>
             </a:extLst>
           </p:cNvPr>
@@ -6416,7 +6416,7 @@
           <p:cNvPr id="6" name="Прямоугольник 5">
             <a:extLst>
               <a:ext uri="{FF2B5EF4-FFF2-40B4-BE49-F238E27FC236}">
-                <a16:creationId xmlns:a16="http://schemas.microsoft.com/office/drawing/2014/main" id="{0661FD05-1403-0852-7343-FAF98F52C842}"/>
+                <a16:creationId xmlns:a16="http://schemas.microsoft.com/office/drawing/2014/main" id="{6D079604-5B41-1829-8319-5EB9CEC284D0}"/>
               </a:ext>
             </a:extLst>
           </p:cNvPr>
@@ -6484,7 +6484,7 @@
           <p:cNvPr id="8" name="Рисунок 7">
             <a:extLst>
               <a:ext uri="{FF2B5EF4-FFF2-40B4-BE49-F238E27FC236}">
-                <a16:creationId xmlns:a16="http://schemas.microsoft.com/office/drawing/2014/main" id="{EDE87226-3D1E-5215-570D-72C497F8CBA1}"/>
+                <a16:creationId xmlns:a16="http://schemas.microsoft.com/office/drawing/2014/main" id="{9C350DC1-A499-4CD2-6008-4B10C5D45505}"/>
               </a:ext>
             </a:extLst>
           </p:cNvPr>
@@ -6520,7 +6520,7 @@
           <p:cNvPr id="9" name="TextBox 8">
             <a:extLst>
               <a:ext uri="{FF2B5EF4-FFF2-40B4-BE49-F238E27FC236}">
-                <a16:creationId xmlns:a16="http://schemas.microsoft.com/office/drawing/2014/main" id="{593F09DB-993D-C441-41CD-90DD92A16B6D}"/>
+                <a16:creationId xmlns:a16="http://schemas.microsoft.com/office/drawing/2014/main" id="{26BD10FB-E4F3-DC85-3568-D4BC41280D12}"/>
               </a:ext>
             </a:extLst>
           </p:cNvPr>
@@ -6639,7 +6639,7 @@
     </p:spTree>
     <p:extLst>
       <p:ext uri="{BB962C8B-B14F-4D97-AF65-F5344CB8AC3E}">
-        <p14:creationId xmlns:p14="http://schemas.microsoft.com/office/powerpoint/2010/main" val="1032310480"/>
+        <p14:creationId xmlns:p14="http://schemas.microsoft.com/office/powerpoint/2010/main" val="3071428913"/>
       </p:ext>
     </p:extLst>
   </p:cSld>
@@ -6671,7 +6671,7 @@
           <p:cNvPr id="2" name="Прямоугольник 1">
             <a:extLst>
               <a:ext uri="{FF2B5EF4-FFF2-40B4-BE49-F238E27FC236}">
-                <a16:creationId xmlns:a16="http://schemas.microsoft.com/office/drawing/2014/main" id="{603DAB82-2E62-6CF8-433F-9ED7A14E9CDB}"/>
+                <a16:creationId xmlns:a16="http://schemas.microsoft.com/office/drawing/2014/main" id="{FFF6A7B4-F618-65D1-5EFF-426E9A564930}"/>
               </a:ext>
             </a:extLst>
           </p:cNvPr>
@@ -6739,7 +6739,7 @@
           <p:cNvPr id="3" name="Прямоугольник 2">
             <a:extLst>
               <a:ext uri="{FF2B5EF4-FFF2-40B4-BE49-F238E27FC236}">
-                <a16:creationId xmlns:a16="http://schemas.microsoft.com/office/drawing/2014/main" id="{C33DC4C9-5194-A569-0AAC-D977BEC709FB}"/>
+                <a16:creationId xmlns:a16="http://schemas.microsoft.com/office/drawing/2014/main" id="{8642F0A9-A0D0-97F2-398E-00BD92E9A3BE}"/>
               </a:ext>
             </a:extLst>
           </p:cNvPr>
@@ -6807,7 +6807,7 @@
           <p:cNvPr id="4" name="TextBox 3">
             <a:extLst>
               <a:ext uri="{FF2B5EF4-FFF2-40B4-BE49-F238E27FC236}">
-                <a16:creationId xmlns:a16="http://schemas.microsoft.com/office/drawing/2014/main" id="{4A769DA6-BDF9-DFC0-2D2C-082F51AB49D6}"/>
+                <a16:creationId xmlns:a16="http://schemas.microsoft.com/office/drawing/2014/main" id="{816B0773-41FE-ED4F-AFF4-70218DB123F2}"/>
               </a:ext>
             </a:extLst>
           </p:cNvPr>
@@ -6847,7 +6847,7 @@
           <p:cNvPr id="5" name="TextBox 4">
             <a:extLst>
               <a:ext uri="{FF2B5EF4-FFF2-40B4-BE49-F238E27FC236}">
-                <a16:creationId xmlns:a16="http://schemas.microsoft.com/office/drawing/2014/main" id="{ACC38438-D600-1B57-1740-3596565E0AA7}"/>
+                <a16:creationId xmlns:a16="http://schemas.microsoft.com/office/drawing/2014/main" id="{4CF71B28-AAA7-76CB-D502-BCCEF4014525}"/>
               </a:ext>
             </a:extLst>
           </p:cNvPr>
@@ -6888,7 +6888,7 @@
           <p:cNvPr id="6" name="Прямоугольник 5">
             <a:extLst>
               <a:ext uri="{FF2B5EF4-FFF2-40B4-BE49-F238E27FC236}">
-                <a16:creationId xmlns:a16="http://schemas.microsoft.com/office/drawing/2014/main" id="{6C7DCC59-30B5-A905-B9BB-658FC01060BA}"/>
+                <a16:creationId xmlns:a16="http://schemas.microsoft.com/office/drawing/2014/main" id="{CD742544-BE93-FE7B-9B58-07EEE4272395}"/>
               </a:ext>
             </a:extLst>
           </p:cNvPr>
@@ -6956,7 +6956,7 @@
           <p:cNvPr id="7" name="Таблица 6">
             <a:extLst>
               <a:ext uri="{FF2B5EF4-FFF2-40B4-BE49-F238E27FC236}">
-                <a16:creationId xmlns:a16="http://schemas.microsoft.com/office/drawing/2014/main" id="{0E12597E-6B4D-283D-4F54-4C4C4C04C520}"/>
+                <a16:creationId xmlns:a16="http://schemas.microsoft.com/office/drawing/2014/main" id="{0F1DB994-2D38-144A-7EA6-A880646BB5D4}"/>
               </a:ext>
             </a:extLst>
           </p:cNvPr>
@@ -6966,7 +6966,7 @@
           <p:nvPr>
             <p:extLst>
               <p:ext uri="{D42A27DB-BD31-4B8C-83A1-F6EECF244321}">
-                <p14:modId xmlns:p14="http://schemas.microsoft.com/office/powerpoint/2010/main" val="2886552294"/>
+                <p14:modId xmlns:p14="http://schemas.microsoft.com/office/powerpoint/2010/main" val="3227317098"/>
               </p:ext>
             </p:extLst>
           </p:nvPr>
@@ -6985,21 +6985,21 @@
                 <a:gridCol w="2413000">
                   <a:extLst>
                     <a:ext uri="{9D8B030D-6E8A-4147-A177-3AD203B41FA5}">
-                      <a16:colId xmlns:a16="http://schemas.microsoft.com/office/drawing/2014/main" val="3892622694"/>
+                      <a16:colId xmlns:a16="http://schemas.microsoft.com/office/drawing/2014/main" val="2317742578"/>
                     </a:ext>
                   </a:extLst>
                 </a:gridCol>
                 <a:gridCol w="5969000">
                   <a:extLst>
                     <a:ext uri="{9D8B030D-6E8A-4147-A177-3AD203B41FA5}">
-                      <a16:colId xmlns:a16="http://schemas.microsoft.com/office/drawing/2014/main" val="3483785350"/>
+                      <a16:colId xmlns:a16="http://schemas.microsoft.com/office/drawing/2014/main" val="1100241438"/>
                     </a:ext>
                   </a:extLst>
                 </a:gridCol>
                 <a:gridCol w="2692400">
                   <a:extLst>
                     <a:ext uri="{9D8B030D-6E8A-4147-A177-3AD203B41FA5}">
-                      <a16:colId xmlns:a16="http://schemas.microsoft.com/office/drawing/2014/main" val="3708601921"/>
+                      <a16:colId xmlns:a16="http://schemas.microsoft.com/office/drawing/2014/main" val="3018517252"/>
                     </a:ext>
                   </a:extLst>
                 </a:gridCol>
@@ -7073,11 +7073,11 @@
                 </a:tc>
                 <a:extLst>
                   <a:ext uri="{0D108BD9-81ED-4DB2-BD59-A6C34878D82A}">
-                    <a16:rowId xmlns:a16="http://schemas.microsoft.com/office/drawing/2014/main" val="479459469"/>
+                    <a16:rowId xmlns:a16="http://schemas.microsoft.com/office/drawing/2014/main" val="1138095165"/>
                   </a:ext>
                 </a:extLst>
               </a:tr>
-              <a:tr h="952500">
+              <a:tr h="736600">
                 <a:tc>
                   <a:txBody>
                     <a:bodyPr/>
@@ -7146,11 +7146,11 @@
                 </a:tc>
                 <a:extLst>
                   <a:ext uri="{0D108BD9-81ED-4DB2-BD59-A6C34878D82A}">
-                    <a16:rowId xmlns:a16="http://schemas.microsoft.com/office/drawing/2014/main" val="4015584526"/>
+                    <a16:rowId xmlns:a16="http://schemas.microsoft.com/office/drawing/2014/main" val="4115492830"/>
                   </a:ext>
                 </a:extLst>
               </a:tr>
-              <a:tr h="952500">
+              <a:tr h="736600">
                 <a:tc>
                   <a:txBody>
                     <a:bodyPr/>
@@ -7219,11 +7219,11 @@
                 </a:tc>
                 <a:extLst>
                   <a:ext uri="{0D108BD9-81ED-4DB2-BD59-A6C34878D82A}">
-                    <a16:rowId xmlns:a16="http://schemas.microsoft.com/office/drawing/2014/main" val="2943345415"/>
+                    <a16:rowId xmlns:a16="http://schemas.microsoft.com/office/drawing/2014/main" val="2142629399"/>
                   </a:ext>
                 </a:extLst>
               </a:tr>
-              <a:tr h="952500">
+              <a:tr h="736600">
                 <a:tc>
                   <a:txBody>
                     <a:bodyPr/>
@@ -7292,7 +7292,7 @@
                 </a:tc>
                 <a:extLst>
                   <a:ext uri="{0D108BD9-81ED-4DB2-BD59-A6C34878D82A}">
-                    <a16:rowId xmlns:a16="http://schemas.microsoft.com/office/drawing/2014/main" val="675788661"/>
+                    <a16:rowId xmlns:a16="http://schemas.microsoft.com/office/drawing/2014/main" val="735535016"/>
                   </a:ext>
                 </a:extLst>
               </a:tr>
@@ -7305,7 +7305,7 @@
           <p:cNvPr id="8" name="TextBox 7">
             <a:extLst>
               <a:ext uri="{FF2B5EF4-FFF2-40B4-BE49-F238E27FC236}">
-                <a16:creationId xmlns:a16="http://schemas.microsoft.com/office/drawing/2014/main" id="{959F291F-2547-A1D6-B9CC-5F0119C9BF72}"/>
+                <a16:creationId xmlns:a16="http://schemas.microsoft.com/office/drawing/2014/main" id="{49B66BE8-ABEC-A571-09ED-5E7DDA9898C7}"/>
               </a:ext>
             </a:extLst>
           </p:cNvPr>
@@ -7314,7 +7314,7 @@
         </p:nvSpPr>
         <p:spPr>
           <a:xfrm>
-            <a:off x="558800" y="5384800"/>
+            <a:off x="558800" y="4445000"/>
             <a:ext cx="11074400" cy="369332"/>
           </a:xfrm>
           <a:prstGeom prst="rect">
@@ -7343,7 +7343,7 @@
     </p:spTree>
     <p:extLst>
       <p:ext uri="{BB962C8B-B14F-4D97-AF65-F5344CB8AC3E}">
-        <p14:creationId xmlns:p14="http://schemas.microsoft.com/office/powerpoint/2010/main" val="4286820359"/>
+        <p14:creationId xmlns:p14="http://schemas.microsoft.com/office/powerpoint/2010/main" val="2689891139"/>
       </p:ext>
     </p:extLst>
   </p:cSld>
@@ -7375,7 +7375,7 @@
           <p:cNvPr id="2" name="Прямоугольник 1">
             <a:extLst>
               <a:ext uri="{FF2B5EF4-FFF2-40B4-BE49-F238E27FC236}">
-                <a16:creationId xmlns:a16="http://schemas.microsoft.com/office/drawing/2014/main" id="{4EB14088-F80C-1339-AACE-E6DF503C60DE}"/>
+                <a16:creationId xmlns:a16="http://schemas.microsoft.com/office/drawing/2014/main" id="{691B97DE-EF10-6B0B-1CF7-B054333A07A6}"/>
               </a:ext>
             </a:extLst>
           </p:cNvPr>
@@ -7443,7 +7443,7 @@
           <p:cNvPr id="3" name="Прямоугольник 2">
             <a:extLst>
               <a:ext uri="{FF2B5EF4-FFF2-40B4-BE49-F238E27FC236}">
-                <a16:creationId xmlns:a16="http://schemas.microsoft.com/office/drawing/2014/main" id="{2ABF7CD1-BD89-1E84-2DEC-D38822BE10BC}"/>
+                <a16:creationId xmlns:a16="http://schemas.microsoft.com/office/drawing/2014/main" id="{CCBDBD58-6299-FA3A-2940-CCA9D8BBA4D4}"/>
               </a:ext>
             </a:extLst>
           </p:cNvPr>
@@ -7511,7 +7511,7 @@
           <p:cNvPr id="4" name="TextBox 3">
             <a:extLst>
               <a:ext uri="{FF2B5EF4-FFF2-40B4-BE49-F238E27FC236}">
-                <a16:creationId xmlns:a16="http://schemas.microsoft.com/office/drawing/2014/main" id="{33AA2F99-B76F-128F-3B67-66E4C8296473}"/>
+                <a16:creationId xmlns:a16="http://schemas.microsoft.com/office/drawing/2014/main" id="{FF9ED6CF-1AE0-885E-B933-EA2BF46C46A7}"/>
               </a:ext>
             </a:extLst>
           </p:cNvPr>
@@ -7551,7 +7551,7 @@
           <p:cNvPr id="5" name="TextBox 4">
             <a:extLst>
               <a:ext uri="{FF2B5EF4-FFF2-40B4-BE49-F238E27FC236}">
-                <a16:creationId xmlns:a16="http://schemas.microsoft.com/office/drawing/2014/main" id="{C97A5704-3FA6-D698-BA6D-5526DE85CC42}"/>
+                <a16:creationId xmlns:a16="http://schemas.microsoft.com/office/drawing/2014/main" id="{C33FCDC6-C946-710D-F875-55ADB5D142FD}"/>
               </a:ext>
             </a:extLst>
           </p:cNvPr>
@@ -7592,7 +7592,7 @@
           <p:cNvPr id="6" name="Прямоугольник 5">
             <a:extLst>
               <a:ext uri="{FF2B5EF4-FFF2-40B4-BE49-F238E27FC236}">
-                <a16:creationId xmlns:a16="http://schemas.microsoft.com/office/drawing/2014/main" id="{AA1602F4-D7C3-1BA3-4E56-88DD29296DA5}"/>
+                <a16:creationId xmlns:a16="http://schemas.microsoft.com/office/drawing/2014/main" id="{8E334093-1FF3-12EB-59D5-47768FA09CDB}"/>
               </a:ext>
             </a:extLst>
           </p:cNvPr>
@@ -7660,7 +7660,7 @@
           <p:cNvPr id="7" name="Прямоугольник 6">
             <a:extLst>
               <a:ext uri="{FF2B5EF4-FFF2-40B4-BE49-F238E27FC236}">
-                <a16:creationId xmlns:a16="http://schemas.microsoft.com/office/drawing/2014/main" id="{9CDAF81F-1B0A-727C-A187-CD74D8CD9620}"/>
+                <a16:creationId xmlns:a16="http://schemas.microsoft.com/office/drawing/2014/main" id="{596DCB64-F462-F8BA-D334-15380C894F7B}"/>
               </a:ext>
             </a:extLst>
           </p:cNvPr>
@@ -7728,7 +7728,7 @@
           <p:cNvPr id="8" name="Прямоугольник 7">
             <a:extLst>
               <a:ext uri="{FF2B5EF4-FFF2-40B4-BE49-F238E27FC236}">
-                <a16:creationId xmlns:a16="http://schemas.microsoft.com/office/drawing/2014/main" id="{3933A7DE-F647-0D57-56F8-862C12590C80}"/>
+                <a16:creationId xmlns:a16="http://schemas.microsoft.com/office/drawing/2014/main" id="{A2933615-0709-9455-0F42-2317BA932F85}"/>
               </a:ext>
             </a:extLst>
           </p:cNvPr>
@@ -7796,7 +7796,7 @@
           <p:cNvPr id="9" name="TextBox 8">
             <a:extLst>
               <a:ext uri="{FF2B5EF4-FFF2-40B4-BE49-F238E27FC236}">
-                <a16:creationId xmlns:a16="http://schemas.microsoft.com/office/drawing/2014/main" id="{3B422EF2-11D2-C2ED-42D3-63D102471A1B}"/>
+                <a16:creationId xmlns:a16="http://schemas.microsoft.com/office/drawing/2014/main" id="{7426BB4C-D38B-42DA-B9BC-0F30E2679F3B}"/>
               </a:ext>
             </a:extLst>
           </p:cNvPr>
@@ -7842,7 +7842,7 @@
           <p:cNvPr id="10" name="TextBox 9">
             <a:extLst>
               <a:ext uri="{FF2B5EF4-FFF2-40B4-BE49-F238E27FC236}">
-                <a16:creationId xmlns:a16="http://schemas.microsoft.com/office/drawing/2014/main" id="{15D89F36-7FB1-33A5-5AA6-0E667C04BF2E}"/>
+                <a16:creationId xmlns:a16="http://schemas.microsoft.com/office/drawing/2014/main" id="{AFE18E35-29AD-FCDC-F04C-2C666726B314}"/>
               </a:ext>
             </a:extLst>
           </p:cNvPr>
@@ -7882,7 +7882,7 @@
           <p:cNvPr id="11" name="Прямоугольник 10">
             <a:extLst>
               <a:ext uri="{FF2B5EF4-FFF2-40B4-BE49-F238E27FC236}">
-                <a16:creationId xmlns:a16="http://schemas.microsoft.com/office/drawing/2014/main" id="{C0BD2147-38B1-A19C-3EF9-00F8A3074E32}"/>
+                <a16:creationId xmlns:a16="http://schemas.microsoft.com/office/drawing/2014/main" id="{3193C5B8-5D0E-96CE-6A28-95673AF2825E}"/>
               </a:ext>
             </a:extLst>
           </p:cNvPr>
@@ -7950,7 +7950,7 @@
           <p:cNvPr id="12" name="Прямоугольник 11">
             <a:extLst>
               <a:ext uri="{FF2B5EF4-FFF2-40B4-BE49-F238E27FC236}">
-                <a16:creationId xmlns:a16="http://schemas.microsoft.com/office/drawing/2014/main" id="{22A4E6FC-4A2B-CCED-D18C-357D53D8B4EB}"/>
+                <a16:creationId xmlns:a16="http://schemas.microsoft.com/office/drawing/2014/main" id="{123C0F40-C7B7-BEB1-572E-236A9032645E}"/>
               </a:ext>
             </a:extLst>
           </p:cNvPr>
@@ -8018,7 +8018,7 @@
           <p:cNvPr id="13" name="TextBox 12">
             <a:extLst>
               <a:ext uri="{FF2B5EF4-FFF2-40B4-BE49-F238E27FC236}">
-                <a16:creationId xmlns:a16="http://schemas.microsoft.com/office/drawing/2014/main" id="{30E448DE-EB83-4D6B-F3CE-25B9E78369B0}"/>
+                <a16:creationId xmlns:a16="http://schemas.microsoft.com/office/drawing/2014/main" id="{98D648EB-B702-31C7-9652-1AFEFB3738D5}"/>
               </a:ext>
             </a:extLst>
           </p:cNvPr>
@@ -8064,7 +8064,7 @@
           <p:cNvPr id="14" name="TextBox 13">
             <a:extLst>
               <a:ext uri="{FF2B5EF4-FFF2-40B4-BE49-F238E27FC236}">
-                <a16:creationId xmlns:a16="http://schemas.microsoft.com/office/drawing/2014/main" id="{12F2E7C6-5C9A-3103-6010-E4C9FC1A33C6}"/>
+                <a16:creationId xmlns:a16="http://schemas.microsoft.com/office/drawing/2014/main" id="{5C5769B2-8CE1-712F-00D0-98580C00506A}"/>
               </a:ext>
             </a:extLst>
           </p:cNvPr>
@@ -8104,7 +8104,7 @@
           <p:cNvPr id="15" name="Прямоугольник 14">
             <a:extLst>
               <a:ext uri="{FF2B5EF4-FFF2-40B4-BE49-F238E27FC236}">
-                <a16:creationId xmlns:a16="http://schemas.microsoft.com/office/drawing/2014/main" id="{30CCEE65-F341-0343-1E38-6D2D18947249}"/>
+                <a16:creationId xmlns:a16="http://schemas.microsoft.com/office/drawing/2014/main" id="{C3AE1C0F-C9B5-0BA6-EB69-5DE3DE9C4474}"/>
               </a:ext>
             </a:extLst>
           </p:cNvPr>
@@ -8172,7 +8172,7 @@
           <p:cNvPr id="16" name="Прямоугольник 15">
             <a:extLst>
               <a:ext uri="{FF2B5EF4-FFF2-40B4-BE49-F238E27FC236}">
-                <a16:creationId xmlns:a16="http://schemas.microsoft.com/office/drawing/2014/main" id="{50C8CDA4-4D1A-2354-BAE3-99479F4BA77D}"/>
+                <a16:creationId xmlns:a16="http://schemas.microsoft.com/office/drawing/2014/main" id="{6B52E3E1-4B2E-A2FC-B964-EA87CBF80588}"/>
               </a:ext>
             </a:extLst>
           </p:cNvPr>
@@ -8240,7 +8240,7 @@
           <p:cNvPr id="17" name="TextBox 16">
             <a:extLst>
               <a:ext uri="{FF2B5EF4-FFF2-40B4-BE49-F238E27FC236}">
-                <a16:creationId xmlns:a16="http://schemas.microsoft.com/office/drawing/2014/main" id="{4599B9D5-9354-5920-A78B-E3623ADC8F07}"/>
+                <a16:creationId xmlns:a16="http://schemas.microsoft.com/office/drawing/2014/main" id="{CD26C611-6193-483E-086F-BEF7D76614D9}"/>
               </a:ext>
             </a:extLst>
           </p:cNvPr>
@@ -8286,7 +8286,7 @@
           <p:cNvPr id="18" name="TextBox 17">
             <a:extLst>
               <a:ext uri="{FF2B5EF4-FFF2-40B4-BE49-F238E27FC236}">
-                <a16:creationId xmlns:a16="http://schemas.microsoft.com/office/drawing/2014/main" id="{46273E46-7640-F4BD-7182-877CB36F43C9}"/>
+                <a16:creationId xmlns:a16="http://schemas.microsoft.com/office/drawing/2014/main" id="{80D44DF3-6850-B075-B052-3A62D11FDC4A}"/>
               </a:ext>
             </a:extLst>
           </p:cNvPr>
@@ -8326,7 +8326,7 @@
           <p:cNvPr id="19" name="Прямоугольник 18">
             <a:extLst>
               <a:ext uri="{FF2B5EF4-FFF2-40B4-BE49-F238E27FC236}">
-                <a16:creationId xmlns:a16="http://schemas.microsoft.com/office/drawing/2014/main" id="{06091DEA-22AF-2CE8-996C-FC53E669F0CA}"/>
+                <a16:creationId xmlns:a16="http://schemas.microsoft.com/office/drawing/2014/main" id="{DF0B16E4-EBF0-05B0-BE46-023AA0A7F264}"/>
               </a:ext>
             </a:extLst>
           </p:cNvPr>
@@ -8394,7 +8394,7 @@
           <p:cNvPr id="20" name="Прямоугольник 19">
             <a:extLst>
               <a:ext uri="{FF2B5EF4-FFF2-40B4-BE49-F238E27FC236}">
-                <a16:creationId xmlns:a16="http://schemas.microsoft.com/office/drawing/2014/main" id="{2E3B34AF-5619-31B1-2686-099D93007A55}"/>
+                <a16:creationId xmlns:a16="http://schemas.microsoft.com/office/drawing/2014/main" id="{CCA9B20E-236A-8F50-59F7-8F837A8A226C}"/>
               </a:ext>
             </a:extLst>
           </p:cNvPr>
@@ -8462,7 +8462,7 @@
           <p:cNvPr id="21" name="TextBox 20">
             <a:extLst>
               <a:ext uri="{FF2B5EF4-FFF2-40B4-BE49-F238E27FC236}">
-                <a16:creationId xmlns:a16="http://schemas.microsoft.com/office/drawing/2014/main" id="{D6817CBC-2EE2-7B22-6AC6-97A148D87CE8}"/>
+                <a16:creationId xmlns:a16="http://schemas.microsoft.com/office/drawing/2014/main" id="{8537C134-948A-2AE3-0E9E-D125594A5826}"/>
               </a:ext>
             </a:extLst>
           </p:cNvPr>
@@ -8508,7 +8508,7 @@
           <p:cNvPr id="22" name="TextBox 21">
             <a:extLst>
               <a:ext uri="{FF2B5EF4-FFF2-40B4-BE49-F238E27FC236}">
-                <a16:creationId xmlns:a16="http://schemas.microsoft.com/office/drawing/2014/main" id="{97C333A5-9278-43BF-414E-B2F61B25F833}"/>
+                <a16:creationId xmlns:a16="http://schemas.microsoft.com/office/drawing/2014/main" id="{C788BE18-E500-2937-2673-E07BF99C61FA}"/>
               </a:ext>
             </a:extLst>
           </p:cNvPr>
@@ -8548,7 +8548,7 @@
           <p:cNvPr id="23" name="Прямоугольник 22">
             <a:extLst>
               <a:ext uri="{FF2B5EF4-FFF2-40B4-BE49-F238E27FC236}">
-                <a16:creationId xmlns:a16="http://schemas.microsoft.com/office/drawing/2014/main" id="{F136FB5C-B4D6-D58D-C99D-44BC23E1CF53}"/>
+                <a16:creationId xmlns:a16="http://schemas.microsoft.com/office/drawing/2014/main" id="{177928AF-D39C-26FC-2FFD-607538B11F7B}"/>
               </a:ext>
             </a:extLst>
           </p:cNvPr>
@@ -8616,7 +8616,7 @@
           <p:cNvPr id="24" name="Прямоугольник 23">
             <a:extLst>
               <a:ext uri="{FF2B5EF4-FFF2-40B4-BE49-F238E27FC236}">
-                <a16:creationId xmlns:a16="http://schemas.microsoft.com/office/drawing/2014/main" id="{9179FE5F-76DB-3402-9777-9B5EFEB4664B}"/>
+                <a16:creationId xmlns:a16="http://schemas.microsoft.com/office/drawing/2014/main" id="{94D5F35C-EAD2-3435-1583-F3940198B220}"/>
               </a:ext>
             </a:extLst>
           </p:cNvPr>
@@ -8684,7 +8684,7 @@
           <p:cNvPr id="25" name="TextBox 24">
             <a:extLst>
               <a:ext uri="{FF2B5EF4-FFF2-40B4-BE49-F238E27FC236}">
-                <a16:creationId xmlns:a16="http://schemas.microsoft.com/office/drawing/2014/main" id="{C6E2DF7C-2533-60D5-E4CE-ACBB13A87C23}"/>
+                <a16:creationId xmlns:a16="http://schemas.microsoft.com/office/drawing/2014/main" id="{9A5E5759-F241-8C24-49D8-35F97CD36966}"/>
               </a:ext>
             </a:extLst>
           </p:cNvPr>
@@ -8730,7 +8730,7 @@
           <p:cNvPr id="26" name="TextBox 25">
             <a:extLst>
               <a:ext uri="{FF2B5EF4-FFF2-40B4-BE49-F238E27FC236}">
-                <a16:creationId xmlns:a16="http://schemas.microsoft.com/office/drawing/2014/main" id="{976C0D38-DBA9-DD04-3CE2-9B427339F749}"/>
+                <a16:creationId xmlns:a16="http://schemas.microsoft.com/office/drawing/2014/main" id="{C6705C8A-62B5-1047-C965-EB6671057C8D}"/>
               </a:ext>
             </a:extLst>
           </p:cNvPr>
@@ -8770,7 +8770,7 @@
           <p:cNvPr id="27" name="Прямоугольник 26">
             <a:extLst>
               <a:ext uri="{FF2B5EF4-FFF2-40B4-BE49-F238E27FC236}">
-                <a16:creationId xmlns:a16="http://schemas.microsoft.com/office/drawing/2014/main" id="{6F23FB98-86B0-51F6-D9EA-CBFD22E81A67}"/>
+                <a16:creationId xmlns:a16="http://schemas.microsoft.com/office/drawing/2014/main" id="{1B9B9D5B-8D88-EFB2-5775-7FBE2E2CA447}"/>
               </a:ext>
             </a:extLst>
           </p:cNvPr>
@@ -8838,7 +8838,7 @@
           <p:cNvPr id="28" name="Прямоугольник 27">
             <a:extLst>
               <a:ext uri="{FF2B5EF4-FFF2-40B4-BE49-F238E27FC236}">
-                <a16:creationId xmlns:a16="http://schemas.microsoft.com/office/drawing/2014/main" id="{462AB3BF-19CF-DE17-C3E9-B0C09D3FBB22}"/>
+                <a16:creationId xmlns:a16="http://schemas.microsoft.com/office/drawing/2014/main" id="{CCDBD172-2149-4951-08AD-2A1D0F8D1750}"/>
               </a:ext>
             </a:extLst>
           </p:cNvPr>
@@ -8906,7 +8906,7 @@
           <p:cNvPr id="29" name="TextBox 28">
             <a:extLst>
               <a:ext uri="{FF2B5EF4-FFF2-40B4-BE49-F238E27FC236}">
-                <a16:creationId xmlns:a16="http://schemas.microsoft.com/office/drawing/2014/main" id="{DE685AB7-FA25-C1DC-B915-782F9FA717BB}"/>
+                <a16:creationId xmlns:a16="http://schemas.microsoft.com/office/drawing/2014/main" id="{07D722E3-C260-B234-6D9B-B037A30F8157}"/>
               </a:ext>
             </a:extLst>
           </p:cNvPr>
@@ -8952,7 +8952,7 @@
           <p:cNvPr id="30" name="TextBox 29">
             <a:extLst>
               <a:ext uri="{FF2B5EF4-FFF2-40B4-BE49-F238E27FC236}">
-                <a16:creationId xmlns:a16="http://schemas.microsoft.com/office/drawing/2014/main" id="{254E0CB8-C6E6-AC37-5DD6-93C255AC068C}"/>
+                <a16:creationId xmlns:a16="http://schemas.microsoft.com/office/drawing/2014/main" id="{CE0217B3-4B35-0E05-6D65-52DEAC396084}"/>
               </a:ext>
             </a:extLst>
           </p:cNvPr>
@@ -8992,7 +8992,7 @@
           <p:cNvPr id="31" name="TextBox 30">
             <a:extLst>
               <a:ext uri="{FF2B5EF4-FFF2-40B4-BE49-F238E27FC236}">
-                <a16:creationId xmlns:a16="http://schemas.microsoft.com/office/drawing/2014/main" id="{E46785B5-1DD2-6AD2-ECC7-84471B4BA5EE}"/>
+                <a16:creationId xmlns:a16="http://schemas.microsoft.com/office/drawing/2014/main" id="{42E2381B-4A96-40BC-B6E3-E3626A661F79}"/>
               </a:ext>
             </a:extLst>
           </p:cNvPr>
@@ -9030,7 +9030,7 @@
     </p:spTree>
     <p:extLst>
       <p:ext uri="{BB962C8B-B14F-4D97-AF65-F5344CB8AC3E}">
-        <p14:creationId xmlns:p14="http://schemas.microsoft.com/office/powerpoint/2010/main" val="2812003311"/>
+        <p14:creationId xmlns:p14="http://schemas.microsoft.com/office/powerpoint/2010/main" val="2235546561"/>
       </p:ext>
     </p:extLst>
   </p:cSld>
@@ -9062,7 +9062,7 @@
           <p:cNvPr id="2" name="Прямоугольник 1">
             <a:extLst>
               <a:ext uri="{FF2B5EF4-FFF2-40B4-BE49-F238E27FC236}">
-                <a16:creationId xmlns:a16="http://schemas.microsoft.com/office/drawing/2014/main" id="{9EDA7084-ECED-EC2A-120A-2F15C5DD3034}"/>
+                <a16:creationId xmlns:a16="http://schemas.microsoft.com/office/drawing/2014/main" id="{484653FB-08AC-D68D-2A1D-F18E6C913598}"/>
               </a:ext>
             </a:extLst>
           </p:cNvPr>
@@ -9130,7 +9130,7 @@
           <p:cNvPr id="3" name="Прямоугольник 2">
             <a:extLst>
               <a:ext uri="{FF2B5EF4-FFF2-40B4-BE49-F238E27FC236}">
-                <a16:creationId xmlns:a16="http://schemas.microsoft.com/office/drawing/2014/main" id="{A69D049A-2107-D007-708C-F723E50FC712}"/>
+                <a16:creationId xmlns:a16="http://schemas.microsoft.com/office/drawing/2014/main" id="{CA690472-A1C6-A8ED-2C6F-73614547E90E}"/>
               </a:ext>
             </a:extLst>
           </p:cNvPr>
@@ -9198,7 +9198,7 @@
           <p:cNvPr id="4" name="TextBox 3">
             <a:extLst>
               <a:ext uri="{FF2B5EF4-FFF2-40B4-BE49-F238E27FC236}">
-                <a16:creationId xmlns:a16="http://schemas.microsoft.com/office/drawing/2014/main" id="{44351F1A-3026-3AC5-00E2-9CF251B8CE6B}"/>
+                <a16:creationId xmlns:a16="http://schemas.microsoft.com/office/drawing/2014/main" id="{4B10CB32-E0B7-C920-76B8-A8BA9E41829F}"/>
               </a:ext>
             </a:extLst>
           </p:cNvPr>
@@ -9238,7 +9238,7 @@
           <p:cNvPr id="5" name="TextBox 4">
             <a:extLst>
               <a:ext uri="{FF2B5EF4-FFF2-40B4-BE49-F238E27FC236}">
-                <a16:creationId xmlns:a16="http://schemas.microsoft.com/office/drawing/2014/main" id="{0DA97331-38F4-778A-F4AE-4FA2141A321D}"/>
+                <a16:creationId xmlns:a16="http://schemas.microsoft.com/office/drawing/2014/main" id="{63C9BBBD-89C2-B770-8B3A-B45EAC541C63}"/>
               </a:ext>
             </a:extLst>
           </p:cNvPr>
@@ -9279,7 +9279,7 @@
           <p:cNvPr id="6" name="Прямоугольник 5">
             <a:extLst>
               <a:ext uri="{FF2B5EF4-FFF2-40B4-BE49-F238E27FC236}">
-                <a16:creationId xmlns:a16="http://schemas.microsoft.com/office/drawing/2014/main" id="{8840AD22-F6D5-732C-07E4-09D74245F563}"/>
+                <a16:creationId xmlns:a16="http://schemas.microsoft.com/office/drawing/2014/main" id="{0061D382-1117-ABE7-14CA-55C406E65B53}"/>
               </a:ext>
             </a:extLst>
           </p:cNvPr>
@@ -9344,118 +9344,53 @@
       </p:sp>
       <p:pic>
         <p:nvPicPr>
-          <p:cNvPr id="8" name="Рисунок 7">
-            <a:extLst>
-              <a:ext uri="{FF2B5EF4-FFF2-40B4-BE49-F238E27FC236}">
-                <a16:creationId xmlns:a16="http://schemas.microsoft.com/office/drawing/2014/main" id="{BAFBC954-7BF9-6030-0FC3-10584E7D7968}"/>
+          <p:cNvPr id="7" name="Демонстрация приложения">
+            <a:hlinkClick r:id="" action="ppaction://media"/>
+            <a:extLst>
+              <a:ext uri="{FF2B5EF4-FFF2-40B4-BE49-F238E27FC236}">
+                <a16:creationId xmlns:a16="http://schemas.microsoft.com/office/drawing/2014/main" id="{28066A33-07CB-3959-36E0-93DE103D39FD}"/>
               </a:ext>
             </a:extLst>
           </p:cNvPr>
           <p:cNvPicPr>
-            <a:picLocks noChangeAspect="1"/>
+            <a:picLocks/>
           </p:cNvPicPr>
-          <p:nvPr/>
+          <p:nvPr>
+            <a:videoFile r:link="rId2"/>
+            <p:extLst>
+              <p:ext uri="{DAA4B4D4-6D71-4841-9C94-3DE7FCFB9230}">
+                <p14:media xmlns:p14="http://schemas.microsoft.com/office/powerpoint/2010/main" r:embed="rId1"/>
+              </p:ext>
+            </p:extLst>
+          </p:nvPr>
         </p:nvPicPr>
         <p:blipFill>
-          <a:blip r:embed="rId2">
-            <a:extLst>
-              <a:ext uri="{28A0092B-C50C-407E-A947-70E740481C1C}">
-                <a14:useLocalDpi xmlns:a14="http://schemas.microsoft.com/office/drawing/2010/main" val="0"/>
-              </a:ext>
-            </a:extLst>
-          </a:blip>
+          <a:blip r:embed="rId4"/>
           <a:stretch>
             <a:fillRect/>
           </a:stretch>
         </p:blipFill>
         <p:spPr>
           <a:xfrm>
-            <a:off x="558800" y="1270000"/>
-            <a:ext cx="3175000" cy="2286000"/>
-          </a:xfrm>
-          <a:prstGeom prst="rect">
-            <a:avLst/>
-          </a:prstGeom>
+            <a:off x="558800" y="1676400"/>
+            <a:ext cx="7112000" cy="4000500"/>
+          </a:xfrm>
+          <a:prstGeom prst="rect">
+            <a:avLst/>
+          </a:prstGeom>
+          <a:ln w="19050">
+            <a:solidFill>
+              <a:srgbClr val="5B4B6E"/>
+            </a:solidFill>
+          </a:ln>
         </p:spPr>
       </p:pic>
-      <p:pic>
-        <p:nvPicPr>
-          <p:cNvPr id="10" name="Рисунок 9">
-            <a:extLst>
-              <a:ext uri="{FF2B5EF4-FFF2-40B4-BE49-F238E27FC236}">
-                <a16:creationId xmlns:a16="http://schemas.microsoft.com/office/drawing/2014/main" id="{BBECDA45-11DE-8F19-D7EC-F6DFD5F3E5CE}"/>
-              </a:ext>
-            </a:extLst>
-          </p:cNvPr>
-          <p:cNvPicPr>
-            <a:picLocks noChangeAspect="1"/>
-          </p:cNvPicPr>
-          <p:nvPr/>
-        </p:nvPicPr>
-        <p:blipFill>
-          <a:blip r:embed="rId3">
-            <a:extLst>
-              <a:ext uri="{28A0092B-C50C-407E-A947-70E740481C1C}">
-                <a14:useLocalDpi xmlns:a14="http://schemas.microsoft.com/office/drawing/2010/main" val="0"/>
-              </a:ext>
-            </a:extLst>
-          </a:blip>
-          <a:stretch>
-            <a:fillRect/>
-          </a:stretch>
-        </p:blipFill>
-        <p:spPr>
-          <a:xfrm>
-            <a:off x="3937000" y="1270000"/>
-            <a:ext cx="3175000" cy="2286000"/>
-          </a:xfrm>
-          <a:prstGeom prst="rect">
-            <a:avLst/>
-          </a:prstGeom>
-        </p:spPr>
-      </p:pic>
-      <p:pic>
-        <p:nvPicPr>
-          <p:cNvPr id="12" name="Рисунок 11">
-            <a:extLst>
-              <a:ext uri="{FF2B5EF4-FFF2-40B4-BE49-F238E27FC236}">
-                <a16:creationId xmlns:a16="http://schemas.microsoft.com/office/drawing/2014/main" id="{509B4F14-2991-B3F8-7D0B-1E19C7989AC2}"/>
-              </a:ext>
-            </a:extLst>
-          </p:cNvPr>
-          <p:cNvPicPr>
-            <a:picLocks noChangeAspect="1"/>
-          </p:cNvPicPr>
-          <p:nvPr/>
-        </p:nvPicPr>
-        <p:blipFill>
-          <a:blip r:embed="rId4">
-            <a:extLst>
-              <a:ext uri="{28A0092B-C50C-407E-A947-70E740481C1C}">
-                <a14:useLocalDpi xmlns:a14="http://schemas.microsoft.com/office/drawing/2010/main" val="0"/>
-              </a:ext>
-            </a:extLst>
-          </a:blip>
-          <a:stretch>
-            <a:fillRect/>
-          </a:stretch>
-        </p:blipFill>
-        <p:spPr>
-          <a:xfrm>
-            <a:off x="7315200" y="1270000"/>
-            <a:ext cx="3175000" cy="2286000"/>
-          </a:xfrm>
-          <a:prstGeom prst="rect">
-            <a:avLst/>
-          </a:prstGeom>
-        </p:spPr>
-      </p:pic>
-      <p:sp>
-        <p:nvSpPr>
-          <p:cNvPr id="13" name="TextBox 12">
-            <a:extLst>
-              <a:ext uri="{FF2B5EF4-FFF2-40B4-BE49-F238E27FC236}">
-                <a16:creationId xmlns:a16="http://schemas.microsoft.com/office/drawing/2014/main" id="{67233F64-3314-E4D0-F21E-686F3AFF3499}"/>
+      <p:sp>
+        <p:nvSpPr>
+          <p:cNvPr id="8" name="TextBox 7">
+            <a:extLst>
+              <a:ext uri="{FF2B5EF4-FFF2-40B4-BE49-F238E27FC236}">
+                <a16:creationId xmlns:a16="http://schemas.microsoft.com/office/drawing/2014/main" id="{FD55F921-C462-4299-C059-6124DB2B7B2C}"/>
               </a:ext>
             </a:extLst>
           </p:cNvPr>
@@ -9464,8 +9399,48 @@
         </p:nvSpPr>
         <p:spPr>
           <a:xfrm>
-            <a:off x="558800" y="4064000"/>
-            <a:ext cx="11074400" cy="369332"/>
+            <a:off x="558800" y="5816600"/>
+            <a:ext cx="7112000" cy="369332"/>
+          </a:xfrm>
+          <a:prstGeom prst="rect">
+            <a:avLst/>
+          </a:prstGeom>
+          <a:noFill/>
+        </p:spPr>
+        <p:txBody>
+          <a:bodyPr vert="horz" wrap="square" lIns="0" tIns="0" rIns="0" bIns="0" rtlCol="0">
+            <a:noAutofit/>
+          </a:bodyPr>
+          <a:lstStyle/>
+          <a:p>
+            <a:r>
+              <a:rPr lang="ru-RU" sz="1400">
+                <a:solidFill>
+                  <a:srgbClr val="6B6472"/>
+                </a:solidFill>
+                <a:latin typeface="Times New Roman" panose="02020603050405020304" pitchFamily="18" charset="0"/>
+              </a:rPr>
+              <a:t>Демонстрация занимает около 25 секунд</a:t>
+            </a:r>
+          </a:p>
+        </p:txBody>
+      </p:sp>
+      <p:sp>
+        <p:nvSpPr>
+          <p:cNvPr id="9" name="TextBox 8">
+            <a:extLst>
+              <a:ext uri="{FF2B5EF4-FFF2-40B4-BE49-F238E27FC236}">
+                <a16:creationId xmlns:a16="http://schemas.microsoft.com/office/drawing/2014/main" id="{45BF58C3-7CEB-4B86-2F7D-BAB82C5D9E86}"/>
+              </a:ext>
+            </a:extLst>
+          </p:cNvPr>
+          <p:cNvSpPr txBox="1"/>
+          <p:nvPr/>
+        </p:nvSpPr>
+        <p:spPr>
+          <a:xfrm>
+            <a:off x="8001000" y="1727200"/>
+            <a:ext cx="3632200" cy="369332"/>
           </a:xfrm>
           <a:prstGeom prst="rect">
             <a:avLst/>
@@ -9487,7 +9462,7 @@
               <a:buChar char="•"/>
             </a:pPr>
             <a:r>
-              <a:rPr lang="ru-RU" sz="1600">
+              <a:rPr lang="ru-RU" sz="1500">
                 <a:solidFill>
                   <a:srgbClr val="2B2233"/>
                 </a:solidFill>
@@ -9506,7 +9481,7 @@
               <a:buChar char="•"/>
             </a:pPr>
             <a:r>
-              <a:rPr lang="ru-RU" sz="1600">
+              <a:rPr lang="ru-RU" sz="1500">
                 <a:solidFill>
                   <a:srgbClr val="2B2233"/>
                 </a:solidFill>
@@ -9525,13 +9500,13 @@
               <a:buChar char="•"/>
             </a:pPr>
             <a:r>
-              <a:rPr lang="ru-RU" sz="1600">
+              <a:rPr lang="ru-RU" sz="1500">
                 <a:solidFill>
                   <a:srgbClr val="2B2233"/>
                 </a:solidFill>
                 <a:latin typeface="Times New Roman" panose="02020603050405020304" pitchFamily="18" charset="0"/>
               </a:rPr>
-              <a:t>Проверка работы учителем, выставление балла и комментария, формирование ведомости</a:t>
+              <a:t>Проверка работы учителем, выставление балла и комментария</a:t>
             </a:r>
           </a:p>
           <a:p>
@@ -9544,7 +9519,26 @@
               <a:buChar char="•"/>
             </a:pPr>
             <a:r>
-              <a:rPr lang="ru-RU" sz="1600">
+              <a:rPr lang="ru-RU" sz="1500">
+                <a:solidFill>
+                  <a:srgbClr val="2B2233"/>
+                </a:solidFill>
+                <a:latin typeface="Times New Roman" panose="02020603050405020304" pitchFamily="18" charset="0"/>
+              </a:rPr>
+              <a:t>Формирование ведомости успеваемости по курсу</a:t>
+            </a:r>
+          </a:p>
+          <a:p>
+            <a:pPr indent="330200">
+              <a:spcAft>
+                <a:spcPts val="1000"/>
+              </a:spcAft>
+              <a:buSzPct val="90000"/>
+              <a:buFont typeface="+mj-lt"/>
+              <a:buChar char="•"/>
+            </a:pPr>
+            <a:r>
+              <a:rPr lang="ru-RU" sz="1500">
                 <a:solidFill>
                   <a:srgbClr val="2B2233"/>
                 </a:solidFill>
@@ -9562,7 +9556,7 @@
               <a:buFont typeface="+mj-lt"/>
               <a:buChar char="•"/>
             </a:pPr>
-            <a:endParaRPr lang="ru-RU" sz="1600">
+            <a:endParaRPr lang="ru-RU" sz="1500">
               <a:solidFill>
                 <a:srgbClr val="2B2233"/>
               </a:solidFill>
@@ -9574,13 +9568,148 @@
     </p:spTree>
     <p:extLst>
       <p:ext uri="{BB962C8B-B14F-4D97-AF65-F5344CB8AC3E}">
-        <p14:creationId xmlns:p14="http://schemas.microsoft.com/office/powerpoint/2010/main" val="1836014233"/>
+        <p14:creationId xmlns:p14="http://schemas.microsoft.com/office/powerpoint/2010/main" val="76454823"/>
       </p:ext>
     </p:extLst>
   </p:cSld>
   <p:clrMapOvr>
     <a:masterClrMapping/>
   </p:clrMapOvr>
+  <p:timing>
+    <p:tnLst>
+      <p:par>
+        <p:cTn id="1" dur="indefinite" restart="never" nodeType="tmRoot">
+          <p:childTnLst>
+            <p:seq concurrent="1" nextAc="seek">
+              <p:cTn id="2" dur="indefinite" nodeType="mainSeq">
+                <p:childTnLst>
+                  <p:par>
+                    <p:cTn id="3" fill="hold">
+                      <p:stCondLst>
+                        <p:cond delay="indefinite"/>
+                      </p:stCondLst>
+                      <p:childTnLst>
+                        <p:par>
+                          <p:cTn id="4" fill="hold">
+                            <p:stCondLst>
+                              <p:cond delay="0"/>
+                            </p:stCondLst>
+                            <p:childTnLst>
+                              <p:par>
+                                <p:cTn id="5" presetID="1" presetClass="mediacall" presetSubtype="0" fill="hold" nodeType="clickEffect">
+                                  <p:stCondLst>
+                                    <p:cond delay="0"/>
+                                  </p:stCondLst>
+                                  <p:childTnLst>
+                                    <p:cmd type="call" cmd="playFrom(0.0)">
+                                      <p:cBhvr>
+                                        <p:cTn id="6" dur="24123" fill="hold"/>
+                                        <p:tgtEl>
+                                          <p:spTgt spid="7"/>
+                                        </p:tgtEl>
+                                      </p:cBhvr>
+                                    </p:cmd>
+                                  </p:childTnLst>
+                                </p:cTn>
+                              </p:par>
+                            </p:childTnLst>
+                          </p:cTn>
+                        </p:par>
+                      </p:childTnLst>
+                    </p:cTn>
+                  </p:par>
+                </p:childTnLst>
+              </p:cTn>
+              <p:prevCondLst>
+                <p:cond evt="onPrev" delay="0">
+                  <p:tgtEl>
+                    <p:sldTgt/>
+                  </p:tgtEl>
+                </p:cond>
+              </p:prevCondLst>
+              <p:nextCondLst>
+                <p:cond evt="onNext" delay="0">
+                  <p:tgtEl>
+                    <p:sldTgt/>
+                  </p:tgtEl>
+                </p:cond>
+              </p:nextCondLst>
+            </p:seq>
+            <p:video>
+              <p:cMediaNode vol="80000" showWhenStopped="0">
+                <p:cTn id="7" fill="hold" display="0">
+                  <p:stCondLst>
+                    <p:cond delay="indefinite"/>
+                  </p:stCondLst>
+                </p:cTn>
+                <p:tgtEl>
+                  <p:spTgt spid="7"/>
+                </p:tgtEl>
+              </p:cMediaNode>
+            </p:video>
+            <p:seq concurrent="1" nextAc="seek">
+              <p:cTn id="8" restart="whenNotActive" fill="hold" evtFilter="cancelBubble" nodeType="interactiveSeq">
+                <p:stCondLst>
+                  <p:cond evt="onClick" delay="0">
+                    <p:tgtEl>
+                      <p:spTgt spid="7"/>
+                    </p:tgtEl>
+                  </p:cond>
+                </p:stCondLst>
+                <p:endSync evt="end" delay="0">
+                  <p:rtn val="all"/>
+                </p:endSync>
+                <p:childTnLst>
+                  <p:par>
+                    <p:cTn id="9" fill="hold">
+                      <p:stCondLst>
+                        <p:cond delay="0"/>
+                      </p:stCondLst>
+                      <p:childTnLst>
+                        <p:par>
+                          <p:cTn id="10" fill="hold">
+                            <p:stCondLst>
+                              <p:cond delay="0"/>
+                            </p:stCondLst>
+                            <p:childTnLst>
+                              <p:par>
+                                <p:cTn id="11" presetID="2" presetClass="mediacall" presetSubtype="0" fill="hold" nodeType="clickEffect">
+                                  <p:stCondLst>
+                                    <p:cond delay="0"/>
+                                  </p:stCondLst>
+                                  <p:childTnLst>
+                                    <p:cmd type="call" cmd="togglePause">
+                                      <p:cBhvr>
+                                        <p:cTn id="12" dur="1" fill="hold"/>
+                                        <p:tgtEl>
+                                          <p:spTgt spid="7"/>
+                                        </p:tgtEl>
+                                      </p:cBhvr>
+                                    </p:cmd>
+                                  </p:childTnLst>
+                                </p:cTn>
+                              </p:par>
+                            </p:childTnLst>
+                          </p:cTn>
+                        </p:par>
+                      </p:childTnLst>
+                    </p:cTn>
+                  </p:par>
+                </p:childTnLst>
+              </p:cTn>
+              <p:nextCondLst>
+                <p:cond evt="onClick" delay="0">
+                  <p:tgtEl>
+                    <p:spTgt spid="7"/>
+                  </p:tgtEl>
+                </p:cond>
+              </p:nextCondLst>
+            </p:seq>
+          </p:childTnLst>
+        </p:cTn>
+      </p:par>
+    </p:tnLst>
+  </p:timing>
 </p:sld>
 </file>
 
@@ -9606,7 +9735,7 @@
           <p:cNvPr id="2" name="Прямоугольник 1">
             <a:extLst>
               <a:ext uri="{FF2B5EF4-FFF2-40B4-BE49-F238E27FC236}">
-                <a16:creationId xmlns:a16="http://schemas.microsoft.com/office/drawing/2014/main" id="{7CACACDF-2687-5D34-64CD-FB7F8473F2C5}"/>
+                <a16:creationId xmlns:a16="http://schemas.microsoft.com/office/drawing/2014/main" id="{54B581C2-A3F7-4C04-53D3-8B4EC44B7978}"/>
               </a:ext>
             </a:extLst>
           </p:cNvPr>
@@ -9674,7 +9803,7 @@
           <p:cNvPr id="3" name="Прямоугольник 2">
             <a:extLst>
               <a:ext uri="{FF2B5EF4-FFF2-40B4-BE49-F238E27FC236}">
-                <a16:creationId xmlns:a16="http://schemas.microsoft.com/office/drawing/2014/main" id="{E49489D0-D4F2-1CA0-0209-AB519C3E3FFB}"/>
+                <a16:creationId xmlns:a16="http://schemas.microsoft.com/office/drawing/2014/main" id="{138A70D2-4CA7-D8B1-7773-8BFCE3857996}"/>
               </a:ext>
             </a:extLst>
           </p:cNvPr>
@@ -9742,7 +9871,7 @@
           <p:cNvPr id="4" name="TextBox 3">
             <a:extLst>
               <a:ext uri="{FF2B5EF4-FFF2-40B4-BE49-F238E27FC236}">
-                <a16:creationId xmlns:a16="http://schemas.microsoft.com/office/drawing/2014/main" id="{9C4A6E12-CACC-6E60-D8E0-751839EE81A8}"/>
+                <a16:creationId xmlns:a16="http://schemas.microsoft.com/office/drawing/2014/main" id="{C1F95CDB-8F25-4779-1506-B31AF6AAC370}"/>
               </a:ext>
             </a:extLst>
           </p:cNvPr>
@@ -9782,7 +9911,7 @@
           <p:cNvPr id="5" name="Прямоугольник 4">
             <a:extLst>
               <a:ext uri="{FF2B5EF4-FFF2-40B4-BE49-F238E27FC236}">
-                <a16:creationId xmlns:a16="http://schemas.microsoft.com/office/drawing/2014/main" id="{64D3162E-81AE-5E2A-3B1F-D729576E003D}"/>
+                <a16:creationId xmlns:a16="http://schemas.microsoft.com/office/drawing/2014/main" id="{B5E43CB9-9C88-8756-A1D5-7B8D10BE33EA}"/>
               </a:ext>
             </a:extLst>
           </p:cNvPr>
@@ -9850,7 +9979,7 @@
           <p:cNvPr id="6" name="TextBox 5">
             <a:extLst>
               <a:ext uri="{FF2B5EF4-FFF2-40B4-BE49-F238E27FC236}">
-                <a16:creationId xmlns:a16="http://schemas.microsoft.com/office/drawing/2014/main" id="{6268F73D-644F-57A7-B403-70D77DD68FDE}"/>
+                <a16:creationId xmlns:a16="http://schemas.microsoft.com/office/drawing/2014/main" id="{FCF62E3F-7906-4A69-3325-0A9FE0D5BF81}"/>
               </a:ext>
             </a:extLst>
           </p:cNvPr>
@@ -9890,7 +10019,7 @@
           <p:cNvPr id="7" name="TextBox 6">
             <a:extLst>
               <a:ext uri="{FF2B5EF4-FFF2-40B4-BE49-F238E27FC236}">
-                <a16:creationId xmlns:a16="http://schemas.microsoft.com/office/drawing/2014/main" id="{6C050BB3-E64F-A41A-3278-5F65251B782B}"/>
+                <a16:creationId xmlns:a16="http://schemas.microsoft.com/office/drawing/2014/main" id="{E27FC511-8701-9B3B-4D82-1D9563E6DD8E}"/>
               </a:ext>
             </a:extLst>
           </p:cNvPr>
@@ -9930,7 +10059,7 @@
           <p:cNvPr id="8" name="TextBox 7">
             <a:extLst>
               <a:ext uri="{FF2B5EF4-FFF2-40B4-BE49-F238E27FC236}">
-                <a16:creationId xmlns:a16="http://schemas.microsoft.com/office/drawing/2014/main" id="{230C4E1F-2E73-26FD-AA83-E72C0AE0D3DB}"/>
+                <a16:creationId xmlns:a16="http://schemas.microsoft.com/office/drawing/2014/main" id="{1C79AB1C-AA61-B9B1-C785-8AAC193A5BB5}"/>
               </a:ext>
             </a:extLst>
           </p:cNvPr>
@@ -9970,7 +10099,7 @@
           <p:cNvPr id="9" name="TextBox 8">
             <a:extLst>
               <a:ext uri="{FF2B5EF4-FFF2-40B4-BE49-F238E27FC236}">
-                <a16:creationId xmlns:a16="http://schemas.microsoft.com/office/drawing/2014/main" id="{6D23EE30-105F-C390-888C-4E61CF0B86E6}"/>
+                <a16:creationId xmlns:a16="http://schemas.microsoft.com/office/drawing/2014/main" id="{C5D1FE78-C601-BE83-153D-5C17C7E0F865}"/>
               </a:ext>
             </a:extLst>
           </p:cNvPr>
@@ -10008,7 +10137,7 @@
     </p:spTree>
     <p:extLst>
       <p:ext uri="{BB962C8B-B14F-4D97-AF65-F5344CB8AC3E}">
-        <p14:creationId xmlns:p14="http://schemas.microsoft.com/office/powerpoint/2010/main" val="290524059"/>
+        <p14:creationId xmlns:p14="http://schemas.microsoft.com/office/powerpoint/2010/main" val="2016794373"/>
       </p:ext>
     </p:extLst>
   </p:cSld>

--- a/Презентация к защите.pptx
+++ b/Презентация к защите.pptx
@@ -137,7 +137,7 @@
           <p:cNvPr id="2" name="Заголовок 1">
             <a:extLst>
               <a:ext uri="{FF2B5EF4-FFF2-40B4-BE49-F238E27FC236}">
-                <a16:creationId xmlns:a16="http://schemas.microsoft.com/office/drawing/2014/main" id="{5920AD67-BF38-7F47-E353-EF888F5A052C}"/>
+                <a16:creationId xmlns:a16="http://schemas.microsoft.com/office/drawing/2014/main" id="{59FD490A-478A-5006-1F85-09AA7499FC50}"/>
               </a:ext>
             </a:extLst>
           </p:cNvPr>
@@ -174,7 +174,7 @@
           <p:cNvPr id="3" name="Подзаголовок 2">
             <a:extLst>
               <a:ext uri="{FF2B5EF4-FFF2-40B4-BE49-F238E27FC236}">
-                <a16:creationId xmlns:a16="http://schemas.microsoft.com/office/drawing/2014/main" id="{9451F0A8-B689-1307-3BE3-74C8E22BDA74}"/>
+                <a16:creationId xmlns:a16="http://schemas.microsoft.com/office/drawing/2014/main" id="{D61AFEF5-D318-EB4C-182B-494F9256DC1D}"/>
               </a:ext>
             </a:extLst>
           </p:cNvPr>
@@ -244,7 +244,7 @@
           <p:cNvPr id="4" name="Дата 3">
             <a:extLst>
               <a:ext uri="{FF2B5EF4-FFF2-40B4-BE49-F238E27FC236}">
-                <a16:creationId xmlns:a16="http://schemas.microsoft.com/office/drawing/2014/main" id="{DC47D0E3-7952-D87B-76A4-AB6818FBD2E7}"/>
+                <a16:creationId xmlns:a16="http://schemas.microsoft.com/office/drawing/2014/main" id="{BF5626A8-7C9E-AC5D-0A45-716C0ABA08CD}"/>
               </a:ext>
             </a:extLst>
           </p:cNvPr>
@@ -260,7 +260,7 @@
           <a:bodyPr/>
           <a:lstStyle/>
           <a:p>
-            <a:fld id="{E59C474A-60D2-4158-8EE8-007BD26A9F4C}" type="datetimeFigureOut">
+            <a:fld id="{DA54600A-7C73-4D61-AAC6-1A383BA0CE2F}" type="datetimeFigureOut">
               <a:rPr lang="ru-RU" smtClean="0"/>
               <a:t>27.10.2026</a:t>
             </a:fld>
@@ -273,7 +273,7 @@
           <p:cNvPr id="5" name="Нижний колонтитул 4">
             <a:extLst>
               <a:ext uri="{FF2B5EF4-FFF2-40B4-BE49-F238E27FC236}">
-                <a16:creationId xmlns:a16="http://schemas.microsoft.com/office/drawing/2014/main" id="{CA8DFD42-BF88-97FD-7B1E-8F8317908C2D}"/>
+                <a16:creationId xmlns:a16="http://schemas.microsoft.com/office/drawing/2014/main" id="{B671A0F4-FD28-58A7-F34C-83FEA6008EDA}"/>
               </a:ext>
             </a:extLst>
           </p:cNvPr>
@@ -298,7 +298,7 @@
           <p:cNvPr id="6" name="Номер слайда 5">
             <a:extLst>
               <a:ext uri="{FF2B5EF4-FFF2-40B4-BE49-F238E27FC236}">
-                <a16:creationId xmlns:a16="http://schemas.microsoft.com/office/drawing/2014/main" id="{2D669996-5B34-297E-EB2C-112316B67D4A}"/>
+                <a16:creationId xmlns:a16="http://schemas.microsoft.com/office/drawing/2014/main" id="{25DF8AF5-C14C-A481-6C8E-A67E58C4D826}"/>
               </a:ext>
             </a:extLst>
           </p:cNvPr>
@@ -314,7 +314,7 @@
           <a:bodyPr/>
           <a:lstStyle/>
           <a:p>
-            <a:fld id="{C46792AE-14C6-4C82-A727-B7D982901612}" type="slidenum">
+            <a:fld id="{89B0BC6E-28B5-43E0-97A1-E1F5E0E8A27C}" type="slidenum">
               <a:rPr lang="ru-RU" smtClean="0"/>
               <a:t>‹#›</a:t>
             </a:fld>
@@ -325,7 +325,7 @@
     </p:spTree>
     <p:extLst>
       <p:ext uri="{BB962C8B-B14F-4D97-AF65-F5344CB8AC3E}">
-        <p14:creationId xmlns:p14="http://schemas.microsoft.com/office/powerpoint/2010/main" val="970248458"/>
+        <p14:creationId xmlns:p14="http://schemas.microsoft.com/office/powerpoint/2010/main" val="2500281679"/>
       </p:ext>
     </p:extLst>
   </p:cSld>
@@ -357,7 +357,7 @@
           <p:cNvPr id="2" name="Заголовок 1">
             <a:extLst>
               <a:ext uri="{FF2B5EF4-FFF2-40B4-BE49-F238E27FC236}">
-                <a16:creationId xmlns:a16="http://schemas.microsoft.com/office/drawing/2014/main" id="{5F6A029E-FD69-BD9B-566E-19ED9D15B8A7}"/>
+                <a16:creationId xmlns:a16="http://schemas.microsoft.com/office/drawing/2014/main" id="{4D0FE199-2E5D-A08D-3710-D57B96C51EA2}"/>
               </a:ext>
             </a:extLst>
           </p:cNvPr>
@@ -385,7 +385,7 @@
           <p:cNvPr id="3" name="Вертикальный текст 2">
             <a:extLst>
               <a:ext uri="{FF2B5EF4-FFF2-40B4-BE49-F238E27FC236}">
-                <a16:creationId xmlns:a16="http://schemas.microsoft.com/office/drawing/2014/main" id="{46D02DD6-707A-0017-8E27-B5B24CC5426F}"/>
+                <a16:creationId xmlns:a16="http://schemas.microsoft.com/office/drawing/2014/main" id="{649CAC3E-A55B-43F6-F253-9BA1A670164F}"/>
               </a:ext>
             </a:extLst>
           </p:cNvPr>
@@ -442,7 +442,7 @@
           <p:cNvPr id="4" name="Дата 3">
             <a:extLst>
               <a:ext uri="{FF2B5EF4-FFF2-40B4-BE49-F238E27FC236}">
-                <a16:creationId xmlns:a16="http://schemas.microsoft.com/office/drawing/2014/main" id="{71E01C95-A795-A4CD-7AB4-DBE78076A372}"/>
+                <a16:creationId xmlns:a16="http://schemas.microsoft.com/office/drawing/2014/main" id="{206CC88A-B578-7769-EE90-E6050857D76C}"/>
               </a:ext>
             </a:extLst>
           </p:cNvPr>
@@ -458,7 +458,7 @@
           <a:bodyPr/>
           <a:lstStyle/>
           <a:p>
-            <a:fld id="{E59C474A-60D2-4158-8EE8-007BD26A9F4C}" type="datetimeFigureOut">
+            <a:fld id="{DA54600A-7C73-4D61-AAC6-1A383BA0CE2F}" type="datetimeFigureOut">
               <a:rPr lang="ru-RU" smtClean="0"/>
               <a:t>27.10.2026</a:t>
             </a:fld>
@@ -471,7 +471,7 @@
           <p:cNvPr id="5" name="Нижний колонтитул 4">
             <a:extLst>
               <a:ext uri="{FF2B5EF4-FFF2-40B4-BE49-F238E27FC236}">
-                <a16:creationId xmlns:a16="http://schemas.microsoft.com/office/drawing/2014/main" id="{03D5D4A6-3D1F-AD4F-B094-E029110A47DF}"/>
+                <a16:creationId xmlns:a16="http://schemas.microsoft.com/office/drawing/2014/main" id="{A3B18C71-C664-1E6F-11C1-A3BC2B0EA4E4}"/>
               </a:ext>
             </a:extLst>
           </p:cNvPr>
@@ -496,7 +496,7 @@
           <p:cNvPr id="6" name="Номер слайда 5">
             <a:extLst>
               <a:ext uri="{FF2B5EF4-FFF2-40B4-BE49-F238E27FC236}">
-                <a16:creationId xmlns:a16="http://schemas.microsoft.com/office/drawing/2014/main" id="{191FD719-A79E-BED4-7A6E-D37516D227AD}"/>
+                <a16:creationId xmlns:a16="http://schemas.microsoft.com/office/drawing/2014/main" id="{CA6F8C15-7733-ED11-4477-C11BFBA13387}"/>
               </a:ext>
             </a:extLst>
           </p:cNvPr>
@@ -512,7 +512,7 @@
           <a:bodyPr/>
           <a:lstStyle/>
           <a:p>
-            <a:fld id="{C46792AE-14C6-4C82-A727-B7D982901612}" type="slidenum">
+            <a:fld id="{89B0BC6E-28B5-43E0-97A1-E1F5E0E8A27C}" type="slidenum">
               <a:rPr lang="ru-RU" smtClean="0"/>
               <a:t>‹#›</a:t>
             </a:fld>
@@ -523,7 +523,7 @@
     </p:spTree>
     <p:extLst>
       <p:ext uri="{BB962C8B-B14F-4D97-AF65-F5344CB8AC3E}">
-        <p14:creationId xmlns:p14="http://schemas.microsoft.com/office/powerpoint/2010/main" val="2157962458"/>
+        <p14:creationId xmlns:p14="http://schemas.microsoft.com/office/powerpoint/2010/main" val="1855990502"/>
       </p:ext>
     </p:extLst>
   </p:cSld>
@@ -555,7 +555,7 @@
           <p:cNvPr id="2" name="Вертикальный заголовок 1">
             <a:extLst>
               <a:ext uri="{FF2B5EF4-FFF2-40B4-BE49-F238E27FC236}">
-                <a16:creationId xmlns:a16="http://schemas.microsoft.com/office/drawing/2014/main" id="{D082B7C4-A87B-29DA-E641-91A6D20FFFF9}"/>
+                <a16:creationId xmlns:a16="http://schemas.microsoft.com/office/drawing/2014/main" id="{1E1F76D9-F4D7-D810-17C1-99E93039391D}"/>
               </a:ext>
             </a:extLst>
           </p:cNvPr>
@@ -588,7 +588,7 @@
           <p:cNvPr id="3" name="Вертикальный текст 2">
             <a:extLst>
               <a:ext uri="{FF2B5EF4-FFF2-40B4-BE49-F238E27FC236}">
-                <a16:creationId xmlns:a16="http://schemas.microsoft.com/office/drawing/2014/main" id="{E8495724-D19D-F9DE-2EB9-41B545C29576}"/>
+                <a16:creationId xmlns:a16="http://schemas.microsoft.com/office/drawing/2014/main" id="{CAF90CBF-E211-7957-8E73-D98EDB18F45B}"/>
               </a:ext>
             </a:extLst>
           </p:cNvPr>
@@ -650,7 +650,7 @@
           <p:cNvPr id="4" name="Дата 3">
             <a:extLst>
               <a:ext uri="{FF2B5EF4-FFF2-40B4-BE49-F238E27FC236}">
-                <a16:creationId xmlns:a16="http://schemas.microsoft.com/office/drawing/2014/main" id="{6977D4DB-C158-95D1-A856-4040123550EE}"/>
+                <a16:creationId xmlns:a16="http://schemas.microsoft.com/office/drawing/2014/main" id="{FFDEF8CD-D58D-3DB7-4C13-C15F1B808530}"/>
               </a:ext>
             </a:extLst>
           </p:cNvPr>
@@ -666,7 +666,7 @@
           <a:bodyPr/>
           <a:lstStyle/>
           <a:p>
-            <a:fld id="{E59C474A-60D2-4158-8EE8-007BD26A9F4C}" type="datetimeFigureOut">
+            <a:fld id="{DA54600A-7C73-4D61-AAC6-1A383BA0CE2F}" type="datetimeFigureOut">
               <a:rPr lang="ru-RU" smtClean="0"/>
               <a:t>27.10.2026</a:t>
             </a:fld>
@@ -679,7 +679,7 @@
           <p:cNvPr id="5" name="Нижний колонтитул 4">
             <a:extLst>
               <a:ext uri="{FF2B5EF4-FFF2-40B4-BE49-F238E27FC236}">
-                <a16:creationId xmlns:a16="http://schemas.microsoft.com/office/drawing/2014/main" id="{F493B322-5367-D01B-3E8C-91075D163A6D}"/>
+                <a16:creationId xmlns:a16="http://schemas.microsoft.com/office/drawing/2014/main" id="{AA96198E-9480-FE75-9B7C-10ADF3DF20DF}"/>
               </a:ext>
             </a:extLst>
           </p:cNvPr>
@@ -704,7 +704,7 @@
           <p:cNvPr id="6" name="Номер слайда 5">
             <a:extLst>
               <a:ext uri="{FF2B5EF4-FFF2-40B4-BE49-F238E27FC236}">
-                <a16:creationId xmlns:a16="http://schemas.microsoft.com/office/drawing/2014/main" id="{B994D7CC-CC39-5F5A-3B00-35BF53D8E4C0}"/>
+                <a16:creationId xmlns:a16="http://schemas.microsoft.com/office/drawing/2014/main" id="{2E390D75-CF09-6A18-D3BE-EB6E50203CB3}"/>
               </a:ext>
             </a:extLst>
           </p:cNvPr>
@@ -720,7 +720,7 @@
           <a:bodyPr/>
           <a:lstStyle/>
           <a:p>
-            <a:fld id="{C46792AE-14C6-4C82-A727-B7D982901612}" type="slidenum">
+            <a:fld id="{89B0BC6E-28B5-43E0-97A1-E1F5E0E8A27C}" type="slidenum">
               <a:rPr lang="ru-RU" smtClean="0"/>
               <a:t>‹#›</a:t>
             </a:fld>
@@ -731,7 +731,7 @@
     </p:spTree>
     <p:extLst>
       <p:ext uri="{BB962C8B-B14F-4D97-AF65-F5344CB8AC3E}">
-        <p14:creationId xmlns:p14="http://schemas.microsoft.com/office/powerpoint/2010/main" val="2044241200"/>
+        <p14:creationId xmlns:p14="http://schemas.microsoft.com/office/powerpoint/2010/main" val="4124812989"/>
       </p:ext>
     </p:extLst>
   </p:cSld>
@@ -763,7 +763,7 @@
           <p:cNvPr id="2" name="Заголовок 1">
             <a:extLst>
               <a:ext uri="{FF2B5EF4-FFF2-40B4-BE49-F238E27FC236}">
-                <a16:creationId xmlns:a16="http://schemas.microsoft.com/office/drawing/2014/main" id="{A7425155-ED5A-299F-3EC6-F1B08068F298}"/>
+                <a16:creationId xmlns:a16="http://schemas.microsoft.com/office/drawing/2014/main" id="{79CA57DC-E04B-26FC-B015-D5D930B39D16}"/>
               </a:ext>
             </a:extLst>
           </p:cNvPr>
@@ -791,7 +791,7 @@
           <p:cNvPr id="3" name="Объект 2">
             <a:extLst>
               <a:ext uri="{FF2B5EF4-FFF2-40B4-BE49-F238E27FC236}">
-                <a16:creationId xmlns:a16="http://schemas.microsoft.com/office/drawing/2014/main" id="{1CE2A61C-6576-BE6B-9E4F-43714477BF54}"/>
+                <a16:creationId xmlns:a16="http://schemas.microsoft.com/office/drawing/2014/main" id="{EE528881-308D-A82B-0352-8B72DFC5A062}"/>
               </a:ext>
             </a:extLst>
           </p:cNvPr>
@@ -848,7 +848,7 @@
           <p:cNvPr id="4" name="Дата 3">
             <a:extLst>
               <a:ext uri="{FF2B5EF4-FFF2-40B4-BE49-F238E27FC236}">
-                <a16:creationId xmlns:a16="http://schemas.microsoft.com/office/drawing/2014/main" id="{51F05E22-3485-53DD-DBB1-2EA0981181F0}"/>
+                <a16:creationId xmlns:a16="http://schemas.microsoft.com/office/drawing/2014/main" id="{A9B33320-F20D-A540-C77E-F05E79D6E5E7}"/>
               </a:ext>
             </a:extLst>
           </p:cNvPr>
@@ -864,7 +864,7 @@
           <a:bodyPr/>
           <a:lstStyle/>
           <a:p>
-            <a:fld id="{E59C474A-60D2-4158-8EE8-007BD26A9F4C}" type="datetimeFigureOut">
+            <a:fld id="{DA54600A-7C73-4D61-AAC6-1A383BA0CE2F}" type="datetimeFigureOut">
               <a:rPr lang="ru-RU" smtClean="0"/>
               <a:t>27.10.2026</a:t>
             </a:fld>
@@ -877,7 +877,7 @@
           <p:cNvPr id="5" name="Нижний колонтитул 4">
             <a:extLst>
               <a:ext uri="{FF2B5EF4-FFF2-40B4-BE49-F238E27FC236}">
-                <a16:creationId xmlns:a16="http://schemas.microsoft.com/office/drawing/2014/main" id="{30CBCF79-5B9E-8F3C-DEA2-4674B6C64790}"/>
+                <a16:creationId xmlns:a16="http://schemas.microsoft.com/office/drawing/2014/main" id="{0BF6E8E9-C12C-733A-68AF-EB2877FD7F65}"/>
               </a:ext>
             </a:extLst>
           </p:cNvPr>
@@ -902,7 +902,7 @@
           <p:cNvPr id="6" name="Номер слайда 5">
             <a:extLst>
               <a:ext uri="{FF2B5EF4-FFF2-40B4-BE49-F238E27FC236}">
-                <a16:creationId xmlns:a16="http://schemas.microsoft.com/office/drawing/2014/main" id="{BD4A0D85-63B3-E517-9E6B-C4201CB6ED3A}"/>
+                <a16:creationId xmlns:a16="http://schemas.microsoft.com/office/drawing/2014/main" id="{FFBCCA30-450E-187C-B7B6-5B6E07371A3F}"/>
               </a:ext>
             </a:extLst>
           </p:cNvPr>
@@ -918,7 +918,7 @@
           <a:bodyPr/>
           <a:lstStyle/>
           <a:p>
-            <a:fld id="{C46792AE-14C6-4C82-A727-B7D982901612}" type="slidenum">
+            <a:fld id="{89B0BC6E-28B5-43E0-97A1-E1F5E0E8A27C}" type="slidenum">
               <a:rPr lang="ru-RU" smtClean="0"/>
               <a:t>‹#›</a:t>
             </a:fld>
@@ -929,7 +929,7 @@
     </p:spTree>
     <p:extLst>
       <p:ext uri="{BB962C8B-B14F-4D97-AF65-F5344CB8AC3E}">
-        <p14:creationId xmlns:p14="http://schemas.microsoft.com/office/powerpoint/2010/main" val="587245193"/>
+        <p14:creationId xmlns:p14="http://schemas.microsoft.com/office/powerpoint/2010/main" val="500441612"/>
       </p:ext>
     </p:extLst>
   </p:cSld>
@@ -961,7 +961,7 @@
           <p:cNvPr id="2" name="Заголовок 1">
             <a:extLst>
               <a:ext uri="{FF2B5EF4-FFF2-40B4-BE49-F238E27FC236}">
-                <a16:creationId xmlns:a16="http://schemas.microsoft.com/office/drawing/2014/main" id="{46E88FAE-1E78-2A6A-108A-6E5E053A074E}"/>
+                <a16:creationId xmlns:a16="http://schemas.microsoft.com/office/drawing/2014/main" id="{BCD6EF0A-8B5A-3556-57E7-00C7261FD0CA}"/>
               </a:ext>
             </a:extLst>
           </p:cNvPr>
@@ -998,7 +998,7 @@
           <p:cNvPr id="3" name="Текст 2">
             <a:extLst>
               <a:ext uri="{FF2B5EF4-FFF2-40B4-BE49-F238E27FC236}">
-                <a16:creationId xmlns:a16="http://schemas.microsoft.com/office/drawing/2014/main" id="{BCAF612A-46F7-0700-2F25-9647BD09111B}"/>
+                <a16:creationId xmlns:a16="http://schemas.microsoft.com/office/drawing/2014/main" id="{772E3463-012B-CD62-453C-8645C40DCCC9}"/>
               </a:ext>
             </a:extLst>
           </p:cNvPr>
@@ -1123,7 +1123,7 @@
           <p:cNvPr id="4" name="Дата 3">
             <a:extLst>
               <a:ext uri="{FF2B5EF4-FFF2-40B4-BE49-F238E27FC236}">
-                <a16:creationId xmlns:a16="http://schemas.microsoft.com/office/drawing/2014/main" id="{F4B057A0-F9BA-4482-CA15-99820444C69D}"/>
+                <a16:creationId xmlns:a16="http://schemas.microsoft.com/office/drawing/2014/main" id="{C7FDF1D0-6764-D0F0-636B-BA252C368903}"/>
               </a:ext>
             </a:extLst>
           </p:cNvPr>
@@ -1139,7 +1139,7 @@
           <a:bodyPr/>
           <a:lstStyle/>
           <a:p>
-            <a:fld id="{E59C474A-60D2-4158-8EE8-007BD26A9F4C}" type="datetimeFigureOut">
+            <a:fld id="{DA54600A-7C73-4D61-AAC6-1A383BA0CE2F}" type="datetimeFigureOut">
               <a:rPr lang="ru-RU" smtClean="0"/>
               <a:t>27.10.2026</a:t>
             </a:fld>
@@ -1152,7 +1152,7 @@
           <p:cNvPr id="5" name="Нижний колонтитул 4">
             <a:extLst>
               <a:ext uri="{FF2B5EF4-FFF2-40B4-BE49-F238E27FC236}">
-                <a16:creationId xmlns:a16="http://schemas.microsoft.com/office/drawing/2014/main" id="{CBBCF0DC-0012-1E64-776C-B294A3628E2A}"/>
+                <a16:creationId xmlns:a16="http://schemas.microsoft.com/office/drawing/2014/main" id="{3B2361EF-459C-E21D-FB81-B61738A4D990}"/>
               </a:ext>
             </a:extLst>
           </p:cNvPr>
@@ -1177,7 +1177,7 @@
           <p:cNvPr id="6" name="Номер слайда 5">
             <a:extLst>
               <a:ext uri="{FF2B5EF4-FFF2-40B4-BE49-F238E27FC236}">
-                <a16:creationId xmlns:a16="http://schemas.microsoft.com/office/drawing/2014/main" id="{73287116-DDFC-136B-35DA-720A00122984}"/>
+                <a16:creationId xmlns:a16="http://schemas.microsoft.com/office/drawing/2014/main" id="{D14D12FE-EEE5-7EBC-E470-817FCE2090D3}"/>
               </a:ext>
             </a:extLst>
           </p:cNvPr>
@@ -1193,7 +1193,7 @@
           <a:bodyPr/>
           <a:lstStyle/>
           <a:p>
-            <a:fld id="{C46792AE-14C6-4C82-A727-B7D982901612}" type="slidenum">
+            <a:fld id="{89B0BC6E-28B5-43E0-97A1-E1F5E0E8A27C}" type="slidenum">
               <a:rPr lang="ru-RU" smtClean="0"/>
               <a:t>‹#›</a:t>
             </a:fld>
@@ -1204,7 +1204,7 @@
     </p:spTree>
     <p:extLst>
       <p:ext uri="{BB962C8B-B14F-4D97-AF65-F5344CB8AC3E}">
-        <p14:creationId xmlns:p14="http://schemas.microsoft.com/office/powerpoint/2010/main" val="978591335"/>
+        <p14:creationId xmlns:p14="http://schemas.microsoft.com/office/powerpoint/2010/main" val="2158147224"/>
       </p:ext>
     </p:extLst>
   </p:cSld>
@@ -1236,7 +1236,7 @@
           <p:cNvPr id="2" name="Заголовок 1">
             <a:extLst>
               <a:ext uri="{FF2B5EF4-FFF2-40B4-BE49-F238E27FC236}">
-                <a16:creationId xmlns:a16="http://schemas.microsoft.com/office/drawing/2014/main" id="{D84F1E65-46A0-66A6-9DAD-1D1237A82C32}"/>
+                <a16:creationId xmlns:a16="http://schemas.microsoft.com/office/drawing/2014/main" id="{D791CB28-0C9F-DE3F-4221-F1D131E61754}"/>
               </a:ext>
             </a:extLst>
           </p:cNvPr>
@@ -1264,7 +1264,7 @@
           <p:cNvPr id="3" name="Объект 2">
             <a:extLst>
               <a:ext uri="{FF2B5EF4-FFF2-40B4-BE49-F238E27FC236}">
-                <a16:creationId xmlns:a16="http://schemas.microsoft.com/office/drawing/2014/main" id="{BABAD8F6-A6C9-231D-1EB6-BA728F822EEE}"/>
+                <a16:creationId xmlns:a16="http://schemas.microsoft.com/office/drawing/2014/main" id="{AEA6C0FD-4962-FD14-FF02-85D98CB9185D}"/>
               </a:ext>
             </a:extLst>
           </p:cNvPr>
@@ -1326,7 +1326,7 @@
           <p:cNvPr id="4" name="Объект 3">
             <a:extLst>
               <a:ext uri="{FF2B5EF4-FFF2-40B4-BE49-F238E27FC236}">
-                <a16:creationId xmlns:a16="http://schemas.microsoft.com/office/drawing/2014/main" id="{CA609802-4DD8-5C18-B370-88055DBE33BB}"/>
+                <a16:creationId xmlns:a16="http://schemas.microsoft.com/office/drawing/2014/main" id="{DB99F2E6-6563-02C7-F920-4B69279AA892}"/>
               </a:ext>
             </a:extLst>
           </p:cNvPr>
@@ -1388,7 +1388,7 @@
           <p:cNvPr id="5" name="Дата 4">
             <a:extLst>
               <a:ext uri="{FF2B5EF4-FFF2-40B4-BE49-F238E27FC236}">
-                <a16:creationId xmlns:a16="http://schemas.microsoft.com/office/drawing/2014/main" id="{E99CF898-4D3F-FDD1-095C-418024ECC2BD}"/>
+                <a16:creationId xmlns:a16="http://schemas.microsoft.com/office/drawing/2014/main" id="{7F4AB91F-CA6B-A923-4AC2-3451145A7DD6}"/>
               </a:ext>
             </a:extLst>
           </p:cNvPr>
@@ -1404,7 +1404,7 @@
           <a:bodyPr/>
           <a:lstStyle/>
           <a:p>
-            <a:fld id="{E59C474A-60D2-4158-8EE8-007BD26A9F4C}" type="datetimeFigureOut">
+            <a:fld id="{DA54600A-7C73-4D61-AAC6-1A383BA0CE2F}" type="datetimeFigureOut">
               <a:rPr lang="ru-RU" smtClean="0"/>
               <a:t>27.10.2026</a:t>
             </a:fld>
@@ -1417,7 +1417,7 @@
           <p:cNvPr id="6" name="Нижний колонтитул 5">
             <a:extLst>
               <a:ext uri="{FF2B5EF4-FFF2-40B4-BE49-F238E27FC236}">
-                <a16:creationId xmlns:a16="http://schemas.microsoft.com/office/drawing/2014/main" id="{B0677554-9CEC-9FF4-5199-88FCBB544FFD}"/>
+                <a16:creationId xmlns:a16="http://schemas.microsoft.com/office/drawing/2014/main" id="{2ED5230E-5E0A-3C61-401F-3548562BF191}"/>
               </a:ext>
             </a:extLst>
           </p:cNvPr>
@@ -1442,7 +1442,7 @@
           <p:cNvPr id="7" name="Номер слайда 6">
             <a:extLst>
               <a:ext uri="{FF2B5EF4-FFF2-40B4-BE49-F238E27FC236}">
-                <a16:creationId xmlns:a16="http://schemas.microsoft.com/office/drawing/2014/main" id="{3B5155E1-F613-8BEB-72F4-70C46BCC6EEF}"/>
+                <a16:creationId xmlns:a16="http://schemas.microsoft.com/office/drawing/2014/main" id="{AA0526AB-D8A0-F7BA-7477-DFAE0BB9CA88}"/>
               </a:ext>
             </a:extLst>
           </p:cNvPr>
@@ -1458,7 +1458,7 @@
           <a:bodyPr/>
           <a:lstStyle/>
           <a:p>
-            <a:fld id="{C46792AE-14C6-4C82-A727-B7D982901612}" type="slidenum">
+            <a:fld id="{89B0BC6E-28B5-43E0-97A1-E1F5E0E8A27C}" type="slidenum">
               <a:rPr lang="ru-RU" smtClean="0"/>
               <a:t>‹#›</a:t>
             </a:fld>
@@ -1469,7 +1469,7 @@
     </p:spTree>
     <p:extLst>
       <p:ext uri="{BB962C8B-B14F-4D97-AF65-F5344CB8AC3E}">
-        <p14:creationId xmlns:p14="http://schemas.microsoft.com/office/powerpoint/2010/main" val="3622133066"/>
+        <p14:creationId xmlns:p14="http://schemas.microsoft.com/office/powerpoint/2010/main" val="1639023027"/>
       </p:ext>
     </p:extLst>
   </p:cSld>
@@ -1501,7 +1501,7 @@
           <p:cNvPr id="2" name="Заголовок 1">
             <a:extLst>
               <a:ext uri="{FF2B5EF4-FFF2-40B4-BE49-F238E27FC236}">
-                <a16:creationId xmlns:a16="http://schemas.microsoft.com/office/drawing/2014/main" id="{7118F97E-9334-6B8F-8D3C-05A6F31CEE47}"/>
+                <a16:creationId xmlns:a16="http://schemas.microsoft.com/office/drawing/2014/main" id="{DDE670AF-FDA6-8E69-7060-CA10C5A3DEA8}"/>
               </a:ext>
             </a:extLst>
           </p:cNvPr>
@@ -1534,7 +1534,7 @@
           <p:cNvPr id="3" name="Текст 2">
             <a:extLst>
               <a:ext uri="{FF2B5EF4-FFF2-40B4-BE49-F238E27FC236}">
-                <a16:creationId xmlns:a16="http://schemas.microsoft.com/office/drawing/2014/main" id="{064AC063-8F43-2062-60BC-E1944B616E94}"/>
+                <a16:creationId xmlns:a16="http://schemas.microsoft.com/office/drawing/2014/main" id="{821403CD-B05A-99B3-CB8D-1B4B559878AE}"/>
               </a:ext>
             </a:extLst>
           </p:cNvPr>
@@ -1605,7 +1605,7 @@
           <p:cNvPr id="4" name="Объект 3">
             <a:extLst>
               <a:ext uri="{FF2B5EF4-FFF2-40B4-BE49-F238E27FC236}">
-                <a16:creationId xmlns:a16="http://schemas.microsoft.com/office/drawing/2014/main" id="{97FFBD50-C368-FABD-FB29-7E768C324E65}"/>
+                <a16:creationId xmlns:a16="http://schemas.microsoft.com/office/drawing/2014/main" id="{ADB01A31-2D8F-1740-24B5-10D5550172ED}"/>
               </a:ext>
             </a:extLst>
           </p:cNvPr>
@@ -1667,7 +1667,7 @@
           <p:cNvPr id="5" name="Текст 4">
             <a:extLst>
               <a:ext uri="{FF2B5EF4-FFF2-40B4-BE49-F238E27FC236}">
-                <a16:creationId xmlns:a16="http://schemas.microsoft.com/office/drawing/2014/main" id="{B69A39DA-2071-A8E2-2E3F-1CEAE367A990}"/>
+                <a16:creationId xmlns:a16="http://schemas.microsoft.com/office/drawing/2014/main" id="{1CC9C4EC-02E0-75BA-2DE0-5C7601B4B7E2}"/>
               </a:ext>
             </a:extLst>
           </p:cNvPr>
@@ -1738,7 +1738,7 @@
           <p:cNvPr id="6" name="Объект 5">
             <a:extLst>
               <a:ext uri="{FF2B5EF4-FFF2-40B4-BE49-F238E27FC236}">
-                <a16:creationId xmlns:a16="http://schemas.microsoft.com/office/drawing/2014/main" id="{D214D82E-E928-C973-0F8B-8DE952F3E73E}"/>
+                <a16:creationId xmlns:a16="http://schemas.microsoft.com/office/drawing/2014/main" id="{396E3BA1-CAC2-9D52-83C6-93327877F2CF}"/>
               </a:ext>
             </a:extLst>
           </p:cNvPr>
@@ -1800,7 +1800,7 @@
           <p:cNvPr id="7" name="Дата 6">
             <a:extLst>
               <a:ext uri="{FF2B5EF4-FFF2-40B4-BE49-F238E27FC236}">
-                <a16:creationId xmlns:a16="http://schemas.microsoft.com/office/drawing/2014/main" id="{E4495DF9-2792-3A5A-0A2C-A6499CDA3798}"/>
+                <a16:creationId xmlns:a16="http://schemas.microsoft.com/office/drawing/2014/main" id="{FF1ED640-819F-8666-809C-C7619DED0E9A}"/>
               </a:ext>
             </a:extLst>
           </p:cNvPr>
@@ -1816,7 +1816,7 @@
           <a:bodyPr/>
           <a:lstStyle/>
           <a:p>
-            <a:fld id="{E59C474A-60D2-4158-8EE8-007BD26A9F4C}" type="datetimeFigureOut">
+            <a:fld id="{DA54600A-7C73-4D61-AAC6-1A383BA0CE2F}" type="datetimeFigureOut">
               <a:rPr lang="ru-RU" smtClean="0"/>
               <a:t>27.10.2026</a:t>
             </a:fld>
@@ -1829,7 +1829,7 @@
           <p:cNvPr id="8" name="Нижний колонтитул 7">
             <a:extLst>
               <a:ext uri="{FF2B5EF4-FFF2-40B4-BE49-F238E27FC236}">
-                <a16:creationId xmlns:a16="http://schemas.microsoft.com/office/drawing/2014/main" id="{AAA95EB1-867F-4921-B413-DE13FCB11F15}"/>
+                <a16:creationId xmlns:a16="http://schemas.microsoft.com/office/drawing/2014/main" id="{949E0BC5-7663-45F7-7122-A51CE467BAFC}"/>
               </a:ext>
             </a:extLst>
           </p:cNvPr>
@@ -1854,7 +1854,7 @@
           <p:cNvPr id="9" name="Номер слайда 8">
             <a:extLst>
               <a:ext uri="{FF2B5EF4-FFF2-40B4-BE49-F238E27FC236}">
-                <a16:creationId xmlns:a16="http://schemas.microsoft.com/office/drawing/2014/main" id="{46F70288-2824-EE76-B534-879762D8B20B}"/>
+                <a16:creationId xmlns:a16="http://schemas.microsoft.com/office/drawing/2014/main" id="{02155C73-8FA7-D8FC-7B46-F99BAD60A95B}"/>
               </a:ext>
             </a:extLst>
           </p:cNvPr>
@@ -1870,7 +1870,7 @@
           <a:bodyPr/>
           <a:lstStyle/>
           <a:p>
-            <a:fld id="{C46792AE-14C6-4C82-A727-B7D982901612}" type="slidenum">
+            <a:fld id="{89B0BC6E-28B5-43E0-97A1-E1F5E0E8A27C}" type="slidenum">
               <a:rPr lang="ru-RU" smtClean="0"/>
               <a:t>‹#›</a:t>
             </a:fld>
@@ -1881,7 +1881,7 @@
     </p:spTree>
     <p:extLst>
       <p:ext uri="{BB962C8B-B14F-4D97-AF65-F5344CB8AC3E}">
-        <p14:creationId xmlns:p14="http://schemas.microsoft.com/office/powerpoint/2010/main" val="1795647980"/>
+        <p14:creationId xmlns:p14="http://schemas.microsoft.com/office/powerpoint/2010/main" val="3044288303"/>
       </p:ext>
     </p:extLst>
   </p:cSld>
@@ -1913,7 +1913,7 @@
           <p:cNvPr id="2" name="Заголовок 1">
             <a:extLst>
               <a:ext uri="{FF2B5EF4-FFF2-40B4-BE49-F238E27FC236}">
-                <a16:creationId xmlns:a16="http://schemas.microsoft.com/office/drawing/2014/main" id="{4173F0DC-44ED-31EE-F611-DCE1B3D49F69}"/>
+                <a16:creationId xmlns:a16="http://schemas.microsoft.com/office/drawing/2014/main" id="{00A6E70E-834A-C65B-3620-88148D8BD9FA}"/>
               </a:ext>
             </a:extLst>
           </p:cNvPr>
@@ -1941,7 +1941,7 @@
           <p:cNvPr id="3" name="Дата 2">
             <a:extLst>
               <a:ext uri="{FF2B5EF4-FFF2-40B4-BE49-F238E27FC236}">
-                <a16:creationId xmlns:a16="http://schemas.microsoft.com/office/drawing/2014/main" id="{5AD50043-977D-688F-D84E-14D18F809F39}"/>
+                <a16:creationId xmlns:a16="http://schemas.microsoft.com/office/drawing/2014/main" id="{B8FD9F28-0361-C9C1-8D75-98DA3EEEA4F3}"/>
               </a:ext>
             </a:extLst>
           </p:cNvPr>
@@ -1957,7 +1957,7 @@
           <a:bodyPr/>
           <a:lstStyle/>
           <a:p>
-            <a:fld id="{E59C474A-60D2-4158-8EE8-007BD26A9F4C}" type="datetimeFigureOut">
+            <a:fld id="{DA54600A-7C73-4D61-AAC6-1A383BA0CE2F}" type="datetimeFigureOut">
               <a:rPr lang="ru-RU" smtClean="0"/>
               <a:t>27.10.2026</a:t>
             </a:fld>
@@ -1970,7 +1970,7 @@
           <p:cNvPr id="4" name="Нижний колонтитул 3">
             <a:extLst>
               <a:ext uri="{FF2B5EF4-FFF2-40B4-BE49-F238E27FC236}">
-                <a16:creationId xmlns:a16="http://schemas.microsoft.com/office/drawing/2014/main" id="{F60226C4-E4EA-86B9-A138-766AD8CF4BEE}"/>
+                <a16:creationId xmlns:a16="http://schemas.microsoft.com/office/drawing/2014/main" id="{F3AD05A3-29A9-0274-A53D-EE7B38F3F9F1}"/>
               </a:ext>
             </a:extLst>
           </p:cNvPr>
@@ -1995,7 +1995,7 @@
           <p:cNvPr id="5" name="Номер слайда 4">
             <a:extLst>
               <a:ext uri="{FF2B5EF4-FFF2-40B4-BE49-F238E27FC236}">
-                <a16:creationId xmlns:a16="http://schemas.microsoft.com/office/drawing/2014/main" id="{DF27D979-E847-A575-537D-F76158D7EC84}"/>
+                <a16:creationId xmlns:a16="http://schemas.microsoft.com/office/drawing/2014/main" id="{A508FE6F-4106-5E38-60B5-03EAE9FAF793}"/>
               </a:ext>
             </a:extLst>
           </p:cNvPr>
@@ -2011,7 +2011,7 @@
           <a:bodyPr/>
           <a:lstStyle/>
           <a:p>
-            <a:fld id="{C46792AE-14C6-4C82-A727-B7D982901612}" type="slidenum">
+            <a:fld id="{89B0BC6E-28B5-43E0-97A1-E1F5E0E8A27C}" type="slidenum">
               <a:rPr lang="ru-RU" smtClean="0"/>
               <a:t>‹#›</a:t>
             </a:fld>
@@ -2022,7 +2022,7 @@
     </p:spTree>
     <p:extLst>
       <p:ext uri="{BB962C8B-B14F-4D97-AF65-F5344CB8AC3E}">
-        <p14:creationId xmlns:p14="http://schemas.microsoft.com/office/powerpoint/2010/main" val="3995217179"/>
+        <p14:creationId xmlns:p14="http://schemas.microsoft.com/office/powerpoint/2010/main" val="2803690158"/>
       </p:ext>
     </p:extLst>
   </p:cSld>
@@ -2054,7 +2054,7 @@
           <p:cNvPr id="2" name="Дата 1">
             <a:extLst>
               <a:ext uri="{FF2B5EF4-FFF2-40B4-BE49-F238E27FC236}">
-                <a16:creationId xmlns:a16="http://schemas.microsoft.com/office/drawing/2014/main" id="{D3B66C7E-8F08-990F-D674-519FB9F7C16D}"/>
+                <a16:creationId xmlns:a16="http://schemas.microsoft.com/office/drawing/2014/main" id="{36F6E1D1-8CB9-8659-18AD-CB2BECC280CE}"/>
               </a:ext>
             </a:extLst>
           </p:cNvPr>
@@ -2070,7 +2070,7 @@
           <a:bodyPr/>
           <a:lstStyle/>
           <a:p>
-            <a:fld id="{E59C474A-60D2-4158-8EE8-007BD26A9F4C}" type="datetimeFigureOut">
+            <a:fld id="{DA54600A-7C73-4D61-AAC6-1A383BA0CE2F}" type="datetimeFigureOut">
               <a:rPr lang="ru-RU" smtClean="0"/>
               <a:t>27.10.2026</a:t>
             </a:fld>
@@ -2083,7 +2083,7 @@
           <p:cNvPr id="3" name="Нижний колонтитул 2">
             <a:extLst>
               <a:ext uri="{FF2B5EF4-FFF2-40B4-BE49-F238E27FC236}">
-                <a16:creationId xmlns:a16="http://schemas.microsoft.com/office/drawing/2014/main" id="{BDD5F8A1-8DC2-1755-4D9F-EFB4204ED090}"/>
+                <a16:creationId xmlns:a16="http://schemas.microsoft.com/office/drawing/2014/main" id="{BDD64C94-6134-E5FC-CF3B-8367E5A3CCFA}"/>
               </a:ext>
             </a:extLst>
           </p:cNvPr>
@@ -2108,7 +2108,7 @@
           <p:cNvPr id="4" name="Номер слайда 3">
             <a:extLst>
               <a:ext uri="{FF2B5EF4-FFF2-40B4-BE49-F238E27FC236}">
-                <a16:creationId xmlns:a16="http://schemas.microsoft.com/office/drawing/2014/main" id="{48252035-CB6E-E893-CD7F-FED75BA849A2}"/>
+                <a16:creationId xmlns:a16="http://schemas.microsoft.com/office/drawing/2014/main" id="{85EDD1B7-C052-E9B6-ABCF-90B2C64D90D6}"/>
               </a:ext>
             </a:extLst>
           </p:cNvPr>
@@ -2124,7 +2124,7 @@
           <a:bodyPr/>
           <a:lstStyle/>
           <a:p>
-            <a:fld id="{C46792AE-14C6-4C82-A727-B7D982901612}" type="slidenum">
+            <a:fld id="{89B0BC6E-28B5-43E0-97A1-E1F5E0E8A27C}" type="slidenum">
               <a:rPr lang="ru-RU" smtClean="0"/>
               <a:t>‹#›</a:t>
             </a:fld>
@@ -2135,7 +2135,7 @@
     </p:spTree>
     <p:extLst>
       <p:ext uri="{BB962C8B-B14F-4D97-AF65-F5344CB8AC3E}">
-        <p14:creationId xmlns:p14="http://schemas.microsoft.com/office/powerpoint/2010/main" val="359910129"/>
+        <p14:creationId xmlns:p14="http://schemas.microsoft.com/office/powerpoint/2010/main" val="1441162800"/>
       </p:ext>
     </p:extLst>
   </p:cSld>
@@ -2167,7 +2167,7 @@
           <p:cNvPr id="2" name="Заголовок 1">
             <a:extLst>
               <a:ext uri="{FF2B5EF4-FFF2-40B4-BE49-F238E27FC236}">
-                <a16:creationId xmlns:a16="http://schemas.microsoft.com/office/drawing/2014/main" id="{5BD8F507-CDE9-3BD4-9FAB-B510AD926B4C}"/>
+                <a16:creationId xmlns:a16="http://schemas.microsoft.com/office/drawing/2014/main" id="{EC81FE4E-1746-5C25-74AD-41CA24590A08}"/>
               </a:ext>
             </a:extLst>
           </p:cNvPr>
@@ -2204,7 +2204,7 @@
           <p:cNvPr id="3" name="Объект 2">
             <a:extLst>
               <a:ext uri="{FF2B5EF4-FFF2-40B4-BE49-F238E27FC236}">
-                <a16:creationId xmlns:a16="http://schemas.microsoft.com/office/drawing/2014/main" id="{3DD94F4A-438B-3A7D-467B-4C8548915FC8}"/>
+                <a16:creationId xmlns:a16="http://schemas.microsoft.com/office/drawing/2014/main" id="{AA1575EE-4172-7921-13B5-9137042EF1B8}"/>
               </a:ext>
             </a:extLst>
           </p:cNvPr>
@@ -2294,7 +2294,7 @@
           <p:cNvPr id="4" name="Текст 3">
             <a:extLst>
               <a:ext uri="{FF2B5EF4-FFF2-40B4-BE49-F238E27FC236}">
-                <a16:creationId xmlns:a16="http://schemas.microsoft.com/office/drawing/2014/main" id="{63CDD4D3-B8AF-0411-6BC4-CBE2CB5B1D0D}"/>
+                <a16:creationId xmlns:a16="http://schemas.microsoft.com/office/drawing/2014/main" id="{13CA8B9B-4929-85D3-247C-CB496E659612}"/>
               </a:ext>
             </a:extLst>
           </p:cNvPr>
@@ -2365,7 +2365,7 @@
           <p:cNvPr id="5" name="Дата 4">
             <a:extLst>
               <a:ext uri="{FF2B5EF4-FFF2-40B4-BE49-F238E27FC236}">
-                <a16:creationId xmlns:a16="http://schemas.microsoft.com/office/drawing/2014/main" id="{823E9446-5084-F8DC-5457-0353F230C28E}"/>
+                <a16:creationId xmlns:a16="http://schemas.microsoft.com/office/drawing/2014/main" id="{27C13D2D-49F2-C06C-AC40-ED4CFB35C296}"/>
               </a:ext>
             </a:extLst>
           </p:cNvPr>
@@ -2381,7 +2381,7 @@
           <a:bodyPr/>
           <a:lstStyle/>
           <a:p>
-            <a:fld id="{E59C474A-60D2-4158-8EE8-007BD26A9F4C}" type="datetimeFigureOut">
+            <a:fld id="{DA54600A-7C73-4D61-AAC6-1A383BA0CE2F}" type="datetimeFigureOut">
               <a:rPr lang="ru-RU" smtClean="0"/>
               <a:t>27.10.2026</a:t>
             </a:fld>
@@ -2394,7 +2394,7 @@
           <p:cNvPr id="6" name="Нижний колонтитул 5">
             <a:extLst>
               <a:ext uri="{FF2B5EF4-FFF2-40B4-BE49-F238E27FC236}">
-                <a16:creationId xmlns:a16="http://schemas.microsoft.com/office/drawing/2014/main" id="{8FF0B145-BEF6-3D1B-8F7C-CDA751002CD1}"/>
+                <a16:creationId xmlns:a16="http://schemas.microsoft.com/office/drawing/2014/main" id="{AFEE2456-970D-A7FA-A5FF-949976D54590}"/>
               </a:ext>
             </a:extLst>
           </p:cNvPr>
@@ -2419,7 +2419,7 @@
           <p:cNvPr id="7" name="Номер слайда 6">
             <a:extLst>
               <a:ext uri="{FF2B5EF4-FFF2-40B4-BE49-F238E27FC236}">
-                <a16:creationId xmlns:a16="http://schemas.microsoft.com/office/drawing/2014/main" id="{D9758317-1353-6714-F378-A6608CE1E1B1}"/>
+                <a16:creationId xmlns:a16="http://schemas.microsoft.com/office/drawing/2014/main" id="{F7C8FEA4-3515-3CE6-E3A7-701DE2CDD9B8}"/>
               </a:ext>
             </a:extLst>
           </p:cNvPr>
@@ -2435,7 +2435,7 @@
           <a:bodyPr/>
           <a:lstStyle/>
           <a:p>
-            <a:fld id="{C46792AE-14C6-4C82-A727-B7D982901612}" type="slidenum">
+            <a:fld id="{89B0BC6E-28B5-43E0-97A1-E1F5E0E8A27C}" type="slidenum">
               <a:rPr lang="ru-RU" smtClean="0"/>
               <a:t>‹#›</a:t>
             </a:fld>
@@ -2446,7 +2446,7 @@
     </p:spTree>
     <p:extLst>
       <p:ext uri="{BB962C8B-B14F-4D97-AF65-F5344CB8AC3E}">
-        <p14:creationId xmlns:p14="http://schemas.microsoft.com/office/powerpoint/2010/main" val="937961328"/>
+        <p14:creationId xmlns:p14="http://schemas.microsoft.com/office/powerpoint/2010/main" val="3908146423"/>
       </p:ext>
     </p:extLst>
   </p:cSld>
@@ -2478,7 +2478,7 @@
           <p:cNvPr id="2" name="Заголовок 1">
             <a:extLst>
               <a:ext uri="{FF2B5EF4-FFF2-40B4-BE49-F238E27FC236}">
-                <a16:creationId xmlns:a16="http://schemas.microsoft.com/office/drawing/2014/main" id="{F27A972A-46A6-27AF-DE4D-574BCC688EFB}"/>
+                <a16:creationId xmlns:a16="http://schemas.microsoft.com/office/drawing/2014/main" id="{B44AD521-9B87-AD11-F3AC-21F50242AA93}"/>
               </a:ext>
             </a:extLst>
           </p:cNvPr>
@@ -2515,7 +2515,7 @@
           <p:cNvPr id="3" name="Рисунок 2">
             <a:extLst>
               <a:ext uri="{FF2B5EF4-FFF2-40B4-BE49-F238E27FC236}">
-                <a16:creationId xmlns:a16="http://schemas.microsoft.com/office/drawing/2014/main" id="{87D81D93-AC91-F199-5347-26EAD2B9F0A3}"/>
+                <a16:creationId xmlns:a16="http://schemas.microsoft.com/office/drawing/2014/main" id="{91EADD4C-FE9C-3BF6-2835-B4533B1ECFE0}"/>
               </a:ext>
             </a:extLst>
           </p:cNvPr>
@@ -2582,7 +2582,7 @@
           <p:cNvPr id="4" name="Текст 3">
             <a:extLst>
               <a:ext uri="{FF2B5EF4-FFF2-40B4-BE49-F238E27FC236}">
-                <a16:creationId xmlns:a16="http://schemas.microsoft.com/office/drawing/2014/main" id="{CAAEA9D1-7572-1FBA-17AF-CEECE8EE092E}"/>
+                <a16:creationId xmlns:a16="http://schemas.microsoft.com/office/drawing/2014/main" id="{A551969D-FFFB-4343-73AE-BBE12094BC6E}"/>
               </a:ext>
             </a:extLst>
           </p:cNvPr>
@@ -2653,7 +2653,7 @@
           <p:cNvPr id="5" name="Дата 4">
             <a:extLst>
               <a:ext uri="{FF2B5EF4-FFF2-40B4-BE49-F238E27FC236}">
-                <a16:creationId xmlns:a16="http://schemas.microsoft.com/office/drawing/2014/main" id="{FB341240-4F85-1599-9A29-90C9DA42F838}"/>
+                <a16:creationId xmlns:a16="http://schemas.microsoft.com/office/drawing/2014/main" id="{6F4FC320-8E24-88BE-D4AF-0F42FEF7D088}"/>
               </a:ext>
             </a:extLst>
           </p:cNvPr>
@@ -2669,7 +2669,7 @@
           <a:bodyPr/>
           <a:lstStyle/>
           <a:p>
-            <a:fld id="{E59C474A-60D2-4158-8EE8-007BD26A9F4C}" type="datetimeFigureOut">
+            <a:fld id="{DA54600A-7C73-4D61-AAC6-1A383BA0CE2F}" type="datetimeFigureOut">
               <a:rPr lang="ru-RU" smtClean="0"/>
               <a:t>27.10.2026</a:t>
             </a:fld>
@@ -2682,7 +2682,7 @@
           <p:cNvPr id="6" name="Нижний колонтитул 5">
             <a:extLst>
               <a:ext uri="{FF2B5EF4-FFF2-40B4-BE49-F238E27FC236}">
-                <a16:creationId xmlns:a16="http://schemas.microsoft.com/office/drawing/2014/main" id="{B8811EA4-23A9-5CDA-5C2D-06DCB3EA0EE0}"/>
+                <a16:creationId xmlns:a16="http://schemas.microsoft.com/office/drawing/2014/main" id="{3C2773BB-02FD-B490-B8D2-A406FB7EB127}"/>
               </a:ext>
             </a:extLst>
           </p:cNvPr>
@@ -2707,7 +2707,7 @@
           <p:cNvPr id="7" name="Номер слайда 6">
             <a:extLst>
               <a:ext uri="{FF2B5EF4-FFF2-40B4-BE49-F238E27FC236}">
-                <a16:creationId xmlns:a16="http://schemas.microsoft.com/office/drawing/2014/main" id="{5709D90F-15FD-0D9A-62ED-25F4FDEF1541}"/>
+                <a16:creationId xmlns:a16="http://schemas.microsoft.com/office/drawing/2014/main" id="{92F4B2B3-FB57-A0D8-4278-341B8B57E11F}"/>
               </a:ext>
             </a:extLst>
           </p:cNvPr>
@@ -2723,7 +2723,7 @@
           <a:bodyPr/>
           <a:lstStyle/>
           <a:p>
-            <a:fld id="{C46792AE-14C6-4C82-A727-B7D982901612}" type="slidenum">
+            <a:fld id="{89B0BC6E-28B5-43E0-97A1-E1F5E0E8A27C}" type="slidenum">
               <a:rPr lang="ru-RU" smtClean="0"/>
               <a:t>‹#›</a:t>
             </a:fld>
@@ -2734,7 +2734,7 @@
     </p:spTree>
     <p:extLst>
       <p:ext uri="{BB962C8B-B14F-4D97-AF65-F5344CB8AC3E}">
-        <p14:creationId xmlns:p14="http://schemas.microsoft.com/office/powerpoint/2010/main" val="1363945909"/>
+        <p14:creationId xmlns:p14="http://schemas.microsoft.com/office/powerpoint/2010/main" val="987814872"/>
       </p:ext>
     </p:extLst>
   </p:cSld>
@@ -2771,7 +2771,7 @@
           <p:cNvPr id="2" name="Заголовок 1">
             <a:extLst>
               <a:ext uri="{FF2B5EF4-FFF2-40B4-BE49-F238E27FC236}">
-                <a16:creationId xmlns:a16="http://schemas.microsoft.com/office/drawing/2014/main" id="{F4E296BB-370A-C98E-32F7-8FCCA0B3C419}"/>
+                <a16:creationId xmlns:a16="http://schemas.microsoft.com/office/drawing/2014/main" id="{5FA30F8C-55AC-22C5-8624-643B3DDE68A1}"/>
               </a:ext>
             </a:extLst>
           </p:cNvPr>
@@ -2809,7 +2809,7 @@
           <p:cNvPr id="3" name="Текст 2">
             <a:extLst>
               <a:ext uri="{FF2B5EF4-FFF2-40B4-BE49-F238E27FC236}">
-                <a16:creationId xmlns:a16="http://schemas.microsoft.com/office/drawing/2014/main" id="{8797A61E-791E-54F8-F00C-7EEF660A0C1C}"/>
+                <a16:creationId xmlns:a16="http://schemas.microsoft.com/office/drawing/2014/main" id="{0EA1579F-3FD9-90C0-E42B-BEE1E1EA0570}"/>
               </a:ext>
             </a:extLst>
           </p:cNvPr>
@@ -2876,7 +2876,7 @@
           <p:cNvPr id="4" name="Дата 3">
             <a:extLst>
               <a:ext uri="{FF2B5EF4-FFF2-40B4-BE49-F238E27FC236}">
-                <a16:creationId xmlns:a16="http://schemas.microsoft.com/office/drawing/2014/main" id="{DA32DADB-5E15-93E7-E8D2-D9E72884CAA4}"/>
+                <a16:creationId xmlns:a16="http://schemas.microsoft.com/office/drawing/2014/main" id="{B16EE5D2-2E5D-C74A-44C6-1E04FB97EA04}"/>
               </a:ext>
             </a:extLst>
           </p:cNvPr>
@@ -2910,7 +2910,7 @@
             </a:lvl1pPr>
           </a:lstStyle>
           <a:p>
-            <a:fld id="{E59C474A-60D2-4158-8EE8-007BD26A9F4C}" type="datetimeFigureOut">
+            <a:fld id="{DA54600A-7C73-4D61-AAC6-1A383BA0CE2F}" type="datetimeFigureOut">
               <a:rPr lang="ru-RU" smtClean="0"/>
               <a:t>27.10.2026</a:t>
             </a:fld>
@@ -2923,7 +2923,7 @@
           <p:cNvPr id="5" name="Нижний колонтитул 4">
             <a:extLst>
               <a:ext uri="{FF2B5EF4-FFF2-40B4-BE49-F238E27FC236}">
-                <a16:creationId xmlns:a16="http://schemas.microsoft.com/office/drawing/2014/main" id="{F30131D7-EC3A-5458-77B5-E28C4507D03B}"/>
+                <a16:creationId xmlns:a16="http://schemas.microsoft.com/office/drawing/2014/main" id="{0697D22B-886D-FB91-5760-9A01C2CC776A}"/>
               </a:ext>
             </a:extLst>
           </p:cNvPr>
@@ -2966,7 +2966,7 @@
           <p:cNvPr id="6" name="Номер слайда 5">
             <a:extLst>
               <a:ext uri="{FF2B5EF4-FFF2-40B4-BE49-F238E27FC236}">
-                <a16:creationId xmlns:a16="http://schemas.microsoft.com/office/drawing/2014/main" id="{8C1C4F20-3FD5-E58E-E17F-198D1DAAD91F}"/>
+                <a16:creationId xmlns:a16="http://schemas.microsoft.com/office/drawing/2014/main" id="{7D22EAFB-1433-A786-8E82-CA25391F4216}"/>
               </a:ext>
             </a:extLst>
           </p:cNvPr>
@@ -3000,7 +3000,7 @@
             </a:lvl1pPr>
           </a:lstStyle>
           <a:p>
-            <a:fld id="{C46792AE-14C6-4C82-A727-B7D982901612}" type="slidenum">
+            <a:fld id="{89B0BC6E-28B5-43E0-97A1-E1F5E0E8A27C}" type="slidenum">
               <a:rPr lang="ru-RU" smtClean="0"/>
               <a:t>‹#›</a:t>
             </a:fld>
@@ -3011,7 +3011,7 @@
     </p:spTree>
     <p:extLst>
       <p:ext uri="{BB962C8B-B14F-4D97-AF65-F5344CB8AC3E}">
-        <p14:creationId xmlns:p14="http://schemas.microsoft.com/office/powerpoint/2010/main" val="2640059833"/>
+        <p14:creationId xmlns:p14="http://schemas.microsoft.com/office/powerpoint/2010/main" val="1939492542"/>
       </p:ext>
     </p:extLst>
   </p:cSld>
@@ -3334,7 +3334,7 @@
           <p:cNvPr id="2" name="Прямоугольник 1">
             <a:extLst>
               <a:ext uri="{FF2B5EF4-FFF2-40B4-BE49-F238E27FC236}">
-                <a16:creationId xmlns:a16="http://schemas.microsoft.com/office/drawing/2014/main" id="{37B5A855-F216-443A-9D5E-8B7076DB40BC}"/>
+                <a16:creationId xmlns:a16="http://schemas.microsoft.com/office/drawing/2014/main" id="{286931D3-38ED-D60A-0B4D-89F7CF02ACC3}"/>
               </a:ext>
             </a:extLst>
           </p:cNvPr>
@@ -3350,7 +3350,7 @@
             <a:avLst/>
           </a:prstGeom>
           <a:solidFill>
-            <a:srgbClr val="F3EFF5"/>
+            <a:srgbClr val="FFFFFF"/>
           </a:solidFill>
           <a:ln w="19050" cap="flat" cmpd="sng" algn="ctr">
             <a:noFill/>
@@ -3402,7 +3402,7 @@
           <p:cNvPr id="3" name="Прямоугольник 2">
             <a:extLst>
               <a:ext uri="{FF2B5EF4-FFF2-40B4-BE49-F238E27FC236}">
-                <a16:creationId xmlns:a16="http://schemas.microsoft.com/office/drawing/2014/main" id="{A7DCCE99-FB6D-62E5-7C54-B99E47BAF8A1}"/>
+                <a16:creationId xmlns:a16="http://schemas.microsoft.com/office/drawing/2014/main" id="{31F58AB6-3449-6A5C-6279-F7FA8A6B90C7}"/>
               </a:ext>
             </a:extLst>
           </p:cNvPr>
@@ -3412,13 +3412,13 @@
         <p:spPr>
           <a:xfrm>
             <a:off x="0" y="0"/>
-            <a:ext cx="12192000" cy="101600"/>
+            <a:ext cx="12192000" cy="76200"/>
           </a:xfrm>
           <a:prstGeom prst="rect">
             <a:avLst/>
           </a:prstGeom>
           <a:solidFill>
-            <a:srgbClr val="5B4B6E"/>
+            <a:srgbClr val="1F3864"/>
           </a:solidFill>
           <a:ln w="19050" cap="flat" cmpd="sng" algn="ctr">
             <a:noFill/>
@@ -3470,7 +3470,7 @@
           <p:cNvPr id="4" name="Прямоугольник 3">
             <a:extLst>
               <a:ext uri="{FF2B5EF4-FFF2-40B4-BE49-F238E27FC236}">
-                <a16:creationId xmlns:a16="http://schemas.microsoft.com/office/drawing/2014/main" id="{19ADD509-D3E6-CCBC-DC09-5D95EC1A933A}"/>
+                <a16:creationId xmlns:a16="http://schemas.microsoft.com/office/drawing/2014/main" id="{FDAD9CC8-2CBD-F982-F64C-47476664F234}"/>
               </a:ext>
             </a:extLst>
           </p:cNvPr>
@@ -3479,14 +3479,14 @@
         </p:nvSpPr>
         <p:spPr>
           <a:xfrm>
-            <a:off x="0" y="6756400"/>
-            <a:ext cx="12192000" cy="101600"/>
+            <a:off x="0" y="6781800"/>
+            <a:ext cx="12192000" cy="76200"/>
           </a:xfrm>
           <a:prstGeom prst="rect">
             <a:avLst/>
           </a:prstGeom>
           <a:solidFill>
-            <a:srgbClr val="5B4B6E"/>
+            <a:srgbClr val="1F3864"/>
           </a:solidFill>
           <a:ln w="19050" cap="flat" cmpd="sng" algn="ctr">
             <a:noFill/>
@@ -3538,7 +3538,7 @@
           <p:cNvPr id="5" name="TextBox 4">
             <a:extLst>
               <a:ext uri="{FF2B5EF4-FFF2-40B4-BE49-F238E27FC236}">
-                <a16:creationId xmlns:a16="http://schemas.microsoft.com/office/drawing/2014/main" id="{E6CCA060-1D98-6061-374D-652E0FF5472B}"/>
+                <a16:creationId xmlns:a16="http://schemas.microsoft.com/office/drawing/2014/main" id="{D12F9565-5C14-FE6C-4E29-DE270698D52A}"/>
               </a:ext>
             </a:extLst>
           </p:cNvPr>
@@ -3547,7 +3547,7 @@
         </p:nvSpPr>
         <p:spPr>
           <a:xfrm>
-            <a:off x="762000" y="584200"/>
+            <a:off x="762000" y="609600"/>
             <a:ext cx="10668000" cy="369332"/>
           </a:xfrm>
           <a:prstGeom prst="rect">
@@ -3562,9 +3562,9 @@
           <a:lstStyle/>
           <a:p>
             <a:r>
-              <a:rPr lang="ru-RU" sz="1500">
-                <a:solidFill>
-                  <a:srgbClr val="6B6472"/>
+              <a:rPr lang="ru-RU" sz="1400">
+                <a:solidFill>
+                  <a:srgbClr val="595959"/>
                 </a:solidFill>
                 <a:latin typeface="Times New Roman" panose="02020603050405020304" pitchFamily="18" charset="0"/>
               </a:rPr>
@@ -3578,7 +3578,7 @@
           <p:cNvPr id="6" name="TextBox 5">
             <a:extLst>
               <a:ext uri="{FF2B5EF4-FFF2-40B4-BE49-F238E27FC236}">
-                <a16:creationId xmlns:a16="http://schemas.microsoft.com/office/drawing/2014/main" id="{B79BEBF2-4DF4-EACD-5A04-BB41CEBF8D2E}"/>
+                <a16:creationId xmlns:a16="http://schemas.microsoft.com/office/drawing/2014/main" id="{AA0AF65C-51AD-76F2-548C-D34598A46AC6}"/>
               </a:ext>
             </a:extLst>
           </p:cNvPr>
@@ -3587,7 +3587,7 @@
         </p:nvSpPr>
         <p:spPr>
           <a:xfrm>
-            <a:off x="762000" y="889000"/>
+            <a:off x="762000" y="914400"/>
             <a:ext cx="10668000" cy="369332"/>
           </a:xfrm>
           <a:prstGeom prst="rect">
@@ -3604,7 +3604,7 @@
             <a:r>
               <a:rPr lang="ru-RU" b="1">
                 <a:solidFill>
-                  <a:srgbClr val="2B2233"/>
+                  <a:srgbClr val="1F3864"/>
                 </a:solidFill>
                 <a:latin typeface="Times New Roman" panose="02020603050405020304" pitchFamily="18" charset="0"/>
               </a:rPr>
@@ -3618,7 +3618,7 @@
           <p:cNvPr id="7" name="TextBox 6">
             <a:extLst>
               <a:ext uri="{FF2B5EF4-FFF2-40B4-BE49-F238E27FC236}">
-                <a16:creationId xmlns:a16="http://schemas.microsoft.com/office/drawing/2014/main" id="{8659F9C3-13FA-3DA4-1EA9-A0287F9D1049}"/>
+                <a16:creationId xmlns:a16="http://schemas.microsoft.com/office/drawing/2014/main" id="{49B0DC5E-5EC2-90CC-84C9-138BD3256297}"/>
               </a:ext>
             </a:extLst>
           </p:cNvPr>
@@ -3627,7 +3627,7 @@
         </p:nvSpPr>
         <p:spPr>
           <a:xfrm>
-            <a:off x="762000" y="1320800"/>
+            <a:off x="762000" y="1346200"/>
             <a:ext cx="10668000" cy="369332"/>
           </a:xfrm>
           <a:prstGeom prst="rect">
@@ -3642,9 +3642,9 @@
           <a:lstStyle/>
           <a:p>
             <a:r>
-              <a:rPr lang="ru-RU" sz="1500">
-                <a:solidFill>
-                  <a:srgbClr val="6B6472"/>
+              <a:rPr lang="ru-RU" sz="1400">
+                <a:solidFill>
+                  <a:srgbClr val="595959"/>
                 </a:solidFill>
                 <a:latin typeface="Times New Roman" panose="02020603050405020304" pitchFamily="18" charset="0"/>
               </a:rPr>
@@ -3655,130 +3655,10 @@
       </p:sp>
       <p:sp>
         <p:nvSpPr>
-          <p:cNvPr id="8" name="TextBox 7">
-            <a:extLst>
-              <a:ext uri="{FF2B5EF4-FFF2-40B4-BE49-F238E27FC236}">
-                <a16:creationId xmlns:a16="http://schemas.microsoft.com/office/drawing/2014/main" id="{B07F4753-AD06-076C-44FC-A34C0A8A2EB0}"/>
-              </a:ext>
-            </a:extLst>
-          </p:cNvPr>
-          <p:cNvSpPr txBox="1"/>
-          <p:nvPr/>
-        </p:nvSpPr>
-        <p:spPr>
-          <a:xfrm>
-            <a:off x="762000" y="1930400"/>
-            <a:ext cx="10668000" cy="381000"/>
-          </a:xfrm>
-          <a:prstGeom prst="rect">
-            <a:avLst/>
-          </a:prstGeom>
-          <a:noFill/>
-        </p:spPr>
-        <p:txBody>
-          <a:bodyPr vert="horz" wrap="square" lIns="0" tIns="0" rIns="0" bIns="0" rtlCol="0">
-            <a:noAutofit/>
-          </a:bodyPr>
-          <a:lstStyle/>
-          <a:p>
-            <a:r>
-              <a:rPr lang="ru-RU" b="1">
-                <a:solidFill>
-                  <a:srgbClr val="5B4B6E"/>
-                </a:solidFill>
-                <a:latin typeface="Times New Roman" panose="02020603050405020304" pitchFamily="18" charset="0"/>
-              </a:rPr>
-              <a:t>ПРОЕКТНАЯ РАБОТА</a:t>
-            </a:r>
-          </a:p>
-        </p:txBody>
-      </p:sp>
-      <p:sp>
-        <p:nvSpPr>
-          <p:cNvPr id="9" name="TextBox 8">
-            <a:extLst>
-              <a:ext uri="{FF2B5EF4-FFF2-40B4-BE49-F238E27FC236}">
-                <a16:creationId xmlns:a16="http://schemas.microsoft.com/office/drawing/2014/main" id="{EA611C01-25AC-8206-6763-D3673604C103}"/>
-              </a:ext>
-            </a:extLst>
-          </p:cNvPr>
-          <p:cNvSpPr txBox="1"/>
-          <p:nvPr/>
-        </p:nvSpPr>
-        <p:spPr>
-          <a:xfrm>
-            <a:off x="762000" y="2362200"/>
-            <a:ext cx="10668000" cy="369332"/>
-          </a:xfrm>
-          <a:prstGeom prst="rect">
-            <a:avLst/>
-          </a:prstGeom>
-          <a:noFill/>
-        </p:spPr>
-        <p:txBody>
-          <a:bodyPr vert="horz" wrap="square" lIns="0" tIns="0" rIns="0" bIns="0" rtlCol="0">
-            <a:noAutofit/>
-          </a:bodyPr>
-          <a:lstStyle/>
-          <a:p>
-            <a:r>
-              <a:rPr lang="ru-RU" sz="2700" b="1">
-                <a:solidFill>
-                  <a:srgbClr val="2B2233"/>
-                </a:solidFill>
-                <a:latin typeface="Times New Roman" panose="02020603050405020304" pitchFamily="18" charset="0"/>
-              </a:rPr>
-              <a:t>Разработка информационной системы «Учебные курсы»</a:t>
-            </a:r>
-          </a:p>
-        </p:txBody>
-      </p:sp>
-      <p:sp>
-        <p:nvSpPr>
-          <p:cNvPr id="10" name="TextBox 9">
-            <a:extLst>
-              <a:ext uri="{FF2B5EF4-FFF2-40B4-BE49-F238E27FC236}">
-                <a16:creationId xmlns:a16="http://schemas.microsoft.com/office/drawing/2014/main" id="{5FBEA0E7-BCDA-C8BB-919F-4A85E5AA2A43}"/>
-              </a:ext>
-            </a:extLst>
-          </p:cNvPr>
-          <p:cNvSpPr txBox="1"/>
-          <p:nvPr/>
-        </p:nvSpPr>
-        <p:spPr>
-          <a:xfrm>
-            <a:off x="762000" y="2794000"/>
-            <a:ext cx="10668000" cy="381000"/>
-          </a:xfrm>
-          <a:prstGeom prst="rect">
-            <a:avLst/>
-          </a:prstGeom>
-          <a:noFill/>
-        </p:spPr>
-        <p:txBody>
-          <a:bodyPr vert="horz" wrap="square" lIns="0" tIns="0" rIns="0" bIns="0" rtlCol="0">
-            <a:noAutofit/>
-          </a:bodyPr>
-          <a:lstStyle/>
-          <a:p>
-            <a:r>
-              <a:rPr lang="ru-RU" sz="2200">
-                <a:solidFill>
-                  <a:srgbClr val="2B2233"/>
-                </a:solidFill>
-                <a:latin typeface="Times New Roman" panose="02020603050405020304" pitchFamily="18" charset="0"/>
-              </a:rPr>
-              <a:t>для удалённого обучения школьников</a:t>
-            </a:r>
-          </a:p>
-        </p:txBody>
-      </p:sp>
-      <p:sp>
-        <p:nvSpPr>
-          <p:cNvPr id="11" name="Прямоугольник 10">
-            <a:extLst>
-              <a:ext uri="{FF2B5EF4-FFF2-40B4-BE49-F238E27FC236}">
-                <a16:creationId xmlns:a16="http://schemas.microsoft.com/office/drawing/2014/main" id="{D369984A-80F0-003F-57D1-AC635B185B89}"/>
+          <p:cNvPr id="8" name="Прямоугольник 7">
+            <a:extLst>
+              <a:ext uri="{FF2B5EF4-FFF2-40B4-BE49-F238E27FC236}">
+                <a16:creationId xmlns:a16="http://schemas.microsoft.com/office/drawing/2014/main" id="{70411B0F-BA1A-ED00-CD7F-46D87FD441E3}"/>
               </a:ext>
             </a:extLst>
           </p:cNvPr>
@@ -3787,14 +3667,14 @@
         </p:nvSpPr>
         <p:spPr>
           <a:xfrm>
-            <a:off x="762000" y="3581400"/>
-            <a:ext cx="10668000" cy="38100"/>
+            <a:off x="762000" y="1854200"/>
+            <a:ext cx="10668000" cy="12700"/>
           </a:xfrm>
           <a:prstGeom prst="rect">
             <a:avLst/>
           </a:prstGeom>
           <a:solidFill>
-            <a:srgbClr val="7C9070"/>
+            <a:srgbClr val="BFC7D1"/>
           </a:solidFill>
           <a:ln w="19050" cap="flat" cmpd="sng" algn="ctr">
             <a:noFill/>
@@ -3843,10 +3723,10 @@
       </p:sp>
       <p:sp>
         <p:nvSpPr>
-          <p:cNvPr id="12" name="TextBox 11">
-            <a:extLst>
-              <a:ext uri="{FF2B5EF4-FFF2-40B4-BE49-F238E27FC236}">
-                <a16:creationId xmlns:a16="http://schemas.microsoft.com/office/drawing/2014/main" id="{78C0DD7D-CC61-3E7F-2D06-5372546B1B2A}"/>
+          <p:cNvPr id="9" name="TextBox 8">
+            <a:extLst>
+              <a:ext uri="{FF2B5EF4-FFF2-40B4-BE49-F238E27FC236}">
+                <a16:creationId xmlns:a16="http://schemas.microsoft.com/office/drawing/2014/main" id="{3510440F-5B29-1472-01CC-6A700A0BE67C}"/>
               </a:ext>
             </a:extLst>
           </p:cNvPr>
@@ -3855,8 +3735,8 @@
         </p:nvSpPr>
         <p:spPr>
           <a:xfrm>
-            <a:off x="762000" y="3937000"/>
-            <a:ext cx="5080000" cy="369332"/>
+            <a:off x="762000" y="2108200"/>
+            <a:ext cx="10668000" cy="369332"/>
           </a:xfrm>
           <a:prstGeom prst="rect">
             <a:avLst/>
@@ -3870,9 +3750,197 @@
           <a:lstStyle/>
           <a:p>
             <a:r>
-              <a:rPr lang="ru-RU" sz="1500">
-                <a:solidFill>
-                  <a:srgbClr val="6B6472"/>
+              <a:rPr lang="ru-RU" sz="1500" b="1">
+                <a:solidFill>
+                  <a:srgbClr val="3A5A8C"/>
+                </a:solidFill>
+                <a:latin typeface="Times New Roman" panose="02020603050405020304" pitchFamily="18" charset="0"/>
+              </a:rPr>
+              <a:t>ПРОЕКТНАЯ РАБОТА</a:t>
+            </a:r>
+          </a:p>
+        </p:txBody>
+      </p:sp>
+      <p:sp>
+        <p:nvSpPr>
+          <p:cNvPr id="10" name="TextBox 9">
+            <a:extLst>
+              <a:ext uri="{FF2B5EF4-FFF2-40B4-BE49-F238E27FC236}">
+                <a16:creationId xmlns:a16="http://schemas.microsoft.com/office/drawing/2014/main" id="{A66131AD-362E-EC50-2D77-A749038522A8}"/>
+              </a:ext>
+            </a:extLst>
+          </p:cNvPr>
+          <p:cNvSpPr txBox="1"/>
+          <p:nvPr/>
+        </p:nvSpPr>
+        <p:spPr>
+          <a:xfrm>
+            <a:off x="762000" y="2463800"/>
+            <a:ext cx="10668000" cy="369332"/>
+          </a:xfrm>
+          <a:prstGeom prst="rect">
+            <a:avLst/>
+          </a:prstGeom>
+          <a:noFill/>
+        </p:spPr>
+        <p:txBody>
+          <a:bodyPr vert="horz" wrap="square" lIns="0" tIns="0" rIns="0" bIns="0" rtlCol="0">
+            <a:noAutofit/>
+          </a:bodyPr>
+          <a:lstStyle/>
+          <a:p>
+            <a:r>
+              <a:rPr lang="ru-RU" sz="2700" b="1">
+                <a:solidFill>
+                  <a:srgbClr val="1F3864"/>
+                </a:solidFill>
+                <a:latin typeface="Times New Roman" panose="02020603050405020304" pitchFamily="18" charset="0"/>
+              </a:rPr>
+              <a:t>Разработка информационной системы «Учебные курсы»</a:t>
+            </a:r>
+          </a:p>
+        </p:txBody>
+      </p:sp>
+      <p:sp>
+        <p:nvSpPr>
+          <p:cNvPr id="11" name="TextBox 10">
+            <a:extLst>
+              <a:ext uri="{FF2B5EF4-FFF2-40B4-BE49-F238E27FC236}">
+                <a16:creationId xmlns:a16="http://schemas.microsoft.com/office/drawing/2014/main" id="{435C38C3-8C18-C30A-1F65-1D319906D227}"/>
+              </a:ext>
+            </a:extLst>
+          </p:cNvPr>
+          <p:cNvSpPr txBox="1"/>
+          <p:nvPr/>
+        </p:nvSpPr>
+        <p:spPr>
+          <a:xfrm>
+            <a:off x="762000" y="2946400"/>
+            <a:ext cx="10668000" cy="381000"/>
+          </a:xfrm>
+          <a:prstGeom prst="rect">
+            <a:avLst/>
+          </a:prstGeom>
+          <a:noFill/>
+        </p:spPr>
+        <p:txBody>
+          <a:bodyPr vert="horz" wrap="square" lIns="0" tIns="0" rIns="0" bIns="0" rtlCol="0">
+            <a:noAutofit/>
+          </a:bodyPr>
+          <a:lstStyle/>
+          <a:p>
+            <a:r>
+              <a:rPr lang="ru-RU" sz="2000">
+                <a:solidFill>
+                  <a:srgbClr val="262626"/>
+                </a:solidFill>
+                <a:latin typeface="Times New Roman" panose="02020603050405020304" pitchFamily="18" charset="0"/>
+              </a:rPr>
+              <a:t>для удалённого обучения школьников</a:t>
+            </a:r>
+          </a:p>
+        </p:txBody>
+      </p:sp>
+      <p:sp>
+        <p:nvSpPr>
+          <p:cNvPr id="12" name="Прямоугольник 11">
+            <a:extLst>
+              <a:ext uri="{FF2B5EF4-FFF2-40B4-BE49-F238E27FC236}">
+                <a16:creationId xmlns:a16="http://schemas.microsoft.com/office/drawing/2014/main" id="{5CC29A92-6673-1C66-D469-5C4C472777CA}"/>
+              </a:ext>
+            </a:extLst>
+          </p:cNvPr>
+          <p:cNvSpPr/>
+          <p:nvPr/>
+        </p:nvSpPr>
+        <p:spPr>
+          <a:xfrm>
+            <a:off x="762000" y="3708400"/>
+            <a:ext cx="10668000" cy="12700"/>
+          </a:xfrm>
+          <a:prstGeom prst="rect">
+            <a:avLst/>
+          </a:prstGeom>
+          <a:solidFill>
+            <a:srgbClr val="BFC7D1"/>
+          </a:solidFill>
+          <a:ln w="19050" cap="flat" cmpd="sng" algn="ctr">
+            <a:noFill/>
+            <a:prstDash val="solid"/>
+            <a:miter lim="800000"/>
+          </a:ln>
+          <a:effectLst/>
+          <a:extLst>
+            <a:ext uri="{91240B29-F687-4F45-9708-019B960494DF}">
+              <a14:hiddenLine xmlns:a14="http://schemas.microsoft.com/office/drawing/2010/main" w="19050" cap="flat" cmpd="sng" algn="ctr">
+                <a:solidFill>
+                  <a:schemeClr val="accent1">
+                    <a:shade val="15000"/>
+                  </a:schemeClr>
+                </a:solidFill>
+                <a:prstDash val="solid"/>
+                <a:miter lim="800000"/>
+              </a14:hiddenLine>
+            </a:ext>
+          </a:extLst>
+        </p:spPr>
+        <p:style>
+          <a:lnRef idx="2">
+            <a:schemeClr val="accent1">
+              <a:shade val="15000"/>
+            </a:schemeClr>
+          </a:lnRef>
+          <a:fillRef idx="1">
+            <a:schemeClr val="accent1"/>
+          </a:fillRef>
+          <a:effectRef idx="0">
+            <a:schemeClr val="accent1"/>
+          </a:effectRef>
+          <a:fontRef idx="minor">
+            <a:schemeClr val="lt1"/>
+          </a:fontRef>
+        </p:style>
+        <p:txBody>
+          <a:bodyPr rtlCol="0" anchor="ctr"/>
+          <a:lstStyle/>
+          <a:p>
+            <a:pPr algn="ctr"/>
+            <a:endParaRPr lang="ru-RU"/>
+          </a:p>
+        </p:txBody>
+      </p:sp>
+      <p:sp>
+        <p:nvSpPr>
+          <p:cNvPr id="13" name="TextBox 12">
+            <a:extLst>
+              <a:ext uri="{FF2B5EF4-FFF2-40B4-BE49-F238E27FC236}">
+                <a16:creationId xmlns:a16="http://schemas.microsoft.com/office/drawing/2014/main" id="{990E15BF-522A-1F50-FF36-468F81D1BA8E}"/>
+              </a:ext>
+            </a:extLst>
+          </p:cNvPr>
+          <p:cNvSpPr txBox="1"/>
+          <p:nvPr/>
+        </p:nvSpPr>
+        <p:spPr>
+          <a:xfrm>
+            <a:off x="762000" y="3962400"/>
+            <a:ext cx="4826000" cy="369332"/>
+          </a:xfrm>
+          <a:prstGeom prst="rect">
+            <a:avLst/>
+          </a:prstGeom>
+          <a:noFill/>
+        </p:spPr>
+        <p:txBody>
+          <a:bodyPr vert="horz" wrap="square" lIns="0" tIns="0" rIns="0" bIns="0" rtlCol="0">
+            <a:noAutofit/>
+          </a:bodyPr>
+          <a:lstStyle/>
+          <a:p>
+            <a:r>
+              <a:rPr lang="ru-RU" sz="1400">
+                <a:solidFill>
+                  <a:srgbClr val="595959"/>
                 </a:solidFill>
                 <a:latin typeface="Times New Roman" panose="02020603050405020304" pitchFamily="18" charset="0"/>
               </a:rPr>
@@ -3883,10 +3951,10 @@
       </p:sp>
       <p:sp>
         <p:nvSpPr>
-          <p:cNvPr id="13" name="TextBox 12">
-            <a:extLst>
-              <a:ext uri="{FF2B5EF4-FFF2-40B4-BE49-F238E27FC236}">
-                <a16:creationId xmlns:a16="http://schemas.microsoft.com/office/drawing/2014/main" id="{0DAEA3C6-A6D6-6DF7-C053-81C535CFA400}"/>
+          <p:cNvPr id="14" name="TextBox 13">
+            <a:extLst>
+              <a:ext uri="{FF2B5EF4-FFF2-40B4-BE49-F238E27FC236}">
+                <a16:creationId xmlns:a16="http://schemas.microsoft.com/office/drawing/2014/main" id="{4803D1FE-30C8-DD3F-EFE8-B11F449C29B7}"/>
               </a:ext>
             </a:extLst>
           </p:cNvPr>
@@ -3895,8 +3963,8 @@
         </p:nvSpPr>
         <p:spPr>
           <a:xfrm>
-            <a:off x="762000" y="4216400"/>
-            <a:ext cx="5080000" cy="381000"/>
+            <a:off x="762000" y="4241800"/>
+            <a:ext cx="4826000" cy="381000"/>
           </a:xfrm>
           <a:prstGeom prst="rect">
             <a:avLst/>
@@ -3912,7 +3980,7 @@
             <a:r>
               <a:rPr lang="ru-RU" sz="2200" b="1">
                 <a:solidFill>
-                  <a:srgbClr val="2B2233"/>
+                  <a:srgbClr val="1F3864"/>
                 </a:solidFill>
                 <a:latin typeface="Times New Roman" panose="02020603050405020304" pitchFamily="18" charset="0"/>
               </a:rPr>
@@ -3923,10 +3991,78 @@
       </p:sp>
       <p:sp>
         <p:nvSpPr>
-          <p:cNvPr id="14" name="TextBox 13">
-            <a:extLst>
-              <a:ext uri="{FF2B5EF4-FFF2-40B4-BE49-F238E27FC236}">
-                <a16:creationId xmlns:a16="http://schemas.microsoft.com/office/drawing/2014/main" id="{E92322D6-133E-9983-B8DC-C5E8212F7C74}"/>
+          <p:cNvPr id="15" name="Прямоугольник 14">
+            <a:extLst>
+              <a:ext uri="{FF2B5EF4-FFF2-40B4-BE49-F238E27FC236}">
+                <a16:creationId xmlns:a16="http://schemas.microsoft.com/office/drawing/2014/main" id="{5B14D0A8-7F12-72B6-6BAE-6E2FE46C43B1}"/>
+              </a:ext>
+            </a:extLst>
+          </p:cNvPr>
+          <p:cNvSpPr/>
+          <p:nvPr/>
+        </p:nvSpPr>
+        <p:spPr>
+          <a:xfrm>
+            <a:off x="5969000" y="3937000"/>
+            <a:ext cx="12700" cy="762000"/>
+          </a:xfrm>
+          <a:prstGeom prst="rect">
+            <a:avLst/>
+          </a:prstGeom>
+          <a:solidFill>
+            <a:srgbClr val="BFC7D1"/>
+          </a:solidFill>
+          <a:ln w="19050" cap="flat" cmpd="sng" algn="ctr">
+            <a:noFill/>
+            <a:prstDash val="solid"/>
+            <a:miter lim="800000"/>
+          </a:ln>
+          <a:effectLst/>
+          <a:extLst>
+            <a:ext uri="{91240B29-F687-4F45-9708-019B960494DF}">
+              <a14:hiddenLine xmlns:a14="http://schemas.microsoft.com/office/drawing/2010/main" w="19050" cap="flat" cmpd="sng" algn="ctr">
+                <a:solidFill>
+                  <a:schemeClr val="accent1">
+                    <a:shade val="15000"/>
+                  </a:schemeClr>
+                </a:solidFill>
+                <a:prstDash val="solid"/>
+                <a:miter lim="800000"/>
+              </a14:hiddenLine>
+            </a:ext>
+          </a:extLst>
+        </p:spPr>
+        <p:style>
+          <a:lnRef idx="2">
+            <a:schemeClr val="accent1">
+              <a:shade val="15000"/>
+            </a:schemeClr>
+          </a:lnRef>
+          <a:fillRef idx="1">
+            <a:schemeClr val="accent1"/>
+          </a:fillRef>
+          <a:effectRef idx="0">
+            <a:schemeClr val="accent1"/>
+          </a:effectRef>
+          <a:fontRef idx="minor">
+            <a:schemeClr val="lt1"/>
+          </a:fontRef>
+        </p:style>
+        <p:txBody>
+          <a:bodyPr rtlCol="0" anchor="ctr"/>
+          <a:lstStyle/>
+          <a:p>
+            <a:pPr algn="ctr"/>
+            <a:endParaRPr lang="ru-RU"/>
+          </a:p>
+        </p:txBody>
+      </p:sp>
+      <p:sp>
+        <p:nvSpPr>
+          <p:cNvPr id="16" name="TextBox 15">
+            <a:extLst>
+              <a:ext uri="{FF2B5EF4-FFF2-40B4-BE49-F238E27FC236}">
+                <a16:creationId xmlns:a16="http://schemas.microsoft.com/office/drawing/2014/main" id="{CDB3E328-C11E-0327-BBB8-B5C3E95413C6}"/>
               </a:ext>
             </a:extLst>
           </p:cNvPr>
@@ -3935,8 +4071,8 @@
         </p:nvSpPr>
         <p:spPr>
           <a:xfrm>
-            <a:off x="6604000" y="3937000"/>
-            <a:ext cx="5080000" cy="369332"/>
+            <a:off x="6604000" y="3962400"/>
+            <a:ext cx="4826000" cy="369332"/>
           </a:xfrm>
           <a:prstGeom prst="rect">
             <a:avLst/>
@@ -3950,9 +4086,9 @@
           <a:lstStyle/>
           <a:p>
             <a:r>
-              <a:rPr lang="ru-RU" sz="1500">
-                <a:solidFill>
-                  <a:srgbClr val="6B6472"/>
+              <a:rPr lang="ru-RU" sz="1400">
+                <a:solidFill>
+                  <a:srgbClr val="595959"/>
                 </a:solidFill>
                 <a:latin typeface="Times New Roman" panose="02020603050405020304" pitchFamily="18" charset="0"/>
               </a:rPr>
@@ -3963,10 +4099,10 @@
       </p:sp>
       <p:sp>
         <p:nvSpPr>
-          <p:cNvPr id="15" name="TextBox 14">
-            <a:extLst>
-              <a:ext uri="{FF2B5EF4-FFF2-40B4-BE49-F238E27FC236}">
-                <a16:creationId xmlns:a16="http://schemas.microsoft.com/office/drawing/2014/main" id="{A09171DC-9BBC-FDE3-A864-1BB05BECBDE2}"/>
+          <p:cNvPr id="17" name="TextBox 16">
+            <a:extLst>
+              <a:ext uri="{FF2B5EF4-FFF2-40B4-BE49-F238E27FC236}">
+                <a16:creationId xmlns:a16="http://schemas.microsoft.com/office/drawing/2014/main" id="{55450F2C-0B14-A8F8-5744-F2495D19D046}"/>
               </a:ext>
             </a:extLst>
           </p:cNvPr>
@@ -3975,8 +4111,8 @@
         </p:nvSpPr>
         <p:spPr>
           <a:xfrm>
-            <a:off x="6604000" y="4216400"/>
-            <a:ext cx="5080000" cy="381000"/>
+            <a:off x="6604000" y="4241800"/>
+            <a:ext cx="4826000" cy="381000"/>
           </a:xfrm>
           <a:prstGeom prst="rect">
             <a:avLst/>
@@ -3992,7 +4128,7 @@
             <a:r>
               <a:rPr lang="ru-RU" sz="2200" b="1">
                 <a:solidFill>
-                  <a:srgbClr val="2B2233"/>
+                  <a:srgbClr val="1F3864"/>
                 </a:solidFill>
                 <a:latin typeface="Times New Roman" panose="02020603050405020304" pitchFamily="18" charset="0"/>
               </a:rPr>
@@ -4003,10 +4139,10 @@
       </p:sp>
       <p:sp>
         <p:nvSpPr>
-          <p:cNvPr id="16" name="TextBox 15">
-            <a:extLst>
-              <a:ext uri="{FF2B5EF4-FFF2-40B4-BE49-F238E27FC236}">
-                <a16:creationId xmlns:a16="http://schemas.microsoft.com/office/drawing/2014/main" id="{9A63BE28-6698-ED7E-EA6C-7FE608F6A9C4}"/>
+          <p:cNvPr id="18" name="TextBox 17">
+            <a:extLst>
+              <a:ext uri="{FF2B5EF4-FFF2-40B4-BE49-F238E27FC236}">
+                <a16:creationId xmlns:a16="http://schemas.microsoft.com/office/drawing/2014/main" id="{73D35D03-A9F9-6A46-0A02-84DAF32EC3F7}"/>
               </a:ext>
             </a:extLst>
           </p:cNvPr>
@@ -4015,7 +4151,7 @@
         </p:nvSpPr>
         <p:spPr>
           <a:xfrm>
-            <a:off x="762000" y="6045200"/>
+            <a:off x="762000" y="6096000"/>
             <a:ext cx="10668000" cy="369332"/>
           </a:xfrm>
           <a:prstGeom prst="rect">
@@ -4030,9 +4166,9 @@
           <a:lstStyle/>
           <a:p>
             <a:r>
-              <a:rPr lang="ru-RU" sz="1600">
-                <a:solidFill>
-                  <a:srgbClr val="6B6472"/>
+              <a:rPr lang="ru-RU" sz="1500">
+                <a:solidFill>
+                  <a:srgbClr val="595959"/>
                 </a:solidFill>
                 <a:latin typeface="Times New Roman" panose="02020603050405020304" pitchFamily="18" charset="0"/>
               </a:rPr>
@@ -4044,7 +4180,7 @@
     </p:spTree>
     <p:extLst>
       <p:ext uri="{BB962C8B-B14F-4D97-AF65-F5344CB8AC3E}">
-        <p14:creationId xmlns:p14="http://schemas.microsoft.com/office/powerpoint/2010/main" val="2345009303"/>
+        <p14:creationId xmlns:p14="http://schemas.microsoft.com/office/powerpoint/2010/main" val="241486205"/>
       </p:ext>
     </p:extLst>
   </p:cSld>
@@ -4076,7 +4212,7 @@
           <p:cNvPr id="2" name="Прямоугольник 1">
             <a:extLst>
               <a:ext uri="{FF2B5EF4-FFF2-40B4-BE49-F238E27FC236}">
-                <a16:creationId xmlns:a16="http://schemas.microsoft.com/office/drawing/2014/main" id="{9025D756-D09E-FDE4-3394-998240461C00}"/>
+                <a16:creationId xmlns:a16="http://schemas.microsoft.com/office/drawing/2014/main" id="{D32B3DAB-BE7C-F1FC-796B-AC303B69DA1D}"/>
               </a:ext>
             </a:extLst>
           </p:cNvPr>
@@ -4144,7 +4280,7 @@
           <p:cNvPr id="3" name="Прямоугольник 2">
             <a:extLst>
               <a:ext uri="{FF2B5EF4-FFF2-40B4-BE49-F238E27FC236}">
-                <a16:creationId xmlns:a16="http://schemas.microsoft.com/office/drawing/2014/main" id="{47DBAFDF-499D-69EA-58F7-BBA9CEA3AF1C}"/>
+                <a16:creationId xmlns:a16="http://schemas.microsoft.com/office/drawing/2014/main" id="{6088D852-AD4F-B117-1F08-67216368AA58}"/>
               </a:ext>
             </a:extLst>
           </p:cNvPr>
@@ -4154,13 +4290,13 @@
         <p:spPr>
           <a:xfrm>
             <a:off x="0" y="0"/>
-            <a:ext cx="12192000" cy="965200"/>
+            <a:ext cx="12192000" cy="76200"/>
           </a:xfrm>
           <a:prstGeom prst="rect">
             <a:avLst/>
           </a:prstGeom>
           <a:solidFill>
-            <a:srgbClr val="5B4B6E"/>
+            <a:srgbClr val="1F3864"/>
           </a:solidFill>
           <a:ln w="19050" cap="flat" cmpd="sng" algn="ctr">
             <a:noFill/>
@@ -4212,7 +4348,7 @@
           <p:cNvPr id="4" name="TextBox 3">
             <a:extLst>
               <a:ext uri="{FF2B5EF4-FFF2-40B4-BE49-F238E27FC236}">
-                <a16:creationId xmlns:a16="http://schemas.microsoft.com/office/drawing/2014/main" id="{639EACCE-9D02-D4AE-AB32-12BB1B93237C}"/>
+                <a16:creationId xmlns:a16="http://schemas.microsoft.com/office/drawing/2014/main" id="{AD622D4C-F035-9373-3942-0D58DD41B45E}"/>
               </a:ext>
             </a:extLst>
           </p:cNvPr>
@@ -4221,7 +4357,7 @@
         </p:nvSpPr>
         <p:spPr>
           <a:xfrm>
-            <a:off x="558800" y="228600"/>
+            <a:off x="558800" y="330200"/>
             <a:ext cx="9906000" cy="369332"/>
           </a:xfrm>
           <a:prstGeom prst="rect">
@@ -4236,9 +4372,9 @@
           <a:lstStyle/>
           <a:p>
             <a:r>
-              <a:rPr lang="ru-RU" sz="2800" b="1">
-                <a:solidFill>
-                  <a:srgbClr val="FFFFFF"/>
+              <a:rPr lang="ru-RU" sz="2500" b="1">
+                <a:solidFill>
+                  <a:srgbClr val="1F3864"/>
                 </a:solidFill>
                 <a:latin typeface="Times New Roman" panose="02020603050405020304" pitchFamily="18" charset="0"/>
               </a:rPr>
@@ -4252,7 +4388,7 @@
           <p:cNvPr id="5" name="TextBox 4">
             <a:extLst>
               <a:ext uri="{FF2B5EF4-FFF2-40B4-BE49-F238E27FC236}">
-                <a16:creationId xmlns:a16="http://schemas.microsoft.com/office/drawing/2014/main" id="{7351FF4C-4982-57C1-3611-BCDD7CB6BBD3}"/>
+                <a16:creationId xmlns:a16="http://schemas.microsoft.com/office/drawing/2014/main" id="{A12F75BB-DDE9-CA0E-34A7-B0AE01F89087}"/>
               </a:ext>
             </a:extLst>
           </p:cNvPr>
@@ -4261,7 +4397,7 @@
         </p:nvSpPr>
         <p:spPr>
           <a:xfrm>
-            <a:off x="10617200" y="304800"/>
+            <a:off x="10617200" y="419100"/>
             <a:ext cx="1041400" cy="369332"/>
           </a:xfrm>
           <a:prstGeom prst="rect">
@@ -4277,9 +4413,9 @@
           <a:p>
             <a:pPr algn="r"/>
             <a:r>
-              <a:rPr lang="ru-RU" sz="1500">
-                <a:solidFill>
-                  <a:srgbClr val="C9BBDA"/>
+              <a:rPr lang="ru-RU" sz="1200">
+                <a:solidFill>
+                  <a:srgbClr val="595959"/>
                 </a:solidFill>
                 <a:latin typeface="Times New Roman" panose="02020603050405020304" pitchFamily="18" charset="0"/>
               </a:rPr>
@@ -4293,7 +4429,7 @@
           <p:cNvPr id="6" name="Прямоугольник 5">
             <a:extLst>
               <a:ext uri="{FF2B5EF4-FFF2-40B4-BE49-F238E27FC236}">
-                <a16:creationId xmlns:a16="http://schemas.microsoft.com/office/drawing/2014/main" id="{03935DDC-A328-AE3B-11B1-7BC8C0A420B3}"/>
+                <a16:creationId xmlns:a16="http://schemas.microsoft.com/office/drawing/2014/main" id="{BCADFE91-A94C-EC3E-DD2A-B57A46A10CBE}"/>
               </a:ext>
             </a:extLst>
           </p:cNvPr>
@@ -4302,14 +4438,14 @@
         </p:nvSpPr>
         <p:spPr>
           <a:xfrm>
-            <a:off x="0" y="965200"/>
-            <a:ext cx="12192000" cy="76200"/>
+            <a:off x="558800" y="939800"/>
+            <a:ext cx="11074400" cy="12700"/>
           </a:xfrm>
           <a:prstGeom prst="rect">
             <a:avLst/>
           </a:prstGeom>
           <a:solidFill>
-            <a:srgbClr val="7C9070"/>
+            <a:srgbClr val="BFC7D1"/>
           </a:solidFill>
           <a:ln w="19050" cap="flat" cmpd="sng" algn="ctr">
             <a:noFill/>
@@ -4361,7 +4497,7 @@
           <p:cNvPr id="7" name="Прямоугольник 6">
             <a:extLst>
               <a:ext uri="{FF2B5EF4-FFF2-40B4-BE49-F238E27FC236}">
-                <a16:creationId xmlns:a16="http://schemas.microsoft.com/office/drawing/2014/main" id="{7662249E-9EE4-B4DA-C8C3-E8BE86D5FB5D}"/>
+                <a16:creationId xmlns:a16="http://schemas.microsoft.com/office/drawing/2014/main" id="{63811DEE-3A47-07E5-DF25-495EBFCEA585}"/>
               </a:ext>
             </a:extLst>
           </p:cNvPr>
@@ -4371,13 +4507,13 @@
         <p:spPr>
           <a:xfrm>
             <a:off x="558800" y="1346200"/>
-            <a:ext cx="11074400" cy="1625600"/>
+            <a:ext cx="50800" cy="1549400"/>
           </a:xfrm>
           <a:prstGeom prst="rect">
             <a:avLst/>
           </a:prstGeom>
           <a:solidFill>
-            <a:srgbClr val="EDE8F2"/>
+            <a:srgbClr val="1F3864"/>
           </a:solidFill>
           <a:ln w="19050" cap="flat" cmpd="sng" algn="ctr">
             <a:noFill/>
@@ -4429,7 +4565,7 @@
           <p:cNvPr id="8" name="TextBox 7">
             <a:extLst>
               <a:ext uri="{FF2B5EF4-FFF2-40B4-BE49-F238E27FC236}">
-                <a16:creationId xmlns:a16="http://schemas.microsoft.com/office/drawing/2014/main" id="{0433CC08-8BB6-4B1E-1B1F-C6D643C33DA6}"/>
+                <a16:creationId xmlns:a16="http://schemas.microsoft.com/office/drawing/2014/main" id="{F8CC978C-7170-8830-A93E-8C808764724F}"/>
               </a:ext>
             </a:extLst>
           </p:cNvPr>
@@ -4438,8 +4574,8 @@
         </p:nvSpPr>
         <p:spPr>
           <a:xfrm>
-            <a:off x="863600" y="1600200"/>
-            <a:ext cx="10464800" cy="369332"/>
+            <a:off x="889000" y="1498600"/>
+            <a:ext cx="10363200" cy="369332"/>
           </a:xfrm>
           <a:prstGeom prst="rect">
             <a:avLst/>
@@ -4453,9 +4589,9 @@
           <a:lstStyle/>
           <a:p>
             <a:r>
-              <a:rPr lang="ru-RU" sz="2100" b="1">
-                <a:solidFill>
-                  <a:srgbClr val="2B2233"/>
+              <a:rPr lang="ru-RU" sz="2000" b="1">
+                <a:solidFill>
+                  <a:srgbClr val="1F3864"/>
                 </a:solidFill>
                 <a:latin typeface="Times New Roman" panose="02020603050405020304" pitchFamily="18" charset="0"/>
               </a:rPr>
@@ -4469,7 +4605,7 @@
           <p:cNvPr id="9" name="TextBox 8">
             <a:extLst>
               <a:ext uri="{FF2B5EF4-FFF2-40B4-BE49-F238E27FC236}">
-                <a16:creationId xmlns:a16="http://schemas.microsoft.com/office/drawing/2014/main" id="{1556904F-0D4A-91C4-7E27-D828E4094619}"/>
+                <a16:creationId xmlns:a16="http://schemas.microsoft.com/office/drawing/2014/main" id="{3BC1FD4F-0B63-9C51-7062-6FFE47DB23FD}"/>
               </a:ext>
             </a:extLst>
           </p:cNvPr>
@@ -4503,7 +4639,7 @@
             <a:r>
               <a:rPr lang="ru-RU" sz="1900">
                 <a:solidFill>
-                  <a:srgbClr val="2B2233"/>
+                  <a:srgbClr val="262626"/>
                 </a:solidFill>
                 <a:latin typeface="Times New Roman" panose="02020603050405020304" pitchFamily="18" charset="0"/>
               </a:rPr>
@@ -4522,7 +4658,7 @@
             <a:r>
               <a:rPr lang="ru-RU" sz="1900">
                 <a:solidFill>
-                  <a:srgbClr val="2B2233"/>
+                  <a:srgbClr val="262626"/>
                 </a:solidFill>
                 <a:latin typeface="Times New Roman" panose="02020603050405020304" pitchFamily="18" charset="0"/>
               </a:rPr>
@@ -4541,7 +4677,7 @@
             <a:r>
               <a:rPr lang="ru-RU" sz="1900">
                 <a:solidFill>
-                  <a:srgbClr val="2B2233"/>
+                  <a:srgbClr val="262626"/>
                 </a:solidFill>
                 <a:latin typeface="Times New Roman" panose="02020603050405020304" pitchFamily="18" charset="0"/>
               </a:rPr>
@@ -4560,7 +4696,7 @@
             <a:r>
               <a:rPr lang="ru-RU" sz="1900">
                 <a:solidFill>
-                  <a:srgbClr val="2B2233"/>
+                  <a:srgbClr val="262626"/>
                 </a:solidFill>
                 <a:latin typeface="Times New Roman" panose="02020603050405020304" pitchFamily="18" charset="0"/>
               </a:rPr>
@@ -4578,7 +4714,7 @@
             </a:pPr>
             <a:endParaRPr lang="ru-RU" sz="1900">
               <a:solidFill>
-                <a:srgbClr val="2B2233"/>
+                <a:srgbClr val="262626"/>
               </a:solidFill>
               <a:latin typeface="Times New Roman" panose="02020603050405020304" pitchFamily="18" charset="0"/>
             </a:endParaRPr>
@@ -4588,7 +4724,7 @@
     </p:spTree>
     <p:extLst>
       <p:ext uri="{BB962C8B-B14F-4D97-AF65-F5344CB8AC3E}">
-        <p14:creationId xmlns:p14="http://schemas.microsoft.com/office/powerpoint/2010/main" val="2926344490"/>
+        <p14:creationId xmlns:p14="http://schemas.microsoft.com/office/powerpoint/2010/main" val="1840371113"/>
       </p:ext>
     </p:extLst>
   </p:cSld>
@@ -4620,7 +4756,7 @@
           <p:cNvPr id="2" name="Прямоугольник 1">
             <a:extLst>
               <a:ext uri="{FF2B5EF4-FFF2-40B4-BE49-F238E27FC236}">
-                <a16:creationId xmlns:a16="http://schemas.microsoft.com/office/drawing/2014/main" id="{DEFACFBE-7820-E91F-89F7-79F60191A5D1}"/>
+                <a16:creationId xmlns:a16="http://schemas.microsoft.com/office/drawing/2014/main" id="{0E37AD4F-3641-A521-F5A9-4BF3194253B4}"/>
               </a:ext>
             </a:extLst>
           </p:cNvPr>
@@ -4688,7 +4824,7 @@
           <p:cNvPr id="3" name="Прямоугольник 2">
             <a:extLst>
               <a:ext uri="{FF2B5EF4-FFF2-40B4-BE49-F238E27FC236}">
-                <a16:creationId xmlns:a16="http://schemas.microsoft.com/office/drawing/2014/main" id="{D352A56C-1682-811C-448E-986406ADF70D}"/>
+                <a16:creationId xmlns:a16="http://schemas.microsoft.com/office/drawing/2014/main" id="{605017C3-CFA8-7B64-F5FF-D5708391BAAA}"/>
               </a:ext>
             </a:extLst>
           </p:cNvPr>
@@ -4698,13 +4834,13 @@
         <p:spPr>
           <a:xfrm>
             <a:off x="0" y="0"/>
-            <a:ext cx="12192000" cy="965200"/>
+            <a:ext cx="12192000" cy="76200"/>
           </a:xfrm>
           <a:prstGeom prst="rect">
             <a:avLst/>
           </a:prstGeom>
           <a:solidFill>
-            <a:srgbClr val="5B4B6E"/>
+            <a:srgbClr val="1F3864"/>
           </a:solidFill>
           <a:ln w="19050" cap="flat" cmpd="sng" algn="ctr">
             <a:noFill/>
@@ -4756,7 +4892,7 @@
           <p:cNvPr id="4" name="TextBox 3">
             <a:extLst>
               <a:ext uri="{FF2B5EF4-FFF2-40B4-BE49-F238E27FC236}">
-                <a16:creationId xmlns:a16="http://schemas.microsoft.com/office/drawing/2014/main" id="{4C776B28-89E0-20D4-DBC7-2F3EF27C89B5}"/>
+                <a16:creationId xmlns:a16="http://schemas.microsoft.com/office/drawing/2014/main" id="{FD77A0F1-4109-01FF-2A6C-81680DA3BBAD}"/>
               </a:ext>
             </a:extLst>
           </p:cNvPr>
@@ -4765,7 +4901,7 @@
         </p:nvSpPr>
         <p:spPr>
           <a:xfrm>
-            <a:off x="558800" y="228600"/>
+            <a:off x="558800" y="330200"/>
             <a:ext cx="9906000" cy="369332"/>
           </a:xfrm>
           <a:prstGeom prst="rect">
@@ -4780,9 +4916,9 @@
           <a:lstStyle/>
           <a:p>
             <a:r>
-              <a:rPr lang="ru-RU" sz="2800" b="1">
-                <a:solidFill>
-                  <a:srgbClr val="FFFFFF"/>
+              <a:rPr lang="ru-RU" sz="2500" b="1">
+                <a:solidFill>
+                  <a:srgbClr val="1F3864"/>
                 </a:solidFill>
                 <a:latin typeface="Times New Roman" panose="02020603050405020304" pitchFamily="18" charset="0"/>
               </a:rPr>
@@ -4796,7 +4932,7 @@
           <p:cNvPr id="5" name="TextBox 4">
             <a:extLst>
               <a:ext uri="{FF2B5EF4-FFF2-40B4-BE49-F238E27FC236}">
-                <a16:creationId xmlns:a16="http://schemas.microsoft.com/office/drawing/2014/main" id="{5E8D4338-1306-75A3-3909-624BAE840156}"/>
+                <a16:creationId xmlns:a16="http://schemas.microsoft.com/office/drawing/2014/main" id="{C815C77B-BAB9-0AC4-0459-2398307E2F42}"/>
               </a:ext>
             </a:extLst>
           </p:cNvPr>
@@ -4805,7 +4941,7 @@
         </p:nvSpPr>
         <p:spPr>
           <a:xfrm>
-            <a:off x="10617200" y="304800"/>
+            <a:off x="10617200" y="419100"/>
             <a:ext cx="1041400" cy="369332"/>
           </a:xfrm>
           <a:prstGeom prst="rect">
@@ -4821,9 +4957,9 @@
           <a:p>
             <a:pPr algn="r"/>
             <a:r>
-              <a:rPr lang="ru-RU" sz="1500">
-                <a:solidFill>
-                  <a:srgbClr val="C9BBDA"/>
+              <a:rPr lang="ru-RU" sz="1200">
+                <a:solidFill>
+                  <a:srgbClr val="595959"/>
                 </a:solidFill>
                 <a:latin typeface="Times New Roman" panose="02020603050405020304" pitchFamily="18" charset="0"/>
               </a:rPr>
@@ -4837,7 +4973,7 @@
           <p:cNvPr id="6" name="Прямоугольник 5">
             <a:extLst>
               <a:ext uri="{FF2B5EF4-FFF2-40B4-BE49-F238E27FC236}">
-                <a16:creationId xmlns:a16="http://schemas.microsoft.com/office/drawing/2014/main" id="{B9E373EB-F229-B662-C1F4-E0595FD43DD7}"/>
+                <a16:creationId xmlns:a16="http://schemas.microsoft.com/office/drawing/2014/main" id="{5F490D1A-902F-A2C2-59D7-5AB66FB9B5A1}"/>
               </a:ext>
             </a:extLst>
           </p:cNvPr>
@@ -4846,14 +4982,14 @@
         </p:nvSpPr>
         <p:spPr>
           <a:xfrm>
-            <a:off x="0" y="965200"/>
-            <a:ext cx="12192000" cy="76200"/>
+            <a:off x="558800" y="939800"/>
+            <a:ext cx="11074400" cy="12700"/>
           </a:xfrm>
           <a:prstGeom prst="rect">
             <a:avLst/>
           </a:prstGeom>
           <a:solidFill>
-            <a:srgbClr val="7C9070"/>
+            <a:srgbClr val="BFC7D1"/>
           </a:solidFill>
           <a:ln w="19050" cap="flat" cmpd="sng" algn="ctr">
             <a:noFill/>
@@ -4905,7 +5041,7 @@
           <p:cNvPr id="7" name="TextBox 6">
             <a:extLst>
               <a:ext uri="{FF2B5EF4-FFF2-40B4-BE49-F238E27FC236}">
-                <a16:creationId xmlns:a16="http://schemas.microsoft.com/office/drawing/2014/main" id="{949FC3F9-BE2D-7B49-24D2-7B91A8D659D5}"/>
+                <a16:creationId xmlns:a16="http://schemas.microsoft.com/office/drawing/2014/main" id="{371712DE-DEA4-A305-AA33-C4A7D3F17454}"/>
               </a:ext>
             </a:extLst>
           </p:cNvPr>
@@ -4914,7 +5050,7 @@
         </p:nvSpPr>
         <p:spPr>
           <a:xfrm>
-            <a:off x="914400" y="1422400"/>
+            <a:off x="914400" y="1498600"/>
             <a:ext cx="5080000" cy="369332"/>
           </a:xfrm>
           <a:prstGeom prst="rect">
@@ -4928,10 +5064,15 @@
           </a:bodyPr>
           <a:lstStyle/>
           <a:p>
-            <a:r>
-              <a:rPr lang="ru-RU" sz="1700">
-                <a:solidFill>
-                  <a:srgbClr val="2B2233"/>
+            <a:pPr>
+              <a:spcAft>
+                <a:spcPts val="1600"/>
+              </a:spcAft>
+            </a:pPr>
+            <a:r>
+              <a:rPr lang="ru-RU">
+                <a:solidFill>
+                  <a:srgbClr val="262626"/>
                 </a:solidFill>
                 <a:latin typeface="Times New Roman" panose="02020603050405020304" pitchFamily="18" charset="0"/>
               </a:rPr>
@@ -4939,10 +5080,15 @@
             </a:r>
           </a:p>
           <a:p>
-            <a:r>
-              <a:rPr lang="ru-RU" sz="1700">
-                <a:solidFill>
-                  <a:srgbClr val="2B2233"/>
+            <a:pPr>
+              <a:spcAft>
+                <a:spcPts val="1600"/>
+              </a:spcAft>
+            </a:pPr>
+            <a:r>
+              <a:rPr lang="ru-RU">
+                <a:solidFill>
+                  <a:srgbClr val="262626"/>
                 </a:solidFill>
                 <a:latin typeface="Times New Roman" panose="02020603050405020304" pitchFamily="18" charset="0"/>
               </a:rPr>
@@ -4950,10 +5096,15 @@
             </a:r>
           </a:p>
           <a:p>
-            <a:r>
-              <a:rPr lang="ru-RU" sz="1700">
-                <a:solidFill>
-                  <a:srgbClr val="2B2233"/>
+            <a:pPr>
+              <a:spcAft>
+                <a:spcPts val="1600"/>
+              </a:spcAft>
+            </a:pPr>
+            <a:r>
+              <a:rPr lang="ru-RU">
+                <a:solidFill>
+                  <a:srgbClr val="262626"/>
                 </a:solidFill>
                 <a:latin typeface="Times New Roman" panose="02020603050405020304" pitchFamily="18" charset="0"/>
               </a:rPr>
@@ -4961,10 +5112,15 @@
             </a:r>
           </a:p>
           <a:p>
-            <a:r>
-              <a:rPr lang="ru-RU" sz="1700">
-                <a:solidFill>
-                  <a:srgbClr val="2B2233"/>
+            <a:pPr>
+              <a:spcAft>
+                <a:spcPts val="1600"/>
+              </a:spcAft>
+            </a:pPr>
+            <a:r>
+              <a:rPr lang="ru-RU">
+                <a:solidFill>
+                  <a:srgbClr val="262626"/>
                 </a:solidFill>
                 <a:latin typeface="Times New Roman" panose="02020603050405020304" pitchFamily="18" charset="0"/>
               </a:rPr>
@@ -4978,7 +5134,7 @@
           <p:cNvPr id="8" name="TextBox 7">
             <a:extLst>
               <a:ext uri="{FF2B5EF4-FFF2-40B4-BE49-F238E27FC236}">
-                <a16:creationId xmlns:a16="http://schemas.microsoft.com/office/drawing/2014/main" id="{3ECCA247-1C08-B566-FBEB-69FEC2002EDA}"/>
+                <a16:creationId xmlns:a16="http://schemas.microsoft.com/office/drawing/2014/main" id="{B4C009AA-0A69-9898-EA2E-EBA3FC0F7EFD}"/>
               </a:ext>
             </a:extLst>
           </p:cNvPr>
@@ -4987,7 +5143,7 @@
         </p:nvSpPr>
         <p:spPr>
           <a:xfrm>
-            <a:off x="6451600" y="1422400"/>
+            <a:off x="6451600" y="1498600"/>
             <a:ext cx="5080000" cy="369332"/>
           </a:xfrm>
           <a:prstGeom prst="rect">
@@ -5001,10 +5157,15 @@
           </a:bodyPr>
           <a:lstStyle/>
           <a:p>
-            <a:r>
-              <a:rPr lang="ru-RU" sz="1700">
-                <a:solidFill>
-                  <a:srgbClr val="2B2233"/>
+            <a:pPr>
+              <a:spcAft>
+                <a:spcPts val="1600"/>
+              </a:spcAft>
+            </a:pPr>
+            <a:r>
+              <a:rPr lang="ru-RU">
+                <a:solidFill>
+                  <a:srgbClr val="262626"/>
                 </a:solidFill>
                 <a:latin typeface="Times New Roman" panose="02020603050405020304" pitchFamily="18" charset="0"/>
               </a:rPr>
@@ -5012,10 +5173,15 @@
             </a:r>
           </a:p>
           <a:p>
-            <a:r>
-              <a:rPr lang="ru-RU" sz="1700">
-                <a:solidFill>
-                  <a:srgbClr val="2B2233"/>
+            <a:pPr>
+              <a:spcAft>
+                <a:spcPts val="1600"/>
+              </a:spcAft>
+            </a:pPr>
+            <a:r>
+              <a:rPr lang="ru-RU">
+                <a:solidFill>
+                  <a:srgbClr val="262626"/>
                 </a:solidFill>
                 <a:latin typeface="Times New Roman" panose="02020603050405020304" pitchFamily="18" charset="0"/>
               </a:rPr>
@@ -5023,10 +5189,15 @@
             </a:r>
           </a:p>
           <a:p>
-            <a:r>
-              <a:rPr lang="ru-RU" sz="1700">
-                <a:solidFill>
-                  <a:srgbClr val="2B2233"/>
+            <a:pPr>
+              <a:spcAft>
+                <a:spcPts val="1600"/>
+              </a:spcAft>
+            </a:pPr>
+            <a:r>
+              <a:rPr lang="ru-RU">
+                <a:solidFill>
+                  <a:srgbClr val="262626"/>
                 </a:solidFill>
                 <a:latin typeface="Times New Roman" panose="02020603050405020304" pitchFamily="18" charset="0"/>
               </a:rPr>
@@ -5034,10 +5205,15 @@
             </a:r>
           </a:p>
           <a:p>
-            <a:r>
-              <a:rPr lang="ru-RU" sz="1700">
-                <a:solidFill>
-                  <a:srgbClr val="2B2233"/>
+            <a:pPr>
+              <a:spcAft>
+                <a:spcPts val="1600"/>
+              </a:spcAft>
+            </a:pPr>
+            <a:r>
+              <a:rPr lang="ru-RU">
+                <a:solidFill>
+                  <a:srgbClr val="262626"/>
                 </a:solidFill>
                 <a:latin typeface="Times New Roman" panose="02020603050405020304" pitchFamily="18" charset="0"/>
               </a:rPr>
@@ -5049,7 +5225,7 @@
     </p:spTree>
     <p:extLst>
       <p:ext uri="{BB962C8B-B14F-4D97-AF65-F5344CB8AC3E}">
-        <p14:creationId xmlns:p14="http://schemas.microsoft.com/office/powerpoint/2010/main" val="1010041892"/>
+        <p14:creationId xmlns:p14="http://schemas.microsoft.com/office/powerpoint/2010/main" val="2375888401"/>
       </p:ext>
     </p:extLst>
   </p:cSld>
@@ -5081,7 +5257,7 @@
           <p:cNvPr id="2" name="Прямоугольник 1">
             <a:extLst>
               <a:ext uri="{FF2B5EF4-FFF2-40B4-BE49-F238E27FC236}">
-                <a16:creationId xmlns:a16="http://schemas.microsoft.com/office/drawing/2014/main" id="{CFF3ACC9-D5BE-3B76-F8D8-74FFE58179E6}"/>
+                <a16:creationId xmlns:a16="http://schemas.microsoft.com/office/drawing/2014/main" id="{AE52E88F-534A-D146-003E-0F3FE902C391}"/>
               </a:ext>
             </a:extLst>
           </p:cNvPr>
@@ -5149,7 +5325,7 @@
           <p:cNvPr id="3" name="Прямоугольник 2">
             <a:extLst>
               <a:ext uri="{FF2B5EF4-FFF2-40B4-BE49-F238E27FC236}">
-                <a16:creationId xmlns:a16="http://schemas.microsoft.com/office/drawing/2014/main" id="{762A1876-D1CF-C150-3160-E16682096343}"/>
+                <a16:creationId xmlns:a16="http://schemas.microsoft.com/office/drawing/2014/main" id="{0CB055A1-A02B-A93D-1C83-695CFF2A72F6}"/>
               </a:ext>
             </a:extLst>
           </p:cNvPr>
@@ -5159,13 +5335,13 @@
         <p:spPr>
           <a:xfrm>
             <a:off x="0" y="0"/>
-            <a:ext cx="12192000" cy="965200"/>
+            <a:ext cx="12192000" cy="76200"/>
           </a:xfrm>
           <a:prstGeom prst="rect">
             <a:avLst/>
           </a:prstGeom>
           <a:solidFill>
-            <a:srgbClr val="5B4B6E"/>
+            <a:srgbClr val="1F3864"/>
           </a:solidFill>
           <a:ln w="19050" cap="flat" cmpd="sng" algn="ctr">
             <a:noFill/>
@@ -5217,7 +5393,7 @@
           <p:cNvPr id="4" name="TextBox 3">
             <a:extLst>
               <a:ext uri="{FF2B5EF4-FFF2-40B4-BE49-F238E27FC236}">
-                <a16:creationId xmlns:a16="http://schemas.microsoft.com/office/drawing/2014/main" id="{8C610407-CE7A-974A-9CD8-126D33620435}"/>
+                <a16:creationId xmlns:a16="http://schemas.microsoft.com/office/drawing/2014/main" id="{B3330423-8A8E-9827-C468-330F7F7A70EF}"/>
               </a:ext>
             </a:extLst>
           </p:cNvPr>
@@ -5226,7 +5402,7 @@
         </p:nvSpPr>
         <p:spPr>
           <a:xfrm>
-            <a:off x="558800" y="228600"/>
+            <a:off x="558800" y="330200"/>
             <a:ext cx="9906000" cy="369332"/>
           </a:xfrm>
           <a:prstGeom prst="rect">
@@ -5241,9 +5417,9 @@
           <a:lstStyle/>
           <a:p>
             <a:r>
-              <a:rPr lang="ru-RU" sz="2800" b="1">
-                <a:solidFill>
-                  <a:srgbClr val="FFFFFF"/>
+              <a:rPr lang="ru-RU" sz="2500" b="1">
+                <a:solidFill>
+                  <a:srgbClr val="1F3864"/>
                 </a:solidFill>
                 <a:latin typeface="Times New Roman" panose="02020603050405020304" pitchFamily="18" charset="0"/>
               </a:rPr>
@@ -5257,7 +5433,7 @@
           <p:cNvPr id="5" name="TextBox 4">
             <a:extLst>
               <a:ext uri="{FF2B5EF4-FFF2-40B4-BE49-F238E27FC236}">
-                <a16:creationId xmlns:a16="http://schemas.microsoft.com/office/drawing/2014/main" id="{7433EB3F-9BBE-5158-675E-A9D4BB163BA8}"/>
+                <a16:creationId xmlns:a16="http://schemas.microsoft.com/office/drawing/2014/main" id="{0E0BEC53-DA9A-6D7E-0EC6-D2EAEA423435}"/>
               </a:ext>
             </a:extLst>
           </p:cNvPr>
@@ -5266,7 +5442,7 @@
         </p:nvSpPr>
         <p:spPr>
           <a:xfrm>
-            <a:off x="10617200" y="304800"/>
+            <a:off x="10617200" y="419100"/>
             <a:ext cx="1041400" cy="369332"/>
           </a:xfrm>
           <a:prstGeom prst="rect">
@@ -5282,9 +5458,9 @@
           <a:p>
             <a:pPr algn="r"/>
             <a:r>
-              <a:rPr lang="ru-RU" sz="1500">
-                <a:solidFill>
-                  <a:srgbClr val="C9BBDA"/>
+              <a:rPr lang="ru-RU" sz="1200">
+                <a:solidFill>
+                  <a:srgbClr val="595959"/>
                 </a:solidFill>
                 <a:latin typeface="Times New Roman" panose="02020603050405020304" pitchFamily="18" charset="0"/>
               </a:rPr>
@@ -5298,7 +5474,7 @@
           <p:cNvPr id="6" name="Прямоугольник 5">
             <a:extLst>
               <a:ext uri="{FF2B5EF4-FFF2-40B4-BE49-F238E27FC236}">
-                <a16:creationId xmlns:a16="http://schemas.microsoft.com/office/drawing/2014/main" id="{16410237-D517-E22D-ECF2-2B112F1AD632}"/>
+                <a16:creationId xmlns:a16="http://schemas.microsoft.com/office/drawing/2014/main" id="{B47AC6C5-2220-2B63-C153-F9E47D03A82E}"/>
               </a:ext>
             </a:extLst>
           </p:cNvPr>
@@ -5307,14 +5483,14 @@
         </p:nvSpPr>
         <p:spPr>
           <a:xfrm>
-            <a:off x="0" y="965200"/>
-            <a:ext cx="12192000" cy="76200"/>
+            <a:off x="558800" y="939800"/>
+            <a:ext cx="11074400" cy="12700"/>
           </a:xfrm>
           <a:prstGeom prst="rect">
             <a:avLst/>
           </a:prstGeom>
           <a:solidFill>
-            <a:srgbClr val="7C9070"/>
+            <a:srgbClr val="BFC7D1"/>
           </a:solidFill>
           <a:ln w="19050" cap="flat" cmpd="sng" algn="ctr">
             <a:noFill/>
@@ -5361,12 +5537,53 @@
           </a:p>
         </p:txBody>
       </p:sp>
-      <p:sp>
-        <p:nvSpPr>
-          <p:cNvPr id="7" name="Прямоугольник 6">
-            <a:extLst>
-              <a:ext uri="{FF2B5EF4-FFF2-40B4-BE49-F238E27FC236}">
-                <a16:creationId xmlns:a16="http://schemas.microsoft.com/office/drawing/2014/main" id="{9B42AB8C-036F-9F69-7693-C1963347886C}"/>
+      <p:pic>
+        <p:nvPicPr>
+          <p:cNvPr id="8" name="Рисунок 7">
+            <a:extLst>
+              <a:ext uri="{FF2B5EF4-FFF2-40B4-BE49-F238E27FC236}">
+                <a16:creationId xmlns:a16="http://schemas.microsoft.com/office/drawing/2014/main" id="{5BB090D0-04ED-4647-B4F8-C73B2F7F4290}"/>
+              </a:ext>
+            </a:extLst>
+          </p:cNvPr>
+          <p:cNvPicPr>
+            <a:picLocks noChangeAspect="1"/>
+          </p:cNvPicPr>
+          <p:nvPr/>
+        </p:nvPicPr>
+        <p:blipFill>
+          <a:blip r:embed="rId2">
+            <a:extLst>
+              <a:ext uri="{28A0092B-C50C-407E-A947-70E740481C1C}">
+                <a14:useLocalDpi xmlns:a14="http://schemas.microsoft.com/office/drawing/2010/main" val="0"/>
+              </a:ext>
+            </a:extLst>
+          </a:blip>
+          <a:stretch>
+            <a:fillRect/>
+          </a:stretch>
+        </p:blipFill>
+        <p:spPr>
+          <a:xfrm>
+            <a:off x="635000" y="1320800"/>
+            <a:ext cx="2463800" cy="2413000"/>
+          </a:xfrm>
+          <a:prstGeom prst="rect">
+            <a:avLst/>
+          </a:prstGeom>
+          <a:ln w="9525">
+            <a:solidFill>
+              <a:srgbClr val="BFC7D1"/>
+            </a:solidFill>
+          </a:ln>
+        </p:spPr>
+      </p:pic>
+      <p:sp>
+        <p:nvSpPr>
+          <p:cNvPr id="9" name="Прямоугольник 8">
+            <a:extLst>
+              <a:ext uri="{FF2B5EF4-FFF2-40B4-BE49-F238E27FC236}">
+                <a16:creationId xmlns:a16="http://schemas.microsoft.com/office/drawing/2014/main" id="{B8F59460-A366-C20F-24DE-F50BC0559E8F}"/>
               </a:ext>
             </a:extLst>
           </p:cNvPr>
@@ -5375,14 +5592,14 @@
         </p:nvSpPr>
         <p:spPr>
           <a:xfrm>
-            <a:off x="558800" y="1270000"/>
-            <a:ext cx="2616200" cy="3810000"/>
+            <a:off x="635000" y="3886200"/>
+            <a:ext cx="2463800" cy="12700"/>
           </a:xfrm>
           <a:prstGeom prst="rect">
             <a:avLst/>
           </a:prstGeom>
           <a:solidFill>
-            <a:srgbClr val="EDE8F2"/>
+            <a:srgbClr val="BFC7D1"/>
           </a:solidFill>
           <a:ln w="19050" cap="flat" cmpd="sng" algn="ctr">
             <a:noFill/>
@@ -5429,12 +5646,98 @@
           </a:p>
         </p:txBody>
       </p:sp>
+      <p:sp>
+        <p:nvSpPr>
+          <p:cNvPr id="10" name="TextBox 9">
+            <a:extLst>
+              <a:ext uri="{FF2B5EF4-FFF2-40B4-BE49-F238E27FC236}">
+                <a16:creationId xmlns:a16="http://schemas.microsoft.com/office/drawing/2014/main" id="{C0548CAF-9356-43F0-5072-7146F754EF3B}"/>
+              </a:ext>
+            </a:extLst>
+          </p:cNvPr>
+          <p:cNvSpPr txBox="1"/>
+          <p:nvPr/>
+        </p:nvSpPr>
+        <p:spPr>
+          <a:xfrm>
+            <a:off x="635000" y="3987800"/>
+            <a:ext cx="2463800" cy="369332"/>
+          </a:xfrm>
+          <a:prstGeom prst="rect">
+            <a:avLst/>
+          </a:prstGeom>
+          <a:noFill/>
+        </p:spPr>
+        <p:txBody>
+          <a:bodyPr vert="horz" wrap="square" lIns="0" tIns="0" rIns="0" bIns="0" rtlCol="0">
+            <a:noAutofit/>
+          </a:bodyPr>
+          <a:lstStyle/>
+          <a:p>
+            <a:r>
+              <a:rPr lang="en-US" sz="1500" b="1">
+                <a:solidFill>
+                  <a:srgbClr val="1F3864"/>
+                </a:solidFill>
+                <a:latin typeface="Times New Roman" panose="02020603050405020304" pitchFamily="18" charset="0"/>
+              </a:rPr>
+              <a:t>Moodle</a:t>
+            </a:r>
+            <a:endParaRPr lang="ru-RU" sz="1500" b="1">
+              <a:solidFill>
+                <a:srgbClr val="1F3864"/>
+              </a:solidFill>
+              <a:latin typeface="Times New Roman" panose="02020603050405020304" pitchFamily="18" charset="0"/>
+            </a:endParaRPr>
+          </a:p>
+        </p:txBody>
+      </p:sp>
+      <p:sp>
+        <p:nvSpPr>
+          <p:cNvPr id="11" name="TextBox 10">
+            <a:extLst>
+              <a:ext uri="{FF2B5EF4-FFF2-40B4-BE49-F238E27FC236}">
+                <a16:creationId xmlns:a16="http://schemas.microsoft.com/office/drawing/2014/main" id="{7E7A0D2C-A01D-613D-759E-C660F24BF14D}"/>
+              </a:ext>
+            </a:extLst>
+          </p:cNvPr>
+          <p:cNvSpPr txBox="1"/>
+          <p:nvPr/>
+        </p:nvSpPr>
+        <p:spPr>
+          <a:xfrm>
+            <a:off x="635000" y="4343400"/>
+            <a:ext cx="2463800" cy="369332"/>
+          </a:xfrm>
+          <a:prstGeom prst="rect">
+            <a:avLst/>
+          </a:prstGeom>
+          <a:noFill/>
+        </p:spPr>
+        <p:txBody>
+          <a:bodyPr vert="horz" wrap="square" lIns="0" tIns="0" rIns="0" bIns="0" rtlCol="0">
+            <a:noAutofit/>
+          </a:bodyPr>
+          <a:lstStyle/>
+          <a:p>
+            <a:r>
+              <a:rPr lang="ru-RU" sz="1200">
+                <a:solidFill>
+                  <a:srgbClr val="595959"/>
+                </a:solidFill>
+                <a:latin typeface="Times New Roman" panose="02020603050405020304" pitchFamily="18" charset="0"/>
+              </a:rPr>
+              <a:t>Открытый исходный код, большое сообщество, множество модулей. Сложная настройка.</a:t>
+            </a:r>
+          </a:p>
+        </p:txBody>
+      </p:sp>
       <p:pic>
         <p:nvPicPr>
-          <p:cNvPr id="9" name="Рисунок 8">
-            <a:extLst>
-              <a:ext uri="{FF2B5EF4-FFF2-40B4-BE49-F238E27FC236}">
-                <a16:creationId xmlns:a16="http://schemas.microsoft.com/office/drawing/2014/main" id="{D03083C5-29F3-2AB3-F463-463F4309A729}"/>
+          <p:cNvPr id="13" name="Рисунок 12">
+            <a:extLst>
+              <a:ext uri="{FF2B5EF4-FFF2-40B4-BE49-F238E27FC236}">
+                <a16:creationId xmlns:a16="http://schemas.microsoft.com/office/drawing/2014/main" id="{5F2238B5-17E1-2E22-077E-77EA98FE6391}"/>
               </a:ext>
             </a:extLst>
           </p:cNvPr>
@@ -5444,7 +5747,7 @@
           <p:nvPr/>
         </p:nvPicPr>
         <p:blipFill>
-          <a:blip r:embed="rId2">
+          <a:blip r:embed="rId3">
             <a:extLst>
               <a:ext uri="{28A0092B-C50C-407E-A947-70E740481C1C}">
                 <a14:useLocalDpi xmlns:a14="http://schemas.microsoft.com/office/drawing/2010/main" val="0"/>
@@ -5457,106 +5760,25 @@
         </p:blipFill>
         <p:spPr>
           <a:xfrm>
-            <a:off x="635000" y="1346200"/>
-            <a:ext cx="2463800" cy="2489200"/>
-          </a:xfrm>
-          <a:prstGeom prst="rect">
-            <a:avLst/>
-          </a:prstGeom>
+            <a:off x="3454400" y="1320800"/>
+            <a:ext cx="2463800" cy="2413000"/>
+          </a:xfrm>
+          <a:prstGeom prst="rect">
+            <a:avLst/>
+          </a:prstGeom>
+          <a:ln w="9525">
+            <a:solidFill>
+              <a:srgbClr val="BFC7D1"/>
+            </a:solidFill>
+          </a:ln>
         </p:spPr>
       </p:pic>
       <p:sp>
         <p:nvSpPr>
-          <p:cNvPr id="10" name="TextBox 9">
-            <a:extLst>
-              <a:ext uri="{FF2B5EF4-FFF2-40B4-BE49-F238E27FC236}">
-                <a16:creationId xmlns:a16="http://schemas.microsoft.com/office/drawing/2014/main" id="{A7FC697D-085E-C113-385C-47147AF4E46A}"/>
-              </a:ext>
-            </a:extLst>
-          </p:cNvPr>
-          <p:cNvSpPr txBox="1"/>
-          <p:nvPr/>
-        </p:nvSpPr>
-        <p:spPr>
-          <a:xfrm>
-            <a:off x="660400" y="3911600"/>
-            <a:ext cx="2413000" cy="369332"/>
-          </a:xfrm>
-          <a:prstGeom prst="rect">
-            <a:avLst/>
-          </a:prstGeom>
-          <a:noFill/>
-        </p:spPr>
-        <p:txBody>
-          <a:bodyPr vert="horz" wrap="square" lIns="0" tIns="0" rIns="0" bIns="0" rtlCol="0">
-            <a:noAutofit/>
-          </a:bodyPr>
-          <a:lstStyle/>
-          <a:p>
-            <a:r>
-              <a:rPr lang="en-US" sz="1600" b="1">
-                <a:solidFill>
-                  <a:srgbClr val="5B4B6E"/>
-                </a:solidFill>
-                <a:latin typeface="Times New Roman" panose="02020603050405020304" pitchFamily="18" charset="0"/>
-              </a:rPr>
-              <a:t>Moodle</a:t>
-            </a:r>
-            <a:endParaRPr lang="ru-RU" sz="1600" b="1">
-              <a:solidFill>
-                <a:srgbClr val="5B4B6E"/>
-              </a:solidFill>
-              <a:latin typeface="Times New Roman" panose="02020603050405020304" pitchFamily="18" charset="0"/>
-            </a:endParaRPr>
-          </a:p>
-        </p:txBody>
-      </p:sp>
-      <p:sp>
-        <p:nvSpPr>
-          <p:cNvPr id="11" name="TextBox 10">
-            <a:extLst>
-              <a:ext uri="{FF2B5EF4-FFF2-40B4-BE49-F238E27FC236}">
-                <a16:creationId xmlns:a16="http://schemas.microsoft.com/office/drawing/2014/main" id="{210BBF54-FED8-E255-E0DB-B7CEFE4D2927}"/>
-              </a:ext>
-            </a:extLst>
-          </p:cNvPr>
-          <p:cNvSpPr txBox="1"/>
-          <p:nvPr/>
-        </p:nvSpPr>
-        <p:spPr>
-          <a:xfrm>
-            <a:off x="660400" y="4241800"/>
-            <a:ext cx="2413000" cy="369332"/>
-          </a:xfrm>
-          <a:prstGeom prst="rect">
-            <a:avLst/>
-          </a:prstGeom>
-          <a:noFill/>
-        </p:spPr>
-        <p:txBody>
-          <a:bodyPr vert="horz" wrap="square" lIns="0" tIns="0" rIns="0" bIns="0" rtlCol="0">
-            <a:noAutofit/>
-          </a:bodyPr>
-          <a:lstStyle/>
-          <a:p>
-            <a:r>
-              <a:rPr lang="ru-RU" sz="1200">
-                <a:solidFill>
-                  <a:srgbClr val="2B2233"/>
-                </a:solidFill>
-                <a:latin typeface="Times New Roman" panose="02020603050405020304" pitchFamily="18" charset="0"/>
-              </a:rPr>
-              <a:t>Открытый исходный код, большое сообщество, множество модулей. Сложная настройка.</a:t>
-            </a:r>
-          </a:p>
-        </p:txBody>
-      </p:sp>
-      <p:sp>
-        <p:nvSpPr>
-          <p:cNvPr id="12" name="Прямоугольник 11">
-            <a:extLst>
-              <a:ext uri="{FF2B5EF4-FFF2-40B4-BE49-F238E27FC236}">
-                <a16:creationId xmlns:a16="http://schemas.microsoft.com/office/drawing/2014/main" id="{6060DB9F-28E3-370A-0CD4-E6462C117B29}"/>
+          <p:cNvPr id="14" name="Прямоугольник 13">
+            <a:extLst>
+              <a:ext uri="{FF2B5EF4-FFF2-40B4-BE49-F238E27FC236}">
+                <a16:creationId xmlns:a16="http://schemas.microsoft.com/office/drawing/2014/main" id="{5F1D6A5E-9354-BECC-F830-7B64538D9E65}"/>
               </a:ext>
             </a:extLst>
           </p:cNvPr>
@@ -5565,14 +5787,14 @@
         </p:nvSpPr>
         <p:spPr>
           <a:xfrm>
-            <a:off x="3378200" y="1270000"/>
-            <a:ext cx="2616200" cy="3810000"/>
+            <a:off x="3454400" y="3886200"/>
+            <a:ext cx="2463800" cy="12700"/>
           </a:xfrm>
           <a:prstGeom prst="rect">
             <a:avLst/>
           </a:prstGeom>
           <a:solidFill>
-            <a:srgbClr val="EDE8F2"/>
+            <a:srgbClr val="BFC7D1"/>
           </a:solidFill>
           <a:ln w="19050" cap="flat" cmpd="sng" algn="ctr">
             <a:noFill/>
@@ -5619,12 +5841,98 @@
           </a:p>
         </p:txBody>
       </p:sp>
+      <p:sp>
+        <p:nvSpPr>
+          <p:cNvPr id="15" name="TextBox 14">
+            <a:extLst>
+              <a:ext uri="{FF2B5EF4-FFF2-40B4-BE49-F238E27FC236}">
+                <a16:creationId xmlns:a16="http://schemas.microsoft.com/office/drawing/2014/main" id="{C7CD40E1-AB56-6954-D366-A33721A12C70}"/>
+              </a:ext>
+            </a:extLst>
+          </p:cNvPr>
+          <p:cNvSpPr txBox="1"/>
+          <p:nvPr/>
+        </p:nvSpPr>
+        <p:spPr>
+          <a:xfrm>
+            <a:off x="3454400" y="3987800"/>
+            <a:ext cx="2463800" cy="369332"/>
+          </a:xfrm>
+          <a:prstGeom prst="rect">
+            <a:avLst/>
+          </a:prstGeom>
+          <a:noFill/>
+        </p:spPr>
+        <p:txBody>
+          <a:bodyPr vert="horz" wrap="square" lIns="0" tIns="0" rIns="0" bIns="0" rtlCol="0">
+            <a:noAutofit/>
+          </a:bodyPr>
+          <a:lstStyle/>
+          <a:p>
+            <a:r>
+              <a:rPr lang="en-US" sz="1500" b="1">
+                <a:solidFill>
+                  <a:srgbClr val="1F3864"/>
+                </a:solidFill>
+                <a:latin typeface="Times New Roman" panose="02020603050405020304" pitchFamily="18" charset="0"/>
+              </a:rPr>
+              <a:t>Google Classroom</a:t>
+            </a:r>
+            <a:endParaRPr lang="ru-RU" sz="1500" b="1">
+              <a:solidFill>
+                <a:srgbClr val="1F3864"/>
+              </a:solidFill>
+              <a:latin typeface="Times New Roman" panose="02020603050405020304" pitchFamily="18" charset="0"/>
+            </a:endParaRPr>
+          </a:p>
+        </p:txBody>
+      </p:sp>
+      <p:sp>
+        <p:nvSpPr>
+          <p:cNvPr id="16" name="TextBox 15">
+            <a:extLst>
+              <a:ext uri="{FF2B5EF4-FFF2-40B4-BE49-F238E27FC236}">
+                <a16:creationId xmlns:a16="http://schemas.microsoft.com/office/drawing/2014/main" id="{215FF7EC-117E-90F6-D2F8-CAF4729E3BDE}"/>
+              </a:ext>
+            </a:extLst>
+          </p:cNvPr>
+          <p:cNvSpPr txBox="1"/>
+          <p:nvPr/>
+        </p:nvSpPr>
+        <p:spPr>
+          <a:xfrm>
+            <a:off x="3454400" y="4343400"/>
+            <a:ext cx="2463800" cy="369332"/>
+          </a:xfrm>
+          <a:prstGeom prst="rect">
+            <a:avLst/>
+          </a:prstGeom>
+          <a:noFill/>
+        </p:spPr>
+        <p:txBody>
+          <a:bodyPr vert="horz" wrap="square" lIns="0" tIns="0" rIns="0" bIns="0" rtlCol="0">
+            <a:noAutofit/>
+          </a:bodyPr>
+          <a:lstStyle/>
+          <a:p>
+            <a:r>
+              <a:rPr lang="ru-RU" sz="1200">
+                <a:solidFill>
+                  <a:srgbClr val="595959"/>
+                </a:solidFill>
+                <a:latin typeface="Times New Roman" panose="02020603050405020304" pitchFamily="18" charset="0"/>
+              </a:rPr>
+              <a:t>Простота освоения, интеграция с документами. Мало функций и детальных отчётов.</a:t>
+            </a:r>
+          </a:p>
+        </p:txBody>
+      </p:sp>
       <p:pic>
         <p:nvPicPr>
-          <p:cNvPr id="14" name="Рисунок 13">
-            <a:extLst>
-              <a:ext uri="{FF2B5EF4-FFF2-40B4-BE49-F238E27FC236}">
-                <a16:creationId xmlns:a16="http://schemas.microsoft.com/office/drawing/2014/main" id="{C74A58D2-BCB6-A751-E3F2-9A2AAF087818}"/>
+          <p:cNvPr id="18" name="Рисунок 17">
+            <a:extLst>
+              <a:ext uri="{FF2B5EF4-FFF2-40B4-BE49-F238E27FC236}">
+                <a16:creationId xmlns:a16="http://schemas.microsoft.com/office/drawing/2014/main" id="{938A7D97-BAB1-25B4-501B-8ECF180AE0DF}"/>
               </a:ext>
             </a:extLst>
           </p:cNvPr>
@@ -5634,7 +5942,7 @@
           <p:nvPr/>
         </p:nvPicPr>
         <p:blipFill>
-          <a:blip r:embed="rId3">
+          <a:blip r:embed="rId4">
             <a:extLst>
               <a:ext uri="{28A0092B-C50C-407E-A947-70E740481C1C}">
                 <a14:useLocalDpi xmlns:a14="http://schemas.microsoft.com/office/drawing/2010/main" val="0"/>
@@ -5647,106 +5955,25 @@
         </p:blipFill>
         <p:spPr>
           <a:xfrm>
-            <a:off x="3454400" y="1346200"/>
-            <a:ext cx="2463800" cy="2489200"/>
-          </a:xfrm>
-          <a:prstGeom prst="rect">
-            <a:avLst/>
-          </a:prstGeom>
+            <a:off x="6273800" y="1320800"/>
+            <a:ext cx="2463800" cy="2413000"/>
+          </a:xfrm>
+          <a:prstGeom prst="rect">
+            <a:avLst/>
+          </a:prstGeom>
+          <a:ln w="9525">
+            <a:solidFill>
+              <a:srgbClr val="BFC7D1"/>
+            </a:solidFill>
+          </a:ln>
         </p:spPr>
       </p:pic>
       <p:sp>
         <p:nvSpPr>
-          <p:cNvPr id="15" name="TextBox 14">
-            <a:extLst>
-              <a:ext uri="{FF2B5EF4-FFF2-40B4-BE49-F238E27FC236}">
-                <a16:creationId xmlns:a16="http://schemas.microsoft.com/office/drawing/2014/main" id="{2D0B04A6-463B-9594-8335-1265CA6BC5CB}"/>
-              </a:ext>
-            </a:extLst>
-          </p:cNvPr>
-          <p:cNvSpPr txBox="1"/>
-          <p:nvPr/>
-        </p:nvSpPr>
-        <p:spPr>
-          <a:xfrm>
-            <a:off x="3479800" y="3911600"/>
-            <a:ext cx="2413000" cy="369332"/>
-          </a:xfrm>
-          <a:prstGeom prst="rect">
-            <a:avLst/>
-          </a:prstGeom>
-          <a:noFill/>
-        </p:spPr>
-        <p:txBody>
-          <a:bodyPr vert="horz" wrap="square" lIns="0" tIns="0" rIns="0" bIns="0" rtlCol="0">
-            <a:noAutofit/>
-          </a:bodyPr>
-          <a:lstStyle/>
-          <a:p>
-            <a:r>
-              <a:rPr lang="en-US" sz="1600" b="1">
-                <a:solidFill>
-                  <a:srgbClr val="5B4B6E"/>
-                </a:solidFill>
-                <a:latin typeface="Times New Roman" panose="02020603050405020304" pitchFamily="18" charset="0"/>
-              </a:rPr>
-              <a:t>Google Classroom</a:t>
-            </a:r>
-            <a:endParaRPr lang="ru-RU" sz="1600" b="1">
-              <a:solidFill>
-                <a:srgbClr val="5B4B6E"/>
-              </a:solidFill>
-              <a:latin typeface="Times New Roman" panose="02020603050405020304" pitchFamily="18" charset="0"/>
-            </a:endParaRPr>
-          </a:p>
-        </p:txBody>
-      </p:sp>
-      <p:sp>
-        <p:nvSpPr>
-          <p:cNvPr id="16" name="TextBox 15">
-            <a:extLst>
-              <a:ext uri="{FF2B5EF4-FFF2-40B4-BE49-F238E27FC236}">
-                <a16:creationId xmlns:a16="http://schemas.microsoft.com/office/drawing/2014/main" id="{C2D2A94D-CF3A-3FC6-96D9-D847F5E598C7}"/>
-              </a:ext>
-            </a:extLst>
-          </p:cNvPr>
-          <p:cNvSpPr txBox="1"/>
-          <p:nvPr/>
-        </p:nvSpPr>
-        <p:spPr>
-          <a:xfrm>
-            <a:off x="3479800" y="4241800"/>
-            <a:ext cx="2413000" cy="369332"/>
-          </a:xfrm>
-          <a:prstGeom prst="rect">
-            <a:avLst/>
-          </a:prstGeom>
-          <a:noFill/>
-        </p:spPr>
-        <p:txBody>
-          <a:bodyPr vert="horz" wrap="square" lIns="0" tIns="0" rIns="0" bIns="0" rtlCol="0">
-            <a:noAutofit/>
-          </a:bodyPr>
-          <a:lstStyle/>
-          <a:p>
-            <a:r>
-              <a:rPr lang="ru-RU" sz="1200">
-                <a:solidFill>
-                  <a:srgbClr val="2B2233"/>
-                </a:solidFill>
-                <a:latin typeface="Times New Roman" panose="02020603050405020304" pitchFamily="18" charset="0"/>
-              </a:rPr>
-              <a:t>Простота освоения, интеграция с документами. Мало функций и детальных отчётов.</a:t>
-            </a:r>
-          </a:p>
-        </p:txBody>
-      </p:sp>
-      <p:sp>
-        <p:nvSpPr>
-          <p:cNvPr id="17" name="Прямоугольник 16">
-            <a:extLst>
-              <a:ext uri="{FF2B5EF4-FFF2-40B4-BE49-F238E27FC236}">
-                <a16:creationId xmlns:a16="http://schemas.microsoft.com/office/drawing/2014/main" id="{0FE6976D-935B-FC60-04C9-3ADBA139DB3A}"/>
+          <p:cNvPr id="19" name="Прямоугольник 18">
+            <a:extLst>
+              <a:ext uri="{FF2B5EF4-FFF2-40B4-BE49-F238E27FC236}">
+                <a16:creationId xmlns:a16="http://schemas.microsoft.com/office/drawing/2014/main" id="{ADE7B327-6CF3-FF16-BA95-5DAA6DF67B08}"/>
               </a:ext>
             </a:extLst>
           </p:cNvPr>
@@ -5755,14 +5982,14 @@
         </p:nvSpPr>
         <p:spPr>
           <a:xfrm>
-            <a:off x="6197600" y="1270000"/>
-            <a:ext cx="2616200" cy="3810000"/>
+            <a:off x="6273800" y="3886200"/>
+            <a:ext cx="2463800" cy="12700"/>
           </a:xfrm>
           <a:prstGeom prst="rect">
             <a:avLst/>
           </a:prstGeom>
           <a:solidFill>
-            <a:srgbClr val="EDE8F2"/>
+            <a:srgbClr val="BFC7D1"/>
           </a:solidFill>
           <a:ln w="19050" cap="flat" cmpd="sng" algn="ctr">
             <a:noFill/>
@@ -5809,12 +6036,98 @@
           </a:p>
         </p:txBody>
       </p:sp>
+      <p:sp>
+        <p:nvSpPr>
+          <p:cNvPr id="20" name="TextBox 19">
+            <a:extLst>
+              <a:ext uri="{FF2B5EF4-FFF2-40B4-BE49-F238E27FC236}">
+                <a16:creationId xmlns:a16="http://schemas.microsoft.com/office/drawing/2014/main" id="{B3933461-01FA-AF47-A6CA-E08D56DDB846}"/>
+              </a:ext>
+            </a:extLst>
+          </p:cNvPr>
+          <p:cNvSpPr txBox="1"/>
+          <p:nvPr/>
+        </p:nvSpPr>
+        <p:spPr>
+          <a:xfrm>
+            <a:off x="6273800" y="3987800"/>
+            <a:ext cx="2463800" cy="369332"/>
+          </a:xfrm>
+          <a:prstGeom prst="rect">
+            <a:avLst/>
+          </a:prstGeom>
+          <a:noFill/>
+        </p:spPr>
+        <p:txBody>
+          <a:bodyPr vert="horz" wrap="square" lIns="0" tIns="0" rIns="0" bIns="0" rtlCol="0">
+            <a:noAutofit/>
+          </a:bodyPr>
+          <a:lstStyle/>
+          <a:p>
+            <a:r>
+              <a:rPr lang="en-US" sz="1500" b="1">
+                <a:solidFill>
+                  <a:srgbClr val="1F3864"/>
+                </a:solidFill>
+                <a:latin typeface="Times New Roman" panose="02020603050405020304" pitchFamily="18" charset="0"/>
+              </a:rPr>
+              <a:t>iSpring Learn</a:t>
+            </a:r>
+            <a:endParaRPr lang="ru-RU" sz="1500" b="1">
+              <a:solidFill>
+                <a:srgbClr val="1F3864"/>
+              </a:solidFill>
+              <a:latin typeface="Times New Roman" panose="02020603050405020304" pitchFamily="18" charset="0"/>
+            </a:endParaRPr>
+          </a:p>
+        </p:txBody>
+      </p:sp>
+      <p:sp>
+        <p:nvSpPr>
+          <p:cNvPr id="21" name="TextBox 20">
+            <a:extLst>
+              <a:ext uri="{FF2B5EF4-FFF2-40B4-BE49-F238E27FC236}">
+                <a16:creationId xmlns:a16="http://schemas.microsoft.com/office/drawing/2014/main" id="{E8CE052B-00A7-A9D0-F939-EE0746A39E53}"/>
+              </a:ext>
+            </a:extLst>
+          </p:cNvPr>
+          <p:cNvSpPr txBox="1"/>
+          <p:nvPr/>
+        </p:nvSpPr>
+        <p:spPr>
+          <a:xfrm>
+            <a:off x="6273800" y="4343400"/>
+            <a:ext cx="2463800" cy="369332"/>
+          </a:xfrm>
+          <a:prstGeom prst="rect">
+            <a:avLst/>
+          </a:prstGeom>
+          <a:noFill/>
+        </p:spPr>
+        <p:txBody>
+          <a:bodyPr vert="horz" wrap="square" lIns="0" tIns="0" rIns="0" bIns="0" rtlCol="0">
+            <a:noAutofit/>
+          </a:bodyPr>
+          <a:lstStyle/>
+          <a:p>
+            <a:r>
+              <a:rPr lang="ru-RU" sz="1200">
+                <a:solidFill>
+                  <a:srgbClr val="595959"/>
+                </a:solidFill>
+                <a:latin typeface="Times New Roman" panose="02020603050405020304" pitchFamily="18" charset="0"/>
+              </a:rPr>
+              <a:t>Современный интерфейс, конструктор курсов, аналитика. Платная, только облако.</a:t>
+            </a:r>
+          </a:p>
+        </p:txBody>
+      </p:sp>
       <p:pic>
         <p:nvPicPr>
-          <p:cNvPr id="19" name="Рисунок 18">
-            <a:extLst>
-              <a:ext uri="{FF2B5EF4-FFF2-40B4-BE49-F238E27FC236}">
-                <a16:creationId xmlns:a16="http://schemas.microsoft.com/office/drawing/2014/main" id="{7669A38B-8DD2-2FFE-7D08-F6646F99E614}"/>
+          <p:cNvPr id="23" name="Рисунок 22">
+            <a:extLst>
+              <a:ext uri="{FF2B5EF4-FFF2-40B4-BE49-F238E27FC236}">
+                <a16:creationId xmlns:a16="http://schemas.microsoft.com/office/drawing/2014/main" id="{4499200A-A197-368C-6C0E-74A14D2E0565}"/>
               </a:ext>
             </a:extLst>
           </p:cNvPr>
@@ -5824,7 +6137,7 @@
           <p:nvPr/>
         </p:nvPicPr>
         <p:blipFill>
-          <a:blip r:embed="rId4">
+          <a:blip r:embed="rId5">
             <a:extLst>
               <a:ext uri="{28A0092B-C50C-407E-A947-70E740481C1C}">
                 <a14:useLocalDpi xmlns:a14="http://schemas.microsoft.com/office/drawing/2010/main" val="0"/>
@@ -5837,106 +6150,25 @@
         </p:blipFill>
         <p:spPr>
           <a:xfrm>
-            <a:off x="6273800" y="1346200"/>
-            <a:ext cx="2463800" cy="2489200"/>
-          </a:xfrm>
-          <a:prstGeom prst="rect">
-            <a:avLst/>
-          </a:prstGeom>
+            <a:off x="9093200" y="1320800"/>
+            <a:ext cx="2463800" cy="2413000"/>
+          </a:xfrm>
+          <a:prstGeom prst="rect">
+            <a:avLst/>
+          </a:prstGeom>
+          <a:ln w="9525">
+            <a:solidFill>
+              <a:srgbClr val="BFC7D1"/>
+            </a:solidFill>
+          </a:ln>
         </p:spPr>
       </p:pic>
       <p:sp>
         <p:nvSpPr>
-          <p:cNvPr id="20" name="TextBox 19">
-            <a:extLst>
-              <a:ext uri="{FF2B5EF4-FFF2-40B4-BE49-F238E27FC236}">
-                <a16:creationId xmlns:a16="http://schemas.microsoft.com/office/drawing/2014/main" id="{2A01EC5C-9C92-3F5D-948C-049B1C63F6C4}"/>
-              </a:ext>
-            </a:extLst>
-          </p:cNvPr>
-          <p:cNvSpPr txBox="1"/>
-          <p:nvPr/>
-        </p:nvSpPr>
-        <p:spPr>
-          <a:xfrm>
-            <a:off x="6299200" y="3911600"/>
-            <a:ext cx="2413000" cy="369332"/>
-          </a:xfrm>
-          <a:prstGeom prst="rect">
-            <a:avLst/>
-          </a:prstGeom>
-          <a:noFill/>
-        </p:spPr>
-        <p:txBody>
-          <a:bodyPr vert="horz" wrap="square" lIns="0" tIns="0" rIns="0" bIns="0" rtlCol="0">
-            <a:noAutofit/>
-          </a:bodyPr>
-          <a:lstStyle/>
-          <a:p>
-            <a:r>
-              <a:rPr lang="en-US" sz="1600" b="1">
-                <a:solidFill>
-                  <a:srgbClr val="5B4B6E"/>
-                </a:solidFill>
-                <a:latin typeface="Times New Roman" panose="02020603050405020304" pitchFamily="18" charset="0"/>
-              </a:rPr>
-              <a:t>iSpring Learn</a:t>
-            </a:r>
-            <a:endParaRPr lang="ru-RU" sz="1600" b="1">
-              <a:solidFill>
-                <a:srgbClr val="5B4B6E"/>
-              </a:solidFill>
-              <a:latin typeface="Times New Roman" panose="02020603050405020304" pitchFamily="18" charset="0"/>
-            </a:endParaRPr>
-          </a:p>
-        </p:txBody>
-      </p:sp>
-      <p:sp>
-        <p:nvSpPr>
-          <p:cNvPr id="21" name="TextBox 20">
-            <a:extLst>
-              <a:ext uri="{FF2B5EF4-FFF2-40B4-BE49-F238E27FC236}">
-                <a16:creationId xmlns:a16="http://schemas.microsoft.com/office/drawing/2014/main" id="{FFF3CE37-F8E4-44DD-4618-D4FAFD82A489}"/>
-              </a:ext>
-            </a:extLst>
-          </p:cNvPr>
-          <p:cNvSpPr txBox="1"/>
-          <p:nvPr/>
-        </p:nvSpPr>
-        <p:spPr>
-          <a:xfrm>
-            <a:off x="6299200" y="4241800"/>
-            <a:ext cx="2413000" cy="369332"/>
-          </a:xfrm>
-          <a:prstGeom prst="rect">
-            <a:avLst/>
-          </a:prstGeom>
-          <a:noFill/>
-        </p:spPr>
-        <p:txBody>
-          <a:bodyPr vert="horz" wrap="square" lIns="0" tIns="0" rIns="0" bIns="0" rtlCol="0">
-            <a:noAutofit/>
-          </a:bodyPr>
-          <a:lstStyle/>
-          <a:p>
-            <a:r>
-              <a:rPr lang="ru-RU" sz="1200">
-                <a:solidFill>
-                  <a:srgbClr val="2B2233"/>
-                </a:solidFill>
-                <a:latin typeface="Times New Roman" panose="02020603050405020304" pitchFamily="18" charset="0"/>
-              </a:rPr>
-              <a:t>Современный интерфейс, конструктор курсов, аналитика. Платная, только облако.</a:t>
-            </a:r>
-          </a:p>
-        </p:txBody>
-      </p:sp>
-      <p:sp>
-        <p:nvSpPr>
-          <p:cNvPr id="22" name="Прямоугольник 21">
-            <a:extLst>
-              <a:ext uri="{FF2B5EF4-FFF2-40B4-BE49-F238E27FC236}">
-                <a16:creationId xmlns:a16="http://schemas.microsoft.com/office/drawing/2014/main" id="{AA15922F-C407-7B00-83E5-E6C6BD200899}"/>
+          <p:cNvPr id="24" name="Прямоугольник 23">
+            <a:extLst>
+              <a:ext uri="{FF2B5EF4-FFF2-40B4-BE49-F238E27FC236}">
+                <a16:creationId xmlns:a16="http://schemas.microsoft.com/office/drawing/2014/main" id="{57D508C2-12C4-079B-D718-949BBA8CFA28}"/>
               </a:ext>
             </a:extLst>
           </p:cNvPr>
@@ -5945,14 +6177,14 @@
         </p:nvSpPr>
         <p:spPr>
           <a:xfrm>
-            <a:off x="9017000" y="1270000"/>
-            <a:ext cx="2616200" cy="3810000"/>
+            <a:off x="9093200" y="3886200"/>
+            <a:ext cx="2463800" cy="12700"/>
           </a:xfrm>
           <a:prstGeom prst="rect">
             <a:avLst/>
           </a:prstGeom>
           <a:solidFill>
-            <a:srgbClr val="EDE8F2"/>
+            <a:srgbClr val="BFC7D1"/>
           </a:solidFill>
           <a:ln w="19050" cap="flat" cmpd="sng" algn="ctr">
             <a:noFill/>
@@ -5999,48 +6231,12 @@
           </a:p>
         </p:txBody>
       </p:sp>
-      <p:pic>
-        <p:nvPicPr>
-          <p:cNvPr id="24" name="Рисунок 23">
-            <a:extLst>
-              <a:ext uri="{FF2B5EF4-FFF2-40B4-BE49-F238E27FC236}">
-                <a16:creationId xmlns:a16="http://schemas.microsoft.com/office/drawing/2014/main" id="{7DD167BC-759F-7D30-8564-2FC235CF0364}"/>
-              </a:ext>
-            </a:extLst>
-          </p:cNvPr>
-          <p:cNvPicPr>
-            <a:picLocks noChangeAspect="1"/>
-          </p:cNvPicPr>
-          <p:nvPr/>
-        </p:nvPicPr>
-        <p:blipFill>
-          <a:blip r:embed="rId5">
-            <a:extLst>
-              <a:ext uri="{28A0092B-C50C-407E-A947-70E740481C1C}">
-                <a14:useLocalDpi xmlns:a14="http://schemas.microsoft.com/office/drawing/2010/main" val="0"/>
-              </a:ext>
-            </a:extLst>
-          </a:blip>
-          <a:stretch>
-            <a:fillRect/>
-          </a:stretch>
-        </p:blipFill>
-        <p:spPr>
-          <a:xfrm>
-            <a:off x="9093200" y="1346200"/>
-            <a:ext cx="2463800" cy="2489200"/>
-          </a:xfrm>
-          <a:prstGeom prst="rect">
-            <a:avLst/>
-          </a:prstGeom>
-        </p:spPr>
-      </p:pic>
       <p:sp>
         <p:nvSpPr>
           <p:cNvPr id="25" name="TextBox 24">
             <a:extLst>
               <a:ext uri="{FF2B5EF4-FFF2-40B4-BE49-F238E27FC236}">
-                <a16:creationId xmlns:a16="http://schemas.microsoft.com/office/drawing/2014/main" id="{179CC744-6FBD-B8B9-9183-A254B0B5F55C}"/>
+                <a16:creationId xmlns:a16="http://schemas.microsoft.com/office/drawing/2014/main" id="{55AC6F1A-1C50-83DF-4AC1-DCDC2D38C1E3}"/>
               </a:ext>
             </a:extLst>
           </p:cNvPr>
@@ -6049,8 +6245,8 @@
         </p:nvSpPr>
         <p:spPr>
           <a:xfrm>
-            <a:off x="9118600" y="3911600"/>
-            <a:ext cx="2413000" cy="369332"/>
+            <a:off x="9093200" y="3987800"/>
+            <a:ext cx="2463800" cy="369332"/>
           </a:xfrm>
           <a:prstGeom prst="rect">
             <a:avLst/>
@@ -6064,18 +6260,18 @@
           <a:lstStyle/>
           <a:p>
             <a:r>
-              <a:rPr lang="en-US" sz="1600" b="1">
-                <a:solidFill>
-                  <a:srgbClr val="5B4B6E"/>
+              <a:rPr lang="en-US" sz="1500" b="1">
+                <a:solidFill>
+                  <a:srgbClr val="1F3864"/>
                 </a:solidFill>
                 <a:latin typeface="Times New Roman" panose="02020603050405020304" pitchFamily="18" charset="0"/>
               </a:rPr>
               <a:t>LMS «</a:t>
             </a:r>
             <a:r>
-              <a:rPr lang="ru-RU" sz="1600" b="1">
-                <a:solidFill>
-                  <a:srgbClr val="5B4B6E"/>
+              <a:rPr lang="ru-RU" sz="1500" b="1">
+                <a:solidFill>
+                  <a:srgbClr val="1F3864"/>
                 </a:solidFill>
                 <a:latin typeface="Times New Roman" panose="02020603050405020304" pitchFamily="18" charset="0"/>
               </a:rPr>
@@ -6089,7 +6285,7 @@
           <p:cNvPr id="26" name="TextBox 25">
             <a:extLst>
               <a:ext uri="{FF2B5EF4-FFF2-40B4-BE49-F238E27FC236}">
-                <a16:creationId xmlns:a16="http://schemas.microsoft.com/office/drawing/2014/main" id="{0C331249-9AD3-E8F1-19DE-378B995FDEE5}"/>
+                <a16:creationId xmlns:a16="http://schemas.microsoft.com/office/drawing/2014/main" id="{4598DD73-6D87-0C26-BE99-96853072745F}"/>
               </a:ext>
             </a:extLst>
           </p:cNvPr>
@@ -6098,8 +6294,8 @@
         </p:nvSpPr>
         <p:spPr>
           <a:xfrm>
-            <a:off x="9118600" y="4241800"/>
-            <a:ext cx="2413000" cy="369332"/>
+            <a:off x="9093200" y="4343400"/>
+            <a:ext cx="2463800" cy="369332"/>
           </a:xfrm>
           <a:prstGeom prst="rect">
             <a:avLst/>
@@ -6115,7 +6311,7 @@
             <a:r>
               <a:rPr lang="ru-RU" sz="1200">
                 <a:solidFill>
-                  <a:srgbClr val="2B2233"/>
+                  <a:srgbClr val="595959"/>
                 </a:solidFill>
                 <a:latin typeface="Times New Roman" panose="02020603050405020304" pitchFamily="18" charset="0"/>
               </a:rPr>
@@ -6129,7 +6325,7 @@
           <p:cNvPr id="27" name="TextBox 26">
             <a:extLst>
               <a:ext uri="{FF2B5EF4-FFF2-40B4-BE49-F238E27FC236}">
-                <a16:creationId xmlns:a16="http://schemas.microsoft.com/office/drawing/2014/main" id="{26F01BD3-7D73-436F-9B01-620D2C92D5D1}"/>
+                <a16:creationId xmlns:a16="http://schemas.microsoft.com/office/drawing/2014/main" id="{257A0FE4-5EEE-41F0-60E4-E70CDC1A5F2A}"/>
               </a:ext>
             </a:extLst>
           </p:cNvPr>
@@ -6138,7 +6334,7 @@
         </p:nvSpPr>
         <p:spPr>
           <a:xfrm>
-            <a:off x="558800" y="5384800"/>
+            <a:off x="558800" y="5461000"/>
             <a:ext cx="11074400" cy="369332"/>
           </a:xfrm>
           <a:prstGeom prst="rect">
@@ -6153,9 +6349,9 @@
           <a:lstStyle/>
           <a:p>
             <a:r>
-              <a:rPr lang="ru-RU" sz="1500">
-                <a:solidFill>
-                  <a:srgbClr val="6B6472"/>
+              <a:rPr lang="ru-RU" sz="1400">
+                <a:solidFill>
+                  <a:srgbClr val="595959"/>
                 </a:solidFill>
                 <a:latin typeface="Times New Roman" panose="02020603050405020304" pitchFamily="18" charset="0"/>
               </a:rPr>
@@ -6167,7 +6363,7 @@
     </p:spTree>
     <p:extLst>
       <p:ext uri="{BB962C8B-B14F-4D97-AF65-F5344CB8AC3E}">
-        <p14:creationId xmlns:p14="http://schemas.microsoft.com/office/powerpoint/2010/main" val="4164350414"/>
+        <p14:creationId xmlns:p14="http://schemas.microsoft.com/office/powerpoint/2010/main" val="398833322"/>
       </p:ext>
     </p:extLst>
   </p:cSld>
@@ -6199,7 +6395,7 @@
           <p:cNvPr id="2" name="Прямоугольник 1">
             <a:extLst>
               <a:ext uri="{FF2B5EF4-FFF2-40B4-BE49-F238E27FC236}">
-                <a16:creationId xmlns:a16="http://schemas.microsoft.com/office/drawing/2014/main" id="{7EC8E9E9-A870-59C9-9455-8B3513A327B5}"/>
+                <a16:creationId xmlns:a16="http://schemas.microsoft.com/office/drawing/2014/main" id="{92388600-08B7-E9D4-B4C0-553AAF50CCC9}"/>
               </a:ext>
             </a:extLst>
           </p:cNvPr>
@@ -6267,7 +6463,7 @@
           <p:cNvPr id="3" name="Прямоугольник 2">
             <a:extLst>
               <a:ext uri="{FF2B5EF4-FFF2-40B4-BE49-F238E27FC236}">
-                <a16:creationId xmlns:a16="http://schemas.microsoft.com/office/drawing/2014/main" id="{17FD1556-506F-1DE1-0702-7F19BB049934}"/>
+                <a16:creationId xmlns:a16="http://schemas.microsoft.com/office/drawing/2014/main" id="{95C01306-0E5C-7405-C4BA-A53741673C9C}"/>
               </a:ext>
             </a:extLst>
           </p:cNvPr>
@@ -6277,13 +6473,13 @@
         <p:spPr>
           <a:xfrm>
             <a:off x="0" y="0"/>
-            <a:ext cx="12192000" cy="965200"/>
+            <a:ext cx="12192000" cy="76200"/>
           </a:xfrm>
           <a:prstGeom prst="rect">
             <a:avLst/>
           </a:prstGeom>
           <a:solidFill>
-            <a:srgbClr val="5B4B6E"/>
+            <a:srgbClr val="1F3864"/>
           </a:solidFill>
           <a:ln w="19050" cap="flat" cmpd="sng" algn="ctr">
             <a:noFill/>
@@ -6335,7 +6531,7 @@
           <p:cNvPr id="4" name="TextBox 3">
             <a:extLst>
               <a:ext uri="{FF2B5EF4-FFF2-40B4-BE49-F238E27FC236}">
-                <a16:creationId xmlns:a16="http://schemas.microsoft.com/office/drawing/2014/main" id="{71AD4FB6-1043-BC28-F66E-AFB08CAE868B}"/>
+                <a16:creationId xmlns:a16="http://schemas.microsoft.com/office/drawing/2014/main" id="{231FBE69-8449-6A9D-BF23-AE5C431FEBFB}"/>
               </a:ext>
             </a:extLst>
           </p:cNvPr>
@@ -6344,7 +6540,7 @@
         </p:nvSpPr>
         <p:spPr>
           <a:xfrm>
-            <a:off x="558800" y="228600"/>
+            <a:off x="558800" y="330200"/>
             <a:ext cx="9906000" cy="369332"/>
           </a:xfrm>
           <a:prstGeom prst="rect">
@@ -6359,9 +6555,9 @@
           <a:lstStyle/>
           <a:p>
             <a:r>
-              <a:rPr lang="ru-RU" sz="2800" b="1">
-                <a:solidFill>
-                  <a:srgbClr val="FFFFFF"/>
+              <a:rPr lang="ru-RU" sz="2500" b="1">
+                <a:solidFill>
+                  <a:srgbClr val="1F3864"/>
                 </a:solidFill>
                 <a:latin typeface="Times New Roman" panose="02020603050405020304" pitchFamily="18" charset="0"/>
               </a:rPr>
@@ -6375,7 +6571,7 @@
           <p:cNvPr id="5" name="TextBox 4">
             <a:extLst>
               <a:ext uri="{FF2B5EF4-FFF2-40B4-BE49-F238E27FC236}">
-                <a16:creationId xmlns:a16="http://schemas.microsoft.com/office/drawing/2014/main" id="{3D5E54C6-6194-9279-5F67-2199DBD268E2}"/>
+                <a16:creationId xmlns:a16="http://schemas.microsoft.com/office/drawing/2014/main" id="{DFD3BA85-431E-EFD9-4D2E-E87C259D0D98}"/>
               </a:ext>
             </a:extLst>
           </p:cNvPr>
@@ -6384,7 +6580,7 @@
         </p:nvSpPr>
         <p:spPr>
           <a:xfrm>
-            <a:off x="10617200" y="304800"/>
+            <a:off x="10617200" y="419100"/>
             <a:ext cx="1041400" cy="369332"/>
           </a:xfrm>
           <a:prstGeom prst="rect">
@@ -6400,9 +6596,9 @@
           <a:p>
             <a:pPr algn="r"/>
             <a:r>
-              <a:rPr lang="ru-RU" sz="1500">
-                <a:solidFill>
-                  <a:srgbClr val="C9BBDA"/>
+              <a:rPr lang="ru-RU" sz="1200">
+                <a:solidFill>
+                  <a:srgbClr val="595959"/>
                 </a:solidFill>
                 <a:latin typeface="Times New Roman" panose="02020603050405020304" pitchFamily="18" charset="0"/>
               </a:rPr>
@@ -6416,7 +6612,7 @@
           <p:cNvPr id="6" name="Прямоугольник 5">
             <a:extLst>
               <a:ext uri="{FF2B5EF4-FFF2-40B4-BE49-F238E27FC236}">
-                <a16:creationId xmlns:a16="http://schemas.microsoft.com/office/drawing/2014/main" id="{6D079604-5B41-1829-8319-5EB9CEC284D0}"/>
+                <a16:creationId xmlns:a16="http://schemas.microsoft.com/office/drawing/2014/main" id="{61CAEEC9-9578-0F33-42A6-B7B2977AC23D}"/>
               </a:ext>
             </a:extLst>
           </p:cNvPr>
@@ -6425,14 +6621,14 @@
         </p:nvSpPr>
         <p:spPr>
           <a:xfrm>
-            <a:off x="0" y="965200"/>
-            <a:ext cx="12192000" cy="76200"/>
+            <a:off x="558800" y="939800"/>
+            <a:ext cx="11074400" cy="12700"/>
           </a:xfrm>
           <a:prstGeom prst="rect">
             <a:avLst/>
           </a:prstGeom>
           <a:solidFill>
-            <a:srgbClr val="7C9070"/>
+            <a:srgbClr val="BFC7D1"/>
           </a:solidFill>
           <a:ln w="19050" cap="flat" cmpd="sng" algn="ctr">
             <a:noFill/>
@@ -6484,7 +6680,7 @@
           <p:cNvPr id="8" name="Рисунок 7">
             <a:extLst>
               <a:ext uri="{FF2B5EF4-FFF2-40B4-BE49-F238E27FC236}">
-                <a16:creationId xmlns:a16="http://schemas.microsoft.com/office/drawing/2014/main" id="{9C350DC1-A499-4CD2-6008-4B10C5D45505}"/>
+                <a16:creationId xmlns:a16="http://schemas.microsoft.com/office/drawing/2014/main" id="{235F7589-E5EE-B205-351E-7E81319E84FD}"/>
               </a:ext>
             </a:extLst>
           </p:cNvPr>
@@ -6520,7 +6716,7 @@
           <p:cNvPr id="9" name="TextBox 8">
             <a:extLst>
               <a:ext uri="{FF2B5EF4-FFF2-40B4-BE49-F238E27FC236}">
-                <a16:creationId xmlns:a16="http://schemas.microsoft.com/office/drawing/2014/main" id="{26BD10FB-E4F3-DC85-3568-D4BC41280D12}"/>
+                <a16:creationId xmlns:a16="http://schemas.microsoft.com/office/drawing/2014/main" id="{9E111361-922D-E8BE-16EA-567B31A5A341}"/>
               </a:ext>
             </a:extLst>
           </p:cNvPr>
@@ -6554,7 +6750,7 @@
             <a:r>
               <a:rPr lang="ru-RU" sz="1400">
                 <a:solidFill>
-                  <a:srgbClr val="2B2233"/>
+                  <a:srgbClr val="262626"/>
                 </a:solidFill>
                 <a:latin typeface="Times New Roman" panose="02020603050405020304" pitchFamily="18" charset="0"/>
               </a:rPr>
@@ -6573,7 +6769,7 @@
             <a:r>
               <a:rPr lang="ru-RU" sz="1400">
                 <a:solidFill>
-                  <a:srgbClr val="2B2233"/>
+                  <a:srgbClr val="262626"/>
                 </a:solidFill>
                 <a:latin typeface="Times New Roman" panose="02020603050405020304" pitchFamily="18" charset="0"/>
               </a:rPr>
@@ -6592,7 +6788,7 @@
             <a:r>
               <a:rPr lang="ru-RU" sz="1400">
                 <a:solidFill>
-                  <a:srgbClr val="2B2233"/>
+                  <a:srgbClr val="262626"/>
                 </a:solidFill>
                 <a:latin typeface="Times New Roman" panose="02020603050405020304" pitchFamily="18" charset="0"/>
               </a:rPr>
@@ -6611,7 +6807,7 @@
             <a:r>
               <a:rPr lang="ru-RU" sz="1400">
                 <a:solidFill>
-                  <a:srgbClr val="2B2233"/>
+                  <a:srgbClr val="262626"/>
                 </a:solidFill>
                 <a:latin typeface="Times New Roman" panose="02020603050405020304" pitchFamily="18" charset="0"/>
               </a:rPr>
@@ -6629,7 +6825,7 @@
             </a:pPr>
             <a:endParaRPr lang="ru-RU" sz="1400">
               <a:solidFill>
-                <a:srgbClr val="2B2233"/>
+                <a:srgbClr val="262626"/>
               </a:solidFill>
               <a:latin typeface="Times New Roman" panose="02020603050405020304" pitchFamily="18" charset="0"/>
             </a:endParaRPr>
@@ -6639,7 +6835,7 @@
     </p:spTree>
     <p:extLst>
       <p:ext uri="{BB962C8B-B14F-4D97-AF65-F5344CB8AC3E}">
-        <p14:creationId xmlns:p14="http://schemas.microsoft.com/office/powerpoint/2010/main" val="3071428913"/>
+        <p14:creationId xmlns:p14="http://schemas.microsoft.com/office/powerpoint/2010/main" val="2045922563"/>
       </p:ext>
     </p:extLst>
   </p:cSld>
@@ -6671,7 +6867,7 @@
           <p:cNvPr id="2" name="Прямоугольник 1">
             <a:extLst>
               <a:ext uri="{FF2B5EF4-FFF2-40B4-BE49-F238E27FC236}">
-                <a16:creationId xmlns:a16="http://schemas.microsoft.com/office/drawing/2014/main" id="{FFF6A7B4-F618-65D1-5EFF-426E9A564930}"/>
+                <a16:creationId xmlns:a16="http://schemas.microsoft.com/office/drawing/2014/main" id="{63F5525D-2FF1-E00D-1244-CF27075F42ED}"/>
               </a:ext>
             </a:extLst>
           </p:cNvPr>
@@ -6739,7 +6935,7 @@
           <p:cNvPr id="3" name="Прямоугольник 2">
             <a:extLst>
               <a:ext uri="{FF2B5EF4-FFF2-40B4-BE49-F238E27FC236}">
-                <a16:creationId xmlns:a16="http://schemas.microsoft.com/office/drawing/2014/main" id="{8642F0A9-A0D0-97F2-398E-00BD92E9A3BE}"/>
+                <a16:creationId xmlns:a16="http://schemas.microsoft.com/office/drawing/2014/main" id="{6F5A8707-DDEB-6480-D6AC-EEE00A082988}"/>
               </a:ext>
             </a:extLst>
           </p:cNvPr>
@@ -6749,13 +6945,13 @@
         <p:spPr>
           <a:xfrm>
             <a:off x="0" y="0"/>
-            <a:ext cx="12192000" cy="965200"/>
+            <a:ext cx="12192000" cy="76200"/>
           </a:xfrm>
           <a:prstGeom prst="rect">
             <a:avLst/>
           </a:prstGeom>
           <a:solidFill>
-            <a:srgbClr val="5B4B6E"/>
+            <a:srgbClr val="1F3864"/>
           </a:solidFill>
           <a:ln w="19050" cap="flat" cmpd="sng" algn="ctr">
             <a:noFill/>
@@ -6807,7 +7003,7 @@
           <p:cNvPr id="4" name="TextBox 3">
             <a:extLst>
               <a:ext uri="{FF2B5EF4-FFF2-40B4-BE49-F238E27FC236}">
-                <a16:creationId xmlns:a16="http://schemas.microsoft.com/office/drawing/2014/main" id="{816B0773-41FE-ED4F-AFF4-70218DB123F2}"/>
+                <a16:creationId xmlns:a16="http://schemas.microsoft.com/office/drawing/2014/main" id="{3231ED4E-2044-3DAD-2250-A61E206C0831}"/>
               </a:ext>
             </a:extLst>
           </p:cNvPr>
@@ -6816,7 +7012,7 @@
         </p:nvSpPr>
         <p:spPr>
           <a:xfrm>
-            <a:off x="558800" y="228600"/>
+            <a:off x="558800" y="330200"/>
             <a:ext cx="9906000" cy="369332"/>
           </a:xfrm>
           <a:prstGeom prst="rect">
@@ -6831,9 +7027,9 @@
           <a:lstStyle/>
           <a:p>
             <a:r>
-              <a:rPr lang="ru-RU" sz="2800" b="1">
-                <a:solidFill>
-                  <a:srgbClr val="FFFFFF"/>
+              <a:rPr lang="ru-RU" sz="2500" b="1">
+                <a:solidFill>
+                  <a:srgbClr val="1F3864"/>
                 </a:solidFill>
                 <a:latin typeface="Times New Roman" panose="02020603050405020304" pitchFamily="18" charset="0"/>
               </a:rPr>
@@ -6847,7 +7043,7 @@
           <p:cNvPr id="5" name="TextBox 4">
             <a:extLst>
               <a:ext uri="{FF2B5EF4-FFF2-40B4-BE49-F238E27FC236}">
-                <a16:creationId xmlns:a16="http://schemas.microsoft.com/office/drawing/2014/main" id="{4CF71B28-AAA7-76CB-D502-BCCEF4014525}"/>
+                <a16:creationId xmlns:a16="http://schemas.microsoft.com/office/drawing/2014/main" id="{7D7ACBAD-2C27-7CE4-DDE5-EB0F0D7728AA}"/>
               </a:ext>
             </a:extLst>
           </p:cNvPr>
@@ -6856,7 +7052,7 @@
         </p:nvSpPr>
         <p:spPr>
           <a:xfrm>
-            <a:off x="10617200" y="304800"/>
+            <a:off x="10617200" y="419100"/>
             <a:ext cx="1041400" cy="369332"/>
           </a:xfrm>
           <a:prstGeom prst="rect">
@@ -6872,9 +7068,9 @@
           <a:p>
             <a:pPr algn="r"/>
             <a:r>
-              <a:rPr lang="ru-RU" sz="1500">
-                <a:solidFill>
-                  <a:srgbClr val="C9BBDA"/>
+              <a:rPr lang="ru-RU" sz="1200">
+                <a:solidFill>
+                  <a:srgbClr val="595959"/>
                 </a:solidFill>
                 <a:latin typeface="Times New Roman" panose="02020603050405020304" pitchFamily="18" charset="0"/>
               </a:rPr>
@@ -6888,7 +7084,7 @@
           <p:cNvPr id="6" name="Прямоугольник 5">
             <a:extLst>
               <a:ext uri="{FF2B5EF4-FFF2-40B4-BE49-F238E27FC236}">
-                <a16:creationId xmlns:a16="http://schemas.microsoft.com/office/drawing/2014/main" id="{CD742544-BE93-FE7B-9B58-07EEE4272395}"/>
+                <a16:creationId xmlns:a16="http://schemas.microsoft.com/office/drawing/2014/main" id="{AC235AEF-A085-06E5-595A-BCF0030AEF03}"/>
               </a:ext>
             </a:extLst>
           </p:cNvPr>
@@ -6897,14 +7093,14 @@
         </p:nvSpPr>
         <p:spPr>
           <a:xfrm>
-            <a:off x="0" y="965200"/>
-            <a:ext cx="12192000" cy="76200"/>
+            <a:off x="558800" y="939800"/>
+            <a:ext cx="11074400" cy="12700"/>
           </a:xfrm>
           <a:prstGeom prst="rect">
             <a:avLst/>
           </a:prstGeom>
           <a:solidFill>
-            <a:srgbClr val="7C9070"/>
+            <a:srgbClr val="BFC7D1"/>
           </a:solidFill>
           <a:ln w="19050" cap="flat" cmpd="sng" algn="ctr">
             <a:noFill/>
@@ -6951,361 +7147,66 @@
           </a:p>
         </p:txBody>
       </p:sp>
-      <p:graphicFrame>
-        <p:nvGraphicFramePr>
-          <p:cNvPr id="7" name="Таблица 6">
-            <a:extLst>
-              <a:ext uri="{FF2B5EF4-FFF2-40B4-BE49-F238E27FC236}">
-                <a16:creationId xmlns:a16="http://schemas.microsoft.com/office/drawing/2014/main" id="{0F1DB994-2D38-144A-7EA6-A880646BB5D4}"/>
-              </a:ext>
-            </a:extLst>
-          </p:cNvPr>
-          <p:cNvGraphicFramePr>
-            <a:graphicFrameLocks noGrp="1"/>
-          </p:cNvGraphicFramePr>
-          <p:nvPr>
-            <p:extLst>
-              <p:ext uri="{D42A27DB-BD31-4B8C-83A1-F6EECF244321}">
-                <p14:modId xmlns:p14="http://schemas.microsoft.com/office/powerpoint/2010/main" val="3227317098"/>
-              </p:ext>
-            </p:extLst>
-          </p:nvPr>
-        </p:nvGraphicFramePr>
-        <p:xfrm>
-          <a:off x="558800" y="1270000"/>
-          <a:ext cx="11074400" cy="3810000"/>
-        </p:xfrm>
-        <a:graphic>
-          <a:graphicData uri="http://schemas.openxmlformats.org/drawingml/2006/table">
-            <a:tbl>
-              <a:tblPr firstRow="1" bandRow="1">
-                <a:tableStyleId>{5C22544A-7EE6-4342-B048-85BDC9FD1C3A}</a:tableStyleId>
-              </a:tblPr>
-              <a:tblGrid>
-                <a:gridCol w="2413000">
-                  <a:extLst>
-                    <a:ext uri="{9D8B030D-6E8A-4147-A177-3AD203B41FA5}">
-                      <a16:colId xmlns:a16="http://schemas.microsoft.com/office/drawing/2014/main" val="2317742578"/>
-                    </a:ext>
-                  </a:extLst>
-                </a:gridCol>
-                <a:gridCol w="5969000">
-                  <a:extLst>
-                    <a:ext uri="{9D8B030D-6E8A-4147-A177-3AD203B41FA5}">
-                      <a16:colId xmlns:a16="http://schemas.microsoft.com/office/drawing/2014/main" val="1100241438"/>
-                    </a:ext>
-                  </a:extLst>
-                </a:gridCol>
-                <a:gridCol w="2692400">
-                  <a:extLst>
-                    <a:ext uri="{9D8B030D-6E8A-4147-A177-3AD203B41FA5}">
-                      <a16:colId xmlns:a16="http://schemas.microsoft.com/office/drawing/2014/main" val="3018517252"/>
-                    </a:ext>
-                  </a:extLst>
-                </a:gridCol>
-              </a:tblGrid>
-              <a:tr h="355600">
-                <a:tc>
-                  <a:txBody>
-                    <a:bodyPr/>
-                    <a:lstStyle/>
-                    <a:p>
-                      <a:r>
-                        <a:rPr lang="ru-RU" sz="1500" b="1">
-                          <a:solidFill>
-                            <a:srgbClr val="FFFFFF"/>
-                          </a:solidFill>
-                          <a:latin typeface="Times New Roman" panose="02020603050405020304" pitchFamily="18" charset="0"/>
-                        </a:rPr>
-                        <a:t>Роль</a:t>
-                      </a:r>
-                    </a:p>
-                  </a:txBody>
-                  <a:tcPr>
-                    <a:solidFill>
-                      <a:srgbClr val="5B4B6E"/>
-                    </a:solidFill>
-                  </a:tcPr>
-                </a:tc>
-                <a:tc>
-                  <a:txBody>
-                    <a:bodyPr/>
-                    <a:lstStyle/>
-                    <a:p>
-                      <a:r>
-                        <a:rPr lang="ru-RU" sz="1500" b="1">
-                          <a:solidFill>
-                            <a:srgbClr val="FFFFFF"/>
-                          </a:solidFill>
-                          <a:latin typeface="Times New Roman" panose="02020603050405020304" pitchFamily="18" charset="0"/>
-                        </a:rPr>
-                        <a:t>Возможности</a:t>
-                      </a:r>
-                    </a:p>
-                  </a:txBody>
-                  <a:tcPr>
-                    <a:solidFill>
-                      <a:srgbClr val="5B4B6E"/>
-                    </a:solidFill>
-                  </a:tcPr>
-                </a:tc>
-                <a:tc>
-                  <a:txBody>
-                    <a:bodyPr/>
-                    <a:lstStyle/>
-                    <a:p>
-                      <a:r>
-                        <a:rPr lang="ru-RU" sz="1500" b="1">
-                          <a:solidFill>
-                            <a:srgbClr val="FFFFFF"/>
-                          </a:solidFill>
-                          <a:latin typeface="Times New Roman" panose="02020603050405020304" pitchFamily="18" charset="0"/>
-                        </a:rPr>
-                        <a:t>Ограничения</a:t>
-                      </a:r>
-                    </a:p>
-                  </a:txBody>
-                  <a:tcPr>
-                    <a:solidFill>
-                      <a:srgbClr val="5B4B6E"/>
-                    </a:solidFill>
-                  </a:tcPr>
-                </a:tc>
-                <a:extLst>
-                  <a:ext uri="{0D108BD9-81ED-4DB2-BD59-A6C34878D82A}">
-                    <a16:rowId xmlns:a16="http://schemas.microsoft.com/office/drawing/2014/main" val="1138095165"/>
-                  </a:ext>
-                </a:extLst>
-              </a:tr>
-              <a:tr h="736600">
-                <a:tc>
-                  <a:txBody>
-                    <a:bodyPr/>
-                    <a:lstStyle/>
-                    <a:p>
-                      <a:r>
-                        <a:rPr lang="ru-RU" sz="1200" b="1">
-                          <a:solidFill>
-                            <a:srgbClr val="2B2233"/>
-                          </a:solidFill>
-                          <a:latin typeface="Times New Roman" panose="02020603050405020304" pitchFamily="18" charset="0"/>
-                        </a:rPr>
-                        <a:t>Администратор</a:t>
-                      </a:r>
-                    </a:p>
-                  </a:txBody>
-                  <a:tcPr>
-                    <a:solidFill>
-                      <a:srgbClr val="F3EFF5"/>
-                    </a:solidFill>
-                  </a:tcPr>
-                </a:tc>
-                <a:tc>
-                  <a:txBody>
-                    <a:bodyPr/>
-                    <a:lstStyle/>
-                    <a:p>
-                      <a:r>
-                        <a:rPr lang="ru-RU" sz="1200" b="0">
-                          <a:solidFill>
-                            <a:srgbClr val="2B2233"/>
-                          </a:solidFill>
-                          <a:latin typeface="Times New Roman" panose="02020603050405020304" pitchFamily="18" charset="0"/>
-                        </a:rPr>
-                        <a:t>Ведение справочников: пользователи, группы, дисциплины, преподаватели, курсы. Блокировка и удаление учётных записей. Импорт данных из XML. Загрузка изображений курсов.</a:t>
-                      </a:r>
-                    </a:p>
-                  </a:txBody>
-                  <a:tcPr>
-                    <a:solidFill>
-                      <a:srgbClr val="F3EFF5"/>
-                    </a:solidFill>
-                  </a:tcPr>
-                </a:tc>
-                <a:tc>
-                  <a:txBody>
-                    <a:bodyPr/>
-                    <a:lstStyle/>
-                    <a:p>
-                      <a:r>
-                        <a:rPr lang="ru-RU" sz="1200" b="0">
-                          <a:solidFill>
-                            <a:srgbClr val="2B2233"/>
-                          </a:solidFill>
-                          <a:latin typeface="Times New Roman" panose="02020603050405020304" pitchFamily="18" charset="0"/>
-                        </a:rPr>
-                        <a:t>Полный доступ ко всем функциям системы</a:t>
-                      </a:r>
-                    </a:p>
-                  </a:txBody>
-                  <a:tcPr>
-                    <a:solidFill>
-                      <a:srgbClr val="F3EFF5"/>
-                    </a:solidFill>
-                  </a:tcPr>
-                </a:tc>
-                <a:extLst>
-                  <a:ext uri="{0D108BD9-81ED-4DB2-BD59-A6C34878D82A}">
-                    <a16:rowId xmlns:a16="http://schemas.microsoft.com/office/drawing/2014/main" val="4115492830"/>
-                  </a:ext>
-                </a:extLst>
-              </a:tr>
-              <a:tr h="736600">
-                <a:tc>
-                  <a:txBody>
-                    <a:bodyPr/>
-                    <a:lstStyle/>
-                    <a:p>
-                      <a:r>
-                        <a:rPr lang="ru-RU" sz="1200" b="1">
-                          <a:solidFill>
-                            <a:srgbClr val="2B2233"/>
-                          </a:solidFill>
-                          <a:latin typeface="Times New Roman" panose="02020603050405020304" pitchFamily="18" charset="0"/>
-                        </a:rPr>
-                        <a:t>Учитель</a:t>
-                      </a:r>
-                    </a:p>
-                  </a:txBody>
-                  <a:tcPr>
-                    <a:solidFill>
-                      <a:srgbClr val="FFFFFF"/>
-                    </a:solidFill>
-                  </a:tcPr>
-                </a:tc>
-                <a:tc>
-                  <a:txBody>
-                    <a:bodyPr/>
-                    <a:lstStyle/>
-                    <a:p>
-                      <a:r>
-                        <a:rPr lang="ru-RU" sz="1200" b="0">
-                          <a:solidFill>
-                            <a:srgbClr val="2B2233"/>
-                          </a:solidFill>
-                          <a:latin typeface="Times New Roman" panose="02020603050405020304" pitchFamily="18" charset="0"/>
-                        </a:rPr>
-                        <a:t>Создание курсов и заданий, назначение сроков сдачи и максимального балла, проверка работ, выставление оценок с комментарием, формирование ведомости успеваемости.</a:t>
-                      </a:r>
-                    </a:p>
-                  </a:txBody>
-                  <a:tcPr>
-                    <a:solidFill>
-                      <a:srgbClr val="FFFFFF"/>
-                    </a:solidFill>
-                  </a:tcPr>
-                </a:tc>
-                <a:tc>
-                  <a:txBody>
-                    <a:bodyPr/>
-                    <a:lstStyle/>
-                    <a:p>
-                      <a:r>
-                        <a:rPr lang="ru-RU" sz="1200" b="0">
-                          <a:solidFill>
-                            <a:srgbClr val="2B2233"/>
-                          </a:solidFill>
-                          <a:latin typeface="Times New Roman" panose="02020603050405020304" pitchFamily="18" charset="0"/>
-                        </a:rPr>
-                        <a:t>Работа только со своими курсами и работами учеников</a:t>
-                      </a:r>
-                    </a:p>
-                  </a:txBody>
-                  <a:tcPr>
-                    <a:solidFill>
-                      <a:srgbClr val="FFFFFF"/>
-                    </a:solidFill>
-                  </a:tcPr>
-                </a:tc>
-                <a:extLst>
-                  <a:ext uri="{0D108BD9-81ED-4DB2-BD59-A6C34878D82A}">
-                    <a16:rowId xmlns:a16="http://schemas.microsoft.com/office/drawing/2014/main" val="2142629399"/>
-                  </a:ext>
-                </a:extLst>
-              </a:tr>
-              <a:tr h="736600">
-                <a:tc>
-                  <a:txBody>
-                    <a:bodyPr/>
-                    <a:lstStyle/>
-                    <a:p>
-                      <a:r>
-                        <a:rPr lang="ru-RU" sz="1200" b="1">
-                          <a:solidFill>
-                            <a:srgbClr val="2B2233"/>
-                          </a:solidFill>
-                          <a:latin typeface="Times New Roman" panose="02020603050405020304" pitchFamily="18" charset="0"/>
-                        </a:rPr>
-                        <a:t>Ученик</a:t>
-                      </a:r>
-                    </a:p>
-                  </a:txBody>
-                  <a:tcPr>
-                    <a:solidFill>
-                      <a:srgbClr val="F3EFF5"/>
-                    </a:solidFill>
-                  </a:tcPr>
-                </a:tc>
-                <a:tc>
-                  <a:txBody>
-                    <a:bodyPr/>
-                    <a:lstStyle/>
-                    <a:p>
-                      <a:r>
-                        <a:rPr lang="ru-RU" sz="1200" b="0">
-                          <a:solidFill>
-                            <a:srgbClr val="2B2233"/>
-                          </a:solidFill>
-                          <a:latin typeface="Times New Roman" panose="02020603050405020304" pitchFamily="18" charset="0"/>
-                        </a:rPr>
-                        <a:t>Просмотр доступных курсов, запись на курсы, выполнение заданий и отправка работ, просмотр собственных оценок и статуса проверки.</a:t>
-                      </a:r>
-                    </a:p>
-                  </a:txBody>
-                  <a:tcPr>
-                    <a:solidFill>
-                      <a:srgbClr val="F3EFF5"/>
-                    </a:solidFill>
-                  </a:tcPr>
-                </a:tc>
-                <a:tc>
-                  <a:txBody>
-                    <a:bodyPr/>
-                    <a:lstStyle/>
-                    <a:p>
-                      <a:r>
-                        <a:rPr lang="ru-RU" sz="1200" b="0">
-                          <a:solidFill>
-                            <a:srgbClr val="2B2233"/>
-                          </a:solidFill>
-                          <a:latin typeface="Times New Roman" panose="02020603050405020304" pitchFamily="18" charset="0"/>
-                        </a:rPr>
-                        <a:t>Доступ только к своим данным</a:t>
-                      </a:r>
-                    </a:p>
-                  </a:txBody>
-                  <a:tcPr>
-                    <a:solidFill>
-                      <a:srgbClr val="F3EFF5"/>
-                    </a:solidFill>
-                  </a:tcPr>
-                </a:tc>
-                <a:extLst>
-                  <a:ext uri="{0D108BD9-81ED-4DB2-BD59-A6C34878D82A}">
-                    <a16:rowId xmlns:a16="http://schemas.microsoft.com/office/drawing/2014/main" val="735535016"/>
-                  </a:ext>
-                </a:extLst>
-              </a:tr>
-            </a:tbl>
-          </a:graphicData>
-        </a:graphic>
-      </p:graphicFrame>
+      <p:sp>
+        <p:nvSpPr>
+          <p:cNvPr id="7" name="Прямоугольник 6">
+            <a:extLst>
+              <a:ext uri="{FF2B5EF4-FFF2-40B4-BE49-F238E27FC236}">
+                <a16:creationId xmlns:a16="http://schemas.microsoft.com/office/drawing/2014/main" id="{38FCF2EB-8E1A-9C05-360D-9882D154F015}"/>
+              </a:ext>
+            </a:extLst>
+          </p:cNvPr>
+          <p:cNvSpPr/>
+          <p:nvPr/>
+        </p:nvSpPr>
+        <p:spPr>
+          <a:xfrm>
+            <a:off x="558800" y="1270000"/>
+            <a:ext cx="2413000" cy="406400"/>
+          </a:xfrm>
+          <a:prstGeom prst="rect">
+            <a:avLst/>
+          </a:prstGeom>
+          <a:solidFill>
+            <a:srgbClr val="1F3864"/>
+          </a:solidFill>
+          <a:ln>
+            <a:solidFill>
+              <a:srgbClr val="1F3864"/>
+            </a:solidFill>
+          </a:ln>
+        </p:spPr>
+        <p:style>
+          <a:lnRef idx="2">
+            <a:schemeClr val="accent1">
+              <a:shade val="15000"/>
+            </a:schemeClr>
+          </a:lnRef>
+          <a:fillRef idx="1">
+            <a:schemeClr val="accent1"/>
+          </a:fillRef>
+          <a:effectRef idx="0">
+            <a:schemeClr val="accent1"/>
+          </a:effectRef>
+          <a:fontRef idx="minor">
+            <a:schemeClr val="lt1"/>
+          </a:fontRef>
+        </p:style>
+        <p:txBody>
+          <a:bodyPr rtlCol="0" anchor="ctr"/>
+          <a:lstStyle/>
+          <a:p>
+            <a:pPr algn="ctr"/>
+            <a:endParaRPr lang="ru-RU"/>
+          </a:p>
+        </p:txBody>
+      </p:sp>
       <p:sp>
         <p:nvSpPr>
           <p:cNvPr id="8" name="TextBox 7">
             <a:extLst>
               <a:ext uri="{FF2B5EF4-FFF2-40B4-BE49-F238E27FC236}">
-                <a16:creationId xmlns:a16="http://schemas.microsoft.com/office/drawing/2014/main" id="{49B66BE8-ABEC-A571-09ED-5E7DDA9898C7}"/>
+                <a16:creationId xmlns:a16="http://schemas.microsoft.com/office/drawing/2014/main" id="{163A0962-2DC4-DD5B-C485-7E287B50AC8E}"/>
               </a:ext>
             </a:extLst>
           </p:cNvPr>
@@ -7314,8 +7215,8 @@
         </p:nvSpPr>
         <p:spPr>
           <a:xfrm>
-            <a:off x="558800" y="4445000"/>
-            <a:ext cx="11074400" cy="369332"/>
+            <a:off x="685800" y="1358900"/>
+            <a:ext cx="2159000" cy="369332"/>
           </a:xfrm>
           <a:prstGeom prst="rect">
             <a:avLst/>
@@ -7329,9 +7230,1083 @@
           <a:lstStyle/>
           <a:p>
             <a:r>
+              <a:rPr lang="ru-RU" sz="1500" b="1">
+                <a:solidFill>
+                  <a:srgbClr val="FFFFFF"/>
+                </a:solidFill>
+                <a:latin typeface="Times New Roman" panose="02020603050405020304" pitchFamily="18" charset="0"/>
+              </a:rPr>
+              <a:t>Роль</a:t>
+            </a:r>
+          </a:p>
+        </p:txBody>
+      </p:sp>
+      <p:sp>
+        <p:nvSpPr>
+          <p:cNvPr id="9" name="Прямоугольник 8">
+            <a:extLst>
+              <a:ext uri="{FF2B5EF4-FFF2-40B4-BE49-F238E27FC236}">
+                <a16:creationId xmlns:a16="http://schemas.microsoft.com/office/drawing/2014/main" id="{6C623701-DD89-0940-B860-29659D365A51}"/>
+              </a:ext>
+            </a:extLst>
+          </p:cNvPr>
+          <p:cNvSpPr/>
+          <p:nvPr/>
+        </p:nvSpPr>
+        <p:spPr>
+          <a:xfrm>
+            <a:off x="2971800" y="1270000"/>
+            <a:ext cx="5969000" cy="406400"/>
+          </a:xfrm>
+          <a:prstGeom prst="rect">
+            <a:avLst/>
+          </a:prstGeom>
+          <a:solidFill>
+            <a:srgbClr val="1F3864"/>
+          </a:solidFill>
+          <a:ln>
+            <a:solidFill>
+              <a:srgbClr val="1F3864"/>
+            </a:solidFill>
+          </a:ln>
+        </p:spPr>
+        <p:style>
+          <a:lnRef idx="2">
+            <a:schemeClr val="accent1">
+              <a:shade val="15000"/>
+            </a:schemeClr>
+          </a:lnRef>
+          <a:fillRef idx="1">
+            <a:schemeClr val="accent1"/>
+          </a:fillRef>
+          <a:effectRef idx="0">
+            <a:schemeClr val="accent1"/>
+          </a:effectRef>
+          <a:fontRef idx="minor">
+            <a:schemeClr val="lt1"/>
+          </a:fontRef>
+        </p:style>
+        <p:txBody>
+          <a:bodyPr rtlCol="0" anchor="ctr"/>
+          <a:lstStyle/>
+          <a:p>
+            <a:pPr algn="ctr"/>
+            <a:endParaRPr lang="ru-RU"/>
+          </a:p>
+        </p:txBody>
+      </p:sp>
+      <p:sp>
+        <p:nvSpPr>
+          <p:cNvPr id="10" name="TextBox 9">
+            <a:extLst>
+              <a:ext uri="{FF2B5EF4-FFF2-40B4-BE49-F238E27FC236}">
+                <a16:creationId xmlns:a16="http://schemas.microsoft.com/office/drawing/2014/main" id="{43CC82AD-DA3D-D333-306F-9216FD443B9A}"/>
+              </a:ext>
+            </a:extLst>
+          </p:cNvPr>
+          <p:cNvSpPr txBox="1"/>
+          <p:nvPr/>
+        </p:nvSpPr>
+        <p:spPr>
+          <a:xfrm>
+            <a:off x="3098800" y="1358900"/>
+            <a:ext cx="5715000" cy="369332"/>
+          </a:xfrm>
+          <a:prstGeom prst="rect">
+            <a:avLst/>
+          </a:prstGeom>
+          <a:noFill/>
+        </p:spPr>
+        <p:txBody>
+          <a:bodyPr vert="horz" wrap="square" lIns="0" tIns="0" rIns="0" bIns="0" rtlCol="0">
+            <a:noAutofit/>
+          </a:bodyPr>
+          <a:lstStyle/>
+          <a:p>
+            <a:r>
+              <a:rPr lang="ru-RU" sz="1500" b="1">
+                <a:solidFill>
+                  <a:srgbClr val="FFFFFF"/>
+                </a:solidFill>
+                <a:latin typeface="Times New Roman" panose="02020603050405020304" pitchFamily="18" charset="0"/>
+              </a:rPr>
+              <a:t>Возможности</a:t>
+            </a:r>
+          </a:p>
+        </p:txBody>
+      </p:sp>
+      <p:sp>
+        <p:nvSpPr>
+          <p:cNvPr id="11" name="Прямоугольник 10">
+            <a:extLst>
+              <a:ext uri="{FF2B5EF4-FFF2-40B4-BE49-F238E27FC236}">
+                <a16:creationId xmlns:a16="http://schemas.microsoft.com/office/drawing/2014/main" id="{4F3F1A98-CF51-EF44-CCAF-8EEB81D6493A}"/>
+              </a:ext>
+            </a:extLst>
+          </p:cNvPr>
+          <p:cNvSpPr/>
+          <p:nvPr/>
+        </p:nvSpPr>
+        <p:spPr>
+          <a:xfrm>
+            <a:off x="8940800" y="1270000"/>
+            <a:ext cx="2692400" cy="406400"/>
+          </a:xfrm>
+          <a:prstGeom prst="rect">
+            <a:avLst/>
+          </a:prstGeom>
+          <a:solidFill>
+            <a:srgbClr val="1F3864"/>
+          </a:solidFill>
+          <a:ln>
+            <a:solidFill>
+              <a:srgbClr val="1F3864"/>
+            </a:solidFill>
+          </a:ln>
+        </p:spPr>
+        <p:style>
+          <a:lnRef idx="2">
+            <a:schemeClr val="accent1">
+              <a:shade val="15000"/>
+            </a:schemeClr>
+          </a:lnRef>
+          <a:fillRef idx="1">
+            <a:schemeClr val="accent1"/>
+          </a:fillRef>
+          <a:effectRef idx="0">
+            <a:schemeClr val="accent1"/>
+          </a:effectRef>
+          <a:fontRef idx="minor">
+            <a:schemeClr val="lt1"/>
+          </a:fontRef>
+        </p:style>
+        <p:txBody>
+          <a:bodyPr rtlCol="0" anchor="ctr"/>
+          <a:lstStyle/>
+          <a:p>
+            <a:pPr algn="ctr"/>
+            <a:endParaRPr lang="ru-RU"/>
+          </a:p>
+        </p:txBody>
+      </p:sp>
+      <p:sp>
+        <p:nvSpPr>
+          <p:cNvPr id="12" name="TextBox 11">
+            <a:extLst>
+              <a:ext uri="{FF2B5EF4-FFF2-40B4-BE49-F238E27FC236}">
+                <a16:creationId xmlns:a16="http://schemas.microsoft.com/office/drawing/2014/main" id="{2C56C8D2-0DB0-DA56-B260-3FEC03E79DA4}"/>
+              </a:ext>
+            </a:extLst>
+          </p:cNvPr>
+          <p:cNvSpPr txBox="1"/>
+          <p:nvPr/>
+        </p:nvSpPr>
+        <p:spPr>
+          <a:xfrm>
+            <a:off x="9067800" y="1358900"/>
+            <a:ext cx="2438400" cy="369332"/>
+          </a:xfrm>
+          <a:prstGeom prst="rect">
+            <a:avLst/>
+          </a:prstGeom>
+          <a:noFill/>
+        </p:spPr>
+        <p:txBody>
+          <a:bodyPr vert="horz" wrap="square" lIns="0" tIns="0" rIns="0" bIns="0" rtlCol="0">
+            <a:noAutofit/>
+          </a:bodyPr>
+          <a:lstStyle/>
+          <a:p>
+            <a:r>
+              <a:rPr lang="ru-RU" sz="1500" b="1">
+                <a:solidFill>
+                  <a:srgbClr val="FFFFFF"/>
+                </a:solidFill>
+                <a:latin typeface="Times New Roman" panose="02020603050405020304" pitchFamily="18" charset="0"/>
+              </a:rPr>
+              <a:t>Ограничения</a:t>
+            </a:r>
+          </a:p>
+        </p:txBody>
+      </p:sp>
+      <p:sp>
+        <p:nvSpPr>
+          <p:cNvPr id="13" name="Прямоугольник 12">
+            <a:extLst>
+              <a:ext uri="{FF2B5EF4-FFF2-40B4-BE49-F238E27FC236}">
+                <a16:creationId xmlns:a16="http://schemas.microsoft.com/office/drawing/2014/main" id="{60B9C168-2980-4F4C-3510-194A6C63991F}"/>
+              </a:ext>
+            </a:extLst>
+          </p:cNvPr>
+          <p:cNvSpPr/>
+          <p:nvPr/>
+        </p:nvSpPr>
+        <p:spPr>
+          <a:xfrm>
+            <a:off x="558800" y="1676400"/>
+            <a:ext cx="2413000" cy="1016000"/>
+          </a:xfrm>
+          <a:prstGeom prst="rect">
+            <a:avLst/>
+          </a:prstGeom>
+          <a:solidFill>
+            <a:srgbClr val="FFFFFF"/>
+          </a:solidFill>
+          <a:ln>
+            <a:solidFill>
+              <a:srgbClr val="BFC7D1"/>
+            </a:solidFill>
+          </a:ln>
+        </p:spPr>
+        <p:style>
+          <a:lnRef idx="2">
+            <a:schemeClr val="accent1">
+              <a:shade val="15000"/>
+            </a:schemeClr>
+          </a:lnRef>
+          <a:fillRef idx="1">
+            <a:schemeClr val="accent1"/>
+          </a:fillRef>
+          <a:effectRef idx="0">
+            <a:schemeClr val="accent1"/>
+          </a:effectRef>
+          <a:fontRef idx="minor">
+            <a:schemeClr val="lt1"/>
+          </a:fontRef>
+        </p:style>
+        <p:txBody>
+          <a:bodyPr rtlCol="0" anchor="ctr"/>
+          <a:lstStyle/>
+          <a:p>
+            <a:pPr algn="ctr"/>
+            <a:endParaRPr lang="ru-RU"/>
+          </a:p>
+        </p:txBody>
+      </p:sp>
+      <p:sp>
+        <p:nvSpPr>
+          <p:cNvPr id="14" name="TextBox 13">
+            <a:extLst>
+              <a:ext uri="{FF2B5EF4-FFF2-40B4-BE49-F238E27FC236}">
+                <a16:creationId xmlns:a16="http://schemas.microsoft.com/office/drawing/2014/main" id="{0D9E07CF-88D7-A6A7-3B64-E3C77898738E}"/>
+              </a:ext>
+            </a:extLst>
+          </p:cNvPr>
+          <p:cNvSpPr txBox="1"/>
+          <p:nvPr/>
+        </p:nvSpPr>
+        <p:spPr>
+          <a:xfrm>
+            <a:off x="685800" y="1790700"/>
+            <a:ext cx="2159000" cy="369332"/>
+          </a:xfrm>
+          <a:prstGeom prst="rect">
+            <a:avLst/>
+          </a:prstGeom>
+          <a:noFill/>
+        </p:spPr>
+        <p:txBody>
+          <a:bodyPr vert="horz" wrap="square" lIns="0" tIns="0" rIns="0" bIns="0" rtlCol="0">
+            <a:noAutofit/>
+          </a:bodyPr>
+          <a:lstStyle/>
+          <a:p>
+            <a:r>
+              <a:rPr lang="ru-RU" sz="1200" b="1">
+                <a:solidFill>
+                  <a:srgbClr val="262626"/>
+                </a:solidFill>
+                <a:latin typeface="Times New Roman" panose="02020603050405020304" pitchFamily="18" charset="0"/>
+              </a:rPr>
+              <a:t>Администратор</a:t>
+            </a:r>
+          </a:p>
+        </p:txBody>
+      </p:sp>
+      <p:sp>
+        <p:nvSpPr>
+          <p:cNvPr id="15" name="Прямоугольник 14">
+            <a:extLst>
+              <a:ext uri="{FF2B5EF4-FFF2-40B4-BE49-F238E27FC236}">
+                <a16:creationId xmlns:a16="http://schemas.microsoft.com/office/drawing/2014/main" id="{558E217D-651A-A6B4-2BBE-942D8B72E3D4}"/>
+              </a:ext>
+            </a:extLst>
+          </p:cNvPr>
+          <p:cNvSpPr/>
+          <p:nvPr/>
+        </p:nvSpPr>
+        <p:spPr>
+          <a:xfrm>
+            <a:off x="2971800" y="1676400"/>
+            <a:ext cx="5969000" cy="1016000"/>
+          </a:xfrm>
+          <a:prstGeom prst="rect">
+            <a:avLst/>
+          </a:prstGeom>
+          <a:solidFill>
+            <a:srgbClr val="FFFFFF"/>
+          </a:solidFill>
+          <a:ln>
+            <a:solidFill>
+              <a:srgbClr val="BFC7D1"/>
+            </a:solidFill>
+          </a:ln>
+        </p:spPr>
+        <p:style>
+          <a:lnRef idx="2">
+            <a:schemeClr val="accent1">
+              <a:shade val="15000"/>
+            </a:schemeClr>
+          </a:lnRef>
+          <a:fillRef idx="1">
+            <a:schemeClr val="accent1"/>
+          </a:fillRef>
+          <a:effectRef idx="0">
+            <a:schemeClr val="accent1"/>
+          </a:effectRef>
+          <a:fontRef idx="minor">
+            <a:schemeClr val="lt1"/>
+          </a:fontRef>
+        </p:style>
+        <p:txBody>
+          <a:bodyPr rtlCol="0" anchor="ctr"/>
+          <a:lstStyle/>
+          <a:p>
+            <a:pPr algn="ctr"/>
+            <a:endParaRPr lang="ru-RU"/>
+          </a:p>
+        </p:txBody>
+      </p:sp>
+      <p:sp>
+        <p:nvSpPr>
+          <p:cNvPr id="16" name="TextBox 15">
+            <a:extLst>
+              <a:ext uri="{FF2B5EF4-FFF2-40B4-BE49-F238E27FC236}">
+                <a16:creationId xmlns:a16="http://schemas.microsoft.com/office/drawing/2014/main" id="{6701759D-9969-8686-24CF-F2A802338A2B}"/>
+              </a:ext>
+            </a:extLst>
+          </p:cNvPr>
+          <p:cNvSpPr txBox="1"/>
+          <p:nvPr/>
+        </p:nvSpPr>
+        <p:spPr>
+          <a:xfrm>
+            <a:off x="3098800" y="1790700"/>
+            <a:ext cx="5715000" cy="369332"/>
+          </a:xfrm>
+          <a:prstGeom prst="rect">
+            <a:avLst/>
+          </a:prstGeom>
+          <a:noFill/>
+        </p:spPr>
+        <p:txBody>
+          <a:bodyPr vert="horz" wrap="square" lIns="0" tIns="0" rIns="0" bIns="0" rtlCol="0">
+            <a:noAutofit/>
+          </a:bodyPr>
+          <a:lstStyle/>
+          <a:p>
+            <a:r>
+              <a:rPr lang="ru-RU" sz="1200">
+                <a:solidFill>
+                  <a:srgbClr val="262626"/>
+                </a:solidFill>
+                <a:latin typeface="Times New Roman" panose="02020603050405020304" pitchFamily="18" charset="0"/>
+              </a:rPr>
+              <a:t>Ведение справочников: пользователи, группы, дисциплины, преподаватели, курсы. Блокировка и удаление учётных записей. Импорт данных из XML. Загрузка изображений курсов.</a:t>
+            </a:r>
+          </a:p>
+        </p:txBody>
+      </p:sp>
+      <p:sp>
+        <p:nvSpPr>
+          <p:cNvPr id="17" name="Прямоугольник 16">
+            <a:extLst>
+              <a:ext uri="{FF2B5EF4-FFF2-40B4-BE49-F238E27FC236}">
+                <a16:creationId xmlns:a16="http://schemas.microsoft.com/office/drawing/2014/main" id="{EB2ADA65-7704-A496-B26F-CD336CED6F8E}"/>
+              </a:ext>
+            </a:extLst>
+          </p:cNvPr>
+          <p:cNvSpPr/>
+          <p:nvPr/>
+        </p:nvSpPr>
+        <p:spPr>
+          <a:xfrm>
+            <a:off x="8940800" y="1676400"/>
+            <a:ext cx="2692400" cy="1016000"/>
+          </a:xfrm>
+          <a:prstGeom prst="rect">
+            <a:avLst/>
+          </a:prstGeom>
+          <a:solidFill>
+            <a:srgbClr val="FFFFFF"/>
+          </a:solidFill>
+          <a:ln>
+            <a:solidFill>
+              <a:srgbClr val="BFC7D1"/>
+            </a:solidFill>
+          </a:ln>
+        </p:spPr>
+        <p:style>
+          <a:lnRef idx="2">
+            <a:schemeClr val="accent1">
+              <a:shade val="15000"/>
+            </a:schemeClr>
+          </a:lnRef>
+          <a:fillRef idx="1">
+            <a:schemeClr val="accent1"/>
+          </a:fillRef>
+          <a:effectRef idx="0">
+            <a:schemeClr val="accent1"/>
+          </a:effectRef>
+          <a:fontRef idx="minor">
+            <a:schemeClr val="lt1"/>
+          </a:fontRef>
+        </p:style>
+        <p:txBody>
+          <a:bodyPr rtlCol="0" anchor="ctr"/>
+          <a:lstStyle/>
+          <a:p>
+            <a:pPr algn="ctr"/>
+            <a:endParaRPr lang="ru-RU"/>
+          </a:p>
+        </p:txBody>
+      </p:sp>
+      <p:sp>
+        <p:nvSpPr>
+          <p:cNvPr id="18" name="TextBox 17">
+            <a:extLst>
+              <a:ext uri="{FF2B5EF4-FFF2-40B4-BE49-F238E27FC236}">
+                <a16:creationId xmlns:a16="http://schemas.microsoft.com/office/drawing/2014/main" id="{88BCE921-0F0E-D39E-1231-50AB02203508}"/>
+              </a:ext>
+            </a:extLst>
+          </p:cNvPr>
+          <p:cNvSpPr txBox="1"/>
+          <p:nvPr/>
+        </p:nvSpPr>
+        <p:spPr>
+          <a:xfrm>
+            <a:off x="9067800" y="1790700"/>
+            <a:ext cx="2438400" cy="369332"/>
+          </a:xfrm>
+          <a:prstGeom prst="rect">
+            <a:avLst/>
+          </a:prstGeom>
+          <a:noFill/>
+        </p:spPr>
+        <p:txBody>
+          <a:bodyPr vert="horz" wrap="square" lIns="0" tIns="0" rIns="0" bIns="0" rtlCol="0">
+            <a:noAutofit/>
+          </a:bodyPr>
+          <a:lstStyle/>
+          <a:p>
+            <a:r>
+              <a:rPr lang="ru-RU" sz="1200">
+                <a:solidFill>
+                  <a:srgbClr val="262626"/>
+                </a:solidFill>
+                <a:latin typeface="Times New Roman" panose="02020603050405020304" pitchFamily="18" charset="0"/>
+              </a:rPr>
+              <a:t>Полный доступ ко всем функциям системы</a:t>
+            </a:r>
+          </a:p>
+        </p:txBody>
+      </p:sp>
+      <p:sp>
+        <p:nvSpPr>
+          <p:cNvPr id="19" name="Прямоугольник 18">
+            <a:extLst>
+              <a:ext uri="{FF2B5EF4-FFF2-40B4-BE49-F238E27FC236}">
+                <a16:creationId xmlns:a16="http://schemas.microsoft.com/office/drawing/2014/main" id="{CD2ED0D3-888E-4D41-81FB-933BCB616964}"/>
+              </a:ext>
+            </a:extLst>
+          </p:cNvPr>
+          <p:cNvSpPr/>
+          <p:nvPr/>
+        </p:nvSpPr>
+        <p:spPr>
+          <a:xfrm>
+            <a:off x="558800" y="2692400"/>
+            <a:ext cx="2413000" cy="1016000"/>
+          </a:xfrm>
+          <a:prstGeom prst="rect">
+            <a:avLst/>
+          </a:prstGeom>
+          <a:solidFill>
+            <a:srgbClr val="FFFFFF"/>
+          </a:solidFill>
+          <a:ln>
+            <a:solidFill>
+              <a:srgbClr val="BFC7D1"/>
+            </a:solidFill>
+          </a:ln>
+        </p:spPr>
+        <p:style>
+          <a:lnRef idx="2">
+            <a:schemeClr val="accent1">
+              <a:shade val="15000"/>
+            </a:schemeClr>
+          </a:lnRef>
+          <a:fillRef idx="1">
+            <a:schemeClr val="accent1"/>
+          </a:fillRef>
+          <a:effectRef idx="0">
+            <a:schemeClr val="accent1"/>
+          </a:effectRef>
+          <a:fontRef idx="minor">
+            <a:schemeClr val="lt1"/>
+          </a:fontRef>
+        </p:style>
+        <p:txBody>
+          <a:bodyPr rtlCol="0" anchor="ctr"/>
+          <a:lstStyle/>
+          <a:p>
+            <a:pPr algn="ctr"/>
+            <a:endParaRPr lang="ru-RU"/>
+          </a:p>
+        </p:txBody>
+      </p:sp>
+      <p:sp>
+        <p:nvSpPr>
+          <p:cNvPr id="20" name="TextBox 19">
+            <a:extLst>
+              <a:ext uri="{FF2B5EF4-FFF2-40B4-BE49-F238E27FC236}">
+                <a16:creationId xmlns:a16="http://schemas.microsoft.com/office/drawing/2014/main" id="{FCE763D6-D775-C592-C635-16EC0BEA283B}"/>
+              </a:ext>
+            </a:extLst>
+          </p:cNvPr>
+          <p:cNvSpPr txBox="1"/>
+          <p:nvPr/>
+        </p:nvSpPr>
+        <p:spPr>
+          <a:xfrm>
+            <a:off x="685800" y="2806700"/>
+            <a:ext cx="2159000" cy="369332"/>
+          </a:xfrm>
+          <a:prstGeom prst="rect">
+            <a:avLst/>
+          </a:prstGeom>
+          <a:noFill/>
+        </p:spPr>
+        <p:txBody>
+          <a:bodyPr vert="horz" wrap="square" lIns="0" tIns="0" rIns="0" bIns="0" rtlCol="0">
+            <a:noAutofit/>
+          </a:bodyPr>
+          <a:lstStyle/>
+          <a:p>
+            <a:r>
+              <a:rPr lang="ru-RU" sz="1200" b="1">
+                <a:solidFill>
+                  <a:srgbClr val="262626"/>
+                </a:solidFill>
+                <a:latin typeface="Times New Roman" panose="02020603050405020304" pitchFamily="18" charset="0"/>
+              </a:rPr>
+              <a:t>Учитель</a:t>
+            </a:r>
+          </a:p>
+        </p:txBody>
+      </p:sp>
+      <p:sp>
+        <p:nvSpPr>
+          <p:cNvPr id="21" name="Прямоугольник 20">
+            <a:extLst>
+              <a:ext uri="{FF2B5EF4-FFF2-40B4-BE49-F238E27FC236}">
+                <a16:creationId xmlns:a16="http://schemas.microsoft.com/office/drawing/2014/main" id="{696B0D35-7550-3950-4F14-88431AB984A1}"/>
+              </a:ext>
+            </a:extLst>
+          </p:cNvPr>
+          <p:cNvSpPr/>
+          <p:nvPr/>
+        </p:nvSpPr>
+        <p:spPr>
+          <a:xfrm>
+            <a:off x="2971800" y="2692400"/>
+            <a:ext cx="5969000" cy="1016000"/>
+          </a:xfrm>
+          <a:prstGeom prst="rect">
+            <a:avLst/>
+          </a:prstGeom>
+          <a:solidFill>
+            <a:srgbClr val="FFFFFF"/>
+          </a:solidFill>
+          <a:ln>
+            <a:solidFill>
+              <a:srgbClr val="BFC7D1"/>
+            </a:solidFill>
+          </a:ln>
+        </p:spPr>
+        <p:style>
+          <a:lnRef idx="2">
+            <a:schemeClr val="accent1">
+              <a:shade val="15000"/>
+            </a:schemeClr>
+          </a:lnRef>
+          <a:fillRef idx="1">
+            <a:schemeClr val="accent1"/>
+          </a:fillRef>
+          <a:effectRef idx="0">
+            <a:schemeClr val="accent1"/>
+          </a:effectRef>
+          <a:fontRef idx="minor">
+            <a:schemeClr val="lt1"/>
+          </a:fontRef>
+        </p:style>
+        <p:txBody>
+          <a:bodyPr rtlCol="0" anchor="ctr"/>
+          <a:lstStyle/>
+          <a:p>
+            <a:pPr algn="ctr"/>
+            <a:endParaRPr lang="ru-RU"/>
+          </a:p>
+        </p:txBody>
+      </p:sp>
+      <p:sp>
+        <p:nvSpPr>
+          <p:cNvPr id="22" name="TextBox 21">
+            <a:extLst>
+              <a:ext uri="{FF2B5EF4-FFF2-40B4-BE49-F238E27FC236}">
+                <a16:creationId xmlns:a16="http://schemas.microsoft.com/office/drawing/2014/main" id="{38751587-6B2D-63B1-2B0B-8E242020D693}"/>
+              </a:ext>
+            </a:extLst>
+          </p:cNvPr>
+          <p:cNvSpPr txBox="1"/>
+          <p:nvPr/>
+        </p:nvSpPr>
+        <p:spPr>
+          <a:xfrm>
+            <a:off x="3098800" y="2806700"/>
+            <a:ext cx="5715000" cy="369332"/>
+          </a:xfrm>
+          <a:prstGeom prst="rect">
+            <a:avLst/>
+          </a:prstGeom>
+          <a:noFill/>
+        </p:spPr>
+        <p:txBody>
+          <a:bodyPr vert="horz" wrap="square" lIns="0" tIns="0" rIns="0" bIns="0" rtlCol="0">
+            <a:noAutofit/>
+          </a:bodyPr>
+          <a:lstStyle/>
+          <a:p>
+            <a:r>
+              <a:rPr lang="ru-RU" sz="1200">
+                <a:solidFill>
+                  <a:srgbClr val="262626"/>
+                </a:solidFill>
+                <a:latin typeface="Times New Roman" panose="02020603050405020304" pitchFamily="18" charset="0"/>
+              </a:rPr>
+              <a:t>Создание курсов и заданий, назначение сроков сдачи и максимального балла, проверка работ, выставление оценок с комментарием, формирование ведомости успеваемости.</a:t>
+            </a:r>
+          </a:p>
+        </p:txBody>
+      </p:sp>
+      <p:sp>
+        <p:nvSpPr>
+          <p:cNvPr id="23" name="Прямоугольник 22">
+            <a:extLst>
+              <a:ext uri="{FF2B5EF4-FFF2-40B4-BE49-F238E27FC236}">
+                <a16:creationId xmlns:a16="http://schemas.microsoft.com/office/drawing/2014/main" id="{F43DF1BE-41DE-C3E3-92AE-11F7785EBC34}"/>
+              </a:ext>
+            </a:extLst>
+          </p:cNvPr>
+          <p:cNvSpPr/>
+          <p:nvPr/>
+        </p:nvSpPr>
+        <p:spPr>
+          <a:xfrm>
+            <a:off x="8940800" y="2692400"/>
+            <a:ext cx="2692400" cy="1016000"/>
+          </a:xfrm>
+          <a:prstGeom prst="rect">
+            <a:avLst/>
+          </a:prstGeom>
+          <a:solidFill>
+            <a:srgbClr val="FFFFFF"/>
+          </a:solidFill>
+          <a:ln>
+            <a:solidFill>
+              <a:srgbClr val="BFC7D1"/>
+            </a:solidFill>
+          </a:ln>
+        </p:spPr>
+        <p:style>
+          <a:lnRef idx="2">
+            <a:schemeClr val="accent1">
+              <a:shade val="15000"/>
+            </a:schemeClr>
+          </a:lnRef>
+          <a:fillRef idx="1">
+            <a:schemeClr val="accent1"/>
+          </a:fillRef>
+          <a:effectRef idx="0">
+            <a:schemeClr val="accent1"/>
+          </a:effectRef>
+          <a:fontRef idx="minor">
+            <a:schemeClr val="lt1"/>
+          </a:fontRef>
+        </p:style>
+        <p:txBody>
+          <a:bodyPr rtlCol="0" anchor="ctr"/>
+          <a:lstStyle/>
+          <a:p>
+            <a:pPr algn="ctr"/>
+            <a:endParaRPr lang="ru-RU"/>
+          </a:p>
+        </p:txBody>
+      </p:sp>
+      <p:sp>
+        <p:nvSpPr>
+          <p:cNvPr id="24" name="TextBox 23">
+            <a:extLst>
+              <a:ext uri="{FF2B5EF4-FFF2-40B4-BE49-F238E27FC236}">
+                <a16:creationId xmlns:a16="http://schemas.microsoft.com/office/drawing/2014/main" id="{9D586AA7-1581-5757-F247-1789766D9B3F}"/>
+              </a:ext>
+            </a:extLst>
+          </p:cNvPr>
+          <p:cNvSpPr txBox="1"/>
+          <p:nvPr/>
+        </p:nvSpPr>
+        <p:spPr>
+          <a:xfrm>
+            <a:off x="9067800" y="2806700"/>
+            <a:ext cx="2438400" cy="369332"/>
+          </a:xfrm>
+          <a:prstGeom prst="rect">
+            <a:avLst/>
+          </a:prstGeom>
+          <a:noFill/>
+        </p:spPr>
+        <p:txBody>
+          <a:bodyPr vert="horz" wrap="square" lIns="0" tIns="0" rIns="0" bIns="0" rtlCol="0">
+            <a:noAutofit/>
+          </a:bodyPr>
+          <a:lstStyle/>
+          <a:p>
+            <a:r>
+              <a:rPr lang="ru-RU" sz="1200">
+                <a:solidFill>
+                  <a:srgbClr val="262626"/>
+                </a:solidFill>
+                <a:latin typeface="Times New Roman" panose="02020603050405020304" pitchFamily="18" charset="0"/>
+              </a:rPr>
+              <a:t>Работа только со своими курсами и работами учеников</a:t>
+            </a:r>
+          </a:p>
+        </p:txBody>
+      </p:sp>
+      <p:sp>
+        <p:nvSpPr>
+          <p:cNvPr id="25" name="Прямоугольник 24">
+            <a:extLst>
+              <a:ext uri="{FF2B5EF4-FFF2-40B4-BE49-F238E27FC236}">
+                <a16:creationId xmlns:a16="http://schemas.microsoft.com/office/drawing/2014/main" id="{441A33D3-C2CB-E5C1-344D-4E149DF6DE60}"/>
+              </a:ext>
+            </a:extLst>
+          </p:cNvPr>
+          <p:cNvSpPr/>
+          <p:nvPr/>
+        </p:nvSpPr>
+        <p:spPr>
+          <a:xfrm>
+            <a:off x="558800" y="3708400"/>
+            <a:ext cx="2413000" cy="1016000"/>
+          </a:xfrm>
+          <a:prstGeom prst="rect">
+            <a:avLst/>
+          </a:prstGeom>
+          <a:solidFill>
+            <a:srgbClr val="FFFFFF"/>
+          </a:solidFill>
+          <a:ln>
+            <a:solidFill>
+              <a:srgbClr val="BFC7D1"/>
+            </a:solidFill>
+          </a:ln>
+        </p:spPr>
+        <p:style>
+          <a:lnRef idx="2">
+            <a:schemeClr val="accent1">
+              <a:shade val="15000"/>
+            </a:schemeClr>
+          </a:lnRef>
+          <a:fillRef idx="1">
+            <a:schemeClr val="accent1"/>
+          </a:fillRef>
+          <a:effectRef idx="0">
+            <a:schemeClr val="accent1"/>
+          </a:effectRef>
+          <a:fontRef idx="minor">
+            <a:schemeClr val="lt1"/>
+          </a:fontRef>
+        </p:style>
+        <p:txBody>
+          <a:bodyPr rtlCol="0" anchor="ctr"/>
+          <a:lstStyle/>
+          <a:p>
+            <a:pPr algn="ctr"/>
+            <a:endParaRPr lang="ru-RU"/>
+          </a:p>
+        </p:txBody>
+      </p:sp>
+      <p:sp>
+        <p:nvSpPr>
+          <p:cNvPr id="26" name="TextBox 25">
+            <a:extLst>
+              <a:ext uri="{FF2B5EF4-FFF2-40B4-BE49-F238E27FC236}">
+                <a16:creationId xmlns:a16="http://schemas.microsoft.com/office/drawing/2014/main" id="{5DB764E3-1216-1863-60C3-FE77DDAFF18C}"/>
+              </a:ext>
+            </a:extLst>
+          </p:cNvPr>
+          <p:cNvSpPr txBox="1"/>
+          <p:nvPr/>
+        </p:nvSpPr>
+        <p:spPr>
+          <a:xfrm>
+            <a:off x="685800" y="3822700"/>
+            <a:ext cx="2159000" cy="369332"/>
+          </a:xfrm>
+          <a:prstGeom prst="rect">
+            <a:avLst/>
+          </a:prstGeom>
+          <a:noFill/>
+        </p:spPr>
+        <p:txBody>
+          <a:bodyPr vert="horz" wrap="square" lIns="0" tIns="0" rIns="0" bIns="0" rtlCol="0">
+            <a:noAutofit/>
+          </a:bodyPr>
+          <a:lstStyle/>
+          <a:p>
+            <a:r>
+              <a:rPr lang="ru-RU" sz="1200" b="1">
+                <a:solidFill>
+                  <a:srgbClr val="262626"/>
+                </a:solidFill>
+                <a:latin typeface="Times New Roman" panose="02020603050405020304" pitchFamily="18" charset="0"/>
+              </a:rPr>
+              <a:t>Ученик</a:t>
+            </a:r>
+          </a:p>
+        </p:txBody>
+      </p:sp>
+      <p:sp>
+        <p:nvSpPr>
+          <p:cNvPr id="27" name="Прямоугольник 26">
+            <a:extLst>
+              <a:ext uri="{FF2B5EF4-FFF2-40B4-BE49-F238E27FC236}">
+                <a16:creationId xmlns:a16="http://schemas.microsoft.com/office/drawing/2014/main" id="{CE8DF351-5829-9952-A2C1-A3D8F83F7953}"/>
+              </a:ext>
+            </a:extLst>
+          </p:cNvPr>
+          <p:cNvSpPr/>
+          <p:nvPr/>
+        </p:nvSpPr>
+        <p:spPr>
+          <a:xfrm>
+            <a:off x="2971800" y="3708400"/>
+            <a:ext cx="5969000" cy="1016000"/>
+          </a:xfrm>
+          <a:prstGeom prst="rect">
+            <a:avLst/>
+          </a:prstGeom>
+          <a:solidFill>
+            <a:srgbClr val="FFFFFF"/>
+          </a:solidFill>
+          <a:ln>
+            <a:solidFill>
+              <a:srgbClr val="BFC7D1"/>
+            </a:solidFill>
+          </a:ln>
+        </p:spPr>
+        <p:style>
+          <a:lnRef idx="2">
+            <a:schemeClr val="accent1">
+              <a:shade val="15000"/>
+            </a:schemeClr>
+          </a:lnRef>
+          <a:fillRef idx="1">
+            <a:schemeClr val="accent1"/>
+          </a:fillRef>
+          <a:effectRef idx="0">
+            <a:schemeClr val="accent1"/>
+          </a:effectRef>
+          <a:fontRef idx="minor">
+            <a:schemeClr val="lt1"/>
+          </a:fontRef>
+        </p:style>
+        <p:txBody>
+          <a:bodyPr rtlCol="0" anchor="ctr"/>
+          <a:lstStyle/>
+          <a:p>
+            <a:pPr algn="ctr"/>
+            <a:endParaRPr lang="ru-RU"/>
+          </a:p>
+        </p:txBody>
+      </p:sp>
+      <p:sp>
+        <p:nvSpPr>
+          <p:cNvPr id="28" name="TextBox 27">
+            <a:extLst>
+              <a:ext uri="{FF2B5EF4-FFF2-40B4-BE49-F238E27FC236}">
+                <a16:creationId xmlns:a16="http://schemas.microsoft.com/office/drawing/2014/main" id="{44DD06F6-8751-A9DD-9514-C8D1B4679442}"/>
+              </a:ext>
+            </a:extLst>
+          </p:cNvPr>
+          <p:cNvSpPr txBox="1"/>
+          <p:nvPr/>
+        </p:nvSpPr>
+        <p:spPr>
+          <a:xfrm>
+            <a:off x="3098800" y="3822700"/>
+            <a:ext cx="5715000" cy="369332"/>
+          </a:xfrm>
+          <a:prstGeom prst="rect">
+            <a:avLst/>
+          </a:prstGeom>
+          <a:noFill/>
+        </p:spPr>
+        <p:txBody>
+          <a:bodyPr vert="horz" wrap="square" lIns="0" tIns="0" rIns="0" bIns="0" rtlCol="0">
+            <a:noAutofit/>
+          </a:bodyPr>
+          <a:lstStyle/>
+          <a:p>
+            <a:r>
+              <a:rPr lang="ru-RU" sz="1200">
+                <a:solidFill>
+                  <a:srgbClr val="262626"/>
+                </a:solidFill>
+                <a:latin typeface="Times New Roman" panose="02020603050405020304" pitchFamily="18" charset="0"/>
+              </a:rPr>
+              <a:t>Просмотр доступных курсов, запись на курсы, выполнение заданий и отправка работ, просмотр собственных оценок и статуса проверки.</a:t>
+            </a:r>
+          </a:p>
+        </p:txBody>
+      </p:sp>
+      <p:sp>
+        <p:nvSpPr>
+          <p:cNvPr id="29" name="Прямоугольник 28">
+            <a:extLst>
+              <a:ext uri="{FF2B5EF4-FFF2-40B4-BE49-F238E27FC236}">
+                <a16:creationId xmlns:a16="http://schemas.microsoft.com/office/drawing/2014/main" id="{3CC4246A-3072-A156-D454-98B4D3E7798D}"/>
+              </a:ext>
+            </a:extLst>
+          </p:cNvPr>
+          <p:cNvSpPr/>
+          <p:nvPr/>
+        </p:nvSpPr>
+        <p:spPr>
+          <a:xfrm>
+            <a:off x="8940800" y="3708400"/>
+            <a:ext cx="2692400" cy="1016000"/>
+          </a:xfrm>
+          <a:prstGeom prst="rect">
+            <a:avLst/>
+          </a:prstGeom>
+          <a:solidFill>
+            <a:srgbClr val="FFFFFF"/>
+          </a:solidFill>
+          <a:ln>
+            <a:solidFill>
+              <a:srgbClr val="BFC7D1"/>
+            </a:solidFill>
+          </a:ln>
+        </p:spPr>
+        <p:style>
+          <a:lnRef idx="2">
+            <a:schemeClr val="accent1">
+              <a:shade val="15000"/>
+            </a:schemeClr>
+          </a:lnRef>
+          <a:fillRef idx="1">
+            <a:schemeClr val="accent1"/>
+          </a:fillRef>
+          <a:effectRef idx="0">
+            <a:schemeClr val="accent1"/>
+          </a:effectRef>
+          <a:fontRef idx="minor">
+            <a:schemeClr val="lt1"/>
+          </a:fontRef>
+        </p:style>
+        <p:txBody>
+          <a:bodyPr rtlCol="0" anchor="ctr"/>
+          <a:lstStyle/>
+          <a:p>
+            <a:pPr algn="ctr"/>
+            <a:endParaRPr lang="ru-RU"/>
+          </a:p>
+        </p:txBody>
+      </p:sp>
+      <p:sp>
+        <p:nvSpPr>
+          <p:cNvPr id="30" name="TextBox 29">
+            <a:extLst>
+              <a:ext uri="{FF2B5EF4-FFF2-40B4-BE49-F238E27FC236}">
+                <a16:creationId xmlns:a16="http://schemas.microsoft.com/office/drawing/2014/main" id="{52671F16-5537-9F93-B64D-98D5E8480A78}"/>
+              </a:ext>
+            </a:extLst>
+          </p:cNvPr>
+          <p:cNvSpPr txBox="1"/>
+          <p:nvPr/>
+        </p:nvSpPr>
+        <p:spPr>
+          <a:xfrm>
+            <a:off x="9067800" y="3822700"/>
+            <a:ext cx="2438400" cy="369332"/>
+          </a:xfrm>
+          <a:prstGeom prst="rect">
+            <a:avLst/>
+          </a:prstGeom>
+          <a:noFill/>
+        </p:spPr>
+        <p:txBody>
+          <a:bodyPr vert="horz" wrap="square" lIns="0" tIns="0" rIns="0" bIns="0" rtlCol="0">
+            <a:noAutofit/>
+          </a:bodyPr>
+          <a:lstStyle/>
+          <a:p>
+            <a:r>
+              <a:rPr lang="ru-RU" sz="1200">
+                <a:solidFill>
+                  <a:srgbClr val="262626"/>
+                </a:solidFill>
+                <a:latin typeface="Times New Roman" panose="02020603050405020304" pitchFamily="18" charset="0"/>
+              </a:rPr>
+              <a:t>Доступ только к своим данным</a:t>
+            </a:r>
+          </a:p>
+        </p:txBody>
+      </p:sp>
+      <p:sp>
+        <p:nvSpPr>
+          <p:cNvPr id="31" name="TextBox 30">
+            <a:extLst>
+              <a:ext uri="{FF2B5EF4-FFF2-40B4-BE49-F238E27FC236}">
+                <a16:creationId xmlns:a16="http://schemas.microsoft.com/office/drawing/2014/main" id="{34952C87-8781-D604-39F9-DBFA0230BE0F}"/>
+              </a:ext>
+            </a:extLst>
+          </p:cNvPr>
+          <p:cNvSpPr txBox="1"/>
+          <p:nvPr/>
+        </p:nvSpPr>
+        <p:spPr>
+          <a:xfrm>
+            <a:off x="558800" y="5080000"/>
+            <a:ext cx="11074400" cy="369332"/>
+          </a:xfrm>
+          <a:prstGeom prst="rect">
+            <a:avLst/>
+          </a:prstGeom>
+          <a:noFill/>
+        </p:spPr>
+        <p:txBody>
+          <a:bodyPr vert="horz" wrap="square" lIns="0" tIns="0" rIns="0" bIns="0" rtlCol="0">
+            <a:noAutofit/>
+          </a:bodyPr>
+          <a:lstStyle/>
+          <a:p>
+            <a:r>
               <a:rPr lang="ru-RU" sz="1400">
                 <a:solidFill>
-                  <a:srgbClr val="6B6472"/>
+                  <a:srgbClr val="595959"/>
                 </a:solidFill>
                 <a:latin typeface="Times New Roman" panose="02020603050405020304" pitchFamily="18" charset="0"/>
               </a:rPr>
@@ -7343,7 +8318,7 @@
     </p:spTree>
     <p:extLst>
       <p:ext uri="{BB962C8B-B14F-4D97-AF65-F5344CB8AC3E}">
-        <p14:creationId xmlns:p14="http://schemas.microsoft.com/office/powerpoint/2010/main" val="2689891139"/>
+        <p14:creationId xmlns:p14="http://schemas.microsoft.com/office/powerpoint/2010/main" val="4018327246"/>
       </p:ext>
     </p:extLst>
   </p:cSld>
@@ -7375,7 +8350,7 @@
           <p:cNvPr id="2" name="Прямоугольник 1">
             <a:extLst>
               <a:ext uri="{FF2B5EF4-FFF2-40B4-BE49-F238E27FC236}">
-                <a16:creationId xmlns:a16="http://schemas.microsoft.com/office/drawing/2014/main" id="{691B97DE-EF10-6B0B-1CF7-B054333A07A6}"/>
+                <a16:creationId xmlns:a16="http://schemas.microsoft.com/office/drawing/2014/main" id="{B19CFA9C-1410-3348-4F79-4F784406DEF9}"/>
               </a:ext>
             </a:extLst>
           </p:cNvPr>
@@ -7443,7 +8418,7 @@
           <p:cNvPr id="3" name="Прямоугольник 2">
             <a:extLst>
               <a:ext uri="{FF2B5EF4-FFF2-40B4-BE49-F238E27FC236}">
-                <a16:creationId xmlns:a16="http://schemas.microsoft.com/office/drawing/2014/main" id="{CCBDBD58-6299-FA3A-2940-CCA9D8BBA4D4}"/>
+                <a16:creationId xmlns:a16="http://schemas.microsoft.com/office/drawing/2014/main" id="{67EA45EF-836C-DC96-14ED-FD38DA4076BE}"/>
               </a:ext>
             </a:extLst>
           </p:cNvPr>
@@ -7453,13 +8428,13 @@
         <p:spPr>
           <a:xfrm>
             <a:off x="0" y="0"/>
-            <a:ext cx="12192000" cy="965200"/>
+            <a:ext cx="12192000" cy="76200"/>
           </a:xfrm>
           <a:prstGeom prst="rect">
             <a:avLst/>
           </a:prstGeom>
           <a:solidFill>
-            <a:srgbClr val="5B4B6E"/>
+            <a:srgbClr val="1F3864"/>
           </a:solidFill>
           <a:ln w="19050" cap="flat" cmpd="sng" algn="ctr">
             <a:noFill/>
@@ -7511,7 +8486,7 @@
           <p:cNvPr id="4" name="TextBox 3">
             <a:extLst>
               <a:ext uri="{FF2B5EF4-FFF2-40B4-BE49-F238E27FC236}">
-                <a16:creationId xmlns:a16="http://schemas.microsoft.com/office/drawing/2014/main" id="{FF9ED6CF-1AE0-885E-B933-EA2BF46C46A7}"/>
+                <a16:creationId xmlns:a16="http://schemas.microsoft.com/office/drawing/2014/main" id="{C0DB6B29-8211-13A9-6001-7E7AE2597656}"/>
               </a:ext>
             </a:extLst>
           </p:cNvPr>
@@ -7520,7 +8495,7 @@
         </p:nvSpPr>
         <p:spPr>
           <a:xfrm>
-            <a:off x="558800" y="228600"/>
+            <a:off x="558800" y="330200"/>
             <a:ext cx="9906000" cy="369332"/>
           </a:xfrm>
           <a:prstGeom prst="rect">
@@ -7535,9 +8510,9 @@
           <a:lstStyle/>
           <a:p>
             <a:r>
-              <a:rPr lang="ru-RU" sz="2800" b="1">
-                <a:solidFill>
-                  <a:srgbClr val="FFFFFF"/>
+              <a:rPr lang="ru-RU" sz="2500" b="1">
+                <a:solidFill>
+                  <a:srgbClr val="1F3864"/>
                 </a:solidFill>
                 <a:latin typeface="Times New Roman" panose="02020603050405020304" pitchFamily="18" charset="0"/>
               </a:rPr>
@@ -7551,7 +8526,7 @@
           <p:cNvPr id="5" name="TextBox 4">
             <a:extLst>
               <a:ext uri="{FF2B5EF4-FFF2-40B4-BE49-F238E27FC236}">
-                <a16:creationId xmlns:a16="http://schemas.microsoft.com/office/drawing/2014/main" id="{C33FCDC6-C946-710D-F875-55ADB5D142FD}"/>
+                <a16:creationId xmlns:a16="http://schemas.microsoft.com/office/drawing/2014/main" id="{A7DA24BF-1E6F-D60E-A621-1912C57B862B}"/>
               </a:ext>
             </a:extLst>
           </p:cNvPr>
@@ -7560,7 +8535,7 @@
         </p:nvSpPr>
         <p:spPr>
           <a:xfrm>
-            <a:off x="10617200" y="304800"/>
+            <a:off x="10617200" y="419100"/>
             <a:ext cx="1041400" cy="369332"/>
           </a:xfrm>
           <a:prstGeom prst="rect">
@@ -7576,9 +8551,9 @@
           <a:p>
             <a:pPr algn="r"/>
             <a:r>
-              <a:rPr lang="ru-RU" sz="1500">
-                <a:solidFill>
-                  <a:srgbClr val="C9BBDA"/>
+              <a:rPr lang="ru-RU" sz="1200">
+                <a:solidFill>
+                  <a:srgbClr val="595959"/>
                 </a:solidFill>
                 <a:latin typeface="Times New Roman" panose="02020603050405020304" pitchFamily="18" charset="0"/>
               </a:rPr>
@@ -7592,7 +8567,7 @@
           <p:cNvPr id="6" name="Прямоугольник 5">
             <a:extLst>
               <a:ext uri="{FF2B5EF4-FFF2-40B4-BE49-F238E27FC236}">
-                <a16:creationId xmlns:a16="http://schemas.microsoft.com/office/drawing/2014/main" id="{8E334093-1FF3-12EB-59D5-47768FA09CDB}"/>
+                <a16:creationId xmlns:a16="http://schemas.microsoft.com/office/drawing/2014/main" id="{4602A781-94F7-AEEF-FAB1-254B000C4D09}"/>
               </a:ext>
             </a:extLst>
           </p:cNvPr>
@@ -7601,14 +8576,14 @@
         </p:nvSpPr>
         <p:spPr>
           <a:xfrm>
-            <a:off x="0" y="965200"/>
-            <a:ext cx="12192000" cy="76200"/>
+            <a:off x="558800" y="939800"/>
+            <a:ext cx="11074400" cy="12700"/>
           </a:xfrm>
           <a:prstGeom prst="rect">
             <a:avLst/>
           </a:prstGeom>
           <a:solidFill>
-            <a:srgbClr val="7C9070"/>
+            <a:srgbClr val="BFC7D1"/>
           </a:solidFill>
           <a:ln w="19050" cap="flat" cmpd="sng" algn="ctr">
             <a:noFill/>
@@ -7660,7 +8635,7 @@
           <p:cNvPr id="7" name="Прямоугольник 6">
             <a:extLst>
               <a:ext uri="{FF2B5EF4-FFF2-40B4-BE49-F238E27FC236}">
-                <a16:creationId xmlns:a16="http://schemas.microsoft.com/office/drawing/2014/main" id="{596DCB64-F462-F8BA-D334-15380C894F7B}"/>
+                <a16:creationId xmlns:a16="http://schemas.microsoft.com/office/drawing/2014/main" id="{FA51CF48-1F5B-99DE-E5D7-3AEEE91FDEB0}"/>
               </a:ext>
             </a:extLst>
           </p:cNvPr>
@@ -7670,13 +8645,13 @@
         <p:spPr>
           <a:xfrm>
             <a:off x="558800" y="1346200"/>
-            <a:ext cx="3492500" cy="1803400"/>
+            <a:ext cx="3492500" cy="25400"/>
           </a:xfrm>
           <a:prstGeom prst="rect">
             <a:avLst/>
           </a:prstGeom>
           <a:solidFill>
-            <a:srgbClr val="EDE8F2"/>
+            <a:srgbClr val="1F3864"/>
           </a:solidFill>
           <a:ln w="19050" cap="flat" cmpd="sng" algn="ctr">
             <a:noFill/>
@@ -7725,10 +8700,96 @@
       </p:sp>
       <p:sp>
         <p:nvSpPr>
-          <p:cNvPr id="8" name="Прямоугольник 7">
-            <a:extLst>
-              <a:ext uri="{FF2B5EF4-FFF2-40B4-BE49-F238E27FC236}">
-                <a16:creationId xmlns:a16="http://schemas.microsoft.com/office/drawing/2014/main" id="{A2933615-0709-9455-0F42-2317BA932F85}"/>
+          <p:cNvPr id="8" name="TextBox 7">
+            <a:extLst>
+              <a:ext uri="{FF2B5EF4-FFF2-40B4-BE49-F238E27FC236}">
+                <a16:creationId xmlns:a16="http://schemas.microsoft.com/office/drawing/2014/main" id="{786AD61D-B216-DFAD-ABBD-B31FEA07B754}"/>
+              </a:ext>
+            </a:extLst>
+          </p:cNvPr>
+          <p:cNvSpPr txBox="1"/>
+          <p:nvPr/>
+        </p:nvSpPr>
+        <p:spPr>
+          <a:xfrm>
+            <a:off x="584200" y="1549400"/>
+            <a:ext cx="3327400" cy="369332"/>
+          </a:xfrm>
+          <a:prstGeom prst="rect">
+            <a:avLst/>
+          </a:prstGeom>
+          <a:noFill/>
+        </p:spPr>
+        <p:txBody>
+          <a:bodyPr vert="horz" wrap="square" lIns="0" tIns="0" rIns="0" bIns="0" rtlCol="0">
+            <a:noAutofit/>
+          </a:bodyPr>
+          <a:lstStyle/>
+          <a:p>
+            <a:r>
+              <a:rPr lang="en-US" sz="1900" b="1">
+                <a:solidFill>
+                  <a:srgbClr val="1F3864"/>
+                </a:solidFill>
+                <a:latin typeface="Times New Roman" panose="02020603050405020304" pitchFamily="18" charset="0"/>
+              </a:rPr>
+              <a:t>C#</a:t>
+            </a:r>
+            <a:endParaRPr lang="ru-RU" sz="1900" b="1">
+              <a:solidFill>
+                <a:srgbClr val="1F3864"/>
+              </a:solidFill>
+              <a:latin typeface="Times New Roman" panose="02020603050405020304" pitchFamily="18" charset="0"/>
+            </a:endParaRPr>
+          </a:p>
+        </p:txBody>
+      </p:sp>
+      <p:sp>
+        <p:nvSpPr>
+          <p:cNvPr id="9" name="TextBox 8">
+            <a:extLst>
+              <a:ext uri="{FF2B5EF4-FFF2-40B4-BE49-F238E27FC236}">
+                <a16:creationId xmlns:a16="http://schemas.microsoft.com/office/drawing/2014/main" id="{968550EB-4D6F-D286-37A9-94251BC4CC68}"/>
+              </a:ext>
+            </a:extLst>
+          </p:cNvPr>
+          <p:cNvSpPr txBox="1"/>
+          <p:nvPr/>
+        </p:nvSpPr>
+        <p:spPr>
+          <a:xfrm>
+            <a:off x="584200" y="2159000"/>
+            <a:ext cx="3327400" cy="369332"/>
+          </a:xfrm>
+          <a:prstGeom prst="rect">
+            <a:avLst/>
+          </a:prstGeom>
+          <a:noFill/>
+        </p:spPr>
+        <p:txBody>
+          <a:bodyPr vert="horz" wrap="square" lIns="0" tIns="0" rIns="0" bIns="0" rtlCol="0">
+            <a:noAutofit/>
+          </a:bodyPr>
+          <a:lstStyle/>
+          <a:p>
+            <a:r>
+              <a:rPr lang="ru-RU" sz="1300">
+                <a:solidFill>
+                  <a:srgbClr val="595959"/>
+                </a:solidFill>
+                <a:latin typeface="Times New Roman" panose="02020603050405020304" pitchFamily="18" charset="0"/>
+              </a:rPr>
+              <a:t>Объектно-ориентированный язык, платформа .NET Framework 4.7.2</a:t>
+            </a:r>
+          </a:p>
+        </p:txBody>
+      </p:sp>
+      <p:sp>
+        <p:nvSpPr>
+          <p:cNvPr id="10" name="Прямоугольник 9">
+            <a:extLst>
+              <a:ext uri="{FF2B5EF4-FFF2-40B4-BE49-F238E27FC236}">
+                <a16:creationId xmlns:a16="http://schemas.microsoft.com/office/drawing/2014/main" id="{8943FAA0-465C-F4A6-1648-1B457D210180}"/>
               </a:ext>
             </a:extLst>
           </p:cNvPr>
@@ -7737,14 +8798,14 @@
         </p:nvSpPr>
         <p:spPr>
           <a:xfrm>
-            <a:off x="558800" y="1346200"/>
-            <a:ext cx="3492500" cy="76200"/>
+            <a:off x="4305300" y="1346200"/>
+            <a:ext cx="3492500" cy="25400"/>
           </a:xfrm>
           <a:prstGeom prst="rect">
             <a:avLst/>
           </a:prstGeom>
           <a:solidFill>
-            <a:srgbClr val="7C9070"/>
+            <a:srgbClr val="1F3864"/>
           </a:solidFill>
           <a:ln w="19050" cap="flat" cmpd="sng" algn="ctr">
             <a:noFill/>
@@ -7793,10 +8854,10 @@
       </p:sp>
       <p:sp>
         <p:nvSpPr>
-          <p:cNvPr id="9" name="TextBox 8">
-            <a:extLst>
-              <a:ext uri="{FF2B5EF4-FFF2-40B4-BE49-F238E27FC236}">
-                <a16:creationId xmlns:a16="http://schemas.microsoft.com/office/drawing/2014/main" id="{7426BB4C-D38B-42DA-B9BC-0F30E2679F3B}"/>
+          <p:cNvPr id="11" name="TextBox 10">
+            <a:extLst>
+              <a:ext uri="{FF2B5EF4-FFF2-40B4-BE49-F238E27FC236}">
+                <a16:creationId xmlns:a16="http://schemas.microsoft.com/office/drawing/2014/main" id="{205F8439-1F6B-32C4-7ADD-5CFF4507E555}"/>
               </a:ext>
             </a:extLst>
           </p:cNvPr>
@@ -7805,8 +8866,8 @@
         </p:nvSpPr>
         <p:spPr>
           <a:xfrm>
-            <a:off x="787400" y="1600200"/>
-            <a:ext cx="3048000" cy="369332"/>
+            <a:off x="4330700" y="1549400"/>
+            <a:ext cx="3327400" cy="369332"/>
           </a:xfrm>
           <a:prstGeom prst="rect">
             <a:avLst/>
@@ -7820,17 +8881,17 @@
           <a:lstStyle/>
           <a:p>
             <a:r>
-              <a:rPr lang="en-US" sz="2000" b="1">
-                <a:solidFill>
-                  <a:srgbClr val="5B4B6E"/>
+              <a:rPr lang="en-US" sz="1900" b="1">
+                <a:solidFill>
+                  <a:srgbClr val="1F3864"/>
                 </a:solidFill>
                 <a:latin typeface="Times New Roman" panose="02020603050405020304" pitchFamily="18" charset="0"/>
               </a:rPr>
-              <a:t>C#</a:t>
-            </a:r>
-            <a:endParaRPr lang="ru-RU" sz="2000" b="1">
+              <a:t>WPF (XAML)</a:t>
+            </a:r>
+            <a:endParaRPr lang="ru-RU" sz="1900" b="1">
               <a:solidFill>
-                <a:srgbClr val="5B4B6E"/>
+                <a:srgbClr val="1F3864"/>
               </a:solidFill>
               <a:latin typeface="Times New Roman" panose="02020603050405020304" pitchFamily="18" charset="0"/>
             </a:endParaRPr>
@@ -7839,10 +8900,10 @@
       </p:sp>
       <p:sp>
         <p:nvSpPr>
-          <p:cNvPr id="10" name="TextBox 9">
-            <a:extLst>
-              <a:ext uri="{FF2B5EF4-FFF2-40B4-BE49-F238E27FC236}">
-                <a16:creationId xmlns:a16="http://schemas.microsoft.com/office/drawing/2014/main" id="{AFE18E35-29AD-FCDC-F04C-2C666726B314}"/>
+          <p:cNvPr id="12" name="TextBox 11">
+            <a:extLst>
+              <a:ext uri="{FF2B5EF4-FFF2-40B4-BE49-F238E27FC236}">
+                <a16:creationId xmlns:a16="http://schemas.microsoft.com/office/drawing/2014/main" id="{F7CE94E3-BD35-D35E-0C01-BB6BA5DC860E}"/>
               </a:ext>
             </a:extLst>
           </p:cNvPr>
@@ -7851,8 +8912,8 @@
         </p:nvSpPr>
         <p:spPr>
           <a:xfrm>
-            <a:off x="787400" y="2260600"/>
-            <a:ext cx="3048000" cy="369332"/>
+            <a:off x="4330700" y="2159000"/>
+            <a:ext cx="3327400" cy="369332"/>
           </a:xfrm>
           <a:prstGeom prst="rect">
             <a:avLst/>
@@ -7868,21 +8929,21 @@
             <a:r>
               <a:rPr lang="ru-RU" sz="1300">
                 <a:solidFill>
-                  <a:srgbClr val="2B2233"/>
+                  <a:srgbClr val="595959"/>
                 </a:solidFill>
                 <a:latin typeface="Times New Roman" panose="02020603050405020304" pitchFamily="18" charset="0"/>
               </a:rPr>
-              <a:t>Объектно-ориентированный язык, платформа .NET Framework 4.7.2</a:t>
-            </a:r>
-          </a:p>
-        </p:txBody>
-      </p:sp>
-      <p:sp>
-        <p:nvSpPr>
-          <p:cNvPr id="11" name="Прямоугольник 10">
-            <a:extLst>
-              <a:ext uri="{FF2B5EF4-FFF2-40B4-BE49-F238E27FC236}">
-                <a16:creationId xmlns:a16="http://schemas.microsoft.com/office/drawing/2014/main" id="{3193C5B8-5D0E-96CE-6A28-95673AF2825E}"/>
+              <a:t>Разработка настольного интерфейса Windows, разделение разметки и логики</a:t>
+            </a:r>
+          </a:p>
+        </p:txBody>
+      </p:sp>
+      <p:sp>
+        <p:nvSpPr>
+          <p:cNvPr id="13" name="Прямоугольник 12">
+            <a:extLst>
+              <a:ext uri="{FF2B5EF4-FFF2-40B4-BE49-F238E27FC236}">
+                <a16:creationId xmlns:a16="http://schemas.microsoft.com/office/drawing/2014/main" id="{AB356B52-092D-FC40-C8A7-A1547F66E006}"/>
               </a:ext>
             </a:extLst>
           </p:cNvPr>
@@ -7891,14 +8952,14 @@
         </p:nvSpPr>
         <p:spPr>
           <a:xfrm>
-            <a:off x="4305300" y="1346200"/>
-            <a:ext cx="3492500" cy="1803400"/>
+            <a:off x="8051800" y="1346200"/>
+            <a:ext cx="3492500" cy="25400"/>
           </a:xfrm>
           <a:prstGeom prst="rect">
             <a:avLst/>
           </a:prstGeom>
           <a:solidFill>
-            <a:srgbClr val="EDE8F2"/>
+            <a:srgbClr val="1F3864"/>
           </a:solidFill>
           <a:ln w="19050" cap="flat" cmpd="sng" algn="ctr">
             <a:noFill/>
@@ -7947,10 +9008,96 @@
       </p:sp>
       <p:sp>
         <p:nvSpPr>
-          <p:cNvPr id="12" name="Прямоугольник 11">
-            <a:extLst>
-              <a:ext uri="{FF2B5EF4-FFF2-40B4-BE49-F238E27FC236}">
-                <a16:creationId xmlns:a16="http://schemas.microsoft.com/office/drawing/2014/main" id="{123C0F40-C7B7-BEB1-572E-236A9032645E}"/>
+          <p:cNvPr id="14" name="TextBox 13">
+            <a:extLst>
+              <a:ext uri="{FF2B5EF4-FFF2-40B4-BE49-F238E27FC236}">
+                <a16:creationId xmlns:a16="http://schemas.microsoft.com/office/drawing/2014/main" id="{77CDD383-C38B-23FF-56E8-8123791BC7E8}"/>
+              </a:ext>
+            </a:extLst>
+          </p:cNvPr>
+          <p:cNvSpPr txBox="1"/>
+          <p:nvPr/>
+        </p:nvSpPr>
+        <p:spPr>
+          <a:xfrm>
+            <a:off x="8077200" y="1549400"/>
+            <a:ext cx="3327400" cy="369332"/>
+          </a:xfrm>
+          <a:prstGeom prst="rect">
+            <a:avLst/>
+          </a:prstGeom>
+          <a:noFill/>
+        </p:spPr>
+        <p:txBody>
+          <a:bodyPr vert="horz" wrap="square" lIns="0" tIns="0" rIns="0" bIns="0" rtlCol="0">
+            <a:noAutofit/>
+          </a:bodyPr>
+          <a:lstStyle/>
+          <a:p>
+            <a:r>
+              <a:rPr lang="en-US" sz="1900" b="1">
+                <a:solidFill>
+                  <a:srgbClr val="1F3864"/>
+                </a:solidFill>
+                <a:latin typeface="Times New Roman" panose="02020603050405020304" pitchFamily="18" charset="0"/>
+              </a:rPr>
+              <a:t>ADO.NET</a:t>
+            </a:r>
+            <a:endParaRPr lang="ru-RU" sz="1900" b="1">
+              <a:solidFill>
+                <a:srgbClr val="1F3864"/>
+              </a:solidFill>
+              <a:latin typeface="Times New Roman" panose="02020603050405020304" pitchFamily="18" charset="0"/>
+            </a:endParaRPr>
+          </a:p>
+        </p:txBody>
+      </p:sp>
+      <p:sp>
+        <p:nvSpPr>
+          <p:cNvPr id="15" name="TextBox 14">
+            <a:extLst>
+              <a:ext uri="{FF2B5EF4-FFF2-40B4-BE49-F238E27FC236}">
+                <a16:creationId xmlns:a16="http://schemas.microsoft.com/office/drawing/2014/main" id="{1C601E48-7ECE-D3D8-BD71-2C1EBEF7220F}"/>
+              </a:ext>
+            </a:extLst>
+          </p:cNvPr>
+          <p:cNvSpPr txBox="1"/>
+          <p:nvPr/>
+        </p:nvSpPr>
+        <p:spPr>
+          <a:xfrm>
+            <a:off x="8077200" y="2159000"/>
+            <a:ext cx="3327400" cy="369332"/>
+          </a:xfrm>
+          <a:prstGeom prst="rect">
+            <a:avLst/>
+          </a:prstGeom>
+          <a:noFill/>
+        </p:spPr>
+        <p:txBody>
+          <a:bodyPr vert="horz" wrap="square" lIns="0" tIns="0" rIns="0" bIns="0" rtlCol="0">
+            <a:noAutofit/>
+          </a:bodyPr>
+          <a:lstStyle/>
+          <a:p>
+            <a:r>
+              <a:rPr lang="ru-RU" sz="1300">
+                <a:solidFill>
+                  <a:srgbClr val="595959"/>
+                </a:solidFill>
+                <a:latin typeface="Times New Roman" panose="02020603050405020304" pitchFamily="18" charset="0"/>
+              </a:rPr>
+              <a:t>Доступ к данным через провайдер System.Data.SqlClient, параметризованные запросы и транзакции</a:t>
+            </a:r>
+          </a:p>
+        </p:txBody>
+      </p:sp>
+      <p:sp>
+        <p:nvSpPr>
+          <p:cNvPr id="16" name="Прямоугольник 15">
+            <a:extLst>
+              <a:ext uri="{FF2B5EF4-FFF2-40B4-BE49-F238E27FC236}">
+                <a16:creationId xmlns:a16="http://schemas.microsoft.com/office/drawing/2014/main" id="{FF930949-0AF0-FCB9-DF62-0A1B319E0050}"/>
               </a:ext>
             </a:extLst>
           </p:cNvPr>
@@ -7959,14 +9106,14 @@
         </p:nvSpPr>
         <p:spPr>
           <a:xfrm>
-            <a:off x="4305300" y="1346200"/>
-            <a:ext cx="3492500" cy="76200"/>
+            <a:off x="558800" y="3378200"/>
+            <a:ext cx="3492500" cy="25400"/>
           </a:xfrm>
           <a:prstGeom prst="rect">
             <a:avLst/>
           </a:prstGeom>
           <a:solidFill>
-            <a:srgbClr val="7C9070"/>
+            <a:srgbClr val="1F3864"/>
           </a:solidFill>
           <a:ln w="19050" cap="flat" cmpd="sng" algn="ctr">
             <a:noFill/>
@@ -8015,10 +9162,10 @@
       </p:sp>
       <p:sp>
         <p:nvSpPr>
-          <p:cNvPr id="13" name="TextBox 12">
-            <a:extLst>
-              <a:ext uri="{FF2B5EF4-FFF2-40B4-BE49-F238E27FC236}">
-                <a16:creationId xmlns:a16="http://schemas.microsoft.com/office/drawing/2014/main" id="{98D648EB-B702-31C7-9652-1AFEFB3738D5}"/>
+          <p:cNvPr id="17" name="TextBox 16">
+            <a:extLst>
+              <a:ext uri="{FF2B5EF4-FFF2-40B4-BE49-F238E27FC236}">
+                <a16:creationId xmlns:a16="http://schemas.microsoft.com/office/drawing/2014/main" id="{F5DE80A5-8593-DC7E-B0F4-B8EE6FA922D4}"/>
               </a:ext>
             </a:extLst>
           </p:cNvPr>
@@ -8027,8 +9174,8 @@
         </p:nvSpPr>
         <p:spPr>
           <a:xfrm>
-            <a:off x="4533900" y="1600200"/>
-            <a:ext cx="3048000" cy="369332"/>
+            <a:off x="584200" y="3581400"/>
+            <a:ext cx="3327400" cy="369332"/>
           </a:xfrm>
           <a:prstGeom prst="rect">
             <a:avLst/>
@@ -8042,17 +9189,17 @@
           <a:lstStyle/>
           <a:p>
             <a:r>
-              <a:rPr lang="en-US" sz="2000" b="1">
-                <a:solidFill>
-                  <a:srgbClr val="5B4B6E"/>
+              <a:rPr lang="en-US" sz="1900" b="1">
+                <a:solidFill>
+                  <a:srgbClr val="1F3864"/>
                 </a:solidFill>
                 <a:latin typeface="Times New Roman" panose="02020603050405020304" pitchFamily="18" charset="0"/>
               </a:rPr>
-              <a:t>WPF (XAML)</a:t>
-            </a:r>
-            <a:endParaRPr lang="ru-RU" sz="2000" b="1">
+              <a:t>Microsoft SQL Server</a:t>
+            </a:r>
+            <a:endParaRPr lang="ru-RU" sz="1900" b="1">
               <a:solidFill>
-                <a:srgbClr val="5B4B6E"/>
+                <a:srgbClr val="1F3864"/>
               </a:solidFill>
               <a:latin typeface="Times New Roman" panose="02020603050405020304" pitchFamily="18" charset="0"/>
             </a:endParaRPr>
@@ -8061,10 +9208,10 @@
       </p:sp>
       <p:sp>
         <p:nvSpPr>
-          <p:cNvPr id="14" name="TextBox 13">
-            <a:extLst>
-              <a:ext uri="{FF2B5EF4-FFF2-40B4-BE49-F238E27FC236}">
-                <a16:creationId xmlns:a16="http://schemas.microsoft.com/office/drawing/2014/main" id="{5C5769B2-8CE1-712F-00D0-98580C00506A}"/>
+          <p:cNvPr id="18" name="TextBox 17">
+            <a:extLst>
+              <a:ext uri="{FF2B5EF4-FFF2-40B4-BE49-F238E27FC236}">
+                <a16:creationId xmlns:a16="http://schemas.microsoft.com/office/drawing/2014/main" id="{42D97867-5C09-C6FA-6333-05DA786EF73F}"/>
               </a:ext>
             </a:extLst>
           </p:cNvPr>
@@ -8073,8 +9220,8 @@
         </p:nvSpPr>
         <p:spPr>
           <a:xfrm>
-            <a:off x="4533900" y="2260600"/>
-            <a:ext cx="3048000" cy="369332"/>
+            <a:off x="584200" y="4191000"/>
+            <a:ext cx="3327400" cy="369332"/>
           </a:xfrm>
           <a:prstGeom prst="rect">
             <a:avLst/>
@@ -8090,21 +9237,21 @@
             <a:r>
               <a:rPr lang="ru-RU" sz="1300">
                 <a:solidFill>
-                  <a:srgbClr val="2B2233"/>
+                  <a:srgbClr val="595959"/>
                 </a:solidFill>
                 <a:latin typeface="Times New Roman" panose="02020603050405020304" pitchFamily="18" charset="0"/>
               </a:rPr>
-              <a:t>Разработка настольного интерфейса Windows, разделение разметки и логики</a:t>
-            </a:r>
-          </a:p>
-        </p:txBody>
-      </p:sp>
-      <p:sp>
-        <p:nvSpPr>
-          <p:cNvPr id="15" name="Прямоугольник 14">
-            <a:extLst>
-              <a:ext uri="{FF2B5EF4-FFF2-40B4-BE49-F238E27FC236}">
-                <a16:creationId xmlns:a16="http://schemas.microsoft.com/office/drawing/2014/main" id="{C3AE1C0F-C9B5-0BA6-EB69-5DE3DE9C4474}"/>
+              <a:t>Хранение данных: внешние ключи, ограничения CHECK, транзакции</a:t>
+            </a:r>
+          </a:p>
+        </p:txBody>
+      </p:sp>
+      <p:sp>
+        <p:nvSpPr>
+          <p:cNvPr id="19" name="Прямоугольник 18">
+            <a:extLst>
+              <a:ext uri="{FF2B5EF4-FFF2-40B4-BE49-F238E27FC236}">
+                <a16:creationId xmlns:a16="http://schemas.microsoft.com/office/drawing/2014/main" id="{9B8553B7-A666-311B-D685-8FF5C57D435A}"/>
               </a:ext>
             </a:extLst>
           </p:cNvPr>
@@ -8113,14 +9260,14 @@
         </p:nvSpPr>
         <p:spPr>
           <a:xfrm>
-            <a:off x="8051800" y="1346200"/>
-            <a:ext cx="3492500" cy="1803400"/>
+            <a:off x="4305300" y="3378200"/>
+            <a:ext cx="3492500" cy="25400"/>
           </a:xfrm>
           <a:prstGeom prst="rect">
             <a:avLst/>
           </a:prstGeom>
           <a:solidFill>
-            <a:srgbClr val="EDE8F2"/>
+            <a:srgbClr val="1F3864"/>
           </a:solidFill>
           <a:ln w="19050" cap="flat" cmpd="sng" algn="ctr">
             <a:noFill/>
@@ -8169,10 +9316,96 @@
       </p:sp>
       <p:sp>
         <p:nvSpPr>
-          <p:cNvPr id="16" name="Прямоугольник 15">
-            <a:extLst>
-              <a:ext uri="{FF2B5EF4-FFF2-40B4-BE49-F238E27FC236}">
-                <a16:creationId xmlns:a16="http://schemas.microsoft.com/office/drawing/2014/main" id="{6B52E3E1-4B2E-A2FC-B964-EA87CBF80588}"/>
+          <p:cNvPr id="20" name="TextBox 19">
+            <a:extLst>
+              <a:ext uri="{FF2B5EF4-FFF2-40B4-BE49-F238E27FC236}">
+                <a16:creationId xmlns:a16="http://schemas.microsoft.com/office/drawing/2014/main" id="{9E084122-E026-C3CF-3248-C6344E5013BF}"/>
+              </a:ext>
+            </a:extLst>
+          </p:cNvPr>
+          <p:cNvSpPr txBox="1"/>
+          <p:nvPr/>
+        </p:nvSpPr>
+        <p:spPr>
+          <a:xfrm>
+            <a:off x="4330700" y="3581400"/>
+            <a:ext cx="3327400" cy="369332"/>
+          </a:xfrm>
+          <a:prstGeom prst="rect">
+            <a:avLst/>
+          </a:prstGeom>
+          <a:noFill/>
+        </p:spPr>
+        <p:txBody>
+          <a:bodyPr vert="horz" wrap="square" lIns="0" tIns="0" rIns="0" bIns="0" rtlCol="0">
+            <a:noAutofit/>
+          </a:bodyPr>
+          <a:lstStyle/>
+          <a:p>
+            <a:r>
+              <a:rPr lang="en-US" sz="1500" b="1">
+                <a:solidFill>
+                  <a:srgbClr val="1F3864"/>
+                </a:solidFill>
+                <a:latin typeface="Times New Roman" panose="02020603050405020304" pitchFamily="18" charset="0"/>
+              </a:rPr>
+              <a:t>Microsoft Visual Studio 2019</a:t>
+            </a:r>
+            <a:endParaRPr lang="ru-RU" sz="1500" b="1">
+              <a:solidFill>
+                <a:srgbClr val="1F3864"/>
+              </a:solidFill>
+              <a:latin typeface="Times New Roman" panose="02020603050405020304" pitchFamily="18" charset="0"/>
+            </a:endParaRPr>
+          </a:p>
+        </p:txBody>
+      </p:sp>
+      <p:sp>
+        <p:nvSpPr>
+          <p:cNvPr id="21" name="TextBox 20">
+            <a:extLst>
+              <a:ext uri="{FF2B5EF4-FFF2-40B4-BE49-F238E27FC236}">
+                <a16:creationId xmlns:a16="http://schemas.microsoft.com/office/drawing/2014/main" id="{7A2CD7D3-781E-98AA-F182-99BE6FA184C0}"/>
+              </a:ext>
+            </a:extLst>
+          </p:cNvPr>
+          <p:cNvSpPr txBox="1"/>
+          <p:nvPr/>
+        </p:nvSpPr>
+        <p:spPr>
+          <a:xfrm>
+            <a:off x="4330700" y="4191000"/>
+            <a:ext cx="3327400" cy="369332"/>
+          </a:xfrm>
+          <a:prstGeom prst="rect">
+            <a:avLst/>
+          </a:prstGeom>
+          <a:noFill/>
+        </p:spPr>
+        <p:txBody>
+          <a:bodyPr vert="horz" wrap="square" lIns="0" tIns="0" rIns="0" bIns="0" rtlCol="0">
+            <a:noAutofit/>
+          </a:bodyPr>
+          <a:lstStyle/>
+          <a:p>
+            <a:r>
+              <a:rPr lang="ru-RU" sz="1300">
+                <a:solidFill>
+                  <a:srgbClr val="595959"/>
+                </a:solidFill>
+                <a:latin typeface="Times New Roman" panose="02020603050405020304" pitchFamily="18" charset="0"/>
+              </a:rPr>
+              <a:t>Среда разработки и сопровождения программного продукта</a:t>
+            </a:r>
+          </a:p>
+        </p:txBody>
+      </p:sp>
+      <p:sp>
+        <p:nvSpPr>
+          <p:cNvPr id="22" name="Прямоугольник 21">
+            <a:extLst>
+              <a:ext uri="{FF2B5EF4-FFF2-40B4-BE49-F238E27FC236}">
+                <a16:creationId xmlns:a16="http://schemas.microsoft.com/office/drawing/2014/main" id="{F6E08C4B-392B-DCDC-4A1E-5F7D9325497B}"/>
               </a:ext>
             </a:extLst>
           </p:cNvPr>
@@ -8181,14 +9414,14 @@
         </p:nvSpPr>
         <p:spPr>
           <a:xfrm>
-            <a:off x="8051800" y="1346200"/>
-            <a:ext cx="3492500" cy="76200"/>
+            <a:off x="8051800" y="3378200"/>
+            <a:ext cx="3492500" cy="25400"/>
           </a:xfrm>
           <a:prstGeom prst="rect">
             <a:avLst/>
           </a:prstGeom>
           <a:solidFill>
-            <a:srgbClr val="7C9070"/>
+            <a:srgbClr val="1F3864"/>
           </a:solidFill>
           <a:ln w="19050" cap="flat" cmpd="sng" algn="ctr">
             <a:noFill/>
@@ -8237,10 +9470,10 @@
       </p:sp>
       <p:sp>
         <p:nvSpPr>
-          <p:cNvPr id="17" name="TextBox 16">
-            <a:extLst>
-              <a:ext uri="{FF2B5EF4-FFF2-40B4-BE49-F238E27FC236}">
-                <a16:creationId xmlns:a16="http://schemas.microsoft.com/office/drawing/2014/main" id="{CD26C611-6193-483E-086F-BEF7D76614D9}"/>
+          <p:cNvPr id="23" name="TextBox 22">
+            <a:extLst>
+              <a:ext uri="{FF2B5EF4-FFF2-40B4-BE49-F238E27FC236}">
+                <a16:creationId xmlns:a16="http://schemas.microsoft.com/office/drawing/2014/main" id="{AE6BAB85-E6F5-0F65-EABD-367D40D0EAA5}"/>
               </a:ext>
             </a:extLst>
           </p:cNvPr>
@@ -8249,8 +9482,8 @@
         </p:nvSpPr>
         <p:spPr>
           <a:xfrm>
-            <a:off x="8280400" y="1600200"/>
-            <a:ext cx="3048000" cy="369332"/>
+            <a:off x="8077200" y="3581400"/>
+            <a:ext cx="3327400" cy="369332"/>
           </a:xfrm>
           <a:prstGeom prst="rect">
             <a:avLst/>
@@ -8264,17 +9497,17 @@
           <a:lstStyle/>
           <a:p>
             <a:r>
-              <a:rPr lang="en-US" sz="2000" b="1">
-                <a:solidFill>
-                  <a:srgbClr val="5B4B6E"/>
+              <a:rPr lang="en-US" sz="1900" b="1">
+                <a:solidFill>
+                  <a:srgbClr val="1F3864"/>
                 </a:solidFill>
                 <a:latin typeface="Times New Roman" panose="02020603050405020304" pitchFamily="18" charset="0"/>
               </a:rPr>
-              <a:t>ADO.NET</a:t>
-            </a:r>
-            <a:endParaRPr lang="ru-RU" sz="2000" b="1">
+              <a:t>PBKDF2-HMAC-SHA256</a:t>
+            </a:r>
+            <a:endParaRPr lang="ru-RU" sz="1900" b="1">
               <a:solidFill>
-                <a:srgbClr val="5B4B6E"/>
+                <a:srgbClr val="1F3864"/>
               </a:solidFill>
               <a:latin typeface="Times New Roman" panose="02020603050405020304" pitchFamily="18" charset="0"/>
             </a:endParaRPr>
@@ -8283,10 +9516,10 @@
       </p:sp>
       <p:sp>
         <p:nvSpPr>
-          <p:cNvPr id="18" name="TextBox 17">
-            <a:extLst>
-              <a:ext uri="{FF2B5EF4-FFF2-40B4-BE49-F238E27FC236}">
-                <a16:creationId xmlns:a16="http://schemas.microsoft.com/office/drawing/2014/main" id="{80D44DF3-6850-B075-B052-3A62D11FDC4A}"/>
+          <p:cNvPr id="24" name="TextBox 23">
+            <a:extLst>
+              <a:ext uri="{FF2B5EF4-FFF2-40B4-BE49-F238E27FC236}">
+                <a16:creationId xmlns:a16="http://schemas.microsoft.com/office/drawing/2014/main" id="{D42B28CB-4570-06C1-D4D8-F6624119C804}"/>
               </a:ext>
             </a:extLst>
           </p:cNvPr>
@@ -8295,8 +9528,8 @@
         </p:nvSpPr>
         <p:spPr>
           <a:xfrm>
-            <a:off x="8280400" y="2260600"/>
-            <a:ext cx="3048000" cy="369332"/>
+            <a:off x="8077200" y="4191000"/>
+            <a:ext cx="3327400" cy="369332"/>
           </a:xfrm>
           <a:prstGeom prst="rect">
             <a:avLst/>
@@ -8312,157 +9545,21 @@
             <a:r>
               <a:rPr lang="ru-RU" sz="1300">
                 <a:solidFill>
-                  <a:srgbClr val="2B2233"/>
+                  <a:srgbClr val="595959"/>
                 </a:solidFill>
                 <a:latin typeface="Times New Roman" panose="02020603050405020304" pitchFamily="18" charset="0"/>
               </a:rPr>
-              <a:t>Доступ к данным через провайдер System.Data.SqlClient, параметризованные запросы и транзакции</a:t>
-            </a:r>
-          </a:p>
-        </p:txBody>
-      </p:sp>
-      <p:sp>
-        <p:nvSpPr>
-          <p:cNvPr id="19" name="Прямоугольник 18">
-            <a:extLst>
-              <a:ext uri="{FF2B5EF4-FFF2-40B4-BE49-F238E27FC236}">
-                <a16:creationId xmlns:a16="http://schemas.microsoft.com/office/drawing/2014/main" id="{DF0B16E4-EBF0-05B0-BE46-023AA0A7F264}"/>
-              </a:ext>
-            </a:extLst>
-          </p:cNvPr>
-          <p:cNvSpPr/>
-          <p:nvPr/>
-        </p:nvSpPr>
-        <p:spPr>
-          <a:xfrm>
-            <a:off x="558800" y="3378200"/>
-            <a:ext cx="3492500" cy="1803400"/>
-          </a:xfrm>
-          <a:prstGeom prst="rect">
-            <a:avLst/>
-          </a:prstGeom>
-          <a:solidFill>
-            <a:srgbClr val="EDE8F2"/>
-          </a:solidFill>
-          <a:ln w="19050" cap="flat" cmpd="sng" algn="ctr">
-            <a:noFill/>
-            <a:prstDash val="solid"/>
-            <a:miter lim="800000"/>
-          </a:ln>
-          <a:effectLst/>
-          <a:extLst>
-            <a:ext uri="{91240B29-F687-4F45-9708-019B960494DF}">
-              <a14:hiddenLine xmlns:a14="http://schemas.microsoft.com/office/drawing/2010/main" w="19050" cap="flat" cmpd="sng" algn="ctr">
-                <a:solidFill>
-                  <a:schemeClr val="accent1">
-                    <a:shade val="15000"/>
-                  </a:schemeClr>
-                </a:solidFill>
-                <a:prstDash val="solid"/>
-                <a:miter lim="800000"/>
-              </a14:hiddenLine>
-            </a:ext>
-          </a:extLst>
-        </p:spPr>
-        <p:style>
-          <a:lnRef idx="2">
-            <a:schemeClr val="accent1">
-              <a:shade val="15000"/>
-            </a:schemeClr>
-          </a:lnRef>
-          <a:fillRef idx="1">
-            <a:schemeClr val="accent1"/>
-          </a:fillRef>
-          <a:effectRef idx="0">
-            <a:schemeClr val="accent1"/>
-          </a:effectRef>
-          <a:fontRef idx="minor">
-            <a:schemeClr val="lt1"/>
-          </a:fontRef>
-        </p:style>
-        <p:txBody>
-          <a:bodyPr rtlCol="0" anchor="ctr"/>
-          <a:lstStyle/>
-          <a:p>
-            <a:pPr algn="ctr"/>
-            <a:endParaRPr lang="ru-RU"/>
-          </a:p>
-        </p:txBody>
-      </p:sp>
-      <p:sp>
-        <p:nvSpPr>
-          <p:cNvPr id="20" name="Прямоугольник 19">
-            <a:extLst>
-              <a:ext uri="{FF2B5EF4-FFF2-40B4-BE49-F238E27FC236}">
-                <a16:creationId xmlns:a16="http://schemas.microsoft.com/office/drawing/2014/main" id="{CCA9B20E-236A-8F50-59F7-8F837A8A226C}"/>
-              </a:ext>
-            </a:extLst>
-          </p:cNvPr>
-          <p:cNvSpPr/>
-          <p:nvPr/>
-        </p:nvSpPr>
-        <p:spPr>
-          <a:xfrm>
-            <a:off x="558800" y="3378200"/>
-            <a:ext cx="3492500" cy="76200"/>
-          </a:xfrm>
-          <a:prstGeom prst="rect">
-            <a:avLst/>
-          </a:prstGeom>
-          <a:solidFill>
-            <a:srgbClr val="7C9070"/>
-          </a:solidFill>
-          <a:ln w="19050" cap="flat" cmpd="sng" algn="ctr">
-            <a:noFill/>
-            <a:prstDash val="solid"/>
-            <a:miter lim="800000"/>
-          </a:ln>
-          <a:effectLst/>
-          <a:extLst>
-            <a:ext uri="{91240B29-F687-4F45-9708-019B960494DF}">
-              <a14:hiddenLine xmlns:a14="http://schemas.microsoft.com/office/drawing/2010/main" w="19050" cap="flat" cmpd="sng" algn="ctr">
-                <a:solidFill>
-                  <a:schemeClr val="accent1">
-                    <a:shade val="15000"/>
-                  </a:schemeClr>
-                </a:solidFill>
-                <a:prstDash val="solid"/>
-                <a:miter lim="800000"/>
-              </a14:hiddenLine>
-            </a:ext>
-          </a:extLst>
-        </p:spPr>
-        <p:style>
-          <a:lnRef idx="2">
-            <a:schemeClr val="accent1">
-              <a:shade val="15000"/>
-            </a:schemeClr>
-          </a:lnRef>
-          <a:fillRef idx="1">
-            <a:schemeClr val="accent1"/>
-          </a:fillRef>
-          <a:effectRef idx="0">
-            <a:schemeClr val="accent1"/>
-          </a:effectRef>
-          <a:fontRef idx="minor">
-            <a:schemeClr val="lt1"/>
-          </a:fontRef>
-        </p:style>
-        <p:txBody>
-          <a:bodyPr rtlCol="0" anchor="ctr"/>
-          <a:lstStyle/>
-          <a:p>
-            <a:pPr algn="ctr"/>
-            <a:endParaRPr lang="ru-RU"/>
-          </a:p>
-        </p:txBody>
-      </p:sp>
-      <p:sp>
-        <p:nvSpPr>
-          <p:cNvPr id="21" name="TextBox 20">
-            <a:extLst>
-              <a:ext uri="{FF2B5EF4-FFF2-40B4-BE49-F238E27FC236}">
-                <a16:creationId xmlns:a16="http://schemas.microsoft.com/office/drawing/2014/main" id="{8537C134-948A-2AE3-0E9E-D125594A5826}"/>
+              <a:t>Хеширование паролей с индивидуальной солью, 100 000 итераций</a:t>
+            </a:r>
+          </a:p>
+        </p:txBody>
+      </p:sp>
+      <p:sp>
+        <p:nvSpPr>
+          <p:cNvPr id="25" name="TextBox 24">
+            <a:extLst>
+              <a:ext uri="{FF2B5EF4-FFF2-40B4-BE49-F238E27FC236}">
+                <a16:creationId xmlns:a16="http://schemas.microsoft.com/office/drawing/2014/main" id="{24E89E0F-15C7-DC05-893F-439E00E01F8A}"/>
               </a:ext>
             </a:extLst>
           </p:cNvPr>
@@ -8471,8 +9568,8 @@
         </p:nvSpPr>
         <p:spPr>
           <a:xfrm>
-            <a:off x="787400" y="3632200"/>
-            <a:ext cx="3048000" cy="369332"/>
+            <a:off x="558800" y="5486400"/>
+            <a:ext cx="11074400" cy="369332"/>
           </a:xfrm>
           <a:prstGeom prst="rect">
             <a:avLst/>
@@ -8486,539 +9583,9 @@
           <a:lstStyle/>
           <a:p>
             <a:r>
-              <a:rPr lang="en-US" sz="2000" b="1">
-                <a:solidFill>
-                  <a:srgbClr val="5B4B6E"/>
-                </a:solidFill>
-                <a:latin typeface="Times New Roman" panose="02020603050405020304" pitchFamily="18" charset="0"/>
-              </a:rPr>
-              <a:t>Microsoft SQL Server</a:t>
-            </a:r>
-            <a:endParaRPr lang="ru-RU" sz="2000" b="1">
-              <a:solidFill>
-                <a:srgbClr val="5B4B6E"/>
-              </a:solidFill>
-              <a:latin typeface="Times New Roman" panose="02020603050405020304" pitchFamily="18" charset="0"/>
-            </a:endParaRPr>
-          </a:p>
-        </p:txBody>
-      </p:sp>
-      <p:sp>
-        <p:nvSpPr>
-          <p:cNvPr id="22" name="TextBox 21">
-            <a:extLst>
-              <a:ext uri="{FF2B5EF4-FFF2-40B4-BE49-F238E27FC236}">
-                <a16:creationId xmlns:a16="http://schemas.microsoft.com/office/drawing/2014/main" id="{C788BE18-E500-2937-2673-E07BF99C61FA}"/>
-              </a:ext>
-            </a:extLst>
-          </p:cNvPr>
-          <p:cNvSpPr txBox="1"/>
-          <p:nvPr/>
-        </p:nvSpPr>
-        <p:spPr>
-          <a:xfrm>
-            <a:off x="787400" y="4292600"/>
-            <a:ext cx="3048000" cy="369332"/>
-          </a:xfrm>
-          <a:prstGeom prst="rect">
-            <a:avLst/>
-          </a:prstGeom>
-          <a:noFill/>
-        </p:spPr>
-        <p:txBody>
-          <a:bodyPr vert="horz" wrap="square" lIns="0" tIns="0" rIns="0" bIns="0" rtlCol="0">
-            <a:noAutofit/>
-          </a:bodyPr>
-          <a:lstStyle/>
-          <a:p>
-            <a:r>
-              <a:rPr lang="ru-RU" sz="1300">
-                <a:solidFill>
-                  <a:srgbClr val="2B2233"/>
-                </a:solidFill>
-                <a:latin typeface="Times New Roman" panose="02020603050405020304" pitchFamily="18" charset="0"/>
-              </a:rPr>
-              <a:t>Хранение данных: внешние ключи, ограничения CHECK, транзакции</a:t>
-            </a:r>
-          </a:p>
-        </p:txBody>
-      </p:sp>
-      <p:sp>
-        <p:nvSpPr>
-          <p:cNvPr id="23" name="Прямоугольник 22">
-            <a:extLst>
-              <a:ext uri="{FF2B5EF4-FFF2-40B4-BE49-F238E27FC236}">
-                <a16:creationId xmlns:a16="http://schemas.microsoft.com/office/drawing/2014/main" id="{177928AF-D39C-26FC-2FFD-607538B11F7B}"/>
-              </a:ext>
-            </a:extLst>
-          </p:cNvPr>
-          <p:cNvSpPr/>
-          <p:nvPr/>
-        </p:nvSpPr>
-        <p:spPr>
-          <a:xfrm>
-            <a:off x="4305300" y="3378200"/>
-            <a:ext cx="3492500" cy="1803400"/>
-          </a:xfrm>
-          <a:prstGeom prst="rect">
-            <a:avLst/>
-          </a:prstGeom>
-          <a:solidFill>
-            <a:srgbClr val="EDE8F2"/>
-          </a:solidFill>
-          <a:ln w="19050" cap="flat" cmpd="sng" algn="ctr">
-            <a:noFill/>
-            <a:prstDash val="solid"/>
-            <a:miter lim="800000"/>
-          </a:ln>
-          <a:effectLst/>
-          <a:extLst>
-            <a:ext uri="{91240B29-F687-4F45-9708-019B960494DF}">
-              <a14:hiddenLine xmlns:a14="http://schemas.microsoft.com/office/drawing/2010/main" w="19050" cap="flat" cmpd="sng" algn="ctr">
-                <a:solidFill>
-                  <a:schemeClr val="accent1">
-                    <a:shade val="15000"/>
-                  </a:schemeClr>
-                </a:solidFill>
-                <a:prstDash val="solid"/>
-                <a:miter lim="800000"/>
-              </a14:hiddenLine>
-            </a:ext>
-          </a:extLst>
-        </p:spPr>
-        <p:style>
-          <a:lnRef idx="2">
-            <a:schemeClr val="accent1">
-              <a:shade val="15000"/>
-            </a:schemeClr>
-          </a:lnRef>
-          <a:fillRef idx="1">
-            <a:schemeClr val="accent1"/>
-          </a:fillRef>
-          <a:effectRef idx="0">
-            <a:schemeClr val="accent1"/>
-          </a:effectRef>
-          <a:fontRef idx="minor">
-            <a:schemeClr val="lt1"/>
-          </a:fontRef>
-        </p:style>
-        <p:txBody>
-          <a:bodyPr rtlCol="0" anchor="ctr"/>
-          <a:lstStyle/>
-          <a:p>
-            <a:pPr algn="ctr"/>
-            <a:endParaRPr lang="ru-RU"/>
-          </a:p>
-        </p:txBody>
-      </p:sp>
-      <p:sp>
-        <p:nvSpPr>
-          <p:cNvPr id="24" name="Прямоугольник 23">
-            <a:extLst>
-              <a:ext uri="{FF2B5EF4-FFF2-40B4-BE49-F238E27FC236}">
-                <a16:creationId xmlns:a16="http://schemas.microsoft.com/office/drawing/2014/main" id="{94D5F35C-EAD2-3435-1583-F3940198B220}"/>
-              </a:ext>
-            </a:extLst>
-          </p:cNvPr>
-          <p:cNvSpPr/>
-          <p:nvPr/>
-        </p:nvSpPr>
-        <p:spPr>
-          <a:xfrm>
-            <a:off x="4305300" y="3378200"/>
-            <a:ext cx="3492500" cy="76200"/>
-          </a:xfrm>
-          <a:prstGeom prst="rect">
-            <a:avLst/>
-          </a:prstGeom>
-          <a:solidFill>
-            <a:srgbClr val="7C9070"/>
-          </a:solidFill>
-          <a:ln w="19050" cap="flat" cmpd="sng" algn="ctr">
-            <a:noFill/>
-            <a:prstDash val="solid"/>
-            <a:miter lim="800000"/>
-          </a:ln>
-          <a:effectLst/>
-          <a:extLst>
-            <a:ext uri="{91240B29-F687-4F45-9708-019B960494DF}">
-              <a14:hiddenLine xmlns:a14="http://schemas.microsoft.com/office/drawing/2010/main" w="19050" cap="flat" cmpd="sng" algn="ctr">
-                <a:solidFill>
-                  <a:schemeClr val="accent1">
-                    <a:shade val="15000"/>
-                  </a:schemeClr>
-                </a:solidFill>
-                <a:prstDash val="solid"/>
-                <a:miter lim="800000"/>
-              </a14:hiddenLine>
-            </a:ext>
-          </a:extLst>
-        </p:spPr>
-        <p:style>
-          <a:lnRef idx="2">
-            <a:schemeClr val="accent1">
-              <a:shade val="15000"/>
-            </a:schemeClr>
-          </a:lnRef>
-          <a:fillRef idx="1">
-            <a:schemeClr val="accent1"/>
-          </a:fillRef>
-          <a:effectRef idx="0">
-            <a:schemeClr val="accent1"/>
-          </a:effectRef>
-          <a:fontRef idx="minor">
-            <a:schemeClr val="lt1"/>
-          </a:fontRef>
-        </p:style>
-        <p:txBody>
-          <a:bodyPr rtlCol="0" anchor="ctr"/>
-          <a:lstStyle/>
-          <a:p>
-            <a:pPr algn="ctr"/>
-            <a:endParaRPr lang="ru-RU"/>
-          </a:p>
-        </p:txBody>
-      </p:sp>
-      <p:sp>
-        <p:nvSpPr>
-          <p:cNvPr id="25" name="TextBox 24">
-            <a:extLst>
-              <a:ext uri="{FF2B5EF4-FFF2-40B4-BE49-F238E27FC236}">
-                <a16:creationId xmlns:a16="http://schemas.microsoft.com/office/drawing/2014/main" id="{9A5E5759-F241-8C24-49D8-35F97CD36966}"/>
-              </a:ext>
-            </a:extLst>
-          </p:cNvPr>
-          <p:cNvSpPr txBox="1"/>
-          <p:nvPr/>
-        </p:nvSpPr>
-        <p:spPr>
-          <a:xfrm>
-            <a:off x="4533900" y="3632200"/>
-            <a:ext cx="3048000" cy="369332"/>
-          </a:xfrm>
-          <a:prstGeom prst="rect">
-            <a:avLst/>
-          </a:prstGeom>
-          <a:noFill/>
-        </p:spPr>
-        <p:txBody>
-          <a:bodyPr vert="horz" wrap="square" lIns="0" tIns="0" rIns="0" bIns="0" rtlCol="0">
-            <a:noAutofit/>
-          </a:bodyPr>
-          <a:lstStyle/>
-          <a:p>
-            <a:r>
-              <a:rPr lang="en-US" sz="1600" b="1">
-                <a:solidFill>
-                  <a:srgbClr val="5B4B6E"/>
-                </a:solidFill>
-                <a:latin typeface="Times New Roman" panose="02020603050405020304" pitchFamily="18" charset="0"/>
-              </a:rPr>
-              <a:t>Microsoft Visual Studio 2019</a:t>
-            </a:r>
-            <a:endParaRPr lang="ru-RU" sz="1600" b="1">
-              <a:solidFill>
-                <a:srgbClr val="5B4B6E"/>
-              </a:solidFill>
-              <a:latin typeface="Times New Roman" panose="02020603050405020304" pitchFamily="18" charset="0"/>
-            </a:endParaRPr>
-          </a:p>
-        </p:txBody>
-      </p:sp>
-      <p:sp>
-        <p:nvSpPr>
-          <p:cNvPr id="26" name="TextBox 25">
-            <a:extLst>
-              <a:ext uri="{FF2B5EF4-FFF2-40B4-BE49-F238E27FC236}">
-                <a16:creationId xmlns:a16="http://schemas.microsoft.com/office/drawing/2014/main" id="{C6705C8A-62B5-1047-C965-EB6671057C8D}"/>
-              </a:ext>
-            </a:extLst>
-          </p:cNvPr>
-          <p:cNvSpPr txBox="1"/>
-          <p:nvPr/>
-        </p:nvSpPr>
-        <p:spPr>
-          <a:xfrm>
-            <a:off x="4533900" y="4292600"/>
-            <a:ext cx="3048000" cy="369332"/>
-          </a:xfrm>
-          <a:prstGeom prst="rect">
-            <a:avLst/>
-          </a:prstGeom>
-          <a:noFill/>
-        </p:spPr>
-        <p:txBody>
-          <a:bodyPr vert="horz" wrap="square" lIns="0" tIns="0" rIns="0" bIns="0" rtlCol="0">
-            <a:noAutofit/>
-          </a:bodyPr>
-          <a:lstStyle/>
-          <a:p>
-            <a:r>
-              <a:rPr lang="ru-RU" sz="1300">
-                <a:solidFill>
-                  <a:srgbClr val="2B2233"/>
-                </a:solidFill>
-                <a:latin typeface="Times New Roman" panose="02020603050405020304" pitchFamily="18" charset="0"/>
-              </a:rPr>
-              <a:t>Среда разработки и сопровождения программного продукта</a:t>
-            </a:r>
-          </a:p>
-        </p:txBody>
-      </p:sp>
-      <p:sp>
-        <p:nvSpPr>
-          <p:cNvPr id="27" name="Прямоугольник 26">
-            <a:extLst>
-              <a:ext uri="{FF2B5EF4-FFF2-40B4-BE49-F238E27FC236}">
-                <a16:creationId xmlns:a16="http://schemas.microsoft.com/office/drawing/2014/main" id="{1B9B9D5B-8D88-EFB2-5775-7FBE2E2CA447}"/>
-              </a:ext>
-            </a:extLst>
-          </p:cNvPr>
-          <p:cNvSpPr/>
-          <p:nvPr/>
-        </p:nvSpPr>
-        <p:spPr>
-          <a:xfrm>
-            <a:off x="8051800" y="3378200"/>
-            <a:ext cx="3492500" cy="1803400"/>
-          </a:xfrm>
-          <a:prstGeom prst="rect">
-            <a:avLst/>
-          </a:prstGeom>
-          <a:solidFill>
-            <a:srgbClr val="EDE8F2"/>
-          </a:solidFill>
-          <a:ln w="19050" cap="flat" cmpd="sng" algn="ctr">
-            <a:noFill/>
-            <a:prstDash val="solid"/>
-            <a:miter lim="800000"/>
-          </a:ln>
-          <a:effectLst/>
-          <a:extLst>
-            <a:ext uri="{91240B29-F687-4F45-9708-019B960494DF}">
-              <a14:hiddenLine xmlns:a14="http://schemas.microsoft.com/office/drawing/2010/main" w="19050" cap="flat" cmpd="sng" algn="ctr">
-                <a:solidFill>
-                  <a:schemeClr val="accent1">
-                    <a:shade val="15000"/>
-                  </a:schemeClr>
-                </a:solidFill>
-                <a:prstDash val="solid"/>
-                <a:miter lim="800000"/>
-              </a14:hiddenLine>
-            </a:ext>
-          </a:extLst>
-        </p:spPr>
-        <p:style>
-          <a:lnRef idx="2">
-            <a:schemeClr val="accent1">
-              <a:shade val="15000"/>
-            </a:schemeClr>
-          </a:lnRef>
-          <a:fillRef idx="1">
-            <a:schemeClr val="accent1"/>
-          </a:fillRef>
-          <a:effectRef idx="0">
-            <a:schemeClr val="accent1"/>
-          </a:effectRef>
-          <a:fontRef idx="minor">
-            <a:schemeClr val="lt1"/>
-          </a:fontRef>
-        </p:style>
-        <p:txBody>
-          <a:bodyPr rtlCol="0" anchor="ctr"/>
-          <a:lstStyle/>
-          <a:p>
-            <a:pPr algn="ctr"/>
-            <a:endParaRPr lang="ru-RU"/>
-          </a:p>
-        </p:txBody>
-      </p:sp>
-      <p:sp>
-        <p:nvSpPr>
-          <p:cNvPr id="28" name="Прямоугольник 27">
-            <a:extLst>
-              <a:ext uri="{FF2B5EF4-FFF2-40B4-BE49-F238E27FC236}">
-                <a16:creationId xmlns:a16="http://schemas.microsoft.com/office/drawing/2014/main" id="{CCDBD172-2149-4951-08AD-2A1D0F8D1750}"/>
-              </a:ext>
-            </a:extLst>
-          </p:cNvPr>
-          <p:cNvSpPr/>
-          <p:nvPr/>
-        </p:nvSpPr>
-        <p:spPr>
-          <a:xfrm>
-            <a:off x="8051800" y="3378200"/>
-            <a:ext cx="3492500" cy="76200"/>
-          </a:xfrm>
-          <a:prstGeom prst="rect">
-            <a:avLst/>
-          </a:prstGeom>
-          <a:solidFill>
-            <a:srgbClr val="7C9070"/>
-          </a:solidFill>
-          <a:ln w="19050" cap="flat" cmpd="sng" algn="ctr">
-            <a:noFill/>
-            <a:prstDash val="solid"/>
-            <a:miter lim="800000"/>
-          </a:ln>
-          <a:effectLst/>
-          <a:extLst>
-            <a:ext uri="{91240B29-F687-4F45-9708-019B960494DF}">
-              <a14:hiddenLine xmlns:a14="http://schemas.microsoft.com/office/drawing/2010/main" w="19050" cap="flat" cmpd="sng" algn="ctr">
-                <a:solidFill>
-                  <a:schemeClr val="accent1">
-                    <a:shade val="15000"/>
-                  </a:schemeClr>
-                </a:solidFill>
-                <a:prstDash val="solid"/>
-                <a:miter lim="800000"/>
-              </a14:hiddenLine>
-            </a:ext>
-          </a:extLst>
-        </p:spPr>
-        <p:style>
-          <a:lnRef idx="2">
-            <a:schemeClr val="accent1">
-              <a:shade val="15000"/>
-            </a:schemeClr>
-          </a:lnRef>
-          <a:fillRef idx="1">
-            <a:schemeClr val="accent1"/>
-          </a:fillRef>
-          <a:effectRef idx="0">
-            <a:schemeClr val="accent1"/>
-          </a:effectRef>
-          <a:fontRef idx="minor">
-            <a:schemeClr val="lt1"/>
-          </a:fontRef>
-        </p:style>
-        <p:txBody>
-          <a:bodyPr rtlCol="0" anchor="ctr"/>
-          <a:lstStyle/>
-          <a:p>
-            <a:pPr algn="ctr"/>
-            <a:endParaRPr lang="ru-RU"/>
-          </a:p>
-        </p:txBody>
-      </p:sp>
-      <p:sp>
-        <p:nvSpPr>
-          <p:cNvPr id="29" name="TextBox 28">
-            <a:extLst>
-              <a:ext uri="{FF2B5EF4-FFF2-40B4-BE49-F238E27FC236}">
-                <a16:creationId xmlns:a16="http://schemas.microsoft.com/office/drawing/2014/main" id="{07D722E3-C260-B234-6D9B-B037A30F8157}"/>
-              </a:ext>
-            </a:extLst>
-          </p:cNvPr>
-          <p:cNvSpPr txBox="1"/>
-          <p:nvPr/>
-        </p:nvSpPr>
-        <p:spPr>
-          <a:xfrm>
-            <a:off x="8280400" y="3632200"/>
-            <a:ext cx="3048000" cy="369332"/>
-          </a:xfrm>
-          <a:prstGeom prst="rect">
-            <a:avLst/>
-          </a:prstGeom>
-          <a:noFill/>
-        </p:spPr>
-        <p:txBody>
-          <a:bodyPr vert="horz" wrap="square" lIns="0" tIns="0" rIns="0" bIns="0" rtlCol="0">
-            <a:noAutofit/>
-          </a:bodyPr>
-          <a:lstStyle/>
-          <a:p>
-            <a:r>
-              <a:rPr lang="en-US" sz="2000" b="1">
-                <a:solidFill>
-                  <a:srgbClr val="5B4B6E"/>
-                </a:solidFill>
-                <a:latin typeface="Times New Roman" panose="02020603050405020304" pitchFamily="18" charset="0"/>
-              </a:rPr>
-              <a:t>PBKDF2-HMAC-SHA256</a:t>
-            </a:r>
-            <a:endParaRPr lang="ru-RU" sz="2000" b="1">
-              <a:solidFill>
-                <a:srgbClr val="5B4B6E"/>
-              </a:solidFill>
-              <a:latin typeface="Times New Roman" panose="02020603050405020304" pitchFamily="18" charset="0"/>
-            </a:endParaRPr>
-          </a:p>
-        </p:txBody>
-      </p:sp>
-      <p:sp>
-        <p:nvSpPr>
-          <p:cNvPr id="30" name="TextBox 29">
-            <a:extLst>
-              <a:ext uri="{FF2B5EF4-FFF2-40B4-BE49-F238E27FC236}">
-                <a16:creationId xmlns:a16="http://schemas.microsoft.com/office/drawing/2014/main" id="{CE0217B3-4B35-0E05-6D65-52DEAC396084}"/>
-              </a:ext>
-            </a:extLst>
-          </p:cNvPr>
-          <p:cNvSpPr txBox="1"/>
-          <p:nvPr/>
-        </p:nvSpPr>
-        <p:spPr>
-          <a:xfrm>
-            <a:off x="8280400" y="4292600"/>
-            <a:ext cx="3048000" cy="369332"/>
-          </a:xfrm>
-          <a:prstGeom prst="rect">
-            <a:avLst/>
-          </a:prstGeom>
-          <a:noFill/>
-        </p:spPr>
-        <p:txBody>
-          <a:bodyPr vert="horz" wrap="square" lIns="0" tIns="0" rIns="0" bIns="0" rtlCol="0">
-            <a:noAutofit/>
-          </a:bodyPr>
-          <a:lstStyle/>
-          <a:p>
-            <a:r>
-              <a:rPr lang="ru-RU" sz="1300">
-                <a:solidFill>
-                  <a:srgbClr val="2B2233"/>
-                </a:solidFill>
-                <a:latin typeface="Times New Roman" panose="02020603050405020304" pitchFamily="18" charset="0"/>
-              </a:rPr>
-              <a:t>Хеширование паролей с индивидуальной солью, 100 000 итераций</a:t>
-            </a:r>
-          </a:p>
-        </p:txBody>
-      </p:sp>
-      <p:sp>
-        <p:nvSpPr>
-          <p:cNvPr id="31" name="TextBox 30">
-            <a:extLst>
-              <a:ext uri="{FF2B5EF4-FFF2-40B4-BE49-F238E27FC236}">
-                <a16:creationId xmlns:a16="http://schemas.microsoft.com/office/drawing/2014/main" id="{42E2381B-4A96-40BC-B6E3-E3626A661F79}"/>
-              </a:ext>
-            </a:extLst>
-          </p:cNvPr>
-          <p:cNvSpPr txBox="1"/>
-          <p:nvPr/>
-        </p:nvSpPr>
-        <p:spPr>
-          <a:xfrm>
-            <a:off x="558800" y="5486400"/>
-            <a:ext cx="11074400" cy="369332"/>
-          </a:xfrm>
-          <a:prstGeom prst="rect">
-            <a:avLst/>
-          </a:prstGeom>
-          <a:noFill/>
-        </p:spPr>
-        <p:txBody>
-          <a:bodyPr vert="horz" wrap="square" lIns="0" tIns="0" rIns="0" bIns="0" rtlCol="0">
-            <a:noAutofit/>
-          </a:bodyPr>
-          <a:lstStyle/>
-          <a:p>
-            <a:r>
               <a:rPr lang="ru-RU" sz="1500">
                 <a:solidFill>
-                  <a:srgbClr val="6B6472"/>
+                  <a:srgbClr val="595959"/>
                 </a:solidFill>
                 <a:latin typeface="Times New Roman" panose="02020603050405020304" pitchFamily="18" charset="0"/>
               </a:rPr>
@@ -9030,7 +9597,7 @@
     </p:spTree>
     <p:extLst>
       <p:ext uri="{BB962C8B-B14F-4D97-AF65-F5344CB8AC3E}">
-        <p14:creationId xmlns:p14="http://schemas.microsoft.com/office/powerpoint/2010/main" val="2235546561"/>
+        <p14:creationId xmlns:p14="http://schemas.microsoft.com/office/powerpoint/2010/main" val="3014031579"/>
       </p:ext>
     </p:extLst>
   </p:cSld>
@@ -9062,7 +9629,7 @@
           <p:cNvPr id="2" name="Прямоугольник 1">
             <a:extLst>
               <a:ext uri="{FF2B5EF4-FFF2-40B4-BE49-F238E27FC236}">
-                <a16:creationId xmlns:a16="http://schemas.microsoft.com/office/drawing/2014/main" id="{484653FB-08AC-D68D-2A1D-F18E6C913598}"/>
+                <a16:creationId xmlns:a16="http://schemas.microsoft.com/office/drawing/2014/main" id="{EF385382-F579-5B34-0680-A5F5E3D4C024}"/>
               </a:ext>
             </a:extLst>
           </p:cNvPr>
@@ -9130,7 +9697,7 @@
           <p:cNvPr id="3" name="Прямоугольник 2">
             <a:extLst>
               <a:ext uri="{FF2B5EF4-FFF2-40B4-BE49-F238E27FC236}">
-                <a16:creationId xmlns:a16="http://schemas.microsoft.com/office/drawing/2014/main" id="{CA690472-A1C6-A8ED-2C6F-73614547E90E}"/>
+                <a16:creationId xmlns:a16="http://schemas.microsoft.com/office/drawing/2014/main" id="{3099FE9C-C8AE-114E-130C-6A1F84CB23AA}"/>
               </a:ext>
             </a:extLst>
           </p:cNvPr>
@@ -9140,13 +9707,13 @@
         <p:spPr>
           <a:xfrm>
             <a:off x="0" y="0"/>
-            <a:ext cx="12192000" cy="965200"/>
+            <a:ext cx="12192000" cy="76200"/>
           </a:xfrm>
           <a:prstGeom prst="rect">
             <a:avLst/>
           </a:prstGeom>
           <a:solidFill>
-            <a:srgbClr val="5B4B6E"/>
+            <a:srgbClr val="1F3864"/>
           </a:solidFill>
           <a:ln w="19050" cap="flat" cmpd="sng" algn="ctr">
             <a:noFill/>
@@ -9198,7 +9765,7 @@
           <p:cNvPr id="4" name="TextBox 3">
             <a:extLst>
               <a:ext uri="{FF2B5EF4-FFF2-40B4-BE49-F238E27FC236}">
-                <a16:creationId xmlns:a16="http://schemas.microsoft.com/office/drawing/2014/main" id="{4B10CB32-E0B7-C920-76B8-A8BA9E41829F}"/>
+                <a16:creationId xmlns:a16="http://schemas.microsoft.com/office/drawing/2014/main" id="{8E82BC70-9620-0471-4A49-86B31BDAFBB0}"/>
               </a:ext>
             </a:extLst>
           </p:cNvPr>
@@ -9207,7 +9774,7 @@
         </p:nvSpPr>
         <p:spPr>
           <a:xfrm>
-            <a:off x="558800" y="228600"/>
+            <a:off x="558800" y="330200"/>
             <a:ext cx="9906000" cy="369332"/>
           </a:xfrm>
           <a:prstGeom prst="rect">
@@ -9222,9 +9789,9 @@
           <a:lstStyle/>
           <a:p>
             <a:r>
-              <a:rPr lang="ru-RU" sz="2800" b="1">
-                <a:solidFill>
-                  <a:srgbClr val="FFFFFF"/>
+              <a:rPr lang="ru-RU" sz="2500" b="1">
+                <a:solidFill>
+                  <a:srgbClr val="1F3864"/>
                 </a:solidFill>
                 <a:latin typeface="Times New Roman" panose="02020603050405020304" pitchFamily="18" charset="0"/>
               </a:rPr>
@@ -9238,7 +9805,7 @@
           <p:cNvPr id="5" name="TextBox 4">
             <a:extLst>
               <a:ext uri="{FF2B5EF4-FFF2-40B4-BE49-F238E27FC236}">
-                <a16:creationId xmlns:a16="http://schemas.microsoft.com/office/drawing/2014/main" id="{63C9BBBD-89C2-B770-8B3A-B45EAC541C63}"/>
+                <a16:creationId xmlns:a16="http://schemas.microsoft.com/office/drawing/2014/main" id="{98F371FE-D259-FE2D-5172-448D0360D367}"/>
               </a:ext>
             </a:extLst>
           </p:cNvPr>
@@ -9247,7 +9814,7 @@
         </p:nvSpPr>
         <p:spPr>
           <a:xfrm>
-            <a:off x="10617200" y="304800"/>
+            <a:off x="10617200" y="419100"/>
             <a:ext cx="1041400" cy="369332"/>
           </a:xfrm>
           <a:prstGeom prst="rect">
@@ -9263,9 +9830,9 @@
           <a:p>
             <a:pPr algn="r"/>
             <a:r>
-              <a:rPr lang="ru-RU" sz="1500">
-                <a:solidFill>
-                  <a:srgbClr val="C9BBDA"/>
+              <a:rPr lang="ru-RU" sz="1200">
+                <a:solidFill>
+                  <a:srgbClr val="595959"/>
                 </a:solidFill>
                 <a:latin typeface="Times New Roman" panose="02020603050405020304" pitchFamily="18" charset="0"/>
               </a:rPr>
@@ -9279,7 +9846,7 @@
           <p:cNvPr id="6" name="Прямоугольник 5">
             <a:extLst>
               <a:ext uri="{FF2B5EF4-FFF2-40B4-BE49-F238E27FC236}">
-                <a16:creationId xmlns:a16="http://schemas.microsoft.com/office/drawing/2014/main" id="{0061D382-1117-ABE7-14CA-55C406E65B53}"/>
+                <a16:creationId xmlns:a16="http://schemas.microsoft.com/office/drawing/2014/main" id="{E0B05F4F-AD6D-84D4-4A5B-E283B26AFDE3}"/>
               </a:ext>
             </a:extLst>
           </p:cNvPr>
@@ -9288,14 +9855,14 @@
         </p:nvSpPr>
         <p:spPr>
           <a:xfrm>
-            <a:off x="0" y="965200"/>
-            <a:ext cx="12192000" cy="76200"/>
+            <a:off x="558800" y="939800"/>
+            <a:ext cx="11074400" cy="12700"/>
           </a:xfrm>
           <a:prstGeom prst="rect">
             <a:avLst/>
           </a:prstGeom>
           <a:solidFill>
-            <a:srgbClr val="7C9070"/>
+            <a:srgbClr val="BFC7D1"/>
           </a:solidFill>
           <a:ln w="19050" cap="flat" cmpd="sng" algn="ctr">
             <a:noFill/>
@@ -9348,7 +9915,7 @@
             <a:hlinkClick r:id="" action="ppaction://media"/>
             <a:extLst>
               <a:ext uri="{FF2B5EF4-FFF2-40B4-BE49-F238E27FC236}">
-                <a16:creationId xmlns:a16="http://schemas.microsoft.com/office/drawing/2014/main" id="{28066A33-07CB-3959-36E0-93DE103D39FD}"/>
+                <a16:creationId xmlns:a16="http://schemas.microsoft.com/office/drawing/2014/main" id="{8D441C64-A811-86F1-6845-B4DBC619B45C}"/>
               </a:ext>
             </a:extLst>
           </p:cNvPr>
@@ -9378,9 +9945,9 @@
           <a:prstGeom prst="rect">
             <a:avLst/>
           </a:prstGeom>
-          <a:ln w="19050">
+          <a:ln w="12700">
             <a:solidFill>
-              <a:srgbClr val="5B4B6E"/>
+              <a:srgbClr val="1F3864"/>
             </a:solidFill>
           </a:ln>
         </p:spPr>
@@ -9390,7 +9957,7 @@
           <p:cNvPr id="8" name="TextBox 7">
             <a:extLst>
               <a:ext uri="{FF2B5EF4-FFF2-40B4-BE49-F238E27FC236}">
-                <a16:creationId xmlns:a16="http://schemas.microsoft.com/office/drawing/2014/main" id="{FD55F921-C462-4299-C059-6124DB2B7B2C}"/>
+                <a16:creationId xmlns:a16="http://schemas.microsoft.com/office/drawing/2014/main" id="{8374F320-0D3F-CFF8-1C76-A1E9BBA36BC0}"/>
               </a:ext>
             </a:extLst>
           </p:cNvPr>
@@ -9416,7 +9983,7 @@
             <a:r>
               <a:rPr lang="ru-RU" sz="1400">
                 <a:solidFill>
-                  <a:srgbClr val="6B6472"/>
+                  <a:srgbClr val="595959"/>
                 </a:solidFill>
                 <a:latin typeface="Times New Roman" panose="02020603050405020304" pitchFamily="18" charset="0"/>
               </a:rPr>
@@ -9430,7 +9997,7 @@
           <p:cNvPr id="9" name="TextBox 8">
             <a:extLst>
               <a:ext uri="{FF2B5EF4-FFF2-40B4-BE49-F238E27FC236}">
-                <a16:creationId xmlns:a16="http://schemas.microsoft.com/office/drawing/2014/main" id="{45BF58C3-7CEB-4B86-2F7D-BAB82C5D9E86}"/>
+                <a16:creationId xmlns:a16="http://schemas.microsoft.com/office/drawing/2014/main" id="{3033DAAC-6AB1-E72A-DDCC-193FF4C3A054}"/>
               </a:ext>
             </a:extLst>
           </p:cNvPr>
@@ -9464,7 +10031,7 @@
             <a:r>
               <a:rPr lang="ru-RU" sz="1500">
                 <a:solidFill>
-                  <a:srgbClr val="2B2233"/>
+                  <a:srgbClr val="262626"/>
                 </a:solidFill>
                 <a:latin typeface="Times New Roman" panose="02020603050405020304" pitchFamily="18" charset="0"/>
               </a:rPr>
@@ -9483,7 +10050,7 @@
             <a:r>
               <a:rPr lang="ru-RU" sz="1500">
                 <a:solidFill>
-                  <a:srgbClr val="2B2233"/>
+                  <a:srgbClr val="262626"/>
                 </a:solidFill>
                 <a:latin typeface="Times New Roman" panose="02020603050405020304" pitchFamily="18" charset="0"/>
               </a:rPr>
@@ -9502,7 +10069,7 @@
             <a:r>
               <a:rPr lang="ru-RU" sz="1500">
                 <a:solidFill>
-                  <a:srgbClr val="2B2233"/>
+                  <a:srgbClr val="262626"/>
                 </a:solidFill>
                 <a:latin typeface="Times New Roman" panose="02020603050405020304" pitchFamily="18" charset="0"/>
               </a:rPr>
@@ -9521,7 +10088,7 @@
             <a:r>
               <a:rPr lang="ru-RU" sz="1500">
                 <a:solidFill>
-                  <a:srgbClr val="2B2233"/>
+                  <a:srgbClr val="262626"/>
                 </a:solidFill>
                 <a:latin typeface="Times New Roman" panose="02020603050405020304" pitchFamily="18" charset="0"/>
               </a:rPr>
@@ -9540,7 +10107,7 @@
             <a:r>
               <a:rPr lang="ru-RU" sz="1500">
                 <a:solidFill>
-                  <a:srgbClr val="2B2233"/>
+                  <a:srgbClr val="262626"/>
                 </a:solidFill>
                 <a:latin typeface="Times New Roman" panose="02020603050405020304" pitchFamily="18" charset="0"/>
               </a:rPr>
@@ -9558,7 +10125,7 @@
             </a:pPr>
             <a:endParaRPr lang="ru-RU" sz="1500">
               <a:solidFill>
-                <a:srgbClr val="2B2233"/>
+                <a:srgbClr val="262626"/>
               </a:solidFill>
               <a:latin typeface="Times New Roman" panose="02020603050405020304" pitchFamily="18" charset="0"/>
             </a:endParaRPr>
@@ -9568,7 +10135,7 @@
     </p:spTree>
     <p:extLst>
       <p:ext uri="{BB962C8B-B14F-4D97-AF65-F5344CB8AC3E}">
-        <p14:creationId xmlns:p14="http://schemas.microsoft.com/office/powerpoint/2010/main" val="76454823"/>
+        <p14:creationId xmlns:p14="http://schemas.microsoft.com/office/powerpoint/2010/main" val="125700126"/>
       </p:ext>
     </p:extLst>
   </p:cSld>
@@ -9735,7 +10302,7 @@
           <p:cNvPr id="2" name="Прямоугольник 1">
             <a:extLst>
               <a:ext uri="{FF2B5EF4-FFF2-40B4-BE49-F238E27FC236}">
-                <a16:creationId xmlns:a16="http://schemas.microsoft.com/office/drawing/2014/main" id="{54B581C2-A3F7-4C04-53D3-8B4EC44B7978}"/>
+                <a16:creationId xmlns:a16="http://schemas.microsoft.com/office/drawing/2014/main" id="{AD493A26-05C9-B280-42FC-1BC05335E1A4}"/>
               </a:ext>
             </a:extLst>
           </p:cNvPr>
@@ -9751,7 +10318,7 @@
             <a:avLst/>
           </a:prstGeom>
           <a:solidFill>
-            <a:srgbClr val="F3EFF5"/>
+            <a:srgbClr val="FFFFFF"/>
           </a:solidFill>
           <a:ln w="19050" cap="flat" cmpd="sng" algn="ctr">
             <a:noFill/>
@@ -9803,7 +10370,7 @@
           <p:cNvPr id="3" name="Прямоугольник 2">
             <a:extLst>
               <a:ext uri="{FF2B5EF4-FFF2-40B4-BE49-F238E27FC236}">
-                <a16:creationId xmlns:a16="http://schemas.microsoft.com/office/drawing/2014/main" id="{138A70D2-4CA7-D8B1-7773-8BFCE3857996}"/>
+                <a16:creationId xmlns:a16="http://schemas.microsoft.com/office/drawing/2014/main" id="{48A5F4BC-B8DD-4D31-351C-3936F55628CD}"/>
               </a:ext>
             </a:extLst>
           </p:cNvPr>
@@ -9813,13 +10380,13 @@
         <p:spPr>
           <a:xfrm>
             <a:off x="0" y="0"/>
-            <a:ext cx="12192000" cy="101600"/>
+            <a:ext cx="12192000" cy="76200"/>
           </a:xfrm>
           <a:prstGeom prst="rect">
             <a:avLst/>
           </a:prstGeom>
           <a:solidFill>
-            <a:srgbClr val="5B4B6E"/>
+            <a:srgbClr val="1F3864"/>
           </a:solidFill>
           <a:ln w="19050" cap="flat" cmpd="sng" algn="ctr">
             <a:noFill/>
@@ -9871,7 +10438,7 @@
           <p:cNvPr id="4" name="TextBox 3">
             <a:extLst>
               <a:ext uri="{FF2B5EF4-FFF2-40B4-BE49-F238E27FC236}">
-                <a16:creationId xmlns:a16="http://schemas.microsoft.com/office/drawing/2014/main" id="{C1F95CDB-8F25-4779-1506-B31AF6AAC370}"/>
+                <a16:creationId xmlns:a16="http://schemas.microsoft.com/office/drawing/2014/main" id="{9ED9B29F-E274-04E7-B610-2B5CFE546544}"/>
               </a:ext>
             </a:extLst>
           </p:cNvPr>
@@ -9895,9 +10462,9 @@
           <a:lstStyle/>
           <a:p>
             <a:r>
-              <a:rPr lang="ru-RU" sz="3600" b="1">
-                <a:solidFill>
-                  <a:srgbClr val="5B4B6E"/>
+              <a:rPr lang="ru-RU" sz="3400" b="1">
+                <a:solidFill>
+                  <a:srgbClr val="1F3864"/>
                 </a:solidFill>
                 <a:latin typeface="Times New Roman" panose="02020603050405020304" pitchFamily="18" charset="0"/>
               </a:rPr>
@@ -9911,7 +10478,7 @@
           <p:cNvPr id="5" name="Прямоугольник 4">
             <a:extLst>
               <a:ext uri="{FF2B5EF4-FFF2-40B4-BE49-F238E27FC236}">
-                <a16:creationId xmlns:a16="http://schemas.microsoft.com/office/drawing/2014/main" id="{B5E43CB9-9C88-8756-A1D5-7B8D10BE33EA}"/>
+                <a16:creationId xmlns:a16="http://schemas.microsoft.com/office/drawing/2014/main" id="{97F994D6-B9F2-6048-2773-30F9092D65B0}"/>
               </a:ext>
             </a:extLst>
           </p:cNvPr>
@@ -9920,14 +10487,14 @@
         </p:nvSpPr>
         <p:spPr>
           <a:xfrm>
-            <a:off x="762000" y="3048000"/>
-            <a:ext cx="2540000" cy="50800"/>
+            <a:off x="762000" y="2971800"/>
+            <a:ext cx="10668000" cy="12700"/>
           </a:xfrm>
           <a:prstGeom prst="rect">
             <a:avLst/>
           </a:prstGeom>
           <a:solidFill>
-            <a:srgbClr val="7C9070"/>
+            <a:srgbClr val="BFC7D1"/>
           </a:solidFill>
           <a:ln w="19050" cap="flat" cmpd="sng" algn="ctr">
             <a:noFill/>
@@ -9979,7 +10546,7 @@
           <p:cNvPr id="6" name="TextBox 5">
             <a:extLst>
               <a:ext uri="{FF2B5EF4-FFF2-40B4-BE49-F238E27FC236}">
-                <a16:creationId xmlns:a16="http://schemas.microsoft.com/office/drawing/2014/main" id="{FCF62E3F-7906-4A69-3325-0A9FE0D5BF81}"/>
+                <a16:creationId xmlns:a16="http://schemas.microsoft.com/office/drawing/2014/main" id="{79DA76E6-2F04-F03F-E994-CFC324E4FB0A}"/>
               </a:ext>
             </a:extLst>
           </p:cNvPr>
@@ -9988,7 +10555,7 @@
         </p:nvSpPr>
         <p:spPr>
           <a:xfrm>
-            <a:off x="762000" y="3327400"/>
+            <a:off x="762000" y="3200400"/>
             <a:ext cx="10668000" cy="369332"/>
           </a:xfrm>
           <a:prstGeom prst="rect">
@@ -10003,9 +10570,9 @@
           <a:lstStyle/>
           <a:p>
             <a:r>
-              <a:rPr lang="ru-RU" sz="1900">
-                <a:solidFill>
-                  <a:srgbClr val="2B2233"/>
+              <a:rPr lang="ru-RU">
+                <a:solidFill>
+                  <a:srgbClr val="262626"/>
                 </a:solidFill>
                 <a:latin typeface="Times New Roman" panose="02020603050405020304" pitchFamily="18" charset="0"/>
               </a:rPr>
@@ -10016,10 +10583,78 @@
       </p:sp>
       <p:sp>
         <p:nvSpPr>
-          <p:cNvPr id="7" name="TextBox 6">
-            <a:extLst>
-              <a:ext uri="{FF2B5EF4-FFF2-40B4-BE49-F238E27FC236}">
-                <a16:creationId xmlns:a16="http://schemas.microsoft.com/office/drawing/2014/main" id="{E27FC511-8701-9B3B-4D82-1D9563E6DD8E}"/>
+          <p:cNvPr id="7" name="Прямоугольник 6">
+            <a:extLst>
+              <a:ext uri="{FF2B5EF4-FFF2-40B4-BE49-F238E27FC236}">
+                <a16:creationId xmlns:a16="http://schemas.microsoft.com/office/drawing/2014/main" id="{B8C82A99-16EA-4FB5-EC99-B814010BB29D}"/>
+              </a:ext>
+            </a:extLst>
+          </p:cNvPr>
+          <p:cNvSpPr/>
+          <p:nvPr/>
+        </p:nvSpPr>
+        <p:spPr>
+          <a:xfrm>
+            <a:off x="762000" y="4064000"/>
+            <a:ext cx="10668000" cy="12700"/>
+          </a:xfrm>
+          <a:prstGeom prst="rect">
+            <a:avLst/>
+          </a:prstGeom>
+          <a:solidFill>
+            <a:srgbClr val="BFC7D1"/>
+          </a:solidFill>
+          <a:ln w="19050" cap="flat" cmpd="sng" algn="ctr">
+            <a:noFill/>
+            <a:prstDash val="solid"/>
+            <a:miter lim="800000"/>
+          </a:ln>
+          <a:effectLst/>
+          <a:extLst>
+            <a:ext uri="{91240B29-F687-4F45-9708-019B960494DF}">
+              <a14:hiddenLine xmlns:a14="http://schemas.microsoft.com/office/drawing/2010/main" w="19050" cap="flat" cmpd="sng" algn="ctr">
+                <a:solidFill>
+                  <a:schemeClr val="accent1">
+                    <a:shade val="15000"/>
+                  </a:schemeClr>
+                </a:solidFill>
+                <a:prstDash val="solid"/>
+                <a:miter lim="800000"/>
+              </a14:hiddenLine>
+            </a:ext>
+          </a:extLst>
+        </p:spPr>
+        <p:style>
+          <a:lnRef idx="2">
+            <a:schemeClr val="accent1">
+              <a:shade val="15000"/>
+            </a:schemeClr>
+          </a:lnRef>
+          <a:fillRef idx="1">
+            <a:schemeClr val="accent1"/>
+          </a:fillRef>
+          <a:effectRef idx="0">
+            <a:schemeClr val="accent1"/>
+          </a:effectRef>
+          <a:fontRef idx="minor">
+            <a:schemeClr val="lt1"/>
+          </a:fontRef>
+        </p:style>
+        <p:txBody>
+          <a:bodyPr rtlCol="0" anchor="ctr"/>
+          <a:lstStyle/>
+          <a:p>
+            <a:pPr algn="ctr"/>
+            <a:endParaRPr lang="ru-RU"/>
+          </a:p>
+        </p:txBody>
+      </p:sp>
+      <p:sp>
+        <p:nvSpPr>
+          <p:cNvPr id="8" name="TextBox 7">
+            <a:extLst>
+              <a:ext uri="{FF2B5EF4-FFF2-40B4-BE49-F238E27FC236}">
+                <a16:creationId xmlns:a16="http://schemas.microsoft.com/office/drawing/2014/main" id="{A9477843-4F0B-AA22-8F75-426273F6E6D5}"/>
               </a:ext>
             </a:extLst>
           </p:cNvPr>
@@ -10028,7 +10663,7 @@
         </p:nvSpPr>
         <p:spPr>
           <a:xfrm>
-            <a:off x="762000" y="4191000"/>
+            <a:off x="762000" y="4267200"/>
             <a:ext cx="10668000" cy="369332"/>
           </a:xfrm>
           <a:prstGeom prst="rect">
@@ -10045,7 +10680,7 @@
             <a:r>
               <a:rPr lang="ru-RU" sz="1400">
                 <a:solidFill>
-                  <a:srgbClr val="6B6472"/>
+                  <a:srgbClr val="595959"/>
                 </a:solidFill>
                 <a:latin typeface="Times New Roman" panose="02020603050405020304" pitchFamily="18" charset="0"/>
               </a:rPr>
@@ -10056,10 +10691,10 @@
       </p:sp>
       <p:sp>
         <p:nvSpPr>
-          <p:cNvPr id="8" name="TextBox 7">
-            <a:extLst>
-              <a:ext uri="{FF2B5EF4-FFF2-40B4-BE49-F238E27FC236}">
-                <a16:creationId xmlns:a16="http://schemas.microsoft.com/office/drawing/2014/main" id="{1C79AB1C-AA61-B9B1-C785-8AAC193A5BB5}"/>
+          <p:cNvPr id="9" name="TextBox 8">
+            <a:extLst>
+              <a:ext uri="{FF2B5EF4-FFF2-40B4-BE49-F238E27FC236}">
+                <a16:creationId xmlns:a16="http://schemas.microsoft.com/office/drawing/2014/main" id="{5D54C66D-C9C3-2FF8-7736-4EAE1F7C98D3}"/>
               </a:ext>
             </a:extLst>
           </p:cNvPr>
@@ -10068,7 +10703,7 @@
         </p:nvSpPr>
         <p:spPr>
           <a:xfrm>
-            <a:off x="762000" y="4546600"/>
+            <a:off x="762000" y="4597400"/>
             <a:ext cx="10668000" cy="369332"/>
           </a:xfrm>
           <a:prstGeom prst="rect">
@@ -10085,7 +10720,7 @@
             <a:r>
               <a:rPr lang="ru-RU" sz="1400">
                 <a:solidFill>
-                  <a:srgbClr val="6B6472"/>
+                  <a:srgbClr val="595959"/>
                 </a:solidFill>
                 <a:latin typeface="Times New Roman" panose="02020603050405020304" pitchFamily="18" charset="0"/>
               </a:rPr>
@@ -10096,10 +10731,10 @@
       </p:sp>
       <p:sp>
         <p:nvSpPr>
-          <p:cNvPr id="9" name="TextBox 8">
-            <a:extLst>
-              <a:ext uri="{FF2B5EF4-FFF2-40B4-BE49-F238E27FC236}">
-                <a16:creationId xmlns:a16="http://schemas.microsoft.com/office/drawing/2014/main" id="{C5D1FE78-C601-BE83-153D-5C17C7E0F865}"/>
+          <p:cNvPr id="10" name="TextBox 9">
+            <a:extLst>
+              <a:ext uri="{FF2B5EF4-FFF2-40B4-BE49-F238E27FC236}">
+                <a16:creationId xmlns:a16="http://schemas.microsoft.com/office/drawing/2014/main" id="{ED0E117D-75DA-555D-F79E-9A570A226795}"/>
               </a:ext>
             </a:extLst>
           </p:cNvPr>
@@ -10125,7 +10760,7 @@
             <a:r>
               <a:rPr lang="ru-RU" sz="1400">
                 <a:solidFill>
-                  <a:srgbClr val="6B6472"/>
+                  <a:srgbClr val="595959"/>
                 </a:solidFill>
                 <a:latin typeface="Times New Roman" panose="02020603050405020304" pitchFamily="18" charset="0"/>
               </a:rPr>
@@ -10137,7 +10772,7 @@
     </p:spTree>
     <p:extLst>
       <p:ext uri="{BB962C8B-B14F-4D97-AF65-F5344CB8AC3E}">
-        <p14:creationId xmlns:p14="http://schemas.microsoft.com/office/powerpoint/2010/main" val="2016794373"/>
+        <p14:creationId xmlns:p14="http://schemas.microsoft.com/office/powerpoint/2010/main" val="2526166766"/>
       </p:ext>
     </p:extLst>
   </p:cSld>

--- a/Презентация к защите.pptx
+++ b/Презентация к защите.pptx
@@ -137,7 +137,7 @@
           <p:cNvPr id="2" name="Заголовок 1">
             <a:extLst>
               <a:ext uri="{FF2B5EF4-FFF2-40B4-BE49-F238E27FC236}">
-                <a16:creationId xmlns:a16="http://schemas.microsoft.com/office/drawing/2014/main" id="{9E79F873-883E-485C-708A-310CA3AD23C0}"/>
+                <a16:creationId xmlns:a16="http://schemas.microsoft.com/office/drawing/2014/main" id="{68864DB7-E98F-D9F8-394F-B9EA673AB5EE}"/>
               </a:ext>
             </a:extLst>
           </p:cNvPr>
@@ -174,7 +174,7 @@
           <p:cNvPr id="3" name="Подзаголовок 2">
             <a:extLst>
               <a:ext uri="{FF2B5EF4-FFF2-40B4-BE49-F238E27FC236}">
-                <a16:creationId xmlns:a16="http://schemas.microsoft.com/office/drawing/2014/main" id="{DDDEF493-AB9D-9291-815A-F125B008942A}"/>
+                <a16:creationId xmlns:a16="http://schemas.microsoft.com/office/drawing/2014/main" id="{2D1047A8-4971-6978-48D2-CF37DA2D6A26}"/>
               </a:ext>
             </a:extLst>
           </p:cNvPr>
@@ -244,7 +244,7 @@
           <p:cNvPr id="4" name="Дата 3">
             <a:extLst>
               <a:ext uri="{FF2B5EF4-FFF2-40B4-BE49-F238E27FC236}">
-                <a16:creationId xmlns:a16="http://schemas.microsoft.com/office/drawing/2014/main" id="{F9A88E01-D889-2E7E-5613-5AAE6D66B1B0}"/>
+                <a16:creationId xmlns:a16="http://schemas.microsoft.com/office/drawing/2014/main" id="{5F6F6E13-72CB-ABAD-6D62-460D5728D55C}"/>
               </a:ext>
             </a:extLst>
           </p:cNvPr>
@@ -260,7 +260,7 @@
           <a:bodyPr/>
           <a:lstStyle/>
           <a:p>
-            <a:fld id="{7BAD6063-D66D-4F58-8A32-E44A0675CB33}" type="datetimeFigureOut">
+            <a:fld id="{01FE08CB-9F15-41C7-84BD-B8E4C3B377BE}" type="datetimeFigureOut">
               <a:rPr lang="ru-RU" smtClean="0"/>
               <a:t>27.10.2026</a:t>
             </a:fld>
@@ -273,7 +273,7 @@
           <p:cNvPr id="5" name="Нижний колонтитул 4">
             <a:extLst>
               <a:ext uri="{FF2B5EF4-FFF2-40B4-BE49-F238E27FC236}">
-                <a16:creationId xmlns:a16="http://schemas.microsoft.com/office/drawing/2014/main" id="{C7084225-7991-A0B1-CB96-FF06E9F8A33B}"/>
+                <a16:creationId xmlns:a16="http://schemas.microsoft.com/office/drawing/2014/main" id="{DEF83C52-4BDA-1F0E-F6D4-4DEDCDBB8483}"/>
               </a:ext>
             </a:extLst>
           </p:cNvPr>
@@ -298,7 +298,7 @@
           <p:cNvPr id="6" name="Номер слайда 5">
             <a:extLst>
               <a:ext uri="{FF2B5EF4-FFF2-40B4-BE49-F238E27FC236}">
-                <a16:creationId xmlns:a16="http://schemas.microsoft.com/office/drawing/2014/main" id="{C3E3FDD2-6EB7-3EA4-2CE8-101F1928811D}"/>
+                <a16:creationId xmlns:a16="http://schemas.microsoft.com/office/drawing/2014/main" id="{199501A9-8B40-9774-CCD6-A673C12BBC5D}"/>
               </a:ext>
             </a:extLst>
           </p:cNvPr>
@@ -314,7 +314,7 @@
           <a:bodyPr/>
           <a:lstStyle/>
           <a:p>
-            <a:fld id="{3A9F79FB-524D-4E7F-9693-17EA8D6F72FA}" type="slidenum">
+            <a:fld id="{6D2D470A-CC0F-47D2-92C2-9A53BE3FE502}" type="slidenum">
               <a:rPr lang="ru-RU" smtClean="0"/>
               <a:t>‹#›</a:t>
             </a:fld>
@@ -325,7 +325,7 @@
     </p:spTree>
     <p:extLst>
       <p:ext uri="{BB962C8B-B14F-4D97-AF65-F5344CB8AC3E}">
-        <p14:creationId xmlns:p14="http://schemas.microsoft.com/office/powerpoint/2010/main" val="1232424027"/>
+        <p14:creationId xmlns:p14="http://schemas.microsoft.com/office/powerpoint/2010/main" val="3649050008"/>
       </p:ext>
     </p:extLst>
   </p:cSld>
@@ -357,7 +357,7 @@
           <p:cNvPr id="2" name="Заголовок 1">
             <a:extLst>
               <a:ext uri="{FF2B5EF4-FFF2-40B4-BE49-F238E27FC236}">
-                <a16:creationId xmlns:a16="http://schemas.microsoft.com/office/drawing/2014/main" id="{A5F3ED70-51D8-6810-5DF4-370E7D65C382}"/>
+                <a16:creationId xmlns:a16="http://schemas.microsoft.com/office/drawing/2014/main" id="{C88F8F2F-7B1C-96A9-C590-927403E78DEF}"/>
               </a:ext>
             </a:extLst>
           </p:cNvPr>
@@ -385,7 +385,7 @@
           <p:cNvPr id="3" name="Вертикальный текст 2">
             <a:extLst>
               <a:ext uri="{FF2B5EF4-FFF2-40B4-BE49-F238E27FC236}">
-                <a16:creationId xmlns:a16="http://schemas.microsoft.com/office/drawing/2014/main" id="{8CDFC2BB-AE05-645A-B68A-65201002C835}"/>
+                <a16:creationId xmlns:a16="http://schemas.microsoft.com/office/drawing/2014/main" id="{0E0FE6BE-8B1D-F20B-B8A8-C0B5B517BC84}"/>
               </a:ext>
             </a:extLst>
           </p:cNvPr>
@@ -442,7 +442,7 @@
           <p:cNvPr id="4" name="Дата 3">
             <a:extLst>
               <a:ext uri="{FF2B5EF4-FFF2-40B4-BE49-F238E27FC236}">
-                <a16:creationId xmlns:a16="http://schemas.microsoft.com/office/drawing/2014/main" id="{55184022-30E6-5C76-15B4-C0300F557D13}"/>
+                <a16:creationId xmlns:a16="http://schemas.microsoft.com/office/drawing/2014/main" id="{62078E91-452B-5557-384D-6AD0E431B6C8}"/>
               </a:ext>
             </a:extLst>
           </p:cNvPr>
@@ -458,7 +458,7 @@
           <a:bodyPr/>
           <a:lstStyle/>
           <a:p>
-            <a:fld id="{7BAD6063-D66D-4F58-8A32-E44A0675CB33}" type="datetimeFigureOut">
+            <a:fld id="{01FE08CB-9F15-41C7-84BD-B8E4C3B377BE}" type="datetimeFigureOut">
               <a:rPr lang="ru-RU" smtClean="0"/>
               <a:t>27.10.2026</a:t>
             </a:fld>
@@ -471,7 +471,7 @@
           <p:cNvPr id="5" name="Нижний колонтитул 4">
             <a:extLst>
               <a:ext uri="{FF2B5EF4-FFF2-40B4-BE49-F238E27FC236}">
-                <a16:creationId xmlns:a16="http://schemas.microsoft.com/office/drawing/2014/main" id="{741F3FF1-0A22-58C0-5499-D6B877B1EA95}"/>
+                <a16:creationId xmlns:a16="http://schemas.microsoft.com/office/drawing/2014/main" id="{326AE841-098D-1B80-1236-E6DCB566E037}"/>
               </a:ext>
             </a:extLst>
           </p:cNvPr>
@@ -496,7 +496,7 @@
           <p:cNvPr id="6" name="Номер слайда 5">
             <a:extLst>
               <a:ext uri="{FF2B5EF4-FFF2-40B4-BE49-F238E27FC236}">
-                <a16:creationId xmlns:a16="http://schemas.microsoft.com/office/drawing/2014/main" id="{5122BCC3-8E8A-1AED-42E0-DF8ECE096430}"/>
+                <a16:creationId xmlns:a16="http://schemas.microsoft.com/office/drawing/2014/main" id="{43689712-C9D9-1082-91DE-5FD4824847A1}"/>
               </a:ext>
             </a:extLst>
           </p:cNvPr>
@@ -512,7 +512,7 @@
           <a:bodyPr/>
           <a:lstStyle/>
           <a:p>
-            <a:fld id="{3A9F79FB-524D-4E7F-9693-17EA8D6F72FA}" type="slidenum">
+            <a:fld id="{6D2D470A-CC0F-47D2-92C2-9A53BE3FE502}" type="slidenum">
               <a:rPr lang="ru-RU" smtClean="0"/>
               <a:t>‹#›</a:t>
             </a:fld>
@@ -523,7 +523,7 @@
     </p:spTree>
     <p:extLst>
       <p:ext uri="{BB962C8B-B14F-4D97-AF65-F5344CB8AC3E}">
-        <p14:creationId xmlns:p14="http://schemas.microsoft.com/office/powerpoint/2010/main" val="3878260387"/>
+        <p14:creationId xmlns:p14="http://schemas.microsoft.com/office/powerpoint/2010/main" val="4169868242"/>
       </p:ext>
     </p:extLst>
   </p:cSld>
@@ -555,7 +555,7 @@
           <p:cNvPr id="2" name="Вертикальный заголовок 1">
             <a:extLst>
               <a:ext uri="{FF2B5EF4-FFF2-40B4-BE49-F238E27FC236}">
-                <a16:creationId xmlns:a16="http://schemas.microsoft.com/office/drawing/2014/main" id="{435752D4-CC9B-9193-254C-66020494AA83}"/>
+                <a16:creationId xmlns:a16="http://schemas.microsoft.com/office/drawing/2014/main" id="{5DF4A3A4-F48E-A682-EEAE-06345F50D579}"/>
               </a:ext>
             </a:extLst>
           </p:cNvPr>
@@ -588,7 +588,7 @@
           <p:cNvPr id="3" name="Вертикальный текст 2">
             <a:extLst>
               <a:ext uri="{FF2B5EF4-FFF2-40B4-BE49-F238E27FC236}">
-                <a16:creationId xmlns:a16="http://schemas.microsoft.com/office/drawing/2014/main" id="{FE239AC2-7A2F-92A6-789D-E0A0DA1D7569}"/>
+                <a16:creationId xmlns:a16="http://schemas.microsoft.com/office/drawing/2014/main" id="{6AC8703A-FE9F-AFA7-8C3B-59A16C4CF4D9}"/>
               </a:ext>
             </a:extLst>
           </p:cNvPr>
@@ -650,7 +650,7 @@
           <p:cNvPr id="4" name="Дата 3">
             <a:extLst>
               <a:ext uri="{FF2B5EF4-FFF2-40B4-BE49-F238E27FC236}">
-                <a16:creationId xmlns:a16="http://schemas.microsoft.com/office/drawing/2014/main" id="{8C92CAB0-9FD4-F1A1-D4B1-4F8BCB4E1882}"/>
+                <a16:creationId xmlns:a16="http://schemas.microsoft.com/office/drawing/2014/main" id="{432C742A-1036-B588-E8AB-3D15FD8A0EDF}"/>
               </a:ext>
             </a:extLst>
           </p:cNvPr>
@@ -666,7 +666,7 @@
           <a:bodyPr/>
           <a:lstStyle/>
           <a:p>
-            <a:fld id="{7BAD6063-D66D-4F58-8A32-E44A0675CB33}" type="datetimeFigureOut">
+            <a:fld id="{01FE08CB-9F15-41C7-84BD-B8E4C3B377BE}" type="datetimeFigureOut">
               <a:rPr lang="ru-RU" smtClean="0"/>
               <a:t>27.10.2026</a:t>
             </a:fld>
@@ -679,7 +679,7 @@
           <p:cNvPr id="5" name="Нижний колонтитул 4">
             <a:extLst>
               <a:ext uri="{FF2B5EF4-FFF2-40B4-BE49-F238E27FC236}">
-                <a16:creationId xmlns:a16="http://schemas.microsoft.com/office/drawing/2014/main" id="{581557AD-A424-E438-32BC-57F5EAED7EC9}"/>
+                <a16:creationId xmlns:a16="http://schemas.microsoft.com/office/drawing/2014/main" id="{7FA12898-EE81-C286-A46E-5AF323E20A45}"/>
               </a:ext>
             </a:extLst>
           </p:cNvPr>
@@ -704,7 +704,7 @@
           <p:cNvPr id="6" name="Номер слайда 5">
             <a:extLst>
               <a:ext uri="{FF2B5EF4-FFF2-40B4-BE49-F238E27FC236}">
-                <a16:creationId xmlns:a16="http://schemas.microsoft.com/office/drawing/2014/main" id="{9E1C3701-3FF1-4A0A-EEFF-CEFDEF590E82}"/>
+                <a16:creationId xmlns:a16="http://schemas.microsoft.com/office/drawing/2014/main" id="{8AB24E85-DAB5-7076-1DE9-751F08B299DC}"/>
               </a:ext>
             </a:extLst>
           </p:cNvPr>
@@ -720,7 +720,7 @@
           <a:bodyPr/>
           <a:lstStyle/>
           <a:p>
-            <a:fld id="{3A9F79FB-524D-4E7F-9693-17EA8D6F72FA}" type="slidenum">
+            <a:fld id="{6D2D470A-CC0F-47D2-92C2-9A53BE3FE502}" type="slidenum">
               <a:rPr lang="ru-RU" smtClean="0"/>
               <a:t>‹#›</a:t>
             </a:fld>
@@ -731,7 +731,7 @@
     </p:spTree>
     <p:extLst>
       <p:ext uri="{BB962C8B-B14F-4D97-AF65-F5344CB8AC3E}">
-        <p14:creationId xmlns:p14="http://schemas.microsoft.com/office/powerpoint/2010/main" val="296654259"/>
+        <p14:creationId xmlns:p14="http://schemas.microsoft.com/office/powerpoint/2010/main" val="3390180313"/>
       </p:ext>
     </p:extLst>
   </p:cSld>
@@ -763,7 +763,7 @@
           <p:cNvPr id="2" name="Заголовок 1">
             <a:extLst>
               <a:ext uri="{FF2B5EF4-FFF2-40B4-BE49-F238E27FC236}">
-                <a16:creationId xmlns:a16="http://schemas.microsoft.com/office/drawing/2014/main" id="{48A916DB-EF19-AB56-FF28-F250ABF5973D}"/>
+                <a16:creationId xmlns:a16="http://schemas.microsoft.com/office/drawing/2014/main" id="{48501818-910F-5824-D87B-C0CA78DD76A0}"/>
               </a:ext>
             </a:extLst>
           </p:cNvPr>
@@ -791,7 +791,7 @@
           <p:cNvPr id="3" name="Объект 2">
             <a:extLst>
               <a:ext uri="{FF2B5EF4-FFF2-40B4-BE49-F238E27FC236}">
-                <a16:creationId xmlns:a16="http://schemas.microsoft.com/office/drawing/2014/main" id="{C1B59425-66A1-7709-53C7-8A8A086D1A3C}"/>
+                <a16:creationId xmlns:a16="http://schemas.microsoft.com/office/drawing/2014/main" id="{FB113BA4-AC79-0B0B-CB20-8B3008387A91}"/>
               </a:ext>
             </a:extLst>
           </p:cNvPr>
@@ -848,7 +848,7 @@
           <p:cNvPr id="4" name="Дата 3">
             <a:extLst>
               <a:ext uri="{FF2B5EF4-FFF2-40B4-BE49-F238E27FC236}">
-                <a16:creationId xmlns:a16="http://schemas.microsoft.com/office/drawing/2014/main" id="{C654CE85-0BD7-15FB-E3D0-76C09AC079CF}"/>
+                <a16:creationId xmlns:a16="http://schemas.microsoft.com/office/drawing/2014/main" id="{DAFC3363-7207-F694-339B-3BB835739A4F}"/>
               </a:ext>
             </a:extLst>
           </p:cNvPr>
@@ -864,7 +864,7 @@
           <a:bodyPr/>
           <a:lstStyle/>
           <a:p>
-            <a:fld id="{7BAD6063-D66D-4F58-8A32-E44A0675CB33}" type="datetimeFigureOut">
+            <a:fld id="{01FE08CB-9F15-41C7-84BD-B8E4C3B377BE}" type="datetimeFigureOut">
               <a:rPr lang="ru-RU" smtClean="0"/>
               <a:t>27.10.2026</a:t>
             </a:fld>
@@ -877,7 +877,7 @@
           <p:cNvPr id="5" name="Нижний колонтитул 4">
             <a:extLst>
               <a:ext uri="{FF2B5EF4-FFF2-40B4-BE49-F238E27FC236}">
-                <a16:creationId xmlns:a16="http://schemas.microsoft.com/office/drawing/2014/main" id="{BFEDA04E-25A7-B9DD-3C70-44E2A0F529FC}"/>
+                <a16:creationId xmlns:a16="http://schemas.microsoft.com/office/drawing/2014/main" id="{52FC0A63-03AF-1AF2-948C-69322715B8A9}"/>
               </a:ext>
             </a:extLst>
           </p:cNvPr>
@@ -902,7 +902,7 @@
           <p:cNvPr id="6" name="Номер слайда 5">
             <a:extLst>
               <a:ext uri="{FF2B5EF4-FFF2-40B4-BE49-F238E27FC236}">
-                <a16:creationId xmlns:a16="http://schemas.microsoft.com/office/drawing/2014/main" id="{093C1AB1-199E-A41C-B325-445C3C5707DE}"/>
+                <a16:creationId xmlns:a16="http://schemas.microsoft.com/office/drawing/2014/main" id="{065BFFF9-7B7E-44F8-D894-3708F0BAFF87}"/>
               </a:ext>
             </a:extLst>
           </p:cNvPr>
@@ -918,7 +918,7 @@
           <a:bodyPr/>
           <a:lstStyle/>
           <a:p>
-            <a:fld id="{3A9F79FB-524D-4E7F-9693-17EA8D6F72FA}" type="slidenum">
+            <a:fld id="{6D2D470A-CC0F-47D2-92C2-9A53BE3FE502}" type="slidenum">
               <a:rPr lang="ru-RU" smtClean="0"/>
               <a:t>‹#›</a:t>
             </a:fld>
@@ -929,7 +929,7 @@
     </p:spTree>
     <p:extLst>
       <p:ext uri="{BB962C8B-B14F-4D97-AF65-F5344CB8AC3E}">
-        <p14:creationId xmlns:p14="http://schemas.microsoft.com/office/powerpoint/2010/main" val="2090315508"/>
+        <p14:creationId xmlns:p14="http://schemas.microsoft.com/office/powerpoint/2010/main" val="596247446"/>
       </p:ext>
     </p:extLst>
   </p:cSld>
@@ -961,7 +961,7 @@
           <p:cNvPr id="2" name="Заголовок 1">
             <a:extLst>
               <a:ext uri="{FF2B5EF4-FFF2-40B4-BE49-F238E27FC236}">
-                <a16:creationId xmlns:a16="http://schemas.microsoft.com/office/drawing/2014/main" id="{EF1F66E3-0F37-4F34-49AB-4A953BD1AF88}"/>
+                <a16:creationId xmlns:a16="http://schemas.microsoft.com/office/drawing/2014/main" id="{79FAC5E0-7D06-28AF-ED65-65C04BB93636}"/>
               </a:ext>
             </a:extLst>
           </p:cNvPr>
@@ -998,7 +998,7 @@
           <p:cNvPr id="3" name="Текст 2">
             <a:extLst>
               <a:ext uri="{FF2B5EF4-FFF2-40B4-BE49-F238E27FC236}">
-                <a16:creationId xmlns:a16="http://schemas.microsoft.com/office/drawing/2014/main" id="{AA92A951-F7F4-65C4-72C1-9960D52A3C5D}"/>
+                <a16:creationId xmlns:a16="http://schemas.microsoft.com/office/drawing/2014/main" id="{652D3D69-BA85-F4C6-59BD-22A114CB5E50}"/>
               </a:ext>
             </a:extLst>
           </p:cNvPr>
@@ -1123,7 +1123,7 @@
           <p:cNvPr id="4" name="Дата 3">
             <a:extLst>
               <a:ext uri="{FF2B5EF4-FFF2-40B4-BE49-F238E27FC236}">
-                <a16:creationId xmlns:a16="http://schemas.microsoft.com/office/drawing/2014/main" id="{8FC03E25-6C34-ACBC-C7CB-F55878BE29FC}"/>
+                <a16:creationId xmlns:a16="http://schemas.microsoft.com/office/drawing/2014/main" id="{8932F69F-B937-4B45-FDA6-EBF72F441547}"/>
               </a:ext>
             </a:extLst>
           </p:cNvPr>
@@ -1139,7 +1139,7 @@
           <a:bodyPr/>
           <a:lstStyle/>
           <a:p>
-            <a:fld id="{7BAD6063-D66D-4F58-8A32-E44A0675CB33}" type="datetimeFigureOut">
+            <a:fld id="{01FE08CB-9F15-41C7-84BD-B8E4C3B377BE}" type="datetimeFigureOut">
               <a:rPr lang="ru-RU" smtClean="0"/>
               <a:t>27.10.2026</a:t>
             </a:fld>
@@ -1152,7 +1152,7 @@
           <p:cNvPr id="5" name="Нижний колонтитул 4">
             <a:extLst>
               <a:ext uri="{FF2B5EF4-FFF2-40B4-BE49-F238E27FC236}">
-                <a16:creationId xmlns:a16="http://schemas.microsoft.com/office/drawing/2014/main" id="{F955FB39-133D-9500-F772-53040359BE6E}"/>
+                <a16:creationId xmlns:a16="http://schemas.microsoft.com/office/drawing/2014/main" id="{7BE37508-C4B8-4FD8-FD9A-E2797224BF15}"/>
               </a:ext>
             </a:extLst>
           </p:cNvPr>
@@ -1177,7 +1177,7 @@
           <p:cNvPr id="6" name="Номер слайда 5">
             <a:extLst>
               <a:ext uri="{FF2B5EF4-FFF2-40B4-BE49-F238E27FC236}">
-                <a16:creationId xmlns:a16="http://schemas.microsoft.com/office/drawing/2014/main" id="{0939D8F1-D2ED-717A-4699-DE4A57E6DFE3}"/>
+                <a16:creationId xmlns:a16="http://schemas.microsoft.com/office/drawing/2014/main" id="{983010CE-DF61-D97E-0892-42A91086AE3D}"/>
               </a:ext>
             </a:extLst>
           </p:cNvPr>
@@ -1193,7 +1193,7 @@
           <a:bodyPr/>
           <a:lstStyle/>
           <a:p>
-            <a:fld id="{3A9F79FB-524D-4E7F-9693-17EA8D6F72FA}" type="slidenum">
+            <a:fld id="{6D2D470A-CC0F-47D2-92C2-9A53BE3FE502}" type="slidenum">
               <a:rPr lang="ru-RU" smtClean="0"/>
               <a:t>‹#›</a:t>
             </a:fld>
@@ -1204,7 +1204,7 @@
     </p:spTree>
     <p:extLst>
       <p:ext uri="{BB962C8B-B14F-4D97-AF65-F5344CB8AC3E}">
-        <p14:creationId xmlns:p14="http://schemas.microsoft.com/office/powerpoint/2010/main" val="333849103"/>
+        <p14:creationId xmlns:p14="http://schemas.microsoft.com/office/powerpoint/2010/main" val="2609321559"/>
       </p:ext>
     </p:extLst>
   </p:cSld>
@@ -1236,7 +1236,7 @@
           <p:cNvPr id="2" name="Заголовок 1">
             <a:extLst>
               <a:ext uri="{FF2B5EF4-FFF2-40B4-BE49-F238E27FC236}">
-                <a16:creationId xmlns:a16="http://schemas.microsoft.com/office/drawing/2014/main" id="{D5E13A2E-7127-B9E7-7A94-D35CDEB9894B}"/>
+                <a16:creationId xmlns:a16="http://schemas.microsoft.com/office/drawing/2014/main" id="{1C5EF820-281C-180B-8413-CD167B13C684}"/>
               </a:ext>
             </a:extLst>
           </p:cNvPr>
@@ -1264,7 +1264,7 @@
           <p:cNvPr id="3" name="Объект 2">
             <a:extLst>
               <a:ext uri="{FF2B5EF4-FFF2-40B4-BE49-F238E27FC236}">
-                <a16:creationId xmlns:a16="http://schemas.microsoft.com/office/drawing/2014/main" id="{F8B139C2-DF83-9413-14BE-7478676140FE}"/>
+                <a16:creationId xmlns:a16="http://schemas.microsoft.com/office/drawing/2014/main" id="{D889CBAA-D36D-A866-9186-7CFD558B241B}"/>
               </a:ext>
             </a:extLst>
           </p:cNvPr>
@@ -1326,7 +1326,7 @@
           <p:cNvPr id="4" name="Объект 3">
             <a:extLst>
               <a:ext uri="{FF2B5EF4-FFF2-40B4-BE49-F238E27FC236}">
-                <a16:creationId xmlns:a16="http://schemas.microsoft.com/office/drawing/2014/main" id="{7EF847C0-F169-7F92-813B-AB3E01DF5159}"/>
+                <a16:creationId xmlns:a16="http://schemas.microsoft.com/office/drawing/2014/main" id="{C9A13E5F-BA73-C561-0CCD-FB2B6E93DA9E}"/>
               </a:ext>
             </a:extLst>
           </p:cNvPr>
@@ -1388,7 +1388,7 @@
           <p:cNvPr id="5" name="Дата 4">
             <a:extLst>
               <a:ext uri="{FF2B5EF4-FFF2-40B4-BE49-F238E27FC236}">
-                <a16:creationId xmlns:a16="http://schemas.microsoft.com/office/drawing/2014/main" id="{2A6D3FDB-8DD8-991D-A878-2E2D339409B6}"/>
+                <a16:creationId xmlns:a16="http://schemas.microsoft.com/office/drawing/2014/main" id="{7975FDD0-4E1B-2E0D-89C1-90700E3A9774}"/>
               </a:ext>
             </a:extLst>
           </p:cNvPr>
@@ -1404,7 +1404,7 @@
           <a:bodyPr/>
           <a:lstStyle/>
           <a:p>
-            <a:fld id="{7BAD6063-D66D-4F58-8A32-E44A0675CB33}" type="datetimeFigureOut">
+            <a:fld id="{01FE08CB-9F15-41C7-84BD-B8E4C3B377BE}" type="datetimeFigureOut">
               <a:rPr lang="ru-RU" smtClean="0"/>
               <a:t>27.10.2026</a:t>
             </a:fld>
@@ -1417,7 +1417,7 @@
           <p:cNvPr id="6" name="Нижний колонтитул 5">
             <a:extLst>
               <a:ext uri="{FF2B5EF4-FFF2-40B4-BE49-F238E27FC236}">
-                <a16:creationId xmlns:a16="http://schemas.microsoft.com/office/drawing/2014/main" id="{816E3094-DB93-FE5C-E3CB-DB2B3378FAB1}"/>
+                <a16:creationId xmlns:a16="http://schemas.microsoft.com/office/drawing/2014/main" id="{850AB056-CC98-075F-01C9-233949D59238}"/>
               </a:ext>
             </a:extLst>
           </p:cNvPr>
@@ -1442,7 +1442,7 @@
           <p:cNvPr id="7" name="Номер слайда 6">
             <a:extLst>
               <a:ext uri="{FF2B5EF4-FFF2-40B4-BE49-F238E27FC236}">
-                <a16:creationId xmlns:a16="http://schemas.microsoft.com/office/drawing/2014/main" id="{D21C4EDA-D720-C041-D0DC-24011319BD1A}"/>
+                <a16:creationId xmlns:a16="http://schemas.microsoft.com/office/drawing/2014/main" id="{9B8BA3A2-49D8-A8FD-ABFC-CAB197735877}"/>
               </a:ext>
             </a:extLst>
           </p:cNvPr>
@@ -1458,7 +1458,7 @@
           <a:bodyPr/>
           <a:lstStyle/>
           <a:p>
-            <a:fld id="{3A9F79FB-524D-4E7F-9693-17EA8D6F72FA}" type="slidenum">
+            <a:fld id="{6D2D470A-CC0F-47D2-92C2-9A53BE3FE502}" type="slidenum">
               <a:rPr lang="ru-RU" smtClean="0"/>
               <a:t>‹#›</a:t>
             </a:fld>
@@ -1469,7 +1469,7 @@
     </p:spTree>
     <p:extLst>
       <p:ext uri="{BB962C8B-B14F-4D97-AF65-F5344CB8AC3E}">
-        <p14:creationId xmlns:p14="http://schemas.microsoft.com/office/powerpoint/2010/main" val="1578202779"/>
+        <p14:creationId xmlns:p14="http://schemas.microsoft.com/office/powerpoint/2010/main" val="1429218678"/>
       </p:ext>
     </p:extLst>
   </p:cSld>
@@ -1501,7 +1501,7 @@
           <p:cNvPr id="2" name="Заголовок 1">
             <a:extLst>
               <a:ext uri="{FF2B5EF4-FFF2-40B4-BE49-F238E27FC236}">
-                <a16:creationId xmlns:a16="http://schemas.microsoft.com/office/drawing/2014/main" id="{D4657275-A928-67BD-1813-C0D59F86FD57}"/>
+                <a16:creationId xmlns:a16="http://schemas.microsoft.com/office/drawing/2014/main" id="{862FC62C-B15A-7F24-C6C5-0B451D91E31D}"/>
               </a:ext>
             </a:extLst>
           </p:cNvPr>
@@ -1534,7 +1534,7 @@
           <p:cNvPr id="3" name="Текст 2">
             <a:extLst>
               <a:ext uri="{FF2B5EF4-FFF2-40B4-BE49-F238E27FC236}">
-                <a16:creationId xmlns:a16="http://schemas.microsoft.com/office/drawing/2014/main" id="{BA118B0F-3A44-8890-698E-6982ED78E560}"/>
+                <a16:creationId xmlns:a16="http://schemas.microsoft.com/office/drawing/2014/main" id="{7D322477-A139-F3BE-F208-97100283B297}"/>
               </a:ext>
             </a:extLst>
           </p:cNvPr>
@@ -1605,7 +1605,7 @@
           <p:cNvPr id="4" name="Объект 3">
             <a:extLst>
               <a:ext uri="{FF2B5EF4-FFF2-40B4-BE49-F238E27FC236}">
-                <a16:creationId xmlns:a16="http://schemas.microsoft.com/office/drawing/2014/main" id="{92A32894-04F6-1181-E281-1CDBFB5186D9}"/>
+                <a16:creationId xmlns:a16="http://schemas.microsoft.com/office/drawing/2014/main" id="{BD749BD1-BB31-9E1E-5534-896A413B2475}"/>
               </a:ext>
             </a:extLst>
           </p:cNvPr>
@@ -1667,7 +1667,7 @@
           <p:cNvPr id="5" name="Текст 4">
             <a:extLst>
               <a:ext uri="{FF2B5EF4-FFF2-40B4-BE49-F238E27FC236}">
-                <a16:creationId xmlns:a16="http://schemas.microsoft.com/office/drawing/2014/main" id="{97885DF0-9878-C966-7C7C-5613E0B36912}"/>
+                <a16:creationId xmlns:a16="http://schemas.microsoft.com/office/drawing/2014/main" id="{8D859A5C-3FA8-D704-17D6-6B34D8CDAA75}"/>
               </a:ext>
             </a:extLst>
           </p:cNvPr>
@@ -1738,7 +1738,7 @@
           <p:cNvPr id="6" name="Объект 5">
             <a:extLst>
               <a:ext uri="{FF2B5EF4-FFF2-40B4-BE49-F238E27FC236}">
-                <a16:creationId xmlns:a16="http://schemas.microsoft.com/office/drawing/2014/main" id="{72AEBB0C-E368-4435-CAAE-D791B7553419}"/>
+                <a16:creationId xmlns:a16="http://schemas.microsoft.com/office/drawing/2014/main" id="{D12357F3-6394-C38D-69C5-A90FCF79AF0C}"/>
               </a:ext>
             </a:extLst>
           </p:cNvPr>
@@ -1800,7 +1800,7 @@
           <p:cNvPr id="7" name="Дата 6">
             <a:extLst>
               <a:ext uri="{FF2B5EF4-FFF2-40B4-BE49-F238E27FC236}">
-                <a16:creationId xmlns:a16="http://schemas.microsoft.com/office/drawing/2014/main" id="{E135DFD5-0CDF-0FA2-1FAF-A39B1776858B}"/>
+                <a16:creationId xmlns:a16="http://schemas.microsoft.com/office/drawing/2014/main" id="{54723476-D857-B247-994E-FD6AFDFECCBC}"/>
               </a:ext>
             </a:extLst>
           </p:cNvPr>
@@ -1816,7 +1816,7 @@
           <a:bodyPr/>
           <a:lstStyle/>
           <a:p>
-            <a:fld id="{7BAD6063-D66D-4F58-8A32-E44A0675CB33}" type="datetimeFigureOut">
+            <a:fld id="{01FE08CB-9F15-41C7-84BD-B8E4C3B377BE}" type="datetimeFigureOut">
               <a:rPr lang="ru-RU" smtClean="0"/>
               <a:t>27.10.2026</a:t>
             </a:fld>
@@ -1829,7 +1829,7 @@
           <p:cNvPr id="8" name="Нижний колонтитул 7">
             <a:extLst>
               <a:ext uri="{FF2B5EF4-FFF2-40B4-BE49-F238E27FC236}">
-                <a16:creationId xmlns:a16="http://schemas.microsoft.com/office/drawing/2014/main" id="{FCF761D8-7809-B73B-0C34-C2FE9C05437A}"/>
+                <a16:creationId xmlns:a16="http://schemas.microsoft.com/office/drawing/2014/main" id="{B34F9D0F-A3E6-A1D3-B8C6-ECB59777F811}"/>
               </a:ext>
             </a:extLst>
           </p:cNvPr>
@@ -1854,7 +1854,7 @@
           <p:cNvPr id="9" name="Номер слайда 8">
             <a:extLst>
               <a:ext uri="{FF2B5EF4-FFF2-40B4-BE49-F238E27FC236}">
-                <a16:creationId xmlns:a16="http://schemas.microsoft.com/office/drawing/2014/main" id="{D7EB007E-262A-67E9-83D2-73BCB3E58F5B}"/>
+                <a16:creationId xmlns:a16="http://schemas.microsoft.com/office/drawing/2014/main" id="{A9373E40-A6EF-8144-E6AF-7EB1A0D7D68A}"/>
               </a:ext>
             </a:extLst>
           </p:cNvPr>
@@ -1870,7 +1870,7 @@
           <a:bodyPr/>
           <a:lstStyle/>
           <a:p>
-            <a:fld id="{3A9F79FB-524D-4E7F-9693-17EA8D6F72FA}" type="slidenum">
+            <a:fld id="{6D2D470A-CC0F-47D2-92C2-9A53BE3FE502}" type="slidenum">
               <a:rPr lang="ru-RU" smtClean="0"/>
               <a:t>‹#›</a:t>
             </a:fld>
@@ -1881,7 +1881,7 @@
     </p:spTree>
     <p:extLst>
       <p:ext uri="{BB962C8B-B14F-4D97-AF65-F5344CB8AC3E}">
-        <p14:creationId xmlns:p14="http://schemas.microsoft.com/office/powerpoint/2010/main" val="320858598"/>
+        <p14:creationId xmlns:p14="http://schemas.microsoft.com/office/powerpoint/2010/main" val="3740967945"/>
       </p:ext>
     </p:extLst>
   </p:cSld>
@@ -1913,7 +1913,7 @@
           <p:cNvPr id="2" name="Заголовок 1">
             <a:extLst>
               <a:ext uri="{FF2B5EF4-FFF2-40B4-BE49-F238E27FC236}">
-                <a16:creationId xmlns:a16="http://schemas.microsoft.com/office/drawing/2014/main" id="{D4C72D41-EACF-1826-55B8-E723BFE17C93}"/>
+                <a16:creationId xmlns:a16="http://schemas.microsoft.com/office/drawing/2014/main" id="{2963BAED-751A-B115-636C-28869475EDD3}"/>
               </a:ext>
             </a:extLst>
           </p:cNvPr>
@@ -1941,7 +1941,7 @@
           <p:cNvPr id="3" name="Дата 2">
             <a:extLst>
               <a:ext uri="{FF2B5EF4-FFF2-40B4-BE49-F238E27FC236}">
-                <a16:creationId xmlns:a16="http://schemas.microsoft.com/office/drawing/2014/main" id="{06A24B9C-E603-40C3-D4F9-46B6798AA0C7}"/>
+                <a16:creationId xmlns:a16="http://schemas.microsoft.com/office/drawing/2014/main" id="{36B9B2BE-07A6-177D-CD09-7D89BE347AA9}"/>
               </a:ext>
             </a:extLst>
           </p:cNvPr>
@@ -1957,7 +1957,7 @@
           <a:bodyPr/>
           <a:lstStyle/>
           <a:p>
-            <a:fld id="{7BAD6063-D66D-4F58-8A32-E44A0675CB33}" type="datetimeFigureOut">
+            <a:fld id="{01FE08CB-9F15-41C7-84BD-B8E4C3B377BE}" type="datetimeFigureOut">
               <a:rPr lang="ru-RU" smtClean="0"/>
               <a:t>27.10.2026</a:t>
             </a:fld>
@@ -1970,7 +1970,7 @@
           <p:cNvPr id="4" name="Нижний колонтитул 3">
             <a:extLst>
               <a:ext uri="{FF2B5EF4-FFF2-40B4-BE49-F238E27FC236}">
-                <a16:creationId xmlns:a16="http://schemas.microsoft.com/office/drawing/2014/main" id="{362A5803-806E-A7C2-6297-209E162EA2DD}"/>
+                <a16:creationId xmlns:a16="http://schemas.microsoft.com/office/drawing/2014/main" id="{F90A5570-2C77-C6DE-D41C-EB776A0C3D99}"/>
               </a:ext>
             </a:extLst>
           </p:cNvPr>
@@ -1995,7 +1995,7 @@
           <p:cNvPr id="5" name="Номер слайда 4">
             <a:extLst>
               <a:ext uri="{FF2B5EF4-FFF2-40B4-BE49-F238E27FC236}">
-                <a16:creationId xmlns:a16="http://schemas.microsoft.com/office/drawing/2014/main" id="{4F2FB734-705C-FB27-6F46-9B06B5D72181}"/>
+                <a16:creationId xmlns:a16="http://schemas.microsoft.com/office/drawing/2014/main" id="{B4DC7563-C00E-1C4A-6020-9BEC0679A4FD}"/>
               </a:ext>
             </a:extLst>
           </p:cNvPr>
@@ -2011,7 +2011,7 @@
           <a:bodyPr/>
           <a:lstStyle/>
           <a:p>
-            <a:fld id="{3A9F79FB-524D-4E7F-9693-17EA8D6F72FA}" type="slidenum">
+            <a:fld id="{6D2D470A-CC0F-47D2-92C2-9A53BE3FE502}" type="slidenum">
               <a:rPr lang="ru-RU" smtClean="0"/>
               <a:t>‹#›</a:t>
             </a:fld>
@@ -2022,7 +2022,7 @@
     </p:spTree>
     <p:extLst>
       <p:ext uri="{BB962C8B-B14F-4D97-AF65-F5344CB8AC3E}">
-        <p14:creationId xmlns:p14="http://schemas.microsoft.com/office/powerpoint/2010/main" val="3039919092"/>
+        <p14:creationId xmlns:p14="http://schemas.microsoft.com/office/powerpoint/2010/main" val="3818705534"/>
       </p:ext>
     </p:extLst>
   </p:cSld>
@@ -2054,7 +2054,7 @@
           <p:cNvPr id="2" name="Дата 1">
             <a:extLst>
               <a:ext uri="{FF2B5EF4-FFF2-40B4-BE49-F238E27FC236}">
-                <a16:creationId xmlns:a16="http://schemas.microsoft.com/office/drawing/2014/main" id="{F72DFA6D-E27D-B31F-ACEE-80DB9C02F7F0}"/>
+                <a16:creationId xmlns:a16="http://schemas.microsoft.com/office/drawing/2014/main" id="{B40C98D4-788E-D177-ECC8-036F75A52431}"/>
               </a:ext>
             </a:extLst>
           </p:cNvPr>
@@ -2070,7 +2070,7 @@
           <a:bodyPr/>
           <a:lstStyle/>
           <a:p>
-            <a:fld id="{7BAD6063-D66D-4F58-8A32-E44A0675CB33}" type="datetimeFigureOut">
+            <a:fld id="{01FE08CB-9F15-41C7-84BD-B8E4C3B377BE}" type="datetimeFigureOut">
               <a:rPr lang="ru-RU" smtClean="0"/>
               <a:t>27.10.2026</a:t>
             </a:fld>
@@ -2083,7 +2083,7 @@
           <p:cNvPr id="3" name="Нижний колонтитул 2">
             <a:extLst>
               <a:ext uri="{FF2B5EF4-FFF2-40B4-BE49-F238E27FC236}">
-                <a16:creationId xmlns:a16="http://schemas.microsoft.com/office/drawing/2014/main" id="{2A6AB2DE-8042-2523-B619-821CDA6AB591}"/>
+                <a16:creationId xmlns:a16="http://schemas.microsoft.com/office/drawing/2014/main" id="{877508CB-F06F-92EC-DE74-6CC4C3A5DB01}"/>
               </a:ext>
             </a:extLst>
           </p:cNvPr>
@@ -2108,7 +2108,7 @@
           <p:cNvPr id="4" name="Номер слайда 3">
             <a:extLst>
               <a:ext uri="{FF2B5EF4-FFF2-40B4-BE49-F238E27FC236}">
-                <a16:creationId xmlns:a16="http://schemas.microsoft.com/office/drawing/2014/main" id="{DD5F3D64-74A3-14F4-9AFE-11A98BDE84B5}"/>
+                <a16:creationId xmlns:a16="http://schemas.microsoft.com/office/drawing/2014/main" id="{03026DCF-E3C2-D36D-9939-9736137FC4EA}"/>
               </a:ext>
             </a:extLst>
           </p:cNvPr>
@@ -2124,7 +2124,7 @@
           <a:bodyPr/>
           <a:lstStyle/>
           <a:p>
-            <a:fld id="{3A9F79FB-524D-4E7F-9693-17EA8D6F72FA}" type="slidenum">
+            <a:fld id="{6D2D470A-CC0F-47D2-92C2-9A53BE3FE502}" type="slidenum">
               <a:rPr lang="ru-RU" smtClean="0"/>
               <a:t>‹#›</a:t>
             </a:fld>
@@ -2135,7 +2135,7 @@
     </p:spTree>
     <p:extLst>
       <p:ext uri="{BB962C8B-B14F-4D97-AF65-F5344CB8AC3E}">
-        <p14:creationId xmlns:p14="http://schemas.microsoft.com/office/powerpoint/2010/main" val="3427776546"/>
+        <p14:creationId xmlns:p14="http://schemas.microsoft.com/office/powerpoint/2010/main" val="390021405"/>
       </p:ext>
     </p:extLst>
   </p:cSld>
@@ -2167,7 +2167,7 @@
           <p:cNvPr id="2" name="Заголовок 1">
             <a:extLst>
               <a:ext uri="{FF2B5EF4-FFF2-40B4-BE49-F238E27FC236}">
-                <a16:creationId xmlns:a16="http://schemas.microsoft.com/office/drawing/2014/main" id="{125033D0-A31B-C3A4-2E8E-2C232EEF1AF6}"/>
+                <a16:creationId xmlns:a16="http://schemas.microsoft.com/office/drawing/2014/main" id="{20DEDBB0-926C-5F09-3F0C-6EBE567B7B8D}"/>
               </a:ext>
             </a:extLst>
           </p:cNvPr>
@@ -2204,7 +2204,7 @@
           <p:cNvPr id="3" name="Объект 2">
             <a:extLst>
               <a:ext uri="{FF2B5EF4-FFF2-40B4-BE49-F238E27FC236}">
-                <a16:creationId xmlns:a16="http://schemas.microsoft.com/office/drawing/2014/main" id="{AB422EDC-8062-2FBD-61B7-22A55F3E5A65}"/>
+                <a16:creationId xmlns:a16="http://schemas.microsoft.com/office/drawing/2014/main" id="{CBD2CA93-F365-A0D9-4634-B086169F0127}"/>
               </a:ext>
             </a:extLst>
           </p:cNvPr>
@@ -2294,7 +2294,7 @@
           <p:cNvPr id="4" name="Текст 3">
             <a:extLst>
               <a:ext uri="{FF2B5EF4-FFF2-40B4-BE49-F238E27FC236}">
-                <a16:creationId xmlns:a16="http://schemas.microsoft.com/office/drawing/2014/main" id="{121ED69D-500C-02B7-2764-8C88AEA1CCCA}"/>
+                <a16:creationId xmlns:a16="http://schemas.microsoft.com/office/drawing/2014/main" id="{1BF7119B-2EFE-7F2E-0E3C-E277EC66461F}"/>
               </a:ext>
             </a:extLst>
           </p:cNvPr>
@@ -2365,7 +2365,7 @@
           <p:cNvPr id="5" name="Дата 4">
             <a:extLst>
               <a:ext uri="{FF2B5EF4-FFF2-40B4-BE49-F238E27FC236}">
-                <a16:creationId xmlns:a16="http://schemas.microsoft.com/office/drawing/2014/main" id="{124AA9CE-42C4-23B8-DAD7-36996CF39B7F}"/>
+                <a16:creationId xmlns:a16="http://schemas.microsoft.com/office/drawing/2014/main" id="{6741066C-FB35-74B0-F8E1-CAB9FF603467}"/>
               </a:ext>
             </a:extLst>
           </p:cNvPr>
@@ -2381,7 +2381,7 @@
           <a:bodyPr/>
           <a:lstStyle/>
           <a:p>
-            <a:fld id="{7BAD6063-D66D-4F58-8A32-E44A0675CB33}" type="datetimeFigureOut">
+            <a:fld id="{01FE08CB-9F15-41C7-84BD-B8E4C3B377BE}" type="datetimeFigureOut">
               <a:rPr lang="ru-RU" smtClean="0"/>
               <a:t>27.10.2026</a:t>
             </a:fld>
@@ -2394,7 +2394,7 @@
           <p:cNvPr id="6" name="Нижний колонтитул 5">
             <a:extLst>
               <a:ext uri="{FF2B5EF4-FFF2-40B4-BE49-F238E27FC236}">
-                <a16:creationId xmlns:a16="http://schemas.microsoft.com/office/drawing/2014/main" id="{08223E49-75BC-9E72-DD8C-62389332FE06}"/>
+                <a16:creationId xmlns:a16="http://schemas.microsoft.com/office/drawing/2014/main" id="{CA660138-5CD4-4415-5550-8586C4B9C3CF}"/>
               </a:ext>
             </a:extLst>
           </p:cNvPr>
@@ -2419,7 +2419,7 @@
           <p:cNvPr id="7" name="Номер слайда 6">
             <a:extLst>
               <a:ext uri="{FF2B5EF4-FFF2-40B4-BE49-F238E27FC236}">
-                <a16:creationId xmlns:a16="http://schemas.microsoft.com/office/drawing/2014/main" id="{922847B9-3991-5D9D-4647-683A4C87C270}"/>
+                <a16:creationId xmlns:a16="http://schemas.microsoft.com/office/drawing/2014/main" id="{F5BF9895-4457-2936-A66A-D05879647297}"/>
               </a:ext>
             </a:extLst>
           </p:cNvPr>
@@ -2435,7 +2435,7 @@
           <a:bodyPr/>
           <a:lstStyle/>
           <a:p>
-            <a:fld id="{3A9F79FB-524D-4E7F-9693-17EA8D6F72FA}" type="slidenum">
+            <a:fld id="{6D2D470A-CC0F-47D2-92C2-9A53BE3FE502}" type="slidenum">
               <a:rPr lang="ru-RU" smtClean="0"/>
               <a:t>‹#›</a:t>
             </a:fld>
@@ -2446,7 +2446,7 @@
     </p:spTree>
     <p:extLst>
       <p:ext uri="{BB962C8B-B14F-4D97-AF65-F5344CB8AC3E}">
-        <p14:creationId xmlns:p14="http://schemas.microsoft.com/office/powerpoint/2010/main" val="1974111078"/>
+        <p14:creationId xmlns:p14="http://schemas.microsoft.com/office/powerpoint/2010/main" val="3839063867"/>
       </p:ext>
     </p:extLst>
   </p:cSld>
@@ -2478,7 +2478,7 @@
           <p:cNvPr id="2" name="Заголовок 1">
             <a:extLst>
               <a:ext uri="{FF2B5EF4-FFF2-40B4-BE49-F238E27FC236}">
-                <a16:creationId xmlns:a16="http://schemas.microsoft.com/office/drawing/2014/main" id="{AB3FD904-37D3-655C-E7BC-C5923C1745BF}"/>
+                <a16:creationId xmlns:a16="http://schemas.microsoft.com/office/drawing/2014/main" id="{F53BB6BB-3577-04A6-2460-B443359F388E}"/>
               </a:ext>
             </a:extLst>
           </p:cNvPr>
@@ -2515,7 +2515,7 @@
           <p:cNvPr id="3" name="Рисунок 2">
             <a:extLst>
               <a:ext uri="{FF2B5EF4-FFF2-40B4-BE49-F238E27FC236}">
-                <a16:creationId xmlns:a16="http://schemas.microsoft.com/office/drawing/2014/main" id="{2F543B67-4834-A374-D34D-0430907C3EAF}"/>
+                <a16:creationId xmlns:a16="http://schemas.microsoft.com/office/drawing/2014/main" id="{4625B818-06EA-0B78-ABDD-B707255D66E2}"/>
               </a:ext>
             </a:extLst>
           </p:cNvPr>
@@ -2582,7 +2582,7 @@
           <p:cNvPr id="4" name="Текст 3">
             <a:extLst>
               <a:ext uri="{FF2B5EF4-FFF2-40B4-BE49-F238E27FC236}">
-                <a16:creationId xmlns:a16="http://schemas.microsoft.com/office/drawing/2014/main" id="{A420C7B7-DDC8-BA3C-A2A5-A10C461E8684}"/>
+                <a16:creationId xmlns:a16="http://schemas.microsoft.com/office/drawing/2014/main" id="{4DC245A2-3457-8A80-D624-5C8A1286DF60}"/>
               </a:ext>
             </a:extLst>
           </p:cNvPr>
@@ -2653,7 +2653,7 @@
           <p:cNvPr id="5" name="Дата 4">
             <a:extLst>
               <a:ext uri="{FF2B5EF4-FFF2-40B4-BE49-F238E27FC236}">
-                <a16:creationId xmlns:a16="http://schemas.microsoft.com/office/drawing/2014/main" id="{BFCEE315-579A-657B-C262-BFA5AAE3F911}"/>
+                <a16:creationId xmlns:a16="http://schemas.microsoft.com/office/drawing/2014/main" id="{6B6AD96D-7B7F-81E4-C642-004DF900B4D5}"/>
               </a:ext>
             </a:extLst>
           </p:cNvPr>
@@ -2669,7 +2669,7 @@
           <a:bodyPr/>
           <a:lstStyle/>
           <a:p>
-            <a:fld id="{7BAD6063-D66D-4F58-8A32-E44A0675CB33}" type="datetimeFigureOut">
+            <a:fld id="{01FE08CB-9F15-41C7-84BD-B8E4C3B377BE}" type="datetimeFigureOut">
               <a:rPr lang="ru-RU" smtClean="0"/>
               <a:t>27.10.2026</a:t>
             </a:fld>
@@ -2682,7 +2682,7 @@
           <p:cNvPr id="6" name="Нижний колонтитул 5">
             <a:extLst>
               <a:ext uri="{FF2B5EF4-FFF2-40B4-BE49-F238E27FC236}">
-                <a16:creationId xmlns:a16="http://schemas.microsoft.com/office/drawing/2014/main" id="{DA24AFC0-2824-C03C-F48D-3EFE87EF05C7}"/>
+                <a16:creationId xmlns:a16="http://schemas.microsoft.com/office/drawing/2014/main" id="{95F0FDF2-287D-EEAC-C983-73009AF13363}"/>
               </a:ext>
             </a:extLst>
           </p:cNvPr>
@@ -2707,7 +2707,7 @@
           <p:cNvPr id="7" name="Номер слайда 6">
             <a:extLst>
               <a:ext uri="{FF2B5EF4-FFF2-40B4-BE49-F238E27FC236}">
-                <a16:creationId xmlns:a16="http://schemas.microsoft.com/office/drawing/2014/main" id="{D3238166-31DB-0D85-44F2-BBC7C4AA3B11}"/>
+                <a16:creationId xmlns:a16="http://schemas.microsoft.com/office/drawing/2014/main" id="{DA270CD3-9E26-3229-CB47-9C21816DAA88}"/>
               </a:ext>
             </a:extLst>
           </p:cNvPr>
@@ -2723,7 +2723,7 @@
           <a:bodyPr/>
           <a:lstStyle/>
           <a:p>
-            <a:fld id="{3A9F79FB-524D-4E7F-9693-17EA8D6F72FA}" type="slidenum">
+            <a:fld id="{6D2D470A-CC0F-47D2-92C2-9A53BE3FE502}" type="slidenum">
               <a:rPr lang="ru-RU" smtClean="0"/>
               <a:t>‹#›</a:t>
             </a:fld>
@@ -2734,7 +2734,7 @@
     </p:spTree>
     <p:extLst>
       <p:ext uri="{BB962C8B-B14F-4D97-AF65-F5344CB8AC3E}">
-        <p14:creationId xmlns:p14="http://schemas.microsoft.com/office/powerpoint/2010/main" val="1415914466"/>
+        <p14:creationId xmlns:p14="http://schemas.microsoft.com/office/powerpoint/2010/main" val="1210457191"/>
       </p:ext>
     </p:extLst>
   </p:cSld>
@@ -2771,7 +2771,7 @@
           <p:cNvPr id="2" name="Заголовок 1">
             <a:extLst>
               <a:ext uri="{FF2B5EF4-FFF2-40B4-BE49-F238E27FC236}">
-                <a16:creationId xmlns:a16="http://schemas.microsoft.com/office/drawing/2014/main" id="{677A0A5C-3BB7-5143-2B28-1B6106BFE505}"/>
+                <a16:creationId xmlns:a16="http://schemas.microsoft.com/office/drawing/2014/main" id="{DCEC6701-192D-27F9-AA38-F892031245D3}"/>
               </a:ext>
             </a:extLst>
           </p:cNvPr>
@@ -2809,7 +2809,7 @@
           <p:cNvPr id="3" name="Текст 2">
             <a:extLst>
               <a:ext uri="{FF2B5EF4-FFF2-40B4-BE49-F238E27FC236}">
-                <a16:creationId xmlns:a16="http://schemas.microsoft.com/office/drawing/2014/main" id="{2E6513AD-0CC9-9C30-CC58-066F97DA178B}"/>
+                <a16:creationId xmlns:a16="http://schemas.microsoft.com/office/drawing/2014/main" id="{138541CC-C5A0-3E98-4643-88F15D0C2B44}"/>
               </a:ext>
             </a:extLst>
           </p:cNvPr>
@@ -2876,7 +2876,7 @@
           <p:cNvPr id="4" name="Дата 3">
             <a:extLst>
               <a:ext uri="{FF2B5EF4-FFF2-40B4-BE49-F238E27FC236}">
-                <a16:creationId xmlns:a16="http://schemas.microsoft.com/office/drawing/2014/main" id="{AE243EF6-967A-E677-0652-DFACD4B1937F}"/>
+                <a16:creationId xmlns:a16="http://schemas.microsoft.com/office/drawing/2014/main" id="{12E44DF3-3729-3162-6991-A8F77A14F6B3}"/>
               </a:ext>
             </a:extLst>
           </p:cNvPr>
@@ -2910,7 +2910,7 @@
             </a:lvl1pPr>
           </a:lstStyle>
           <a:p>
-            <a:fld id="{7BAD6063-D66D-4F58-8A32-E44A0675CB33}" type="datetimeFigureOut">
+            <a:fld id="{01FE08CB-9F15-41C7-84BD-B8E4C3B377BE}" type="datetimeFigureOut">
               <a:rPr lang="ru-RU" smtClean="0"/>
               <a:t>27.10.2026</a:t>
             </a:fld>
@@ -2923,7 +2923,7 @@
           <p:cNvPr id="5" name="Нижний колонтитул 4">
             <a:extLst>
               <a:ext uri="{FF2B5EF4-FFF2-40B4-BE49-F238E27FC236}">
-                <a16:creationId xmlns:a16="http://schemas.microsoft.com/office/drawing/2014/main" id="{4D44ABB9-DDF5-B7A4-647F-2DD2923DB795}"/>
+                <a16:creationId xmlns:a16="http://schemas.microsoft.com/office/drawing/2014/main" id="{B2E852AC-B0F0-D375-419E-DB4182333AE0}"/>
               </a:ext>
             </a:extLst>
           </p:cNvPr>
@@ -2966,7 +2966,7 @@
           <p:cNvPr id="6" name="Номер слайда 5">
             <a:extLst>
               <a:ext uri="{FF2B5EF4-FFF2-40B4-BE49-F238E27FC236}">
-                <a16:creationId xmlns:a16="http://schemas.microsoft.com/office/drawing/2014/main" id="{21DD0BD4-806A-5205-A277-8BB405EE211C}"/>
+                <a16:creationId xmlns:a16="http://schemas.microsoft.com/office/drawing/2014/main" id="{AE2B258F-6C10-E6EC-113F-A8E0DF59508F}"/>
               </a:ext>
             </a:extLst>
           </p:cNvPr>
@@ -3000,7 +3000,7 @@
             </a:lvl1pPr>
           </a:lstStyle>
           <a:p>
-            <a:fld id="{3A9F79FB-524D-4E7F-9693-17EA8D6F72FA}" type="slidenum">
+            <a:fld id="{6D2D470A-CC0F-47D2-92C2-9A53BE3FE502}" type="slidenum">
               <a:rPr lang="ru-RU" smtClean="0"/>
               <a:t>‹#›</a:t>
             </a:fld>
@@ -3011,7 +3011,7 @@
     </p:spTree>
     <p:extLst>
       <p:ext uri="{BB962C8B-B14F-4D97-AF65-F5344CB8AC3E}">
-        <p14:creationId xmlns:p14="http://schemas.microsoft.com/office/powerpoint/2010/main" val="1956143132"/>
+        <p14:creationId xmlns:p14="http://schemas.microsoft.com/office/powerpoint/2010/main" val="3135165342"/>
       </p:ext>
     </p:extLst>
   </p:cSld>
@@ -3334,7 +3334,7 @@
           <p:cNvPr id="2" name="Прямоугольник 1">
             <a:extLst>
               <a:ext uri="{FF2B5EF4-FFF2-40B4-BE49-F238E27FC236}">
-                <a16:creationId xmlns:a16="http://schemas.microsoft.com/office/drawing/2014/main" id="{37ABD040-2CB7-7815-80BF-F023F9DBE6F3}"/>
+                <a16:creationId xmlns:a16="http://schemas.microsoft.com/office/drawing/2014/main" id="{9192A5E4-3D31-7D82-C6F4-AE88B72F58CA}"/>
               </a:ext>
             </a:extLst>
           </p:cNvPr>
@@ -3402,7 +3402,7 @@
           <p:cNvPr id="3" name="Прямоугольник 2">
             <a:extLst>
               <a:ext uri="{FF2B5EF4-FFF2-40B4-BE49-F238E27FC236}">
-                <a16:creationId xmlns:a16="http://schemas.microsoft.com/office/drawing/2014/main" id="{D31FD4B1-F228-C6D1-8302-FB7294B544FE}"/>
+                <a16:creationId xmlns:a16="http://schemas.microsoft.com/office/drawing/2014/main" id="{A586D8A5-3A94-61F7-8538-2343A8832BB0}"/>
               </a:ext>
             </a:extLst>
           </p:cNvPr>
@@ -3467,325 +3467,10 @@
       </p:sp>
       <p:sp>
         <p:nvSpPr>
-          <p:cNvPr id="4" name="TextBox 3">
-            <a:extLst>
-              <a:ext uri="{FF2B5EF4-FFF2-40B4-BE49-F238E27FC236}">
-                <a16:creationId xmlns:a16="http://schemas.microsoft.com/office/drawing/2014/main" id="{430A5457-889F-A012-26B9-3A5381D6C49E}"/>
-              </a:ext>
-            </a:extLst>
-          </p:cNvPr>
-          <p:cNvSpPr txBox="1"/>
-          <p:nvPr/>
-        </p:nvSpPr>
-        <p:spPr>
-          <a:xfrm>
-            <a:off x="762000" y="558800"/>
-            <a:ext cx="9652000" cy="369332"/>
-          </a:xfrm>
-          <a:prstGeom prst="rect">
-            <a:avLst/>
-          </a:prstGeom>
-          <a:noFill/>
-        </p:spPr>
-        <p:txBody>
-          <a:bodyPr vert="horz" wrap="square" lIns="0" tIns="0" rIns="0" bIns="0" rtlCol="0">
-            <a:noAutofit/>
-          </a:bodyPr>
-          <a:lstStyle/>
-          <a:p>
-            <a:pPr>
-              <a:lnSpc>
-                <a:spcPct val="115000"/>
-              </a:lnSpc>
-            </a:pPr>
-            <a:r>
-              <a:rPr lang="ru-RU" sz="1050">
-                <a:solidFill>
-                  <a:srgbClr val="5F6672"/>
-                </a:solidFill>
-                <a:latin typeface="Times New Roman" panose="02020603050405020304" pitchFamily="18" charset="0"/>
-              </a:rPr>
-              <a:t>Государственное профессиональное образовательное учреждение Ярославской области</a:t>
-            </a:r>
-          </a:p>
-        </p:txBody>
-      </p:sp>
-      <p:sp>
-        <p:nvSpPr>
-          <p:cNvPr id="5" name="TextBox 4">
-            <a:extLst>
-              <a:ext uri="{FF2B5EF4-FFF2-40B4-BE49-F238E27FC236}">
-                <a16:creationId xmlns:a16="http://schemas.microsoft.com/office/drawing/2014/main" id="{FFC63049-6752-E687-DE63-2F32270C8D9C}"/>
-              </a:ext>
-            </a:extLst>
-          </p:cNvPr>
-          <p:cNvSpPr txBox="1"/>
-          <p:nvPr/>
-        </p:nvSpPr>
-        <p:spPr>
-          <a:xfrm>
-            <a:off x="762000" y="812800"/>
-            <a:ext cx="9652000" cy="369332"/>
-          </a:xfrm>
-          <a:prstGeom prst="rect">
-            <a:avLst/>
-          </a:prstGeom>
-          <a:noFill/>
-        </p:spPr>
-        <p:txBody>
-          <a:bodyPr vert="horz" wrap="square" lIns="0" tIns="0" rIns="0" bIns="0" rtlCol="0">
-            <a:noAutofit/>
-          </a:bodyPr>
-          <a:lstStyle/>
-          <a:p>
-            <a:pPr>
-              <a:lnSpc>
-                <a:spcPct val="115000"/>
-              </a:lnSpc>
-            </a:pPr>
-            <a:r>
-              <a:rPr lang="ru-RU" sz="1500" b="1">
-                <a:solidFill>
-                  <a:srgbClr val="1F3864"/>
-                </a:solidFill>
-                <a:latin typeface="Times New Roman" panose="02020603050405020304" pitchFamily="18" charset="0"/>
-              </a:rPr>
-              <a:t>«Ярославский градостроительный колледж»</a:t>
-            </a:r>
-          </a:p>
-        </p:txBody>
-      </p:sp>
-      <p:sp>
-        <p:nvSpPr>
-          <p:cNvPr id="6" name="TextBox 5">
-            <a:extLst>
-              <a:ext uri="{FF2B5EF4-FFF2-40B4-BE49-F238E27FC236}">
-                <a16:creationId xmlns:a16="http://schemas.microsoft.com/office/drawing/2014/main" id="{64A7056D-B54A-43A3-337E-6160AA5FDE2D}"/>
-              </a:ext>
-            </a:extLst>
-          </p:cNvPr>
-          <p:cNvSpPr txBox="1"/>
-          <p:nvPr/>
-        </p:nvSpPr>
-        <p:spPr>
-          <a:xfrm>
-            <a:off x="762000" y="1168400"/>
-            <a:ext cx="9652000" cy="369332"/>
-          </a:xfrm>
-          <a:prstGeom prst="rect">
-            <a:avLst/>
-          </a:prstGeom>
-          <a:noFill/>
-        </p:spPr>
-        <p:txBody>
-          <a:bodyPr vert="horz" wrap="square" lIns="0" tIns="0" rIns="0" bIns="0" rtlCol="0">
-            <a:noAutofit/>
-          </a:bodyPr>
-          <a:lstStyle/>
-          <a:p>
-            <a:pPr>
-              <a:lnSpc>
-                <a:spcPct val="115000"/>
-              </a:lnSpc>
-            </a:pPr>
-            <a:r>
-              <a:rPr lang="ru-RU" sz="1050">
-                <a:solidFill>
-                  <a:srgbClr val="5F6672"/>
-                </a:solidFill>
-                <a:latin typeface="Times New Roman" panose="02020603050405020304" pitchFamily="18" charset="0"/>
-              </a:rPr>
-              <a:t>МДК 06.03 «Устройство и функционирование информационной системы»</a:t>
-            </a:r>
-          </a:p>
-        </p:txBody>
-      </p:sp>
-      <p:sp>
-        <p:nvSpPr>
-          <p:cNvPr id="7" name="TextBox 6">
-            <a:extLst>
-              <a:ext uri="{FF2B5EF4-FFF2-40B4-BE49-F238E27FC236}">
-                <a16:creationId xmlns:a16="http://schemas.microsoft.com/office/drawing/2014/main" id="{D9C930C3-E4C2-742B-431A-ADF62C5DC4DC}"/>
-              </a:ext>
-            </a:extLst>
-          </p:cNvPr>
-          <p:cNvSpPr txBox="1"/>
-          <p:nvPr/>
-        </p:nvSpPr>
-        <p:spPr>
-          <a:xfrm>
-            <a:off x="762000" y="1727200"/>
-            <a:ext cx="8890000" cy="369332"/>
-          </a:xfrm>
-          <a:prstGeom prst="rect">
-            <a:avLst/>
-          </a:prstGeom>
-          <a:noFill/>
-        </p:spPr>
-        <p:txBody>
-          <a:bodyPr vert="horz" wrap="square" lIns="0" tIns="0" rIns="0" bIns="0" rtlCol="0">
-            <a:noAutofit/>
-          </a:bodyPr>
-          <a:lstStyle/>
-          <a:p>
-            <a:pPr>
-              <a:lnSpc>
-                <a:spcPct val="115000"/>
-              </a:lnSpc>
-            </a:pPr>
-            <a:r>
-              <a:rPr lang="ru-RU" sz="1200" b="1">
-                <a:solidFill>
-                  <a:srgbClr val="8FA3BC"/>
-                </a:solidFill>
-                <a:latin typeface="Times New Roman" panose="02020603050405020304" pitchFamily="18" charset="0"/>
-              </a:rPr>
-              <a:t>ПРОЕКТНАЯ РАБОТА</a:t>
-            </a:r>
-          </a:p>
-        </p:txBody>
-      </p:sp>
-      <p:sp>
-        <p:nvSpPr>
-          <p:cNvPr id="8" name="TextBox 7">
-            <a:extLst>
-              <a:ext uri="{FF2B5EF4-FFF2-40B4-BE49-F238E27FC236}">
-                <a16:creationId xmlns:a16="http://schemas.microsoft.com/office/drawing/2014/main" id="{17391489-BB2E-7EF7-F239-BA80AB6F84C0}"/>
-              </a:ext>
-            </a:extLst>
-          </p:cNvPr>
-          <p:cNvSpPr txBox="1"/>
-          <p:nvPr/>
-        </p:nvSpPr>
-        <p:spPr>
-          <a:xfrm>
-            <a:off x="762000" y="2006600"/>
-            <a:ext cx="9398000" cy="381000"/>
-          </a:xfrm>
-          <a:prstGeom prst="rect">
-            <a:avLst/>
-          </a:prstGeom>
-          <a:noFill/>
-        </p:spPr>
-        <p:txBody>
-          <a:bodyPr vert="horz" wrap="square" lIns="0" tIns="0" rIns="0" bIns="0" rtlCol="0">
-            <a:noAutofit/>
-          </a:bodyPr>
-          <a:lstStyle/>
-          <a:p>
-            <a:pPr>
-              <a:lnSpc>
-                <a:spcPct val="115000"/>
-              </a:lnSpc>
-            </a:pPr>
-            <a:r>
-              <a:rPr lang="ru-RU" sz="2400" b="1">
-                <a:solidFill>
-                  <a:srgbClr val="1F3864"/>
-                </a:solidFill>
-                <a:latin typeface="Times New Roman" panose="02020603050405020304" pitchFamily="18" charset="0"/>
-              </a:rPr>
-              <a:t>Разработка информационной системы</a:t>
-            </a:r>
-          </a:p>
-        </p:txBody>
-      </p:sp>
-      <p:sp>
-        <p:nvSpPr>
-          <p:cNvPr id="9" name="TextBox 8">
-            <a:extLst>
-              <a:ext uri="{FF2B5EF4-FFF2-40B4-BE49-F238E27FC236}">
-                <a16:creationId xmlns:a16="http://schemas.microsoft.com/office/drawing/2014/main" id="{19FF1B20-D738-F9EF-30BE-3760682022F3}"/>
-              </a:ext>
-            </a:extLst>
-          </p:cNvPr>
-          <p:cNvSpPr txBox="1"/>
-          <p:nvPr/>
-        </p:nvSpPr>
-        <p:spPr>
-          <a:xfrm>
-            <a:off x="762000" y="2413000"/>
-            <a:ext cx="9398000" cy="369332"/>
-          </a:xfrm>
-          <a:prstGeom prst="rect">
-            <a:avLst/>
-          </a:prstGeom>
-          <a:noFill/>
-        </p:spPr>
-        <p:txBody>
-          <a:bodyPr vert="horz" wrap="square" lIns="0" tIns="0" rIns="0" bIns="0" rtlCol="0">
-            <a:noAutofit/>
-          </a:bodyPr>
-          <a:lstStyle/>
-          <a:p>
-            <a:pPr>
-              <a:lnSpc>
-                <a:spcPct val="115000"/>
-              </a:lnSpc>
-            </a:pPr>
-            <a:r>
-              <a:rPr lang="ru-RU" sz="3200" b="1">
-                <a:solidFill>
-                  <a:srgbClr val="1F3864"/>
-                </a:solidFill>
-                <a:latin typeface="Times New Roman" panose="02020603050405020304" pitchFamily="18" charset="0"/>
-              </a:rPr>
-              <a:t>«Учебные курсы»</a:t>
-            </a:r>
-          </a:p>
-        </p:txBody>
-      </p:sp>
-      <p:sp>
-        <p:nvSpPr>
-          <p:cNvPr id="10" name="TextBox 9">
-            <a:extLst>
-              <a:ext uri="{FF2B5EF4-FFF2-40B4-BE49-F238E27FC236}">
-                <a16:creationId xmlns:a16="http://schemas.microsoft.com/office/drawing/2014/main" id="{E8FF21C3-E52E-9F09-BB0D-58B9DEB5D52A}"/>
-              </a:ext>
-            </a:extLst>
-          </p:cNvPr>
-          <p:cNvSpPr txBox="1"/>
-          <p:nvPr/>
-        </p:nvSpPr>
-        <p:spPr>
-          <a:xfrm>
-            <a:off x="762000" y="3048000"/>
-            <a:ext cx="9144000" cy="369332"/>
-          </a:xfrm>
-          <a:prstGeom prst="rect">
-            <a:avLst/>
-          </a:prstGeom>
-          <a:noFill/>
-        </p:spPr>
-        <p:txBody>
-          <a:bodyPr vert="horz" wrap="square" lIns="0" tIns="0" rIns="0" bIns="0" rtlCol="0">
-            <a:noAutofit/>
-          </a:bodyPr>
-          <a:lstStyle/>
-          <a:p>
-            <a:pPr>
-              <a:lnSpc>
-                <a:spcPct val="115000"/>
-              </a:lnSpc>
-            </a:pPr>
-            <a:r>
-              <a:rPr lang="ru-RU" sz="1600">
-                <a:solidFill>
-                  <a:srgbClr val="262626"/>
-                </a:solidFill>
-                <a:latin typeface="Times New Roman" panose="02020603050405020304" pitchFamily="18" charset="0"/>
-              </a:rPr>
-              <a:t>для удалённого обучения школьников</a:t>
-            </a:r>
-          </a:p>
-        </p:txBody>
-      </p:sp>
-      <p:sp>
-        <p:nvSpPr>
-          <p:cNvPr id="11" name="Прямоугольник 10">
-            <a:extLst>
-              <a:ext uri="{FF2B5EF4-FFF2-40B4-BE49-F238E27FC236}">
-                <a16:creationId xmlns:a16="http://schemas.microsoft.com/office/drawing/2014/main" id="{7EBC2102-736E-3AD9-C3EF-8A7D4846FCC8}"/>
+          <p:cNvPr id="4" name="Прямоугольник 3">
+            <a:extLst>
+              <a:ext uri="{FF2B5EF4-FFF2-40B4-BE49-F238E27FC236}">
+                <a16:creationId xmlns:a16="http://schemas.microsoft.com/office/drawing/2014/main" id="{37D495DE-979E-DCFF-9D63-D6DB55683CD2}"/>
               </a:ext>
             </a:extLst>
           </p:cNvPr>
@@ -3794,8 +3479,8 @@
         </p:nvSpPr>
         <p:spPr>
           <a:xfrm>
-            <a:off x="762000" y="3657600"/>
-            <a:ext cx="1397000" cy="25400"/>
+            <a:off x="9525000" y="0"/>
+            <a:ext cx="2667000" cy="6858000"/>
           </a:xfrm>
           <a:prstGeom prst="rect">
             <a:avLst/>
@@ -3850,10 +3535,10 @@
       </p:sp>
       <p:sp>
         <p:nvSpPr>
-          <p:cNvPr id="12" name="TextBox 11">
-            <a:extLst>
-              <a:ext uri="{FF2B5EF4-FFF2-40B4-BE49-F238E27FC236}">
-                <a16:creationId xmlns:a16="http://schemas.microsoft.com/office/drawing/2014/main" id="{A6896652-0166-D836-3253-1C7A3FC6E9C4}"/>
+          <p:cNvPr id="5" name="TextBox 4">
+            <a:extLst>
+              <a:ext uri="{FF2B5EF4-FFF2-40B4-BE49-F238E27FC236}">
+                <a16:creationId xmlns:a16="http://schemas.microsoft.com/office/drawing/2014/main" id="{25BF21D6-6B0B-515B-2482-D31EC245BA5D}"/>
               </a:ext>
             </a:extLst>
           </p:cNvPr>
@@ -3862,8 +3547,8 @@
         </p:nvSpPr>
         <p:spPr>
           <a:xfrm>
-            <a:off x="762000" y="3886200"/>
-            <a:ext cx="4191000" cy="369332"/>
+            <a:off x="762000" y="508000"/>
+            <a:ext cx="8382000" cy="369332"/>
           </a:xfrm>
           <a:prstGeom prst="rect">
             <a:avLst/>
@@ -3882,23 +3567,23 @@
               </a:lnSpc>
             </a:pPr>
             <a:r>
-              <a:rPr lang="ru-RU" sz="950">
+              <a:rPr lang="ru-RU" sz="1000">
                 <a:solidFill>
                   <a:srgbClr val="5F6672"/>
                 </a:solidFill>
                 <a:latin typeface="Times New Roman" panose="02020603050405020304" pitchFamily="18" charset="0"/>
               </a:rPr>
-              <a:t>Выполнил студент группы ИС1-45</a:t>
-            </a:r>
-          </a:p>
-        </p:txBody>
-      </p:sp>
-      <p:sp>
-        <p:nvSpPr>
-          <p:cNvPr id="13" name="TextBox 12">
-            <a:extLst>
-              <a:ext uri="{FF2B5EF4-FFF2-40B4-BE49-F238E27FC236}">
-                <a16:creationId xmlns:a16="http://schemas.microsoft.com/office/drawing/2014/main" id="{3997A5E4-3ED1-319A-1BD2-D91AD3E578D0}"/>
+              <a:t>Государственное профессиональное образовательное учреждение Ярославской области</a:t>
+            </a:r>
+          </a:p>
+        </p:txBody>
+      </p:sp>
+      <p:sp>
+        <p:nvSpPr>
+          <p:cNvPr id="6" name="TextBox 5">
+            <a:extLst>
+              <a:ext uri="{FF2B5EF4-FFF2-40B4-BE49-F238E27FC236}">
+                <a16:creationId xmlns:a16="http://schemas.microsoft.com/office/drawing/2014/main" id="{D6A672B8-72DC-05A3-8F40-0BBB50B41134}"/>
               </a:ext>
             </a:extLst>
           </p:cNvPr>
@@ -3907,8 +3592,8 @@
         </p:nvSpPr>
         <p:spPr>
           <a:xfrm>
-            <a:off x="762000" y="4089400"/>
-            <a:ext cx="4191000" cy="369332"/>
+            <a:off x="762000" y="762000"/>
+            <a:ext cx="8382000" cy="369332"/>
           </a:xfrm>
           <a:prstGeom prst="rect">
             <a:avLst/>
@@ -3927,23 +3612,23 @@
               </a:lnSpc>
             </a:pPr>
             <a:r>
-              <a:rPr lang="ru-RU" sz="1700" b="1">
+              <a:rPr lang="ru-RU" sz="1400" b="1">
                 <a:solidFill>
                   <a:srgbClr val="1F3864"/>
                 </a:solidFill>
                 <a:latin typeface="Times New Roman" panose="02020603050405020304" pitchFamily="18" charset="0"/>
               </a:rPr>
-              <a:t>Матулов А. А.</a:t>
-            </a:r>
-          </a:p>
-        </p:txBody>
-      </p:sp>
-      <p:sp>
-        <p:nvSpPr>
-          <p:cNvPr id="14" name="TextBox 13">
-            <a:extLst>
-              <a:ext uri="{FF2B5EF4-FFF2-40B4-BE49-F238E27FC236}">
-                <a16:creationId xmlns:a16="http://schemas.microsoft.com/office/drawing/2014/main" id="{E70BF1AE-4DCA-CB73-B734-D352081B092F}"/>
+              <a:t>«Ярославский градостроительный колледж»</a:t>
+            </a:r>
+          </a:p>
+        </p:txBody>
+      </p:sp>
+      <p:sp>
+        <p:nvSpPr>
+          <p:cNvPr id="7" name="TextBox 6">
+            <a:extLst>
+              <a:ext uri="{FF2B5EF4-FFF2-40B4-BE49-F238E27FC236}">
+                <a16:creationId xmlns:a16="http://schemas.microsoft.com/office/drawing/2014/main" id="{01EF6AD8-3C36-B9E2-95F1-C9C206605C65}"/>
               </a:ext>
             </a:extLst>
           </p:cNvPr>
@@ -3952,8 +3637,8 @@
         </p:nvSpPr>
         <p:spPr>
           <a:xfrm>
-            <a:off x="5969000" y="3886200"/>
-            <a:ext cx="4191000" cy="369332"/>
+            <a:off x="762000" y="1117600"/>
+            <a:ext cx="8382000" cy="369332"/>
           </a:xfrm>
           <a:prstGeom prst="rect">
             <a:avLst/>
@@ -3972,68 +3657,23 @@
               </a:lnSpc>
             </a:pPr>
             <a:r>
-              <a:rPr lang="ru-RU" sz="950">
+              <a:rPr lang="ru-RU" sz="1000">
                 <a:solidFill>
                   <a:srgbClr val="5F6672"/>
                 </a:solidFill>
                 <a:latin typeface="Times New Roman" panose="02020603050405020304" pitchFamily="18" charset="0"/>
               </a:rPr>
-              <a:t>Руководитель</a:t>
-            </a:r>
-          </a:p>
-        </p:txBody>
-      </p:sp>
-      <p:sp>
-        <p:nvSpPr>
-          <p:cNvPr id="15" name="TextBox 14">
-            <a:extLst>
-              <a:ext uri="{FF2B5EF4-FFF2-40B4-BE49-F238E27FC236}">
-                <a16:creationId xmlns:a16="http://schemas.microsoft.com/office/drawing/2014/main" id="{5F9CF232-DC68-582E-C086-25FB72CFB57C}"/>
-              </a:ext>
-            </a:extLst>
-          </p:cNvPr>
-          <p:cNvSpPr txBox="1"/>
-          <p:nvPr/>
-        </p:nvSpPr>
-        <p:spPr>
-          <a:xfrm>
-            <a:off x="5969000" y="4089400"/>
-            <a:ext cx="4191000" cy="369332"/>
-          </a:xfrm>
-          <a:prstGeom prst="rect">
-            <a:avLst/>
-          </a:prstGeom>
-          <a:noFill/>
-        </p:spPr>
-        <p:txBody>
-          <a:bodyPr vert="horz" wrap="square" lIns="0" tIns="0" rIns="0" bIns="0" rtlCol="0">
-            <a:noAutofit/>
-          </a:bodyPr>
-          <a:lstStyle/>
-          <a:p>
-            <a:pPr>
-              <a:lnSpc>
-                <a:spcPct val="115000"/>
-              </a:lnSpc>
-            </a:pPr>
-            <a:r>
-              <a:rPr lang="ru-RU" sz="1700" b="1">
-                <a:solidFill>
-                  <a:srgbClr val="1F3864"/>
-                </a:solidFill>
-                <a:latin typeface="Times New Roman" panose="02020603050405020304" pitchFamily="18" charset="0"/>
-              </a:rPr>
-              <a:t>Васильченко М. О.</a:t>
-            </a:r>
-          </a:p>
-        </p:txBody>
-      </p:sp>
-      <p:sp>
-        <p:nvSpPr>
-          <p:cNvPr id="16" name="Прямоугольник 15">
-            <a:extLst>
-              <a:ext uri="{FF2B5EF4-FFF2-40B4-BE49-F238E27FC236}">
-                <a16:creationId xmlns:a16="http://schemas.microsoft.com/office/drawing/2014/main" id="{67340E7E-EB9A-3722-3C38-7E6AECD6E652}"/>
+              <a:t>МДК 06.03 «Устройство и функционирование информационной системы»</a:t>
+            </a:r>
+          </a:p>
+        </p:txBody>
+      </p:sp>
+      <p:sp>
+        <p:nvSpPr>
+          <p:cNvPr id="8" name="Прямоугольник 7">
+            <a:extLst>
+              <a:ext uri="{FF2B5EF4-FFF2-40B4-BE49-F238E27FC236}">
+                <a16:creationId xmlns:a16="http://schemas.microsoft.com/office/drawing/2014/main" id="{4258C1B9-033F-6B0E-BCF3-E29522D198EA}"/>
               </a:ext>
             </a:extLst>
           </p:cNvPr>
@@ -4042,8 +3682,8 @@
         </p:nvSpPr>
         <p:spPr>
           <a:xfrm>
-            <a:off x="0" y="5029200"/>
-            <a:ext cx="12192000" cy="1828800"/>
+            <a:off x="762000" y="1625600"/>
+            <a:ext cx="1143000" cy="25400"/>
           </a:xfrm>
           <a:prstGeom prst="rect">
             <a:avLst/>
@@ -4098,10 +3738,10 @@
       </p:sp>
       <p:sp>
         <p:nvSpPr>
-          <p:cNvPr id="17" name="TextBox 16">
-            <a:extLst>
-              <a:ext uri="{FF2B5EF4-FFF2-40B4-BE49-F238E27FC236}">
-                <a16:creationId xmlns:a16="http://schemas.microsoft.com/office/drawing/2014/main" id="{0EA51A41-F7A6-4BEB-E01D-C6CB9D27379F}"/>
+          <p:cNvPr id="9" name="TextBox 8">
+            <a:extLst>
+              <a:ext uri="{FF2B5EF4-FFF2-40B4-BE49-F238E27FC236}">
+                <a16:creationId xmlns:a16="http://schemas.microsoft.com/office/drawing/2014/main" id="{8FD9ED4E-E668-C086-6154-8CFBA0F1CCCC}"/>
               </a:ext>
             </a:extLst>
           </p:cNvPr>
@@ -4110,8 +3750,8 @@
         </p:nvSpPr>
         <p:spPr>
           <a:xfrm>
-            <a:off x="762000" y="5740400"/>
-            <a:ext cx="4064000" cy="369332"/>
+            <a:off x="762000" y="1905000"/>
+            <a:ext cx="8382000" cy="381000"/>
           </a:xfrm>
           <a:prstGeom prst="rect">
             <a:avLst/>
@@ -4130,23 +3770,23 @@
               </a:lnSpc>
             </a:pPr>
             <a:r>
-              <a:rPr lang="ru-RU" sz="1500">
-                <a:solidFill>
-                  <a:srgbClr val="FFFFFF"/>
+              <a:rPr lang="ru-RU" sz="2100" b="1">
+                <a:solidFill>
+                  <a:srgbClr val="1F3864"/>
                 </a:solidFill>
                 <a:latin typeface="Times New Roman" panose="02020603050405020304" pitchFamily="18" charset="0"/>
               </a:rPr>
-              <a:t>Ярославль, 2026</a:t>
-            </a:r>
-          </a:p>
-        </p:txBody>
-      </p:sp>
-      <p:sp>
-        <p:nvSpPr>
-          <p:cNvPr id="18" name="TextBox 17">
-            <a:extLst>
-              <a:ext uri="{FF2B5EF4-FFF2-40B4-BE49-F238E27FC236}">
-                <a16:creationId xmlns:a16="http://schemas.microsoft.com/office/drawing/2014/main" id="{19765B02-92B3-A35A-775C-95C75745C787}"/>
+              <a:t>Разработка информационной системы</a:t>
+            </a:r>
+          </a:p>
+        </p:txBody>
+      </p:sp>
+      <p:sp>
+        <p:nvSpPr>
+          <p:cNvPr id="10" name="TextBox 9">
+            <a:extLst>
+              <a:ext uri="{FF2B5EF4-FFF2-40B4-BE49-F238E27FC236}">
+                <a16:creationId xmlns:a16="http://schemas.microsoft.com/office/drawing/2014/main" id="{5B0301E6-C36B-1BE2-18DD-817BEE56EEEA}"/>
               </a:ext>
             </a:extLst>
           </p:cNvPr>
@@ -4155,8 +3795,8 @@
         </p:nvSpPr>
         <p:spPr>
           <a:xfrm>
-            <a:off x="8890000" y="5778500"/>
-            <a:ext cx="2540000" cy="369332"/>
+            <a:off x="762000" y="2286000"/>
+            <a:ext cx="8382000" cy="369332"/>
           </a:xfrm>
           <a:prstGeom prst="rect">
             <a:avLst/>
@@ -4169,19 +3809,402 @@
           </a:bodyPr>
           <a:lstStyle/>
           <a:p>
-            <a:pPr algn="r">
+            <a:pPr>
               <a:lnSpc>
                 <a:spcPct val="115000"/>
               </a:lnSpc>
             </a:pPr>
             <a:r>
-              <a:rPr lang="ru-RU" sz="1100">
-                <a:solidFill>
-                  <a:srgbClr val="D6DEE8"/>
+              <a:rPr lang="ru-RU" sz="3400" b="1">
+                <a:solidFill>
+                  <a:srgbClr val="1F3864"/>
                 </a:solidFill>
                 <a:latin typeface="Times New Roman" panose="02020603050405020304" pitchFamily="18" charset="0"/>
               </a:rPr>
-              <a:t>МДК 06.03</a:t>
+              <a:t>«Учебные курсы»</a:t>
+            </a:r>
+          </a:p>
+        </p:txBody>
+      </p:sp>
+      <p:sp>
+        <p:nvSpPr>
+          <p:cNvPr id="11" name="TextBox 10">
+            <a:extLst>
+              <a:ext uri="{FF2B5EF4-FFF2-40B4-BE49-F238E27FC236}">
+                <a16:creationId xmlns:a16="http://schemas.microsoft.com/office/drawing/2014/main" id="{19F45602-1F10-2A10-08FC-7512E91CDB1A}"/>
+              </a:ext>
+            </a:extLst>
+          </p:cNvPr>
+          <p:cNvSpPr txBox="1"/>
+          <p:nvPr/>
+        </p:nvSpPr>
+        <p:spPr>
+          <a:xfrm>
+            <a:off x="762000" y="3098800"/>
+            <a:ext cx="7874000" cy="369332"/>
+          </a:xfrm>
+          <a:prstGeom prst="rect">
+            <a:avLst/>
+          </a:prstGeom>
+          <a:noFill/>
+        </p:spPr>
+        <p:txBody>
+          <a:bodyPr vert="horz" wrap="square" lIns="0" tIns="0" rIns="0" bIns="0" rtlCol="0">
+            <a:noAutofit/>
+          </a:bodyPr>
+          <a:lstStyle/>
+          <a:p>
+            <a:pPr>
+              <a:lnSpc>
+                <a:spcPct val="115000"/>
+              </a:lnSpc>
+            </a:pPr>
+            <a:r>
+              <a:rPr lang="ru-RU" sz="1500">
+                <a:solidFill>
+                  <a:srgbClr val="262626"/>
+                </a:solidFill>
+                <a:latin typeface="Times New Roman" panose="02020603050405020304" pitchFamily="18" charset="0"/>
+              </a:rPr>
+              <a:t>для удалённого обучения школьников</a:t>
+            </a:r>
+          </a:p>
+        </p:txBody>
+      </p:sp>
+      <p:sp>
+        <p:nvSpPr>
+          <p:cNvPr id="12" name="Прямоугольник 11">
+            <a:extLst>
+              <a:ext uri="{FF2B5EF4-FFF2-40B4-BE49-F238E27FC236}">
+                <a16:creationId xmlns:a16="http://schemas.microsoft.com/office/drawing/2014/main" id="{52013411-A52A-A902-071D-94C657367D7D}"/>
+              </a:ext>
+            </a:extLst>
+          </p:cNvPr>
+          <p:cNvSpPr/>
+          <p:nvPr/>
+        </p:nvSpPr>
+        <p:spPr>
+          <a:xfrm>
+            <a:off x="762000" y="4191000"/>
+            <a:ext cx="5080000" cy="12700"/>
+          </a:xfrm>
+          <a:prstGeom prst="rect">
+            <a:avLst/>
+          </a:prstGeom>
+          <a:solidFill>
+            <a:srgbClr val="C3CAD3"/>
+          </a:solidFill>
+          <a:ln w="19050" cap="flat" cmpd="sng" algn="ctr">
+            <a:noFill/>
+            <a:prstDash val="solid"/>
+            <a:miter lim="800000"/>
+          </a:ln>
+          <a:effectLst/>
+          <a:extLst>
+            <a:ext uri="{91240B29-F687-4F45-9708-019B960494DF}">
+              <a14:hiddenLine xmlns:a14="http://schemas.microsoft.com/office/drawing/2010/main" w="19050" cap="flat" cmpd="sng" algn="ctr">
+                <a:solidFill>
+                  <a:schemeClr val="accent1">
+                    <a:shade val="15000"/>
+                  </a:schemeClr>
+                </a:solidFill>
+                <a:prstDash val="solid"/>
+                <a:miter lim="800000"/>
+              </a14:hiddenLine>
+            </a:ext>
+          </a:extLst>
+        </p:spPr>
+        <p:style>
+          <a:lnRef idx="2">
+            <a:schemeClr val="accent1">
+              <a:shade val="15000"/>
+            </a:schemeClr>
+          </a:lnRef>
+          <a:fillRef idx="1">
+            <a:schemeClr val="accent1"/>
+          </a:fillRef>
+          <a:effectRef idx="0">
+            <a:schemeClr val="accent1"/>
+          </a:effectRef>
+          <a:fontRef idx="minor">
+            <a:schemeClr val="lt1"/>
+          </a:fontRef>
+        </p:style>
+        <p:txBody>
+          <a:bodyPr rtlCol="0" anchor="ctr"/>
+          <a:lstStyle/>
+          <a:p>
+            <a:pPr algn="ctr"/>
+            <a:endParaRPr lang="ru-RU"/>
+          </a:p>
+        </p:txBody>
+      </p:sp>
+      <p:sp>
+        <p:nvSpPr>
+          <p:cNvPr id="13" name="TextBox 12">
+            <a:extLst>
+              <a:ext uri="{FF2B5EF4-FFF2-40B4-BE49-F238E27FC236}">
+                <a16:creationId xmlns:a16="http://schemas.microsoft.com/office/drawing/2014/main" id="{432776AE-BA9D-B97F-2946-B55C38CC303C}"/>
+              </a:ext>
+            </a:extLst>
+          </p:cNvPr>
+          <p:cNvSpPr txBox="1"/>
+          <p:nvPr/>
+        </p:nvSpPr>
+        <p:spPr>
+          <a:xfrm>
+            <a:off x="762000" y="4368800"/>
+            <a:ext cx="5080000" cy="369332"/>
+          </a:xfrm>
+          <a:prstGeom prst="rect">
+            <a:avLst/>
+          </a:prstGeom>
+          <a:noFill/>
+        </p:spPr>
+        <p:txBody>
+          <a:bodyPr vert="horz" wrap="square" lIns="0" tIns="0" rIns="0" bIns="0" rtlCol="0">
+            <a:noAutofit/>
+          </a:bodyPr>
+          <a:lstStyle/>
+          <a:p>
+            <a:pPr>
+              <a:lnSpc>
+                <a:spcPct val="115000"/>
+              </a:lnSpc>
+            </a:pPr>
+            <a:r>
+              <a:rPr lang="ru-RU" sz="900">
+                <a:solidFill>
+                  <a:srgbClr val="5F6672"/>
+                </a:solidFill>
+                <a:latin typeface="Times New Roman" panose="02020603050405020304" pitchFamily="18" charset="0"/>
+              </a:rPr>
+              <a:t>Выполнил</a:t>
+            </a:r>
+          </a:p>
+        </p:txBody>
+      </p:sp>
+      <p:sp>
+        <p:nvSpPr>
+          <p:cNvPr id="14" name="TextBox 13">
+            <a:extLst>
+              <a:ext uri="{FF2B5EF4-FFF2-40B4-BE49-F238E27FC236}">
+                <a16:creationId xmlns:a16="http://schemas.microsoft.com/office/drawing/2014/main" id="{0920EFCC-12A1-5F4D-0592-A471B4ABAE0D}"/>
+              </a:ext>
+            </a:extLst>
+          </p:cNvPr>
+          <p:cNvSpPr txBox="1"/>
+          <p:nvPr/>
+        </p:nvSpPr>
+        <p:spPr>
+          <a:xfrm>
+            <a:off x="762000" y="4572000"/>
+            <a:ext cx="5334000" cy="369332"/>
+          </a:xfrm>
+          <a:prstGeom prst="rect">
+            <a:avLst/>
+          </a:prstGeom>
+          <a:noFill/>
+        </p:spPr>
+        <p:txBody>
+          <a:bodyPr vert="horz" wrap="square" lIns="0" tIns="0" rIns="0" bIns="0" rtlCol="0">
+            <a:noAutofit/>
+          </a:bodyPr>
+          <a:lstStyle/>
+          <a:p>
+            <a:pPr>
+              <a:lnSpc>
+                <a:spcPct val="115000"/>
+              </a:lnSpc>
+            </a:pPr>
+            <a:r>
+              <a:rPr lang="ru-RU" sz="1300" b="1">
+                <a:solidFill>
+                  <a:srgbClr val="1F3864"/>
+                </a:solidFill>
+                <a:latin typeface="Times New Roman" panose="02020603050405020304" pitchFamily="18" charset="0"/>
+              </a:rPr>
+              <a:t>Матулов А. А., группа ИС1-45</a:t>
+            </a:r>
+          </a:p>
+        </p:txBody>
+      </p:sp>
+      <p:sp>
+        <p:nvSpPr>
+          <p:cNvPr id="15" name="TextBox 14">
+            <a:extLst>
+              <a:ext uri="{FF2B5EF4-FFF2-40B4-BE49-F238E27FC236}">
+                <a16:creationId xmlns:a16="http://schemas.microsoft.com/office/drawing/2014/main" id="{DFEC80C5-925D-F89C-A6E1-765E90501241}"/>
+              </a:ext>
+            </a:extLst>
+          </p:cNvPr>
+          <p:cNvSpPr txBox="1"/>
+          <p:nvPr/>
+        </p:nvSpPr>
+        <p:spPr>
+          <a:xfrm>
+            <a:off x="762000" y="5003800"/>
+            <a:ext cx="5080000" cy="369332"/>
+          </a:xfrm>
+          <a:prstGeom prst="rect">
+            <a:avLst/>
+          </a:prstGeom>
+          <a:noFill/>
+        </p:spPr>
+        <p:txBody>
+          <a:bodyPr vert="horz" wrap="square" lIns="0" tIns="0" rIns="0" bIns="0" rtlCol="0">
+            <a:noAutofit/>
+          </a:bodyPr>
+          <a:lstStyle/>
+          <a:p>
+            <a:pPr>
+              <a:lnSpc>
+                <a:spcPct val="115000"/>
+              </a:lnSpc>
+            </a:pPr>
+            <a:r>
+              <a:rPr lang="ru-RU" sz="900">
+                <a:solidFill>
+                  <a:srgbClr val="5F6672"/>
+                </a:solidFill>
+                <a:latin typeface="Times New Roman" panose="02020603050405020304" pitchFamily="18" charset="0"/>
+              </a:rPr>
+              <a:t>Руководитель</a:t>
+            </a:r>
+          </a:p>
+        </p:txBody>
+      </p:sp>
+      <p:sp>
+        <p:nvSpPr>
+          <p:cNvPr id="16" name="TextBox 15">
+            <a:extLst>
+              <a:ext uri="{FF2B5EF4-FFF2-40B4-BE49-F238E27FC236}">
+                <a16:creationId xmlns:a16="http://schemas.microsoft.com/office/drawing/2014/main" id="{7815EAFB-EE3A-8044-36DB-8844415964DF}"/>
+              </a:ext>
+            </a:extLst>
+          </p:cNvPr>
+          <p:cNvSpPr txBox="1"/>
+          <p:nvPr/>
+        </p:nvSpPr>
+        <p:spPr>
+          <a:xfrm>
+            <a:off x="762000" y="5207000"/>
+            <a:ext cx="5334000" cy="369332"/>
+          </a:xfrm>
+          <a:prstGeom prst="rect">
+            <a:avLst/>
+          </a:prstGeom>
+          <a:noFill/>
+        </p:spPr>
+        <p:txBody>
+          <a:bodyPr vert="horz" wrap="square" lIns="0" tIns="0" rIns="0" bIns="0" rtlCol="0">
+            <a:noAutofit/>
+          </a:bodyPr>
+          <a:lstStyle/>
+          <a:p>
+            <a:pPr>
+              <a:lnSpc>
+                <a:spcPct val="115000"/>
+              </a:lnSpc>
+            </a:pPr>
+            <a:r>
+              <a:rPr lang="ru-RU" sz="1300" b="1">
+                <a:solidFill>
+                  <a:srgbClr val="1F3864"/>
+                </a:solidFill>
+                <a:latin typeface="Times New Roman" panose="02020603050405020304" pitchFamily="18" charset="0"/>
+              </a:rPr>
+              <a:t>Васильченко М. О.</a:t>
+            </a:r>
+          </a:p>
+        </p:txBody>
+      </p:sp>
+      <p:sp>
+        <p:nvSpPr>
+          <p:cNvPr id="17" name="TextBox 16">
+            <a:extLst>
+              <a:ext uri="{FF2B5EF4-FFF2-40B4-BE49-F238E27FC236}">
+                <a16:creationId xmlns:a16="http://schemas.microsoft.com/office/drawing/2014/main" id="{4A7D1148-2FDC-70CF-5BCA-A1071CA42644}"/>
+              </a:ext>
+            </a:extLst>
+          </p:cNvPr>
+          <p:cNvSpPr txBox="1"/>
+          <p:nvPr/>
+        </p:nvSpPr>
+        <p:spPr>
+          <a:xfrm>
+            <a:off x="762000" y="6045200"/>
+            <a:ext cx="5080000" cy="369332"/>
+          </a:xfrm>
+          <a:prstGeom prst="rect">
+            <a:avLst/>
+          </a:prstGeom>
+          <a:noFill/>
+        </p:spPr>
+        <p:txBody>
+          <a:bodyPr vert="horz" wrap="square" lIns="0" tIns="0" rIns="0" bIns="0" rtlCol="0">
+            <a:noAutofit/>
+          </a:bodyPr>
+          <a:lstStyle/>
+          <a:p>
+            <a:pPr>
+              <a:lnSpc>
+                <a:spcPct val="115000"/>
+              </a:lnSpc>
+            </a:pPr>
+            <a:r>
+              <a:rPr lang="ru-RU" sz="1000">
+                <a:solidFill>
+                  <a:srgbClr val="5F6672"/>
+                </a:solidFill>
+                <a:latin typeface="Times New Roman" panose="02020603050405020304" pitchFamily="18" charset="0"/>
+              </a:rPr>
+              <a:t>Ярославль, 2026</a:t>
+            </a:r>
+          </a:p>
+        </p:txBody>
+      </p:sp>
+      <p:sp>
+        <p:nvSpPr>
+          <p:cNvPr id="18" name="TextBox 17">
+            <a:extLst>
+              <a:ext uri="{FF2B5EF4-FFF2-40B4-BE49-F238E27FC236}">
+                <a16:creationId xmlns:a16="http://schemas.microsoft.com/office/drawing/2014/main" id="{83252167-D58B-1E34-36D1-E6E04C0056EF}"/>
+              </a:ext>
+            </a:extLst>
+          </p:cNvPr>
+          <p:cNvSpPr txBox="1"/>
+          <p:nvPr/>
+        </p:nvSpPr>
+        <p:spPr>
+          <a:xfrm rot="16200000">
+            <a:off x="8318500" y="3238500"/>
+            <a:ext cx="5080000" cy="381000"/>
+          </a:xfrm>
+          <a:prstGeom prst="rect">
+            <a:avLst/>
+          </a:prstGeom>
+          <a:noFill/>
+        </p:spPr>
+        <p:txBody>
+          <a:bodyPr vert="horz" wrap="square" lIns="0" tIns="0" rIns="0" bIns="0" rtlCol="0">
+            <a:noAutofit/>
+          </a:bodyPr>
+          <a:lstStyle/>
+          <a:p>
+            <a:pPr>
+              <a:lnSpc>
+                <a:spcPct val="115000"/>
+              </a:lnSpc>
+            </a:pPr>
+            <a:r>
+              <a:rPr lang="ru-RU" sz="1100" b="1">
+                <a:solidFill>
+                  <a:srgbClr val="FFFFFF"/>
+                </a:solidFill>
+                <a:latin typeface="Times New Roman" panose="02020603050405020304" pitchFamily="18" charset="0"/>
+              </a:rPr>
+              <a:t>ПРОЕКТНАЯ РАБОТА · 2026</a:t>
             </a:r>
           </a:p>
         </p:txBody>
@@ -4189,7 +4212,7 @@
     </p:spTree>
     <p:extLst>
       <p:ext uri="{BB962C8B-B14F-4D97-AF65-F5344CB8AC3E}">
-        <p14:creationId xmlns:p14="http://schemas.microsoft.com/office/powerpoint/2010/main" val="2876839413"/>
+        <p14:creationId xmlns:p14="http://schemas.microsoft.com/office/powerpoint/2010/main" val="10148741"/>
       </p:ext>
     </p:extLst>
   </p:cSld>
@@ -4221,7 +4244,7 @@
           <p:cNvPr id="2" name="Прямоугольник 1">
             <a:extLst>
               <a:ext uri="{FF2B5EF4-FFF2-40B4-BE49-F238E27FC236}">
-                <a16:creationId xmlns:a16="http://schemas.microsoft.com/office/drawing/2014/main" id="{A7686E66-ACC7-225C-0A0E-8903516EAA8D}"/>
+                <a16:creationId xmlns:a16="http://schemas.microsoft.com/office/drawing/2014/main" id="{817AF25E-3A07-B060-57DC-D2775EDF2C9B}"/>
               </a:ext>
             </a:extLst>
           </p:cNvPr>
@@ -4289,7 +4312,7 @@
           <p:cNvPr id="3" name="Прямоугольник 2">
             <a:extLst>
               <a:ext uri="{FF2B5EF4-FFF2-40B4-BE49-F238E27FC236}">
-                <a16:creationId xmlns:a16="http://schemas.microsoft.com/office/drawing/2014/main" id="{B998B50F-8B26-C61F-5027-8CBF7D17112B}"/>
+                <a16:creationId xmlns:a16="http://schemas.microsoft.com/office/drawing/2014/main" id="{88C4C895-8FCC-377E-F7DD-C61A29EA335D}"/>
               </a:ext>
             </a:extLst>
           </p:cNvPr>
@@ -4357,7 +4380,7 @@
           <p:cNvPr id="4" name="TextBox 3">
             <a:extLst>
               <a:ext uri="{FF2B5EF4-FFF2-40B4-BE49-F238E27FC236}">
-                <a16:creationId xmlns:a16="http://schemas.microsoft.com/office/drawing/2014/main" id="{F7553CB6-814A-92C9-ACD5-82A741965D4B}"/>
+                <a16:creationId xmlns:a16="http://schemas.microsoft.com/office/drawing/2014/main" id="{00927DB4-7054-23A3-CCED-4BF41D037622}"/>
               </a:ext>
             </a:extLst>
           </p:cNvPr>
@@ -4402,7 +4425,7 @@
           <p:cNvPr id="5" name="TextBox 4">
             <a:extLst>
               <a:ext uri="{FF2B5EF4-FFF2-40B4-BE49-F238E27FC236}">
-                <a16:creationId xmlns:a16="http://schemas.microsoft.com/office/drawing/2014/main" id="{7A51A935-12CE-FB3A-EB5F-4B3256078AEE}"/>
+                <a16:creationId xmlns:a16="http://schemas.microsoft.com/office/drawing/2014/main" id="{3FD5139F-08C5-92BE-34E7-CF61BCA9445E}"/>
               </a:ext>
             </a:extLst>
           </p:cNvPr>
@@ -4447,7 +4470,7 @@
           <p:cNvPr id="6" name="Прямоугольник 5">
             <a:extLst>
               <a:ext uri="{FF2B5EF4-FFF2-40B4-BE49-F238E27FC236}">
-                <a16:creationId xmlns:a16="http://schemas.microsoft.com/office/drawing/2014/main" id="{B1B67F06-ED63-DF8F-7C8C-15623C01622A}"/>
+                <a16:creationId xmlns:a16="http://schemas.microsoft.com/office/drawing/2014/main" id="{DB997850-8580-38FF-9951-BB7FC5169CEC}"/>
               </a:ext>
             </a:extLst>
           </p:cNvPr>
@@ -4515,7 +4538,7 @@
           <p:cNvPr id="7" name="Прямоугольник 6">
             <a:extLst>
               <a:ext uri="{FF2B5EF4-FFF2-40B4-BE49-F238E27FC236}">
-                <a16:creationId xmlns:a16="http://schemas.microsoft.com/office/drawing/2014/main" id="{FF4C0030-74B5-9E8B-13F4-D143AFB3D46C}"/>
+                <a16:creationId xmlns:a16="http://schemas.microsoft.com/office/drawing/2014/main" id="{4EF3BBA4-5E3A-190B-555A-3EE5F59BC707}"/>
               </a:ext>
             </a:extLst>
           </p:cNvPr>
@@ -4583,7 +4606,7 @@
           <p:cNvPr id="8" name="TextBox 7">
             <a:extLst>
               <a:ext uri="{FF2B5EF4-FFF2-40B4-BE49-F238E27FC236}">
-                <a16:creationId xmlns:a16="http://schemas.microsoft.com/office/drawing/2014/main" id="{1344D99E-43E3-F450-EA8B-69E44394FB6B}"/>
+                <a16:creationId xmlns:a16="http://schemas.microsoft.com/office/drawing/2014/main" id="{FB45AF44-6149-B63B-C3D4-4F3A08C6D8BA}"/>
               </a:ext>
             </a:extLst>
           </p:cNvPr>
@@ -4628,7 +4651,7 @@
           <p:cNvPr id="9" name="TextBox 8">
             <a:extLst>
               <a:ext uri="{FF2B5EF4-FFF2-40B4-BE49-F238E27FC236}">
-                <a16:creationId xmlns:a16="http://schemas.microsoft.com/office/drawing/2014/main" id="{C8E076FE-39BF-2E1C-6E63-48CB5871B31B}"/>
+                <a16:creationId xmlns:a16="http://schemas.microsoft.com/office/drawing/2014/main" id="{274F100C-D72F-D50B-E832-353E970AFE18}"/>
               </a:ext>
             </a:extLst>
           </p:cNvPr>
@@ -4673,7 +4696,7 @@
           <p:cNvPr id="10" name="TextBox 9">
             <a:extLst>
               <a:ext uri="{FF2B5EF4-FFF2-40B4-BE49-F238E27FC236}">
-                <a16:creationId xmlns:a16="http://schemas.microsoft.com/office/drawing/2014/main" id="{0FBC71E1-5DD3-6424-754B-44E83C13FC6D}"/>
+                <a16:creationId xmlns:a16="http://schemas.microsoft.com/office/drawing/2014/main" id="{D1B4B84B-6B21-EBA5-1C60-3C9F7816F9A2}"/>
               </a:ext>
             </a:extLst>
           </p:cNvPr>
@@ -4718,7 +4741,7 @@
           <p:cNvPr id="11" name="Прямоугольник 10">
             <a:extLst>
               <a:ext uri="{FF2B5EF4-FFF2-40B4-BE49-F238E27FC236}">
-                <a16:creationId xmlns:a16="http://schemas.microsoft.com/office/drawing/2014/main" id="{E9F872EA-B3D0-4938-0A7D-46D7FD7086CA}"/>
+                <a16:creationId xmlns:a16="http://schemas.microsoft.com/office/drawing/2014/main" id="{B3BC0A39-AA4B-B16F-9151-376E95137A35}"/>
               </a:ext>
             </a:extLst>
           </p:cNvPr>
@@ -4786,7 +4809,7 @@
           <p:cNvPr id="12" name="TextBox 11">
             <a:extLst>
               <a:ext uri="{FF2B5EF4-FFF2-40B4-BE49-F238E27FC236}">
-                <a16:creationId xmlns:a16="http://schemas.microsoft.com/office/drawing/2014/main" id="{48A09AC6-9D86-1BB9-EB62-80995D1DCF8A}"/>
+                <a16:creationId xmlns:a16="http://schemas.microsoft.com/office/drawing/2014/main" id="{7C61220E-753F-E7AD-4ACA-651E930FCB59}"/>
               </a:ext>
             </a:extLst>
           </p:cNvPr>
@@ -4831,7 +4854,7 @@
           <p:cNvPr id="13" name="TextBox 12">
             <a:extLst>
               <a:ext uri="{FF2B5EF4-FFF2-40B4-BE49-F238E27FC236}">
-                <a16:creationId xmlns:a16="http://schemas.microsoft.com/office/drawing/2014/main" id="{037DED89-68C0-D958-69DF-365B5002C52E}"/>
+                <a16:creationId xmlns:a16="http://schemas.microsoft.com/office/drawing/2014/main" id="{BBB15654-AB93-BC37-015A-08DC4C0B6BB8}"/>
               </a:ext>
             </a:extLst>
           </p:cNvPr>
@@ -4876,7 +4899,7 @@
           <p:cNvPr id="14" name="Прямоугольник 13">
             <a:extLst>
               <a:ext uri="{FF2B5EF4-FFF2-40B4-BE49-F238E27FC236}">
-                <a16:creationId xmlns:a16="http://schemas.microsoft.com/office/drawing/2014/main" id="{A3AF5A3C-748A-1D3B-C040-C466F7D900F9}"/>
+                <a16:creationId xmlns:a16="http://schemas.microsoft.com/office/drawing/2014/main" id="{B465A046-B7EB-5A4F-46B0-F3FA0A3AFFAE}"/>
               </a:ext>
             </a:extLst>
           </p:cNvPr>
@@ -4944,7 +4967,7 @@
           <p:cNvPr id="15" name="TextBox 14">
             <a:extLst>
               <a:ext uri="{FF2B5EF4-FFF2-40B4-BE49-F238E27FC236}">
-                <a16:creationId xmlns:a16="http://schemas.microsoft.com/office/drawing/2014/main" id="{986D7A90-83B0-112D-F74A-76C143A1C303}"/>
+                <a16:creationId xmlns:a16="http://schemas.microsoft.com/office/drawing/2014/main" id="{DF4BE700-FD2B-4D76-187E-10FA652CD10D}"/>
               </a:ext>
             </a:extLst>
           </p:cNvPr>
@@ -4989,7 +5012,7 @@
           <p:cNvPr id="16" name="TextBox 15">
             <a:extLst>
               <a:ext uri="{FF2B5EF4-FFF2-40B4-BE49-F238E27FC236}">
-                <a16:creationId xmlns:a16="http://schemas.microsoft.com/office/drawing/2014/main" id="{15E4BC86-9A95-7FB4-BF42-ED0B8CF32524}"/>
+                <a16:creationId xmlns:a16="http://schemas.microsoft.com/office/drawing/2014/main" id="{B81CCD20-752F-7E8F-DDB1-4E01EDD0827D}"/>
               </a:ext>
             </a:extLst>
           </p:cNvPr>
@@ -5034,7 +5057,7 @@
           <p:cNvPr id="17" name="Прямоугольник 16">
             <a:extLst>
               <a:ext uri="{FF2B5EF4-FFF2-40B4-BE49-F238E27FC236}">
-                <a16:creationId xmlns:a16="http://schemas.microsoft.com/office/drawing/2014/main" id="{0C3D287F-B198-02A5-0515-2E90C054C505}"/>
+                <a16:creationId xmlns:a16="http://schemas.microsoft.com/office/drawing/2014/main" id="{DFA00F43-76B3-CDE1-4410-7461CDD1012B}"/>
               </a:ext>
             </a:extLst>
           </p:cNvPr>
@@ -5102,7 +5125,7 @@
           <p:cNvPr id="18" name="TextBox 17">
             <a:extLst>
               <a:ext uri="{FF2B5EF4-FFF2-40B4-BE49-F238E27FC236}">
-                <a16:creationId xmlns:a16="http://schemas.microsoft.com/office/drawing/2014/main" id="{0A1CEF0A-798F-C45D-0659-6D7A5104D385}"/>
+                <a16:creationId xmlns:a16="http://schemas.microsoft.com/office/drawing/2014/main" id="{517EF9C0-E957-8BCD-F23F-7F5BAB457DC2}"/>
               </a:ext>
             </a:extLst>
           </p:cNvPr>
@@ -5147,7 +5170,7 @@
           <p:cNvPr id="19" name="TextBox 18">
             <a:extLst>
               <a:ext uri="{FF2B5EF4-FFF2-40B4-BE49-F238E27FC236}">
-                <a16:creationId xmlns:a16="http://schemas.microsoft.com/office/drawing/2014/main" id="{2252EB43-6DC2-35AC-83CA-471DEADA246C}"/>
+                <a16:creationId xmlns:a16="http://schemas.microsoft.com/office/drawing/2014/main" id="{5572E0C9-FFA5-C4C8-0C8D-FA96AB51ECAC}"/>
               </a:ext>
             </a:extLst>
           </p:cNvPr>
@@ -5192,7 +5215,7 @@
           <p:cNvPr id="20" name="Прямоугольник 19">
             <a:extLst>
               <a:ext uri="{FF2B5EF4-FFF2-40B4-BE49-F238E27FC236}">
-                <a16:creationId xmlns:a16="http://schemas.microsoft.com/office/drawing/2014/main" id="{FBAEE0BB-E421-01F2-096C-7ECB2FAF7384}"/>
+                <a16:creationId xmlns:a16="http://schemas.microsoft.com/office/drawing/2014/main" id="{A8AD8D91-19E6-4D42-50F7-B4BA07042003}"/>
               </a:ext>
             </a:extLst>
           </p:cNvPr>
@@ -5260,7 +5283,7 @@
           <p:cNvPr id="21" name="TextBox 20">
             <a:extLst>
               <a:ext uri="{FF2B5EF4-FFF2-40B4-BE49-F238E27FC236}">
-                <a16:creationId xmlns:a16="http://schemas.microsoft.com/office/drawing/2014/main" id="{80577542-53A4-D318-6C48-56A6A88CED5C}"/>
+                <a16:creationId xmlns:a16="http://schemas.microsoft.com/office/drawing/2014/main" id="{368FDB2E-E2F0-CFD8-2CD5-D265E8C00EA0}"/>
               </a:ext>
             </a:extLst>
           </p:cNvPr>
@@ -5305,7 +5328,7 @@
           <p:cNvPr id="22" name="TextBox 21">
             <a:extLst>
               <a:ext uri="{FF2B5EF4-FFF2-40B4-BE49-F238E27FC236}">
-                <a16:creationId xmlns:a16="http://schemas.microsoft.com/office/drawing/2014/main" id="{E1390AF2-21CC-74D6-C699-E4A60133F342}"/>
+                <a16:creationId xmlns:a16="http://schemas.microsoft.com/office/drawing/2014/main" id="{673F53DA-8187-1E5B-9202-D797FB39558C}"/>
               </a:ext>
             </a:extLst>
           </p:cNvPr>
@@ -5350,7 +5373,7 @@
           <p:cNvPr id="23" name="Прямоугольник 22">
             <a:extLst>
               <a:ext uri="{FF2B5EF4-FFF2-40B4-BE49-F238E27FC236}">
-                <a16:creationId xmlns:a16="http://schemas.microsoft.com/office/drawing/2014/main" id="{589C1A37-EBA0-867A-094E-3E718BA91E17}"/>
+                <a16:creationId xmlns:a16="http://schemas.microsoft.com/office/drawing/2014/main" id="{B7C6F4D1-BCDD-61EB-C7AA-374B98094DED}"/>
               </a:ext>
             </a:extLst>
           </p:cNvPr>
@@ -5416,7 +5439,7 @@
     </p:spTree>
     <p:extLst>
       <p:ext uri="{BB962C8B-B14F-4D97-AF65-F5344CB8AC3E}">
-        <p14:creationId xmlns:p14="http://schemas.microsoft.com/office/powerpoint/2010/main" val="3084010059"/>
+        <p14:creationId xmlns:p14="http://schemas.microsoft.com/office/powerpoint/2010/main" val="1613964250"/>
       </p:ext>
     </p:extLst>
   </p:cSld>
@@ -5448,7 +5471,7 @@
           <p:cNvPr id="2" name="Прямоугольник 1">
             <a:extLst>
               <a:ext uri="{FF2B5EF4-FFF2-40B4-BE49-F238E27FC236}">
-                <a16:creationId xmlns:a16="http://schemas.microsoft.com/office/drawing/2014/main" id="{CDCAD5B1-DE7C-AA50-4CAF-7545F901DF14}"/>
+                <a16:creationId xmlns:a16="http://schemas.microsoft.com/office/drawing/2014/main" id="{A38542D6-1EE9-09F7-535D-5EE6FFEC0646}"/>
               </a:ext>
             </a:extLst>
           </p:cNvPr>
@@ -5516,7 +5539,7 @@
           <p:cNvPr id="3" name="Прямоугольник 2">
             <a:extLst>
               <a:ext uri="{FF2B5EF4-FFF2-40B4-BE49-F238E27FC236}">
-                <a16:creationId xmlns:a16="http://schemas.microsoft.com/office/drawing/2014/main" id="{BAA1F780-F748-881D-A073-2A926B7A339E}"/>
+                <a16:creationId xmlns:a16="http://schemas.microsoft.com/office/drawing/2014/main" id="{746024DE-C62B-C6E3-DE57-BE9874288EC9}"/>
               </a:ext>
             </a:extLst>
           </p:cNvPr>
@@ -5584,7 +5607,7 @@
           <p:cNvPr id="4" name="TextBox 3">
             <a:extLst>
               <a:ext uri="{FF2B5EF4-FFF2-40B4-BE49-F238E27FC236}">
-                <a16:creationId xmlns:a16="http://schemas.microsoft.com/office/drawing/2014/main" id="{0A3C79FF-7EE8-5DF8-4CCE-61FC716D079A}"/>
+                <a16:creationId xmlns:a16="http://schemas.microsoft.com/office/drawing/2014/main" id="{62EAE05B-B843-FD2A-1E89-04F87F25FE4A}"/>
               </a:ext>
             </a:extLst>
           </p:cNvPr>
@@ -5629,7 +5652,7 @@
           <p:cNvPr id="5" name="TextBox 4">
             <a:extLst>
               <a:ext uri="{FF2B5EF4-FFF2-40B4-BE49-F238E27FC236}">
-                <a16:creationId xmlns:a16="http://schemas.microsoft.com/office/drawing/2014/main" id="{501A3DD4-0AFA-0550-E322-B3C39F9D1FE3}"/>
+                <a16:creationId xmlns:a16="http://schemas.microsoft.com/office/drawing/2014/main" id="{D9CD1863-D781-5C41-5149-60555E32053E}"/>
               </a:ext>
             </a:extLst>
           </p:cNvPr>
@@ -5674,7 +5697,7 @@
           <p:cNvPr id="6" name="Прямоугольник 5">
             <a:extLst>
               <a:ext uri="{FF2B5EF4-FFF2-40B4-BE49-F238E27FC236}">
-                <a16:creationId xmlns:a16="http://schemas.microsoft.com/office/drawing/2014/main" id="{120A7A34-0DC5-7711-9178-70A1F8C81C95}"/>
+                <a16:creationId xmlns:a16="http://schemas.microsoft.com/office/drawing/2014/main" id="{AB39F64B-FD3C-B5E1-2E7B-A9B55D041AA5}"/>
               </a:ext>
             </a:extLst>
           </p:cNvPr>
@@ -5742,7 +5765,7 @@
           <p:cNvPr id="7" name="Прямоугольник 6">
             <a:extLst>
               <a:ext uri="{FF2B5EF4-FFF2-40B4-BE49-F238E27FC236}">
-                <a16:creationId xmlns:a16="http://schemas.microsoft.com/office/drawing/2014/main" id="{BD2D08F5-5097-2723-CEC8-BF05AE5C3399}"/>
+                <a16:creationId xmlns:a16="http://schemas.microsoft.com/office/drawing/2014/main" id="{06CE0FC1-D9A4-868A-350C-6654476BC1C9}"/>
               </a:ext>
             </a:extLst>
           </p:cNvPr>
@@ -5810,7 +5833,7 @@
           <p:cNvPr id="8" name="TextBox 7">
             <a:extLst>
               <a:ext uri="{FF2B5EF4-FFF2-40B4-BE49-F238E27FC236}">
-                <a16:creationId xmlns:a16="http://schemas.microsoft.com/office/drawing/2014/main" id="{7C4802B6-E447-76E0-88CD-0FE04434E98C}"/>
+                <a16:creationId xmlns:a16="http://schemas.microsoft.com/office/drawing/2014/main" id="{CB613481-44AC-C306-E84B-C9BC326D2C71}"/>
               </a:ext>
             </a:extLst>
           </p:cNvPr>
@@ -5855,7 +5878,7 @@
           <p:cNvPr id="9" name="TextBox 8">
             <a:extLst>
               <a:ext uri="{FF2B5EF4-FFF2-40B4-BE49-F238E27FC236}">
-                <a16:creationId xmlns:a16="http://schemas.microsoft.com/office/drawing/2014/main" id="{71453753-41D2-6B19-4283-460B8C48345E}"/>
+                <a16:creationId xmlns:a16="http://schemas.microsoft.com/office/drawing/2014/main" id="{67674F7E-A882-C373-8FAD-9FA6C508C6CA}"/>
               </a:ext>
             </a:extLst>
           </p:cNvPr>
@@ -5900,7 +5923,7 @@
           <p:cNvPr id="10" name="Прямоугольник 9">
             <a:extLst>
               <a:ext uri="{FF2B5EF4-FFF2-40B4-BE49-F238E27FC236}">
-                <a16:creationId xmlns:a16="http://schemas.microsoft.com/office/drawing/2014/main" id="{5F67C412-09E8-B989-97C5-CB34F0D37DF7}"/>
+                <a16:creationId xmlns:a16="http://schemas.microsoft.com/office/drawing/2014/main" id="{F8C70C95-F1D6-8213-8E9C-A73080817A61}"/>
               </a:ext>
             </a:extLst>
           </p:cNvPr>
@@ -5968,7 +5991,7 @@
           <p:cNvPr id="11" name="TextBox 10">
             <a:extLst>
               <a:ext uri="{FF2B5EF4-FFF2-40B4-BE49-F238E27FC236}">
-                <a16:creationId xmlns:a16="http://schemas.microsoft.com/office/drawing/2014/main" id="{97A90419-EBFF-955F-06C5-49254E8A9F2D}"/>
+                <a16:creationId xmlns:a16="http://schemas.microsoft.com/office/drawing/2014/main" id="{0C4C0FCA-15F6-1271-2CAE-D6DCBFF7F8BC}"/>
               </a:ext>
             </a:extLst>
           </p:cNvPr>
@@ -6013,7 +6036,7 @@
           <p:cNvPr id="12" name="TextBox 11">
             <a:extLst>
               <a:ext uri="{FF2B5EF4-FFF2-40B4-BE49-F238E27FC236}">
-                <a16:creationId xmlns:a16="http://schemas.microsoft.com/office/drawing/2014/main" id="{98CE0E1C-3657-91B4-EB88-17DEE320B05E}"/>
+                <a16:creationId xmlns:a16="http://schemas.microsoft.com/office/drawing/2014/main" id="{52BEDB8B-7A14-266A-0649-9AC1151A7924}"/>
               </a:ext>
             </a:extLst>
           </p:cNvPr>
@@ -6058,7 +6081,7 @@
           <p:cNvPr id="13" name="Прямоугольник 12">
             <a:extLst>
               <a:ext uri="{FF2B5EF4-FFF2-40B4-BE49-F238E27FC236}">
-                <a16:creationId xmlns:a16="http://schemas.microsoft.com/office/drawing/2014/main" id="{28D3F668-B64C-E1F1-0395-F352002EFAD1}"/>
+                <a16:creationId xmlns:a16="http://schemas.microsoft.com/office/drawing/2014/main" id="{2BAA892D-C1CE-F052-9774-77EFC352B6E5}"/>
               </a:ext>
             </a:extLst>
           </p:cNvPr>
@@ -6126,7 +6149,7 @@
           <p:cNvPr id="14" name="Прямоугольник 13">
             <a:extLst>
               <a:ext uri="{FF2B5EF4-FFF2-40B4-BE49-F238E27FC236}">
-                <a16:creationId xmlns:a16="http://schemas.microsoft.com/office/drawing/2014/main" id="{19B98A14-3CAE-062B-83A6-A03DC05366DF}"/>
+                <a16:creationId xmlns:a16="http://schemas.microsoft.com/office/drawing/2014/main" id="{A28AB72C-53B6-570C-2E95-C111F23D3801}"/>
               </a:ext>
             </a:extLst>
           </p:cNvPr>
@@ -6194,7 +6217,7 @@
           <p:cNvPr id="15" name="TextBox 14">
             <a:extLst>
               <a:ext uri="{FF2B5EF4-FFF2-40B4-BE49-F238E27FC236}">
-                <a16:creationId xmlns:a16="http://schemas.microsoft.com/office/drawing/2014/main" id="{727BC9B9-4D23-7D06-3715-779F37152620}"/>
+                <a16:creationId xmlns:a16="http://schemas.microsoft.com/office/drawing/2014/main" id="{6DA1A289-74AE-140F-CF30-765091BB6DF9}"/>
               </a:ext>
             </a:extLst>
           </p:cNvPr>
@@ -6239,7 +6262,7 @@
           <p:cNvPr id="16" name="TextBox 15">
             <a:extLst>
               <a:ext uri="{FF2B5EF4-FFF2-40B4-BE49-F238E27FC236}">
-                <a16:creationId xmlns:a16="http://schemas.microsoft.com/office/drawing/2014/main" id="{B7FF00FD-06B7-7499-A18D-7892057B2C47}"/>
+                <a16:creationId xmlns:a16="http://schemas.microsoft.com/office/drawing/2014/main" id="{ECE8CCA2-93D7-811D-BA68-D959E9D41E7A}"/>
               </a:ext>
             </a:extLst>
           </p:cNvPr>
@@ -6284,7 +6307,7 @@
           <p:cNvPr id="17" name="Прямоугольник 16">
             <a:extLst>
               <a:ext uri="{FF2B5EF4-FFF2-40B4-BE49-F238E27FC236}">
-                <a16:creationId xmlns:a16="http://schemas.microsoft.com/office/drawing/2014/main" id="{678A3307-E9BA-53E0-6C6C-B21DC92A7B8D}"/>
+                <a16:creationId xmlns:a16="http://schemas.microsoft.com/office/drawing/2014/main" id="{73DFBBE9-33B5-247D-40BA-88D9C4832786}"/>
               </a:ext>
             </a:extLst>
           </p:cNvPr>
@@ -6352,7 +6375,7 @@
           <p:cNvPr id="18" name="Прямоугольник 17">
             <a:extLst>
               <a:ext uri="{FF2B5EF4-FFF2-40B4-BE49-F238E27FC236}">
-                <a16:creationId xmlns:a16="http://schemas.microsoft.com/office/drawing/2014/main" id="{2973DEFB-A472-9A29-E745-E4C3CBAACF41}"/>
+                <a16:creationId xmlns:a16="http://schemas.microsoft.com/office/drawing/2014/main" id="{00066878-6312-B418-9CD7-2E1209982F33}"/>
               </a:ext>
             </a:extLst>
           </p:cNvPr>
@@ -6420,7 +6443,7 @@
           <p:cNvPr id="19" name="TextBox 18">
             <a:extLst>
               <a:ext uri="{FF2B5EF4-FFF2-40B4-BE49-F238E27FC236}">
-                <a16:creationId xmlns:a16="http://schemas.microsoft.com/office/drawing/2014/main" id="{821F5032-AD84-25CC-E977-08F588FCB703}"/>
+                <a16:creationId xmlns:a16="http://schemas.microsoft.com/office/drawing/2014/main" id="{58CE9513-9BC7-CD17-9840-CFF2215B841F}"/>
               </a:ext>
             </a:extLst>
           </p:cNvPr>
@@ -6465,7 +6488,7 @@
           <p:cNvPr id="20" name="TextBox 19">
             <a:extLst>
               <a:ext uri="{FF2B5EF4-FFF2-40B4-BE49-F238E27FC236}">
-                <a16:creationId xmlns:a16="http://schemas.microsoft.com/office/drawing/2014/main" id="{C783A5FF-D43E-32E3-6183-B5E68F60716A}"/>
+                <a16:creationId xmlns:a16="http://schemas.microsoft.com/office/drawing/2014/main" id="{C6F70800-1FC7-3C81-6432-EEF6A5737FBD}"/>
               </a:ext>
             </a:extLst>
           </p:cNvPr>
@@ -6510,7 +6533,7 @@
           <p:cNvPr id="21" name="Прямоугольник 20">
             <a:extLst>
               <a:ext uri="{FF2B5EF4-FFF2-40B4-BE49-F238E27FC236}">
-                <a16:creationId xmlns:a16="http://schemas.microsoft.com/office/drawing/2014/main" id="{2A39C95A-B1C7-517C-D853-BA78228D444A}"/>
+                <a16:creationId xmlns:a16="http://schemas.microsoft.com/office/drawing/2014/main" id="{A21CD9B9-28AB-9E22-F250-D873223E6FC7}"/>
               </a:ext>
             </a:extLst>
           </p:cNvPr>
@@ -6578,7 +6601,7 @@
           <p:cNvPr id="22" name="Прямоугольник 21">
             <a:extLst>
               <a:ext uri="{FF2B5EF4-FFF2-40B4-BE49-F238E27FC236}">
-                <a16:creationId xmlns:a16="http://schemas.microsoft.com/office/drawing/2014/main" id="{BF124301-4A55-43BE-ACC0-E053663A7243}"/>
+                <a16:creationId xmlns:a16="http://schemas.microsoft.com/office/drawing/2014/main" id="{13342CE9-5C1C-FB2F-6E46-E673DDBE5290}"/>
               </a:ext>
             </a:extLst>
           </p:cNvPr>
@@ -6646,7 +6669,7 @@
           <p:cNvPr id="23" name="TextBox 22">
             <a:extLst>
               <a:ext uri="{FF2B5EF4-FFF2-40B4-BE49-F238E27FC236}">
-                <a16:creationId xmlns:a16="http://schemas.microsoft.com/office/drawing/2014/main" id="{22F931AF-E61D-1B64-36BC-99CD0824AA50}"/>
+                <a16:creationId xmlns:a16="http://schemas.microsoft.com/office/drawing/2014/main" id="{A5EFE53B-A67F-9F4C-BC62-E05A6E195BA5}"/>
               </a:ext>
             </a:extLst>
           </p:cNvPr>
@@ -6691,7 +6714,7 @@
           <p:cNvPr id="24" name="TextBox 23">
             <a:extLst>
               <a:ext uri="{FF2B5EF4-FFF2-40B4-BE49-F238E27FC236}">
-                <a16:creationId xmlns:a16="http://schemas.microsoft.com/office/drawing/2014/main" id="{6968E7AB-FDEF-3793-7DF3-20E0A9D20891}"/>
+                <a16:creationId xmlns:a16="http://schemas.microsoft.com/office/drawing/2014/main" id="{A26523ED-C7E4-10F8-FFEE-3D1E5D1F3612}"/>
               </a:ext>
             </a:extLst>
           </p:cNvPr>
@@ -6736,7 +6759,7 @@
           <p:cNvPr id="25" name="Прямоугольник 24">
             <a:extLst>
               <a:ext uri="{FF2B5EF4-FFF2-40B4-BE49-F238E27FC236}">
-                <a16:creationId xmlns:a16="http://schemas.microsoft.com/office/drawing/2014/main" id="{A4547AB3-F3BD-9463-CFC1-1EE4DC541B42}"/>
+                <a16:creationId xmlns:a16="http://schemas.microsoft.com/office/drawing/2014/main" id="{CA94974B-60CF-3BB9-2F58-D1F6AE128DC0}"/>
               </a:ext>
             </a:extLst>
           </p:cNvPr>
@@ -6804,7 +6827,7 @@
           <p:cNvPr id="26" name="Прямоугольник 25">
             <a:extLst>
               <a:ext uri="{FF2B5EF4-FFF2-40B4-BE49-F238E27FC236}">
-                <a16:creationId xmlns:a16="http://schemas.microsoft.com/office/drawing/2014/main" id="{2673099A-0B5C-A8A2-0855-A1148E9797FE}"/>
+                <a16:creationId xmlns:a16="http://schemas.microsoft.com/office/drawing/2014/main" id="{B852BBBA-C7DA-0AC9-25A5-1A2DE034C757}"/>
               </a:ext>
             </a:extLst>
           </p:cNvPr>
@@ -6872,7 +6895,7 @@
           <p:cNvPr id="27" name="TextBox 26">
             <a:extLst>
               <a:ext uri="{FF2B5EF4-FFF2-40B4-BE49-F238E27FC236}">
-                <a16:creationId xmlns:a16="http://schemas.microsoft.com/office/drawing/2014/main" id="{5E351132-9826-C162-45A9-329B02A6C649}"/>
+                <a16:creationId xmlns:a16="http://schemas.microsoft.com/office/drawing/2014/main" id="{9AC45325-9772-5A22-03FE-42841C297810}"/>
               </a:ext>
             </a:extLst>
           </p:cNvPr>
@@ -6917,7 +6940,7 @@
           <p:cNvPr id="28" name="TextBox 27">
             <a:extLst>
               <a:ext uri="{FF2B5EF4-FFF2-40B4-BE49-F238E27FC236}">
-                <a16:creationId xmlns:a16="http://schemas.microsoft.com/office/drawing/2014/main" id="{DFC612AB-5655-CD6A-C4C8-0CB80FD295C2}"/>
+                <a16:creationId xmlns:a16="http://schemas.microsoft.com/office/drawing/2014/main" id="{135B9A7B-27EA-7611-2F4B-A4D517D1688E}"/>
               </a:ext>
             </a:extLst>
           </p:cNvPr>
@@ -6962,7 +6985,7 @@
           <p:cNvPr id="29" name="Прямоугольник 28">
             <a:extLst>
               <a:ext uri="{FF2B5EF4-FFF2-40B4-BE49-F238E27FC236}">
-                <a16:creationId xmlns:a16="http://schemas.microsoft.com/office/drawing/2014/main" id="{C3A1EE1B-E966-95AF-B936-38456229B14B}"/>
+                <a16:creationId xmlns:a16="http://schemas.microsoft.com/office/drawing/2014/main" id="{6B0B0FF9-0BAB-2BD7-0659-D52131B78CBE}"/>
               </a:ext>
             </a:extLst>
           </p:cNvPr>
@@ -7030,7 +7053,7 @@
           <p:cNvPr id="30" name="Прямоугольник 29">
             <a:extLst>
               <a:ext uri="{FF2B5EF4-FFF2-40B4-BE49-F238E27FC236}">
-                <a16:creationId xmlns:a16="http://schemas.microsoft.com/office/drawing/2014/main" id="{83D02844-BC61-1D35-F3EA-FA80719F9980}"/>
+                <a16:creationId xmlns:a16="http://schemas.microsoft.com/office/drawing/2014/main" id="{AA61E741-3B9B-C40E-5BF1-068BD5EC5B66}"/>
               </a:ext>
             </a:extLst>
           </p:cNvPr>
@@ -7098,7 +7121,7 @@
           <p:cNvPr id="31" name="TextBox 30">
             <a:extLst>
               <a:ext uri="{FF2B5EF4-FFF2-40B4-BE49-F238E27FC236}">
-                <a16:creationId xmlns:a16="http://schemas.microsoft.com/office/drawing/2014/main" id="{BE6169BA-B03E-0348-3659-74B8F19CFF08}"/>
+                <a16:creationId xmlns:a16="http://schemas.microsoft.com/office/drawing/2014/main" id="{7F2D7252-B6A1-084F-30AB-F71F5C121B54}"/>
               </a:ext>
             </a:extLst>
           </p:cNvPr>
@@ -7143,7 +7166,7 @@
           <p:cNvPr id="32" name="TextBox 31">
             <a:extLst>
               <a:ext uri="{FF2B5EF4-FFF2-40B4-BE49-F238E27FC236}">
-                <a16:creationId xmlns:a16="http://schemas.microsoft.com/office/drawing/2014/main" id="{5371422D-1590-25AE-A503-A96E8FDBDD11}"/>
+                <a16:creationId xmlns:a16="http://schemas.microsoft.com/office/drawing/2014/main" id="{AAD376D1-80D8-EE16-2CD9-34ED29D8EB7C}"/>
               </a:ext>
             </a:extLst>
           </p:cNvPr>
@@ -7188,7 +7211,7 @@
           <p:cNvPr id="33" name="Прямоугольник 32">
             <a:extLst>
               <a:ext uri="{FF2B5EF4-FFF2-40B4-BE49-F238E27FC236}">
-                <a16:creationId xmlns:a16="http://schemas.microsoft.com/office/drawing/2014/main" id="{46FE07E8-0036-81D7-88CB-D6CD410DC8CA}"/>
+                <a16:creationId xmlns:a16="http://schemas.microsoft.com/office/drawing/2014/main" id="{4E59CC0D-8F06-FE34-AC44-56C22D92BC2E}"/>
               </a:ext>
             </a:extLst>
           </p:cNvPr>
@@ -7256,7 +7279,7 @@
           <p:cNvPr id="34" name="Прямоугольник 33">
             <a:extLst>
               <a:ext uri="{FF2B5EF4-FFF2-40B4-BE49-F238E27FC236}">
-                <a16:creationId xmlns:a16="http://schemas.microsoft.com/office/drawing/2014/main" id="{BA5254D7-E299-D98D-EE84-68EE0C684E8E}"/>
+                <a16:creationId xmlns:a16="http://schemas.microsoft.com/office/drawing/2014/main" id="{1F910C12-AAC0-979D-10AF-9E70F6316DA9}"/>
               </a:ext>
             </a:extLst>
           </p:cNvPr>
@@ -7324,7 +7347,7 @@
           <p:cNvPr id="35" name="TextBox 34">
             <a:extLst>
               <a:ext uri="{FF2B5EF4-FFF2-40B4-BE49-F238E27FC236}">
-                <a16:creationId xmlns:a16="http://schemas.microsoft.com/office/drawing/2014/main" id="{FC3147AC-C326-9669-48FE-9643839F65B5}"/>
+                <a16:creationId xmlns:a16="http://schemas.microsoft.com/office/drawing/2014/main" id="{32BA7798-1769-52F5-2617-B733CA7B9A3B}"/>
               </a:ext>
             </a:extLst>
           </p:cNvPr>
@@ -7369,7 +7392,7 @@
           <p:cNvPr id="36" name="TextBox 35">
             <a:extLst>
               <a:ext uri="{FF2B5EF4-FFF2-40B4-BE49-F238E27FC236}">
-                <a16:creationId xmlns:a16="http://schemas.microsoft.com/office/drawing/2014/main" id="{68E62622-4A95-5A20-3187-15958D711985}"/>
+                <a16:creationId xmlns:a16="http://schemas.microsoft.com/office/drawing/2014/main" id="{F8349F15-D1BD-4061-B0C1-2E76A3D634E7}"/>
               </a:ext>
             </a:extLst>
           </p:cNvPr>
@@ -7414,7 +7437,7 @@
           <p:cNvPr id="37" name="Прямоугольник 36">
             <a:extLst>
               <a:ext uri="{FF2B5EF4-FFF2-40B4-BE49-F238E27FC236}">
-                <a16:creationId xmlns:a16="http://schemas.microsoft.com/office/drawing/2014/main" id="{AE150510-9003-F58E-F16A-7291FC8CC1AD}"/>
+                <a16:creationId xmlns:a16="http://schemas.microsoft.com/office/drawing/2014/main" id="{8407CF03-441A-4500-40DA-97EEA6A07AA9}"/>
               </a:ext>
             </a:extLst>
           </p:cNvPr>
@@ -7482,7 +7505,7 @@
           <p:cNvPr id="38" name="Прямоугольник 37">
             <a:extLst>
               <a:ext uri="{FF2B5EF4-FFF2-40B4-BE49-F238E27FC236}">
-                <a16:creationId xmlns:a16="http://schemas.microsoft.com/office/drawing/2014/main" id="{4B4ACC07-8248-6952-875D-7C69B33290EF}"/>
+                <a16:creationId xmlns:a16="http://schemas.microsoft.com/office/drawing/2014/main" id="{2BDAEC12-97F0-2165-8531-076586AAC159}"/>
               </a:ext>
             </a:extLst>
           </p:cNvPr>
@@ -7550,7 +7573,7 @@
           <p:cNvPr id="39" name="TextBox 38">
             <a:extLst>
               <a:ext uri="{FF2B5EF4-FFF2-40B4-BE49-F238E27FC236}">
-                <a16:creationId xmlns:a16="http://schemas.microsoft.com/office/drawing/2014/main" id="{4E8AA0B3-F0E9-97E2-2667-FDF72AE18E83}"/>
+                <a16:creationId xmlns:a16="http://schemas.microsoft.com/office/drawing/2014/main" id="{1BD57F80-B7E4-44FD-F5F4-7E3F2FD8ED57}"/>
               </a:ext>
             </a:extLst>
           </p:cNvPr>
@@ -7595,7 +7618,7 @@
           <p:cNvPr id="40" name="TextBox 39">
             <a:extLst>
               <a:ext uri="{FF2B5EF4-FFF2-40B4-BE49-F238E27FC236}">
-                <a16:creationId xmlns:a16="http://schemas.microsoft.com/office/drawing/2014/main" id="{285934CB-A92C-4466-C352-6D9DC8E20FD7}"/>
+                <a16:creationId xmlns:a16="http://schemas.microsoft.com/office/drawing/2014/main" id="{0EA92934-AC16-FECB-D147-99C029CF2072}"/>
               </a:ext>
             </a:extLst>
           </p:cNvPr>
@@ -7640,7 +7663,7 @@
           <p:cNvPr id="41" name="Прямоугольник 40">
             <a:extLst>
               <a:ext uri="{FF2B5EF4-FFF2-40B4-BE49-F238E27FC236}">
-                <a16:creationId xmlns:a16="http://schemas.microsoft.com/office/drawing/2014/main" id="{BFBEB746-EF5B-7924-6572-78953F4F61F2}"/>
+                <a16:creationId xmlns:a16="http://schemas.microsoft.com/office/drawing/2014/main" id="{5E170CC2-BD98-F2B2-9C8A-FFADF2D6A6AF}"/>
               </a:ext>
             </a:extLst>
           </p:cNvPr>
@@ -7706,7 +7729,7 @@
     </p:spTree>
     <p:extLst>
       <p:ext uri="{BB962C8B-B14F-4D97-AF65-F5344CB8AC3E}">
-        <p14:creationId xmlns:p14="http://schemas.microsoft.com/office/powerpoint/2010/main" val="2368063531"/>
+        <p14:creationId xmlns:p14="http://schemas.microsoft.com/office/powerpoint/2010/main" val="3493037512"/>
       </p:ext>
     </p:extLst>
   </p:cSld>
@@ -7738,7 +7761,7 @@
           <p:cNvPr id="2" name="Прямоугольник 1">
             <a:extLst>
               <a:ext uri="{FF2B5EF4-FFF2-40B4-BE49-F238E27FC236}">
-                <a16:creationId xmlns:a16="http://schemas.microsoft.com/office/drawing/2014/main" id="{35094F67-A68C-79B3-3985-8CC8172D978E}"/>
+                <a16:creationId xmlns:a16="http://schemas.microsoft.com/office/drawing/2014/main" id="{76300278-8ECF-BD84-E489-F0FAF4631DB9}"/>
               </a:ext>
             </a:extLst>
           </p:cNvPr>
@@ -7806,7 +7829,7 @@
           <p:cNvPr id="3" name="Прямоугольник 2">
             <a:extLst>
               <a:ext uri="{FF2B5EF4-FFF2-40B4-BE49-F238E27FC236}">
-                <a16:creationId xmlns:a16="http://schemas.microsoft.com/office/drawing/2014/main" id="{37E88B63-8D98-A4EE-A66D-0C59F1CF8A3A}"/>
+                <a16:creationId xmlns:a16="http://schemas.microsoft.com/office/drawing/2014/main" id="{91FB2EA0-9D50-ACE9-E903-23BB7D84E73F}"/>
               </a:ext>
             </a:extLst>
           </p:cNvPr>
@@ -7874,7 +7897,7 @@
           <p:cNvPr id="4" name="TextBox 3">
             <a:extLst>
               <a:ext uri="{FF2B5EF4-FFF2-40B4-BE49-F238E27FC236}">
-                <a16:creationId xmlns:a16="http://schemas.microsoft.com/office/drawing/2014/main" id="{97562C8E-B357-C6AA-F9B0-9559EE6D64FA}"/>
+                <a16:creationId xmlns:a16="http://schemas.microsoft.com/office/drawing/2014/main" id="{D91D41AE-D8A1-BABC-255B-CA6197208B8E}"/>
               </a:ext>
             </a:extLst>
           </p:cNvPr>
@@ -7919,7 +7942,7 @@
           <p:cNvPr id="5" name="TextBox 4">
             <a:extLst>
               <a:ext uri="{FF2B5EF4-FFF2-40B4-BE49-F238E27FC236}">
-                <a16:creationId xmlns:a16="http://schemas.microsoft.com/office/drawing/2014/main" id="{025752C8-D7D5-BFD7-22AB-DA809FA5254A}"/>
+                <a16:creationId xmlns:a16="http://schemas.microsoft.com/office/drawing/2014/main" id="{5BE088BB-E7CB-39E3-6339-24C1EA257035}"/>
               </a:ext>
             </a:extLst>
           </p:cNvPr>
@@ -7964,7 +7987,7 @@
           <p:cNvPr id="6" name="Прямоугольник 5">
             <a:extLst>
               <a:ext uri="{FF2B5EF4-FFF2-40B4-BE49-F238E27FC236}">
-                <a16:creationId xmlns:a16="http://schemas.microsoft.com/office/drawing/2014/main" id="{55704496-170F-92D3-C553-CA9B7B4F7F7C}"/>
+                <a16:creationId xmlns:a16="http://schemas.microsoft.com/office/drawing/2014/main" id="{340F8B06-334D-63CE-A158-2B33D6A7698F}"/>
               </a:ext>
             </a:extLst>
           </p:cNvPr>
@@ -8032,7 +8055,7 @@
           <p:cNvPr id="7" name="Прямоугольник 6">
             <a:extLst>
               <a:ext uri="{FF2B5EF4-FFF2-40B4-BE49-F238E27FC236}">
-                <a16:creationId xmlns:a16="http://schemas.microsoft.com/office/drawing/2014/main" id="{320A6027-D660-5FFB-A29A-8D0F47DA0CBE}"/>
+                <a16:creationId xmlns:a16="http://schemas.microsoft.com/office/drawing/2014/main" id="{7E1E7EFC-D143-455C-8D94-6FE812648B45}"/>
               </a:ext>
             </a:extLst>
           </p:cNvPr>
@@ -8100,7 +8123,7 @@
           <p:cNvPr id="8" name="TextBox 7">
             <a:extLst>
               <a:ext uri="{FF2B5EF4-FFF2-40B4-BE49-F238E27FC236}">
-                <a16:creationId xmlns:a16="http://schemas.microsoft.com/office/drawing/2014/main" id="{28A3919D-1839-A9E5-08D4-A904A91ACF87}"/>
+                <a16:creationId xmlns:a16="http://schemas.microsoft.com/office/drawing/2014/main" id="{3EC5D5A7-FC81-CBF1-4871-6C7B99848CDA}"/>
               </a:ext>
             </a:extLst>
           </p:cNvPr>
@@ -8145,7 +8168,7 @@
           <p:cNvPr id="9" name="TextBox 8">
             <a:extLst>
               <a:ext uri="{FF2B5EF4-FFF2-40B4-BE49-F238E27FC236}">
-                <a16:creationId xmlns:a16="http://schemas.microsoft.com/office/drawing/2014/main" id="{9B3268AD-774C-370F-BB16-1AF2EED65D24}"/>
+                <a16:creationId xmlns:a16="http://schemas.microsoft.com/office/drawing/2014/main" id="{F57D1615-CDD2-82AC-B115-CC73A7B95C11}"/>
               </a:ext>
             </a:extLst>
           </p:cNvPr>
@@ -8190,7 +8213,7 @@
           <p:cNvPr id="11" name="Рисунок 10">
             <a:extLst>
               <a:ext uri="{FF2B5EF4-FFF2-40B4-BE49-F238E27FC236}">
-                <a16:creationId xmlns:a16="http://schemas.microsoft.com/office/drawing/2014/main" id="{49D1D6EE-4DF8-644F-BEC0-1446F63509D5}"/>
+                <a16:creationId xmlns:a16="http://schemas.microsoft.com/office/drawing/2014/main" id="{5D094974-EB6C-321A-616B-8FE17CF502D3}"/>
               </a:ext>
             </a:extLst>
           </p:cNvPr>
@@ -8231,7 +8254,7 @@
           <p:cNvPr id="12" name="TextBox 11">
             <a:extLst>
               <a:ext uri="{FF2B5EF4-FFF2-40B4-BE49-F238E27FC236}">
-                <a16:creationId xmlns:a16="http://schemas.microsoft.com/office/drawing/2014/main" id="{C92F7822-6676-C213-DB8F-BCC17C384CD4}"/>
+                <a16:creationId xmlns:a16="http://schemas.microsoft.com/office/drawing/2014/main" id="{2310E946-31DB-A854-2A21-5B137A390A6E}"/>
               </a:ext>
             </a:extLst>
           </p:cNvPr>
@@ -8282,7 +8305,7 @@
           <p:cNvPr id="13" name="TextBox 12">
             <a:extLst>
               <a:ext uri="{FF2B5EF4-FFF2-40B4-BE49-F238E27FC236}">
-                <a16:creationId xmlns:a16="http://schemas.microsoft.com/office/drawing/2014/main" id="{8BF61D67-20B1-711F-E1C7-24E214BCCD88}"/>
+                <a16:creationId xmlns:a16="http://schemas.microsoft.com/office/drawing/2014/main" id="{FEB1FEC3-54BC-2A27-AFB6-CD26A9575945}"/>
               </a:ext>
             </a:extLst>
           </p:cNvPr>
@@ -8327,7 +8350,7 @@
           <p:cNvPr id="14" name="Прямоугольник 13">
             <a:extLst>
               <a:ext uri="{FF2B5EF4-FFF2-40B4-BE49-F238E27FC236}">
-                <a16:creationId xmlns:a16="http://schemas.microsoft.com/office/drawing/2014/main" id="{DC4931F4-9930-1313-449D-419C783D2C2D}"/>
+                <a16:creationId xmlns:a16="http://schemas.microsoft.com/office/drawing/2014/main" id="{B541CA17-9362-8AB5-D682-C8FB43F11DC4}"/>
               </a:ext>
             </a:extLst>
           </p:cNvPr>
@@ -8395,7 +8418,7 @@
           <p:cNvPr id="16" name="Рисунок 15">
             <a:extLst>
               <a:ext uri="{FF2B5EF4-FFF2-40B4-BE49-F238E27FC236}">
-                <a16:creationId xmlns:a16="http://schemas.microsoft.com/office/drawing/2014/main" id="{75FD45C3-A755-6AD8-9A43-D6EE6F87540B}"/>
+                <a16:creationId xmlns:a16="http://schemas.microsoft.com/office/drawing/2014/main" id="{AF80F33C-8CCE-B4CB-27E4-38F51E09B92A}"/>
               </a:ext>
             </a:extLst>
           </p:cNvPr>
@@ -8436,7 +8459,7 @@
           <p:cNvPr id="17" name="TextBox 16">
             <a:extLst>
               <a:ext uri="{FF2B5EF4-FFF2-40B4-BE49-F238E27FC236}">
-                <a16:creationId xmlns:a16="http://schemas.microsoft.com/office/drawing/2014/main" id="{DD2D450D-1D8D-627E-29DB-61AADABF0E11}"/>
+                <a16:creationId xmlns:a16="http://schemas.microsoft.com/office/drawing/2014/main" id="{984C2C58-4BD4-E2DD-42FC-D3B4AE883B49}"/>
               </a:ext>
             </a:extLst>
           </p:cNvPr>
@@ -8487,7 +8510,7 @@
           <p:cNvPr id="18" name="TextBox 17">
             <a:extLst>
               <a:ext uri="{FF2B5EF4-FFF2-40B4-BE49-F238E27FC236}">
-                <a16:creationId xmlns:a16="http://schemas.microsoft.com/office/drawing/2014/main" id="{98A6BC36-AF5C-1B13-0B33-1AA89C803A12}"/>
+                <a16:creationId xmlns:a16="http://schemas.microsoft.com/office/drawing/2014/main" id="{71840C40-9C29-8F8C-E028-C2409F17E398}"/>
               </a:ext>
             </a:extLst>
           </p:cNvPr>
@@ -8532,7 +8555,7 @@
           <p:cNvPr id="19" name="Прямоугольник 18">
             <a:extLst>
               <a:ext uri="{FF2B5EF4-FFF2-40B4-BE49-F238E27FC236}">
-                <a16:creationId xmlns:a16="http://schemas.microsoft.com/office/drawing/2014/main" id="{9C3B2593-C402-E67F-68AB-9EA7070992DC}"/>
+                <a16:creationId xmlns:a16="http://schemas.microsoft.com/office/drawing/2014/main" id="{1A8F096F-09B9-E8A5-854F-5A6A7F003E18}"/>
               </a:ext>
             </a:extLst>
           </p:cNvPr>
@@ -8600,7 +8623,7 @@
           <p:cNvPr id="21" name="Рисунок 20">
             <a:extLst>
               <a:ext uri="{FF2B5EF4-FFF2-40B4-BE49-F238E27FC236}">
-                <a16:creationId xmlns:a16="http://schemas.microsoft.com/office/drawing/2014/main" id="{148B0AFE-17D3-188E-AE82-4E81AA640859}"/>
+                <a16:creationId xmlns:a16="http://schemas.microsoft.com/office/drawing/2014/main" id="{D7F4AE84-55D0-D449-7278-3BB1907444AC}"/>
               </a:ext>
             </a:extLst>
           </p:cNvPr>
@@ -8641,7 +8664,7 @@
           <p:cNvPr id="22" name="TextBox 21">
             <a:extLst>
               <a:ext uri="{FF2B5EF4-FFF2-40B4-BE49-F238E27FC236}">
-                <a16:creationId xmlns:a16="http://schemas.microsoft.com/office/drawing/2014/main" id="{6022DA22-74D2-81EF-2C7F-A07852B10E31}"/>
+                <a16:creationId xmlns:a16="http://schemas.microsoft.com/office/drawing/2014/main" id="{1E8D1FCD-75F5-5290-1CB9-89EE5B863339}"/>
               </a:ext>
             </a:extLst>
           </p:cNvPr>
@@ -8692,7 +8715,7 @@
           <p:cNvPr id="23" name="TextBox 22">
             <a:extLst>
               <a:ext uri="{FF2B5EF4-FFF2-40B4-BE49-F238E27FC236}">
-                <a16:creationId xmlns:a16="http://schemas.microsoft.com/office/drawing/2014/main" id="{59F4316B-B5E1-79DC-82B3-3AFBCC94D9A2}"/>
+                <a16:creationId xmlns:a16="http://schemas.microsoft.com/office/drawing/2014/main" id="{AC1901C4-1F88-F561-CA13-2D624D1EBC27}"/>
               </a:ext>
             </a:extLst>
           </p:cNvPr>
@@ -8737,7 +8760,7 @@
           <p:cNvPr id="24" name="Прямоугольник 23">
             <a:extLst>
               <a:ext uri="{FF2B5EF4-FFF2-40B4-BE49-F238E27FC236}">
-                <a16:creationId xmlns:a16="http://schemas.microsoft.com/office/drawing/2014/main" id="{D668ABBC-7F0C-60D2-6E54-4D9CCA055A19}"/>
+                <a16:creationId xmlns:a16="http://schemas.microsoft.com/office/drawing/2014/main" id="{12E6DA0B-2873-B35F-BA65-A22CFF7A069C}"/>
               </a:ext>
             </a:extLst>
           </p:cNvPr>
@@ -8805,7 +8828,7 @@
           <p:cNvPr id="26" name="Рисунок 25">
             <a:extLst>
               <a:ext uri="{FF2B5EF4-FFF2-40B4-BE49-F238E27FC236}">
-                <a16:creationId xmlns:a16="http://schemas.microsoft.com/office/drawing/2014/main" id="{B6662040-CA8F-0391-BF40-CDAC81DB54A3}"/>
+                <a16:creationId xmlns:a16="http://schemas.microsoft.com/office/drawing/2014/main" id="{1EFC5300-304D-A550-A55B-D980B109AE56}"/>
               </a:ext>
             </a:extLst>
           </p:cNvPr>
@@ -8846,7 +8869,7 @@
           <p:cNvPr id="27" name="TextBox 26">
             <a:extLst>
               <a:ext uri="{FF2B5EF4-FFF2-40B4-BE49-F238E27FC236}">
-                <a16:creationId xmlns:a16="http://schemas.microsoft.com/office/drawing/2014/main" id="{58617B4C-3365-96D4-6AF7-C0E1308E9D3B}"/>
+                <a16:creationId xmlns:a16="http://schemas.microsoft.com/office/drawing/2014/main" id="{5174157D-C5E6-1AB7-DE80-7C16521020A9}"/>
               </a:ext>
             </a:extLst>
           </p:cNvPr>
@@ -8900,7 +8923,7 @@
           <p:cNvPr id="28" name="TextBox 27">
             <a:extLst>
               <a:ext uri="{FF2B5EF4-FFF2-40B4-BE49-F238E27FC236}">
-                <a16:creationId xmlns:a16="http://schemas.microsoft.com/office/drawing/2014/main" id="{5CBFC8A7-77DF-7574-AF06-4747936DCA53}"/>
+                <a16:creationId xmlns:a16="http://schemas.microsoft.com/office/drawing/2014/main" id="{8BD064FF-B9EC-985C-3815-8FDBBA967C57}"/>
               </a:ext>
             </a:extLst>
           </p:cNvPr>
@@ -8945,7 +8968,7 @@
           <p:cNvPr id="29" name="Прямоугольник 28">
             <a:extLst>
               <a:ext uri="{FF2B5EF4-FFF2-40B4-BE49-F238E27FC236}">
-                <a16:creationId xmlns:a16="http://schemas.microsoft.com/office/drawing/2014/main" id="{502EF78A-D9C0-85C9-7473-58BB9F567C13}"/>
+                <a16:creationId xmlns:a16="http://schemas.microsoft.com/office/drawing/2014/main" id="{CCA39B5A-5636-BB92-4687-265A3EAC9EC7}"/>
               </a:ext>
             </a:extLst>
           </p:cNvPr>
@@ -9013,7 +9036,7 @@
           <p:cNvPr id="30" name="TextBox 29">
             <a:extLst>
               <a:ext uri="{FF2B5EF4-FFF2-40B4-BE49-F238E27FC236}">
-                <a16:creationId xmlns:a16="http://schemas.microsoft.com/office/drawing/2014/main" id="{867EFE62-2806-AFA3-86F3-35E2F7959DC7}"/>
+                <a16:creationId xmlns:a16="http://schemas.microsoft.com/office/drawing/2014/main" id="{2CF213D4-0A06-066A-26B6-CBC1B97C5FEA}"/>
               </a:ext>
             </a:extLst>
           </p:cNvPr>
@@ -9056,7 +9079,7 @@
     </p:spTree>
     <p:extLst>
       <p:ext uri="{BB962C8B-B14F-4D97-AF65-F5344CB8AC3E}">
-        <p14:creationId xmlns:p14="http://schemas.microsoft.com/office/powerpoint/2010/main" val="1029817701"/>
+        <p14:creationId xmlns:p14="http://schemas.microsoft.com/office/powerpoint/2010/main" val="3103614742"/>
       </p:ext>
     </p:extLst>
   </p:cSld>
@@ -9088,7 +9111,7 @@
           <p:cNvPr id="2" name="Прямоугольник 1">
             <a:extLst>
               <a:ext uri="{FF2B5EF4-FFF2-40B4-BE49-F238E27FC236}">
-                <a16:creationId xmlns:a16="http://schemas.microsoft.com/office/drawing/2014/main" id="{8CE874EB-4C31-4404-8A30-BFD2E6BD7E54}"/>
+                <a16:creationId xmlns:a16="http://schemas.microsoft.com/office/drawing/2014/main" id="{4717F411-D08D-29EB-783E-55EC7586675C}"/>
               </a:ext>
             </a:extLst>
           </p:cNvPr>
@@ -9156,7 +9179,7 @@
           <p:cNvPr id="3" name="Прямоугольник 2">
             <a:extLst>
               <a:ext uri="{FF2B5EF4-FFF2-40B4-BE49-F238E27FC236}">
-                <a16:creationId xmlns:a16="http://schemas.microsoft.com/office/drawing/2014/main" id="{37AE3624-D074-B83F-AA29-AB823A90E02C}"/>
+                <a16:creationId xmlns:a16="http://schemas.microsoft.com/office/drawing/2014/main" id="{8FCE11C7-D8A7-209D-9039-7CAA7594862D}"/>
               </a:ext>
             </a:extLst>
           </p:cNvPr>
@@ -9224,7 +9247,7 @@
           <p:cNvPr id="4" name="TextBox 3">
             <a:extLst>
               <a:ext uri="{FF2B5EF4-FFF2-40B4-BE49-F238E27FC236}">
-                <a16:creationId xmlns:a16="http://schemas.microsoft.com/office/drawing/2014/main" id="{A2AE7FB8-85B4-E7E4-F5C6-4AE7B021F3A3}"/>
+                <a16:creationId xmlns:a16="http://schemas.microsoft.com/office/drawing/2014/main" id="{2EC3DCE0-D1C7-F107-5F08-CC343B852623}"/>
               </a:ext>
             </a:extLst>
           </p:cNvPr>
@@ -9269,7 +9292,7 @@
           <p:cNvPr id="5" name="TextBox 4">
             <a:extLst>
               <a:ext uri="{FF2B5EF4-FFF2-40B4-BE49-F238E27FC236}">
-                <a16:creationId xmlns:a16="http://schemas.microsoft.com/office/drawing/2014/main" id="{3B91FBCE-4061-79C9-9EA6-1EF5266660A4}"/>
+                <a16:creationId xmlns:a16="http://schemas.microsoft.com/office/drawing/2014/main" id="{47BB32E5-4D42-735E-A20D-C94482B77C94}"/>
               </a:ext>
             </a:extLst>
           </p:cNvPr>
@@ -9314,7 +9337,7 @@
           <p:cNvPr id="6" name="Прямоугольник 5">
             <a:extLst>
               <a:ext uri="{FF2B5EF4-FFF2-40B4-BE49-F238E27FC236}">
-                <a16:creationId xmlns:a16="http://schemas.microsoft.com/office/drawing/2014/main" id="{7C95B2FB-965E-80D4-8F9F-CE13F5EC23BC}"/>
+                <a16:creationId xmlns:a16="http://schemas.microsoft.com/office/drawing/2014/main" id="{21A4671B-DF35-6106-F852-F2A74B847395}"/>
               </a:ext>
             </a:extLst>
           </p:cNvPr>
@@ -9382,7 +9405,7 @@
           <p:cNvPr id="7" name="Прямоугольник 6">
             <a:extLst>
               <a:ext uri="{FF2B5EF4-FFF2-40B4-BE49-F238E27FC236}">
-                <a16:creationId xmlns:a16="http://schemas.microsoft.com/office/drawing/2014/main" id="{B57BE95C-37E1-CB77-A29F-D0F136240AD7}"/>
+                <a16:creationId xmlns:a16="http://schemas.microsoft.com/office/drawing/2014/main" id="{97B07FD3-CF9D-6CFC-9050-44522E8936ED}"/>
               </a:ext>
             </a:extLst>
           </p:cNvPr>
@@ -9450,7 +9473,7 @@
           <p:cNvPr id="8" name="TextBox 7">
             <a:extLst>
               <a:ext uri="{FF2B5EF4-FFF2-40B4-BE49-F238E27FC236}">
-                <a16:creationId xmlns:a16="http://schemas.microsoft.com/office/drawing/2014/main" id="{9ECFFE05-B37A-A810-0BC2-BE0C5CDEEB38}"/>
+                <a16:creationId xmlns:a16="http://schemas.microsoft.com/office/drawing/2014/main" id="{62F2FD16-D5D5-6E7D-9CA2-397E790BD80B}"/>
               </a:ext>
             </a:extLst>
           </p:cNvPr>
@@ -9495,7 +9518,7 @@
           <p:cNvPr id="9" name="TextBox 8">
             <a:extLst>
               <a:ext uri="{FF2B5EF4-FFF2-40B4-BE49-F238E27FC236}">
-                <a16:creationId xmlns:a16="http://schemas.microsoft.com/office/drawing/2014/main" id="{14AEC8CF-8E7C-3312-73AB-41566C20E201}"/>
+                <a16:creationId xmlns:a16="http://schemas.microsoft.com/office/drawing/2014/main" id="{783B3659-A055-2EBC-4E45-2F17EB4A87B8}"/>
               </a:ext>
             </a:extLst>
           </p:cNvPr>
@@ -9540,7 +9563,7 @@
           <p:cNvPr id="10" name="TextBox 9">
             <a:extLst>
               <a:ext uri="{FF2B5EF4-FFF2-40B4-BE49-F238E27FC236}">
-                <a16:creationId xmlns:a16="http://schemas.microsoft.com/office/drawing/2014/main" id="{CC3E91B8-EC52-7361-A636-997C25E65A37}"/>
+                <a16:creationId xmlns:a16="http://schemas.microsoft.com/office/drawing/2014/main" id="{6FEC9BB9-31A7-1C19-EB88-8E9C6D49719B}"/>
               </a:ext>
             </a:extLst>
           </p:cNvPr>
@@ -9585,7 +9608,7 @@
           <p:cNvPr id="11" name="TextBox 10">
             <a:extLst>
               <a:ext uri="{FF2B5EF4-FFF2-40B4-BE49-F238E27FC236}">
-                <a16:creationId xmlns:a16="http://schemas.microsoft.com/office/drawing/2014/main" id="{96859628-C43E-E4C3-0711-F02AF5A250B9}"/>
+                <a16:creationId xmlns:a16="http://schemas.microsoft.com/office/drawing/2014/main" id="{B9CE2E83-D7AB-4405-C353-DC916518F186}"/>
               </a:ext>
             </a:extLst>
           </p:cNvPr>
@@ -9630,7 +9653,7 @@
           <p:cNvPr id="12" name="Прямоугольник 11">
             <a:extLst>
               <a:ext uri="{FF2B5EF4-FFF2-40B4-BE49-F238E27FC236}">
-                <a16:creationId xmlns:a16="http://schemas.microsoft.com/office/drawing/2014/main" id="{0C140A68-99DF-115E-A250-4CD6C7E22C11}"/>
+                <a16:creationId xmlns:a16="http://schemas.microsoft.com/office/drawing/2014/main" id="{11115EAA-756F-8180-E3CE-9D544859555D}"/>
               </a:ext>
             </a:extLst>
           </p:cNvPr>
@@ -9698,7 +9721,7 @@
           <p:cNvPr id="13" name="TextBox 12">
             <a:extLst>
               <a:ext uri="{FF2B5EF4-FFF2-40B4-BE49-F238E27FC236}">
-                <a16:creationId xmlns:a16="http://schemas.microsoft.com/office/drawing/2014/main" id="{9A6A1F0F-C894-E7D2-17D0-797D2FC6B5B6}"/>
+                <a16:creationId xmlns:a16="http://schemas.microsoft.com/office/drawing/2014/main" id="{A1124129-82CC-592B-4610-33CBE3BCC1CE}"/>
               </a:ext>
             </a:extLst>
           </p:cNvPr>
@@ -9749,7 +9772,7 @@
           <p:cNvPr id="14" name="TextBox 13">
             <a:extLst>
               <a:ext uri="{FF2B5EF4-FFF2-40B4-BE49-F238E27FC236}">
-                <a16:creationId xmlns:a16="http://schemas.microsoft.com/office/drawing/2014/main" id="{75152309-3FDB-56A6-535D-DE2EB66AD633}"/>
+                <a16:creationId xmlns:a16="http://schemas.microsoft.com/office/drawing/2014/main" id="{8BD0E98B-805B-7097-3FAA-72F81173137A}"/>
               </a:ext>
             </a:extLst>
           </p:cNvPr>
@@ -9794,7 +9817,7 @@
           <p:cNvPr id="15" name="Прямоугольник 14">
             <a:extLst>
               <a:ext uri="{FF2B5EF4-FFF2-40B4-BE49-F238E27FC236}">
-                <a16:creationId xmlns:a16="http://schemas.microsoft.com/office/drawing/2014/main" id="{F582355C-3591-E9E0-62E3-9D4307427B5C}"/>
+                <a16:creationId xmlns:a16="http://schemas.microsoft.com/office/drawing/2014/main" id="{0C4EC327-DC20-44DC-C6B2-91937E2DC90D}"/>
               </a:ext>
             </a:extLst>
           </p:cNvPr>
@@ -9862,7 +9885,7 @@
           <p:cNvPr id="16" name="TextBox 15">
             <a:extLst>
               <a:ext uri="{FF2B5EF4-FFF2-40B4-BE49-F238E27FC236}">
-                <a16:creationId xmlns:a16="http://schemas.microsoft.com/office/drawing/2014/main" id="{1707C8C0-9D60-C584-8CD3-6D8A0D530599}"/>
+                <a16:creationId xmlns:a16="http://schemas.microsoft.com/office/drawing/2014/main" id="{8F9572EB-A521-3ECF-40FE-F1AC691844A5}"/>
               </a:ext>
             </a:extLst>
           </p:cNvPr>
@@ -9913,7 +9936,7 @@
           <p:cNvPr id="17" name="TextBox 16">
             <a:extLst>
               <a:ext uri="{FF2B5EF4-FFF2-40B4-BE49-F238E27FC236}">
-                <a16:creationId xmlns:a16="http://schemas.microsoft.com/office/drawing/2014/main" id="{85142988-7A84-2BCE-1A91-B69DAEFA5C41}"/>
+                <a16:creationId xmlns:a16="http://schemas.microsoft.com/office/drawing/2014/main" id="{B058202E-C7A8-0ED6-CCDC-C33EB6BCCF0E}"/>
               </a:ext>
             </a:extLst>
           </p:cNvPr>
@@ -9958,7 +9981,7 @@
           <p:cNvPr id="18" name="Прямоугольник 17">
             <a:extLst>
               <a:ext uri="{FF2B5EF4-FFF2-40B4-BE49-F238E27FC236}">
-                <a16:creationId xmlns:a16="http://schemas.microsoft.com/office/drawing/2014/main" id="{57BEBB24-658F-7AC8-91A9-481A69A7C4E0}"/>
+                <a16:creationId xmlns:a16="http://schemas.microsoft.com/office/drawing/2014/main" id="{EC66DA9F-9B1D-DA98-0955-F8857EC283A3}"/>
               </a:ext>
             </a:extLst>
           </p:cNvPr>
@@ -10026,7 +10049,7 @@
           <p:cNvPr id="19" name="TextBox 18">
             <a:extLst>
               <a:ext uri="{FF2B5EF4-FFF2-40B4-BE49-F238E27FC236}">
-                <a16:creationId xmlns:a16="http://schemas.microsoft.com/office/drawing/2014/main" id="{1AA9637B-4A81-0239-C8C7-FDF172E82075}"/>
+                <a16:creationId xmlns:a16="http://schemas.microsoft.com/office/drawing/2014/main" id="{617B7C9A-389D-CE39-9C13-415FC97791BC}"/>
               </a:ext>
             </a:extLst>
           </p:cNvPr>
@@ -10071,7 +10094,7 @@
           <p:cNvPr id="20" name="TextBox 19">
             <a:extLst>
               <a:ext uri="{FF2B5EF4-FFF2-40B4-BE49-F238E27FC236}">
-                <a16:creationId xmlns:a16="http://schemas.microsoft.com/office/drawing/2014/main" id="{032C94E5-ED07-E4F0-BD3D-3826D3E470C4}"/>
+                <a16:creationId xmlns:a16="http://schemas.microsoft.com/office/drawing/2014/main" id="{89D27138-81F5-627E-B210-81CE9759B2F2}"/>
               </a:ext>
             </a:extLst>
           </p:cNvPr>
@@ -10116,7 +10139,7 @@
           <p:cNvPr id="21" name="Прямоугольник 20">
             <a:extLst>
               <a:ext uri="{FF2B5EF4-FFF2-40B4-BE49-F238E27FC236}">
-                <a16:creationId xmlns:a16="http://schemas.microsoft.com/office/drawing/2014/main" id="{BBAD9078-1FF7-518F-E6DA-EE3960CEA1B0}"/>
+                <a16:creationId xmlns:a16="http://schemas.microsoft.com/office/drawing/2014/main" id="{AA48BB77-59E0-645B-AD36-4077454A8404}"/>
               </a:ext>
             </a:extLst>
           </p:cNvPr>
@@ -10184,7 +10207,7 @@
           <p:cNvPr id="23" name="Рисунок 22">
             <a:extLst>
               <a:ext uri="{FF2B5EF4-FFF2-40B4-BE49-F238E27FC236}">
-                <a16:creationId xmlns:a16="http://schemas.microsoft.com/office/drawing/2014/main" id="{84902D82-6771-7FBD-0F31-E99924E910F1}"/>
+                <a16:creationId xmlns:a16="http://schemas.microsoft.com/office/drawing/2014/main" id="{BD6EAC6D-1048-E741-B6C1-813417F52A4C}"/>
               </a:ext>
             </a:extLst>
           </p:cNvPr>
@@ -10218,7 +10241,7 @@
     </p:spTree>
     <p:extLst>
       <p:ext uri="{BB962C8B-B14F-4D97-AF65-F5344CB8AC3E}">
-        <p14:creationId xmlns:p14="http://schemas.microsoft.com/office/powerpoint/2010/main" val="885396521"/>
+        <p14:creationId xmlns:p14="http://schemas.microsoft.com/office/powerpoint/2010/main" val="3349513175"/>
       </p:ext>
     </p:extLst>
   </p:cSld>
@@ -10250,7 +10273,7 @@
           <p:cNvPr id="2" name="Прямоугольник 1">
             <a:extLst>
               <a:ext uri="{FF2B5EF4-FFF2-40B4-BE49-F238E27FC236}">
-                <a16:creationId xmlns:a16="http://schemas.microsoft.com/office/drawing/2014/main" id="{6E5055FF-2BD6-B244-D522-4C16B7A2B0CC}"/>
+                <a16:creationId xmlns:a16="http://schemas.microsoft.com/office/drawing/2014/main" id="{90630635-BE37-DDB4-4C12-29EC2BD7C294}"/>
               </a:ext>
             </a:extLst>
           </p:cNvPr>
@@ -10318,7 +10341,7 @@
           <p:cNvPr id="3" name="Прямоугольник 2">
             <a:extLst>
               <a:ext uri="{FF2B5EF4-FFF2-40B4-BE49-F238E27FC236}">
-                <a16:creationId xmlns:a16="http://schemas.microsoft.com/office/drawing/2014/main" id="{E0D4E66E-CE90-1473-AE9A-081181E52410}"/>
+                <a16:creationId xmlns:a16="http://schemas.microsoft.com/office/drawing/2014/main" id="{FD118315-F922-20C2-127F-8945A87D779D}"/>
               </a:ext>
             </a:extLst>
           </p:cNvPr>
@@ -10386,7 +10409,7 @@
           <p:cNvPr id="4" name="TextBox 3">
             <a:extLst>
               <a:ext uri="{FF2B5EF4-FFF2-40B4-BE49-F238E27FC236}">
-                <a16:creationId xmlns:a16="http://schemas.microsoft.com/office/drawing/2014/main" id="{102ED050-6547-3125-6636-632BC7D60B99}"/>
+                <a16:creationId xmlns:a16="http://schemas.microsoft.com/office/drawing/2014/main" id="{E2E356F2-66F9-44EA-98D4-F7F0BFA980D2}"/>
               </a:ext>
             </a:extLst>
           </p:cNvPr>
@@ -10431,7 +10454,7 @@
           <p:cNvPr id="5" name="TextBox 4">
             <a:extLst>
               <a:ext uri="{FF2B5EF4-FFF2-40B4-BE49-F238E27FC236}">
-                <a16:creationId xmlns:a16="http://schemas.microsoft.com/office/drawing/2014/main" id="{F454EAC2-A5E7-A147-90A9-0AB350804805}"/>
+                <a16:creationId xmlns:a16="http://schemas.microsoft.com/office/drawing/2014/main" id="{F9A3C076-2E85-0027-A1E9-7AC53C61FE47}"/>
               </a:ext>
             </a:extLst>
           </p:cNvPr>
@@ -10476,7 +10499,7 @@
           <p:cNvPr id="6" name="Прямоугольник 5">
             <a:extLst>
               <a:ext uri="{FF2B5EF4-FFF2-40B4-BE49-F238E27FC236}">
-                <a16:creationId xmlns:a16="http://schemas.microsoft.com/office/drawing/2014/main" id="{986518C8-5613-58A2-2FF5-846D56501F62}"/>
+                <a16:creationId xmlns:a16="http://schemas.microsoft.com/office/drawing/2014/main" id="{B6CCEC57-B7E9-B73B-8B02-04AB5084352E}"/>
               </a:ext>
             </a:extLst>
           </p:cNvPr>
@@ -10544,7 +10567,7 @@
           <p:cNvPr id="7" name="Прямоугольник 6">
             <a:extLst>
               <a:ext uri="{FF2B5EF4-FFF2-40B4-BE49-F238E27FC236}">
-                <a16:creationId xmlns:a16="http://schemas.microsoft.com/office/drawing/2014/main" id="{95735C05-44D5-D2BE-E76A-C5AFC23FBF53}"/>
+                <a16:creationId xmlns:a16="http://schemas.microsoft.com/office/drawing/2014/main" id="{0D276FD1-2A96-03F4-0AD3-1DCCF3C945F0}"/>
               </a:ext>
             </a:extLst>
           </p:cNvPr>
@@ -10612,7 +10635,7 @@
           <p:cNvPr id="8" name="TextBox 7">
             <a:extLst>
               <a:ext uri="{FF2B5EF4-FFF2-40B4-BE49-F238E27FC236}">
-                <a16:creationId xmlns:a16="http://schemas.microsoft.com/office/drawing/2014/main" id="{28F67348-7517-8008-74AC-34BBCB3B7B2F}"/>
+                <a16:creationId xmlns:a16="http://schemas.microsoft.com/office/drawing/2014/main" id="{944BCC63-9000-AC50-8344-F707FC9299A0}"/>
               </a:ext>
             </a:extLst>
           </p:cNvPr>
@@ -10657,7 +10680,7 @@
           <p:cNvPr id="9" name="TextBox 8">
             <a:extLst>
               <a:ext uri="{FF2B5EF4-FFF2-40B4-BE49-F238E27FC236}">
-                <a16:creationId xmlns:a16="http://schemas.microsoft.com/office/drawing/2014/main" id="{3C453450-5D65-0D46-06A2-FDB43B265940}"/>
+                <a16:creationId xmlns:a16="http://schemas.microsoft.com/office/drawing/2014/main" id="{3AEE19CA-928A-BCD4-E092-B89E3E08D22D}"/>
               </a:ext>
             </a:extLst>
           </p:cNvPr>
@@ -10702,7 +10725,7 @@
           <p:cNvPr id="10" name="Прямоугольник 9">
             <a:extLst>
               <a:ext uri="{FF2B5EF4-FFF2-40B4-BE49-F238E27FC236}">
-                <a16:creationId xmlns:a16="http://schemas.microsoft.com/office/drawing/2014/main" id="{8792B144-4B45-C926-41F4-6CFD152FB13B}"/>
+                <a16:creationId xmlns:a16="http://schemas.microsoft.com/office/drawing/2014/main" id="{81A27959-E4FC-8115-6E09-E06381A714A3}"/>
               </a:ext>
             </a:extLst>
           </p:cNvPr>
@@ -10770,7 +10793,7 @@
           <p:cNvPr id="11" name="TextBox 10">
             <a:extLst>
               <a:ext uri="{FF2B5EF4-FFF2-40B4-BE49-F238E27FC236}">
-                <a16:creationId xmlns:a16="http://schemas.microsoft.com/office/drawing/2014/main" id="{C9DBDDB9-5C81-4826-B80B-12064F4E6CC5}"/>
+                <a16:creationId xmlns:a16="http://schemas.microsoft.com/office/drawing/2014/main" id="{5B6BABBA-4E95-CAF2-554D-8508246EC45D}"/>
               </a:ext>
             </a:extLst>
           </p:cNvPr>
@@ -10815,7 +10838,7 @@
           <p:cNvPr id="12" name="TextBox 11">
             <a:extLst>
               <a:ext uri="{FF2B5EF4-FFF2-40B4-BE49-F238E27FC236}">
-                <a16:creationId xmlns:a16="http://schemas.microsoft.com/office/drawing/2014/main" id="{53625B4E-23D3-21D9-6BAB-D3AB9DFCFD2F}"/>
+                <a16:creationId xmlns:a16="http://schemas.microsoft.com/office/drawing/2014/main" id="{F9773854-CF73-59A3-6B4C-9F6A3DBE1F08}"/>
               </a:ext>
             </a:extLst>
           </p:cNvPr>
@@ -10860,7 +10883,7 @@
           <p:cNvPr id="13" name="TextBox 12">
             <a:extLst>
               <a:ext uri="{FF2B5EF4-FFF2-40B4-BE49-F238E27FC236}">
-                <a16:creationId xmlns:a16="http://schemas.microsoft.com/office/drawing/2014/main" id="{A200D9D2-6219-9B81-C8E8-203C3D2E32C2}"/>
+                <a16:creationId xmlns:a16="http://schemas.microsoft.com/office/drawing/2014/main" id="{EBF5E3AC-0025-50C8-45E7-BCC936E2430A}"/>
               </a:ext>
             </a:extLst>
           </p:cNvPr>
@@ -10905,7 +10928,7 @@
           <p:cNvPr id="14" name="Прямоугольник 13">
             <a:extLst>
               <a:ext uri="{FF2B5EF4-FFF2-40B4-BE49-F238E27FC236}">
-                <a16:creationId xmlns:a16="http://schemas.microsoft.com/office/drawing/2014/main" id="{19F3D46E-0CB6-E8C5-8E69-A7188C54EAA0}"/>
+                <a16:creationId xmlns:a16="http://schemas.microsoft.com/office/drawing/2014/main" id="{4EBB9480-440B-4513-4D3B-D3607F6C7518}"/>
               </a:ext>
             </a:extLst>
           </p:cNvPr>
@@ -10973,7 +10996,7 @@
           <p:cNvPr id="15" name="TextBox 14">
             <a:extLst>
               <a:ext uri="{FF2B5EF4-FFF2-40B4-BE49-F238E27FC236}">
-                <a16:creationId xmlns:a16="http://schemas.microsoft.com/office/drawing/2014/main" id="{54A9244C-7FD6-AFE5-594A-37DD874744BD}"/>
+                <a16:creationId xmlns:a16="http://schemas.microsoft.com/office/drawing/2014/main" id="{389142CB-C556-3750-3126-B3920BDE1CCA}"/>
               </a:ext>
             </a:extLst>
           </p:cNvPr>
@@ -11018,7 +11041,7 @@
           <p:cNvPr id="16" name="TextBox 15">
             <a:extLst>
               <a:ext uri="{FF2B5EF4-FFF2-40B4-BE49-F238E27FC236}">
-                <a16:creationId xmlns:a16="http://schemas.microsoft.com/office/drawing/2014/main" id="{70D85B3E-F9CA-8A73-849D-3A4F88CAFC73}"/>
+                <a16:creationId xmlns:a16="http://schemas.microsoft.com/office/drawing/2014/main" id="{CB2AA8FA-FAEF-3076-1A25-40EE6ED9B1DC}"/>
               </a:ext>
             </a:extLst>
           </p:cNvPr>
@@ -11063,7 +11086,7 @@
           <p:cNvPr id="17" name="Прямоугольник 16">
             <a:extLst>
               <a:ext uri="{FF2B5EF4-FFF2-40B4-BE49-F238E27FC236}">
-                <a16:creationId xmlns:a16="http://schemas.microsoft.com/office/drawing/2014/main" id="{1D7384CE-BAC0-FAD9-B6FB-73F62FEFE530}"/>
+                <a16:creationId xmlns:a16="http://schemas.microsoft.com/office/drawing/2014/main" id="{DA598A85-D29A-F32F-B404-9BD616BB2148}"/>
               </a:ext>
             </a:extLst>
           </p:cNvPr>
@@ -11131,7 +11154,7 @@
           <p:cNvPr id="18" name="TextBox 17">
             <a:extLst>
               <a:ext uri="{FF2B5EF4-FFF2-40B4-BE49-F238E27FC236}">
-                <a16:creationId xmlns:a16="http://schemas.microsoft.com/office/drawing/2014/main" id="{F53C5685-2137-18D0-B162-AAE9DF986D00}"/>
+                <a16:creationId xmlns:a16="http://schemas.microsoft.com/office/drawing/2014/main" id="{7F1985BC-03CC-C018-0D3E-F32E0D585676}"/>
               </a:ext>
             </a:extLst>
           </p:cNvPr>
@@ -11176,7 +11199,7 @@
           <p:cNvPr id="19" name="TextBox 18">
             <a:extLst>
               <a:ext uri="{FF2B5EF4-FFF2-40B4-BE49-F238E27FC236}">
-                <a16:creationId xmlns:a16="http://schemas.microsoft.com/office/drawing/2014/main" id="{4608788F-F79D-686F-5926-2FA46AC4D5A5}"/>
+                <a16:creationId xmlns:a16="http://schemas.microsoft.com/office/drawing/2014/main" id="{72DA87A5-30E0-AB39-98C6-FB3F660E1389}"/>
               </a:ext>
             </a:extLst>
           </p:cNvPr>
@@ -11221,7 +11244,7 @@
           <p:cNvPr id="20" name="TextBox 19">
             <a:extLst>
               <a:ext uri="{FF2B5EF4-FFF2-40B4-BE49-F238E27FC236}">
-                <a16:creationId xmlns:a16="http://schemas.microsoft.com/office/drawing/2014/main" id="{FC5C853F-3B47-AF51-F234-3BFA69DEBEAE}"/>
+                <a16:creationId xmlns:a16="http://schemas.microsoft.com/office/drawing/2014/main" id="{BD1776CE-D6C4-3994-D304-38DDDAB82351}"/>
               </a:ext>
             </a:extLst>
           </p:cNvPr>
@@ -11266,7 +11289,7 @@
           <p:cNvPr id="21" name="Прямоугольник 20">
             <a:extLst>
               <a:ext uri="{FF2B5EF4-FFF2-40B4-BE49-F238E27FC236}">
-                <a16:creationId xmlns:a16="http://schemas.microsoft.com/office/drawing/2014/main" id="{D65F6702-A664-69D6-1C5B-100A96BC526B}"/>
+                <a16:creationId xmlns:a16="http://schemas.microsoft.com/office/drawing/2014/main" id="{E1585C29-EECB-2F2F-338E-6A868B95BD1B}"/>
               </a:ext>
             </a:extLst>
           </p:cNvPr>
@@ -11334,7 +11357,7 @@
           <p:cNvPr id="22" name="TextBox 21">
             <a:extLst>
               <a:ext uri="{FF2B5EF4-FFF2-40B4-BE49-F238E27FC236}">
-                <a16:creationId xmlns:a16="http://schemas.microsoft.com/office/drawing/2014/main" id="{55CAC3E6-AA6E-1A75-5750-703217ADD65E}"/>
+                <a16:creationId xmlns:a16="http://schemas.microsoft.com/office/drawing/2014/main" id="{808495F1-9342-9E5F-0A19-FEF98158EC42}"/>
               </a:ext>
             </a:extLst>
           </p:cNvPr>
@@ -11379,7 +11402,7 @@
           <p:cNvPr id="23" name="TextBox 22">
             <a:extLst>
               <a:ext uri="{FF2B5EF4-FFF2-40B4-BE49-F238E27FC236}">
-                <a16:creationId xmlns:a16="http://schemas.microsoft.com/office/drawing/2014/main" id="{7407608B-D13A-348F-922D-048C90373228}"/>
+                <a16:creationId xmlns:a16="http://schemas.microsoft.com/office/drawing/2014/main" id="{4C5B78D5-88D2-6ABD-DC41-196D1BA6EB5D}"/>
               </a:ext>
             </a:extLst>
           </p:cNvPr>
@@ -11424,7 +11447,7 @@
           <p:cNvPr id="24" name="Прямоугольник 23">
             <a:extLst>
               <a:ext uri="{FF2B5EF4-FFF2-40B4-BE49-F238E27FC236}">
-                <a16:creationId xmlns:a16="http://schemas.microsoft.com/office/drawing/2014/main" id="{41068527-09FF-407E-EACB-B9C404712EB9}"/>
+                <a16:creationId xmlns:a16="http://schemas.microsoft.com/office/drawing/2014/main" id="{92AEF174-68B4-6B81-43EF-53F46724B0A0}"/>
               </a:ext>
             </a:extLst>
           </p:cNvPr>
@@ -11492,7 +11515,7 @@
           <p:cNvPr id="25" name="TextBox 24">
             <a:extLst>
               <a:ext uri="{FF2B5EF4-FFF2-40B4-BE49-F238E27FC236}">
-                <a16:creationId xmlns:a16="http://schemas.microsoft.com/office/drawing/2014/main" id="{F8F6C63D-81FE-B0BD-4EE0-55041F2C4C03}"/>
+                <a16:creationId xmlns:a16="http://schemas.microsoft.com/office/drawing/2014/main" id="{FE30243B-53DC-236A-A377-FDDEB57E385F}"/>
               </a:ext>
             </a:extLst>
           </p:cNvPr>
@@ -11537,7 +11560,7 @@
           <p:cNvPr id="26" name="TextBox 25">
             <a:extLst>
               <a:ext uri="{FF2B5EF4-FFF2-40B4-BE49-F238E27FC236}">
-                <a16:creationId xmlns:a16="http://schemas.microsoft.com/office/drawing/2014/main" id="{9D027B4B-1A3B-9ADB-A0EF-14CF91233AEF}"/>
+                <a16:creationId xmlns:a16="http://schemas.microsoft.com/office/drawing/2014/main" id="{E20D148D-7E67-45EA-4CA8-D9FE6825980F}"/>
               </a:ext>
             </a:extLst>
           </p:cNvPr>
@@ -11582,7 +11605,7 @@
           <p:cNvPr id="27" name="TextBox 26">
             <a:extLst>
               <a:ext uri="{FF2B5EF4-FFF2-40B4-BE49-F238E27FC236}">
-                <a16:creationId xmlns:a16="http://schemas.microsoft.com/office/drawing/2014/main" id="{AD16FE13-F7AE-C8F2-EA06-B61A77A60EB2}"/>
+                <a16:creationId xmlns:a16="http://schemas.microsoft.com/office/drawing/2014/main" id="{3203F45F-B508-2C1B-8ED0-2860DC6541DE}"/>
               </a:ext>
             </a:extLst>
           </p:cNvPr>
@@ -11627,7 +11650,7 @@
           <p:cNvPr id="28" name="Прямоугольник 27">
             <a:extLst>
               <a:ext uri="{FF2B5EF4-FFF2-40B4-BE49-F238E27FC236}">
-                <a16:creationId xmlns:a16="http://schemas.microsoft.com/office/drawing/2014/main" id="{F5CEA1B5-FFF2-2696-9CBF-E0E2AEB84BAD}"/>
+                <a16:creationId xmlns:a16="http://schemas.microsoft.com/office/drawing/2014/main" id="{A5CFCEB1-EA2C-4BC3-6496-4F7E189C446B}"/>
               </a:ext>
             </a:extLst>
           </p:cNvPr>
@@ -11695,7 +11718,7 @@
           <p:cNvPr id="29" name="TextBox 28">
             <a:extLst>
               <a:ext uri="{FF2B5EF4-FFF2-40B4-BE49-F238E27FC236}">
-                <a16:creationId xmlns:a16="http://schemas.microsoft.com/office/drawing/2014/main" id="{EAD1C346-B518-66DB-5498-07E74F6FA3DC}"/>
+                <a16:creationId xmlns:a16="http://schemas.microsoft.com/office/drawing/2014/main" id="{EF50A089-302A-F8D4-8ED9-8B51568CC1BA}"/>
               </a:ext>
             </a:extLst>
           </p:cNvPr>
@@ -11740,7 +11763,7 @@
           <p:cNvPr id="30" name="TextBox 29">
             <a:extLst>
               <a:ext uri="{FF2B5EF4-FFF2-40B4-BE49-F238E27FC236}">
-                <a16:creationId xmlns:a16="http://schemas.microsoft.com/office/drawing/2014/main" id="{C9F5EF20-3D97-5CDB-046D-7F9B93A139AE}"/>
+                <a16:creationId xmlns:a16="http://schemas.microsoft.com/office/drawing/2014/main" id="{A435E100-1585-38CF-5FA1-E9734EAC4FE9}"/>
               </a:ext>
             </a:extLst>
           </p:cNvPr>
@@ -11785,7 +11808,7 @@
           <p:cNvPr id="31" name="TextBox 30">
             <a:extLst>
               <a:ext uri="{FF2B5EF4-FFF2-40B4-BE49-F238E27FC236}">
-                <a16:creationId xmlns:a16="http://schemas.microsoft.com/office/drawing/2014/main" id="{CF2DFF72-8829-B720-B8D5-2ABB310B347C}"/>
+                <a16:creationId xmlns:a16="http://schemas.microsoft.com/office/drawing/2014/main" id="{633552C0-D7F2-E4D1-7D9A-EA8427288318}"/>
               </a:ext>
             </a:extLst>
           </p:cNvPr>
@@ -11828,7 +11851,7 @@
     </p:spTree>
     <p:extLst>
       <p:ext uri="{BB962C8B-B14F-4D97-AF65-F5344CB8AC3E}">
-        <p14:creationId xmlns:p14="http://schemas.microsoft.com/office/powerpoint/2010/main" val="2973692412"/>
+        <p14:creationId xmlns:p14="http://schemas.microsoft.com/office/powerpoint/2010/main" val="616152821"/>
       </p:ext>
     </p:extLst>
   </p:cSld>
@@ -11860,7 +11883,7 @@
           <p:cNvPr id="2" name="Прямоугольник 1">
             <a:extLst>
               <a:ext uri="{FF2B5EF4-FFF2-40B4-BE49-F238E27FC236}">
-                <a16:creationId xmlns:a16="http://schemas.microsoft.com/office/drawing/2014/main" id="{6B505B95-77DE-E223-B97C-D42A16D65C29}"/>
+                <a16:creationId xmlns:a16="http://schemas.microsoft.com/office/drawing/2014/main" id="{B5AEECF5-B5D6-15E1-7EE2-E1671BE396F8}"/>
               </a:ext>
             </a:extLst>
           </p:cNvPr>
@@ -11928,7 +11951,7 @@
           <p:cNvPr id="3" name="Прямоугольник 2">
             <a:extLst>
               <a:ext uri="{FF2B5EF4-FFF2-40B4-BE49-F238E27FC236}">
-                <a16:creationId xmlns:a16="http://schemas.microsoft.com/office/drawing/2014/main" id="{421CCF37-92FE-09AF-1000-240AC4D4B189}"/>
+                <a16:creationId xmlns:a16="http://schemas.microsoft.com/office/drawing/2014/main" id="{B04035DA-DB75-2007-FFC9-C5C2F5ADF712}"/>
               </a:ext>
             </a:extLst>
           </p:cNvPr>
@@ -11996,7 +12019,7 @@
           <p:cNvPr id="4" name="TextBox 3">
             <a:extLst>
               <a:ext uri="{FF2B5EF4-FFF2-40B4-BE49-F238E27FC236}">
-                <a16:creationId xmlns:a16="http://schemas.microsoft.com/office/drawing/2014/main" id="{0DBAD9F8-B639-9AF1-2B47-E0946D1BFB93}"/>
+                <a16:creationId xmlns:a16="http://schemas.microsoft.com/office/drawing/2014/main" id="{CD207AEF-6447-9669-A011-6A54A8C5B45A}"/>
               </a:ext>
             </a:extLst>
           </p:cNvPr>
@@ -12041,7 +12064,7 @@
           <p:cNvPr id="5" name="TextBox 4">
             <a:extLst>
               <a:ext uri="{FF2B5EF4-FFF2-40B4-BE49-F238E27FC236}">
-                <a16:creationId xmlns:a16="http://schemas.microsoft.com/office/drawing/2014/main" id="{E755BF47-3394-9480-5B69-105CE1D03FAE}"/>
+                <a16:creationId xmlns:a16="http://schemas.microsoft.com/office/drawing/2014/main" id="{57B3893F-DE4D-5BA4-9A7E-1EBB128A13AE}"/>
               </a:ext>
             </a:extLst>
           </p:cNvPr>
@@ -12086,7 +12109,7 @@
           <p:cNvPr id="6" name="Прямоугольник 5">
             <a:extLst>
               <a:ext uri="{FF2B5EF4-FFF2-40B4-BE49-F238E27FC236}">
-                <a16:creationId xmlns:a16="http://schemas.microsoft.com/office/drawing/2014/main" id="{12F857A4-FB5D-427E-5F46-19DBFA8C5001}"/>
+                <a16:creationId xmlns:a16="http://schemas.microsoft.com/office/drawing/2014/main" id="{FD1F14E5-A7DD-E7C1-E46E-CF1D863D4782}"/>
               </a:ext>
             </a:extLst>
           </p:cNvPr>
@@ -12154,7 +12177,7 @@
           <p:cNvPr id="7" name="Прямоугольник 6">
             <a:extLst>
               <a:ext uri="{FF2B5EF4-FFF2-40B4-BE49-F238E27FC236}">
-                <a16:creationId xmlns:a16="http://schemas.microsoft.com/office/drawing/2014/main" id="{B4C6D37E-D134-B826-A8ED-7A8EF5D2FFFE}"/>
+                <a16:creationId xmlns:a16="http://schemas.microsoft.com/office/drawing/2014/main" id="{FA0B7846-19BF-BEE2-03C0-5A3F9D03B013}"/>
               </a:ext>
             </a:extLst>
           </p:cNvPr>
@@ -12222,7 +12245,7 @@
           <p:cNvPr id="8" name="TextBox 7">
             <a:extLst>
               <a:ext uri="{FF2B5EF4-FFF2-40B4-BE49-F238E27FC236}">
-                <a16:creationId xmlns:a16="http://schemas.microsoft.com/office/drawing/2014/main" id="{4385683A-01B2-41A4-4A15-CD3CF34BFAC5}"/>
+                <a16:creationId xmlns:a16="http://schemas.microsoft.com/office/drawing/2014/main" id="{6A51BA51-41C0-AF8A-C683-3DAED457EF68}"/>
               </a:ext>
             </a:extLst>
           </p:cNvPr>
@@ -12267,7 +12290,7 @@
           <p:cNvPr id="9" name="TextBox 8">
             <a:extLst>
               <a:ext uri="{FF2B5EF4-FFF2-40B4-BE49-F238E27FC236}">
-                <a16:creationId xmlns:a16="http://schemas.microsoft.com/office/drawing/2014/main" id="{F336DA4E-9CF9-8772-1347-586A738C52BB}"/>
+                <a16:creationId xmlns:a16="http://schemas.microsoft.com/office/drawing/2014/main" id="{60D1B763-5C6D-A386-34F5-4394593D87F5}"/>
               </a:ext>
             </a:extLst>
           </p:cNvPr>
@@ -12312,7 +12335,7 @@
           <p:cNvPr id="10" name="TextBox 9">
             <a:extLst>
               <a:ext uri="{FF2B5EF4-FFF2-40B4-BE49-F238E27FC236}">
-                <a16:creationId xmlns:a16="http://schemas.microsoft.com/office/drawing/2014/main" id="{16567771-186F-1E62-514F-71F2E9EFABBC}"/>
+                <a16:creationId xmlns:a16="http://schemas.microsoft.com/office/drawing/2014/main" id="{15E61BF2-78BD-5452-E643-07CBB6CF9EF7}"/>
               </a:ext>
             </a:extLst>
           </p:cNvPr>
@@ -12363,7 +12386,7 @@
           <p:cNvPr id="11" name="TextBox 10">
             <a:extLst>
               <a:ext uri="{FF2B5EF4-FFF2-40B4-BE49-F238E27FC236}">
-                <a16:creationId xmlns:a16="http://schemas.microsoft.com/office/drawing/2014/main" id="{CD3B76B7-128A-9491-8CF9-5D10D51BDE48}"/>
+                <a16:creationId xmlns:a16="http://schemas.microsoft.com/office/drawing/2014/main" id="{64CC878F-3AAB-76B4-C9B4-0B33C101BB72}"/>
               </a:ext>
             </a:extLst>
           </p:cNvPr>
@@ -12408,7 +12431,7 @@
           <p:cNvPr id="12" name="Прямоугольник 11">
             <a:extLst>
               <a:ext uri="{FF2B5EF4-FFF2-40B4-BE49-F238E27FC236}">
-                <a16:creationId xmlns:a16="http://schemas.microsoft.com/office/drawing/2014/main" id="{B06BEA15-4483-F4B8-79E9-860E528A83D1}"/>
+                <a16:creationId xmlns:a16="http://schemas.microsoft.com/office/drawing/2014/main" id="{F0AAAA20-7DAE-EB12-2B6E-FF2B312CF7A3}"/>
               </a:ext>
             </a:extLst>
           </p:cNvPr>
@@ -12476,7 +12499,7 @@
           <p:cNvPr id="13" name="TextBox 12">
             <a:extLst>
               <a:ext uri="{FF2B5EF4-FFF2-40B4-BE49-F238E27FC236}">
-                <a16:creationId xmlns:a16="http://schemas.microsoft.com/office/drawing/2014/main" id="{583281D7-65BD-3801-D731-5ACF40CCD898}"/>
+                <a16:creationId xmlns:a16="http://schemas.microsoft.com/office/drawing/2014/main" id="{754278B3-4DE1-F0AF-8E41-8CDC285A959D}"/>
               </a:ext>
             </a:extLst>
           </p:cNvPr>
@@ -12527,7 +12550,7 @@
           <p:cNvPr id="14" name="TextBox 13">
             <a:extLst>
               <a:ext uri="{FF2B5EF4-FFF2-40B4-BE49-F238E27FC236}">
-                <a16:creationId xmlns:a16="http://schemas.microsoft.com/office/drawing/2014/main" id="{D72DC627-7531-40A2-B06F-002D7070B52F}"/>
+                <a16:creationId xmlns:a16="http://schemas.microsoft.com/office/drawing/2014/main" id="{410924CF-917C-A7FF-B7B7-42D5775854F5}"/>
               </a:ext>
             </a:extLst>
           </p:cNvPr>
@@ -12572,7 +12595,7 @@
           <p:cNvPr id="15" name="Прямоугольник 14">
             <a:extLst>
               <a:ext uri="{FF2B5EF4-FFF2-40B4-BE49-F238E27FC236}">
-                <a16:creationId xmlns:a16="http://schemas.microsoft.com/office/drawing/2014/main" id="{19822AAA-37C4-FA30-021B-3D99703F453C}"/>
+                <a16:creationId xmlns:a16="http://schemas.microsoft.com/office/drawing/2014/main" id="{5E6C128D-DFC8-E80F-EDFD-0AC88E571DB0}"/>
               </a:ext>
             </a:extLst>
           </p:cNvPr>
@@ -12640,7 +12663,7 @@
           <p:cNvPr id="16" name="TextBox 15">
             <a:extLst>
               <a:ext uri="{FF2B5EF4-FFF2-40B4-BE49-F238E27FC236}">
-                <a16:creationId xmlns:a16="http://schemas.microsoft.com/office/drawing/2014/main" id="{BB1EACE1-1368-A1ED-21C2-811563197EAC}"/>
+                <a16:creationId xmlns:a16="http://schemas.microsoft.com/office/drawing/2014/main" id="{E6BFB302-5F47-F252-CA4F-819093297C7C}"/>
               </a:ext>
             </a:extLst>
           </p:cNvPr>
@@ -12691,7 +12714,7 @@
           <p:cNvPr id="17" name="TextBox 16">
             <a:extLst>
               <a:ext uri="{FF2B5EF4-FFF2-40B4-BE49-F238E27FC236}">
-                <a16:creationId xmlns:a16="http://schemas.microsoft.com/office/drawing/2014/main" id="{45EF8B10-1E9B-5FDD-6CC6-0CF35AF4E624}"/>
+                <a16:creationId xmlns:a16="http://schemas.microsoft.com/office/drawing/2014/main" id="{94211A5E-233B-8C81-B8BB-D7E6191C2156}"/>
               </a:ext>
             </a:extLst>
           </p:cNvPr>
@@ -12736,7 +12759,7 @@
           <p:cNvPr id="18" name="Прямоугольник 17">
             <a:extLst>
               <a:ext uri="{FF2B5EF4-FFF2-40B4-BE49-F238E27FC236}">
-                <a16:creationId xmlns:a16="http://schemas.microsoft.com/office/drawing/2014/main" id="{52456198-916B-62D5-FBA5-AFA592898E6C}"/>
+                <a16:creationId xmlns:a16="http://schemas.microsoft.com/office/drawing/2014/main" id="{F7403551-F77C-D38F-F70C-8022D9F358C2}"/>
               </a:ext>
             </a:extLst>
           </p:cNvPr>
@@ -12804,7 +12827,7 @@
           <p:cNvPr id="19" name="TextBox 18">
             <a:extLst>
               <a:ext uri="{FF2B5EF4-FFF2-40B4-BE49-F238E27FC236}">
-                <a16:creationId xmlns:a16="http://schemas.microsoft.com/office/drawing/2014/main" id="{A0015B91-52E2-482D-AE7D-C842B89506F0}"/>
+                <a16:creationId xmlns:a16="http://schemas.microsoft.com/office/drawing/2014/main" id="{377B4F71-04F4-7BF5-481F-CD6615240921}"/>
               </a:ext>
             </a:extLst>
           </p:cNvPr>
@@ -12855,7 +12878,7 @@
           <p:cNvPr id="20" name="TextBox 19">
             <a:extLst>
               <a:ext uri="{FF2B5EF4-FFF2-40B4-BE49-F238E27FC236}">
-                <a16:creationId xmlns:a16="http://schemas.microsoft.com/office/drawing/2014/main" id="{9B08FD0B-1AAD-D8BD-90A4-D08801C2EE31}"/>
+                <a16:creationId xmlns:a16="http://schemas.microsoft.com/office/drawing/2014/main" id="{E30A98CF-4269-7B48-B7ED-838D42025CC6}"/>
               </a:ext>
             </a:extLst>
           </p:cNvPr>
@@ -12900,7 +12923,7 @@
           <p:cNvPr id="21" name="Прямоугольник 20">
             <a:extLst>
               <a:ext uri="{FF2B5EF4-FFF2-40B4-BE49-F238E27FC236}">
-                <a16:creationId xmlns:a16="http://schemas.microsoft.com/office/drawing/2014/main" id="{18F198D2-7494-96B9-2073-41BB3AE52F30}"/>
+                <a16:creationId xmlns:a16="http://schemas.microsoft.com/office/drawing/2014/main" id="{1FD2D134-DAE6-A9F2-F4DA-50F61544F2C7}"/>
               </a:ext>
             </a:extLst>
           </p:cNvPr>
@@ -12968,7 +12991,7 @@
           <p:cNvPr id="22" name="TextBox 21">
             <a:extLst>
               <a:ext uri="{FF2B5EF4-FFF2-40B4-BE49-F238E27FC236}">
-                <a16:creationId xmlns:a16="http://schemas.microsoft.com/office/drawing/2014/main" id="{3DBFD186-ED7E-1CA5-400D-EA4A03F41CED}"/>
+                <a16:creationId xmlns:a16="http://schemas.microsoft.com/office/drawing/2014/main" id="{CF57CF69-1EC2-A261-AF33-A76C92AEC340}"/>
               </a:ext>
             </a:extLst>
           </p:cNvPr>
@@ -13019,7 +13042,7 @@
           <p:cNvPr id="23" name="TextBox 22">
             <a:extLst>
               <a:ext uri="{FF2B5EF4-FFF2-40B4-BE49-F238E27FC236}">
-                <a16:creationId xmlns:a16="http://schemas.microsoft.com/office/drawing/2014/main" id="{D9724FE4-4AEC-9E10-DDA2-6A6537F1CF68}"/>
+                <a16:creationId xmlns:a16="http://schemas.microsoft.com/office/drawing/2014/main" id="{7FD8887C-601C-A204-9C25-AABECE73D3AD}"/>
               </a:ext>
             </a:extLst>
           </p:cNvPr>
@@ -13064,7 +13087,7 @@
           <p:cNvPr id="24" name="Прямоугольник 23">
             <a:extLst>
               <a:ext uri="{FF2B5EF4-FFF2-40B4-BE49-F238E27FC236}">
-                <a16:creationId xmlns:a16="http://schemas.microsoft.com/office/drawing/2014/main" id="{432329FA-D514-0B46-F959-BBD8DF340F6B}"/>
+                <a16:creationId xmlns:a16="http://schemas.microsoft.com/office/drawing/2014/main" id="{F57D91E9-9A35-3032-B94C-6C6F941AB5CB}"/>
               </a:ext>
             </a:extLst>
           </p:cNvPr>
@@ -13132,7 +13155,7 @@
           <p:cNvPr id="25" name="TextBox 24">
             <a:extLst>
               <a:ext uri="{FF2B5EF4-FFF2-40B4-BE49-F238E27FC236}">
-                <a16:creationId xmlns:a16="http://schemas.microsoft.com/office/drawing/2014/main" id="{282D9B30-E0E9-A6A7-F50E-21C7B3AC6010}"/>
+                <a16:creationId xmlns:a16="http://schemas.microsoft.com/office/drawing/2014/main" id="{B6517071-EB94-806B-9262-4FD7C4645F67}"/>
               </a:ext>
             </a:extLst>
           </p:cNvPr>
@@ -13183,7 +13206,7 @@
           <p:cNvPr id="26" name="TextBox 25">
             <a:extLst>
               <a:ext uri="{FF2B5EF4-FFF2-40B4-BE49-F238E27FC236}">
-                <a16:creationId xmlns:a16="http://schemas.microsoft.com/office/drawing/2014/main" id="{E8F10C03-D468-B3FE-4185-5ED388066C98}"/>
+                <a16:creationId xmlns:a16="http://schemas.microsoft.com/office/drawing/2014/main" id="{0980FF1F-7CE9-15EA-EBD5-79EAF85C9ADB}"/>
               </a:ext>
             </a:extLst>
           </p:cNvPr>
@@ -13228,7 +13251,7 @@
           <p:cNvPr id="27" name="Прямоугольник 26">
             <a:extLst>
               <a:ext uri="{FF2B5EF4-FFF2-40B4-BE49-F238E27FC236}">
-                <a16:creationId xmlns:a16="http://schemas.microsoft.com/office/drawing/2014/main" id="{7D518D6A-539D-ECA2-EA20-AD00721C03C0}"/>
+                <a16:creationId xmlns:a16="http://schemas.microsoft.com/office/drawing/2014/main" id="{40BCF6AF-D9D2-2310-4F42-42D3B5153C2F}"/>
               </a:ext>
             </a:extLst>
           </p:cNvPr>
@@ -13296,7 +13319,7 @@
           <p:cNvPr id="28" name="TextBox 27">
             <a:extLst>
               <a:ext uri="{FF2B5EF4-FFF2-40B4-BE49-F238E27FC236}">
-                <a16:creationId xmlns:a16="http://schemas.microsoft.com/office/drawing/2014/main" id="{A75E64BC-0987-D1A5-2140-257020FCEAF4}"/>
+                <a16:creationId xmlns:a16="http://schemas.microsoft.com/office/drawing/2014/main" id="{1FBB9AFF-3D1C-DB67-6FDA-1C28C546B591}"/>
               </a:ext>
             </a:extLst>
           </p:cNvPr>
@@ -13339,7 +13362,7 @@
     </p:spTree>
     <p:extLst>
       <p:ext uri="{BB962C8B-B14F-4D97-AF65-F5344CB8AC3E}">
-        <p14:creationId xmlns:p14="http://schemas.microsoft.com/office/powerpoint/2010/main" val="2008971949"/>
+        <p14:creationId xmlns:p14="http://schemas.microsoft.com/office/powerpoint/2010/main" val="96609051"/>
       </p:ext>
     </p:extLst>
   </p:cSld>
@@ -13371,7 +13394,7 @@
           <p:cNvPr id="2" name="Прямоугольник 1">
             <a:extLst>
               <a:ext uri="{FF2B5EF4-FFF2-40B4-BE49-F238E27FC236}">
-                <a16:creationId xmlns:a16="http://schemas.microsoft.com/office/drawing/2014/main" id="{99B878C6-9AFC-8BE6-2CCA-989972600A2F}"/>
+                <a16:creationId xmlns:a16="http://schemas.microsoft.com/office/drawing/2014/main" id="{E43344A7-2857-D493-169C-26885BAFCB91}"/>
               </a:ext>
             </a:extLst>
           </p:cNvPr>
@@ -13439,7 +13462,7 @@
           <p:cNvPr id="3" name="Прямоугольник 2">
             <a:extLst>
               <a:ext uri="{FF2B5EF4-FFF2-40B4-BE49-F238E27FC236}">
-                <a16:creationId xmlns:a16="http://schemas.microsoft.com/office/drawing/2014/main" id="{9E2FBED2-2834-1596-4D3C-08E21E104C56}"/>
+                <a16:creationId xmlns:a16="http://schemas.microsoft.com/office/drawing/2014/main" id="{6D227D30-B932-6394-2AB4-ED57BB12E7DC}"/>
               </a:ext>
             </a:extLst>
           </p:cNvPr>
@@ -13507,7 +13530,7 @@
           <p:cNvPr id="4" name="TextBox 3">
             <a:extLst>
               <a:ext uri="{FF2B5EF4-FFF2-40B4-BE49-F238E27FC236}">
-                <a16:creationId xmlns:a16="http://schemas.microsoft.com/office/drawing/2014/main" id="{26109CF5-7AEF-2F48-01D1-288BCFF50207}"/>
+                <a16:creationId xmlns:a16="http://schemas.microsoft.com/office/drawing/2014/main" id="{EB967BCF-65BC-3713-E223-0D476C63D422}"/>
               </a:ext>
             </a:extLst>
           </p:cNvPr>
@@ -13552,7 +13575,7 @@
           <p:cNvPr id="5" name="TextBox 4">
             <a:extLst>
               <a:ext uri="{FF2B5EF4-FFF2-40B4-BE49-F238E27FC236}">
-                <a16:creationId xmlns:a16="http://schemas.microsoft.com/office/drawing/2014/main" id="{508E18DE-9E77-92ED-5808-119B742B1DB7}"/>
+                <a16:creationId xmlns:a16="http://schemas.microsoft.com/office/drawing/2014/main" id="{7C10E963-D916-D65C-82F5-7DDA6C63CC16}"/>
               </a:ext>
             </a:extLst>
           </p:cNvPr>
@@ -13597,7 +13620,7 @@
           <p:cNvPr id="6" name="Прямоугольник 5">
             <a:extLst>
               <a:ext uri="{FF2B5EF4-FFF2-40B4-BE49-F238E27FC236}">
-                <a16:creationId xmlns:a16="http://schemas.microsoft.com/office/drawing/2014/main" id="{3BC58D34-756D-4098-B6C0-300BA3E7D882}"/>
+                <a16:creationId xmlns:a16="http://schemas.microsoft.com/office/drawing/2014/main" id="{50E0E3E3-1436-9E1F-0D6B-2FFD2241C633}"/>
               </a:ext>
             </a:extLst>
           </p:cNvPr>
@@ -13665,7 +13688,7 @@
           <p:cNvPr id="7" name="Прямоугольник 6">
             <a:extLst>
               <a:ext uri="{FF2B5EF4-FFF2-40B4-BE49-F238E27FC236}">
-                <a16:creationId xmlns:a16="http://schemas.microsoft.com/office/drawing/2014/main" id="{F1225CC7-534E-5FF5-6D68-EA9E707B72A5}"/>
+                <a16:creationId xmlns:a16="http://schemas.microsoft.com/office/drawing/2014/main" id="{3CF63372-A739-8512-CCE4-76FEAA224CD6}"/>
               </a:ext>
             </a:extLst>
           </p:cNvPr>
@@ -13733,7 +13756,7 @@
           <p:cNvPr id="8" name="TextBox 7">
             <a:extLst>
               <a:ext uri="{FF2B5EF4-FFF2-40B4-BE49-F238E27FC236}">
-                <a16:creationId xmlns:a16="http://schemas.microsoft.com/office/drawing/2014/main" id="{B2383344-AF46-4F51-5A74-B49939E17191}"/>
+                <a16:creationId xmlns:a16="http://schemas.microsoft.com/office/drawing/2014/main" id="{F0CD6146-BF13-01DD-F46D-BE8C030F86AC}"/>
               </a:ext>
             </a:extLst>
           </p:cNvPr>
@@ -13778,7 +13801,7 @@
           <p:cNvPr id="9" name="TextBox 8">
             <a:extLst>
               <a:ext uri="{FF2B5EF4-FFF2-40B4-BE49-F238E27FC236}">
-                <a16:creationId xmlns:a16="http://schemas.microsoft.com/office/drawing/2014/main" id="{99565C4A-5CA1-EF03-6F40-153118D45EFB}"/>
+                <a16:creationId xmlns:a16="http://schemas.microsoft.com/office/drawing/2014/main" id="{C276F258-0C30-F5D4-2C6A-FC08869A3630}"/>
               </a:ext>
             </a:extLst>
           </p:cNvPr>
@@ -13823,7 +13846,7 @@
           <p:cNvPr id="10" name="TextBox 9">
             <a:extLst>
               <a:ext uri="{FF2B5EF4-FFF2-40B4-BE49-F238E27FC236}">
-                <a16:creationId xmlns:a16="http://schemas.microsoft.com/office/drawing/2014/main" id="{6686CD37-C759-49CA-6641-AF16C9F1EB22}"/>
+                <a16:creationId xmlns:a16="http://schemas.microsoft.com/office/drawing/2014/main" id="{A6FC1063-5929-5213-CE80-3727BCCAEA44}"/>
               </a:ext>
             </a:extLst>
           </p:cNvPr>
@@ -13868,7 +13891,7 @@
           <p:cNvPr id="11" name="TextBox 10">
             <a:extLst>
               <a:ext uri="{FF2B5EF4-FFF2-40B4-BE49-F238E27FC236}">
-                <a16:creationId xmlns:a16="http://schemas.microsoft.com/office/drawing/2014/main" id="{83B72AC5-0947-C05A-B9D7-B34A81089427}"/>
+                <a16:creationId xmlns:a16="http://schemas.microsoft.com/office/drawing/2014/main" id="{0FD6C440-A776-A12E-EEA0-9C11BD37D6F4}"/>
               </a:ext>
             </a:extLst>
           </p:cNvPr>
@@ -13913,7 +13936,7 @@
           <p:cNvPr id="12" name="Прямоугольник 11">
             <a:extLst>
               <a:ext uri="{FF2B5EF4-FFF2-40B4-BE49-F238E27FC236}">
-                <a16:creationId xmlns:a16="http://schemas.microsoft.com/office/drawing/2014/main" id="{D310BA22-5B38-9801-3726-1FF3B316D7DD}"/>
+                <a16:creationId xmlns:a16="http://schemas.microsoft.com/office/drawing/2014/main" id="{356A25C6-9740-CAD8-815A-CB21AEEA8688}"/>
               </a:ext>
             </a:extLst>
           </p:cNvPr>
@@ -13981,7 +14004,7 @@
           <p:cNvPr id="13" name="TextBox 12">
             <a:extLst>
               <a:ext uri="{FF2B5EF4-FFF2-40B4-BE49-F238E27FC236}">
-                <a16:creationId xmlns:a16="http://schemas.microsoft.com/office/drawing/2014/main" id="{9583EF33-BA37-FA6F-9F53-5DB0A0AA68C9}"/>
+                <a16:creationId xmlns:a16="http://schemas.microsoft.com/office/drawing/2014/main" id="{97871DB0-8C98-304D-53BB-FFE462CF3B22}"/>
               </a:ext>
             </a:extLst>
           </p:cNvPr>
@@ -14026,7 +14049,7 @@
           <p:cNvPr id="14" name="TextBox 13">
             <a:extLst>
               <a:ext uri="{FF2B5EF4-FFF2-40B4-BE49-F238E27FC236}">
-                <a16:creationId xmlns:a16="http://schemas.microsoft.com/office/drawing/2014/main" id="{02B4E411-E1B8-9211-A754-00FD45BCC55D}"/>
+                <a16:creationId xmlns:a16="http://schemas.microsoft.com/office/drawing/2014/main" id="{81E4A8AF-562E-86EA-C2EA-AB359C5A12AA}"/>
               </a:ext>
             </a:extLst>
           </p:cNvPr>
@@ -14071,7 +14094,7 @@
           <p:cNvPr id="15" name="Прямоугольник 14">
             <a:extLst>
               <a:ext uri="{FF2B5EF4-FFF2-40B4-BE49-F238E27FC236}">
-                <a16:creationId xmlns:a16="http://schemas.microsoft.com/office/drawing/2014/main" id="{97139481-26D7-031E-9884-BADE3773A33C}"/>
+                <a16:creationId xmlns:a16="http://schemas.microsoft.com/office/drawing/2014/main" id="{31642671-6A6F-049A-66C6-88D4A582354B}"/>
               </a:ext>
             </a:extLst>
           </p:cNvPr>
@@ -14139,7 +14162,7 @@
           <p:cNvPr id="16" name="TextBox 15">
             <a:extLst>
               <a:ext uri="{FF2B5EF4-FFF2-40B4-BE49-F238E27FC236}">
-                <a16:creationId xmlns:a16="http://schemas.microsoft.com/office/drawing/2014/main" id="{6335CE52-D962-159E-920B-5E7D052390D4}"/>
+                <a16:creationId xmlns:a16="http://schemas.microsoft.com/office/drawing/2014/main" id="{1E109A35-1F9E-AA22-E17D-51C96E4FA2FB}"/>
               </a:ext>
             </a:extLst>
           </p:cNvPr>
@@ -14184,7 +14207,7 @@
           <p:cNvPr id="17" name="TextBox 16">
             <a:extLst>
               <a:ext uri="{FF2B5EF4-FFF2-40B4-BE49-F238E27FC236}">
-                <a16:creationId xmlns:a16="http://schemas.microsoft.com/office/drawing/2014/main" id="{EA9DFE0C-DBA7-FC4B-9D06-EBDD902451CD}"/>
+                <a16:creationId xmlns:a16="http://schemas.microsoft.com/office/drawing/2014/main" id="{68F05A57-1370-6A9A-0C3F-9E63F0FA427B}"/>
               </a:ext>
             </a:extLst>
           </p:cNvPr>
@@ -14229,7 +14252,7 @@
           <p:cNvPr id="18" name="Прямоугольник 17">
             <a:extLst>
               <a:ext uri="{FF2B5EF4-FFF2-40B4-BE49-F238E27FC236}">
-                <a16:creationId xmlns:a16="http://schemas.microsoft.com/office/drawing/2014/main" id="{34B3EDD3-A0F0-075B-CABC-8A8D14859642}"/>
+                <a16:creationId xmlns:a16="http://schemas.microsoft.com/office/drawing/2014/main" id="{16AB96C5-CF39-4B9A-8B15-713AE6BD9367}"/>
               </a:ext>
             </a:extLst>
           </p:cNvPr>
@@ -14297,7 +14320,7 @@
           <p:cNvPr id="19" name="TextBox 18">
             <a:extLst>
               <a:ext uri="{FF2B5EF4-FFF2-40B4-BE49-F238E27FC236}">
-                <a16:creationId xmlns:a16="http://schemas.microsoft.com/office/drawing/2014/main" id="{B9B7886E-F649-F557-61D4-4C225E91583E}"/>
+                <a16:creationId xmlns:a16="http://schemas.microsoft.com/office/drawing/2014/main" id="{15B574D2-D0BF-170B-7AD9-C680430CFAE8}"/>
               </a:ext>
             </a:extLst>
           </p:cNvPr>
@@ -14342,7 +14365,7 @@
           <p:cNvPr id="20" name="TextBox 19">
             <a:extLst>
               <a:ext uri="{FF2B5EF4-FFF2-40B4-BE49-F238E27FC236}">
-                <a16:creationId xmlns:a16="http://schemas.microsoft.com/office/drawing/2014/main" id="{573588CA-6C76-BA6A-5D14-E008C1CAF87F}"/>
+                <a16:creationId xmlns:a16="http://schemas.microsoft.com/office/drawing/2014/main" id="{65706DAF-5704-C77E-E255-DD092DEB5308}"/>
               </a:ext>
             </a:extLst>
           </p:cNvPr>
@@ -14387,7 +14410,7 @@
           <p:cNvPr id="21" name="Прямоугольник 20">
             <a:extLst>
               <a:ext uri="{FF2B5EF4-FFF2-40B4-BE49-F238E27FC236}">
-                <a16:creationId xmlns:a16="http://schemas.microsoft.com/office/drawing/2014/main" id="{C4A23E24-E2CB-83F9-8FC8-889B01BC3D9A}"/>
+                <a16:creationId xmlns:a16="http://schemas.microsoft.com/office/drawing/2014/main" id="{C7BB389F-4571-77D1-11A9-E4F34A7EE47F}"/>
               </a:ext>
             </a:extLst>
           </p:cNvPr>
@@ -14455,7 +14478,7 @@
           <p:cNvPr id="22" name="TextBox 21">
             <a:extLst>
               <a:ext uri="{FF2B5EF4-FFF2-40B4-BE49-F238E27FC236}">
-                <a16:creationId xmlns:a16="http://schemas.microsoft.com/office/drawing/2014/main" id="{00998A79-5D4E-DCC1-3777-19C4046B9889}"/>
+                <a16:creationId xmlns:a16="http://schemas.microsoft.com/office/drawing/2014/main" id="{FCA6FD70-209F-9F44-9DB3-FF000BED4FAB}"/>
               </a:ext>
             </a:extLst>
           </p:cNvPr>
@@ -14500,7 +14523,7 @@
           <p:cNvPr id="23" name="TextBox 22">
             <a:extLst>
               <a:ext uri="{FF2B5EF4-FFF2-40B4-BE49-F238E27FC236}">
-                <a16:creationId xmlns:a16="http://schemas.microsoft.com/office/drawing/2014/main" id="{46B85636-8A75-97F4-B599-DB33091EE52A}"/>
+                <a16:creationId xmlns:a16="http://schemas.microsoft.com/office/drawing/2014/main" id="{2B1FAEA4-8B36-5ED0-B67E-BC5D4EF809D1}"/>
               </a:ext>
             </a:extLst>
           </p:cNvPr>
@@ -14545,7 +14568,7 @@
           <p:cNvPr id="24" name="Прямоугольник 23">
             <a:extLst>
               <a:ext uri="{FF2B5EF4-FFF2-40B4-BE49-F238E27FC236}">
-                <a16:creationId xmlns:a16="http://schemas.microsoft.com/office/drawing/2014/main" id="{129E8976-7FB1-2A54-D289-D252A6E36400}"/>
+                <a16:creationId xmlns:a16="http://schemas.microsoft.com/office/drawing/2014/main" id="{CEA11336-EF42-F075-6610-6E805404B866}"/>
               </a:ext>
             </a:extLst>
           </p:cNvPr>
@@ -14614,7 +14637,7 @@
             <a:hlinkClick r:id="" action="ppaction://media"/>
             <a:extLst>
               <a:ext uri="{FF2B5EF4-FFF2-40B4-BE49-F238E27FC236}">
-                <a16:creationId xmlns:a16="http://schemas.microsoft.com/office/drawing/2014/main" id="{5983C752-6277-ED95-D3D4-F5F69A52FD96}"/>
+                <a16:creationId xmlns:a16="http://schemas.microsoft.com/office/drawing/2014/main" id="{5B84F06A-13E7-42CC-890A-B6B64454665E}"/>
               </a:ext>
             </a:extLst>
           </p:cNvPr>
@@ -14656,7 +14679,7 @@
           <p:cNvPr id="26" name="TextBox 25">
             <a:extLst>
               <a:ext uri="{FF2B5EF4-FFF2-40B4-BE49-F238E27FC236}">
-                <a16:creationId xmlns:a16="http://schemas.microsoft.com/office/drawing/2014/main" id="{CD3855CA-B0CF-76CC-CC9B-2AFFF4001085}"/>
+                <a16:creationId xmlns:a16="http://schemas.microsoft.com/office/drawing/2014/main" id="{8C28F901-8C14-89A7-5F8F-56AEF2F72A53}"/>
               </a:ext>
             </a:extLst>
           </p:cNvPr>
@@ -14699,7 +14722,7 @@
     </p:spTree>
     <p:extLst>
       <p:ext uri="{BB962C8B-B14F-4D97-AF65-F5344CB8AC3E}">
-        <p14:creationId xmlns:p14="http://schemas.microsoft.com/office/powerpoint/2010/main" val="2621819846"/>
+        <p14:creationId xmlns:p14="http://schemas.microsoft.com/office/powerpoint/2010/main" val="1719661389"/>
       </p:ext>
     </p:extLst>
   </p:cSld>
@@ -14866,7 +14889,7 @@
           <p:cNvPr id="2" name="Прямоугольник 1">
             <a:extLst>
               <a:ext uri="{FF2B5EF4-FFF2-40B4-BE49-F238E27FC236}">
-                <a16:creationId xmlns:a16="http://schemas.microsoft.com/office/drawing/2014/main" id="{FF406BEC-4351-69E3-89E8-71F68C241FE3}"/>
+                <a16:creationId xmlns:a16="http://schemas.microsoft.com/office/drawing/2014/main" id="{370A6BE6-A45E-F6C9-5087-ED8AA83828FF}"/>
               </a:ext>
             </a:extLst>
           </p:cNvPr>
@@ -14934,7 +14957,7 @@
           <p:cNvPr id="3" name="TextBox 2">
             <a:extLst>
               <a:ext uri="{FF2B5EF4-FFF2-40B4-BE49-F238E27FC236}">
-                <a16:creationId xmlns:a16="http://schemas.microsoft.com/office/drawing/2014/main" id="{F87A9A91-CB53-C6FE-1244-412DBA48E82A}"/>
+                <a16:creationId xmlns:a16="http://schemas.microsoft.com/office/drawing/2014/main" id="{18E37ABD-F498-E330-43DF-1EA636407D9F}"/>
               </a:ext>
             </a:extLst>
           </p:cNvPr>
@@ -14944,7 +14967,7 @@
         <p:spPr>
           <a:xfrm>
             <a:off x="762000" y="1905000"/>
-            <a:ext cx="10668000" cy="369332"/>
+            <a:ext cx="7874000" cy="369332"/>
           </a:xfrm>
           <a:prstGeom prst="rect">
             <a:avLst/>
@@ -14979,7 +15002,7 @@
           <p:cNvPr id="4" name="TextBox 3">
             <a:extLst>
               <a:ext uri="{FF2B5EF4-FFF2-40B4-BE49-F238E27FC236}">
-                <a16:creationId xmlns:a16="http://schemas.microsoft.com/office/drawing/2014/main" id="{16D1B43A-1ACD-2987-59A4-CDC6BA038430}"/>
+                <a16:creationId xmlns:a16="http://schemas.microsoft.com/office/drawing/2014/main" id="{FA1631CE-0173-EC5D-53F1-2877FC093CDD}"/>
               </a:ext>
             </a:extLst>
           </p:cNvPr>
@@ -14989,7 +15012,7 @@
         <p:spPr>
           <a:xfrm>
             <a:off x="762000" y="2641600"/>
-            <a:ext cx="10668000" cy="369332"/>
+            <a:ext cx="7874000" cy="369332"/>
           </a:xfrm>
           <a:prstGeom prst="rect">
             <a:avLst/>
@@ -15024,7 +15047,7 @@
           <p:cNvPr id="5" name="Прямоугольник 4">
             <a:extLst>
               <a:ext uri="{FF2B5EF4-FFF2-40B4-BE49-F238E27FC236}">
-                <a16:creationId xmlns:a16="http://schemas.microsoft.com/office/drawing/2014/main" id="{FB13215E-AB0E-981A-8707-8AC28704F206}"/>
+                <a16:creationId xmlns:a16="http://schemas.microsoft.com/office/drawing/2014/main" id="{E8984FB5-02CB-2514-25E9-395CC918FC7F}"/>
               </a:ext>
             </a:extLst>
           </p:cNvPr>
@@ -15092,7 +15115,7 @@
           <p:cNvPr id="6" name="TextBox 5">
             <a:extLst>
               <a:ext uri="{FF2B5EF4-FFF2-40B4-BE49-F238E27FC236}">
-                <a16:creationId xmlns:a16="http://schemas.microsoft.com/office/drawing/2014/main" id="{EEFD571F-05A0-F4B2-698D-6BB352C46CAC}"/>
+                <a16:creationId xmlns:a16="http://schemas.microsoft.com/office/drawing/2014/main" id="{4FB02079-F3A8-D6EF-EB32-2E5819A757F3}"/>
               </a:ext>
             </a:extLst>
           </p:cNvPr>
@@ -15102,7 +15125,7 @@
         <p:spPr>
           <a:xfrm>
             <a:off x="762000" y="3937000"/>
-            <a:ext cx="10668000" cy="369332"/>
+            <a:ext cx="7620000" cy="369332"/>
           </a:xfrm>
           <a:prstGeom prst="rect">
             <a:avLst/>
@@ -15137,7 +15160,7 @@
           <p:cNvPr id="7" name="TextBox 6">
             <a:extLst>
               <a:ext uri="{FF2B5EF4-FFF2-40B4-BE49-F238E27FC236}">
-                <a16:creationId xmlns:a16="http://schemas.microsoft.com/office/drawing/2014/main" id="{59E18CF2-0A9C-CE3C-77B9-379E95465B1B}"/>
+                <a16:creationId xmlns:a16="http://schemas.microsoft.com/office/drawing/2014/main" id="{99EE1A85-B859-1660-8799-D0759A924559}"/>
               </a:ext>
             </a:extLst>
           </p:cNvPr>
@@ -15146,8 +15169,8 @@
         </p:nvSpPr>
         <p:spPr>
           <a:xfrm>
-            <a:off x="762000" y="4978400"/>
-            <a:ext cx="10668000" cy="369332"/>
+            <a:off x="762000" y="4724400"/>
+            <a:ext cx="7112000" cy="369332"/>
           </a:xfrm>
           <a:prstGeom prst="rect">
             <a:avLst/>
@@ -15182,7 +15205,7 @@
           <p:cNvPr id="8" name="TextBox 7">
             <a:extLst>
               <a:ext uri="{FF2B5EF4-FFF2-40B4-BE49-F238E27FC236}">
-                <a16:creationId xmlns:a16="http://schemas.microsoft.com/office/drawing/2014/main" id="{5FFE6440-9FB9-19ED-51F0-54DF104402E4}"/>
+                <a16:creationId xmlns:a16="http://schemas.microsoft.com/office/drawing/2014/main" id="{10195FA9-FCDE-0DDD-B39C-884C33AF4A56}"/>
               </a:ext>
             </a:extLst>
           </p:cNvPr>
@@ -15191,8 +15214,8 @@
         </p:nvSpPr>
         <p:spPr>
           <a:xfrm>
-            <a:off x="762000" y="5257800"/>
-            <a:ext cx="10668000" cy="369332"/>
+            <a:off x="762000" y="5283200"/>
+            <a:ext cx="7112000" cy="369332"/>
           </a:xfrm>
           <a:prstGeom prst="rect">
             <a:avLst/>
@@ -15217,7 +15240,7 @@
                 </a:solidFill>
                 <a:latin typeface="Times New Roman" panose="02020603050405020304" pitchFamily="18" charset="0"/>
               </a:rPr>
-              <a:t>Выполнил: Матулов А. А., группа ИС1-45 · Руководитель: Васильченко М. О.</a:t>
+              <a:t>Выполнил: Матулов А. А., группа ИС1-45</a:t>
             </a:r>
           </a:p>
         </p:txBody>
@@ -15227,7 +15250,7 @@
           <p:cNvPr id="9" name="TextBox 8">
             <a:extLst>
               <a:ext uri="{FF2B5EF4-FFF2-40B4-BE49-F238E27FC236}">
-                <a16:creationId xmlns:a16="http://schemas.microsoft.com/office/drawing/2014/main" id="{EE5867FC-750C-5037-39FE-38871E98FD3F}"/>
+                <a16:creationId xmlns:a16="http://schemas.microsoft.com/office/drawing/2014/main" id="{7FD14B2E-0713-6F1F-0B6A-6AC2F564DC7C}"/>
               </a:ext>
             </a:extLst>
           </p:cNvPr>
@@ -15236,8 +15259,8 @@
         </p:nvSpPr>
         <p:spPr>
           <a:xfrm>
-            <a:off x="762000" y="5867400"/>
-            <a:ext cx="10668000" cy="369332"/>
+            <a:off x="762000" y="5562600"/>
+            <a:ext cx="7112000" cy="369332"/>
           </a:xfrm>
           <a:prstGeom prst="rect">
             <a:avLst/>
@@ -15262,15 +15285,260 @@
                 </a:solidFill>
                 <a:latin typeface="Times New Roman" panose="02020603050405020304" pitchFamily="18" charset="0"/>
               </a:rPr>
+              <a:t>Руководитель: Васильченко М. О.</a:t>
+            </a:r>
+          </a:p>
+        </p:txBody>
+      </p:sp>
+      <p:sp>
+        <p:nvSpPr>
+          <p:cNvPr id="10" name="TextBox 9">
+            <a:extLst>
+              <a:ext uri="{FF2B5EF4-FFF2-40B4-BE49-F238E27FC236}">
+                <a16:creationId xmlns:a16="http://schemas.microsoft.com/office/drawing/2014/main" id="{202F430C-B0AC-BBB0-516F-3837B910A1A6}"/>
+              </a:ext>
+            </a:extLst>
+          </p:cNvPr>
+          <p:cNvSpPr txBox="1"/>
+          <p:nvPr/>
+        </p:nvSpPr>
+        <p:spPr>
+          <a:xfrm>
+            <a:off x="762000" y="6019800"/>
+            <a:ext cx="4064000" cy="369332"/>
+          </a:xfrm>
+          <a:prstGeom prst="rect">
+            <a:avLst/>
+          </a:prstGeom>
+          <a:noFill/>
+        </p:spPr>
+        <p:txBody>
+          <a:bodyPr vert="horz" wrap="square" lIns="0" tIns="0" rIns="0" bIns="0" rtlCol="0">
+            <a:noAutofit/>
+          </a:bodyPr>
+          <a:lstStyle/>
+          <a:p>
+            <a:pPr>
+              <a:lnSpc>
+                <a:spcPct val="115000"/>
+              </a:lnSpc>
+            </a:pPr>
+            <a:r>
+              <a:rPr lang="ru-RU" sz="1050">
+                <a:solidFill>
+                  <a:srgbClr val="D6DEE8"/>
+                </a:solidFill>
+                <a:latin typeface="Times New Roman" panose="02020603050405020304" pitchFamily="18" charset="0"/>
+              </a:rPr>
               <a:t>Ярославль, 2026</a:t>
             </a:r>
+          </a:p>
+        </p:txBody>
+      </p:sp>
+      <p:sp>
+        <p:nvSpPr>
+          <p:cNvPr id="11" name="Прямоугольник 10">
+            <a:extLst>
+              <a:ext uri="{FF2B5EF4-FFF2-40B4-BE49-F238E27FC236}">
+                <a16:creationId xmlns:a16="http://schemas.microsoft.com/office/drawing/2014/main" id="{D3BC5E66-5647-5CFB-C6E7-D37DC6534A32}"/>
+              </a:ext>
+            </a:extLst>
+          </p:cNvPr>
+          <p:cNvSpPr/>
+          <p:nvPr/>
+        </p:nvSpPr>
+        <p:spPr>
+          <a:xfrm>
+            <a:off x="8890000" y="4038600"/>
+            <a:ext cx="2184400" cy="2184400"/>
+          </a:xfrm>
+          <a:prstGeom prst="rect">
+            <a:avLst/>
+          </a:prstGeom>
+          <a:solidFill>
+            <a:srgbClr val="FFFFFF"/>
+          </a:solidFill>
+          <a:ln w="19050" cap="flat" cmpd="sng" algn="ctr">
+            <a:noFill/>
+            <a:prstDash val="solid"/>
+            <a:miter lim="800000"/>
+          </a:ln>
+          <a:effectLst/>
+          <a:extLst>
+            <a:ext uri="{91240B29-F687-4F45-9708-019B960494DF}">
+              <a14:hiddenLine xmlns:a14="http://schemas.microsoft.com/office/drawing/2010/main" w="19050" cap="flat" cmpd="sng" algn="ctr">
+                <a:solidFill>
+                  <a:schemeClr val="accent1">
+                    <a:shade val="15000"/>
+                  </a:schemeClr>
+                </a:solidFill>
+                <a:prstDash val="solid"/>
+                <a:miter lim="800000"/>
+              </a14:hiddenLine>
+            </a:ext>
+          </a:extLst>
+        </p:spPr>
+        <p:style>
+          <a:lnRef idx="2">
+            <a:schemeClr val="accent1">
+              <a:shade val="15000"/>
+            </a:schemeClr>
+          </a:lnRef>
+          <a:fillRef idx="1">
+            <a:schemeClr val="accent1"/>
+          </a:fillRef>
+          <a:effectRef idx="0">
+            <a:schemeClr val="accent1"/>
+          </a:effectRef>
+          <a:fontRef idx="minor">
+            <a:schemeClr val="lt1"/>
+          </a:fontRef>
+        </p:style>
+        <p:txBody>
+          <a:bodyPr rtlCol="0" anchor="ctr"/>
+          <a:lstStyle/>
+          <a:p>
+            <a:pPr algn="ctr"/>
+            <a:endParaRPr lang="ru-RU"/>
+          </a:p>
+        </p:txBody>
+      </p:sp>
+      <p:pic>
+        <p:nvPicPr>
+          <p:cNvPr id="13" name="Рисунок 12">
+            <a:extLst>
+              <a:ext uri="{FF2B5EF4-FFF2-40B4-BE49-F238E27FC236}">
+                <a16:creationId xmlns:a16="http://schemas.microsoft.com/office/drawing/2014/main" id="{4BF7EAB6-23DA-1AE4-6816-F322CDD0FED1}"/>
+              </a:ext>
+            </a:extLst>
+          </p:cNvPr>
+          <p:cNvPicPr>
+            <a:picLocks noChangeAspect="1"/>
+          </p:cNvPicPr>
+          <p:nvPr/>
+        </p:nvPicPr>
+        <p:blipFill>
+          <a:blip r:embed="rId2">
+            <a:extLst>
+              <a:ext uri="{28A0092B-C50C-407E-A947-70E740481C1C}">
+                <a14:useLocalDpi xmlns:a14="http://schemas.microsoft.com/office/drawing/2010/main" val="0"/>
+              </a:ext>
+            </a:extLst>
+          </a:blip>
+          <a:stretch>
+            <a:fillRect/>
+          </a:stretch>
+        </p:blipFill>
+        <p:spPr>
+          <a:xfrm>
+            <a:off x="8991600" y="4140200"/>
+            <a:ext cx="1981200" cy="1981200"/>
+          </a:xfrm>
+          <a:prstGeom prst="rect">
+            <a:avLst/>
+          </a:prstGeom>
+        </p:spPr>
+      </p:pic>
+      <p:sp>
+        <p:nvSpPr>
+          <p:cNvPr id="14" name="TextBox 13">
+            <a:extLst>
+              <a:ext uri="{FF2B5EF4-FFF2-40B4-BE49-F238E27FC236}">
+                <a16:creationId xmlns:a16="http://schemas.microsoft.com/office/drawing/2014/main" id="{A6A23FB9-63DC-5757-ACEF-1B859EEC4124}"/>
+              </a:ext>
+            </a:extLst>
+          </p:cNvPr>
+          <p:cNvSpPr txBox="1"/>
+          <p:nvPr/>
+        </p:nvSpPr>
+        <p:spPr>
+          <a:xfrm>
+            <a:off x="8382000" y="6299200"/>
+            <a:ext cx="3200400" cy="369332"/>
+          </a:xfrm>
+          <a:prstGeom prst="rect">
+            <a:avLst/>
+          </a:prstGeom>
+          <a:noFill/>
+        </p:spPr>
+        <p:txBody>
+          <a:bodyPr vert="horz" wrap="square" lIns="0" tIns="0" rIns="0" bIns="0" rtlCol="0">
+            <a:noAutofit/>
+          </a:bodyPr>
+          <a:lstStyle/>
+          <a:p>
+            <a:pPr>
+              <a:lnSpc>
+                <a:spcPct val="115000"/>
+              </a:lnSpc>
+            </a:pPr>
+            <a:r>
+              <a:rPr lang="ru-RU" sz="950">
+                <a:solidFill>
+                  <a:srgbClr val="FFFFFF"/>
+                </a:solidFill>
+                <a:latin typeface="Times New Roman" panose="02020603050405020304" pitchFamily="18" charset="0"/>
+              </a:rPr>
+              <a:t>Исходный код проекта</a:t>
+            </a:r>
+          </a:p>
+        </p:txBody>
+      </p:sp>
+      <p:sp>
+        <p:nvSpPr>
+          <p:cNvPr id="15" name="TextBox 14">
+            <a:extLst>
+              <a:ext uri="{FF2B5EF4-FFF2-40B4-BE49-F238E27FC236}">
+                <a16:creationId xmlns:a16="http://schemas.microsoft.com/office/drawing/2014/main" id="{B9A1A2DD-0FC9-807E-5E45-3F053C40D00F}"/>
+              </a:ext>
+            </a:extLst>
+          </p:cNvPr>
+          <p:cNvSpPr txBox="1"/>
+          <p:nvPr/>
+        </p:nvSpPr>
+        <p:spPr>
+          <a:xfrm>
+            <a:off x="8128000" y="6477000"/>
+            <a:ext cx="3708400" cy="369332"/>
+          </a:xfrm>
+          <a:prstGeom prst="rect">
+            <a:avLst/>
+          </a:prstGeom>
+          <a:noFill/>
+        </p:spPr>
+        <p:txBody>
+          <a:bodyPr vert="horz" wrap="square" lIns="0" tIns="0" rIns="0" bIns="0" rtlCol="0">
+            <a:noAutofit/>
+          </a:bodyPr>
+          <a:lstStyle/>
+          <a:p>
+            <a:pPr>
+              <a:lnSpc>
+                <a:spcPct val="115000"/>
+              </a:lnSpc>
+            </a:pPr>
+            <a:r>
+              <a:rPr lang="en-US" sz="850">
+                <a:solidFill>
+                  <a:srgbClr val="D6DEE8"/>
+                </a:solidFill>
+                <a:latin typeface="Times New Roman" panose="02020603050405020304" pitchFamily="18" charset="0"/>
+              </a:rPr>
+              <a:t>github.com/CoBa-3325/up03-uchebnye-kursy</a:t>
+            </a:r>
+            <a:endParaRPr lang="ru-RU" sz="850">
+              <a:solidFill>
+                <a:srgbClr val="D6DEE8"/>
+              </a:solidFill>
+              <a:latin typeface="Times New Roman" panose="02020603050405020304" pitchFamily="18" charset="0"/>
+            </a:endParaRPr>
           </a:p>
         </p:txBody>
       </p:sp>
     </p:spTree>
     <p:extLst>
       <p:ext uri="{BB962C8B-B14F-4D97-AF65-F5344CB8AC3E}">
-        <p14:creationId xmlns:p14="http://schemas.microsoft.com/office/powerpoint/2010/main" val="2997128814"/>
+        <p14:creationId xmlns:p14="http://schemas.microsoft.com/office/powerpoint/2010/main" val="918338870"/>
       </p:ext>
     </p:extLst>
   </p:cSld>

--- a/Презентация к защите.pptx
+++ b/Презентация к защите.pptx
@@ -137,7 +137,7 @@
           <p:cNvPr id="2" name="Заголовок 1">
             <a:extLst>
               <a:ext uri="{FF2B5EF4-FFF2-40B4-BE49-F238E27FC236}">
-                <a16:creationId xmlns:a16="http://schemas.microsoft.com/office/drawing/2014/main" id="{68864DB7-E98F-D9F8-394F-B9EA673AB5EE}"/>
+                <a16:creationId xmlns:a16="http://schemas.microsoft.com/office/drawing/2014/main" id="{644442EA-CE55-EEFB-A238-1CE801750A0D}"/>
               </a:ext>
             </a:extLst>
           </p:cNvPr>
@@ -174,7 +174,7 @@
           <p:cNvPr id="3" name="Подзаголовок 2">
             <a:extLst>
               <a:ext uri="{FF2B5EF4-FFF2-40B4-BE49-F238E27FC236}">
-                <a16:creationId xmlns:a16="http://schemas.microsoft.com/office/drawing/2014/main" id="{2D1047A8-4971-6978-48D2-CF37DA2D6A26}"/>
+                <a16:creationId xmlns:a16="http://schemas.microsoft.com/office/drawing/2014/main" id="{C4D899E2-DD28-16F2-EA8C-9400A242ABA5}"/>
               </a:ext>
             </a:extLst>
           </p:cNvPr>
@@ -244,7 +244,7 @@
           <p:cNvPr id="4" name="Дата 3">
             <a:extLst>
               <a:ext uri="{FF2B5EF4-FFF2-40B4-BE49-F238E27FC236}">
-                <a16:creationId xmlns:a16="http://schemas.microsoft.com/office/drawing/2014/main" id="{5F6F6E13-72CB-ABAD-6D62-460D5728D55C}"/>
+                <a16:creationId xmlns:a16="http://schemas.microsoft.com/office/drawing/2014/main" id="{B03BBC4F-6418-7F06-D935-646960B9FDF6}"/>
               </a:ext>
             </a:extLst>
           </p:cNvPr>
@@ -260,7 +260,7 @@
           <a:bodyPr/>
           <a:lstStyle/>
           <a:p>
-            <a:fld id="{01FE08CB-9F15-41C7-84BD-B8E4C3B377BE}" type="datetimeFigureOut">
+            <a:fld id="{85E09BD1-38AB-49EB-9460-C39B2CCD3658}" type="datetimeFigureOut">
               <a:rPr lang="ru-RU" smtClean="0"/>
               <a:t>27.10.2026</a:t>
             </a:fld>
@@ -273,7 +273,7 @@
           <p:cNvPr id="5" name="Нижний колонтитул 4">
             <a:extLst>
               <a:ext uri="{FF2B5EF4-FFF2-40B4-BE49-F238E27FC236}">
-                <a16:creationId xmlns:a16="http://schemas.microsoft.com/office/drawing/2014/main" id="{DEF83C52-4BDA-1F0E-F6D4-4DEDCDBB8483}"/>
+                <a16:creationId xmlns:a16="http://schemas.microsoft.com/office/drawing/2014/main" id="{6FACC0D5-C4B9-A1EF-9DAB-CF6954527795}"/>
               </a:ext>
             </a:extLst>
           </p:cNvPr>
@@ -298,7 +298,7 @@
           <p:cNvPr id="6" name="Номер слайда 5">
             <a:extLst>
               <a:ext uri="{FF2B5EF4-FFF2-40B4-BE49-F238E27FC236}">
-                <a16:creationId xmlns:a16="http://schemas.microsoft.com/office/drawing/2014/main" id="{199501A9-8B40-9774-CCD6-A673C12BBC5D}"/>
+                <a16:creationId xmlns:a16="http://schemas.microsoft.com/office/drawing/2014/main" id="{EBFD1A86-2602-9A78-FDC8-30E5017E2722}"/>
               </a:ext>
             </a:extLst>
           </p:cNvPr>
@@ -314,7 +314,7 @@
           <a:bodyPr/>
           <a:lstStyle/>
           <a:p>
-            <a:fld id="{6D2D470A-CC0F-47D2-92C2-9A53BE3FE502}" type="slidenum">
+            <a:fld id="{D760BBD7-A5CA-4261-B408-0C158449086A}" type="slidenum">
               <a:rPr lang="ru-RU" smtClean="0"/>
               <a:t>‹#›</a:t>
             </a:fld>
@@ -325,7 +325,7 @@
     </p:spTree>
     <p:extLst>
       <p:ext uri="{BB962C8B-B14F-4D97-AF65-F5344CB8AC3E}">
-        <p14:creationId xmlns:p14="http://schemas.microsoft.com/office/powerpoint/2010/main" val="3649050008"/>
+        <p14:creationId xmlns:p14="http://schemas.microsoft.com/office/powerpoint/2010/main" val="1780885214"/>
       </p:ext>
     </p:extLst>
   </p:cSld>
@@ -357,7 +357,7 @@
           <p:cNvPr id="2" name="Заголовок 1">
             <a:extLst>
               <a:ext uri="{FF2B5EF4-FFF2-40B4-BE49-F238E27FC236}">
-                <a16:creationId xmlns:a16="http://schemas.microsoft.com/office/drawing/2014/main" id="{C88F8F2F-7B1C-96A9-C590-927403E78DEF}"/>
+                <a16:creationId xmlns:a16="http://schemas.microsoft.com/office/drawing/2014/main" id="{7FE61194-DC0E-84B0-516F-C0BEF6863280}"/>
               </a:ext>
             </a:extLst>
           </p:cNvPr>
@@ -385,7 +385,7 @@
           <p:cNvPr id="3" name="Вертикальный текст 2">
             <a:extLst>
               <a:ext uri="{FF2B5EF4-FFF2-40B4-BE49-F238E27FC236}">
-                <a16:creationId xmlns:a16="http://schemas.microsoft.com/office/drawing/2014/main" id="{0E0FE6BE-8B1D-F20B-B8A8-C0B5B517BC84}"/>
+                <a16:creationId xmlns:a16="http://schemas.microsoft.com/office/drawing/2014/main" id="{C9B83078-F57B-4557-5F8F-7D6438816423}"/>
               </a:ext>
             </a:extLst>
           </p:cNvPr>
@@ -442,7 +442,7 @@
           <p:cNvPr id="4" name="Дата 3">
             <a:extLst>
               <a:ext uri="{FF2B5EF4-FFF2-40B4-BE49-F238E27FC236}">
-                <a16:creationId xmlns:a16="http://schemas.microsoft.com/office/drawing/2014/main" id="{62078E91-452B-5557-384D-6AD0E431B6C8}"/>
+                <a16:creationId xmlns:a16="http://schemas.microsoft.com/office/drawing/2014/main" id="{819E2F52-42DC-575C-965C-516DF1B8E105}"/>
               </a:ext>
             </a:extLst>
           </p:cNvPr>
@@ -458,7 +458,7 @@
           <a:bodyPr/>
           <a:lstStyle/>
           <a:p>
-            <a:fld id="{01FE08CB-9F15-41C7-84BD-B8E4C3B377BE}" type="datetimeFigureOut">
+            <a:fld id="{85E09BD1-38AB-49EB-9460-C39B2CCD3658}" type="datetimeFigureOut">
               <a:rPr lang="ru-RU" smtClean="0"/>
               <a:t>27.10.2026</a:t>
             </a:fld>
@@ -471,7 +471,7 @@
           <p:cNvPr id="5" name="Нижний колонтитул 4">
             <a:extLst>
               <a:ext uri="{FF2B5EF4-FFF2-40B4-BE49-F238E27FC236}">
-                <a16:creationId xmlns:a16="http://schemas.microsoft.com/office/drawing/2014/main" id="{326AE841-098D-1B80-1236-E6DCB566E037}"/>
+                <a16:creationId xmlns:a16="http://schemas.microsoft.com/office/drawing/2014/main" id="{5A064065-512C-480C-2B6C-39933D66C7EF}"/>
               </a:ext>
             </a:extLst>
           </p:cNvPr>
@@ -496,7 +496,7 @@
           <p:cNvPr id="6" name="Номер слайда 5">
             <a:extLst>
               <a:ext uri="{FF2B5EF4-FFF2-40B4-BE49-F238E27FC236}">
-                <a16:creationId xmlns:a16="http://schemas.microsoft.com/office/drawing/2014/main" id="{43689712-C9D9-1082-91DE-5FD4824847A1}"/>
+                <a16:creationId xmlns:a16="http://schemas.microsoft.com/office/drawing/2014/main" id="{1330561E-5C30-FB2A-9375-E42042C6510D}"/>
               </a:ext>
             </a:extLst>
           </p:cNvPr>
@@ -512,7 +512,7 @@
           <a:bodyPr/>
           <a:lstStyle/>
           <a:p>
-            <a:fld id="{6D2D470A-CC0F-47D2-92C2-9A53BE3FE502}" type="slidenum">
+            <a:fld id="{D760BBD7-A5CA-4261-B408-0C158449086A}" type="slidenum">
               <a:rPr lang="ru-RU" smtClean="0"/>
               <a:t>‹#›</a:t>
             </a:fld>
@@ -523,7 +523,7 @@
     </p:spTree>
     <p:extLst>
       <p:ext uri="{BB962C8B-B14F-4D97-AF65-F5344CB8AC3E}">
-        <p14:creationId xmlns:p14="http://schemas.microsoft.com/office/powerpoint/2010/main" val="4169868242"/>
+        <p14:creationId xmlns:p14="http://schemas.microsoft.com/office/powerpoint/2010/main" val="3398641057"/>
       </p:ext>
     </p:extLst>
   </p:cSld>
@@ -555,7 +555,7 @@
           <p:cNvPr id="2" name="Вертикальный заголовок 1">
             <a:extLst>
               <a:ext uri="{FF2B5EF4-FFF2-40B4-BE49-F238E27FC236}">
-                <a16:creationId xmlns:a16="http://schemas.microsoft.com/office/drawing/2014/main" id="{5DF4A3A4-F48E-A682-EEAE-06345F50D579}"/>
+                <a16:creationId xmlns:a16="http://schemas.microsoft.com/office/drawing/2014/main" id="{F99991F1-27AF-FBB6-3C4F-5400A3A05D40}"/>
               </a:ext>
             </a:extLst>
           </p:cNvPr>
@@ -588,7 +588,7 @@
           <p:cNvPr id="3" name="Вертикальный текст 2">
             <a:extLst>
               <a:ext uri="{FF2B5EF4-FFF2-40B4-BE49-F238E27FC236}">
-                <a16:creationId xmlns:a16="http://schemas.microsoft.com/office/drawing/2014/main" id="{6AC8703A-FE9F-AFA7-8C3B-59A16C4CF4D9}"/>
+                <a16:creationId xmlns:a16="http://schemas.microsoft.com/office/drawing/2014/main" id="{8F56E2B6-E59F-C730-65DC-19838763A330}"/>
               </a:ext>
             </a:extLst>
           </p:cNvPr>
@@ -650,7 +650,7 @@
           <p:cNvPr id="4" name="Дата 3">
             <a:extLst>
               <a:ext uri="{FF2B5EF4-FFF2-40B4-BE49-F238E27FC236}">
-                <a16:creationId xmlns:a16="http://schemas.microsoft.com/office/drawing/2014/main" id="{432C742A-1036-B588-E8AB-3D15FD8A0EDF}"/>
+                <a16:creationId xmlns:a16="http://schemas.microsoft.com/office/drawing/2014/main" id="{C6060A87-4A77-C960-3A2A-CD2DD70E8CEC}"/>
               </a:ext>
             </a:extLst>
           </p:cNvPr>
@@ -666,7 +666,7 @@
           <a:bodyPr/>
           <a:lstStyle/>
           <a:p>
-            <a:fld id="{01FE08CB-9F15-41C7-84BD-B8E4C3B377BE}" type="datetimeFigureOut">
+            <a:fld id="{85E09BD1-38AB-49EB-9460-C39B2CCD3658}" type="datetimeFigureOut">
               <a:rPr lang="ru-RU" smtClean="0"/>
               <a:t>27.10.2026</a:t>
             </a:fld>
@@ -679,7 +679,7 @@
           <p:cNvPr id="5" name="Нижний колонтитул 4">
             <a:extLst>
               <a:ext uri="{FF2B5EF4-FFF2-40B4-BE49-F238E27FC236}">
-                <a16:creationId xmlns:a16="http://schemas.microsoft.com/office/drawing/2014/main" id="{7FA12898-EE81-C286-A46E-5AF323E20A45}"/>
+                <a16:creationId xmlns:a16="http://schemas.microsoft.com/office/drawing/2014/main" id="{232EC504-8BCE-780B-E3AF-E183879E01AE}"/>
               </a:ext>
             </a:extLst>
           </p:cNvPr>
@@ -704,7 +704,7 @@
           <p:cNvPr id="6" name="Номер слайда 5">
             <a:extLst>
               <a:ext uri="{FF2B5EF4-FFF2-40B4-BE49-F238E27FC236}">
-                <a16:creationId xmlns:a16="http://schemas.microsoft.com/office/drawing/2014/main" id="{8AB24E85-DAB5-7076-1DE9-751F08B299DC}"/>
+                <a16:creationId xmlns:a16="http://schemas.microsoft.com/office/drawing/2014/main" id="{C4016121-5BEB-4031-EEDE-67D9E6BAA173}"/>
               </a:ext>
             </a:extLst>
           </p:cNvPr>
@@ -720,7 +720,7 @@
           <a:bodyPr/>
           <a:lstStyle/>
           <a:p>
-            <a:fld id="{6D2D470A-CC0F-47D2-92C2-9A53BE3FE502}" type="slidenum">
+            <a:fld id="{D760BBD7-A5CA-4261-B408-0C158449086A}" type="slidenum">
               <a:rPr lang="ru-RU" smtClean="0"/>
               <a:t>‹#›</a:t>
             </a:fld>
@@ -731,7 +731,7 @@
     </p:spTree>
     <p:extLst>
       <p:ext uri="{BB962C8B-B14F-4D97-AF65-F5344CB8AC3E}">
-        <p14:creationId xmlns:p14="http://schemas.microsoft.com/office/powerpoint/2010/main" val="3390180313"/>
+        <p14:creationId xmlns:p14="http://schemas.microsoft.com/office/powerpoint/2010/main" val="2936307914"/>
       </p:ext>
     </p:extLst>
   </p:cSld>
@@ -763,7 +763,7 @@
           <p:cNvPr id="2" name="Заголовок 1">
             <a:extLst>
               <a:ext uri="{FF2B5EF4-FFF2-40B4-BE49-F238E27FC236}">
-                <a16:creationId xmlns:a16="http://schemas.microsoft.com/office/drawing/2014/main" id="{48501818-910F-5824-D87B-C0CA78DD76A0}"/>
+                <a16:creationId xmlns:a16="http://schemas.microsoft.com/office/drawing/2014/main" id="{769613F2-E9E7-0B11-D8CA-37C64528CEE3}"/>
               </a:ext>
             </a:extLst>
           </p:cNvPr>
@@ -791,7 +791,7 @@
           <p:cNvPr id="3" name="Объект 2">
             <a:extLst>
               <a:ext uri="{FF2B5EF4-FFF2-40B4-BE49-F238E27FC236}">
-                <a16:creationId xmlns:a16="http://schemas.microsoft.com/office/drawing/2014/main" id="{FB113BA4-AC79-0B0B-CB20-8B3008387A91}"/>
+                <a16:creationId xmlns:a16="http://schemas.microsoft.com/office/drawing/2014/main" id="{6A435820-7791-84CF-9FB7-CAC18DD7CE51}"/>
               </a:ext>
             </a:extLst>
           </p:cNvPr>
@@ -848,7 +848,7 @@
           <p:cNvPr id="4" name="Дата 3">
             <a:extLst>
               <a:ext uri="{FF2B5EF4-FFF2-40B4-BE49-F238E27FC236}">
-                <a16:creationId xmlns:a16="http://schemas.microsoft.com/office/drawing/2014/main" id="{DAFC3363-7207-F694-339B-3BB835739A4F}"/>
+                <a16:creationId xmlns:a16="http://schemas.microsoft.com/office/drawing/2014/main" id="{1E7DBEA0-4DE1-3477-2661-E7412614BE36}"/>
               </a:ext>
             </a:extLst>
           </p:cNvPr>
@@ -864,7 +864,7 @@
           <a:bodyPr/>
           <a:lstStyle/>
           <a:p>
-            <a:fld id="{01FE08CB-9F15-41C7-84BD-B8E4C3B377BE}" type="datetimeFigureOut">
+            <a:fld id="{85E09BD1-38AB-49EB-9460-C39B2CCD3658}" type="datetimeFigureOut">
               <a:rPr lang="ru-RU" smtClean="0"/>
               <a:t>27.10.2026</a:t>
             </a:fld>
@@ -877,7 +877,7 @@
           <p:cNvPr id="5" name="Нижний колонтитул 4">
             <a:extLst>
               <a:ext uri="{FF2B5EF4-FFF2-40B4-BE49-F238E27FC236}">
-                <a16:creationId xmlns:a16="http://schemas.microsoft.com/office/drawing/2014/main" id="{52FC0A63-03AF-1AF2-948C-69322715B8A9}"/>
+                <a16:creationId xmlns:a16="http://schemas.microsoft.com/office/drawing/2014/main" id="{44FFD902-056B-3089-9A9E-E073F52AFAD7}"/>
               </a:ext>
             </a:extLst>
           </p:cNvPr>
@@ -902,7 +902,7 @@
           <p:cNvPr id="6" name="Номер слайда 5">
             <a:extLst>
               <a:ext uri="{FF2B5EF4-FFF2-40B4-BE49-F238E27FC236}">
-                <a16:creationId xmlns:a16="http://schemas.microsoft.com/office/drawing/2014/main" id="{065BFFF9-7B7E-44F8-D894-3708F0BAFF87}"/>
+                <a16:creationId xmlns:a16="http://schemas.microsoft.com/office/drawing/2014/main" id="{9F934874-64F4-8814-F87F-12BFBF6A6E71}"/>
               </a:ext>
             </a:extLst>
           </p:cNvPr>
@@ -918,7 +918,7 @@
           <a:bodyPr/>
           <a:lstStyle/>
           <a:p>
-            <a:fld id="{6D2D470A-CC0F-47D2-92C2-9A53BE3FE502}" type="slidenum">
+            <a:fld id="{D760BBD7-A5CA-4261-B408-0C158449086A}" type="slidenum">
               <a:rPr lang="ru-RU" smtClean="0"/>
               <a:t>‹#›</a:t>
             </a:fld>
@@ -929,7 +929,7 @@
     </p:spTree>
     <p:extLst>
       <p:ext uri="{BB962C8B-B14F-4D97-AF65-F5344CB8AC3E}">
-        <p14:creationId xmlns:p14="http://schemas.microsoft.com/office/powerpoint/2010/main" val="596247446"/>
+        <p14:creationId xmlns:p14="http://schemas.microsoft.com/office/powerpoint/2010/main" val="2600714545"/>
       </p:ext>
     </p:extLst>
   </p:cSld>
@@ -961,7 +961,7 @@
           <p:cNvPr id="2" name="Заголовок 1">
             <a:extLst>
               <a:ext uri="{FF2B5EF4-FFF2-40B4-BE49-F238E27FC236}">
-                <a16:creationId xmlns:a16="http://schemas.microsoft.com/office/drawing/2014/main" id="{79FAC5E0-7D06-28AF-ED65-65C04BB93636}"/>
+                <a16:creationId xmlns:a16="http://schemas.microsoft.com/office/drawing/2014/main" id="{B5258FDB-A6EF-D80D-F430-E81C922FC9C7}"/>
               </a:ext>
             </a:extLst>
           </p:cNvPr>
@@ -998,7 +998,7 @@
           <p:cNvPr id="3" name="Текст 2">
             <a:extLst>
               <a:ext uri="{FF2B5EF4-FFF2-40B4-BE49-F238E27FC236}">
-                <a16:creationId xmlns:a16="http://schemas.microsoft.com/office/drawing/2014/main" id="{652D3D69-BA85-F4C6-59BD-22A114CB5E50}"/>
+                <a16:creationId xmlns:a16="http://schemas.microsoft.com/office/drawing/2014/main" id="{521A80AD-1AAB-6E08-AC0A-D7FA1213D58B}"/>
               </a:ext>
             </a:extLst>
           </p:cNvPr>
@@ -1123,7 +1123,7 @@
           <p:cNvPr id="4" name="Дата 3">
             <a:extLst>
               <a:ext uri="{FF2B5EF4-FFF2-40B4-BE49-F238E27FC236}">
-                <a16:creationId xmlns:a16="http://schemas.microsoft.com/office/drawing/2014/main" id="{8932F69F-B937-4B45-FDA6-EBF72F441547}"/>
+                <a16:creationId xmlns:a16="http://schemas.microsoft.com/office/drawing/2014/main" id="{A937499C-F551-9543-94E7-83E4520670B1}"/>
               </a:ext>
             </a:extLst>
           </p:cNvPr>
@@ -1139,7 +1139,7 @@
           <a:bodyPr/>
           <a:lstStyle/>
           <a:p>
-            <a:fld id="{01FE08CB-9F15-41C7-84BD-B8E4C3B377BE}" type="datetimeFigureOut">
+            <a:fld id="{85E09BD1-38AB-49EB-9460-C39B2CCD3658}" type="datetimeFigureOut">
               <a:rPr lang="ru-RU" smtClean="0"/>
               <a:t>27.10.2026</a:t>
             </a:fld>
@@ -1152,7 +1152,7 @@
           <p:cNvPr id="5" name="Нижний колонтитул 4">
             <a:extLst>
               <a:ext uri="{FF2B5EF4-FFF2-40B4-BE49-F238E27FC236}">
-                <a16:creationId xmlns:a16="http://schemas.microsoft.com/office/drawing/2014/main" id="{7BE37508-C4B8-4FD8-FD9A-E2797224BF15}"/>
+                <a16:creationId xmlns:a16="http://schemas.microsoft.com/office/drawing/2014/main" id="{935FE5A5-1C4F-1972-D8A4-C6FBA762F102}"/>
               </a:ext>
             </a:extLst>
           </p:cNvPr>
@@ -1177,7 +1177,7 @@
           <p:cNvPr id="6" name="Номер слайда 5">
             <a:extLst>
               <a:ext uri="{FF2B5EF4-FFF2-40B4-BE49-F238E27FC236}">
-                <a16:creationId xmlns:a16="http://schemas.microsoft.com/office/drawing/2014/main" id="{983010CE-DF61-D97E-0892-42A91086AE3D}"/>
+                <a16:creationId xmlns:a16="http://schemas.microsoft.com/office/drawing/2014/main" id="{05157BF7-CBA9-7509-1CC2-5B8E5A6A2273}"/>
               </a:ext>
             </a:extLst>
           </p:cNvPr>
@@ -1193,7 +1193,7 @@
           <a:bodyPr/>
           <a:lstStyle/>
           <a:p>
-            <a:fld id="{6D2D470A-CC0F-47D2-92C2-9A53BE3FE502}" type="slidenum">
+            <a:fld id="{D760BBD7-A5CA-4261-B408-0C158449086A}" type="slidenum">
               <a:rPr lang="ru-RU" smtClean="0"/>
               <a:t>‹#›</a:t>
             </a:fld>
@@ -1204,7 +1204,7 @@
     </p:spTree>
     <p:extLst>
       <p:ext uri="{BB962C8B-B14F-4D97-AF65-F5344CB8AC3E}">
-        <p14:creationId xmlns:p14="http://schemas.microsoft.com/office/powerpoint/2010/main" val="2609321559"/>
+        <p14:creationId xmlns:p14="http://schemas.microsoft.com/office/powerpoint/2010/main" val="1225573925"/>
       </p:ext>
     </p:extLst>
   </p:cSld>
@@ -1236,7 +1236,7 @@
           <p:cNvPr id="2" name="Заголовок 1">
             <a:extLst>
               <a:ext uri="{FF2B5EF4-FFF2-40B4-BE49-F238E27FC236}">
-                <a16:creationId xmlns:a16="http://schemas.microsoft.com/office/drawing/2014/main" id="{1C5EF820-281C-180B-8413-CD167B13C684}"/>
+                <a16:creationId xmlns:a16="http://schemas.microsoft.com/office/drawing/2014/main" id="{730F4667-8697-FA03-432D-D3B0DFDEF973}"/>
               </a:ext>
             </a:extLst>
           </p:cNvPr>
@@ -1264,7 +1264,7 @@
           <p:cNvPr id="3" name="Объект 2">
             <a:extLst>
               <a:ext uri="{FF2B5EF4-FFF2-40B4-BE49-F238E27FC236}">
-                <a16:creationId xmlns:a16="http://schemas.microsoft.com/office/drawing/2014/main" id="{D889CBAA-D36D-A866-9186-7CFD558B241B}"/>
+                <a16:creationId xmlns:a16="http://schemas.microsoft.com/office/drawing/2014/main" id="{9158FF80-7633-303B-92C0-2EFDAB55572F}"/>
               </a:ext>
             </a:extLst>
           </p:cNvPr>
@@ -1326,7 +1326,7 @@
           <p:cNvPr id="4" name="Объект 3">
             <a:extLst>
               <a:ext uri="{FF2B5EF4-FFF2-40B4-BE49-F238E27FC236}">
-                <a16:creationId xmlns:a16="http://schemas.microsoft.com/office/drawing/2014/main" id="{C9A13E5F-BA73-C561-0CCD-FB2B6E93DA9E}"/>
+                <a16:creationId xmlns:a16="http://schemas.microsoft.com/office/drawing/2014/main" id="{0C863B7F-0378-6236-A959-C4816187AFFD}"/>
               </a:ext>
             </a:extLst>
           </p:cNvPr>
@@ -1388,7 +1388,7 @@
           <p:cNvPr id="5" name="Дата 4">
             <a:extLst>
               <a:ext uri="{FF2B5EF4-FFF2-40B4-BE49-F238E27FC236}">
-                <a16:creationId xmlns:a16="http://schemas.microsoft.com/office/drawing/2014/main" id="{7975FDD0-4E1B-2E0D-89C1-90700E3A9774}"/>
+                <a16:creationId xmlns:a16="http://schemas.microsoft.com/office/drawing/2014/main" id="{9E496AA9-3A18-9C5E-B277-BAE4255AF288}"/>
               </a:ext>
             </a:extLst>
           </p:cNvPr>
@@ -1404,7 +1404,7 @@
           <a:bodyPr/>
           <a:lstStyle/>
           <a:p>
-            <a:fld id="{01FE08CB-9F15-41C7-84BD-B8E4C3B377BE}" type="datetimeFigureOut">
+            <a:fld id="{85E09BD1-38AB-49EB-9460-C39B2CCD3658}" type="datetimeFigureOut">
               <a:rPr lang="ru-RU" smtClean="0"/>
               <a:t>27.10.2026</a:t>
             </a:fld>
@@ -1417,7 +1417,7 @@
           <p:cNvPr id="6" name="Нижний колонтитул 5">
             <a:extLst>
               <a:ext uri="{FF2B5EF4-FFF2-40B4-BE49-F238E27FC236}">
-                <a16:creationId xmlns:a16="http://schemas.microsoft.com/office/drawing/2014/main" id="{850AB056-CC98-075F-01C9-233949D59238}"/>
+                <a16:creationId xmlns:a16="http://schemas.microsoft.com/office/drawing/2014/main" id="{E943B855-C57B-7E3E-FC1B-E7D31830CB91}"/>
               </a:ext>
             </a:extLst>
           </p:cNvPr>
@@ -1442,7 +1442,7 @@
           <p:cNvPr id="7" name="Номер слайда 6">
             <a:extLst>
               <a:ext uri="{FF2B5EF4-FFF2-40B4-BE49-F238E27FC236}">
-                <a16:creationId xmlns:a16="http://schemas.microsoft.com/office/drawing/2014/main" id="{9B8BA3A2-49D8-A8FD-ABFC-CAB197735877}"/>
+                <a16:creationId xmlns:a16="http://schemas.microsoft.com/office/drawing/2014/main" id="{52ABE91C-C893-B108-DD3A-385D4F4E2540}"/>
               </a:ext>
             </a:extLst>
           </p:cNvPr>
@@ -1458,7 +1458,7 @@
           <a:bodyPr/>
           <a:lstStyle/>
           <a:p>
-            <a:fld id="{6D2D470A-CC0F-47D2-92C2-9A53BE3FE502}" type="slidenum">
+            <a:fld id="{D760BBD7-A5CA-4261-B408-0C158449086A}" type="slidenum">
               <a:rPr lang="ru-RU" smtClean="0"/>
               <a:t>‹#›</a:t>
             </a:fld>
@@ -1469,7 +1469,7 @@
     </p:spTree>
     <p:extLst>
       <p:ext uri="{BB962C8B-B14F-4D97-AF65-F5344CB8AC3E}">
-        <p14:creationId xmlns:p14="http://schemas.microsoft.com/office/powerpoint/2010/main" val="1429218678"/>
+        <p14:creationId xmlns:p14="http://schemas.microsoft.com/office/powerpoint/2010/main" val="3404419947"/>
       </p:ext>
     </p:extLst>
   </p:cSld>
@@ -1501,7 +1501,7 @@
           <p:cNvPr id="2" name="Заголовок 1">
             <a:extLst>
               <a:ext uri="{FF2B5EF4-FFF2-40B4-BE49-F238E27FC236}">
-                <a16:creationId xmlns:a16="http://schemas.microsoft.com/office/drawing/2014/main" id="{862FC62C-B15A-7F24-C6C5-0B451D91E31D}"/>
+                <a16:creationId xmlns:a16="http://schemas.microsoft.com/office/drawing/2014/main" id="{19E27571-E206-EDAB-6678-6FEE65777705}"/>
               </a:ext>
             </a:extLst>
           </p:cNvPr>
@@ -1534,7 +1534,7 @@
           <p:cNvPr id="3" name="Текст 2">
             <a:extLst>
               <a:ext uri="{FF2B5EF4-FFF2-40B4-BE49-F238E27FC236}">
-                <a16:creationId xmlns:a16="http://schemas.microsoft.com/office/drawing/2014/main" id="{7D322477-A139-F3BE-F208-97100283B297}"/>
+                <a16:creationId xmlns:a16="http://schemas.microsoft.com/office/drawing/2014/main" id="{559FEEF1-9C20-02F8-6E79-E26BD5C19AD2}"/>
               </a:ext>
             </a:extLst>
           </p:cNvPr>
@@ -1605,7 +1605,7 @@
           <p:cNvPr id="4" name="Объект 3">
             <a:extLst>
               <a:ext uri="{FF2B5EF4-FFF2-40B4-BE49-F238E27FC236}">
-                <a16:creationId xmlns:a16="http://schemas.microsoft.com/office/drawing/2014/main" id="{BD749BD1-BB31-9E1E-5534-896A413B2475}"/>
+                <a16:creationId xmlns:a16="http://schemas.microsoft.com/office/drawing/2014/main" id="{144315FF-0508-2521-7A0C-EB611B2F316B}"/>
               </a:ext>
             </a:extLst>
           </p:cNvPr>
@@ -1667,7 +1667,7 @@
           <p:cNvPr id="5" name="Текст 4">
             <a:extLst>
               <a:ext uri="{FF2B5EF4-FFF2-40B4-BE49-F238E27FC236}">
-                <a16:creationId xmlns:a16="http://schemas.microsoft.com/office/drawing/2014/main" id="{8D859A5C-3FA8-D704-17D6-6B34D8CDAA75}"/>
+                <a16:creationId xmlns:a16="http://schemas.microsoft.com/office/drawing/2014/main" id="{6022923F-5588-4B2E-6392-440639E3D289}"/>
               </a:ext>
             </a:extLst>
           </p:cNvPr>
@@ -1738,7 +1738,7 @@
           <p:cNvPr id="6" name="Объект 5">
             <a:extLst>
               <a:ext uri="{FF2B5EF4-FFF2-40B4-BE49-F238E27FC236}">
-                <a16:creationId xmlns:a16="http://schemas.microsoft.com/office/drawing/2014/main" id="{D12357F3-6394-C38D-69C5-A90FCF79AF0C}"/>
+                <a16:creationId xmlns:a16="http://schemas.microsoft.com/office/drawing/2014/main" id="{7F5F6C15-6C68-8A85-E306-F30F70C3A4A1}"/>
               </a:ext>
             </a:extLst>
           </p:cNvPr>
@@ -1800,7 +1800,7 @@
           <p:cNvPr id="7" name="Дата 6">
             <a:extLst>
               <a:ext uri="{FF2B5EF4-FFF2-40B4-BE49-F238E27FC236}">
-                <a16:creationId xmlns:a16="http://schemas.microsoft.com/office/drawing/2014/main" id="{54723476-D857-B247-994E-FD6AFDFECCBC}"/>
+                <a16:creationId xmlns:a16="http://schemas.microsoft.com/office/drawing/2014/main" id="{01570D05-8149-9EAA-262E-40C29D382908}"/>
               </a:ext>
             </a:extLst>
           </p:cNvPr>
@@ -1816,7 +1816,7 @@
           <a:bodyPr/>
           <a:lstStyle/>
           <a:p>
-            <a:fld id="{01FE08CB-9F15-41C7-84BD-B8E4C3B377BE}" type="datetimeFigureOut">
+            <a:fld id="{85E09BD1-38AB-49EB-9460-C39B2CCD3658}" type="datetimeFigureOut">
               <a:rPr lang="ru-RU" smtClean="0"/>
               <a:t>27.10.2026</a:t>
             </a:fld>
@@ -1829,7 +1829,7 @@
           <p:cNvPr id="8" name="Нижний колонтитул 7">
             <a:extLst>
               <a:ext uri="{FF2B5EF4-FFF2-40B4-BE49-F238E27FC236}">
-                <a16:creationId xmlns:a16="http://schemas.microsoft.com/office/drawing/2014/main" id="{B34F9D0F-A3E6-A1D3-B8C6-ECB59777F811}"/>
+                <a16:creationId xmlns:a16="http://schemas.microsoft.com/office/drawing/2014/main" id="{ECF3024E-BEE8-4E48-D4F9-CE7F33635C3F}"/>
               </a:ext>
             </a:extLst>
           </p:cNvPr>
@@ -1854,7 +1854,7 @@
           <p:cNvPr id="9" name="Номер слайда 8">
             <a:extLst>
               <a:ext uri="{FF2B5EF4-FFF2-40B4-BE49-F238E27FC236}">
-                <a16:creationId xmlns:a16="http://schemas.microsoft.com/office/drawing/2014/main" id="{A9373E40-A6EF-8144-E6AF-7EB1A0D7D68A}"/>
+                <a16:creationId xmlns:a16="http://schemas.microsoft.com/office/drawing/2014/main" id="{A4F7A61F-BB58-3FEF-7880-461561566A4A}"/>
               </a:ext>
             </a:extLst>
           </p:cNvPr>
@@ -1870,7 +1870,7 @@
           <a:bodyPr/>
           <a:lstStyle/>
           <a:p>
-            <a:fld id="{6D2D470A-CC0F-47D2-92C2-9A53BE3FE502}" type="slidenum">
+            <a:fld id="{D760BBD7-A5CA-4261-B408-0C158449086A}" type="slidenum">
               <a:rPr lang="ru-RU" smtClean="0"/>
               <a:t>‹#›</a:t>
             </a:fld>
@@ -1881,7 +1881,7 @@
     </p:spTree>
     <p:extLst>
       <p:ext uri="{BB962C8B-B14F-4D97-AF65-F5344CB8AC3E}">
-        <p14:creationId xmlns:p14="http://schemas.microsoft.com/office/powerpoint/2010/main" val="3740967945"/>
+        <p14:creationId xmlns:p14="http://schemas.microsoft.com/office/powerpoint/2010/main" val="3244394258"/>
       </p:ext>
     </p:extLst>
   </p:cSld>
@@ -1913,7 +1913,7 @@
           <p:cNvPr id="2" name="Заголовок 1">
             <a:extLst>
               <a:ext uri="{FF2B5EF4-FFF2-40B4-BE49-F238E27FC236}">
-                <a16:creationId xmlns:a16="http://schemas.microsoft.com/office/drawing/2014/main" id="{2963BAED-751A-B115-636C-28869475EDD3}"/>
+                <a16:creationId xmlns:a16="http://schemas.microsoft.com/office/drawing/2014/main" id="{8AB5EC7C-1E6F-AA49-6581-7E6DD9B69FF0}"/>
               </a:ext>
             </a:extLst>
           </p:cNvPr>
@@ -1941,7 +1941,7 @@
           <p:cNvPr id="3" name="Дата 2">
             <a:extLst>
               <a:ext uri="{FF2B5EF4-FFF2-40B4-BE49-F238E27FC236}">
-                <a16:creationId xmlns:a16="http://schemas.microsoft.com/office/drawing/2014/main" id="{36B9B2BE-07A6-177D-CD09-7D89BE347AA9}"/>
+                <a16:creationId xmlns:a16="http://schemas.microsoft.com/office/drawing/2014/main" id="{0116EA02-9D03-6288-3B58-AD4A1A5E4F8F}"/>
               </a:ext>
             </a:extLst>
           </p:cNvPr>
@@ -1957,7 +1957,7 @@
           <a:bodyPr/>
           <a:lstStyle/>
           <a:p>
-            <a:fld id="{01FE08CB-9F15-41C7-84BD-B8E4C3B377BE}" type="datetimeFigureOut">
+            <a:fld id="{85E09BD1-38AB-49EB-9460-C39B2CCD3658}" type="datetimeFigureOut">
               <a:rPr lang="ru-RU" smtClean="0"/>
               <a:t>27.10.2026</a:t>
             </a:fld>
@@ -1970,7 +1970,7 @@
           <p:cNvPr id="4" name="Нижний колонтитул 3">
             <a:extLst>
               <a:ext uri="{FF2B5EF4-FFF2-40B4-BE49-F238E27FC236}">
-                <a16:creationId xmlns:a16="http://schemas.microsoft.com/office/drawing/2014/main" id="{F90A5570-2C77-C6DE-D41C-EB776A0C3D99}"/>
+                <a16:creationId xmlns:a16="http://schemas.microsoft.com/office/drawing/2014/main" id="{8EAC54E9-F29A-B24D-5494-2C5D9A50F836}"/>
               </a:ext>
             </a:extLst>
           </p:cNvPr>
@@ -1995,7 +1995,7 @@
           <p:cNvPr id="5" name="Номер слайда 4">
             <a:extLst>
               <a:ext uri="{FF2B5EF4-FFF2-40B4-BE49-F238E27FC236}">
-                <a16:creationId xmlns:a16="http://schemas.microsoft.com/office/drawing/2014/main" id="{B4DC7563-C00E-1C4A-6020-9BEC0679A4FD}"/>
+                <a16:creationId xmlns:a16="http://schemas.microsoft.com/office/drawing/2014/main" id="{C0A5FBD5-9FFE-E165-CA9D-00DC9307E58F}"/>
               </a:ext>
             </a:extLst>
           </p:cNvPr>
@@ -2011,7 +2011,7 @@
           <a:bodyPr/>
           <a:lstStyle/>
           <a:p>
-            <a:fld id="{6D2D470A-CC0F-47D2-92C2-9A53BE3FE502}" type="slidenum">
+            <a:fld id="{D760BBD7-A5CA-4261-B408-0C158449086A}" type="slidenum">
               <a:rPr lang="ru-RU" smtClean="0"/>
               <a:t>‹#›</a:t>
             </a:fld>
@@ -2022,7 +2022,7 @@
     </p:spTree>
     <p:extLst>
       <p:ext uri="{BB962C8B-B14F-4D97-AF65-F5344CB8AC3E}">
-        <p14:creationId xmlns:p14="http://schemas.microsoft.com/office/powerpoint/2010/main" val="3818705534"/>
+        <p14:creationId xmlns:p14="http://schemas.microsoft.com/office/powerpoint/2010/main" val="1756036105"/>
       </p:ext>
     </p:extLst>
   </p:cSld>
@@ -2054,7 +2054,7 @@
           <p:cNvPr id="2" name="Дата 1">
             <a:extLst>
               <a:ext uri="{FF2B5EF4-FFF2-40B4-BE49-F238E27FC236}">
-                <a16:creationId xmlns:a16="http://schemas.microsoft.com/office/drawing/2014/main" id="{B40C98D4-788E-D177-ECC8-036F75A52431}"/>
+                <a16:creationId xmlns:a16="http://schemas.microsoft.com/office/drawing/2014/main" id="{1BDEC992-0A3F-981D-3DD1-27A4002F46EA}"/>
               </a:ext>
             </a:extLst>
           </p:cNvPr>
@@ -2070,7 +2070,7 @@
           <a:bodyPr/>
           <a:lstStyle/>
           <a:p>
-            <a:fld id="{01FE08CB-9F15-41C7-84BD-B8E4C3B377BE}" type="datetimeFigureOut">
+            <a:fld id="{85E09BD1-38AB-49EB-9460-C39B2CCD3658}" type="datetimeFigureOut">
               <a:rPr lang="ru-RU" smtClean="0"/>
               <a:t>27.10.2026</a:t>
             </a:fld>
@@ -2083,7 +2083,7 @@
           <p:cNvPr id="3" name="Нижний колонтитул 2">
             <a:extLst>
               <a:ext uri="{FF2B5EF4-FFF2-40B4-BE49-F238E27FC236}">
-                <a16:creationId xmlns:a16="http://schemas.microsoft.com/office/drawing/2014/main" id="{877508CB-F06F-92EC-DE74-6CC4C3A5DB01}"/>
+                <a16:creationId xmlns:a16="http://schemas.microsoft.com/office/drawing/2014/main" id="{BC74D571-8C78-A6F5-60E8-415689AF70CF}"/>
               </a:ext>
             </a:extLst>
           </p:cNvPr>
@@ -2108,7 +2108,7 @@
           <p:cNvPr id="4" name="Номер слайда 3">
             <a:extLst>
               <a:ext uri="{FF2B5EF4-FFF2-40B4-BE49-F238E27FC236}">
-                <a16:creationId xmlns:a16="http://schemas.microsoft.com/office/drawing/2014/main" id="{03026DCF-E3C2-D36D-9939-9736137FC4EA}"/>
+                <a16:creationId xmlns:a16="http://schemas.microsoft.com/office/drawing/2014/main" id="{13E9695E-993D-A675-C2A9-78D1C5645C9B}"/>
               </a:ext>
             </a:extLst>
           </p:cNvPr>
@@ -2124,7 +2124,7 @@
           <a:bodyPr/>
           <a:lstStyle/>
           <a:p>
-            <a:fld id="{6D2D470A-CC0F-47D2-92C2-9A53BE3FE502}" type="slidenum">
+            <a:fld id="{D760BBD7-A5CA-4261-B408-0C158449086A}" type="slidenum">
               <a:rPr lang="ru-RU" smtClean="0"/>
               <a:t>‹#›</a:t>
             </a:fld>
@@ -2135,7 +2135,7 @@
     </p:spTree>
     <p:extLst>
       <p:ext uri="{BB962C8B-B14F-4D97-AF65-F5344CB8AC3E}">
-        <p14:creationId xmlns:p14="http://schemas.microsoft.com/office/powerpoint/2010/main" val="390021405"/>
+        <p14:creationId xmlns:p14="http://schemas.microsoft.com/office/powerpoint/2010/main" val="400994494"/>
       </p:ext>
     </p:extLst>
   </p:cSld>
@@ -2167,7 +2167,7 @@
           <p:cNvPr id="2" name="Заголовок 1">
             <a:extLst>
               <a:ext uri="{FF2B5EF4-FFF2-40B4-BE49-F238E27FC236}">
-                <a16:creationId xmlns:a16="http://schemas.microsoft.com/office/drawing/2014/main" id="{20DEDBB0-926C-5F09-3F0C-6EBE567B7B8D}"/>
+                <a16:creationId xmlns:a16="http://schemas.microsoft.com/office/drawing/2014/main" id="{830B1528-B194-35FF-E853-4AFC9C60636A}"/>
               </a:ext>
             </a:extLst>
           </p:cNvPr>
@@ -2204,7 +2204,7 @@
           <p:cNvPr id="3" name="Объект 2">
             <a:extLst>
               <a:ext uri="{FF2B5EF4-FFF2-40B4-BE49-F238E27FC236}">
-                <a16:creationId xmlns:a16="http://schemas.microsoft.com/office/drawing/2014/main" id="{CBD2CA93-F365-A0D9-4634-B086169F0127}"/>
+                <a16:creationId xmlns:a16="http://schemas.microsoft.com/office/drawing/2014/main" id="{4BDE7BDA-14EB-2869-2ADC-968E8F54D338}"/>
               </a:ext>
             </a:extLst>
           </p:cNvPr>
@@ -2294,7 +2294,7 @@
           <p:cNvPr id="4" name="Текст 3">
             <a:extLst>
               <a:ext uri="{FF2B5EF4-FFF2-40B4-BE49-F238E27FC236}">
-                <a16:creationId xmlns:a16="http://schemas.microsoft.com/office/drawing/2014/main" id="{1BF7119B-2EFE-7F2E-0E3C-E277EC66461F}"/>
+                <a16:creationId xmlns:a16="http://schemas.microsoft.com/office/drawing/2014/main" id="{6F608B63-658F-42C8-4C05-1B90B62EFA74}"/>
               </a:ext>
             </a:extLst>
           </p:cNvPr>
@@ -2365,7 +2365,7 @@
           <p:cNvPr id="5" name="Дата 4">
             <a:extLst>
               <a:ext uri="{FF2B5EF4-FFF2-40B4-BE49-F238E27FC236}">
-                <a16:creationId xmlns:a16="http://schemas.microsoft.com/office/drawing/2014/main" id="{6741066C-FB35-74B0-F8E1-CAB9FF603467}"/>
+                <a16:creationId xmlns:a16="http://schemas.microsoft.com/office/drawing/2014/main" id="{03574E78-89B4-075E-9F27-66C8737FA388}"/>
               </a:ext>
             </a:extLst>
           </p:cNvPr>
@@ -2381,7 +2381,7 @@
           <a:bodyPr/>
           <a:lstStyle/>
           <a:p>
-            <a:fld id="{01FE08CB-9F15-41C7-84BD-B8E4C3B377BE}" type="datetimeFigureOut">
+            <a:fld id="{85E09BD1-38AB-49EB-9460-C39B2CCD3658}" type="datetimeFigureOut">
               <a:rPr lang="ru-RU" smtClean="0"/>
               <a:t>27.10.2026</a:t>
             </a:fld>
@@ -2394,7 +2394,7 @@
           <p:cNvPr id="6" name="Нижний колонтитул 5">
             <a:extLst>
               <a:ext uri="{FF2B5EF4-FFF2-40B4-BE49-F238E27FC236}">
-                <a16:creationId xmlns:a16="http://schemas.microsoft.com/office/drawing/2014/main" id="{CA660138-5CD4-4415-5550-8586C4B9C3CF}"/>
+                <a16:creationId xmlns:a16="http://schemas.microsoft.com/office/drawing/2014/main" id="{B994BCE6-DAA7-127C-BEE4-0B4A22A08D84}"/>
               </a:ext>
             </a:extLst>
           </p:cNvPr>
@@ -2419,7 +2419,7 @@
           <p:cNvPr id="7" name="Номер слайда 6">
             <a:extLst>
               <a:ext uri="{FF2B5EF4-FFF2-40B4-BE49-F238E27FC236}">
-                <a16:creationId xmlns:a16="http://schemas.microsoft.com/office/drawing/2014/main" id="{F5BF9895-4457-2936-A66A-D05879647297}"/>
+                <a16:creationId xmlns:a16="http://schemas.microsoft.com/office/drawing/2014/main" id="{B45034E9-A8B4-F4E5-2E23-C5B72C24E322}"/>
               </a:ext>
             </a:extLst>
           </p:cNvPr>
@@ -2435,7 +2435,7 @@
           <a:bodyPr/>
           <a:lstStyle/>
           <a:p>
-            <a:fld id="{6D2D470A-CC0F-47D2-92C2-9A53BE3FE502}" type="slidenum">
+            <a:fld id="{D760BBD7-A5CA-4261-B408-0C158449086A}" type="slidenum">
               <a:rPr lang="ru-RU" smtClean="0"/>
               <a:t>‹#›</a:t>
             </a:fld>
@@ -2446,7 +2446,7 @@
     </p:spTree>
     <p:extLst>
       <p:ext uri="{BB962C8B-B14F-4D97-AF65-F5344CB8AC3E}">
-        <p14:creationId xmlns:p14="http://schemas.microsoft.com/office/powerpoint/2010/main" val="3839063867"/>
+        <p14:creationId xmlns:p14="http://schemas.microsoft.com/office/powerpoint/2010/main" val="751872335"/>
       </p:ext>
     </p:extLst>
   </p:cSld>
@@ -2478,7 +2478,7 @@
           <p:cNvPr id="2" name="Заголовок 1">
             <a:extLst>
               <a:ext uri="{FF2B5EF4-FFF2-40B4-BE49-F238E27FC236}">
-                <a16:creationId xmlns:a16="http://schemas.microsoft.com/office/drawing/2014/main" id="{F53BB6BB-3577-04A6-2460-B443359F388E}"/>
+                <a16:creationId xmlns:a16="http://schemas.microsoft.com/office/drawing/2014/main" id="{31701CB7-A4E9-9973-46BF-A9F7FA7B6DC4}"/>
               </a:ext>
             </a:extLst>
           </p:cNvPr>
@@ -2515,7 +2515,7 @@
           <p:cNvPr id="3" name="Рисунок 2">
             <a:extLst>
               <a:ext uri="{FF2B5EF4-FFF2-40B4-BE49-F238E27FC236}">
-                <a16:creationId xmlns:a16="http://schemas.microsoft.com/office/drawing/2014/main" id="{4625B818-06EA-0B78-ABDD-B707255D66E2}"/>
+                <a16:creationId xmlns:a16="http://schemas.microsoft.com/office/drawing/2014/main" id="{90453AE1-ED8B-4A31-8E14-ABCAE7AD9E26}"/>
               </a:ext>
             </a:extLst>
           </p:cNvPr>
@@ -2582,7 +2582,7 @@
           <p:cNvPr id="4" name="Текст 3">
             <a:extLst>
               <a:ext uri="{FF2B5EF4-FFF2-40B4-BE49-F238E27FC236}">
-                <a16:creationId xmlns:a16="http://schemas.microsoft.com/office/drawing/2014/main" id="{4DC245A2-3457-8A80-D624-5C8A1286DF60}"/>
+                <a16:creationId xmlns:a16="http://schemas.microsoft.com/office/drawing/2014/main" id="{CFD97DA9-0327-AD80-B8AF-F7BFEAA127EA}"/>
               </a:ext>
             </a:extLst>
           </p:cNvPr>
@@ -2653,7 +2653,7 @@
           <p:cNvPr id="5" name="Дата 4">
             <a:extLst>
               <a:ext uri="{FF2B5EF4-FFF2-40B4-BE49-F238E27FC236}">
-                <a16:creationId xmlns:a16="http://schemas.microsoft.com/office/drawing/2014/main" id="{6B6AD96D-7B7F-81E4-C642-004DF900B4D5}"/>
+                <a16:creationId xmlns:a16="http://schemas.microsoft.com/office/drawing/2014/main" id="{2D83B6E7-D35A-F538-FB86-5FB96EC5B9AC}"/>
               </a:ext>
             </a:extLst>
           </p:cNvPr>
@@ -2669,7 +2669,7 @@
           <a:bodyPr/>
           <a:lstStyle/>
           <a:p>
-            <a:fld id="{01FE08CB-9F15-41C7-84BD-B8E4C3B377BE}" type="datetimeFigureOut">
+            <a:fld id="{85E09BD1-38AB-49EB-9460-C39B2CCD3658}" type="datetimeFigureOut">
               <a:rPr lang="ru-RU" smtClean="0"/>
               <a:t>27.10.2026</a:t>
             </a:fld>
@@ -2682,7 +2682,7 @@
           <p:cNvPr id="6" name="Нижний колонтитул 5">
             <a:extLst>
               <a:ext uri="{FF2B5EF4-FFF2-40B4-BE49-F238E27FC236}">
-                <a16:creationId xmlns:a16="http://schemas.microsoft.com/office/drawing/2014/main" id="{95F0FDF2-287D-EEAC-C983-73009AF13363}"/>
+                <a16:creationId xmlns:a16="http://schemas.microsoft.com/office/drawing/2014/main" id="{FCCEC5FD-26C8-5049-9DE3-1EB360F1681B}"/>
               </a:ext>
             </a:extLst>
           </p:cNvPr>
@@ -2707,7 +2707,7 @@
           <p:cNvPr id="7" name="Номер слайда 6">
             <a:extLst>
               <a:ext uri="{FF2B5EF4-FFF2-40B4-BE49-F238E27FC236}">
-                <a16:creationId xmlns:a16="http://schemas.microsoft.com/office/drawing/2014/main" id="{DA270CD3-9E26-3229-CB47-9C21816DAA88}"/>
+                <a16:creationId xmlns:a16="http://schemas.microsoft.com/office/drawing/2014/main" id="{62F24D7C-DC55-E9CB-4223-DCA042AA64DD}"/>
               </a:ext>
             </a:extLst>
           </p:cNvPr>
@@ -2723,7 +2723,7 @@
           <a:bodyPr/>
           <a:lstStyle/>
           <a:p>
-            <a:fld id="{6D2D470A-CC0F-47D2-92C2-9A53BE3FE502}" type="slidenum">
+            <a:fld id="{D760BBD7-A5CA-4261-B408-0C158449086A}" type="slidenum">
               <a:rPr lang="ru-RU" smtClean="0"/>
               <a:t>‹#›</a:t>
             </a:fld>
@@ -2734,7 +2734,7 @@
     </p:spTree>
     <p:extLst>
       <p:ext uri="{BB962C8B-B14F-4D97-AF65-F5344CB8AC3E}">
-        <p14:creationId xmlns:p14="http://schemas.microsoft.com/office/powerpoint/2010/main" val="1210457191"/>
+        <p14:creationId xmlns:p14="http://schemas.microsoft.com/office/powerpoint/2010/main" val="4169279467"/>
       </p:ext>
     </p:extLst>
   </p:cSld>
@@ -2771,7 +2771,7 @@
           <p:cNvPr id="2" name="Заголовок 1">
             <a:extLst>
               <a:ext uri="{FF2B5EF4-FFF2-40B4-BE49-F238E27FC236}">
-                <a16:creationId xmlns:a16="http://schemas.microsoft.com/office/drawing/2014/main" id="{DCEC6701-192D-27F9-AA38-F892031245D3}"/>
+                <a16:creationId xmlns:a16="http://schemas.microsoft.com/office/drawing/2014/main" id="{814037A0-EB78-F4DB-75E7-E3D18FE70DA7}"/>
               </a:ext>
             </a:extLst>
           </p:cNvPr>
@@ -2809,7 +2809,7 @@
           <p:cNvPr id="3" name="Текст 2">
             <a:extLst>
               <a:ext uri="{FF2B5EF4-FFF2-40B4-BE49-F238E27FC236}">
-                <a16:creationId xmlns:a16="http://schemas.microsoft.com/office/drawing/2014/main" id="{138541CC-C5A0-3E98-4643-88F15D0C2B44}"/>
+                <a16:creationId xmlns:a16="http://schemas.microsoft.com/office/drawing/2014/main" id="{3445D859-F825-60E8-0348-E8CA3582CBD0}"/>
               </a:ext>
             </a:extLst>
           </p:cNvPr>
@@ -2876,7 +2876,7 @@
           <p:cNvPr id="4" name="Дата 3">
             <a:extLst>
               <a:ext uri="{FF2B5EF4-FFF2-40B4-BE49-F238E27FC236}">
-                <a16:creationId xmlns:a16="http://schemas.microsoft.com/office/drawing/2014/main" id="{12E44DF3-3729-3162-6991-A8F77A14F6B3}"/>
+                <a16:creationId xmlns:a16="http://schemas.microsoft.com/office/drawing/2014/main" id="{6C2C41AB-CD4E-C374-5EF0-19BDBCD93E2C}"/>
               </a:ext>
             </a:extLst>
           </p:cNvPr>
@@ -2910,7 +2910,7 @@
             </a:lvl1pPr>
           </a:lstStyle>
           <a:p>
-            <a:fld id="{01FE08CB-9F15-41C7-84BD-B8E4C3B377BE}" type="datetimeFigureOut">
+            <a:fld id="{85E09BD1-38AB-49EB-9460-C39B2CCD3658}" type="datetimeFigureOut">
               <a:rPr lang="ru-RU" smtClean="0"/>
               <a:t>27.10.2026</a:t>
             </a:fld>
@@ -2923,7 +2923,7 @@
           <p:cNvPr id="5" name="Нижний колонтитул 4">
             <a:extLst>
               <a:ext uri="{FF2B5EF4-FFF2-40B4-BE49-F238E27FC236}">
-                <a16:creationId xmlns:a16="http://schemas.microsoft.com/office/drawing/2014/main" id="{B2E852AC-B0F0-D375-419E-DB4182333AE0}"/>
+                <a16:creationId xmlns:a16="http://schemas.microsoft.com/office/drawing/2014/main" id="{F3A3FE2C-210E-6C13-8508-F3BF0170AE67}"/>
               </a:ext>
             </a:extLst>
           </p:cNvPr>
@@ -2966,7 +2966,7 @@
           <p:cNvPr id="6" name="Номер слайда 5">
             <a:extLst>
               <a:ext uri="{FF2B5EF4-FFF2-40B4-BE49-F238E27FC236}">
-                <a16:creationId xmlns:a16="http://schemas.microsoft.com/office/drawing/2014/main" id="{AE2B258F-6C10-E6EC-113F-A8E0DF59508F}"/>
+                <a16:creationId xmlns:a16="http://schemas.microsoft.com/office/drawing/2014/main" id="{5CD89E13-C75E-A3E1-9216-D8E845EF8D45}"/>
               </a:ext>
             </a:extLst>
           </p:cNvPr>
@@ -3000,7 +3000,7 @@
             </a:lvl1pPr>
           </a:lstStyle>
           <a:p>
-            <a:fld id="{6D2D470A-CC0F-47D2-92C2-9A53BE3FE502}" type="slidenum">
+            <a:fld id="{D760BBD7-A5CA-4261-B408-0C158449086A}" type="slidenum">
               <a:rPr lang="ru-RU" smtClean="0"/>
               <a:t>‹#›</a:t>
             </a:fld>
@@ -3011,7 +3011,7 @@
     </p:spTree>
     <p:extLst>
       <p:ext uri="{BB962C8B-B14F-4D97-AF65-F5344CB8AC3E}">
-        <p14:creationId xmlns:p14="http://schemas.microsoft.com/office/powerpoint/2010/main" val="3135165342"/>
+        <p14:creationId xmlns:p14="http://schemas.microsoft.com/office/powerpoint/2010/main" val="1280927398"/>
       </p:ext>
     </p:extLst>
   </p:cSld>
@@ -3334,7 +3334,7 @@
           <p:cNvPr id="2" name="Прямоугольник 1">
             <a:extLst>
               <a:ext uri="{FF2B5EF4-FFF2-40B4-BE49-F238E27FC236}">
-                <a16:creationId xmlns:a16="http://schemas.microsoft.com/office/drawing/2014/main" id="{9192A5E4-3D31-7D82-C6F4-AE88B72F58CA}"/>
+                <a16:creationId xmlns:a16="http://schemas.microsoft.com/office/drawing/2014/main" id="{6465C1F0-5D03-AB64-4577-1AF0C910FF36}"/>
               </a:ext>
             </a:extLst>
           </p:cNvPr>
@@ -3402,7 +3402,7 @@
           <p:cNvPr id="3" name="Прямоугольник 2">
             <a:extLst>
               <a:ext uri="{FF2B5EF4-FFF2-40B4-BE49-F238E27FC236}">
-                <a16:creationId xmlns:a16="http://schemas.microsoft.com/office/drawing/2014/main" id="{A586D8A5-3A94-61F7-8538-2343A8832BB0}"/>
+                <a16:creationId xmlns:a16="http://schemas.microsoft.com/office/drawing/2014/main" id="{F174E3E1-6829-7B6B-A48F-D33E018FF44B}"/>
               </a:ext>
             </a:extLst>
           </p:cNvPr>
@@ -3470,7 +3470,7 @@
           <p:cNvPr id="4" name="Прямоугольник 3">
             <a:extLst>
               <a:ext uri="{FF2B5EF4-FFF2-40B4-BE49-F238E27FC236}">
-                <a16:creationId xmlns:a16="http://schemas.microsoft.com/office/drawing/2014/main" id="{37D495DE-979E-DCFF-9D63-D6DB55683CD2}"/>
+                <a16:creationId xmlns:a16="http://schemas.microsoft.com/office/drawing/2014/main" id="{39B3223F-30E4-FEB6-089E-978AC6227CC1}"/>
               </a:ext>
             </a:extLst>
           </p:cNvPr>
@@ -3538,7 +3538,7 @@
           <p:cNvPr id="5" name="TextBox 4">
             <a:extLst>
               <a:ext uri="{FF2B5EF4-FFF2-40B4-BE49-F238E27FC236}">
-                <a16:creationId xmlns:a16="http://schemas.microsoft.com/office/drawing/2014/main" id="{25BF21D6-6B0B-515B-2482-D31EC245BA5D}"/>
+                <a16:creationId xmlns:a16="http://schemas.microsoft.com/office/drawing/2014/main" id="{9FFD2CAE-435B-822E-75A8-72FAB6CE06E3}"/>
               </a:ext>
             </a:extLst>
           </p:cNvPr>
@@ -3583,7 +3583,7 @@
           <p:cNvPr id="6" name="TextBox 5">
             <a:extLst>
               <a:ext uri="{FF2B5EF4-FFF2-40B4-BE49-F238E27FC236}">
-                <a16:creationId xmlns:a16="http://schemas.microsoft.com/office/drawing/2014/main" id="{D6A672B8-72DC-05A3-8F40-0BBB50B41134}"/>
+                <a16:creationId xmlns:a16="http://schemas.microsoft.com/office/drawing/2014/main" id="{A3100D90-1436-47AF-AAF3-5B06EA908F57}"/>
               </a:ext>
             </a:extLst>
           </p:cNvPr>
@@ -3628,7 +3628,7 @@
           <p:cNvPr id="7" name="TextBox 6">
             <a:extLst>
               <a:ext uri="{FF2B5EF4-FFF2-40B4-BE49-F238E27FC236}">
-                <a16:creationId xmlns:a16="http://schemas.microsoft.com/office/drawing/2014/main" id="{01EF6AD8-3C36-B9E2-95F1-C9C206605C65}"/>
+                <a16:creationId xmlns:a16="http://schemas.microsoft.com/office/drawing/2014/main" id="{35ABD99E-ECC8-1CC8-9FED-0E7B1D6ECFE9}"/>
               </a:ext>
             </a:extLst>
           </p:cNvPr>
@@ -3673,7 +3673,7 @@
           <p:cNvPr id="8" name="Прямоугольник 7">
             <a:extLst>
               <a:ext uri="{FF2B5EF4-FFF2-40B4-BE49-F238E27FC236}">
-                <a16:creationId xmlns:a16="http://schemas.microsoft.com/office/drawing/2014/main" id="{4258C1B9-033F-6B0E-BCF3-E29522D198EA}"/>
+                <a16:creationId xmlns:a16="http://schemas.microsoft.com/office/drawing/2014/main" id="{8F5EE3DA-D9F8-F325-14D7-AC32EB259078}"/>
               </a:ext>
             </a:extLst>
           </p:cNvPr>
@@ -3741,7 +3741,7 @@
           <p:cNvPr id="9" name="TextBox 8">
             <a:extLst>
               <a:ext uri="{FF2B5EF4-FFF2-40B4-BE49-F238E27FC236}">
-                <a16:creationId xmlns:a16="http://schemas.microsoft.com/office/drawing/2014/main" id="{8FD9ED4E-E668-C086-6154-8CFBA0F1CCCC}"/>
+                <a16:creationId xmlns:a16="http://schemas.microsoft.com/office/drawing/2014/main" id="{205E8653-2401-461D-694D-B3F86DB7D8A9}"/>
               </a:ext>
             </a:extLst>
           </p:cNvPr>
@@ -3786,7 +3786,7 @@
           <p:cNvPr id="10" name="TextBox 9">
             <a:extLst>
               <a:ext uri="{FF2B5EF4-FFF2-40B4-BE49-F238E27FC236}">
-                <a16:creationId xmlns:a16="http://schemas.microsoft.com/office/drawing/2014/main" id="{5B0301E6-C36B-1BE2-18DD-817BEE56EEEA}"/>
+                <a16:creationId xmlns:a16="http://schemas.microsoft.com/office/drawing/2014/main" id="{44091029-18CF-B061-C87F-1441484848E4}"/>
               </a:ext>
             </a:extLst>
           </p:cNvPr>
@@ -3831,7 +3831,7 @@
           <p:cNvPr id="11" name="TextBox 10">
             <a:extLst>
               <a:ext uri="{FF2B5EF4-FFF2-40B4-BE49-F238E27FC236}">
-                <a16:creationId xmlns:a16="http://schemas.microsoft.com/office/drawing/2014/main" id="{19F45602-1F10-2A10-08FC-7512E91CDB1A}"/>
+                <a16:creationId xmlns:a16="http://schemas.microsoft.com/office/drawing/2014/main" id="{FBC213F5-B3FE-0B7B-B5BC-20D7F349DDC0}"/>
               </a:ext>
             </a:extLst>
           </p:cNvPr>
@@ -3876,7 +3876,7 @@
           <p:cNvPr id="12" name="Прямоугольник 11">
             <a:extLst>
               <a:ext uri="{FF2B5EF4-FFF2-40B4-BE49-F238E27FC236}">
-                <a16:creationId xmlns:a16="http://schemas.microsoft.com/office/drawing/2014/main" id="{52013411-A52A-A902-071D-94C657367D7D}"/>
+                <a16:creationId xmlns:a16="http://schemas.microsoft.com/office/drawing/2014/main" id="{837BB5D4-A8D5-03B3-9E9D-DF4416B22DC4}"/>
               </a:ext>
             </a:extLst>
           </p:cNvPr>
@@ -3944,7 +3944,7 @@
           <p:cNvPr id="13" name="TextBox 12">
             <a:extLst>
               <a:ext uri="{FF2B5EF4-FFF2-40B4-BE49-F238E27FC236}">
-                <a16:creationId xmlns:a16="http://schemas.microsoft.com/office/drawing/2014/main" id="{432776AE-BA9D-B97F-2946-B55C38CC303C}"/>
+                <a16:creationId xmlns:a16="http://schemas.microsoft.com/office/drawing/2014/main" id="{9821B712-6F99-90DA-115B-D4F90E7C334E}"/>
               </a:ext>
             </a:extLst>
           </p:cNvPr>
@@ -3989,7 +3989,7 @@
           <p:cNvPr id="14" name="TextBox 13">
             <a:extLst>
               <a:ext uri="{FF2B5EF4-FFF2-40B4-BE49-F238E27FC236}">
-                <a16:creationId xmlns:a16="http://schemas.microsoft.com/office/drawing/2014/main" id="{0920EFCC-12A1-5F4D-0592-A471B4ABAE0D}"/>
+                <a16:creationId xmlns:a16="http://schemas.microsoft.com/office/drawing/2014/main" id="{51F2D691-CAD9-2E20-C889-874EF251A235}"/>
               </a:ext>
             </a:extLst>
           </p:cNvPr>
@@ -4034,7 +4034,7 @@
           <p:cNvPr id="15" name="TextBox 14">
             <a:extLst>
               <a:ext uri="{FF2B5EF4-FFF2-40B4-BE49-F238E27FC236}">
-                <a16:creationId xmlns:a16="http://schemas.microsoft.com/office/drawing/2014/main" id="{DFEC80C5-925D-F89C-A6E1-765E90501241}"/>
+                <a16:creationId xmlns:a16="http://schemas.microsoft.com/office/drawing/2014/main" id="{9527EED5-4EF6-9697-B684-48ACD4E84C3B}"/>
               </a:ext>
             </a:extLst>
           </p:cNvPr>
@@ -4079,7 +4079,7 @@
           <p:cNvPr id="16" name="TextBox 15">
             <a:extLst>
               <a:ext uri="{FF2B5EF4-FFF2-40B4-BE49-F238E27FC236}">
-                <a16:creationId xmlns:a16="http://schemas.microsoft.com/office/drawing/2014/main" id="{7815EAFB-EE3A-8044-36DB-8844415964DF}"/>
+                <a16:creationId xmlns:a16="http://schemas.microsoft.com/office/drawing/2014/main" id="{B4F7D449-8601-90B5-A531-9033D3A5E1B0}"/>
               </a:ext>
             </a:extLst>
           </p:cNvPr>
@@ -4124,7 +4124,7 @@
           <p:cNvPr id="17" name="TextBox 16">
             <a:extLst>
               <a:ext uri="{FF2B5EF4-FFF2-40B4-BE49-F238E27FC236}">
-                <a16:creationId xmlns:a16="http://schemas.microsoft.com/office/drawing/2014/main" id="{4A7D1148-2FDC-70CF-5BCA-A1071CA42644}"/>
+                <a16:creationId xmlns:a16="http://schemas.microsoft.com/office/drawing/2014/main" id="{37199964-8819-8AAD-8CC7-B793A4603A77}"/>
               </a:ext>
             </a:extLst>
           </p:cNvPr>
@@ -4169,7 +4169,7 @@
           <p:cNvPr id="18" name="TextBox 17">
             <a:extLst>
               <a:ext uri="{FF2B5EF4-FFF2-40B4-BE49-F238E27FC236}">
-                <a16:creationId xmlns:a16="http://schemas.microsoft.com/office/drawing/2014/main" id="{83252167-D58B-1E34-36D1-E6E04C0056EF}"/>
+                <a16:creationId xmlns:a16="http://schemas.microsoft.com/office/drawing/2014/main" id="{20CF67FD-95EB-2802-4948-061F95E98E5A}"/>
               </a:ext>
             </a:extLst>
           </p:cNvPr>
@@ -4212,7 +4212,7 @@
     </p:spTree>
     <p:extLst>
       <p:ext uri="{BB962C8B-B14F-4D97-AF65-F5344CB8AC3E}">
-        <p14:creationId xmlns:p14="http://schemas.microsoft.com/office/powerpoint/2010/main" val="10148741"/>
+        <p14:creationId xmlns:p14="http://schemas.microsoft.com/office/powerpoint/2010/main" val="181203352"/>
       </p:ext>
     </p:extLst>
   </p:cSld>
@@ -4244,7 +4244,7 @@
           <p:cNvPr id="2" name="Прямоугольник 1">
             <a:extLst>
               <a:ext uri="{FF2B5EF4-FFF2-40B4-BE49-F238E27FC236}">
-                <a16:creationId xmlns:a16="http://schemas.microsoft.com/office/drawing/2014/main" id="{817AF25E-3A07-B060-57DC-D2775EDF2C9B}"/>
+                <a16:creationId xmlns:a16="http://schemas.microsoft.com/office/drawing/2014/main" id="{00814C62-3A6D-BF9C-C585-381A421A1D62}"/>
               </a:ext>
             </a:extLst>
           </p:cNvPr>
@@ -4312,7 +4312,7 @@
           <p:cNvPr id="3" name="Прямоугольник 2">
             <a:extLst>
               <a:ext uri="{FF2B5EF4-FFF2-40B4-BE49-F238E27FC236}">
-                <a16:creationId xmlns:a16="http://schemas.microsoft.com/office/drawing/2014/main" id="{88C4C895-8FCC-377E-F7DD-C61A29EA335D}"/>
+                <a16:creationId xmlns:a16="http://schemas.microsoft.com/office/drawing/2014/main" id="{FFBD4EDC-1A31-207B-84C0-18BCC2B8E2A3}"/>
               </a:ext>
             </a:extLst>
           </p:cNvPr>
@@ -4380,7 +4380,7 @@
           <p:cNvPr id="4" name="TextBox 3">
             <a:extLst>
               <a:ext uri="{FF2B5EF4-FFF2-40B4-BE49-F238E27FC236}">
-                <a16:creationId xmlns:a16="http://schemas.microsoft.com/office/drawing/2014/main" id="{00927DB4-7054-23A3-CCED-4BF41D037622}"/>
+                <a16:creationId xmlns:a16="http://schemas.microsoft.com/office/drawing/2014/main" id="{34C55E72-5A2F-BF6B-56DD-AD1F06B355D0}"/>
               </a:ext>
             </a:extLst>
           </p:cNvPr>
@@ -4425,7 +4425,7 @@
           <p:cNvPr id="5" name="TextBox 4">
             <a:extLst>
               <a:ext uri="{FF2B5EF4-FFF2-40B4-BE49-F238E27FC236}">
-                <a16:creationId xmlns:a16="http://schemas.microsoft.com/office/drawing/2014/main" id="{3FD5139F-08C5-92BE-34E7-CF61BCA9445E}"/>
+                <a16:creationId xmlns:a16="http://schemas.microsoft.com/office/drawing/2014/main" id="{93DB77BD-3F82-5F7B-BBBA-46981CBDC4F0}"/>
               </a:ext>
             </a:extLst>
           </p:cNvPr>
@@ -4470,7 +4470,7 @@
           <p:cNvPr id="6" name="Прямоугольник 5">
             <a:extLst>
               <a:ext uri="{FF2B5EF4-FFF2-40B4-BE49-F238E27FC236}">
-                <a16:creationId xmlns:a16="http://schemas.microsoft.com/office/drawing/2014/main" id="{DB997850-8580-38FF-9951-BB7FC5169CEC}"/>
+                <a16:creationId xmlns:a16="http://schemas.microsoft.com/office/drawing/2014/main" id="{CE446D01-F1C4-1E93-9EB2-BE66CFDCB4C6}"/>
               </a:ext>
             </a:extLst>
           </p:cNvPr>
@@ -4538,7 +4538,7 @@
           <p:cNvPr id="7" name="Прямоугольник 6">
             <a:extLst>
               <a:ext uri="{FF2B5EF4-FFF2-40B4-BE49-F238E27FC236}">
-                <a16:creationId xmlns:a16="http://schemas.microsoft.com/office/drawing/2014/main" id="{4EF3BBA4-5E3A-190B-555A-3EE5F59BC707}"/>
+                <a16:creationId xmlns:a16="http://schemas.microsoft.com/office/drawing/2014/main" id="{E3FC5765-FA65-021F-B0E7-A582760561C5}"/>
               </a:ext>
             </a:extLst>
           </p:cNvPr>
@@ -4606,7 +4606,7 @@
           <p:cNvPr id="8" name="TextBox 7">
             <a:extLst>
               <a:ext uri="{FF2B5EF4-FFF2-40B4-BE49-F238E27FC236}">
-                <a16:creationId xmlns:a16="http://schemas.microsoft.com/office/drawing/2014/main" id="{FB45AF44-6149-B63B-C3D4-4F3A08C6D8BA}"/>
+                <a16:creationId xmlns:a16="http://schemas.microsoft.com/office/drawing/2014/main" id="{140A40F9-EE83-CB72-22E7-4B63209B8C69}"/>
               </a:ext>
             </a:extLst>
           </p:cNvPr>
@@ -4651,7 +4651,7 @@
           <p:cNvPr id="9" name="TextBox 8">
             <a:extLst>
               <a:ext uri="{FF2B5EF4-FFF2-40B4-BE49-F238E27FC236}">
-                <a16:creationId xmlns:a16="http://schemas.microsoft.com/office/drawing/2014/main" id="{274F100C-D72F-D50B-E832-353E970AFE18}"/>
+                <a16:creationId xmlns:a16="http://schemas.microsoft.com/office/drawing/2014/main" id="{ED6915DE-68CC-2C10-01ED-0BDF4B5C82DE}"/>
               </a:ext>
             </a:extLst>
           </p:cNvPr>
@@ -4696,7 +4696,7 @@
           <p:cNvPr id="10" name="TextBox 9">
             <a:extLst>
               <a:ext uri="{FF2B5EF4-FFF2-40B4-BE49-F238E27FC236}">
-                <a16:creationId xmlns:a16="http://schemas.microsoft.com/office/drawing/2014/main" id="{D1B4B84B-6B21-EBA5-1C60-3C9F7816F9A2}"/>
+                <a16:creationId xmlns:a16="http://schemas.microsoft.com/office/drawing/2014/main" id="{0D7F6A4E-D3E0-B746-0E8F-A7C33B0C1FD0}"/>
               </a:ext>
             </a:extLst>
           </p:cNvPr>
@@ -4741,7 +4741,7 @@
           <p:cNvPr id="11" name="Прямоугольник 10">
             <a:extLst>
               <a:ext uri="{FF2B5EF4-FFF2-40B4-BE49-F238E27FC236}">
-                <a16:creationId xmlns:a16="http://schemas.microsoft.com/office/drawing/2014/main" id="{B3BC0A39-AA4B-B16F-9151-376E95137A35}"/>
+                <a16:creationId xmlns:a16="http://schemas.microsoft.com/office/drawing/2014/main" id="{03C6E251-997E-E4BB-8746-D3B31849D87B}"/>
               </a:ext>
             </a:extLst>
           </p:cNvPr>
@@ -4809,7 +4809,7 @@
           <p:cNvPr id="12" name="TextBox 11">
             <a:extLst>
               <a:ext uri="{FF2B5EF4-FFF2-40B4-BE49-F238E27FC236}">
-                <a16:creationId xmlns:a16="http://schemas.microsoft.com/office/drawing/2014/main" id="{7C61220E-753F-E7AD-4ACA-651E930FCB59}"/>
+                <a16:creationId xmlns:a16="http://schemas.microsoft.com/office/drawing/2014/main" id="{5B751C21-D0DA-C5C3-8AF4-2540C1EADE71}"/>
               </a:ext>
             </a:extLst>
           </p:cNvPr>
@@ -4854,7 +4854,7 @@
           <p:cNvPr id="13" name="TextBox 12">
             <a:extLst>
               <a:ext uri="{FF2B5EF4-FFF2-40B4-BE49-F238E27FC236}">
-                <a16:creationId xmlns:a16="http://schemas.microsoft.com/office/drawing/2014/main" id="{BBB15654-AB93-BC37-015A-08DC4C0B6BB8}"/>
+                <a16:creationId xmlns:a16="http://schemas.microsoft.com/office/drawing/2014/main" id="{CC6527EA-EBF3-AE8E-7042-60C81F64FD66}"/>
               </a:ext>
             </a:extLst>
           </p:cNvPr>
@@ -4899,7 +4899,7 @@
           <p:cNvPr id="14" name="Прямоугольник 13">
             <a:extLst>
               <a:ext uri="{FF2B5EF4-FFF2-40B4-BE49-F238E27FC236}">
-                <a16:creationId xmlns:a16="http://schemas.microsoft.com/office/drawing/2014/main" id="{B465A046-B7EB-5A4F-46B0-F3FA0A3AFFAE}"/>
+                <a16:creationId xmlns:a16="http://schemas.microsoft.com/office/drawing/2014/main" id="{7EC7DA0F-914F-3314-993A-5F0EC7C2F0B7}"/>
               </a:ext>
             </a:extLst>
           </p:cNvPr>
@@ -4967,7 +4967,7 @@
           <p:cNvPr id="15" name="TextBox 14">
             <a:extLst>
               <a:ext uri="{FF2B5EF4-FFF2-40B4-BE49-F238E27FC236}">
-                <a16:creationId xmlns:a16="http://schemas.microsoft.com/office/drawing/2014/main" id="{DF4BE700-FD2B-4D76-187E-10FA652CD10D}"/>
+                <a16:creationId xmlns:a16="http://schemas.microsoft.com/office/drawing/2014/main" id="{8F1F4A7F-B552-06C7-11B6-17552BB89E8A}"/>
               </a:ext>
             </a:extLst>
           </p:cNvPr>
@@ -5012,7 +5012,7 @@
           <p:cNvPr id="16" name="TextBox 15">
             <a:extLst>
               <a:ext uri="{FF2B5EF4-FFF2-40B4-BE49-F238E27FC236}">
-                <a16:creationId xmlns:a16="http://schemas.microsoft.com/office/drawing/2014/main" id="{B81CCD20-752F-7E8F-DDB1-4E01EDD0827D}"/>
+                <a16:creationId xmlns:a16="http://schemas.microsoft.com/office/drawing/2014/main" id="{BD46382A-B23A-1133-5FFB-6100AE779856}"/>
               </a:ext>
             </a:extLst>
           </p:cNvPr>
@@ -5057,7 +5057,7 @@
           <p:cNvPr id="17" name="Прямоугольник 16">
             <a:extLst>
               <a:ext uri="{FF2B5EF4-FFF2-40B4-BE49-F238E27FC236}">
-                <a16:creationId xmlns:a16="http://schemas.microsoft.com/office/drawing/2014/main" id="{DFA00F43-76B3-CDE1-4410-7461CDD1012B}"/>
+                <a16:creationId xmlns:a16="http://schemas.microsoft.com/office/drawing/2014/main" id="{E6C36EFB-43E7-0FAB-DCB9-847CCC0F884F}"/>
               </a:ext>
             </a:extLst>
           </p:cNvPr>
@@ -5125,7 +5125,7 @@
           <p:cNvPr id="18" name="TextBox 17">
             <a:extLst>
               <a:ext uri="{FF2B5EF4-FFF2-40B4-BE49-F238E27FC236}">
-                <a16:creationId xmlns:a16="http://schemas.microsoft.com/office/drawing/2014/main" id="{517EF9C0-E957-8BCD-F23F-7F5BAB457DC2}"/>
+                <a16:creationId xmlns:a16="http://schemas.microsoft.com/office/drawing/2014/main" id="{B765E1C7-83E4-333C-5A26-C56C12D1ED66}"/>
               </a:ext>
             </a:extLst>
           </p:cNvPr>
@@ -5170,7 +5170,7 @@
           <p:cNvPr id="19" name="TextBox 18">
             <a:extLst>
               <a:ext uri="{FF2B5EF4-FFF2-40B4-BE49-F238E27FC236}">
-                <a16:creationId xmlns:a16="http://schemas.microsoft.com/office/drawing/2014/main" id="{5572E0C9-FFA5-C4C8-0C8D-FA96AB51ECAC}"/>
+                <a16:creationId xmlns:a16="http://schemas.microsoft.com/office/drawing/2014/main" id="{E1149FA2-F6C0-A1BA-F438-E56B2A215C1C}"/>
               </a:ext>
             </a:extLst>
           </p:cNvPr>
@@ -5215,7 +5215,7 @@
           <p:cNvPr id="20" name="Прямоугольник 19">
             <a:extLst>
               <a:ext uri="{FF2B5EF4-FFF2-40B4-BE49-F238E27FC236}">
-                <a16:creationId xmlns:a16="http://schemas.microsoft.com/office/drawing/2014/main" id="{A8AD8D91-19E6-4D42-50F7-B4BA07042003}"/>
+                <a16:creationId xmlns:a16="http://schemas.microsoft.com/office/drawing/2014/main" id="{620824F9-4E01-070E-7756-24776CF72747}"/>
               </a:ext>
             </a:extLst>
           </p:cNvPr>
@@ -5283,7 +5283,7 @@
           <p:cNvPr id="21" name="TextBox 20">
             <a:extLst>
               <a:ext uri="{FF2B5EF4-FFF2-40B4-BE49-F238E27FC236}">
-                <a16:creationId xmlns:a16="http://schemas.microsoft.com/office/drawing/2014/main" id="{368FDB2E-E2F0-CFD8-2CD5-D265E8C00EA0}"/>
+                <a16:creationId xmlns:a16="http://schemas.microsoft.com/office/drawing/2014/main" id="{0E6BFA53-5DE3-55BC-A2ED-F5737FF82D75}"/>
               </a:ext>
             </a:extLst>
           </p:cNvPr>
@@ -5328,7 +5328,7 @@
           <p:cNvPr id="22" name="TextBox 21">
             <a:extLst>
               <a:ext uri="{FF2B5EF4-FFF2-40B4-BE49-F238E27FC236}">
-                <a16:creationId xmlns:a16="http://schemas.microsoft.com/office/drawing/2014/main" id="{673F53DA-8187-1E5B-9202-D797FB39558C}"/>
+                <a16:creationId xmlns:a16="http://schemas.microsoft.com/office/drawing/2014/main" id="{65BB3E81-83F0-3302-CFA0-6F94B2546685}"/>
               </a:ext>
             </a:extLst>
           </p:cNvPr>
@@ -5373,7 +5373,7 @@
           <p:cNvPr id="23" name="Прямоугольник 22">
             <a:extLst>
               <a:ext uri="{FF2B5EF4-FFF2-40B4-BE49-F238E27FC236}">
-                <a16:creationId xmlns:a16="http://schemas.microsoft.com/office/drawing/2014/main" id="{B7C6F4D1-BCDD-61EB-C7AA-374B98094DED}"/>
+                <a16:creationId xmlns:a16="http://schemas.microsoft.com/office/drawing/2014/main" id="{5D88ED11-B215-D160-3659-3528681B082D}"/>
               </a:ext>
             </a:extLst>
           </p:cNvPr>
@@ -5439,7 +5439,7 @@
     </p:spTree>
     <p:extLst>
       <p:ext uri="{BB962C8B-B14F-4D97-AF65-F5344CB8AC3E}">
-        <p14:creationId xmlns:p14="http://schemas.microsoft.com/office/powerpoint/2010/main" val="1613964250"/>
+        <p14:creationId xmlns:p14="http://schemas.microsoft.com/office/powerpoint/2010/main" val="3617522580"/>
       </p:ext>
     </p:extLst>
   </p:cSld>
@@ -5471,7 +5471,7 @@
           <p:cNvPr id="2" name="Прямоугольник 1">
             <a:extLst>
               <a:ext uri="{FF2B5EF4-FFF2-40B4-BE49-F238E27FC236}">
-                <a16:creationId xmlns:a16="http://schemas.microsoft.com/office/drawing/2014/main" id="{A38542D6-1EE9-09F7-535D-5EE6FFEC0646}"/>
+                <a16:creationId xmlns:a16="http://schemas.microsoft.com/office/drawing/2014/main" id="{9E20777D-130E-D6A0-0431-EDFF57B9A6AE}"/>
               </a:ext>
             </a:extLst>
           </p:cNvPr>
@@ -5539,7 +5539,7 @@
           <p:cNvPr id="3" name="Прямоугольник 2">
             <a:extLst>
               <a:ext uri="{FF2B5EF4-FFF2-40B4-BE49-F238E27FC236}">
-                <a16:creationId xmlns:a16="http://schemas.microsoft.com/office/drawing/2014/main" id="{746024DE-C62B-C6E3-DE57-BE9874288EC9}"/>
+                <a16:creationId xmlns:a16="http://schemas.microsoft.com/office/drawing/2014/main" id="{ED9EED05-5147-2487-91DE-A634E6343FE3}"/>
               </a:ext>
             </a:extLst>
           </p:cNvPr>
@@ -5607,7 +5607,7 @@
           <p:cNvPr id="4" name="TextBox 3">
             <a:extLst>
               <a:ext uri="{FF2B5EF4-FFF2-40B4-BE49-F238E27FC236}">
-                <a16:creationId xmlns:a16="http://schemas.microsoft.com/office/drawing/2014/main" id="{62EAE05B-B843-FD2A-1E89-04F87F25FE4A}"/>
+                <a16:creationId xmlns:a16="http://schemas.microsoft.com/office/drawing/2014/main" id="{F1BE4537-A1D1-4BBB-5113-EAADC6980D29}"/>
               </a:ext>
             </a:extLst>
           </p:cNvPr>
@@ -5652,7 +5652,7 @@
           <p:cNvPr id="5" name="TextBox 4">
             <a:extLst>
               <a:ext uri="{FF2B5EF4-FFF2-40B4-BE49-F238E27FC236}">
-                <a16:creationId xmlns:a16="http://schemas.microsoft.com/office/drawing/2014/main" id="{D9CD1863-D781-5C41-5149-60555E32053E}"/>
+                <a16:creationId xmlns:a16="http://schemas.microsoft.com/office/drawing/2014/main" id="{62805F8B-0411-5BC9-DAC0-2AA647D1C1BE}"/>
               </a:ext>
             </a:extLst>
           </p:cNvPr>
@@ -5697,7 +5697,7 @@
           <p:cNvPr id="6" name="Прямоугольник 5">
             <a:extLst>
               <a:ext uri="{FF2B5EF4-FFF2-40B4-BE49-F238E27FC236}">
-                <a16:creationId xmlns:a16="http://schemas.microsoft.com/office/drawing/2014/main" id="{AB39F64B-FD3C-B5E1-2E7B-A9B55D041AA5}"/>
+                <a16:creationId xmlns:a16="http://schemas.microsoft.com/office/drawing/2014/main" id="{510374E9-1EC8-AF72-8FA2-CF19D44D01E8}"/>
               </a:ext>
             </a:extLst>
           </p:cNvPr>
@@ -5765,7 +5765,7 @@
           <p:cNvPr id="7" name="Прямоугольник 6">
             <a:extLst>
               <a:ext uri="{FF2B5EF4-FFF2-40B4-BE49-F238E27FC236}">
-                <a16:creationId xmlns:a16="http://schemas.microsoft.com/office/drawing/2014/main" id="{06CE0FC1-D9A4-868A-350C-6654476BC1C9}"/>
+                <a16:creationId xmlns:a16="http://schemas.microsoft.com/office/drawing/2014/main" id="{789C10BB-2296-94A5-7740-91B4DE80304C}"/>
               </a:ext>
             </a:extLst>
           </p:cNvPr>
@@ -5833,7 +5833,7 @@
           <p:cNvPr id="8" name="TextBox 7">
             <a:extLst>
               <a:ext uri="{FF2B5EF4-FFF2-40B4-BE49-F238E27FC236}">
-                <a16:creationId xmlns:a16="http://schemas.microsoft.com/office/drawing/2014/main" id="{CB613481-44AC-C306-E84B-C9BC326D2C71}"/>
+                <a16:creationId xmlns:a16="http://schemas.microsoft.com/office/drawing/2014/main" id="{73BFE24D-F4CA-CA10-B61E-B9FE380828AF}"/>
               </a:ext>
             </a:extLst>
           </p:cNvPr>
@@ -5878,7 +5878,7 @@
           <p:cNvPr id="9" name="TextBox 8">
             <a:extLst>
               <a:ext uri="{FF2B5EF4-FFF2-40B4-BE49-F238E27FC236}">
-                <a16:creationId xmlns:a16="http://schemas.microsoft.com/office/drawing/2014/main" id="{67674F7E-A882-C373-8FAD-9FA6C508C6CA}"/>
+                <a16:creationId xmlns:a16="http://schemas.microsoft.com/office/drawing/2014/main" id="{0366CD3D-1978-1070-3C61-FEBD92ACFDA7}"/>
               </a:ext>
             </a:extLst>
           </p:cNvPr>
@@ -5923,7 +5923,7 @@
           <p:cNvPr id="10" name="Прямоугольник 9">
             <a:extLst>
               <a:ext uri="{FF2B5EF4-FFF2-40B4-BE49-F238E27FC236}">
-                <a16:creationId xmlns:a16="http://schemas.microsoft.com/office/drawing/2014/main" id="{F8C70C95-F1D6-8213-8E9C-A73080817A61}"/>
+                <a16:creationId xmlns:a16="http://schemas.microsoft.com/office/drawing/2014/main" id="{FE421A18-1985-B1B4-E6C0-2CD3002CED1E}"/>
               </a:ext>
             </a:extLst>
           </p:cNvPr>
@@ -5991,7 +5991,7 @@
           <p:cNvPr id="11" name="TextBox 10">
             <a:extLst>
               <a:ext uri="{FF2B5EF4-FFF2-40B4-BE49-F238E27FC236}">
-                <a16:creationId xmlns:a16="http://schemas.microsoft.com/office/drawing/2014/main" id="{0C4C0FCA-15F6-1271-2CAE-D6DCBFF7F8BC}"/>
+                <a16:creationId xmlns:a16="http://schemas.microsoft.com/office/drawing/2014/main" id="{CF42E669-2242-CB3A-FDC1-510A0CD29906}"/>
               </a:ext>
             </a:extLst>
           </p:cNvPr>
@@ -6036,7 +6036,7 @@
           <p:cNvPr id="12" name="TextBox 11">
             <a:extLst>
               <a:ext uri="{FF2B5EF4-FFF2-40B4-BE49-F238E27FC236}">
-                <a16:creationId xmlns:a16="http://schemas.microsoft.com/office/drawing/2014/main" id="{52BEDB8B-7A14-266A-0649-9AC1151A7924}"/>
+                <a16:creationId xmlns:a16="http://schemas.microsoft.com/office/drawing/2014/main" id="{F1630089-4150-B1F6-B271-0B309EE06EA2}"/>
               </a:ext>
             </a:extLst>
           </p:cNvPr>
@@ -6081,7 +6081,7 @@
           <p:cNvPr id="13" name="Прямоугольник 12">
             <a:extLst>
               <a:ext uri="{FF2B5EF4-FFF2-40B4-BE49-F238E27FC236}">
-                <a16:creationId xmlns:a16="http://schemas.microsoft.com/office/drawing/2014/main" id="{2BAA892D-C1CE-F052-9774-77EFC352B6E5}"/>
+                <a16:creationId xmlns:a16="http://schemas.microsoft.com/office/drawing/2014/main" id="{5CAA6D09-81CE-FA9A-D856-3A85C813C40E}"/>
               </a:ext>
             </a:extLst>
           </p:cNvPr>
@@ -6149,7 +6149,7 @@
           <p:cNvPr id="14" name="Прямоугольник 13">
             <a:extLst>
               <a:ext uri="{FF2B5EF4-FFF2-40B4-BE49-F238E27FC236}">
-                <a16:creationId xmlns:a16="http://schemas.microsoft.com/office/drawing/2014/main" id="{A28AB72C-53B6-570C-2E95-C111F23D3801}"/>
+                <a16:creationId xmlns:a16="http://schemas.microsoft.com/office/drawing/2014/main" id="{5EC68E1D-1B6C-4F25-8C9D-4EA899D0DD97}"/>
               </a:ext>
             </a:extLst>
           </p:cNvPr>
@@ -6217,7 +6217,7 @@
           <p:cNvPr id="15" name="TextBox 14">
             <a:extLst>
               <a:ext uri="{FF2B5EF4-FFF2-40B4-BE49-F238E27FC236}">
-                <a16:creationId xmlns:a16="http://schemas.microsoft.com/office/drawing/2014/main" id="{6DA1A289-74AE-140F-CF30-765091BB6DF9}"/>
+                <a16:creationId xmlns:a16="http://schemas.microsoft.com/office/drawing/2014/main" id="{FFE38F6C-FD80-6BEC-468C-C1310790E2F4}"/>
               </a:ext>
             </a:extLst>
           </p:cNvPr>
@@ -6262,7 +6262,7 @@
           <p:cNvPr id="16" name="TextBox 15">
             <a:extLst>
               <a:ext uri="{FF2B5EF4-FFF2-40B4-BE49-F238E27FC236}">
-                <a16:creationId xmlns:a16="http://schemas.microsoft.com/office/drawing/2014/main" id="{ECE8CCA2-93D7-811D-BA68-D959E9D41E7A}"/>
+                <a16:creationId xmlns:a16="http://schemas.microsoft.com/office/drawing/2014/main" id="{91E04DFF-B035-62FC-24A8-D0C7DB63D827}"/>
               </a:ext>
             </a:extLst>
           </p:cNvPr>
@@ -6307,7 +6307,7 @@
           <p:cNvPr id="17" name="Прямоугольник 16">
             <a:extLst>
               <a:ext uri="{FF2B5EF4-FFF2-40B4-BE49-F238E27FC236}">
-                <a16:creationId xmlns:a16="http://schemas.microsoft.com/office/drawing/2014/main" id="{73DFBBE9-33B5-247D-40BA-88D9C4832786}"/>
+                <a16:creationId xmlns:a16="http://schemas.microsoft.com/office/drawing/2014/main" id="{FE91EB34-E60F-47A9-E271-B3826E93590E}"/>
               </a:ext>
             </a:extLst>
           </p:cNvPr>
@@ -6375,7 +6375,7 @@
           <p:cNvPr id="18" name="Прямоугольник 17">
             <a:extLst>
               <a:ext uri="{FF2B5EF4-FFF2-40B4-BE49-F238E27FC236}">
-                <a16:creationId xmlns:a16="http://schemas.microsoft.com/office/drawing/2014/main" id="{00066878-6312-B418-9CD7-2E1209982F33}"/>
+                <a16:creationId xmlns:a16="http://schemas.microsoft.com/office/drawing/2014/main" id="{27CBE4E6-4C53-6825-9CB5-85BB4B6473C0}"/>
               </a:ext>
             </a:extLst>
           </p:cNvPr>
@@ -6443,7 +6443,7 @@
           <p:cNvPr id="19" name="TextBox 18">
             <a:extLst>
               <a:ext uri="{FF2B5EF4-FFF2-40B4-BE49-F238E27FC236}">
-                <a16:creationId xmlns:a16="http://schemas.microsoft.com/office/drawing/2014/main" id="{58CE9513-9BC7-CD17-9840-CFF2215B841F}"/>
+                <a16:creationId xmlns:a16="http://schemas.microsoft.com/office/drawing/2014/main" id="{2D72D4E4-BCFB-B524-CAA1-F90D57967067}"/>
               </a:ext>
             </a:extLst>
           </p:cNvPr>
@@ -6488,7 +6488,7 @@
           <p:cNvPr id="20" name="TextBox 19">
             <a:extLst>
               <a:ext uri="{FF2B5EF4-FFF2-40B4-BE49-F238E27FC236}">
-                <a16:creationId xmlns:a16="http://schemas.microsoft.com/office/drawing/2014/main" id="{C6F70800-1FC7-3C81-6432-EEF6A5737FBD}"/>
+                <a16:creationId xmlns:a16="http://schemas.microsoft.com/office/drawing/2014/main" id="{E3DB755C-EA03-3210-55EB-FECF48E19EEE}"/>
               </a:ext>
             </a:extLst>
           </p:cNvPr>
@@ -6533,7 +6533,7 @@
           <p:cNvPr id="21" name="Прямоугольник 20">
             <a:extLst>
               <a:ext uri="{FF2B5EF4-FFF2-40B4-BE49-F238E27FC236}">
-                <a16:creationId xmlns:a16="http://schemas.microsoft.com/office/drawing/2014/main" id="{A21CD9B9-28AB-9E22-F250-D873223E6FC7}"/>
+                <a16:creationId xmlns:a16="http://schemas.microsoft.com/office/drawing/2014/main" id="{DD88F057-309A-A18B-83CF-B2B68A8D3BB0}"/>
               </a:ext>
             </a:extLst>
           </p:cNvPr>
@@ -6601,7 +6601,7 @@
           <p:cNvPr id="22" name="Прямоугольник 21">
             <a:extLst>
               <a:ext uri="{FF2B5EF4-FFF2-40B4-BE49-F238E27FC236}">
-                <a16:creationId xmlns:a16="http://schemas.microsoft.com/office/drawing/2014/main" id="{13342CE9-5C1C-FB2F-6E46-E673DDBE5290}"/>
+                <a16:creationId xmlns:a16="http://schemas.microsoft.com/office/drawing/2014/main" id="{A11FB260-8D81-0C02-E76D-2EB7E962023F}"/>
               </a:ext>
             </a:extLst>
           </p:cNvPr>
@@ -6669,7 +6669,7 @@
           <p:cNvPr id="23" name="TextBox 22">
             <a:extLst>
               <a:ext uri="{FF2B5EF4-FFF2-40B4-BE49-F238E27FC236}">
-                <a16:creationId xmlns:a16="http://schemas.microsoft.com/office/drawing/2014/main" id="{A5EFE53B-A67F-9F4C-BC62-E05A6E195BA5}"/>
+                <a16:creationId xmlns:a16="http://schemas.microsoft.com/office/drawing/2014/main" id="{038E70A7-A1A3-075A-90B8-7510A8611C69}"/>
               </a:ext>
             </a:extLst>
           </p:cNvPr>
@@ -6714,7 +6714,7 @@
           <p:cNvPr id="24" name="TextBox 23">
             <a:extLst>
               <a:ext uri="{FF2B5EF4-FFF2-40B4-BE49-F238E27FC236}">
-                <a16:creationId xmlns:a16="http://schemas.microsoft.com/office/drawing/2014/main" id="{A26523ED-C7E4-10F8-FFEE-3D1E5D1F3612}"/>
+                <a16:creationId xmlns:a16="http://schemas.microsoft.com/office/drawing/2014/main" id="{685D140B-52A2-4B97-9CB8-2779EFCB32E7}"/>
               </a:ext>
             </a:extLst>
           </p:cNvPr>
@@ -6759,7 +6759,7 @@
           <p:cNvPr id="25" name="Прямоугольник 24">
             <a:extLst>
               <a:ext uri="{FF2B5EF4-FFF2-40B4-BE49-F238E27FC236}">
-                <a16:creationId xmlns:a16="http://schemas.microsoft.com/office/drawing/2014/main" id="{CA94974B-60CF-3BB9-2F58-D1F6AE128DC0}"/>
+                <a16:creationId xmlns:a16="http://schemas.microsoft.com/office/drawing/2014/main" id="{8A768049-3D7E-9A1F-330F-CD2FC78898A0}"/>
               </a:ext>
             </a:extLst>
           </p:cNvPr>
@@ -6827,7 +6827,7 @@
           <p:cNvPr id="26" name="Прямоугольник 25">
             <a:extLst>
               <a:ext uri="{FF2B5EF4-FFF2-40B4-BE49-F238E27FC236}">
-                <a16:creationId xmlns:a16="http://schemas.microsoft.com/office/drawing/2014/main" id="{B852BBBA-C7DA-0AC9-25A5-1A2DE034C757}"/>
+                <a16:creationId xmlns:a16="http://schemas.microsoft.com/office/drawing/2014/main" id="{0386BDE7-F52E-FC47-7289-5FB7F8CB2583}"/>
               </a:ext>
             </a:extLst>
           </p:cNvPr>
@@ -6895,7 +6895,7 @@
           <p:cNvPr id="27" name="TextBox 26">
             <a:extLst>
               <a:ext uri="{FF2B5EF4-FFF2-40B4-BE49-F238E27FC236}">
-                <a16:creationId xmlns:a16="http://schemas.microsoft.com/office/drawing/2014/main" id="{9AC45325-9772-5A22-03FE-42841C297810}"/>
+                <a16:creationId xmlns:a16="http://schemas.microsoft.com/office/drawing/2014/main" id="{A9A4B173-5A76-C081-1422-E2ADFD5972E6}"/>
               </a:ext>
             </a:extLst>
           </p:cNvPr>
@@ -6940,7 +6940,7 @@
           <p:cNvPr id="28" name="TextBox 27">
             <a:extLst>
               <a:ext uri="{FF2B5EF4-FFF2-40B4-BE49-F238E27FC236}">
-                <a16:creationId xmlns:a16="http://schemas.microsoft.com/office/drawing/2014/main" id="{135B9A7B-27EA-7611-2F4B-A4D517D1688E}"/>
+                <a16:creationId xmlns:a16="http://schemas.microsoft.com/office/drawing/2014/main" id="{7472D54F-027C-F352-1C85-4205B96D2015}"/>
               </a:ext>
             </a:extLst>
           </p:cNvPr>
@@ -6985,7 +6985,7 @@
           <p:cNvPr id="29" name="Прямоугольник 28">
             <a:extLst>
               <a:ext uri="{FF2B5EF4-FFF2-40B4-BE49-F238E27FC236}">
-                <a16:creationId xmlns:a16="http://schemas.microsoft.com/office/drawing/2014/main" id="{6B0B0FF9-0BAB-2BD7-0659-D52131B78CBE}"/>
+                <a16:creationId xmlns:a16="http://schemas.microsoft.com/office/drawing/2014/main" id="{D8090123-86A8-C185-467D-11CB7711CAC3}"/>
               </a:ext>
             </a:extLst>
           </p:cNvPr>
@@ -7053,7 +7053,7 @@
           <p:cNvPr id="30" name="Прямоугольник 29">
             <a:extLst>
               <a:ext uri="{FF2B5EF4-FFF2-40B4-BE49-F238E27FC236}">
-                <a16:creationId xmlns:a16="http://schemas.microsoft.com/office/drawing/2014/main" id="{AA61E741-3B9B-C40E-5BF1-068BD5EC5B66}"/>
+                <a16:creationId xmlns:a16="http://schemas.microsoft.com/office/drawing/2014/main" id="{B57CC3D0-3F2B-9483-8A0C-F7120D8FC9A2}"/>
               </a:ext>
             </a:extLst>
           </p:cNvPr>
@@ -7121,7 +7121,7 @@
           <p:cNvPr id="31" name="TextBox 30">
             <a:extLst>
               <a:ext uri="{FF2B5EF4-FFF2-40B4-BE49-F238E27FC236}">
-                <a16:creationId xmlns:a16="http://schemas.microsoft.com/office/drawing/2014/main" id="{7F2D7252-B6A1-084F-30AB-F71F5C121B54}"/>
+                <a16:creationId xmlns:a16="http://schemas.microsoft.com/office/drawing/2014/main" id="{B8BE41AA-C119-8604-1BF8-4EC8DDB7AA30}"/>
               </a:ext>
             </a:extLst>
           </p:cNvPr>
@@ -7166,7 +7166,7 @@
           <p:cNvPr id="32" name="TextBox 31">
             <a:extLst>
               <a:ext uri="{FF2B5EF4-FFF2-40B4-BE49-F238E27FC236}">
-                <a16:creationId xmlns:a16="http://schemas.microsoft.com/office/drawing/2014/main" id="{AAD376D1-80D8-EE16-2CD9-34ED29D8EB7C}"/>
+                <a16:creationId xmlns:a16="http://schemas.microsoft.com/office/drawing/2014/main" id="{F8C0DDF5-34D5-AD63-A27D-982C4D0E77D9}"/>
               </a:ext>
             </a:extLst>
           </p:cNvPr>
@@ -7211,7 +7211,7 @@
           <p:cNvPr id="33" name="Прямоугольник 32">
             <a:extLst>
               <a:ext uri="{FF2B5EF4-FFF2-40B4-BE49-F238E27FC236}">
-                <a16:creationId xmlns:a16="http://schemas.microsoft.com/office/drawing/2014/main" id="{4E59CC0D-8F06-FE34-AC44-56C22D92BC2E}"/>
+                <a16:creationId xmlns:a16="http://schemas.microsoft.com/office/drawing/2014/main" id="{FEFF152C-3C9B-C785-3349-8144435F2ABB}"/>
               </a:ext>
             </a:extLst>
           </p:cNvPr>
@@ -7279,7 +7279,7 @@
           <p:cNvPr id="34" name="Прямоугольник 33">
             <a:extLst>
               <a:ext uri="{FF2B5EF4-FFF2-40B4-BE49-F238E27FC236}">
-                <a16:creationId xmlns:a16="http://schemas.microsoft.com/office/drawing/2014/main" id="{1F910C12-AAC0-979D-10AF-9E70F6316DA9}"/>
+                <a16:creationId xmlns:a16="http://schemas.microsoft.com/office/drawing/2014/main" id="{1A5DF818-62F1-85F0-644D-E6202B1F5972}"/>
               </a:ext>
             </a:extLst>
           </p:cNvPr>
@@ -7347,7 +7347,7 @@
           <p:cNvPr id="35" name="TextBox 34">
             <a:extLst>
               <a:ext uri="{FF2B5EF4-FFF2-40B4-BE49-F238E27FC236}">
-                <a16:creationId xmlns:a16="http://schemas.microsoft.com/office/drawing/2014/main" id="{32BA7798-1769-52F5-2617-B733CA7B9A3B}"/>
+                <a16:creationId xmlns:a16="http://schemas.microsoft.com/office/drawing/2014/main" id="{2A058CF3-D990-0EEC-0A01-5D683B916D22}"/>
               </a:ext>
             </a:extLst>
           </p:cNvPr>
@@ -7392,7 +7392,7 @@
           <p:cNvPr id="36" name="TextBox 35">
             <a:extLst>
               <a:ext uri="{FF2B5EF4-FFF2-40B4-BE49-F238E27FC236}">
-                <a16:creationId xmlns:a16="http://schemas.microsoft.com/office/drawing/2014/main" id="{F8349F15-D1BD-4061-B0C1-2E76A3D634E7}"/>
+                <a16:creationId xmlns:a16="http://schemas.microsoft.com/office/drawing/2014/main" id="{526595A0-E5B8-73D4-B223-5244E50AAAEE}"/>
               </a:ext>
             </a:extLst>
           </p:cNvPr>
@@ -7437,7 +7437,7 @@
           <p:cNvPr id="37" name="Прямоугольник 36">
             <a:extLst>
               <a:ext uri="{FF2B5EF4-FFF2-40B4-BE49-F238E27FC236}">
-                <a16:creationId xmlns:a16="http://schemas.microsoft.com/office/drawing/2014/main" id="{8407CF03-441A-4500-40DA-97EEA6A07AA9}"/>
+                <a16:creationId xmlns:a16="http://schemas.microsoft.com/office/drawing/2014/main" id="{231C9579-28FA-0C2A-5EDE-4B1F7ACDB387}"/>
               </a:ext>
             </a:extLst>
           </p:cNvPr>
@@ -7505,7 +7505,7 @@
           <p:cNvPr id="38" name="Прямоугольник 37">
             <a:extLst>
               <a:ext uri="{FF2B5EF4-FFF2-40B4-BE49-F238E27FC236}">
-                <a16:creationId xmlns:a16="http://schemas.microsoft.com/office/drawing/2014/main" id="{2BDAEC12-97F0-2165-8531-076586AAC159}"/>
+                <a16:creationId xmlns:a16="http://schemas.microsoft.com/office/drawing/2014/main" id="{A0ECD507-4B89-A3D7-5C2E-848DB5130440}"/>
               </a:ext>
             </a:extLst>
           </p:cNvPr>
@@ -7573,7 +7573,7 @@
           <p:cNvPr id="39" name="TextBox 38">
             <a:extLst>
               <a:ext uri="{FF2B5EF4-FFF2-40B4-BE49-F238E27FC236}">
-                <a16:creationId xmlns:a16="http://schemas.microsoft.com/office/drawing/2014/main" id="{1BD57F80-B7E4-44FD-F5F4-7E3F2FD8ED57}"/>
+                <a16:creationId xmlns:a16="http://schemas.microsoft.com/office/drawing/2014/main" id="{D2309B33-9B6F-E718-8B79-8CF6B4D7A159}"/>
               </a:ext>
             </a:extLst>
           </p:cNvPr>
@@ -7618,7 +7618,7 @@
           <p:cNvPr id="40" name="TextBox 39">
             <a:extLst>
               <a:ext uri="{FF2B5EF4-FFF2-40B4-BE49-F238E27FC236}">
-                <a16:creationId xmlns:a16="http://schemas.microsoft.com/office/drawing/2014/main" id="{0EA92934-AC16-FECB-D147-99C029CF2072}"/>
+                <a16:creationId xmlns:a16="http://schemas.microsoft.com/office/drawing/2014/main" id="{4DC5B5E1-CC36-5541-1D6E-C159C040D497}"/>
               </a:ext>
             </a:extLst>
           </p:cNvPr>
@@ -7663,7 +7663,7 @@
           <p:cNvPr id="41" name="Прямоугольник 40">
             <a:extLst>
               <a:ext uri="{FF2B5EF4-FFF2-40B4-BE49-F238E27FC236}">
-                <a16:creationId xmlns:a16="http://schemas.microsoft.com/office/drawing/2014/main" id="{5E170CC2-BD98-F2B2-9C8A-FFADF2D6A6AF}"/>
+                <a16:creationId xmlns:a16="http://schemas.microsoft.com/office/drawing/2014/main" id="{6A740AA5-4F02-DB0E-E4C5-11788E1E314A}"/>
               </a:ext>
             </a:extLst>
           </p:cNvPr>
@@ -7729,7 +7729,7 @@
     </p:spTree>
     <p:extLst>
       <p:ext uri="{BB962C8B-B14F-4D97-AF65-F5344CB8AC3E}">
-        <p14:creationId xmlns:p14="http://schemas.microsoft.com/office/powerpoint/2010/main" val="3493037512"/>
+        <p14:creationId xmlns:p14="http://schemas.microsoft.com/office/powerpoint/2010/main" val="3426088179"/>
       </p:ext>
     </p:extLst>
   </p:cSld>
@@ -7761,7 +7761,7 @@
           <p:cNvPr id="2" name="Прямоугольник 1">
             <a:extLst>
               <a:ext uri="{FF2B5EF4-FFF2-40B4-BE49-F238E27FC236}">
-                <a16:creationId xmlns:a16="http://schemas.microsoft.com/office/drawing/2014/main" id="{76300278-8ECF-BD84-E489-F0FAF4631DB9}"/>
+                <a16:creationId xmlns:a16="http://schemas.microsoft.com/office/drawing/2014/main" id="{3E0DB86E-000B-6DF3-B14C-67C70DE28E06}"/>
               </a:ext>
             </a:extLst>
           </p:cNvPr>
@@ -7829,7 +7829,7 @@
           <p:cNvPr id="3" name="Прямоугольник 2">
             <a:extLst>
               <a:ext uri="{FF2B5EF4-FFF2-40B4-BE49-F238E27FC236}">
-                <a16:creationId xmlns:a16="http://schemas.microsoft.com/office/drawing/2014/main" id="{91FB2EA0-9D50-ACE9-E903-23BB7D84E73F}"/>
+                <a16:creationId xmlns:a16="http://schemas.microsoft.com/office/drawing/2014/main" id="{6BE3337B-2865-7AFF-C358-98788D9C538B}"/>
               </a:ext>
             </a:extLst>
           </p:cNvPr>
@@ -7897,7 +7897,7 @@
           <p:cNvPr id="4" name="TextBox 3">
             <a:extLst>
               <a:ext uri="{FF2B5EF4-FFF2-40B4-BE49-F238E27FC236}">
-                <a16:creationId xmlns:a16="http://schemas.microsoft.com/office/drawing/2014/main" id="{D91D41AE-D8A1-BABC-255B-CA6197208B8E}"/>
+                <a16:creationId xmlns:a16="http://schemas.microsoft.com/office/drawing/2014/main" id="{C5A1C8FB-17A7-3FE2-59F4-5DB6E69D4F1F}"/>
               </a:ext>
             </a:extLst>
           </p:cNvPr>
@@ -7942,7 +7942,7 @@
           <p:cNvPr id="5" name="TextBox 4">
             <a:extLst>
               <a:ext uri="{FF2B5EF4-FFF2-40B4-BE49-F238E27FC236}">
-                <a16:creationId xmlns:a16="http://schemas.microsoft.com/office/drawing/2014/main" id="{5BE088BB-E7CB-39E3-6339-24C1EA257035}"/>
+                <a16:creationId xmlns:a16="http://schemas.microsoft.com/office/drawing/2014/main" id="{ADFB0FD1-00EE-9C75-F44E-D3DAB1BF5DD1}"/>
               </a:ext>
             </a:extLst>
           </p:cNvPr>
@@ -7987,7 +7987,7 @@
           <p:cNvPr id="6" name="Прямоугольник 5">
             <a:extLst>
               <a:ext uri="{FF2B5EF4-FFF2-40B4-BE49-F238E27FC236}">
-                <a16:creationId xmlns:a16="http://schemas.microsoft.com/office/drawing/2014/main" id="{340F8B06-334D-63CE-A158-2B33D6A7698F}"/>
+                <a16:creationId xmlns:a16="http://schemas.microsoft.com/office/drawing/2014/main" id="{1C5C9869-A0F3-95A7-80BE-0157CF7ACCE9}"/>
               </a:ext>
             </a:extLst>
           </p:cNvPr>
@@ -8055,7 +8055,7 @@
           <p:cNvPr id="7" name="Прямоугольник 6">
             <a:extLst>
               <a:ext uri="{FF2B5EF4-FFF2-40B4-BE49-F238E27FC236}">
-                <a16:creationId xmlns:a16="http://schemas.microsoft.com/office/drawing/2014/main" id="{7E1E7EFC-D143-455C-8D94-6FE812648B45}"/>
+                <a16:creationId xmlns:a16="http://schemas.microsoft.com/office/drawing/2014/main" id="{10564407-BBB0-C25E-B976-F9D73DDCF9C8}"/>
               </a:ext>
             </a:extLst>
           </p:cNvPr>
@@ -8123,7 +8123,7 @@
           <p:cNvPr id="8" name="TextBox 7">
             <a:extLst>
               <a:ext uri="{FF2B5EF4-FFF2-40B4-BE49-F238E27FC236}">
-                <a16:creationId xmlns:a16="http://schemas.microsoft.com/office/drawing/2014/main" id="{3EC5D5A7-FC81-CBF1-4871-6C7B99848CDA}"/>
+                <a16:creationId xmlns:a16="http://schemas.microsoft.com/office/drawing/2014/main" id="{53CA4997-96AA-AD8C-ADE7-17114C407C11}"/>
               </a:ext>
             </a:extLst>
           </p:cNvPr>
@@ -8168,7 +8168,7 @@
           <p:cNvPr id="9" name="TextBox 8">
             <a:extLst>
               <a:ext uri="{FF2B5EF4-FFF2-40B4-BE49-F238E27FC236}">
-                <a16:creationId xmlns:a16="http://schemas.microsoft.com/office/drawing/2014/main" id="{F57D1615-CDD2-82AC-B115-CC73A7B95C11}"/>
+                <a16:creationId xmlns:a16="http://schemas.microsoft.com/office/drawing/2014/main" id="{860AD58F-59B9-7643-D971-57169CBB8ED5}"/>
               </a:ext>
             </a:extLst>
           </p:cNvPr>
@@ -8213,7 +8213,7 @@
           <p:cNvPr id="11" name="Рисунок 10">
             <a:extLst>
               <a:ext uri="{FF2B5EF4-FFF2-40B4-BE49-F238E27FC236}">
-                <a16:creationId xmlns:a16="http://schemas.microsoft.com/office/drawing/2014/main" id="{5D094974-EB6C-321A-616B-8FE17CF502D3}"/>
+                <a16:creationId xmlns:a16="http://schemas.microsoft.com/office/drawing/2014/main" id="{F7EF91EE-0F6C-7BCE-388B-45743D142ADD}"/>
               </a:ext>
             </a:extLst>
           </p:cNvPr>
@@ -8254,7 +8254,7 @@
           <p:cNvPr id="12" name="TextBox 11">
             <a:extLst>
               <a:ext uri="{FF2B5EF4-FFF2-40B4-BE49-F238E27FC236}">
-                <a16:creationId xmlns:a16="http://schemas.microsoft.com/office/drawing/2014/main" id="{2310E946-31DB-A854-2A21-5B137A390A6E}"/>
+                <a16:creationId xmlns:a16="http://schemas.microsoft.com/office/drawing/2014/main" id="{3E0AF101-0051-3E73-738D-01102FC6F621}"/>
               </a:ext>
             </a:extLst>
           </p:cNvPr>
@@ -8305,7 +8305,7 @@
           <p:cNvPr id="13" name="TextBox 12">
             <a:extLst>
               <a:ext uri="{FF2B5EF4-FFF2-40B4-BE49-F238E27FC236}">
-                <a16:creationId xmlns:a16="http://schemas.microsoft.com/office/drawing/2014/main" id="{FEB1FEC3-54BC-2A27-AFB6-CD26A9575945}"/>
+                <a16:creationId xmlns:a16="http://schemas.microsoft.com/office/drawing/2014/main" id="{002E638D-B22B-55AB-4643-9E34F7406D4E}"/>
               </a:ext>
             </a:extLst>
           </p:cNvPr>
@@ -8350,7 +8350,7 @@
           <p:cNvPr id="14" name="Прямоугольник 13">
             <a:extLst>
               <a:ext uri="{FF2B5EF4-FFF2-40B4-BE49-F238E27FC236}">
-                <a16:creationId xmlns:a16="http://schemas.microsoft.com/office/drawing/2014/main" id="{B541CA17-9362-8AB5-D682-C8FB43F11DC4}"/>
+                <a16:creationId xmlns:a16="http://schemas.microsoft.com/office/drawing/2014/main" id="{36863104-F826-E780-E63F-B1CA7AB3E0B4}"/>
               </a:ext>
             </a:extLst>
           </p:cNvPr>
@@ -8418,7 +8418,7 @@
           <p:cNvPr id="16" name="Рисунок 15">
             <a:extLst>
               <a:ext uri="{FF2B5EF4-FFF2-40B4-BE49-F238E27FC236}">
-                <a16:creationId xmlns:a16="http://schemas.microsoft.com/office/drawing/2014/main" id="{AF80F33C-8CCE-B4CB-27E4-38F51E09B92A}"/>
+                <a16:creationId xmlns:a16="http://schemas.microsoft.com/office/drawing/2014/main" id="{BE9F8EE0-E3C1-D5DA-3268-635CB397D516}"/>
               </a:ext>
             </a:extLst>
           </p:cNvPr>
@@ -8459,7 +8459,7 @@
           <p:cNvPr id="17" name="TextBox 16">
             <a:extLst>
               <a:ext uri="{FF2B5EF4-FFF2-40B4-BE49-F238E27FC236}">
-                <a16:creationId xmlns:a16="http://schemas.microsoft.com/office/drawing/2014/main" id="{984C2C58-4BD4-E2DD-42FC-D3B4AE883B49}"/>
+                <a16:creationId xmlns:a16="http://schemas.microsoft.com/office/drawing/2014/main" id="{B2B8A8F3-2A5C-A432-1194-8ADC60116C40}"/>
               </a:ext>
             </a:extLst>
           </p:cNvPr>
@@ -8510,7 +8510,7 @@
           <p:cNvPr id="18" name="TextBox 17">
             <a:extLst>
               <a:ext uri="{FF2B5EF4-FFF2-40B4-BE49-F238E27FC236}">
-                <a16:creationId xmlns:a16="http://schemas.microsoft.com/office/drawing/2014/main" id="{71840C40-9C29-8F8C-E028-C2409F17E398}"/>
+                <a16:creationId xmlns:a16="http://schemas.microsoft.com/office/drawing/2014/main" id="{7F6864A3-09C1-EB24-D388-8A208144C6C8}"/>
               </a:ext>
             </a:extLst>
           </p:cNvPr>
@@ -8555,7 +8555,7 @@
           <p:cNvPr id="19" name="Прямоугольник 18">
             <a:extLst>
               <a:ext uri="{FF2B5EF4-FFF2-40B4-BE49-F238E27FC236}">
-                <a16:creationId xmlns:a16="http://schemas.microsoft.com/office/drawing/2014/main" id="{1A8F096F-09B9-E8A5-854F-5A6A7F003E18}"/>
+                <a16:creationId xmlns:a16="http://schemas.microsoft.com/office/drawing/2014/main" id="{ADEB502D-4577-F059-055B-1DABD6CD9799}"/>
               </a:ext>
             </a:extLst>
           </p:cNvPr>
@@ -8623,7 +8623,7 @@
           <p:cNvPr id="21" name="Рисунок 20">
             <a:extLst>
               <a:ext uri="{FF2B5EF4-FFF2-40B4-BE49-F238E27FC236}">
-                <a16:creationId xmlns:a16="http://schemas.microsoft.com/office/drawing/2014/main" id="{D7F4AE84-55D0-D449-7278-3BB1907444AC}"/>
+                <a16:creationId xmlns:a16="http://schemas.microsoft.com/office/drawing/2014/main" id="{F5EC311B-15C1-C3B4-8749-328C3EE336E2}"/>
               </a:ext>
             </a:extLst>
           </p:cNvPr>
@@ -8664,7 +8664,7 @@
           <p:cNvPr id="22" name="TextBox 21">
             <a:extLst>
               <a:ext uri="{FF2B5EF4-FFF2-40B4-BE49-F238E27FC236}">
-                <a16:creationId xmlns:a16="http://schemas.microsoft.com/office/drawing/2014/main" id="{1E8D1FCD-75F5-5290-1CB9-89EE5B863339}"/>
+                <a16:creationId xmlns:a16="http://schemas.microsoft.com/office/drawing/2014/main" id="{FCAF0C21-0BCA-C444-B0DD-F1374597EF2E}"/>
               </a:ext>
             </a:extLst>
           </p:cNvPr>
@@ -8715,7 +8715,7 @@
           <p:cNvPr id="23" name="TextBox 22">
             <a:extLst>
               <a:ext uri="{FF2B5EF4-FFF2-40B4-BE49-F238E27FC236}">
-                <a16:creationId xmlns:a16="http://schemas.microsoft.com/office/drawing/2014/main" id="{AC1901C4-1F88-F561-CA13-2D624D1EBC27}"/>
+                <a16:creationId xmlns:a16="http://schemas.microsoft.com/office/drawing/2014/main" id="{6D61B883-C751-7013-C89D-D022E8975B64}"/>
               </a:ext>
             </a:extLst>
           </p:cNvPr>
@@ -8760,7 +8760,7 @@
           <p:cNvPr id="24" name="Прямоугольник 23">
             <a:extLst>
               <a:ext uri="{FF2B5EF4-FFF2-40B4-BE49-F238E27FC236}">
-                <a16:creationId xmlns:a16="http://schemas.microsoft.com/office/drawing/2014/main" id="{12E6DA0B-2873-B35F-BA65-A22CFF7A069C}"/>
+                <a16:creationId xmlns:a16="http://schemas.microsoft.com/office/drawing/2014/main" id="{E6723118-7C86-A57E-05B8-D67557C24843}"/>
               </a:ext>
             </a:extLst>
           </p:cNvPr>
@@ -8828,7 +8828,7 @@
           <p:cNvPr id="26" name="Рисунок 25">
             <a:extLst>
               <a:ext uri="{FF2B5EF4-FFF2-40B4-BE49-F238E27FC236}">
-                <a16:creationId xmlns:a16="http://schemas.microsoft.com/office/drawing/2014/main" id="{1EFC5300-304D-A550-A55B-D980B109AE56}"/>
+                <a16:creationId xmlns:a16="http://schemas.microsoft.com/office/drawing/2014/main" id="{F23C43C2-CFCB-9298-EBE6-700869549E18}"/>
               </a:ext>
             </a:extLst>
           </p:cNvPr>
@@ -8869,7 +8869,7 @@
           <p:cNvPr id="27" name="TextBox 26">
             <a:extLst>
               <a:ext uri="{FF2B5EF4-FFF2-40B4-BE49-F238E27FC236}">
-                <a16:creationId xmlns:a16="http://schemas.microsoft.com/office/drawing/2014/main" id="{5174157D-C5E6-1AB7-DE80-7C16521020A9}"/>
+                <a16:creationId xmlns:a16="http://schemas.microsoft.com/office/drawing/2014/main" id="{37AF42C5-5FDD-57EA-ECD6-9B4F0388A3A4}"/>
               </a:ext>
             </a:extLst>
           </p:cNvPr>
@@ -8923,7 +8923,7 @@
           <p:cNvPr id="28" name="TextBox 27">
             <a:extLst>
               <a:ext uri="{FF2B5EF4-FFF2-40B4-BE49-F238E27FC236}">
-                <a16:creationId xmlns:a16="http://schemas.microsoft.com/office/drawing/2014/main" id="{8BD064FF-B9EC-985C-3815-8FDBBA967C57}"/>
+                <a16:creationId xmlns:a16="http://schemas.microsoft.com/office/drawing/2014/main" id="{2E317FCD-55C7-9E69-EFCE-5F0267B904F8}"/>
               </a:ext>
             </a:extLst>
           </p:cNvPr>
@@ -8968,7 +8968,7 @@
           <p:cNvPr id="29" name="Прямоугольник 28">
             <a:extLst>
               <a:ext uri="{FF2B5EF4-FFF2-40B4-BE49-F238E27FC236}">
-                <a16:creationId xmlns:a16="http://schemas.microsoft.com/office/drawing/2014/main" id="{CCA39B5A-5636-BB92-4687-265A3EAC9EC7}"/>
+                <a16:creationId xmlns:a16="http://schemas.microsoft.com/office/drawing/2014/main" id="{CDE7E2CA-7438-5BCD-0EF3-10B76CE35FC1}"/>
               </a:ext>
             </a:extLst>
           </p:cNvPr>
@@ -9036,7 +9036,7 @@
           <p:cNvPr id="30" name="TextBox 29">
             <a:extLst>
               <a:ext uri="{FF2B5EF4-FFF2-40B4-BE49-F238E27FC236}">
-                <a16:creationId xmlns:a16="http://schemas.microsoft.com/office/drawing/2014/main" id="{2CF213D4-0A06-066A-26B6-CBC1B97C5FEA}"/>
+                <a16:creationId xmlns:a16="http://schemas.microsoft.com/office/drawing/2014/main" id="{7856E9B5-980E-6AF1-B9F5-B98D5E8C82CD}"/>
               </a:ext>
             </a:extLst>
           </p:cNvPr>
@@ -9079,7 +9079,7 @@
     </p:spTree>
     <p:extLst>
       <p:ext uri="{BB962C8B-B14F-4D97-AF65-F5344CB8AC3E}">
-        <p14:creationId xmlns:p14="http://schemas.microsoft.com/office/powerpoint/2010/main" val="3103614742"/>
+        <p14:creationId xmlns:p14="http://schemas.microsoft.com/office/powerpoint/2010/main" val="448977061"/>
       </p:ext>
     </p:extLst>
   </p:cSld>
@@ -9111,7 +9111,7 @@
           <p:cNvPr id="2" name="Прямоугольник 1">
             <a:extLst>
               <a:ext uri="{FF2B5EF4-FFF2-40B4-BE49-F238E27FC236}">
-                <a16:creationId xmlns:a16="http://schemas.microsoft.com/office/drawing/2014/main" id="{4717F411-D08D-29EB-783E-55EC7586675C}"/>
+                <a16:creationId xmlns:a16="http://schemas.microsoft.com/office/drawing/2014/main" id="{06B5344B-CA18-19C0-141F-0F332DC971B7}"/>
               </a:ext>
             </a:extLst>
           </p:cNvPr>
@@ -9179,7 +9179,7 @@
           <p:cNvPr id="3" name="Прямоугольник 2">
             <a:extLst>
               <a:ext uri="{FF2B5EF4-FFF2-40B4-BE49-F238E27FC236}">
-                <a16:creationId xmlns:a16="http://schemas.microsoft.com/office/drawing/2014/main" id="{8FCE11C7-D8A7-209D-9039-7CAA7594862D}"/>
+                <a16:creationId xmlns:a16="http://schemas.microsoft.com/office/drawing/2014/main" id="{D664768F-4499-724C-A6B0-1D418069B852}"/>
               </a:ext>
             </a:extLst>
           </p:cNvPr>
@@ -9247,7 +9247,7 @@
           <p:cNvPr id="4" name="TextBox 3">
             <a:extLst>
               <a:ext uri="{FF2B5EF4-FFF2-40B4-BE49-F238E27FC236}">
-                <a16:creationId xmlns:a16="http://schemas.microsoft.com/office/drawing/2014/main" id="{2EC3DCE0-D1C7-F107-5F08-CC343B852623}"/>
+                <a16:creationId xmlns:a16="http://schemas.microsoft.com/office/drawing/2014/main" id="{512562E7-2951-2271-CB6F-7BBE91E23097}"/>
               </a:ext>
             </a:extLst>
           </p:cNvPr>
@@ -9292,7 +9292,7 @@
           <p:cNvPr id="5" name="TextBox 4">
             <a:extLst>
               <a:ext uri="{FF2B5EF4-FFF2-40B4-BE49-F238E27FC236}">
-                <a16:creationId xmlns:a16="http://schemas.microsoft.com/office/drawing/2014/main" id="{47BB32E5-4D42-735E-A20D-C94482B77C94}"/>
+                <a16:creationId xmlns:a16="http://schemas.microsoft.com/office/drawing/2014/main" id="{55FF513D-F394-0931-802E-70A8D718492A}"/>
               </a:ext>
             </a:extLst>
           </p:cNvPr>
@@ -9337,7 +9337,7 @@
           <p:cNvPr id="6" name="Прямоугольник 5">
             <a:extLst>
               <a:ext uri="{FF2B5EF4-FFF2-40B4-BE49-F238E27FC236}">
-                <a16:creationId xmlns:a16="http://schemas.microsoft.com/office/drawing/2014/main" id="{21A4671B-DF35-6106-F852-F2A74B847395}"/>
+                <a16:creationId xmlns:a16="http://schemas.microsoft.com/office/drawing/2014/main" id="{3130A643-2471-39FA-634D-CB517DCD4C39}"/>
               </a:ext>
             </a:extLst>
           </p:cNvPr>
@@ -9405,7 +9405,7 @@
           <p:cNvPr id="7" name="Прямоугольник 6">
             <a:extLst>
               <a:ext uri="{FF2B5EF4-FFF2-40B4-BE49-F238E27FC236}">
-                <a16:creationId xmlns:a16="http://schemas.microsoft.com/office/drawing/2014/main" id="{97B07FD3-CF9D-6CFC-9050-44522E8936ED}"/>
+                <a16:creationId xmlns:a16="http://schemas.microsoft.com/office/drawing/2014/main" id="{CCEFB66B-16C4-C6BA-5DE0-857C59B0B05C}"/>
               </a:ext>
             </a:extLst>
           </p:cNvPr>
@@ -9473,7 +9473,7 @@
           <p:cNvPr id="8" name="TextBox 7">
             <a:extLst>
               <a:ext uri="{FF2B5EF4-FFF2-40B4-BE49-F238E27FC236}">
-                <a16:creationId xmlns:a16="http://schemas.microsoft.com/office/drawing/2014/main" id="{62F2FD16-D5D5-6E7D-9CA2-397E790BD80B}"/>
+                <a16:creationId xmlns:a16="http://schemas.microsoft.com/office/drawing/2014/main" id="{8415B989-4684-D720-EB6C-65C475AC6AD9}"/>
               </a:ext>
             </a:extLst>
           </p:cNvPr>
@@ -9518,7 +9518,7 @@
           <p:cNvPr id="9" name="TextBox 8">
             <a:extLst>
               <a:ext uri="{FF2B5EF4-FFF2-40B4-BE49-F238E27FC236}">
-                <a16:creationId xmlns:a16="http://schemas.microsoft.com/office/drawing/2014/main" id="{783B3659-A055-2EBC-4E45-2F17EB4A87B8}"/>
+                <a16:creationId xmlns:a16="http://schemas.microsoft.com/office/drawing/2014/main" id="{55ADC7B6-B624-5F45-9D92-597744A9618E}"/>
               </a:ext>
             </a:extLst>
           </p:cNvPr>
@@ -9563,7 +9563,7 @@
           <p:cNvPr id="10" name="TextBox 9">
             <a:extLst>
               <a:ext uri="{FF2B5EF4-FFF2-40B4-BE49-F238E27FC236}">
-                <a16:creationId xmlns:a16="http://schemas.microsoft.com/office/drawing/2014/main" id="{6FEC9BB9-31A7-1C19-EB88-8E9C6D49719B}"/>
+                <a16:creationId xmlns:a16="http://schemas.microsoft.com/office/drawing/2014/main" id="{6AC6160A-43F1-0153-FEEE-740649F3A76F}"/>
               </a:ext>
             </a:extLst>
           </p:cNvPr>
@@ -9608,7 +9608,7 @@
           <p:cNvPr id="11" name="TextBox 10">
             <a:extLst>
               <a:ext uri="{FF2B5EF4-FFF2-40B4-BE49-F238E27FC236}">
-                <a16:creationId xmlns:a16="http://schemas.microsoft.com/office/drawing/2014/main" id="{B9CE2E83-D7AB-4405-C353-DC916518F186}"/>
+                <a16:creationId xmlns:a16="http://schemas.microsoft.com/office/drawing/2014/main" id="{5AD090C0-150E-6F89-19AA-31BFABCCECD2}"/>
               </a:ext>
             </a:extLst>
           </p:cNvPr>
@@ -9653,7 +9653,7 @@
           <p:cNvPr id="12" name="Прямоугольник 11">
             <a:extLst>
               <a:ext uri="{FF2B5EF4-FFF2-40B4-BE49-F238E27FC236}">
-                <a16:creationId xmlns:a16="http://schemas.microsoft.com/office/drawing/2014/main" id="{11115EAA-756F-8180-E3CE-9D544859555D}"/>
+                <a16:creationId xmlns:a16="http://schemas.microsoft.com/office/drawing/2014/main" id="{6A7E7241-0294-C53A-8FA7-71287D149A54}"/>
               </a:ext>
             </a:extLst>
           </p:cNvPr>
@@ -9721,7 +9721,7 @@
           <p:cNvPr id="13" name="TextBox 12">
             <a:extLst>
               <a:ext uri="{FF2B5EF4-FFF2-40B4-BE49-F238E27FC236}">
-                <a16:creationId xmlns:a16="http://schemas.microsoft.com/office/drawing/2014/main" id="{A1124129-82CC-592B-4610-33CBE3BCC1CE}"/>
+                <a16:creationId xmlns:a16="http://schemas.microsoft.com/office/drawing/2014/main" id="{6C34FA13-9D89-5E97-A402-68C933FFF4EF}"/>
               </a:ext>
             </a:extLst>
           </p:cNvPr>
@@ -9772,7 +9772,7 @@
           <p:cNvPr id="14" name="TextBox 13">
             <a:extLst>
               <a:ext uri="{FF2B5EF4-FFF2-40B4-BE49-F238E27FC236}">
-                <a16:creationId xmlns:a16="http://schemas.microsoft.com/office/drawing/2014/main" id="{8BD0E98B-805B-7097-3FAA-72F81173137A}"/>
+                <a16:creationId xmlns:a16="http://schemas.microsoft.com/office/drawing/2014/main" id="{3D173EC6-ED41-4038-3D69-6D642D8959FD}"/>
               </a:ext>
             </a:extLst>
           </p:cNvPr>
@@ -9817,7 +9817,7 @@
           <p:cNvPr id="15" name="Прямоугольник 14">
             <a:extLst>
               <a:ext uri="{FF2B5EF4-FFF2-40B4-BE49-F238E27FC236}">
-                <a16:creationId xmlns:a16="http://schemas.microsoft.com/office/drawing/2014/main" id="{0C4EC327-DC20-44DC-C6B2-91937E2DC90D}"/>
+                <a16:creationId xmlns:a16="http://schemas.microsoft.com/office/drawing/2014/main" id="{039FB505-05FB-1696-F16E-5B2CDCFB5FF8}"/>
               </a:ext>
             </a:extLst>
           </p:cNvPr>
@@ -9885,7 +9885,7 @@
           <p:cNvPr id="16" name="TextBox 15">
             <a:extLst>
               <a:ext uri="{FF2B5EF4-FFF2-40B4-BE49-F238E27FC236}">
-                <a16:creationId xmlns:a16="http://schemas.microsoft.com/office/drawing/2014/main" id="{8F9572EB-A521-3ECF-40FE-F1AC691844A5}"/>
+                <a16:creationId xmlns:a16="http://schemas.microsoft.com/office/drawing/2014/main" id="{E7E3AFF4-1D07-904C-C6D0-BE8CFA328084}"/>
               </a:ext>
             </a:extLst>
           </p:cNvPr>
@@ -9936,7 +9936,7 @@
           <p:cNvPr id="17" name="TextBox 16">
             <a:extLst>
               <a:ext uri="{FF2B5EF4-FFF2-40B4-BE49-F238E27FC236}">
-                <a16:creationId xmlns:a16="http://schemas.microsoft.com/office/drawing/2014/main" id="{B058202E-C7A8-0ED6-CCDC-C33EB6BCCF0E}"/>
+                <a16:creationId xmlns:a16="http://schemas.microsoft.com/office/drawing/2014/main" id="{90158B92-0334-B222-4B40-4D03A6988168}"/>
               </a:ext>
             </a:extLst>
           </p:cNvPr>
@@ -9981,7 +9981,7 @@
           <p:cNvPr id="18" name="Прямоугольник 17">
             <a:extLst>
               <a:ext uri="{FF2B5EF4-FFF2-40B4-BE49-F238E27FC236}">
-                <a16:creationId xmlns:a16="http://schemas.microsoft.com/office/drawing/2014/main" id="{EC66DA9F-9B1D-DA98-0955-F8857EC283A3}"/>
+                <a16:creationId xmlns:a16="http://schemas.microsoft.com/office/drawing/2014/main" id="{4F7B5ECC-61A5-C618-98BE-6DC89FCC6D04}"/>
               </a:ext>
             </a:extLst>
           </p:cNvPr>
@@ -10049,7 +10049,7 @@
           <p:cNvPr id="19" name="TextBox 18">
             <a:extLst>
               <a:ext uri="{FF2B5EF4-FFF2-40B4-BE49-F238E27FC236}">
-                <a16:creationId xmlns:a16="http://schemas.microsoft.com/office/drawing/2014/main" id="{617B7C9A-389D-CE39-9C13-415FC97791BC}"/>
+                <a16:creationId xmlns:a16="http://schemas.microsoft.com/office/drawing/2014/main" id="{16080888-44B5-DB0B-751E-2EAA903BC3F1}"/>
               </a:ext>
             </a:extLst>
           </p:cNvPr>
@@ -10094,7 +10094,7 @@
           <p:cNvPr id="20" name="TextBox 19">
             <a:extLst>
               <a:ext uri="{FF2B5EF4-FFF2-40B4-BE49-F238E27FC236}">
-                <a16:creationId xmlns:a16="http://schemas.microsoft.com/office/drawing/2014/main" id="{89D27138-81F5-627E-B210-81CE9759B2F2}"/>
+                <a16:creationId xmlns:a16="http://schemas.microsoft.com/office/drawing/2014/main" id="{270E4205-C99F-A860-D698-E61466BFE87D}"/>
               </a:ext>
             </a:extLst>
           </p:cNvPr>
@@ -10139,7 +10139,7 @@
           <p:cNvPr id="21" name="Прямоугольник 20">
             <a:extLst>
               <a:ext uri="{FF2B5EF4-FFF2-40B4-BE49-F238E27FC236}">
-                <a16:creationId xmlns:a16="http://schemas.microsoft.com/office/drawing/2014/main" id="{AA48BB77-59E0-645B-AD36-4077454A8404}"/>
+                <a16:creationId xmlns:a16="http://schemas.microsoft.com/office/drawing/2014/main" id="{E74414C2-AC44-3100-8C4F-9E701173B5C3}"/>
               </a:ext>
             </a:extLst>
           </p:cNvPr>
@@ -10207,7 +10207,7 @@
           <p:cNvPr id="23" name="Рисунок 22">
             <a:extLst>
               <a:ext uri="{FF2B5EF4-FFF2-40B4-BE49-F238E27FC236}">
-                <a16:creationId xmlns:a16="http://schemas.microsoft.com/office/drawing/2014/main" id="{BD6EAC6D-1048-E741-B6C1-813417F52A4C}"/>
+                <a16:creationId xmlns:a16="http://schemas.microsoft.com/office/drawing/2014/main" id="{8584871D-5327-68E2-7939-CCCA0BDF0CB7}"/>
               </a:ext>
             </a:extLst>
           </p:cNvPr>
@@ -10241,7 +10241,7 @@
     </p:spTree>
     <p:extLst>
       <p:ext uri="{BB962C8B-B14F-4D97-AF65-F5344CB8AC3E}">
-        <p14:creationId xmlns:p14="http://schemas.microsoft.com/office/powerpoint/2010/main" val="3349513175"/>
+        <p14:creationId xmlns:p14="http://schemas.microsoft.com/office/powerpoint/2010/main" val="1076406451"/>
       </p:ext>
     </p:extLst>
   </p:cSld>
@@ -10273,7 +10273,7 @@
           <p:cNvPr id="2" name="Прямоугольник 1">
             <a:extLst>
               <a:ext uri="{FF2B5EF4-FFF2-40B4-BE49-F238E27FC236}">
-                <a16:creationId xmlns:a16="http://schemas.microsoft.com/office/drawing/2014/main" id="{90630635-BE37-DDB4-4C12-29EC2BD7C294}"/>
+                <a16:creationId xmlns:a16="http://schemas.microsoft.com/office/drawing/2014/main" id="{C3A0113D-2F19-96CA-2EB4-B18E0848FB11}"/>
               </a:ext>
             </a:extLst>
           </p:cNvPr>
@@ -10341,7 +10341,7 @@
           <p:cNvPr id="3" name="Прямоугольник 2">
             <a:extLst>
               <a:ext uri="{FF2B5EF4-FFF2-40B4-BE49-F238E27FC236}">
-                <a16:creationId xmlns:a16="http://schemas.microsoft.com/office/drawing/2014/main" id="{FD118315-F922-20C2-127F-8945A87D779D}"/>
+                <a16:creationId xmlns:a16="http://schemas.microsoft.com/office/drawing/2014/main" id="{BCF36C85-5835-CC40-D51B-6AD5D59B1384}"/>
               </a:ext>
             </a:extLst>
           </p:cNvPr>
@@ -10409,7 +10409,7 @@
           <p:cNvPr id="4" name="TextBox 3">
             <a:extLst>
               <a:ext uri="{FF2B5EF4-FFF2-40B4-BE49-F238E27FC236}">
-                <a16:creationId xmlns:a16="http://schemas.microsoft.com/office/drawing/2014/main" id="{E2E356F2-66F9-44EA-98D4-F7F0BFA980D2}"/>
+                <a16:creationId xmlns:a16="http://schemas.microsoft.com/office/drawing/2014/main" id="{7C17DBC4-A575-3F18-C82E-5532A7E6DC1E}"/>
               </a:ext>
             </a:extLst>
           </p:cNvPr>
@@ -10454,7 +10454,7 @@
           <p:cNvPr id="5" name="TextBox 4">
             <a:extLst>
               <a:ext uri="{FF2B5EF4-FFF2-40B4-BE49-F238E27FC236}">
-                <a16:creationId xmlns:a16="http://schemas.microsoft.com/office/drawing/2014/main" id="{F9A3C076-2E85-0027-A1E9-7AC53C61FE47}"/>
+                <a16:creationId xmlns:a16="http://schemas.microsoft.com/office/drawing/2014/main" id="{62E37B5D-7288-C211-4BFE-0E4E0F58B9D7}"/>
               </a:ext>
             </a:extLst>
           </p:cNvPr>
@@ -10499,7 +10499,7 @@
           <p:cNvPr id="6" name="Прямоугольник 5">
             <a:extLst>
               <a:ext uri="{FF2B5EF4-FFF2-40B4-BE49-F238E27FC236}">
-                <a16:creationId xmlns:a16="http://schemas.microsoft.com/office/drawing/2014/main" id="{B6CCEC57-B7E9-B73B-8B02-04AB5084352E}"/>
+                <a16:creationId xmlns:a16="http://schemas.microsoft.com/office/drawing/2014/main" id="{FDDABF55-D4DF-B839-EABA-7EEB887BA8C0}"/>
               </a:ext>
             </a:extLst>
           </p:cNvPr>
@@ -10567,7 +10567,7 @@
           <p:cNvPr id="7" name="Прямоугольник 6">
             <a:extLst>
               <a:ext uri="{FF2B5EF4-FFF2-40B4-BE49-F238E27FC236}">
-                <a16:creationId xmlns:a16="http://schemas.microsoft.com/office/drawing/2014/main" id="{0D276FD1-2A96-03F4-0AD3-1DCCF3C945F0}"/>
+                <a16:creationId xmlns:a16="http://schemas.microsoft.com/office/drawing/2014/main" id="{5EE18893-2BBF-7B22-3B36-F196812D10A9}"/>
               </a:ext>
             </a:extLst>
           </p:cNvPr>
@@ -10635,7 +10635,7 @@
           <p:cNvPr id="8" name="TextBox 7">
             <a:extLst>
               <a:ext uri="{FF2B5EF4-FFF2-40B4-BE49-F238E27FC236}">
-                <a16:creationId xmlns:a16="http://schemas.microsoft.com/office/drawing/2014/main" id="{944BCC63-9000-AC50-8344-F707FC9299A0}"/>
+                <a16:creationId xmlns:a16="http://schemas.microsoft.com/office/drawing/2014/main" id="{E6EBB202-13F7-26DB-D7DE-545142EA5037}"/>
               </a:ext>
             </a:extLst>
           </p:cNvPr>
@@ -10680,7 +10680,7 @@
           <p:cNvPr id="9" name="TextBox 8">
             <a:extLst>
               <a:ext uri="{FF2B5EF4-FFF2-40B4-BE49-F238E27FC236}">
-                <a16:creationId xmlns:a16="http://schemas.microsoft.com/office/drawing/2014/main" id="{3AEE19CA-928A-BCD4-E092-B89E3E08D22D}"/>
+                <a16:creationId xmlns:a16="http://schemas.microsoft.com/office/drawing/2014/main" id="{46352403-D54A-57DA-6E15-E0C72409E2D9}"/>
               </a:ext>
             </a:extLst>
           </p:cNvPr>
@@ -10725,7 +10725,7 @@
           <p:cNvPr id="10" name="Прямоугольник 9">
             <a:extLst>
               <a:ext uri="{FF2B5EF4-FFF2-40B4-BE49-F238E27FC236}">
-                <a16:creationId xmlns:a16="http://schemas.microsoft.com/office/drawing/2014/main" id="{81A27959-E4FC-8115-6E09-E06381A714A3}"/>
+                <a16:creationId xmlns:a16="http://schemas.microsoft.com/office/drawing/2014/main" id="{C4F74F39-E295-9A36-11CF-B0A6EBC59EE4}"/>
               </a:ext>
             </a:extLst>
           </p:cNvPr>
@@ -10793,7 +10793,7 @@
           <p:cNvPr id="11" name="TextBox 10">
             <a:extLst>
               <a:ext uri="{FF2B5EF4-FFF2-40B4-BE49-F238E27FC236}">
-                <a16:creationId xmlns:a16="http://schemas.microsoft.com/office/drawing/2014/main" id="{5B6BABBA-4E95-CAF2-554D-8508246EC45D}"/>
+                <a16:creationId xmlns:a16="http://schemas.microsoft.com/office/drawing/2014/main" id="{D67BF86A-82C7-034D-62DB-92953FA4869C}"/>
               </a:ext>
             </a:extLst>
           </p:cNvPr>
@@ -10838,7 +10838,7 @@
           <p:cNvPr id="12" name="TextBox 11">
             <a:extLst>
               <a:ext uri="{FF2B5EF4-FFF2-40B4-BE49-F238E27FC236}">
-                <a16:creationId xmlns:a16="http://schemas.microsoft.com/office/drawing/2014/main" id="{F9773854-CF73-59A3-6B4C-9F6A3DBE1F08}"/>
+                <a16:creationId xmlns:a16="http://schemas.microsoft.com/office/drawing/2014/main" id="{331D99EC-7EF8-BA0F-2B08-1B84A7F2A580}"/>
               </a:ext>
             </a:extLst>
           </p:cNvPr>
@@ -10883,7 +10883,7 @@
           <p:cNvPr id="13" name="TextBox 12">
             <a:extLst>
               <a:ext uri="{FF2B5EF4-FFF2-40B4-BE49-F238E27FC236}">
-                <a16:creationId xmlns:a16="http://schemas.microsoft.com/office/drawing/2014/main" id="{EBF5E3AC-0025-50C8-45E7-BCC936E2430A}"/>
+                <a16:creationId xmlns:a16="http://schemas.microsoft.com/office/drawing/2014/main" id="{CCCE7725-7E4F-C7E4-A2F6-CFD756B02D98}"/>
               </a:ext>
             </a:extLst>
           </p:cNvPr>
@@ -10928,7 +10928,7 @@
           <p:cNvPr id="14" name="Прямоугольник 13">
             <a:extLst>
               <a:ext uri="{FF2B5EF4-FFF2-40B4-BE49-F238E27FC236}">
-                <a16:creationId xmlns:a16="http://schemas.microsoft.com/office/drawing/2014/main" id="{4EBB9480-440B-4513-4D3B-D3607F6C7518}"/>
+                <a16:creationId xmlns:a16="http://schemas.microsoft.com/office/drawing/2014/main" id="{D25E2EEF-8CA6-0D05-C1EB-E8E728B4645D}"/>
               </a:ext>
             </a:extLst>
           </p:cNvPr>
@@ -10996,7 +10996,7 @@
           <p:cNvPr id="15" name="TextBox 14">
             <a:extLst>
               <a:ext uri="{FF2B5EF4-FFF2-40B4-BE49-F238E27FC236}">
-                <a16:creationId xmlns:a16="http://schemas.microsoft.com/office/drawing/2014/main" id="{389142CB-C556-3750-3126-B3920BDE1CCA}"/>
+                <a16:creationId xmlns:a16="http://schemas.microsoft.com/office/drawing/2014/main" id="{35066173-2B79-892F-9484-AFF2AAE701B5}"/>
               </a:ext>
             </a:extLst>
           </p:cNvPr>
@@ -11041,7 +11041,7 @@
           <p:cNvPr id="16" name="TextBox 15">
             <a:extLst>
               <a:ext uri="{FF2B5EF4-FFF2-40B4-BE49-F238E27FC236}">
-                <a16:creationId xmlns:a16="http://schemas.microsoft.com/office/drawing/2014/main" id="{CB2AA8FA-FAEF-3076-1A25-40EE6ED9B1DC}"/>
+                <a16:creationId xmlns:a16="http://schemas.microsoft.com/office/drawing/2014/main" id="{70C31014-9443-BCE2-60A8-8182EC1BB020}"/>
               </a:ext>
             </a:extLst>
           </p:cNvPr>
@@ -11086,7 +11086,7 @@
           <p:cNvPr id="17" name="Прямоугольник 16">
             <a:extLst>
               <a:ext uri="{FF2B5EF4-FFF2-40B4-BE49-F238E27FC236}">
-                <a16:creationId xmlns:a16="http://schemas.microsoft.com/office/drawing/2014/main" id="{DA598A85-D29A-F32F-B404-9BD616BB2148}"/>
+                <a16:creationId xmlns:a16="http://schemas.microsoft.com/office/drawing/2014/main" id="{A3967B5D-08B7-05E0-6135-EDD4EF40AF13}"/>
               </a:ext>
             </a:extLst>
           </p:cNvPr>
@@ -11154,7 +11154,7 @@
           <p:cNvPr id="18" name="TextBox 17">
             <a:extLst>
               <a:ext uri="{FF2B5EF4-FFF2-40B4-BE49-F238E27FC236}">
-                <a16:creationId xmlns:a16="http://schemas.microsoft.com/office/drawing/2014/main" id="{7F1985BC-03CC-C018-0D3E-F32E0D585676}"/>
+                <a16:creationId xmlns:a16="http://schemas.microsoft.com/office/drawing/2014/main" id="{27E34C81-2DDF-21A9-A01C-433B7B93FB26}"/>
               </a:ext>
             </a:extLst>
           </p:cNvPr>
@@ -11199,7 +11199,7 @@
           <p:cNvPr id="19" name="TextBox 18">
             <a:extLst>
               <a:ext uri="{FF2B5EF4-FFF2-40B4-BE49-F238E27FC236}">
-                <a16:creationId xmlns:a16="http://schemas.microsoft.com/office/drawing/2014/main" id="{72DA87A5-30E0-AB39-98C6-FB3F660E1389}"/>
+                <a16:creationId xmlns:a16="http://schemas.microsoft.com/office/drawing/2014/main" id="{AFCD722F-A4CF-586D-72C6-3009036E07B9}"/>
               </a:ext>
             </a:extLst>
           </p:cNvPr>
@@ -11244,7 +11244,7 @@
           <p:cNvPr id="20" name="TextBox 19">
             <a:extLst>
               <a:ext uri="{FF2B5EF4-FFF2-40B4-BE49-F238E27FC236}">
-                <a16:creationId xmlns:a16="http://schemas.microsoft.com/office/drawing/2014/main" id="{BD1776CE-D6C4-3994-D304-38DDDAB82351}"/>
+                <a16:creationId xmlns:a16="http://schemas.microsoft.com/office/drawing/2014/main" id="{5B547BDB-9AA5-051F-4465-3A3CAE4CE2BA}"/>
               </a:ext>
             </a:extLst>
           </p:cNvPr>
@@ -11289,7 +11289,7 @@
           <p:cNvPr id="21" name="Прямоугольник 20">
             <a:extLst>
               <a:ext uri="{FF2B5EF4-FFF2-40B4-BE49-F238E27FC236}">
-                <a16:creationId xmlns:a16="http://schemas.microsoft.com/office/drawing/2014/main" id="{E1585C29-EECB-2F2F-338E-6A868B95BD1B}"/>
+                <a16:creationId xmlns:a16="http://schemas.microsoft.com/office/drawing/2014/main" id="{B21D4A41-A224-AB4D-796E-8B276AE27C50}"/>
               </a:ext>
             </a:extLst>
           </p:cNvPr>
@@ -11357,7 +11357,7 @@
           <p:cNvPr id="22" name="TextBox 21">
             <a:extLst>
               <a:ext uri="{FF2B5EF4-FFF2-40B4-BE49-F238E27FC236}">
-                <a16:creationId xmlns:a16="http://schemas.microsoft.com/office/drawing/2014/main" id="{808495F1-9342-9E5F-0A19-FEF98158EC42}"/>
+                <a16:creationId xmlns:a16="http://schemas.microsoft.com/office/drawing/2014/main" id="{8C38595F-5B10-7D8A-A7F6-7D49708E0E17}"/>
               </a:ext>
             </a:extLst>
           </p:cNvPr>
@@ -11402,7 +11402,7 @@
           <p:cNvPr id="23" name="TextBox 22">
             <a:extLst>
               <a:ext uri="{FF2B5EF4-FFF2-40B4-BE49-F238E27FC236}">
-                <a16:creationId xmlns:a16="http://schemas.microsoft.com/office/drawing/2014/main" id="{4C5B78D5-88D2-6ABD-DC41-196D1BA6EB5D}"/>
+                <a16:creationId xmlns:a16="http://schemas.microsoft.com/office/drawing/2014/main" id="{ABEC9A48-7CB9-8340-CF16-97B889E63F10}"/>
               </a:ext>
             </a:extLst>
           </p:cNvPr>
@@ -11447,7 +11447,7 @@
           <p:cNvPr id="24" name="Прямоугольник 23">
             <a:extLst>
               <a:ext uri="{FF2B5EF4-FFF2-40B4-BE49-F238E27FC236}">
-                <a16:creationId xmlns:a16="http://schemas.microsoft.com/office/drawing/2014/main" id="{92AEF174-68B4-6B81-43EF-53F46724B0A0}"/>
+                <a16:creationId xmlns:a16="http://schemas.microsoft.com/office/drawing/2014/main" id="{979E3CDF-9D96-35F3-56A9-904EFDA13E0B}"/>
               </a:ext>
             </a:extLst>
           </p:cNvPr>
@@ -11515,7 +11515,7 @@
           <p:cNvPr id="25" name="TextBox 24">
             <a:extLst>
               <a:ext uri="{FF2B5EF4-FFF2-40B4-BE49-F238E27FC236}">
-                <a16:creationId xmlns:a16="http://schemas.microsoft.com/office/drawing/2014/main" id="{FE30243B-53DC-236A-A377-FDDEB57E385F}"/>
+                <a16:creationId xmlns:a16="http://schemas.microsoft.com/office/drawing/2014/main" id="{843705E7-1BEE-9B59-3223-1776830C33EC}"/>
               </a:ext>
             </a:extLst>
           </p:cNvPr>
@@ -11560,7 +11560,7 @@
           <p:cNvPr id="26" name="TextBox 25">
             <a:extLst>
               <a:ext uri="{FF2B5EF4-FFF2-40B4-BE49-F238E27FC236}">
-                <a16:creationId xmlns:a16="http://schemas.microsoft.com/office/drawing/2014/main" id="{E20D148D-7E67-45EA-4CA8-D9FE6825980F}"/>
+                <a16:creationId xmlns:a16="http://schemas.microsoft.com/office/drawing/2014/main" id="{E340F8DE-EC40-819F-8713-AA0DF9846621}"/>
               </a:ext>
             </a:extLst>
           </p:cNvPr>
@@ -11605,7 +11605,7 @@
           <p:cNvPr id="27" name="TextBox 26">
             <a:extLst>
               <a:ext uri="{FF2B5EF4-FFF2-40B4-BE49-F238E27FC236}">
-                <a16:creationId xmlns:a16="http://schemas.microsoft.com/office/drawing/2014/main" id="{3203F45F-B508-2C1B-8ED0-2860DC6541DE}"/>
+                <a16:creationId xmlns:a16="http://schemas.microsoft.com/office/drawing/2014/main" id="{AB8F7379-B59D-ECCF-3F6F-A2974AE0CD71}"/>
               </a:ext>
             </a:extLst>
           </p:cNvPr>
@@ -11650,7 +11650,7 @@
           <p:cNvPr id="28" name="Прямоугольник 27">
             <a:extLst>
               <a:ext uri="{FF2B5EF4-FFF2-40B4-BE49-F238E27FC236}">
-                <a16:creationId xmlns:a16="http://schemas.microsoft.com/office/drawing/2014/main" id="{A5CFCEB1-EA2C-4BC3-6496-4F7E189C446B}"/>
+                <a16:creationId xmlns:a16="http://schemas.microsoft.com/office/drawing/2014/main" id="{BAF7DF5C-A154-6D50-CEE0-D529795B263C}"/>
               </a:ext>
             </a:extLst>
           </p:cNvPr>
@@ -11718,7 +11718,7 @@
           <p:cNvPr id="29" name="TextBox 28">
             <a:extLst>
               <a:ext uri="{FF2B5EF4-FFF2-40B4-BE49-F238E27FC236}">
-                <a16:creationId xmlns:a16="http://schemas.microsoft.com/office/drawing/2014/main" id="{EF50A089-302A-F8D4-8ED9-8B51568CC1BA}"/>
+                <a16:creationId xmlns:a16="http://schemas.microsoft.com/office/drawing/2014/main" id="{D5DCB082-D08C-096D-D74A-E5294E45BA16}"/>
               </a:ext>
             </a:extLst>
           </p:cNvPr>
@@ -11763,7 +11763,7 @@
           <p:cNvPr id="30" name="TextBox 29">
             <a:extLst>
               <a:ext uri="{FF2B5EF4-FFF2-40B4-BE49-F238E27FC236}">
-                <a16:creationId xmlns:a16="http://schemas.microsoft.com/office/drawing/2014/main" id="{A435E100-1585-38CF-5FA1-E9734EAC4FE9}"/>
+                <a16:creationId xmlns:a16="http://schemas.microsoft.com/office/drawing/2014/main" id="{10A4EDAC-4EF0-2CF6-B019-224686C1FC28}"/>
               </a:ext>
             </a:extLst>
           </p:cNvPr>
@@ -11808,7 +11808,7 @@
           <p:cNvPr id="31" name="TextBox 30">
             <a:extLst>
               <a:ext uri="{FF2B5EF4-FFF2-40B4-BE49-F238E27FC236}">
-                <a16:creationId xmlns:a16="http://schemas.microsoft.com/office/drawing/2014/main" id="{633552C0-D7F2-E4D1-7D9A-EA8427288318}"/>
+                <a16:creationId xmlns:a16="http://schemas.microsoft.com/office/drawing/2014/main" id="{053ABAE6-4A11-29F2-73E6-BB7F6DC945FE}"/>
               </a:ext>
             </a:extLst>
           </p:cNvPr>
@@ -11851,7 +11851,7 @@
     </p:spTree>
     <p:extLst>
       <p:ext uri="{BB962C8B-B14F-4D97-AF65-F5344CB8AC3E}">
-        <p14:creationId xmlns:p14="http://schemas.microsoft.com/office/powerpoint/2010/main" val="616152821"/>
+        <p14:creationId xmlns:p14="http://schemas.microsoft.com/office/powerpoint/2010/main" val="1432004457"/>
       </p:ext>
     </p:extLst>
   </p:cSld>
@@ -11883,7 +11883,7 @@
           <p:cNvPr id="2" name="Прямоугольник 1">
             <a:extLst>
               <a:ext uri="{FF2B5EF4-FFF2-40B4-BE49-F238E27FC236}">
-                <a16:creationId xmlns:a16="http://schemas.microsoft.com/office/drawing/2014/main" id="{B5AEECF5-B5D6-15E1-7EE2-E1671BE396F8}"/>
+                <a16:creationId xmlns:a16="http://schemas.microsoft.com/office/drawing/2014/main" id="{59A09953-ECF2-C13E-9C61-33CFF5104E0D}"/>
               </a:ext>
             </a:extLst>
           </p:cNvPr>
@@ -11951,7 +11951,7 @@
           <p:cNvPr id="3" name="Прямоугольник 2">
             <a:extLst>
               <a:ext uri="{FF2B5EF4-FFF2-40B4-BE49-F238E27FC236}">
-                <a16:creationId xmlns:a16="http://schemas.microsoft.com/office/drawing/2014/main" id="{B04035DA-DB75-2007-FFC9-C5C2F5ADF712}"/>
+                <a16:creationId xmlns:a16="http://schemas.microsoft.com/office/drawing/2014/main" id="{A402B98A-B226-383D-4868-BE21A1EA15AE}"/>
               </a:ext>
             </a:extLst>
           </p:cNvPr>
@@ -12019,7 +12019,7 @@
           <p:cNvPr id="4" name="TextBox 3">
             <a:extLst>
               <a:ext uri="{FF2B5EF4-FFF2-40B4-BE49-F238E27FC236}">
-                <a16:creationId xmlns:a16="http://schemas.microsoft.com/office/drawing/2014/main" id="{CD207AEF-6447-9669-A011-6A54A8C5B45A}"/>
+                <a16:creationId xmlns:a16="http://schemas.microsoft.com/office/drawing/2014/main" id="{85E6FC17-BEBE-6517-BD6F-B4C15CD2F02B}"/>
               </a:ext>
             </a:extLst>
           </p:cNvPr>
@@ -12064,7 +12064,7 @@
           <p:cNvPr id="5" name="TextBox 4">
             <a:extLst>
               <a:ext uri="{FF2B5EF4-FFF2-40B4-BE49-F238E27FC236}">
-                <a16:creationId xmlns:a16="http://schemas.microsoft.com/office/drawing/2014/main" id="{57B3893F-DE4D-5BA4-9A7E-1EBB128A13AE}"/>
+                <a16:creationId xmlns:a16="http://schemas.microsoft.com/office/drawing/2014/main" id="{3746BD75-4E6C-B67D-91DC-C10BF5416645}"/>
               </a:ext>
             </a:extLst>
           </p:cNvPr>
@@ -12109,7 +12109,7 @@
           <p:cNvPr id="6" name="Прямоугольник 5">
             <a:extLst>
               <a:ext uri="{FF2B5EF4-FFF2-40B4-BE49-F238E27FC236}">
-                <a16:creationId xmlns:a16="http://schemas.microsoft.com/office/drawing/2014/main" id="{FD1F14E5-A7DD-E7C1-E46E-CF1D863D4782}"/>
+                <a16:creationId xmlns:a16="http://schemas.microsoft.com/office/drawing/2014/main" id="{ACDCD313-C51B-143B-83FF-E53C83EE311D}"/>
               </a:ext>
             </a:extLst>
           </p:cNvPr>
@@ -12177,7 +12177,7 @@
           <p:cNvPr id="7" name="Прямоугольник 6">
             <a:extLst>
               <a:ext uri="{FF2B5EF4-FFF2-40B4-BE49-F238E27FC236}">
-                <a16:creationId xmlns:a16="http://schemas.microsoft.com/office/drawing/2014/main" id="{FA0B7846-19BF-BEE2-03C0-5A3F9D03B013}"/>
+                <a16:creationId xmlns:a16="http://schemas.microsoft.com/office/drawing/2014/main" id="{A9BBB4BF-A9DB-755A-1BC0-339460103048}"/>
               </a:ext>
             </a:extLst>
           </p:cNvPr>
@@ -12245,7 +12245,7 @@
           <p:cNvPr id="8" name="TextBox 7">
             <a:extLst>
               <a:ext uri="{FF2B5EF4-FFF2-40B4-BE49-F238E27FC236}">
-                <a16:creationId xmlns:a16="http://schemas.microsoft.com/office/drawing/2014/main" id="{6A51BA51-41C0-AF8A-C683-3DAED457EF68}"/>
+                <a16:creationId xmlns:a16="http://schemas.microsoft.com/office/drawing/2014/main" id="{3A4679B0-03C5-8C42-2B58-99B89AA8AEDC}"/>
               </a:ext>
             </a:extLst>
           </p:cNvPr>
@@ -12290,7 +12290,7 @@
           <p:cNvPr id="9" name="TextBox 8">
             <a:extLst>
               <a:ext uri="{FF2B5EF4-FFF2-40B4-BE49-F238E27FC236}">
-                <a16:creationId xmlns:a16="http://schemas.microsoft.com/office/drawing/2014/main" id="{60D1B763-5C6D-A386-34F5-4394593D87F5}"/>
+                <a16:creationId xmlns:a16="http://schemas.microsoft.com/office/drawing/2014/main" id="{39B3F8E9-B959-BB59-9AD1-5DF159A757CD}"/>
               </a:ext>
             </a:extLst>
           </p:cNvPr>
@@ -12335,7 +12335,7 @@
           <p:cNvPr id="10" name="TextBox 9">
             <a:extLst>
               <a:ext uri="{FF2B5EF4-FFF2-40B4-BE49-F238E27FC236}">
-                <a16:creationId xmlns:a16="http://schemas.microsoft.com/office/drawing/2014/main" id="{15E61BF2-78BD-5452-E643-07CBB6CF9EF7}"/>
+                <a16:creationId xmlns:a16="http://schemas.microsoft.com/office/drawing/2014/main" id="{9F5DDB12-6EBE-7274-30FF-BA40B0A643BE}"/>
               </a:ext>
             </a:extLst>
           </p:cNvPr>
@@ -12386,7 +12386,7 @@
           <p:cNvPr id="11" name="TextBox 10">
             <a:extLst>
               <a:ext uri="{FF2B5EF4-FFF2-40B4-BE49-F238E27FC236}">
-                <a16:creationId xmlns:a16="http://schemas.microsoft.com/office/drawing/2014/main" id="{64CC878F-3AAB-76B4-C9B4-0B33C101BB72}"/>
+                <a16:creationId xmlns:a16="http://schemas.microsoft.com/office/drawing/2014/main" id="{A93F7580-EAF9-0F17-A4B4-3E3EF515468A}"/>
               </a:ext>
             </a:extLst>
           </p:cNvPr>
@@ -12431,7 +12431,7 @@
           <p:cNvPr id="12" name="Прямоугольник 11">
             <a:extLst>
               <a:ext uri="{FF2B5EF4-FFF2-40B4-BE49-F238E27FC236}">
-                <a16:creationId xmlns:a16="http://schemas.microsoft.com/office/drawing/2014/main" id="{F0AAAA20-7DAE-EB12-2B6E-FF2B312CF7A3}"/>
+                <a16:creationId xmlns:a16="http://schemas.microsoft.com/office/drawing/2014/main" id="{DB25714D-F2C3-185F-A1FB-82603225C4FC}"/>
               </a:ext>
             </a:extLst>
           </p:cNvPr>
@@ -12499,7 +12499,7 @@
           <p:cNvPr id="13" name="TextBox 12">
             <a:extLst>
               <a:ext uri="{FF2B5EF4-FFF2-40B4-BE49-F238E27FC236}">
-                <a16:creationId xmlns:a16="http://schemas.microsoft.com/office/drawing/2014/main" id="{754278B3-4DE1-F0AF-8E41-8CDC285A959D}"/>
+                <a16:creationId xmlns:a16="http://schemas.microsoft.com/office/drawing/2014/main" id="{0BE761C2-1EAF-51DC-3AAE-903BCE61235E}"/>
               </a:ext>
             </a:extLst>
           </p:cNvPr>
@@ -12550,7 +12550,7 @@
           <p:cNvPr id="14" name="TextBox 13">
             <a:extLst>
               <a:ext uri="{FF2B5EF4-FFF2-40B4-BE49-F238E27FC236}">
-                <a16:creationId xmlns:a16="http://schemas.microsoft.com/office/drawing/2014/main" id="{410924CF-917C-A7FF-B7B7-42D5775854F5}"/>
+                <a16:creationId xmlns:a16="http://schemas.microsoft.com/office/drawing/2014/main" id="{01B91D9E-DCB1-E350-17AE-0A22C4418BCE}"/>
               </a:ext>
             </a:extLst>
           </p:cNvPr>
@@ -12595,7 +12595,7 @@
           <p:cNvPr id="15" name="Прямоугольник 14">
             <a:extLst>
               <a:ext uri="{FF2B5EF4-FFF2-40B4-BE49-F238E27FC236}">
-                <a16:creationId xmlns:a16="http://schemas.microsoft.com/office/drawing/2014/main" id="{5E6C128D-DFC8-E80F-EDFD-0AC88E571DB0}"/>
+                <a16:creationId xmlns:a16="http://schemas.microsoft.com/office/drawing/2014/main" id="{105DE027-B239-1F39-7C4A-50F15B4C1FDE}"/>
               </a:ext>
             </a:extLst>
           </p:cNvPr>
@@ -12663,7 +12663,7 @@
           <p:cNvPr id="16" name="TextBox 15">
             <a:extLst>
               <a:ext uri="{FF2B5EF4-FFF2-40B4-BE49-F238E27FC236}">
-                <a16:creationId xmlns:a16="http://schemas.microsoft.com/office/drawing/2014/main" id="{E6BFB302-5F47-F252-CA4F-819093297C7C}"/>
+                <a16:creationId xmlns:a16="http://schemas.microsoft.com/office/drawing/2014/main" id="{5BEE9B75-84D5-02B2-F9C1-A5EEF2071079}"/>
               </a:ext>
             </a:extLst>
           </p:cNvPr>
@@ -12714,7 +12714,7 @@
           <p:cNvPr id="17" name="TextBox 16">
             <a:extLst>
               <a:ext uri="{FF2B5EF4-FFF2-40B4-BE49-F238E27FC236}">
-                <a16:creationId xmlns:a16="http://schemas.microsoft.com/office/drawing/2014/main" id="{94211A5E-233B-8C81-B8BB-D7E6191C2156}"/>
+                <a16:creationId xmlns:a16="http://schemas.microsoft.com/office/drawing/2014/main" id="{92357370-76C2-5F81-5F67-204E522D0F9C}"/>
               </a:ext>
             </a:extLst>
           </p:cNvPr>
@@ -12759,7 +12759,7 @@
           <p:cNvPr id="18" name="Прямоугольник 17">
             <a:extLst>
               <a:ext uri="{FF2B5EF4-FFF2-40B4-BE49-F238E27FC236}">
-                <a16:creationId xmlns:a16="http://schemas.microsoft.com/office/drawing/2014/main" id="{F7403551-F77C-D38F-F70C-8022D9F358C2}"/>
+                <a16:creationId xmlns:a16="http://schemas.microsoft.com/office/drawing/2014/main" id="{17988609-6440-E5CA-5766-65AF6AA4AB95}"/>
               </a:ext>
             </a:extLst>
           </p:cNvPr>
@@ -12827,7 +12827,7 @@
           <p:cNvPr id="19" name="TextBox 18">
             <a:extLst>
               <a:ext uri="{FF2B5EF4-FFF2-40B4-BE49-F238E27FC236}">
-                <a16:creationId xmlns:a16="http://schemas.microsoft.com/office/drawing/2014/main" id="{377B4F71-04F4-7BF5-481F-CD6615240921}"/>
+                <a16:creationId xmlns:a16="http://schemas.microsoft.com/office/drawing/2014/main" id="{EA6F8FCC-26E0-D9EC-C775-A9880B031841}"/>
               </a:ext>
             </a:extLst>
           </p:cNvPr>
@@ -12878,7 +12878,7 @@
           <p:cNvPr id="20" name="TextBox 19">
             <a:extLst>
               <a:ext uri="{FF2B5EF4-FFF2-40B4-BE49-F238E27FC236}">
-                <a16:creationId xmlns:a16="http://schemas.microsoft.com/office/drawing/2014/main" id="{E30A98CF-4269-7B48-B7ED-838D42025CC6}"/>
+                <a16:creationId xmlns:a16="http://schemas.microsoft.com/office/drawing/2014/main" id="{CF86ED10-FF1D-9C72-89F4-73FD6622F67D}"/>
               </a:ext>
             </a:extLst>
           </p:cNvPr>
@@ -12923,7 +12923,7 @@
           <p:cNvPr id="21" name="Прямоугольник 20">
             <a:extLst>
               <a:ext uri="{FF2B5EF4-FFF2-40B4-BE49-F238E27FC236}">
-                <a16:creationId xmlns:a16="http://schemas.microsoft.com/office/drawing/2014/main" id="{1FD2D134-DAE6-A9F2-F4DA-50F61544F2C7}"/>
+                <a16:creationId xmlns:a16="http://schemas.microsoft.com/office/drawing/2014/main" id="{343E37ED-5DCF-D0CB-CBE5-229F07D0A11D}"/>
               </a:ext>
             </a:extLst>
           </p:cNvPr>
@@ -12991,7 +12991,7 @@
           <p:cNvPr id="22" name="TextBox 21">
             <a:extLst>
               <a:ext uri="{FF2B5EF4-FFF2-40B4-BE49-F238E27FC236}">
-                <a16:creationId xmlns:a16="http://schemas.microsoft.com/office/drawing/2014/main" id="{CF57CF69-1EC2-A261-AF33-A76C92AEC340}"/>
+                <a16:creationId xmlns:a16="http://schemas.microsoft.com/office/drawing/2014/main" id="{A234E1D9-E4EC-C857-EA05-363DC06F9855}"/>
               </a:ext>
             </a:extLst>
           </p:cNvPr>
@@ -13042,7 +13042,7 @@
           <p:cNvPr id="23" name="TextBox 22">
             <a:extLst>
               <a:ext uri="{FF2B5EF4-FFF2-40B4-BE49-F238E27FC236}">
-                <a16:creationId xmlns:a16="http://schemas.microsoft.com/office/drawing/2014/main" id="{7FD8887C-601C-A204-9C25-AABECE73D3AD}"/>
+                <a16:creationId xmlns:a16="http://schemas.microsoft.com/office/drawing/2014/main" id="{58F64257-7813-D4F7-D12D-17D99C953F0D}"/>
               </a:ext>
             </a:extLst>
           </p:cNvPr>
@@ -13087,7 +13087,7 @@
           <p:cNvPr id="24" name="Прямоугольник 23">
             <a:extLst>
               <a:ext uri="{FF2B5EF4-FFF2-40B4-BE49-F238E27FC236}">
-                <a16:creationId xmlns:a16="http://schemas.microsoft.com/office/drawing/2014/main" id="{F57D91E9-9A35-3032-B94C-6C6F941AB5CB}"/>
+                <a16:creationId xmlns:a16="http://schemas.microsoft.com/office/drawing/2014/main" id="{72BA7C4C-E33F-7311-DB1E-901A2733AD26}"/>
               </a:ext>
             </a:extLst>
           </p:cNvPr>
@@ -13155,7 +13155,7 @@
           <p:cNvPr id="25" name="TextBox 24">
             <a:extLst>
               <a:ext uri="{FF2B5EF4-FFF2-40B4-BE49-F238E27FC236}">
-                <a16:creationId xmlns:a16="http://schemas.microsoft.com/office/drawing/2014/main" id="{B6517071-EB94-806B-9262-4FD7C4645F67}"/>
+                <a16:creationId xmlns:a16="http://schemas.microsoft.com/office/drawing/2014/main" id="{E1A8F9BB-CC51-5D80-D660-C4E0EDF1D929}"/>
               </a:ext>
             </a:extLst>
           </p:cNvPr>
@@ -13206,7 +13206,7 @@
           <p:cNvPr id="26" name="TextBox 25">
             <a:extLst>
               <a:ext uri="{FF2B5EF4-FFF2-40B4-BE49-F238E27FC236}">
-                <a16:creationId xmlns:a16="http://schemas.microsoft.com/office/drawing/2014/main" id="{0980FF1F-7CE9-15EA-EBD5-79EAF85C9ADB}"/>
+                <a16:creationId xmlns:a16="http://schemas.microsoft.com/office/drawing/2014/main" id="{F9691D18-8EE0-405F-58DA-BAF2AE7126AE}"/>
               </a:ext>
             </a:extLst>
           </p:cNvPr>
@@ -13251,7 +13251,7 @@
           <p:cNvPr id="27" name="Прямоугольник 26">
             <a:extLst>
               <a:ext uri="{FF2B5EF4-FFF2-40B4-BE49-F238E27FC236}">
-                <a16:creationId xmlns:a16="http://schemas.microsoft.com/office/drawing/2014/main" id="{40BCF6AF-D9D2-2310-4F42-42D3B5153C2F}"/>
+                <a16:creationId xmlns:a16="http://schemas.microsoft.com/office/drawing/2014/main" id="{9BFD8CA8-7DB2-2AF3-7398-E44DE7473294}"/>
               </a:ext>
             </a:extLst>
           </p:cNvPr>
@@ -13319,7 +13319,7 @@
           <p:cNvPr id="28" name="TextBox 27">
             <a:extLst>
               <a:ext uri="{FF2B5EF4-FFF2-40B4-BE49-F238E27FC236}">
-                <a16:creationId xmlns:a16="http://schemas.microsoft.com/office/drawing/2014/main" id="{1FBB9AFF-3D1C-DB67-6FDA-1C28C546B591}"/>
+                <a16:creationId xmlns:a16="http://schemas.microsoft.com/office/drawing/2014/main" id="{6F8B3DF7-A2AB-9AD5-5FD1-B1E2478CB235}"/>
               </a:ext>
             </a:extLst>
           </p:cNvPr>
@@ -13362,7 +13362,7 @@
     </p:spTree>
     <p:extLst>
       <p:ext uri="{BB962C8B-B14F-4D97-AF65-F5344CB8AC3E}">
-        <p14:creationId xmlns:p14="http://schemas.microsoft.com/office/powerpoint/2010/main" val="96609051"/>
+        <p14:creationId xmlns:p14="http://schemas.microsoft.com/office/powerpoint/2010/main" val="548749578"/>
       </p:ext>
     </p:extLst>
   </p:cSld>
@@ -13394,7 +13394,7 @@
           <p:cNvPr id="2" name="Прямоугольник 1">
             <a:extLst>
               <a:ext uri="{FF2B5EF4-FFF2-40B4-BE49-F238E27FC236}">
-                <a16:creationId xmlns:a16="http://schemas.microsoft.com/office/drawing/2014/main" id="{E43344A7-2857-D493-169C-26885BAFCB91}"/>
+                <a16:creationId xmlns:a16="http://schemas.microsoft.com/office/drawing/2014/main" id="{F9233DFD-FCF5-0938-7AC6-2B6039782603}"/>
               </a:ext>
             </a:extLst>
           </p:cNvPr>
@@ -13462,7 +13462,7 @@
           <p:cNvPr id="3" name="Прямоугольник 2">
             <a:extLst>
               <a:ext uri="{FF2B5EF4-FFF2-40B4-BE49-F238E27FC236}">
-                <a16:creationId xmlns:a16="http://schemas.microsoft.com/office/drawing/2014/main" id="{6D227D30-B932-6394-2AB4-ED57BB12E7DC}"/>
+                <a16:creationId xmlns:a16="http://schemas.microsoft.com/office/drawing/2014/main" id="{CBA6CC8C-383C-5E8E-23F8-EEACB8F082B4}"/>
               </a:ext>
             </a:extLst>
           </p:cNvPr>
@@ -13530,7 +13530,7 @@
           <p:cNvPr id="4" name="TextBox 3">
             <a:extLst>
               <a:ext uri="{FF2B5EF4-FFF2-40B4-BE49-F238E27FC236}">
-                <a16:creationId xmlns:a16="http://schemas.microsoft.com/office/drawing/2014/main" id="{EB967BCF-65BC-3713-E223-0D476C63D422}"/>
+                <a16:creationId xmlns:a16="http://schemas.microsoft.com/office/drawing/2014/main" id="{86640ECD-63FA-A6C1-CF32-795EFC54A528}"/>
               </a:ext>
             </a:extLst>
           </p:cNvPr>
@@ -13575,7 +13575,7 @@
           <p:cNvPr id="5" name="TextBox 4">
             <a:extLst>
               <a:ext uri="{FF2B5EF4-FFF2-40B4-BE49-F238E27FC236}">
-                <a16:creationId xmlns:a16="http://schemas.microsoft.com/office/drawing/2014/main" id="{7C10E963-D916-D65C-82F5-7DDA6C63CC16}"/>
+                <a16:creationId xmlns:a16="http://schemas.microsoft.com/office/drawing/2014/main" id="{3DA47AF7-CC26-7957-A448-5F4793EEDF4B}"/>
               </a:ext>
             </a:extLst>
           </p:cNvPr>
@@ -13620,7 +13620,7 @@
           <p:cNvPr id="6" name="Прямоугольник 5">
             <a:extLst>
               <a:ext uri="{FF2B5EF4-FFF2-40B4-BE49-F238E27FC236}">
-                <a16:creationId xmlns:a16="http://schemas.microsoft.com/office/drawing/2014/main" id="{50E0E3E3-1436-9E1F-0D6B-2FFD2241C633}"/>
+                <a16:creationId xmlns:a16="http://schemas.microsoft.com/office/drawing/2014/main" id="{4A87DEAF-87C0-D4BC-2CFC-E8606D5DE0FB}"/>
               </a:ext>
             </a:extLst>
           </p:cNvPr>
@@ -13688,7 +13688,7 @@
           <p:cNvPr id="7" name="Прямоугольник 6">
             <a:extLst>
               <a:ext uri="{FF2B5EF4-FFF2-40B4-BE49-F238E27FC236}">
-                <a16:creationId xmlns:a16="http://schemas.microsoft.com/office/drawing/2014/main" id="{3CF63372-A739-8512-CCE4-76FEAA224CD6}"/>
+                <a16:creationId xmlns:a16="http://schemas.microsoft.com/office/drawing/2014/main" id="{06A2A53C-6311-30BD-426D-1FE517619B74}"/>
               </a:ext>
             </a:extLst>
           </p:cNvPr>
@@ -13756,7 +13756,7 @@
           <p:cNvPr id="8" name="TextBox 7">
             <a:extLst>
               <a:ext uri="{FF2B5EF4-FFF2-40B4-BE49-F238E27FC236}">
-                <a16:creationId xmlns:a16="http://schemas.microsoft.com/office/drawing/2014/main" id="{F0CD6146-BF13-01DD-F46D-BE8C030F86AC}"/>
+                <a16:creationId xmlns:a16="http://schemas.microsoft.com/office/drawing/2014/main" id="{109EDED5-F152-05F8-F32C-1D5622BAB366}"/>
               </a:ext>
             </a:extLst>
           </p:cNvPr>
@@ -13801,7 +13801,7 @@
           <p:cNvPr id="9" name="TextBox 8">
             <a:extLst>
               <a:ext uri="{FF2B5EF4-FFF2-40B4-BE49-F238E27FC236}">
-                <a16:creationId xmlns:a16="http://schemas.microsoft.com/office/drawing/2014/main" id="{C276F258-0C30-F5D4-2C6A-FC08869A3630}"/>
+                <a16:creationId xmlns:a16="http://schemas.microsoft.com/office/drawing/2014/main" id="{F127FCD4-BC78-1CD6-A3C5-4474FCBC8029}"/>
               </a:ext>
             </a:extLst>
           </p:cNvPr>
@@ -13846,7 +13846,7 @@
           <p:cNvPr id="10" name="TextBox 9">
             <a:extLst>
               <a:ext uri="{FF2B5EF4-FFF2-40B4-BE49-F238E27FC236}">
-                <a16:creationId xmlns:a16="http://schemas.microsoft.com/office/drawing/2014/main" id="{A6FC1063-5929-5213-CE80-3727BCCAEA44}"/>
+                <a16:creationId xmlns:a16="http://schemas.microsoft.com/office/drawing/2014/main" id="{D601A1BF-33BE-2D53-A79A-BB4CCD856BA2}"/>
               </a:ext>
             </a:extLst>
           </p:cNvPr>
@@ -13891,7 +13891,7 @@
           <p:cNvPr id="11" name="TextBox 10">
             <a:extLst>
               <a:ext uri="{FF2B5EF4-FFF2-40B4-BE49-F238E27FC236}">
-                <a16:creationId xmlns:a16="http://schemas.microsoft.com/office/drawing/2014/main" id="{0FD6C440-A776-A12E-EEA0-9C11BD37D6F4}"/>
+                <a16:creationId xmlns:a16="http://schemas.microsoft.com/office/drawing/2014/main" id="{D8E56EDC-83E5-A2C8-D544-F26C5DB1B8E3}"/>
               </a:ext>
             </a:extLst>
           </p:cNvPr>
@@ -13936,7 +13936,7 @@
           <p:cNvPr id="12" name="Прямоугольник 11">
             <a:extLst>
               <a:ext uri="{FF2B5EF4-FFF2-40B4-BE49-F238E27FC236}">
-                <a16:creationId xmlns:a16="http://schemas.microsoft.com/office/drawing/2014/main" id="{356A25C6-9740-CAD8-815A-CB21AEEA8688}"/>
+                <a16:creationId xmlns:a16="http://schemas.microsoft.com/office/drawing/2014/main" id="{631E6980-EDCB-6554-A519-6BEFDAF87DD3}"/>
               </a:ext>
             </a:extLst>
           </p:cNvPr>
@@ -14004,7 +14004,7 @@
           <p:cNvPr id="13" name="TextBox 12">
             <a:extLst>
               <a:ext uri="{FF2B5EF4-FFF2-40B4-BE49-F238E27FC236}">
-                <a16:creationId xmlns:a16="http://schemas.microsoft.com/office/drawing/2014/main" id="{97871DB0-8C98-304D-53BB-FFE462CF3B22}"/>
+                <a16:creationId xmlns:a16="http://schemas.microsoft.com/office/drawing/2014/main" id="{65090DB5-8FC3-F410-97DF-777F4DB60482}"/>
               </a:ext>
             </a:extLst>
           </p:cNvPr>
@@ -14049,7 +14049,7 @@
           <p:cNvPr id="14" name="TextBox 13">
             <a:extLst>
               <a:ext uri="{FF2B5EF4-FFF2-40B4-BE49-F238E27FC236}">
-                <a16:creationId xmlns:a16="http://schemas.microsoft.com/office/drawing/2014/main" id="{81E4A8AF-562E-86EA-C2EA-AB359C5A12AA}"/>
+                <a16:creationId xmlns:a16="http://schemas.microsoft.com/office/drawing/2014/main" id="{44E6362D-C60E-110C-25EF-CEAD3103633B}"/>
               </a:ext>
             </a:extLst>
           </p:cNvPr>
@@ -14094,7 +14094,7 @@
           <p:cNvPr id="15" name="Прямоугольник 14">
             <a:extLst>
               <a:ext uri="{FF2B5EF4-FFF2-40B4-BE49-F238E27FC236}">
-                <a16:creationId xmlns:a16="http://schemas.microsoft.com/office/drawing/2014/main" id="{31642671-6A6F-049A-66C6-88D4A582354B}"/>
+                <a16:creationId xmlns:a16="http://schemas.microsoft.com/office/drawing/2014/main" id="{103DC8CC-DC26-D50E-D845-45316047EE66}"/>
               </a:ext>
             </a:extLst>
           </p:cNvPr>
@@ -14162,7 +14162,7 @@
           <p:cNvPr id="16" name="TextBox 15">
             <a:extLst>
               <a:ext uri="{FF2B5EF4-FFF2-40B4-BE49-F238E27FC236}">
-                <a16:creationId xmlns:a16="http://schemas.microsoft.com/office/drawing/2014/main" id="{1E109A35-1F9E-AA22-E17D-51C96E4FA2FB}"/>
+                <a16:creationId xmlns:a16="http://schemas.microsoft.com/office/drawing/2014/main" id="{D0379AF7-4C46-46CA-4F3A-DE3ECC105D28}"/>
               </a:ext>
             </a:extLst>
           </p:cNvPr>
@@ -14207,7 +14207,7 @@
           <p:cNvPr id="17" name="TextBox 16">
             <a:extLst>
               <a:ext uri="{FF2B5EF4-FFF2-40B4-BE49-F238E27FC236}">
-                <a16:creationId xmlns:a16="http://schemas.microsoft.com/office/drawing/2014/main" id="{68F05A57-1370-6A9A-0C3F-9E63F0FA427B}"/>
+                <a16:creationId xmlns:a16="http://schemas.microsoft.com/office/drawing/2014/main" id="{DF7FA3F1-67BC-E9B4-7C70-D5A04FF1458E}"/>
               </a:ext>
             </a:extLst>
           </p:cNvPr>
@@ -14252,7 +14252,7 @@
           <p:cNvPr id="18" name="Прямоугольник 17">
             <a:extLst>
               <a:ext uri="{FF2B5EF4-FFF2-40B4-BE49-F238E27FC236}">
-                <a16:creationId xmlns:a16="http://schemas.microsoft.com/office/drawing/2014/main" id="{16AB96C5-CF39-4B9A-8B15-713AE6BD9367}"/>
+                <a16:creationId xmlns:a16="http://schemas.microsoft.com/office/drawing/2014/main" id="{C40C4841-7C59-B31D-EC15-8F6CEC49F385}"/>
               </a:ext>
             </a:extLst>
           </p:cNvPr>
@@ -14320,7 +14320,7 @@
           <p:cNvPr id="19" name="TextBox 18">
             <a:extLst>
               <a:ext uri="{FF2B5EF4-FFF2-40B4-BE49-F238E27FC236}">
-                <a16:creationId xmlns:a16="http://schemas.microsoft.com/office/drawing/2014/main" id="{15B574D2-D0BF-170B-7AD9-C680430CFAE8}"/>
+                <a16:creationId xmlns:a16="http://schemas.microsoft.com/office/drawing/2014/main" id="{1D2CBD1C-0D99-0505-E657-5D595EF01DF8}"/>
               </a:ext>
             </a:extLst>
           </p:cNvPr>
@@ -14365,7 +14365,7 @@
           <p:cNvPr id="20" name="TextBox 19">
             <a:extLst>
               <a:ext uri="{FF2B5EF4-FFF2-40B4-BE49-F238E27FC236}">
-                <a16:creationId xmlns:a16="http://schemas.microsoft.com/office/drawing/2014/main" id="{65706DAF-5704-C77E-E255-DD092DEB5308}"/>
+                <a16:creationId xmlns:a16="http://schemas.microsoft.com/office/drawing/2014/main" id="{1F3BB329-053E-8C73-770C-D5481ED81B71}"/>
               </a:ext>
             </a:extLst>
           </p:cNvPr>
@@ -14410,7 +14410,7 @@
           <p:cNvPr id="21" name="Прямоугольник 20">
             <a:extLst>
               <a:ext uri="{FF2B5EF4-FFF2-40B4-BE49-F238E27FC236}">
-                <a16:creationId xmlns:a16="http://schemas.microsoft.com/office/drawing/2014/main" id="{C7BB389F-4571-77D1-11A9-E4F34A7EE47F}"/>
+                <a16:creationId xmlns:a16="http://schemas.microsoft.com/office/drawing/2014/main" id="{4DB78B63-DBFE-0330-8DCD-ACCA014CD1CA}"/>
               </a:ext>
             </a:extLst>
           </p:cNvPr>
@@ -14478,7 +14478,7 @@
           <p:cNvPr id="22" name="TextBox 21">
             <a:extLst>
               <a:ext uri="{FF2B5EF4-FFF2-40B4-BE49-F238E27FC236}">
-                <a16:creationId xmlns:a16="http://schemas.microsoft.com/office/drawing/2014/main" id="{FCA6FD70-209F-9F44-9DB3-FF000BED4FAB}"/>
+                <a16:creationId xmlns:a16="http://schemas.microsoft.com/office/drawing/2014/main" id="{D6FF4E23-34F0-E019-BD13-FED379440A59}"/>
               </a:ext>
             </a:extLst>
           </p:cNvPr>
@@ -14523,7 +14523,7 @@
           <p:cNvPr id="23" name="TextBox 22">
             <a:extLst>
               <a:ext uri="{FF2B5EF4-FFF2-40B4-BE49-F238E27FC236}">
-                <a16:creationId xmlns:a16="http://schemas.microsoft.com/office/drawing/2014/main" id="{2B1FAEA4-8B36-5ED0-B67E-BC5D4EF809D1}"/>
+                <a16:creationId xmlns:a16="http://schemas.microsoft.com/office/drawing/2014/main" id="{CC722F90-D9CD-63C7-0BA1-382097B0C07D}"/>
               </a:ext>
             </a:extLst>
           </p:cNvPr>
@@ -14568,7 +14568,7 @@
           <p:cNvPr id="24" name="Прямоугольник 23">
             <a:extLst>
               <a:ext uri="{FF2B5EF4-FFF2-40B4-BE49-F238E27FC236}">
-                <a16:creationId xmlns:a16="http://schemas.microsoft.com/office/drawing/2014/main" id="{CEA11336-EF42-F075-6610-6E805404B866}"/>
+                <a16:creationId xmlns:a16="http://schemas.microsoft.com/office/drawing/2014/main" id="{35391B51-67F4-EAA9-CE60-64BB0E5FA6F6}"/>
               </a:ext>
             </a:extLst>
           </p:cNvPr>
@@ -14637,7 +14637,7 @@
             <a:hlinkClick r:id="" action="ppaction://media"/>
             <a:extLst>
               <a:ext uri="{FF2B5EF4-FFF2-40B4-BE49-F238E27FC236}">
-                <a16:creationId xmlns:a16="http://schemas.microsoft.com/office/drawing/2014/main" id="{5B84F06A-13E7-42CC-890A-B6B64454665E}"/>
+                <a16:creationId xmlns:a16="http://schemas.microsoft.com/office/drawing/2014/main" id="{9AF5BF7D-E4A3-8BB9-D674-763F8E0A006C}"/>
               </a:ext>
             </a:extLst>
           </p:cNvPr>
@@ -14679,7 +14679,7 @@
           <p:cNvPr id="26" name="TextBox 25">
             <a:extLst>
               <a:ext uri="{FF2B5EF4-FFF2-40B4-BE49-F238E27FC236}">
-                <a16:creationId xmlns:a16="http://schemas.microsoft.com/office/drawing/2014/main" id="{8C28F901-8C14-89A7-5F8F-56AEF2F72A53}"/>
+                <a16:creationId xmlns:a16="http://schemas.microsoft.com/office/drawing/2014/main" id="{977D068C-82F0-D84A-A5DC-CCE26B7A2BE9}"/>
               </a:ext>
             </a:extLst>
           </p:cNvPr>
@@ -14714,7 +14714,7 @@
                 </a:solidFill>
                 <a:latin typeface="Times New Roman" panose="02020603050405020304" pitchFamily="18" charset="0"/>
               </a:rPr>
-              <a:t>Продолжительность — около 25 секунд</a:t>
+              <a:t>Продолжительность — около 23 секунд</a:t>
             </a:r>
           </a:p>
         </p:txBody>
@@ -14722,7 +14722,7 @@
     </p:spTree>
     <p:extLst>
       <p:ext uri="{BB962C8B-B14F-4D97-AF65-F5344CB8AC3E}">
-        <p14:creationId xmlns:p14="http://schemas.microsoft.com/office/powerpoint/2010/main" val="1719661389"/>
+        <p14:creationId xmlns:p14="http://schemas.microsoft.com/office/powerpoint/2010/main" val="3167539879"/>
       </p:ext>
     </p:extLst>
   </p:cSld>
@@ -14757,7 +14757,7 @@
                                   <p:childTnLst>
                                     <p:cmd type="call" cmd="playFrom(0.0)">
                                       <p:cBhvr>
-                                        <p:cTn id="6" dur="24123" fill="hold"/>
+                                        <p:cTn id="6" dur="22736" fill="hold"/>
                                         <p:tgtEl>
                                           <p:spTgt spid="25"/>
                                         </p:tgtEl>
@@ -14889,7 +14889,7 @@
           <p:cNvPr id="2" name="Прямоугольник 1">
             <a:extLst>
               <a:ext uri="{FF2B5EF4-FFF2-40B4-BE49-F238E27FC236}">
-                <a16:creationId xmlns:a16="http://schemas.microsoft.com/office/drawing/2014/main" id="{370A6BE6-A45E-F6C9-5087-ED8AA83828FF}"/>
+                <a16:creationId xmlns:a16="http://schemas.microsoft.com/office/drawing/2014/main" id="{1348F4D2-544F-0872-6625-B9EFB664C7B3}"/>
               </a:ext>
             </a:extLst>
           </p:cNvPr>
@@ -14957,7 +14957,7 @@
           <p:cNvPr id="3" name="TextBox 2">
             <a:extLst>
               <a:ext uri="{FF2B5EF4-FFF2-40B4-BE49-F238E27FC236}">
-                <a16:creationId xmlns:a16="http://schemas.microsoft.com/office/drawing/2014/main" id="{18E37ABD-F498-E330-43DF-1EA636407D9F}"/>
+                <a16:creationId xmlns:a16="http://schemas.microsoft.com/office/drawing/2014/main" id="{507E3DAC-53FB-9CF9-ED31-C56E7E187E06}"/>
               </a:ext>
             </a:extLst>
           </p:cNvPr>
@@ -15002,7 +15002,7 @@
           <p:cNvPr id="4" name="TextBox 3">
             <a:extLst>
               <a:ext uri="{FF2B5EF4-FFF2-40B4-BE49-F238E27FC236}">
-                <a16:creationId xmlns:a16="http://schemas.microsoft.com/office/drawing/2014/main" id="{FA1631CE-0173-EC5D-53F1-2877FC093CDD}"/>
+                <a16:creationId xmlns:a16="http://schemas.microsoft.com/office/drawing/2014/main" id="{1BFC3D8C-3ECB-A2FC-7BC5-E006F4156DCB}"/>
               </a:ext>
             </a:extLst>
           </p:cNvPr>
@@ -15047,7 +15047,7 @@
           <p:cNvPr id="5" name="Прямоугольник 4">
             <a:extLst>
               <a:ext uri="{FF2B5EF4-FFF2-40B4-BE49-F238E27FC236}">
-                <a16:creationId xmlns:a16="http://schemas.microsoft.com/office/drawing/2014/main" id="{E8984FB5-02CB-2514-25E9-395CC918FC7F}"/>
+                <a16:creationId xmlns:a16="http://schemas.microsoft.com/office/drawing/2014/main" id="{D73188BD-1E10-2B12-64D1-D3846C2F09AC}"/>
               </a:ext>
             </a:extLst>
           </p:cNvPr>
@@ -15115,7 +15115,7 @@
           <p:cNvPr id="6" name="TextBox 5">
             <a:extLst>
               <a:ext uri="{FF2B5EF4-FFF2-40B4-BE49-F238E27FC236}">
-                <a16:creationId xmlns:a16="http://schemas.microsoft.com/office/drawing/2014/main" id="{4FB02079-F3A8-D6EF-EB32-2E5819A757F3}"/>
+                <a16:creationId xmlns:a16="http://schemas.microsoft.com/office/drawing/2014/main" id="{EBA438BB-2B43-5D16-6C05-200B4A6B7483}"/>
               </a:ext>
             </a:extLst>
           </p:cNvPr>
@@ -15160,7 +15160,7 @@
           <p:cNvPr id="7" name="TextBox 6">
             <a:extLst>
               <a:ext uri="{FF2B5EF4-FFF2-40B4-BE49-F238E27FC236}">
-                <a16:creationId xmlns:a16="http://schemas.microsoft.com/office/drawing/2014/main" id="{99EE1A85-B859-1660-8799-D0759A924559}"/>
+                <a16:creationId xmlns:a16="http://schemas.microsoft.com/office/drawing/2014/main" id="{5184F277-14C4-7E25-022A-9C2F851524E8}"/>
               </a:ext>
             </a:extLst>
           </p:cNvPr>
@@ -15205,7 +15205,7 @@
           <p:cNvPr id="8" name="TextBox 7">
             <a:extLst>
               <a:ext uri="{FF2B5EF4-FFF2-40B4-BE49-F238E27FC236}">
-                <a16:creationId xmlns:a16="http://schemas.microsoft.com/office/drawing/2014/main" id="{10195FA9-FCDE-0DDD-B39C-884C33AF4A56}"/>
+                <a16:creationId xmlns:a16="http://schemas.microsoft.com/office/drawing/2014/main" id="{32211BEF-8103-1AC0-A945-CCD58166FEC6}"/>
               </a:ext>
             </a:extLst>
           </p:cNvPr>
@@ -15250,7 +15250,7 @@
           <p:cNvPr id="9" name="TextBox 8">
             <a:extLst>
               <a:ext uri="{FF2B5EF4-FFF2-40B4-BE49-F238E27FC236}">
-                <a16:creationId xmlns:a16="http://schemas.microsoft.com/office/drawing/2014/main" id="{7FD14B2E-0713-6F1F-0B6A-6AC2F564DC7C}"/>
+                <a16:creationId xmlns:a16="http://schemas.microsoft.com/office/drawing/2014/main" id="{EF565980-57D7-106E-F067-7DF9C0A65DD2}"/>
               </a:ext>
             </a:extLst>
           </p:cNvPr>
@@ -15295,7 +15295,7 @@
           <p:cNvPr id="10" name="TextBox 9">
             <a:extLst>
               <a:ext uri="{FF2B5EF4-FFF2-40B4-BE49-F238E27FC236}">
-                <a16:creationId xmlns:a16="http://schemas.microsoft.com/office/drawing/2014/main" id="{202F430C-B0AC-BBB0-516F-3837B910A1A6}"/>
+                <a16:creationId xmlns:a16="http://schemas.microsoft.com/office/drawing/2014/main" id="{8D74B190-1E6B-4B06-8899-8D36AFD65139}"/>
               </a:ext>
             </a:extLst>
           </p:cNvPr>
@@ -15340,7 +15340,7 @@
           <p:cNvPr id="11" name="Прямоугольник 10">
             <a:extLst>
               <a:ext uri="{FF2B5EF4-FFF2-40B4-BE49-F238E27FC236}">
-                <a16:creationId xmlns:a16="http://schemas.microsoft.com/office/drawing/2014/main" id="{D3BC5E66-5647-5CFB-C6E7-D37DC6534A32}"/>
+                <a16:creationId xmlns:a16="http://schemas.microsoft.com/office/drawing/2014/main" id="{494DB3FB-975C-3336-F09A-EA5FA30D2BBF}"/>
               </a:ext>
             </a:extLst>
           </p:cNvPr>
@@ -15408,7 +15408,7 @@
           <p:cNvPr id="13" name="Рисунок 12">
             <a:extLst>
               <a:ext uri="{FF2B5EF4-FFF2-40B4-BE49-F238E27FC236}">
-                <a16:creationId xmlns:a16="http://schemas.microsoft.com/office/drawing/2014/main" id="{4BF7EAB6-23DA-1AE4-6816-F322CDD0FED1}"/>
+                <a16:creationId xmlns:a16="http://schemas.microsoft.com/office/drawing/2014/main" id="{0DFE247A-5DEA-71DD-8265-A25B2D38390C}"/>
               </a:ext>
             </a:extLst>
           </p:cNvPr>
@@ -15444,7 +15444,7 @@
           <p:cNvPr id="14" name="TextBox 13">
             <a:extLst>
               <a:ext uri="{FF2B5EF4-FFF2-40B4-BE49-F238E27FC236}">
-                <a16:creationId xmlns:a16="http://schemas.microsoft.com/office/drawing/2014/main" id="{A6A23FB9-63DC-5757-ACEF-1B859EEC4124}"/>
+                <a16:creationId xmlns:a16="http://schemas.microsoft.com/office/drawing/2014/main" id="{5C19D437-8411-6C22-00F4-DE2DBB165904}"/>
               </a:ext>
             </a:extLst>
           </p:cNvPr>
@@ -15489,7 +15489,7 @@
           <p:cNvPr id="15" name="TextBox 14">
             <a:extLst>
               <a:ext uri="{FF2B5EF4-FFF2-40B4-BE49-F238E27FC236}">
-                <a16:creationId xmlns:a16="http://schemas.microsoft.com/office/drawing/2014/main" id="{B9A1A2DD-0FC9-807E-5E45-3F053C40D00F}"/>
+                <a16:creationId xmlns:a16="http://schemas.microsoft.com/office/drawing/2014/main" id="{5EBC3468-6FE7-737F-71D6-BE06941ABFEF}"/>
               </a:ext>
             </a:extLst>
           </p:cNvPr>
@@ -15538,7 +15538,7 @@
     </p:spTree>
     <p:extLst>
       <p:ext uri="{BB962C8B-B14F-4D97-AF65-F5344CB8AC3E}">
-        <p14:creationId xmlns:p14="http://schemas.microsoft.com/office/powerpoint/2010/main" val="918338870"/>
+        <p14:creationId xmlns:p14="http://schemas.microsoft.com/office/powerpoint/2010/main" val="2722132002"/>
       </p:ext>
     </p:extLst>
   </p:cSld>
